--- a/public/Trishna 3D Pitch Deck.pptx
+++ b/public/Trishna 3D Pitch Deck.pptx
@@ -2,19 +2,17 @@
 <file path=ppt/presentation.xml><?xml version="1.0" encoding="utf-8"?>
 <p:presentation xmlns:p="http://schemas.openxmlformats.org/presentationml/2006/main">
   <p:sldMasterIdLst>
-    <p:sldMasterId xmlns:r="http://schemas.openxmlformats.org/officeDocument/2006/relationships" id="2147483648" r:id="Rd9613db30aeb4aeb"/>
+    <p:sldMasterId xmlns:r="http://schemas.openxmlformats.org/officeDocument/2006/relationships" id="2147483648" r:id="R166a2b10c7924b86"/>
   </p:sldMasterIdLst>
   <p:notesMasterIdLst>
-    <p:notesMasterId xmlns:r="http://schemas.openxmlformats.org/officeDocument/2006/relationships" r:id="R79d4d4eec4a2498f"/>
+    <p:notesMasterId xmlns:r="http://schemas.openxmlformats.org/officeDocument/2006/relationships" r:id="R3eced43bc8374478"/>
   </p:notesMasterIdLst>
   <p:sldIdLst>
-    <p:sldId xmlns:r="http://schemas.openxmlformats.org/officeDocument/2006/relationships" id="256" r:id="R6c7bc022db9d40d5"/>
-    <p:sldId xmlns:r="http://schemas.openxmlformats.org/officeDocument/2006/relationships" id="257" r:id="R55e0cfdce12e47d3"/>
-    <p:sldId xmlns:r="http://schemas.openxmlformats.org/officeDocument/2006/relationships" id="258" r:id="Rd7b1b25771ed44df"/>
-    <p:sldId xmlns:r="http://schemas.openxmlformats.org/officeDocument/2006/relationships" id="259" r:id="R5a91f32f212c48cd"/>
-    <p:sldId xmlns:r="http://schemas.openxmlformats.org/officeDocument/2006/relationships" id="260" r:id="Rc0566bafffac4d40"/>
-    <p:sldId xmlns:r="http://schemas.openxmlformats.org/officeDocument/2006/relationships" id="261" r:id="R3a2b95c65a804397"/>
-    <p:sldId xmlns:r="http://schemas.openxmlformats.org/officeDocument/2006/relationships" id="262" r:id="Rb65080e5bf9e4631"/>
+    <p:sldId xmlns:r="http://schemas.openxmlformats.org/officeDocument/2006/relationships" id="256" r:id="R7e13d094800948a8"/>
+    <p:sldId xmlns:r="http://schemas.openxmlformats.org/officeDocument/2006/relationships" id="257" r:id="R38cf708bcedd406c"/>
+    <p:sldId xmlns:r="http://schemas.openxmlformats.org/officeDocument/2006/relationships" id="258" r:id="R88207dcf0f3f4ad3"/>
+    <p:sldId xmlns:r="http://schemas.openxmlformats.org/officeDocument/2006/relationships" id="259" r:id="Recf7db76bc774e25"/>
+    <p:sldId xmlns:r="http://schemas.openxmlformats.org/officeDocument/2006/relationships" id="260" r:id="R58825fd221e74f14"/>
   </p:sldIdLst>
   <p:sldSz cx="12192000" cy="6858000"/>
   <p:notesSz cx="6858000" cy="9144000"/>
@@ -448,7 +446,7 @@
           <a:lstStyle xmlns:a="http://schemas.openxmlformats.org/drawingml/2006/main"/>
           <a:p xmlns:a="http://schemas.openxmlformats.org/drawingml/2006/main">
             <a:r>
-              <a:t>Open with the user journey: a person can read a floor plan but cannot easily feel the spaces. Trishna 3D turns that drawing into a model people can inspect and walk through.</a:t>
+              <a:t>Introduce Trishna 3D in one sentence: it turns architectural drawings into 3D spaces people can explore. Set up the four parts of the pitch.</a:t>
             </a:r>
           </a:p>
           <a:p xmlns:a="http://schemas.openxmlformats.org/drawingml/2006/main">
@@ -528,7 +526,7 @@
           <a:lstStyle xmlns:a="http://schemas.openxmlformats.org/drawingml/2006/main"/>
           <a:p xmlns:a="http://schemas.openxmlformats.org/drawingml/2006/main">
             <a:r>
-              <a:t>The sample drawing contains three floors and a 10 by 14 metre footprint. A static view captures layout, but not the experience of moving through the home.</a:t>
+              <a:t>Point to the sample drawing. It describes a 10 by 14 metre, three-floor home, but its depth and circulation must still be imagined from a flat view.</a:t>
             </a:r>
           </a:p>
           <a:p xmlns:a="http://schemas.openxmlformats.org/drawingml/2006/main">
@@ -608,7 +606,7 @@
           <a:lstStyle xmlns:a="http://schemas.openxmlformats.org/drawingml/2006/main"/>
           <a:p xmlns:a="http://schemas.openxmlformats.org/drawingml/2006/main">
             <a:r>
-              <a:t>Explain the experience as three actions: upload, generate a spatial model, then explore it in orbit or first-person modes. Live Vision parsing can use Gemini; built-in sample models work without an API key.</a:t>
+              <a:t>Describe the proposed solution as an end-to-end flow. PDF.js handles plan documents; Gemini is optional for live interpretation of uploads. Three.js renders the assembled model with orbit and first-person navigation.</a:t>
             </a:r>
           </a:p>
           <a:p xmlns:a="http://schemas.openxmlformats.org/drawingml/2006/main">
@@ -688,7 +686,7 @@
           <a:lstStyle xmlns:a="http://schemas.openxmlformats.org/drawingml/2006/main"/>
           <a:p xmlns:a="http://schemas.openxmlformats.org/drawingml/2006/main">
             <a:r>
-              <a:t>Walk through the browser pipeline. PDF.js handles document parsing. Gemini is an optional service for live vision analysis of custom uploads; built-in samples allow an offline walkthrough.</a:t>
+              <a:t>Separate what exists from what is planned. The current prototype runs in a browser and demonstrates a three-floor sample. DXF/IFC export and WebXR are future roadmap items. Custom-plan vision analysis depends on a Gemini key, and complex drawings need more validation.</a:t>
             </a:r>
           </a:p>
           <a:p xmlns:a="http://schemas.openxmlformats.org/drawingml/2006/main">
@@ -698,7 +696,7 @@
           </a:p>
           <a:p xmlns:a="http://schemas.openxmlformats.org/drawingml/2006/main">
             <a:r>
-              <a:t>Source: README.md; src/utils/parseFloorPlanPdf.ts; src/utils/geminiPlanAnalyzer.ts; src/components/BuildingViewer3D.tsx</a:t>
+              <a:t>Source: README.md; SUBMISSION.md; AI_USAGE.md</a:t>
             </a:r>
           </a:p>
         </p:txBody>
@@ -768,7 +766,7 @@
           <a:lstStyle xmlns:a="http://schemas.openxmlformats.org/drawingml/2006/main"/>
           <a:p xmlns:a="http://schemas.openxmlformats.org/drawingml/2006/main">
             <a:r>
-              <a:t>Use the live demo to show the progressive build, then switch to first-person and climb the connected stairs. The seven-second duration belongs to the bundled residence build animation.</a:t>
+              <a:t>Frame sustainability honestly. Earlier spatial review may help teams identify layout changes before construction, but this prototype has not measured material, energy or carbon savings. Browser-based sample rendering avoids a dedicated cloud render queue; user devices still consume energy.</a:t>
             </a:r>
           </a:p>
           <a:p xmlns:a="http://schemas.openxmlformats.org/drawingml/2006/main">
@@ -778,167 +776,7 @@
           </a:p>
           <a:p xmlns:a="http://schemas.openxmlformats.org/drawingml/2006/main">
             <a:r>
-              <a:t>Source: src/components/BuildingViewer3D.tsx; src/data/sampleResidencePlan.ts; SUBMISSION.md</a:t>
-            </a:r>
-          </a:p>
-        </p:txBody>
-      </p:sp>
-      <p:sp>
-        <p:nvSpPr>
-          <p:cNvPr id="4" name="Slide Number Placeholder 3"/>
-          <p:cNvSpPr>
-            <a:spLocks xmlns:a="http://schemas.openxmlformats.org/drawingml/2006/main" noGrp="1"/>
-          </p:cNvSpPr>
-          <p:nvPr>
-            <p:ph type="sldNum" idx="5"/>
-          </p:nvPr>
-        </p:nvSpPr>
-        <p:spPr/>
-        <p:txBody>
-          <a:bodyPr xmlns:a="http://schemas.openxmlformats.org/drawingml/2006/main"/>
-          <a:lstStyle xmlns:a="http://schemas.openxmlformats.org/drawingml/2006/main"/>
-          <a:p xmlns:a="http://schemas.openxmlformats.org/drawingml/2006/main"/>
-        </p:txBody>
-      </p:sp>
-    </p:spTree>
-  </p:cSld>
-  <p:clrMapOvr>
-    <a:masterClrMapping xmlns:a="http://schemas.openxmlformats.org/drawingml/2006/main"/>
-  </p:clrMapOvr>
-</p:notes>
-</file>
-
-<file path=ppt/notesSlides/notesSlide6.xml><?xml version="1.0" encoding="utf-8"?>
-<p:notes xmlns:p="http://schemas.openxmlformats.org/presentationml/2006/main">
-  <p:cSld>
-    <p:spTree>
-      <p:nvGrpSpPr>
-        <p:cNvPr id="1" name=""/>
-        <p:cNvGrpSpPr/>
-        <p:nvPr/>
-      </p:nvGrpSpPr>
-      <p:grpSpPr>
-        <a:xfrm xmlns:a="http://schemas.openxmlformats.org/drawingml/2006/main"/>
-      </p:grpSpPr>
-      <p:sp>
-        <p:nvSpPr>
-          <p:cNvPr id="2" name="Slide Image Placeholder 1"/>
-          <p:cNvSpPr>
-            <a:spLocks xmlns:a="http://schemas.openxmlformats.org/drawingml/2006/main" noGrp="1"/>
-          </p:cNvSpPr>
-          <p:nvPr>
-            <p:ph type="sldImg" idx="0"/>
-          </p:nvPr>
-        </p:nvSpPr>
-        <p:spPr/>
-      </p:sp>
-      <p:sp>
-        <p:nvSpPr>
-          <p:cNvPr id="3" name="Notes Placeholder 2"/>
-          <p:cNvSpPr>
-            <a:spLocks xmlns:a="http://schemas.openxmlformats.org/drawingml/2006/main" noGrp="1"/>
-          </p:cNvSpPr>
-          <p:nvPr>
-            <p:ph type="body" idx="1"/>
-          </p:nvPr>
-        </p:nvSpPr>
-        <p:spPr/>
-        <p:txBody>
-          <a:bodyPr xmlns:a="http://schemas.openxmlformats.org/drawingml/2006/main"/>
-          <a:lstStyle xmlns:a="http://schemas.openxmlformats.org/drawingml/2006/main"/>
-          <a:p xmlns:a="http://schemas.openxmlformats.org/drawingml/2006/main">
-            <a:r>
-              <a:t>Show that the system is a web app: React and TypeScript coordinate the user experience, PDF.js parses documents, Gemini vision is optional, and Three.js renders the navigable model.</a:t>
-            </a:r>
-          </a:p>
-          <a:p xmlns:a="http://schemas.openxmlformats.org/drawingml/2006/main">
-            <a:r>
-              <a:t/>
-            </a:r>
-          </a:p>
-          <a:p xmlns:a="http://schemas.openxmlformats.org/drawingml/2006/main">
-            <a:r>
-              <a:t>Source: README.md; package.json; src/utils/parseFloorPlanPdf.ts; src/utils/geminiPlanAnalyzer.ts; src/components/BuildingViewer3D.tsx</a:t>
-            </a:r>
-          </a:p>
-        </p:txBody>
-      </p:sp>
-      <p:sp>
-        <p:nvSpPr>
-          <p:cNvPr id="4" name="Slide Number Placeholder 3"/>
-          <p:cNvSpPr>
-            <a:spLocks xmlns:a="http://schemas.openxmlformats.org/drawingml/2006/main" noGrp="1"/>
-          </p:cNvSpPr>
-          <p:nvPr>
-            <p:ph type="sldNum" idx="5"/>
-          </p:nvPr>
-        </p:nvSpPr>
-        <p:spPr/>
-        <p:txBody>
-          <a:bodyPr xmlns:a="http://schemas.openxmlformats.org/drawingml/2006/main"/>
-          <a:lstStyle xmlns:a="http://schemas.openxmlformats.org/drawingml/2006/main"/>
-          <a:p xmlns:a="http://schemas.openxmlformats.org/drawingml/2006/main"/>
-        </p:txBody>
-      </p:sp>
-    </p:spTree>
-  </p:cSld>
-  <p:clrMapOvr>
-    <a:masterClrMapping xmlns:a="http://schemas.openxmlformats.org/drawingml/2006/main"/>
-  </p:clrMapOvr>
-</p:notes>
-</file>
-
-<file path=ppt/notesSlides/notesSlide7.xml><?xml version="1.0" encoding="utf-8"?>
-<p:notes xmlns:p="http://schemas.openxmlformats.org/presentationml/2006/main">
-  <p:cSld>
-    <p:spTree>
-      <p:nvGrpSpPr>
-        <p:cNvPr id="1" name=""/>
-        <p:cNvGrpSpPr/>
-        <p:nvPr/>
-      </p:nvGrpSpPr>
-      <p:grpSpPr>
-        <a:xfrm xmlns:a="http://schemas.openxmlformats.org/drawingml/2006/main"/>
-      </p:grpSpPr>
-      <p:sp>
-        <p:nvSpPr>
-          <p:cNvPr id="2" name="Slide Image Placeholder 1"/>
-          <p:cNvSpPr>
-            <a:spLocks xmlns:a="http://schemas.openxmlformats.org/drawingml/2006/main" noGrp="1"/>
-          </p:cNvSpPr>
-          <p:nvPr>
-            <p:ph type="sldImg" idx="0"/>
-          </p:nvPr>
-        </p:nvSpPr>
-        <p:spPr/>
-      </p:sp>
-      <p:sp>
-        <p:nvSpPr>
-          <p:cNvPr id="3" name="Notes Placeholder 2"/>
-          <p:cNvSpPr>
-            <a:spLocks xmlns:a="http://schemas.openxmlformats.org/drawingml/2006/main" noGrp="1"/>
-          </p:cNvSpPr>
-          <p:nvPr>
-            <p:ph type="body" idx="1"/>
-          </p:nvPr>
-        </p:nvSpPr>
-        <p:spPr/>
-        <p:txBody>
-          <a:bodyPr xmlns:a="http://schemas.openxmlformats.org/drawingml/2006/main"/>
-          <a:lstStyle xmlns:a="http://schemas.openxmlformats.org/drawingml/2006/main"/>
-          <a:p xmlns:a="http://schemas.openxmlformats.org/drawingml/2006/main">
-            <a:r>
-              <a:t>Close on what changes for the audience: people can understand the space before construction begins. Invite the judges to try the live local demo and climb between levels.</a:t>
-            </a:r>
-          </a:p>
-          <a:p xmlns:a="http://schemas.openxmlformats.org/drawingml/2006/main">
-            <a:r>
-              <a:t/>
-            </a:r>
-          </a:p>
-          <a:p xmlns:a="http://schemas.openxmlformats.org/drawingml/2006/main">
-            <a:r>
-              <a:t>Source: README.md; SUBMISSION.md; src/components/BuildingViewer3D.tsx</a:t>
+              <a:t>Source: README.md; src/components/BuildingViewer3D.tsx; limitation disclosure authored for this pitch.</a:t>
             </a:r>
           </a:p>
         </p:txBody>
@@ -985,7 +823,7 @@
           <p:cNvPr id="3" name="Title">
             <a:extLst xmlns:a="http://schemas.openxmlformats.org/drawingml/2006/main">
               <a:ext uri="{FF2B5EF4-FFF2-40B4-BE49-F238E27FC236}">
-                <a16:creationId xmlns:a16="http://schemas.microsoft.com/office/drawing/2014/main" id="{B0C1683E-BC9D-429D-B365-982B914A6C5E}"/>
+                <a16:creationId xmlns:a16="http://schemas.microsoft.com/office/drawing/2014/main" id="{6CBFC78B-E114-4D0F-8A76-6CBC001ECDF1}"/>
               </a:ext>
             </a:extLst>
           </p:cNvPr>
@@ -1142,7 +980,7 @@
           <p:cNvPr id="2" name="Subtitle">
             <a:extLst xmlns:a="http://schemas.openxmlformats.org/drawingml/2006/main">
               <a:ext uri="{FF2B5EF4-FFF2-40B4-BE49-F238E27FC236}">
-                <a16:creationId xmlns:a16="http://schemas.microsoft.com/office/drawing/2014/main" id="{9659B6EA-A852-43DA-AF8B-1D4EF9EB9EA1}"/>
+                <a16:creationId xmlns:a16="http://schemas.microsoft.com/office/drawing/2014/main" id="{F1773B8B-9127-42DA-81A3-8F892697297E}"/>
               </a:ext>
             </a:extLst>
           </p:cNvPr>
@@ -1316,7 +1154,7 @@
           <p:cNvPr id="2" name="Section title">
             <a:extLst xmlns:a="http://schemas.openxmlformats.org/drawingml/2006/main">
               <a:ext uri="{FF2B5EF4-FFF2-40B4-BE49-F238E27FC236}">
-                <a16:creationId xmlns:a16="http://schemas.microsoft.com/office/drawing/2014/main" id="{93C62B44-8C36-4F1C-A912-DEB5EE733614}"/>
+                <a16:creationId xmlns:a16="http://schemas.microsoft.com/office/drawing/2014/main" id="{86A99678-323C-4959-9FFD-B6C28345BCD0}"/>
               </a:ext>
             </a:extLst>
           </p:cNvPr>
@@ -1490,7 +1328,7 @@
           <p:cNvPr id="3" name="Title">
             <a:extLst xmlns:a="http://schemas.openxmlformats.org/drawingml/2006/main">
               <a:ext uri="{FF2B5EF4-FFF2-40B4-BE49-F238E27FC236}">
-                <a16:creationId xmlns:a16="http://schemas.microsoft.com/office/drawing/2014/main" id="{55F8FEA4-92CB-4E78-8F10-414B6DCB9E4E}"/>
+                <a16:creationId xmlns:a16="http://schemas.microsoft.com/office/drawing/2014/main" id="{DADD2401-A63E-4759-B4DA-EE8E24B88E84}"/>
               </a:ext>
             </a:extLst>
           </p:cNvPr>
@@ -1647,7 +1485,7 @@
           <p:cNvPr id="2" name="Body">
             <a:extLst xmlns:a="http://schemas.openxmlformats.org/drawingml/2006/main">
               <a:ext uri="{FF2B5EF4-FFF2-40B4-BE49-F238E27FC236}">
-                <a16:creationId xmlns:a16="http://schemas.microsoft.com/office/drawing/2014/main" id="{7A78A565-0BA2-4B7F-8DA4-0596F9E3914E}"/>
+                <a16:creationId xmlns:a16="http://schemas.microsoft.com/office/drawing/2014/main" id="{3A4A072B-51D8-43E2-A65D-63F7DD1388F7}"/>
               </a:ext>
             </a:extLst>
           </p:cNvPr>
@@ -1821,7 +1659,7 @@
           <p:cNvPr id="4" name="Title">
             <a:extLst xmlns:a="http://schemas.openxmlformats.org/drawingml/2006/main">
               <a:ext uri="{FF2B5EF4-FFF2-40B4-BE49-F238E27FC236}">
-                <a16:creationId xmlns:a16="http://schemas.microsoft.com/office/drawing/2014/main" id="{AE584F20-338F-4CC9-A29B-AAFED16EBC75}"/>
+                <a16:creationId xmlns:a16="http://schemas.microsoft.com/office/drawing/2014/main" id="{D03085BF-7E97-4EAF-8D17-1B25B74473E5}"/>
               </a:ext>
             </a:extLst>
           </p:cNvPr>
@@ -1978,7 +1816,7 @@
           <p:cNvPr id="2" name="Left column">
             <a:extLst xmlns:a="http://schemas.openxmlformats.org/drawingml/2006/main">
               <a:ext uri="{FF2B5EF4-FFF2-40B4-BE49-F238E27FC236}">
-                <a16:creationId xmlns:a16="http://schemas.microsoft.com/office/drawing/2014/main" id="{34E2DE08-094A-4E39-B3F8-A6F1037B4F51}"/>
+                <a16:creationId xmlns:a16="http://schemas.microsoft.com/office/drawing/2014/main" id="{8D97B266-588E-4B52-9A6A-4192A2985FB4}"/>
               </a:ext>
             </a:extLst>
           </p:cNvPr>
@@ -2135,7 +1973,7 @@
           <p:cNvPr id="3" name="Right column">
             <a:extLst xmlns:a="http://schemas.openxmlformats.org/drawingml/2006/main">
               <a:ext uri="{FF2B5EF4-FFF2-40B4-BE49-F238E27FC236}">
-                <a16:creationId xmlns:a16="http://schemas.microsoft.com/office/drawing/2014/main" id="{E683FCA2-4C36-456D-B46C-1CBC7C2EBAC6}"/>
+                <a16:creationId xmlns:a16="http://schemas.microsoft.com/office/drawing/2014/main" id="{242FA125-627E-40BA-8FE7-9CB7986B3315}"/>
               </a:ext>
             </a:extLst>
           </p:cNvPr>
@@ -2309,7 +2147,7 @@
           <p:cNvPr id="3" name="Title">
             <a:extLst xmlns:a="http://schemas.openxmlformats.org/drawingml/2006/main">
               <a:ext uri="{FF2B5EF4-FFF2-40B4-BE49-F238E27FC236}">
-                <a16:creationId xmlns:a16="http://schemas.microsoft.com/office/drawing/2014/main" id="{890A9B08-948C-4283-A752-42B2BE864141}"/>
+                <a16:creationId xmlns:a16="http://schemas.microsoft.com/office/drawing/2014/main" id="{BEB6E2A4-6724-4201-99DF-9EAA6D0A7E43}"/>
               </a:ext>
             </a:extLst>
           </p:cNvPr>
@@ -2466,7 +2304,7 @@
           <p:cNvPr id="2" name="Left column">
             <a:extLst xmlns:a="http://schemas.openxmlformats.org/drawingml/2006/main">
               <a:ext uri="{FF2B5EF4-FFF2-40B4-BE49-F238E27FC236}">
-                <a16:creationId xmlns:a16="http://schemas.microsoft.com/office/drawing/2014/main" id="{73A6B71F-3BE8-4CDF-8B5C-621898864172}"/>
+                <a16:creationId xmlns:a16="http://schemas.microsoft.com/office/drawing/2014/main" id="{5F2DB10D-EEF2-42D6-8E66-668767A90680}"/>
               </a:ext>
             </a:extLst>
           </p:cNvPr>
@@ -2661,12 +2499,12 @@
   </p:cSld>
   <p:clrMap bg1="lt1" tx1="dk1" bg2="lt2" tx2="dk2" accent1="accent1" accent2="accent2" accent3="accent3" accent4="accent4" accent5="accent5" accent6="accent6" hlink="hlink" folHlink="folHlink"/>
   <p:sldLayoutIdLst>
-    <p:sldLayoutId xmlns:r="http://schemas.openxmlformats.org/officeDocument/2006/relationships" id="2147483649" r:id="Red326f14efcc4dff"/>
-    <p:sldLayoutId xmlns:r="http://schemas.openxmlformats.org/officeDocument/2006/relationships" id="2147483650" r:id="R44bb59567b0c4bed"/>
-    <p:sldLayoutId xmlns:r="http://schemas.openxmlformats.org/officeDocument/2006/relationships" id="2147483651" r:id="R08849c9d66814bcd"/>
-    <p:sldLayoutId xmlns:r="http://schemas.openxmlformats.org/officeDocument/2006/relationships" id="2147483652" r:id="Rd6e28b1e93ab4725"/>
-    <p:sldLayoutId xmlns:r="http://schemas.openxmlformats.org/officeDocument/2006/relationships" id="2147483653" r:id="R9dec1ed9faa54f61"/>
-    <p:sldLayoutId xmlns:r="http://schemas.openxmlformats.org/officeDocument/2006/relationships" id="2147483654" r:id="R227e4ef526c84f76"/>
+    <p:sldLayoutId xmlns:r="http://schemas.openxmlformats.org/officeDocument/2006/relationships" id="2147483649" r:id="R5c3364644b7f45c4"/>
+    <p:sldLayoutId xmlns:r="http://schemas.openxmlformats.org/officeDocument/2006/relationships" id="2147483650" r:id="Rf912d4bd72d043ce"/>
+    <p:sldLayoutId xmlns:r="http://schemas.openxmlformats.org/officeDocument/2006/relationships" id="2147483651" r:id="R52e1ed90f41146f8"/>
+    <p:sldLayoutId xmlns:r="http://schemas.openxmlformats.org/officeDocument/2006/relationships" id="2147483652" r:id="Rf9db9e56e2244e3f"/>
+    <p:sldLayoutId xmlns:r="http://schemas.openxmlformats.org/officeDocument/2006/relationships" id="2147483653" r:id="R9861bab9da4744ca"/>
+    <p:sldLayoutId xmlns:r="http://schemas.openxmlformats.org/officeDocument/2006/relationships" id="2147483654" r:id="R74b2759fd8d249b2"/>
   </p:sldLayoutIdLst>
   <p:txStyles>
     <p:titleStyle>
@@ -3217,7 +3055,7 @@
           <p:cNvPr id="12" name="">
             <a:extLst xmlns:a="http://schemas.openxmlformats.org/drawingml/2006/main">
               <a:ext uri="{FF2B5EF4-FFF2-40B4-BE49-F238E27FC236}">
-                <a16:creationId xmlns:a16="http://schemas.microsoft.com/office/drawing/2014/main" id="{6F0D35FF-DD28-4A8E-86D2-4409B5D77D8E}"/>
+                <a16:creationId xmlns:a16="http://schemas.microsoft.com/office/drawing/2014/main" id="{14B24DE9-D5C5-449F-B947-3E840704AAF7}"/>
               </a:ext>
             </a:extLst>
           </p:cNvPr>
@@ -3248,7 +3086,7 @@
           <p:cNvPr id="2" name="">
             <a:extLst xmlns:a="http://schemas.openxmlformats.org/drawingml/2006/main">
               <a:ext uri="{FF2B5EF4-FFF2-40B4-BE49-F238E27FC236}">
-                <a16:creationId xmlns:a16="http://schemas.microsoft.com/office/drawing/2014/main" id="{A9E70CF3-0B6C-4E7A-8F03-D8756066FB13}"/>
+                <a16:creationId xmlns:a16="http://schemas.microsoft.com/office/drawing/2014/main" id="{39E147C5-EA55-4F07-8C59-64FE0507B7B0}"/>
               </a:ext>
             </a:extLst>
           </p:cNvPr>
@@ -3259,12 +3097,12 @@
         </p:nvSpPr>
         <p:spPr>
           <a:xfrm xmlns:a="http://schemas.openxmlformats.org/drawingml/2006/main">
-            <a:off x="609600" y="438150"/>
-            <a:ext cx="400050" cy="400050"/>
+            <a:off x="609600" y="457200"/>
+            <a:ext cx="419100" cy="419100"/>
           </a:xfrm>
           <a:prstGeom xmlns:a="http://schemas.openxmlformats.org/drawingml/2006/main" prst="roundRect">
             <a:avLst>
-              <a:gd name="adj" fmla="val 19048"/>
+              <a:gd name="adj" fmla="val 18182"/>
             </a:avLst>
           </a:prstGeom>
           <a:solidFill xmlns:a="http://schemas.openxmlformats.org/drawingml/2006/main">
@@ -3281,7 +3119,7 @@
           <p:cNvPr id="3" name="">
             <a:extLst xmlns:a="http://schemas.openxmlformats.org/drawingml/2006/main">
               <a:ext uri="{FF2B5EF4-FFF2-40B4-BE49-F238E27FC236}">
-                <a16:creationId xmlns:a16="http://schemas.microsoft.com/office/drawing/2014/main" id="{268B503F-B383-442F-B5E4-A749B67DB5DA}"/>
+                <a16:creationId xmlns:a16="http://schemas.microsoft.com/office/drawing/2014/main" id="{60D987A4-417A-4A2A-B56A-F56519C334EE}"/>
               </a:ext>
             </a:extLst>
           </p:cNvPr>
@@ -3292,8 +3130,8 @@
         </p:nvSpPr>
         <p:spPr>
           <a:xfrm xmlns:a="http://schemas.openxmlformats.org/drawingml/2006/main">
-            <a:off x="609600" y="504825"/>
-            <a:ext cx="400050" cy="304800"/>
+            <a:off x="609600" y="533400"/>
+            <a:ext cx="419100" cy="304800"/>
           </a:xfrm>
           <a:prstGeom xmlns:a="http://schemas.openxmlformats.org/drawingml/2006/main" prst="rect">
             <a:avLst/>
@@ -3310,7 +3148,7 @@
           </a:bodyPr>
           <a:lstStyle xmlns:a="http://schemas.openxmlformats.org/drawingml/2006/main">
             <a:defPPr algn="ctr">
-              <a:defRPr sz="1875" b="1">
+              <a:defRPr sz="1950" b="1">
                 <a:solidFill>
                   <a:srgbClr val="FFFFFF"/>
                 </a:solidFill>
@@ -3322,11 +3160,7 @@
           </a:lstStyle>
           <a:p xmlns:a="http://schemas.openxmlformats.org/drawingml/2006/main">
             <a:pPr algn="ctr">
-              <a:lnSpc>
-                <a:spcPct val="100000"/>
-              </a:lnSpc>
-              <a:buNone/>
-              <a:defRPr sz="1875" b="1">
+              <a:defRPr sz="1950" b="1">
                 <a:solidFill>
                   <a:srgbClr val="FFFFFF"/>
                 </a:solidFill>
@@ -3336,7 +3170,7 @@
               </a:defRPr>
             </a:pPr>
             <a:r>
-              <a:rPr sz="1875" b="1">
+              <a:rPr sz="1950" b="1">
                 <a:solidFill>
                   <a:srgbClr val="FFFFFF"/>
                 </a:solidFill>
@@ -3354,7 +3188,7 @@
           <p:cNvPr id="4" name="">
             <a:extLst xmlns:a="http://schemas.openxmlformats.org/drawingml/2006/main">
               <a:ext uri="{FF2B5EF4-FFF2-40B4-BE49-F238E27FC236}">
-                <a16:creationId xmlns:a16="http://schemas.microsoft.com/office/drawing/2014/main" id="{4D99E872-F04D-42A7-BD72-0F51E5D526CD}"/>
+                <a16:creationId xmlns:a16="http://schemas.microsoft.com/office/drawing/2014/main" id="{69EDCC10-24C7-4998-B13F-DF3883BF0185}"/>
               </a:ext>
             </a:extLst>
           </p:cNvPr>
@@ -3365,8 +3199,8 @@
         </p:nvSpPr>
         <p:spPr>
           <a:xfrm xmlns:a="http://schemas.openxmlformats.org/drawingml/2006/main">
-            <a:off x="1143000" y="533400"/>
-            <a:ext cx="2857500" cy="209550"/>
+            <a:off x="1181100" y="571500"/>
+            <a:ext cx="3238500" cy="228600"/>
           </a:xfrm>
           <a:prstGeom xmlns:a="http://schemas.openxmlformats.org/drawingml/2006/main" prst="rect">
             <a:avLst/>
@@ -3383,7 +3217,7 @@
           </a:bodyPr>
           <a:lstStyle xmlns:a="http://schemas.openxmlformats.org/drawingml/2006/main">
             <a:defPPr algn="l">
-              <a:defRPr sz="1050" b="1">
+              <a:defRPr sz="1200" b="1">
                 <a:solidFill>
                   <a:srgbClr val="2C6B50"/>
                 </a:solidFill>
@@ -3395,11 +3229,7 @@
           </a:lstStyle>
           <a:p xmlns:a="http://schemas.openxmlformats.org/drawingml/2006/main">
             <a:pPr algn="l">
-              <a:lnSpc>
-                <a:spcPct val="100000"/>
-              </a:lnSpc>
-              <a:buNone/>
-              <a:defRPr sz="1050" b="1">
+              <a:defRPr sz="1200" b="1">
                 <a:solidFill>
                   <a:srgbClr val="2C6B50"/>
                 </a:solidFill>
@@ -3409,7 +3239,7 @@
               </a:defRPr>
             </a:pPr>
             <a:r>
-              <a:rPr sz="1050" b="1">
+              <a:rPr sz="1200" b="1">
                 <a:solidFill>
                   <a:srgbClr val="2C6B50"/>
                 </a:solidFill>
@@ -3427,7 +3257,7 @@
           <p:cNvPr id="5" name="">
             <a:extLst xmlns:a="http://schemas.openxmlformats.org/drawingml/2006/main">
               <a:ext uri="{FF2B5EF4-FFF2-40B4-BE49-F238E27FC236}">
-                <a16:creationId xmlns:a16="http://schemas.microsoft.com/office/drawing/2014/main" id="{5C762761-19E4-48B9-AD0C-5F64D31D3E0A}"/>
+                <a16:creationId xmlns:a16="http://schemas.microsoft.com/office/drawing/2014/main" id="{4B2F14F1-1D24-458B-89FB-8EA7D9537027}"/>
               </a:ext>
             </a:extLst>
           </p:cNvPr>
@@ -3438,8 +3268,8 @@
         </p:nvSpPr>
         <p:spPr>
           <a:xfrm xmlns:a="http://schemas.openxmlformats.org/drawingml/2006/main">
-            <a:off x="609600" y="1485900"/>
-            <a:ext cx="5619750" cy="1466850"/>
+            <a:off x="609600" y="1581150"/>
+            <a:ext cx="5715000" cy="1257300"/>
           </a:xfrm>
           <a:prstGeom xmlns:a="http://schemas.openxmlformats.org/drawingml/2006/main" prst="rect">
             <a:avLst/>
@@ -3456,7 +3286,7 @@
           </a:bodyPr>
           <a:lstStyle xmlns:a="http://schemas.openxmlformats.org/drawingml/2006/main">
             <a:defPPr algn="l">
-              <a:defRPr sz="4050" b="1">
+              <a:defRPr sz="3900" b="1">
                 <a:solidFill>
                   <a:srgbClr val="153B2E"/>
                 </a:solidFill>
@@ -3468,11 +3298,7 @@
           </a:lstStyle>
           <a:p xmlns:a="http://schemas.openxmlformats.org/drawingml/2006/main">
             <a:pPr algn="l">
-              <a:lnSpc>
-                <a:spcPct val="95000"/>
-              </a:lnSpc>
-              <a:buNone/>
-              <a:defRPr sz="4050" b="1">
+              <a:defRPr sz="3900" b="1">
                 <a:solidFill>
                   <a:srgbClr val="153B2E"/>
                 </a:solidFill>
@@ -3482,7 +3308,7 @@
               </a:defRPr>
             </a:pPr>
             <a:r>
-              <a:rPr sz="4050" b="1">
+              <a:rPr sz="3900" b="1">
                 <a:solidFill>
                   <a:srgbClr val="153B2E"/>
                 </a:solidFill>
@@ -3490,16 +3316,12 @@
                 <a:ea typeface="Calibri"/>
                 <a:cs typeface="Calibri"/>
               </a:rPr>
-              <a:t>From floor plan</a:t>
+              <a:t>See the home</a:t>
             </a:r>
           </a:p>
           <a:p xmlns:a="http://schemas.openxmlformats.org/drawingml/2006/main">
             <a:pPr algn="l">
-              <a:lnSpc>
-                <a:spcPct val="95000"/>
-              </a:lnSpc>
-              <a:buNone/>
-              <a:defRPr sz="4050" b="1">
+              <a:defRPr sz="3900" b="1">
                 <a:solidFill>
                   <a:srgbClr val="153B2E"/>
                 </a:solidFill>
@@ -3509,7 +3331,7 @@
               </a:defRPr>
             </a:pPr>
             <a:r>
-              <a:rPr sz="4050" b="1">
+              <a:rPr sz="3900" b="1">
                 <a:solidFill>
                   <a:srgbClr val="153B2E"/>
                 </a:solidFill>
@@ -3517,7 +3339,7 @@
                 <a:ea typeface="Calibri"/>
                 <a:cs typeface="Calibri"/>
               </a:rPr>
-              <a:t>to walkable home.</a:t>
+              <a:t>beyond the plan.</a:t>
             </a:r>
           </a:p>
         </p:txBody>
@@ -3527,7 +3349,7 @@
           <p:cNvPr id="6" name="">
             <a:extLst xmlns:a="http://schemas.openxmlformats.org/drawingml/2006/main">
               <a:ext uri="{FF2B5EF4-FFF2-40B4-BE49-F238E27FC236}">
-                <a16:creationId xmlns:a16="http://schemas.microsoft.com/office/drawing/2014/main" id="{53A12B6D-0057-4FDA-8AC9-CDB3E85B71FB}"/>
+                <a16:creationId xmlns:a16="http://schemas.microsoft.com/office/drawing/2014/main" id="{22529ACB-53CF-42C1-9BA5-C237C631AF94}"/>
               </a:ext>
             </a:extLst>
           </p:cNvPr>
@@ -3538,8 +3360,8 @@
         </p:nvSpPr>
         <p:spPr>
           <a:xfrm xmlns:a="http://schemas.openxmlformats.org/drawingml/2006/main">
-            <a:off x="628650" y="3209925"/>
-            <a:ext cx="4876800" cy="523875"/>
+            <a:off x="638175" y="3143250"/>
+            <a:ext cx="5429250" cy="571500"/>
           </a:xfrm>
           <a:prstGeom xmlns:a="http://schemas.openxmlformats.org/drawingml/2006/main" prst="rect">
             <a:avLst/>
@@ -3556,7 +3378,7 @@
           </a:bodyPr>
           <a:lstStyle xmlns:a="http://schemas.openxmlformats.org/drawingml/2006/main">
             <a:defPPr algn="l">
-              <a:defRPr sz="1725" b="0">
+              <a:defRPr sz="1650" b="0">
                 <a:solidFill>
                   <a:srgbClr val="60756A"/>
                 </a:solidFill>
@@ -3568,11 +3390,7 @@
           </a:lstStyle>
           <a:p xmlns:a="http://schemas.openxmlformats.org/drawingml/2006/main">
             <a:pPr algn="l">
-              <a:lnSpc>
-                <a:spcPct val="100000"/>
-              </a:lnSpc>
-              <a:buNone/>
-              <a:defRPr sz="1725" b="0">
+              <a:defRPr sz="1650" b="0">
                 <a:solidFill>
                   <a:srgbClr val="60756A"/>
                 </a:solidFill>
@@ -3582,7 +3400,7 @@
               </a:defRPr>
             </a:pPr>
             <a:r>
-              <a:rPr sz="1725" b="0">
+              <a:rPr sz="1650" b="0">
                 <a:solidFill>
                   <a:srgbClr val="60756A"/>
                 </a:solidFill>
@@ -3590,7 +3408,7 @@
                 <a:ea typeface="Calibri"/>
                 <a:cs typeface="Calibri"/>
               </a:rPr>
-              <a:t>Turn a drawing into a space people can explore.</a:t>
+              <a:t>Turn architectural drawings into interactive 3D spaces.</a:t>
             </a:r>
           </a:p>
         </p:txBody>
@@ -3600,7 +3418,7 @@
           <p:cNvPr id="7" name="">
             <a:extLst xmlns:a="http://schemas.openxmlformats.org/drawingml/2006/main">
               <a:ext uri="{FF2B5EF4-FFF2-40B4-BE49-F238E27FC236}">
-                <a16:creationId xmlns:a16="http://schemas.microsoft.com/office/drawing/2014/main" id="{AC066ECF-1DC0-4EE8-AD2A-524BDD3FE1C3}"/>
+                <a16:creationId xmlns:a16="http://schemas.microsoft.com/office/drawing/2014/main" id="{4CACCF60-C989-4290-AC30-739D8EAC377A}"/>
               </a:ext>
             </a:extLst>
           </p:cNvPr>
@@ -3611,8 +3429,8 @@
         </p:nvSpPr>
         <p:spPr>
           <a:xfrm xmlns:a="http://schemas.openxmlformats.org/drawingml/2006/main">
-            <a:off x="628650" y="4105275"/>
-            <a:ext cx="495300" cy="38100"/>
+            <a:off x="638175" y="4095750"/>
+            <a:ext cx="533400" cy="38100"/>
           </a:xfrm>
           <a:prstGeom xmlns:a="http://schemas.openxmlformats.org/drawingml/2006/main" prst="rect">
             <a:avLst/>
@@ -3631,7 +3449,7 @@
           <p:cNvPr id="8" name="">
             <a:extLst xmlns:a="http://schemas.openxmlformats.org/drawingml/2006/main">
               <a:ext uri="{FF2B5EF4-FFF2-40B4-BE49-F238E27FC236}">
-                <a16:creationId xmlns:a16="http://schemas.microsoft.com/office/drawing/2014/main" id="{98D2FD38-9537-43E1-85A8-26483FAD89D0}"/>
+                <a16:creationId xmlns:a16="http://schemas.microsoft.com/office/drawing/2014/main" id="{914FA70F-DA5E-4E2E-B91E-8DC64F45A5F5}"/>
               </a:ext>
             </a:extLst>
           </p:cNvPr>
@@ -3642,8 +3460,8 @@
         </p:nvSpPr>
         <p:spPr>
           <a:xfrm xmlns:a="http://schemas.openxmlformats.org/drawingml/2006/main">
-            <a:off x="628650" y="4362450"/>
-            <a:ext cx="4476750" cy="323850"/>
+            <a:off x="638175" y="4381500"/>
+            <a:ext cx="4953000" cy="323850"/>
           </a:xfrm>
           <a:prstGeom xmlns:a="http://schemas.openxmlformats.org/drawingml/2006/main" prst="rect">
             <a:avLst/>
@@ -3660,7 +3478,7 @@
           </a:bodyPr>
           <a:lstStyle xmlns:a="http://schemas.openxmlformats.org/drawingml/2006/main">
             <a:defPPr algn="l">
-              <a:defRPr sz="1425" b="1">
+              <a:defRPr sz="1500" b="1">
                 <a:solidFill>
                   <a:srgbClr val="19332A"/>
                 </a:solidFill>
@@ -3672,11 +3490,7 @@
           </a:lstStyle>
           <a:p xmlns:a="http://schemas.openxmlformats.org/drawingml/2006/main">
             <a:pPr algn="l">
-              <a:lnSpc>
-                <a:spcPct val="100000"/>
-              </a:lnSpc>
-              <a:buNone/>
-              <a:defRPr sz="1425" b="1">
+              <a:defRPr sz="1500" b="1">
                 <a:solidFill>
                   <a:srgbClr val="19332A"/>
                 </a:solidFill>
@@ -3686,7 +3500,7 @@
               </a:defRPr>
             </a:pPr>
             <a:r>
-              <a:rPr sz="1425" b="1">
+              <a:rPr sz="1500" b="1">
                 <a:solidFill>
                   <a:srgbClr val="19332A"/>
                 </a:solidFill>
@@ -3694,7 +3508,7 @@
                 <a:ea typeface="Calibri"/>
                 <a:cs typeface="Calibri"/>
               </a:rPr>
-              <a:t>A browser-based 3D reconstruction studio</a:t>
+              <a:t>A browser-based architectural walkthrough studio</a:t>
             </a:r>
           </a:p>
         </p:txBody>
@@ -3704,7 +3518,7 @@
           <p:cNvPr id="9" name="">
             <a:extLst xmlns:a="http://schemas.openxmlformats.org/drawingml/2006/main">
               <a:ext uri="{FF2B5EF4-FFF2-40B4-BE49-F238E27FC236}">
-                <a16:creationId xmlns:a16="http://schemas.microsoft.com/office/drawing/2014/main" id="{D8F4EAA0-3210-4CE2-80E4-937BF122D163}"/>
+                <a16:creationId xmlns:a16="http://schemas.microsoft.com/office/drawing/2014/main" id="{4E01530E-7CB6-4842-9E7E-1A6882C0F3AB}"/>
               </a:ext>
             </a:extLst>
           </p:cNvPr>
@@ -3715,8 +3529,8 @@
         </p:nvSpPr>
         <p:spPr>
           <a:xfrm xmlns:a="http://schemas.openxmlformats.org/drawingml/2006/main">
-            <a:off x="628650" y="4772025"/>
-            <a:ext cx="4667250" cy="514350"/>
+            <a:off x="638175" y="4857750"/>
+            <a:ext cx="5191125" cy="476250"/>
           </a:xfrm>
           <a:prstGeom xmlns:a="http://schemas.openxmlformats.org/drawingml/2006/main" prst="rect">
             <a:avLst/>
@@ -3733,7 +3547,7 @@
           </a:bodyPr>
           <a:lstStyle xmlns:a="http://schemas.openxmlformats.org/drawingml/2006/main">
             <a:defPPr algn="l">
-              <a:defRPr sz="1275" b="0">
+              <a:defRPr sz="1200" b="0">
                 <a:solidFill>
                   <a:srgbClr val="60756A"/>
                 </a:solidFill>
@@ -3745,11 +3559,7 @@
           </a:lstStyle>
           <a:p xmlns:a="http://schemas.openxmlformats.org/drawingml/2006/main">
             <a:pPr algn="l">
-              <a:lnSpc>
-                <a:spcPct val="100000"/>
-              </a:lnSpc>
-              <a:buNone/>
-              <a:defRPr sz="1275" b="0">
+              <a:defRPr sz="1200" b="0">
                 <a:solidFill>
                   <a:srgbClr val="60756A"/>
                 </a:solidFill>
@@ -3759,7 +3569,7 @@
               </a:defRPr>
             </a:pPr>
             <a:r>
-              <a:rPr sz="1275" b="0">
+              <a:rPr sz="1200" b="0">
                 <a:solidFill>
                   <a:srgbClr val="60756A"/>
                 </a:solidFill>
@@ -3767,7 +3577,7 @@
                 <a:ea typeface="Calibri"/>
                 <a:cs typeface="Calibri"/>
               </a:rPr>
-              <a:t>PDF or image in. Interactive multi-storey model out.</a:t>
+              <a:t>Problem  ·  Proposed solution  ·  Scalability  ·  Sustainability</a:t>
             </a:r>
           </a:p>
         </p:txBody>
@@ -3777,7 +3587,7 @@
           <p:cNvPr id="10" name="">
             <a:extLst xmlns:a="http://schemas.openxmlformats.org/drawingml/2006/main">
               <a:ext uri="{FF2B5EF4-FFF2-40B4-BE49-F238E27FC236}">
-                <a16:creationId xmlns:a16="http://schemas.microsoft.com/office/drawing/2014/main" id="{C8A45137-CDA4-4A32-A6DD-7431EBBB46F7}"/>
+                <a16:creationId xmlns:a16="http://schemas.microsoft.com/office/drawing/2014/main" id="{B48F1432-BCE1-4CA3-9D1D-63B52D8426D9}"/>
               </a:ext>
             </a:extLst>
           </p:cNvPr>
@@ -3788,8 +3598,8 @@
         </p:nvSpPr>
         <p:spPr>
           <a:xfrm xmlns:a="http://schemas.openxmlformats.org/drawingml/2006/main">
-            <a:off x="628650" y="6267450"/>
-            <a:ext cx="5524500" cy="209550"/>
+            <a:off x="638175" y="6248400"/>
+            <a:ext cx="5905500" cy="190500"/>
           </a:xfrm>
           <a:prstGeom xmlns:a="http://schemas.openxmlformats.org/drawingml/2006/main" prst="rect">
             <a:avLst/>
@@ -3818,10 +3628,6 @@
           </a:lstStyle>
           <a:p xmlns:a="http://schemas.openxmlformats.org/drawingml/2006/main">
             <a:pPr algn="l">
-              <a:lnSpc>
-                <a:spcPct val="100000"/>
-              </a:lnSpc>
-              <a:buNone/>
               <a:defRPr sz="975" b="0">
                 <a:solidFill>
                   <a:srgbClr val="60756A"/>
@@ -3850,7 +3656,7 @@
           <p:cNvPr id="11" name="">
             <a:extLst xmlns:a="http://schemas.openxmlformats.org/drawingml/2006/main">
               <a:ext uri="{FF2B5EF4-FFF2-40B4-BE49-F238E27FC236}">
-                <a16:creationId xmlns:a16="http://schemas.microsoft.com/office/drawing/2014/main" id="{E477571C-2AD2-4DFE-80D4-4C1B1AF344A8}"/>
+                <a16:creationId xmlns:a16="http://schemas.microsoft.com/office/drawing/2014/main" id="{4295DC4C-7EB4-42A4-BF49-F055177601D1}"/>
               </a:ext>
             </a:extLst>
           </p:cNvPr>
@@ -3860,10 +3666,10 @@
           <p:nvPr/>
         </p:nvPicPr>
         <p:blipFill>
-          <a:blip xmlns:r="http://schemas.openxmlformats.org/officeDocument/2006/relationships" xmlns:a="http://schemas.openxmlformats.org/drawingml/2006/main" r:embed="Rb12536479f9c4bcf">
+          <a:blip xmlns:r="http://schemas.openxmlformats.org/officeDocument/2006/relationships" xmlns:a="http://schemas.openxmlformats.org/drawingml/2006/main" r:embed="R8e20779f64304067">
             <a:extLst>
               <a:ext uri="{96DAC541-7B7A-43D3-8B79-37D633B846F1}">
-                <asvg:svgBlip xmlns:asvg="http://schemas.microsoft.com/office/drawing/2016/SVG/main" r:embed="Reed2ab4f2f734690"/>
+                <asvg:svgBlip xmlns:asvg="http://schemas.microsoft.com/office/drawing/2016/SVG/main" r:embed="R557c80d6cd134910"/>
               </a:ext>
             </a:extLst>
           </a:blip>
@@ -3871,8 +3677,8 @@
         </p:blipFill>
         <p:spPr>
           <a:xfrm xmlns:a="http://schemas.openxmlformats.org/drawingml/2006/main">
-            <a:off x="5619750" y="495300"/>
-            <a:ext cx="6191250" cy="5572125"/>
+            <a:off x="6000750" y="514350"/>
+            <a:ext cx="5715000" cy="5334000"/>
           </a:xfrm>
           <a:prstGeom xmlns:a="http://schemas.openxmlformats.org/drawingml/2006/main" prst="rect">
             <a:avLst/>
@@ -3882,7 +3688,7 @@
     </p:spTree>
     <p:extLst>
       <p:ext uri="{BB962C8B-B14F-4D97-AF65-F5344CB8AC3E}">
-        <p14:creationId xmlns:p14="http://schemas.microsoft.com/office/powerpoint/2010/main" val="1005658195"/>
+        <p14:creationId xmlns:p14="http://schemas.microsoft.com/office/powerpoint/2010/main" val="1635377211"/>
       </p:ext>
     </p:extLst>
   </p:cSld>
@@ -3910,10 +3716,10 @@
       </p:grpSpPr>
       <p:sp>
         <p:nvSpPr>
-          <p:cNvPr id="17" name="">
-            <a:extLst xmlns:a="http://schemas.openxmlformats.org/drawingml/2006/main">
-              <a:ext uri="{FF2B5EF4-FFF2-40B4-BE49-F238E27FC236}">
-                <a16:creationId xmlns:a16="http://schemas.microsoft.com/office/drawing/2014/main" id="{ED9B9E0F-A21D-42E6-9C31-C7101F577F96}"/>
+          <p:cNvPr id="16" name="">
+            <a:extLst xmlns:a="http://schemas.openxmlformats.org/drawingml/2006/main">
+              <a:ext uri="{FF2B5EF4-FFF2-40B4-BE49-F238E27FC236}">
+                <a16:creationId xmlns:a16="http://schemas.microsoft.com/office/drawing/2014/main" id="{B7D9D381-88A6-45BA-A9AC-6E1F4025DCFE}"/>
               </a:ext>
             </a:extLst>
           </p:cNvPr>
@@ -3944,7 +3750,7 @@
           <p:cNvPr id="2" name="">
             <a:extLst xmlns:a="http://schemas.openxmlformats.org/drawingml/2006/main">
               <a:ext uri="{FF2B5EF4-FFF2-40B4-BE49-F238E27FC236}">
-                <a16:creationId xmlns:a16="http://schemas.microsoft.com/office/drawing/2014/main" id="{4F13551C-3B26-4EF9-973A-4DB7E7F93711}"/>
+                <a16:creationId xmlns:a16="http://schemas.microsoft.com/office/drawing/2014/main" id="{C3E82DB5-7B78-416C-92D2-84D829699A02}"/>
               </a:ext>
             </a:extLst>
           </p:cNvPr>
@@ -3955,8 +3761,8 @@
         </p:nvSpPr>
         <p:spPr>
           <a:xfrm xmlns:a="http://schemas.openxmlformats.org/drawingml/2006/main">
-            <a:off x="609600" y="361950"/>
-            <a:ext cx="2857500" cy="190500"/>
+            <a:off x="609600" y="342900"/>
+            <a:ext cx="4762500" cy="190500"/>
           </a:xfrm>
           <a:prstGeom xmlns:a="http://schemas.openxmlformats.org/drawingml/2006/main" prst="rect">
             <a:avLst/>
@@ -3985,10 +3791,6 @@
           </a:lstStyle>
           <a:p xmlns:a="http://schemas.openxmlformats.org/drawingml/2006/main">
             <a:pPr algn="l">
-              <a:lnSpc>
-                <a:spcPct val="100000"/>
-              </a:lnSpc>
-              <a:buNone/>
               <a:defRPr sz="975" b="1">
                 <a:solidFill>
                   <a:srgbClr val="2C6B50"/>
@@ -4007,7 +3809,7 @@
                 <a:ea typeface="Calibri"/>
                 <a:cs typeface="Calibri"/>
               </a:rPr>
-              <a:t>THE GAP</a:t>
+              <a:t>PROBLEM STATEMENT</a:t>
             </a:r>
           </a:p>
         </p:txBody>
@@ -4017,7 +3819,7 @@
           <p:cNvPr id="3" name="">
             <a:extLst xmlns:a="http://schemas.openxmlformats.org/drawingml/2006/main">
               <a:ext uri="{FF2B5EF4-FFF2-40B4-BE49-F238E27FC236}">
-                <a16:creationId xmlns:a16="http://schemas.microsoft.com/office/drawing/2014/main" id="{10F6D3DE-4729-41B0-94FA-E268CBF2BC71}"/>
+                <a16:creationId xmlns:a16="http://schemas.microsoft.com/office/drawing/2014/main" id="{21557D06-0076-4EFC-8E2F-DA9A1DA0B347}"/>
               </a:ext>
             </a:extLst>
           </p:cNvPr>
@@ -4028,8 +3830,8 @@
         </p:nvSpPr>
         <p:spPr>
           <a:xfrm xmlns:a="http://schemas.openxmlformats.org/drawingml/2006/main">
-            <a:off x="11239500" y="6362700"/>
-            <a:ext cx="381000" cy="190500"/>
+            <a:off x="11163300" y="6362700"/>
+            <a:ext cx="457200" cy="171450"/>
           </a:xfrm>
           <a:prstGeom xmlns:a="http://schemas.openxmlformats.org/drawingml/2006/main" prst="rect">
             <a:avLst/>
@@ -4058,10 +3860,6 @@
           </a:lstStyle>
           <a:p xmlns:a="http://schemas.openxmlformats.org/drawingml/2006/main">
             <a:pPr algn="r">
-              <a:lnSpc>
-                <a:spcPct val="100000"/>
-              </a:lnSpc>
-              <a:buNone/>
               <a:defRPr sz="900" b="1">
                 <a:solidFill>
                   <a:srgbClr val="60756A"/>
@@ -4090,7 +3888,7 @@
           <p:cNvPr id="4" name="">
             <a:extLst xmlns:a="http://schemas.openxmlformats.org/drawingml/2006/main">
               <a:ext uri="{FF2B5EF4-FFF2-40B4-BE49-F238E27FC236}">
-                <a16:creationId xmlns:a16="http://schemas.microsoft.com/office/drawing/2014/main" id="{419AEBF2-551A-4220-B712-A51180F64226}"/>
+                <a16:creationId xmlns:a16="http://schemas.microsoft.com/office/drawing/2014/main" id="{60C0FD29-987D-459C-82F9-B006DADC3B64}"/>
               </a:ext>
             </a:extLst>
           </p:cNvPr>
@@ -4101,8 +3899,8 @@
         </p:nvSpPr>
         <p:spPr>
           <a:xfrm xmlns:a="http://schemas.openxmlformats.org/drawingml/2006/main">
-            <a:off x="609600" y="838200"/>
-            <a:ext cx="6858000" cy="1257300"/>
+            <a:off x="609600" y="857250"/>
+            <a:ext cx="5810250" cy="1066800"/>
           </a:xfrm>
           <a:prstGeom xmlns:a="http://schemas.openxmlformats.org/drawingml/2006/main" prst="rect">
             <a:avLst/>
@@ -4131,10 +3929,6 @@
           </a:lstStyle>
           <a:p xmlns:a="http://schemas.openxmlformats.org/drawingml/2006/main">
             <a:pPr algn="l">
-              <a:lnSpc>
-                <a:spcPct val="96000"/>
-              </a:lnSpc>
-              <a:buNone/>
               <a:defRPr sz="3150" b="1">
                 <a:solidFill>
                   <a:srgbClr val="153B2E"/>
@@ -4153,15 +3947,11 @@
                 <a:ea typeface="Calibri"/>
                 <a:cs typeface="Calibri"/>
               </a:rPr>
-              <a:t>A plan shows rooms.</a:t>
+              <a:t>A flat plan leaves too much</a:t>
             </a:r>
           </a:p>
           <a:p xmlns:a="http://schemas.openxmlformats.org/drawingml/2006/main">
             <a:pPr algn="l">
-              <a:lnSpc>
-                <a:spcPct val="96000"/>
-              </a:lnSpc>
-              <a:buNone/>
               <a:defRPr sz="3150" b="1">
                 <a:solidFill>
                   <a:srgbClr val="153B2E"/>
@@ -4180,7 +3970,7 @@
                 <a:ea typeface="Calibri"/>
                 <a:cs typeface="Calibri"/>
               </a:rPr>
-              <a:t>It hides the feeling of space.</a:t>
+              <a:t>for people to imagine.</a:t>
             </a:r>
           </a:p>
         </p:txBody>
@@ -4190,7 +3980,7 @@
           <p:cNvPr id="5" name="">
             <a:extLst xmlns:a="http://schemas.openxmlformats.org/drawingml/2006/main">
               <a:ext uri="{FF2B5EF4-FFF2-40B4-BE49-F238E27FC236}">
-                <a16:creationId xmlns:a16="http://schemas.microsoft.com/office/drawing/2014/main" id="{FB4C8D1C-C9C9-423E-A657-F3F9CFB1E5C3}"/>
+                <a16:creationId xmlns:a16="http://schemas.microsoft.com/office/drawing/2014/main" id="{61AE664F-0AB1-40B9-877B-04E7AA3891E0}"/>
               </a:ext>
             </a:extLst>
           </p:cNvPr>
@@ -4201,8 +3991,8 @@
         </p:nvSpPr>
         <p:spPr>
           <a:xfrm xmlns:a="http://schemas.openxmlformats.org/drawingml/2006/main">
-            <a:off x="628650" y="2400300"/>
-            <a:ext cx="5619750" cy="514350"/>
+            <a:off x="638175" y="2209800"/>
+            <a:ext cx="5095875" cy="600075"/>
           </a:xfrm>
           <a:prstGeom xmlns:a="http://schemas.openxmlformats.org/drawingml/2006/main" prst="rect">
             <a:avLst/>
@@ -4231,10 +4021,6 @@
           </a:lstStyle>
           <a:p xmlns:a="http://schemas.openxmlformats.org/drawingml/2006/main">
             <a:pPr algn="l">
-              <a:lnSpc>
-                <a:spcPct val="100000"/>
-              </a:lnSpc>
-              <a:buNone/>
               <a:defRPr sz="1500" b="0">
                 <a:solidFill>
                   <a:srgbClr val="60756A"/>
@@ -4253,17 +4039,493 @@
                 <a:ea typeface="Calibri"/>
                 <a:cs typeface="Calibri"/>
               </a:rPr>
-              <a:t>Flat drawings leave people to imagine depth, movement and how floors connect.</a:t>
+              <a:t>The drawing records the layout. It does not show how the finished home feels to move through.</a:t>
             </a:r>
           </a:p>
         </p:txBody>
       </p:sp>
+      <p:sp>
+        <p:nvSpPr>
+          <p:cNvPr id="6" name="">
+            <a:extLst xmlns:a="http://schemas.openxmlformats.org/drawingml/2006/main">
+              <a:ext uri="{FF2B5EF4-FFF2-40B4-BE49-F238E27FC236}">
+                <a16:creationId xmlns:a16="http://schemas.microsoft.com/office/drawing/2014/main" id="{E8E6D9FB-590A-484D-9DD2-3CEF45B40DA4}"/>
+              </a:ext>
+            </a:extLst>
+          </p:cNvPr>
+          <p:cNvSpPr>
+            <a:spLocks xmlns:a="http://schemas.openxmlformats.org/drawingml/2006/main" noGrp="1"/>
+          </p:cNvSpPr>
+          <p:nvPr/>
+        </p:nvSpPr>
+        <p:spPr>
+          <a:xfrm xmlns:a="http://schemas.openxmlformats.org/drawingml/2006/main">
+            <a:off x="638175" y="3352800"/>
+            <a:ext cx="1524000" cy="209550"/>
+          </a:xfrm>
+          <a:prstGeom xmlns:a="http://schemas.openxmlformats.org/drawingml/2006/main" prst="rect">
+            <a:avLst/>
+          </a:prstGeom>
+          <a:noFill xmlns:a="http://schemas.openxmlformats.org/drawingml/2006/main"/>
+          <a:ln xmlns:a="http://schemas.openxmlformats.org/drawingml/2006/main" w="0">
+            <a:noFill/>
+            <a:prstDash val="solid"/>
+          </a:ln>
+        </p:spPr>
+        <p:txBody>
+          <a:bodyPr xmlns:a="http://schemas.openxmlformats.org/drawingml/2006/main" wrap="square" lIns="0" tIns="0" rIns="0" bIns="0" anchor="t">
+            <a:normAutofit fontScale="100000"/>
+          </a:bodyPr>
+          <a:lstStyle xmlns:a="http://schemas.openxmlformats.org/drawingml/2006/main">
+            <a:defPPr algn="l">
+              <a:defRPr sz="975" b="1">
+                <a:solidFill>
+                  <a:srgbClr val="E9795B"/>
+                </a:solidFill>
+                <a:latin typeface="Calibri"/>
+                <a:ea typeface="Calibri"/>
+                <a:cs typeface="Calibri"/>
+              </a:defRPr>
+            </a:defPPr>
+          </a:lstStyle>
+          <a:p xmlns:a="http://schemas.openxmlformats.org/drawingml/2006/main">
+            <a:pPr algn="l">
+              <a:defRPr sz="975" b="1">
+                <a:solidFill>
+                  <a:srgbClr val="E9795B"/>
+                </a:solidFill>
+                <a:latin typeface="Calibri"/>
+                <a:ea typeface="Calibri"/>
+                <a:cs typeface="Calibri"/>
+              </a:defRPr>
+            </a:pPr>
+            <a:r>
+              <a:rPr sz="975" b="1">
+                <a:solidFill>
+                  <a:srgbClr val="E9795B"/>
+                </a:solidFill>
+                <a:latin typeface="Calibri"/>
+                <a:ea typeface="Calibri"/>
+                <a:cs typeface="Calibri"/>
+              </a:rPr>
+              <a:t>DEPTH</a:t>
+            </a:r>
+          </a:p>
+        </p:txBody>
+      </p:sp>
+      <p:sp>
+        <p:nvSpPr>
+          <p:cNvPr id="7" name="">
+            <a:extLst xmlns:a="http://schemas.openxmlformats.org/drawingml/2006/main">
+              <a:ext uri="{FF2B5EF4-FFF2-40B4-BE49-F238E27FC236}">
+                <a16:creationId xmlns:a16="http://schemas.microsoft.com/office/drawing/2014/main" id="{73DA214C-7496-4C6B-849A-A3E5913D3765}"/>
+              </a:ext>
+            </a:extLst>
+          </p:cNvPr>
+          <p:cNvSpPr>
+            <a:spLocks xmlns:a="http://schemas.openxmlformats.org/drawingml/2006/main" noGrp="1"/>
+          </p:cNvSpPr>
+          <p:nvPr/>
+        </p:nvSpPr>
+        <p:spPr>
+          <a:xfrm xmlns:a="http://schemas.openxmlformats.org/drawingml/2006/main">
+            <a:off x="638175" y="3619500"/>
+            <a:ext cx="4762500" cy="295275"/>
+          </a:xfrm>
+          <a:prstGeom xmlns:a="http://schemas.openxmlformats.org/drawingml/2006/main" prst="rect">
+            <a:avLst/>
+          </a:prstGeom>
+          <a:noFill xmlns:a="http://schemas.openxmlformats.org/drawingml/2006/main"/>
+          <a:ln xmlns:a="http://schemas.openxmlformats.org/drawingml/2006/main" w="0">
+            <a:noFill/>
+            <a:prstDash val="solid"/>
+          </a:ln>
+        </p:spPr>
+        <p:txBody>
+          <a:bodyPr xmlns:a="http://schemas.openxmlformats.org/drawingml/2006/main" wrap="square" lIns="0" tIns="0" rIns="0" bIns="0" anchor="t">
+            <a:normAutofit fontScale="100000"/>
+          </a:bodyPr>
+          <a:lstStyle xmlns:a="http://schemas.openxmlformats.org/drawingml/2006/main">
+            <a:defPPr algn="l">
+              <a:defRPr sz="1500" b="1">
+                <a:solidFill>
+                  <a:srgbClr val="19332A"/>
+                </a:solidFill>
+                <a:latin typeface="Calibri"/>
+                <a:ea typeface="Calibri"/>
+                <a:cs typeface="Calibri"/>
+              </a:defRPr>
+            </a:defPPr>
+          </a:lstStyle>
+          <a:p xmlns:a="http://schemas.openxmlformats.org/drawingml/2006/main">
+            <a:pPr algn="l">
+              <a:defRPr sz="1500" b="1">
+                <a:solidFill>
+                  <a:srgbClr val="19332A"/>
+                </a:solidFill>
+                <a:latin typeface="Calibri"/>
+                <a:ea typeface="Calibri"/>
+                <a:cs typeface="Calibri"/>
+              </a:defRPr>
+            </a:pPr>
+            <a:r>
+              <a:rPr sz="1500" b="1">
+                <a:solidFill>
+                  <a:srgbClr val="19332A"/>
+                </a:solidFill>
+                <a:latin typeface="Calibri"/>
+                <a:ea typeface="Calibri"/>
+                <a:cs typeface="Calibri"/>
+              </a:rPr>
+              <a:t>Room size is hard to picture.</a:t>
+            </a:r>
+          </a:p>
+        </p:txBody>
+      </p:sp>
+      <p:sp>
+        <p:nvSpPr>
+          <p:cNvPr id="8" name="">
+            <a:extLst xmlns:a="http://schemas.openxmlformats.org/drawingml/2006/main">
+              <a:ext uri="{FF2B5EF4-FFF2-40B4-BE49-F238E27FC236}">
+                <a16:creationId xmlns:a16="http://schemas.microsoft.com/office/drawing/2014/main" id="{CB59B111-4C53-4BC9-93E0-C625EC7E483F}"/>
+              </a:ext>
+            </a:extLst>
+          </p:cNvPr>
+          <p:cNvSpPr>
+            <a:spLocks xmlns:a="http://schemas.openxmlformats.org/drawingml/2006/main" noGrp="1"/>
+          </p:cNvSpPr>
+          <p:nvPr/>
+        </p:nvSpPr>
+        <p:spPr>
+          <a:xfrm xmlns:a="http://schemas.openxmlformats.org/drawingml/2006/main">
+            <a:off x="638175" y="4048125"/>
+            <a:ext cx="4857750" cy="9525"/>
+          </a:xfrm>
+          <a:prstGeom xmlns:a="http://schemas.openxmlformats.org/drawingml/2006/main" prst="rect">
+            <a:avLst/>
+          </a:prstGeom>
+          <a:solidFill xmlns:a="http://schemas.openxmlformats.org/drawingml/2006/main">
+            <a:srgbClr val="C8D6CC"/>
+          </a:solidFill>
+          <a:ln xmlns:a="http://schemas.openxmlformats.org/drawingml/2006/main" w="0">
+            <a:noFill/>
+            <a:prstDash val="solid"/>
+          </a:ln>
+        </p:spPr>
+      </p:sp>
+      <p:sp>
+        <p:nvSpPr>
+          <p:cNvPr id="9" name="">
+            <a:extLst xmlns:a="http://schemas.openxmlformats.org/drawingml/2006/main">
+              <a:ext uri="{FF2B5EF4-FFF2-40B4-BE49-F238E27FC236}">
+                <a16:creationId xmlns:a16="http://schemas.microsoft.com/office/drawing/2014/main" id="{E7E1A44F-4C79-4F61-8E63-29C7DC7DE06E}"/>
+              </a:ext>
+            </a:extLst>
+          </p:cNvPr>
+          <p:cNvSpPr>
+            <a:spLocks xmlns:a="http://schemas.openxmlformats.org/drawingml/2006/main" noGrp="1"/>
+          </p:cNvSpPr>
+          <p:nvPr/>
+        </p:nvSpPr>
+        <p:spPr>
+          <a:xfrm xmlns:a="http://schemas.openxmlformats.org/drawingml/2006/main">
+            <a:off x="638175" y="4276725"/>
+            <a:ext cx="1809750" cy="209550"/>
+          </a:xfrm>
+          <a:prstGeom xmlns:a="http://schemas.openxmlformats.org/drawingml/2006/main" prst="rect">
+            <a:avLst/>
+          </a:prstGeom>
+          <a:noFill xmlns:a="http://schemas.openxmlformats.org/drawingml/2006/main"/>
+          <a:ln xmlns:a="http://schemas.openxmlformats.org/drawingml/2006/main" w="0">
+            <a:noFill/>
+            <a:prstDash val="solid"/>
+          </a:ln>
+        </p:spPr>
+        <p:txBody>
+          <a:bodyPr xmlns:a="http://schemas.openxmlformats.org/drawingml/2006/main" wrap="square" lIns="0" tIns="0" rIns="0" bIns="0" anchor="t">
+            <a:normAutofit fontScale="100000"/>
+          </a:bodyPr>
+          <a:lstStyle xmlns:a="http://schemas.openxmlformats.org/drawingml/2006/main">
+            <a:defPPr algn="l">
+              <a:defRPr sz="975" b="1">
+                <a:solidFill>
+                  <a:srgbClr val="2C6B50"/>
+                </a:solidFill>
+                <a:latin typeface="Calibri"/>
+                <a:ea typeface="Calibri"/>
+                <a:cs typeface="Calibri"/>
+              </a:defRPr>
+            </a:defPPr>
+          </a:lstStyle>
+          <a:p xmlns:a="http://schemas.openxmlformats.org/drawingml/2006/main">
+            <a:pPr algn="l">
+              <a:defRPr sz="975" b="1">
+                <a:solidFill>
+                  <a:srgbClr val="2C6B50"/>
+                </a:solidFill>
+                <a:latin typeface="Calibri"/>
+                <a:ea typeface="Calibri"/>
+                <a:cs typeface="Calibri"/>
+              </a:defRPr>
+            </a:pPr>
+            <a:r>
+              <a:rPr sz="975" b="1">
+                <a:solidFill>
+                  <a:srgbClr val="2C6B50"/>
+                </a:solidFill>
+                <a:latin typeface="Calibri"/>
+                <a:ea typeface="Calibri"/>
+                <a:cs typeface="Calibri"/>
+              </a:rPr>
+              <a:t>CIRCULATION</a:t>
+            </a:r>
+          </a:p>
+        </p:txBody>
+      </p:sp>
+      <p:sp>
+        <p:nvSpPr>
+          <p:cNvPr id="10" name="">
+            <a:extLst xmlns:a="http://schemas.openxmlformats.org/drawingml/2006/main">
+              <a:ext uri="{FF2B5EF4-FFF2-40B4-BE49-F238E27FC236}">
+                <a16:creationId xmlns:a16="http://schemas.microsoft.com/office/drawing/2014/main" id="{BA9D770F-BF6B-4433-B2E6-9AE5B77FE495}"/>
+              </a:ext>
+            </a:extLst>
+          </p:cNvPr>
+          <p:cNvSpPr>
+            <a:spLocks xmlns:a="http://schemas.openxmlformats.org/drawingml/2006/main" noGrp="1"/>
+          </p:cNvSpPr>
+          <p:nvPr/>
+        </p:nvSpPr>
+        <p:spPr>
+          <a:xfrm xmlns:a="http://schemas.openxmlformats.org/drawingml/2006/main">
+            <a:off x="638175" y="4543425"/>
+            <a:ext cx="4953000" cy="323850"/>
+          </a:xfrm>
+          <a:prstGeom xmlns:a="http://schemas.openxmlformats.org/drawingml/2006/main" prst="rect">
+            <a:avLst/>
+          </a:prstGeom>
+          <a:noFill xmlns:a="http://schemas.openxmlformats.org/drawingml/2006/main"/>
+          <a:ln xmlns:a="http://schemas.openxmlformats.org/drawingml/2006/main" w="0">
+            <a:noFill/>
+            <a:prstDash val="solid"/>
+          </a:ln>
+        </p:spPr>
+        <p:txBody>
+          <a:bodyPr xmlns:a="http://schemas.openxmlformats.org/drawingml/2006/main" wrap="square" lIns="0" tIns="0" rIns="0" bIns="0" anchor="t">
+            <a:normAutofit fontScale="100000"/>
+          </a:bodyPr>
+          <a:lstStyle xmlns:a="http://schemas.openxmlformats.org/drawingml/2006/main">
+            <a:defPPr algn="l">
+              <a:defRPr sz="1425" b="1">
+                <a:solidFill>
+                  <a:srgbClr val="19332A"/>
+                </a:solidFill>
+                <a:latin typeface="Calibri"/>
+                <a:ea typeface="Calibri"/>
+                <a:cs typeface="Calibri"/>
+              </a:defRPr>
+            </a:defPPr>
+          </a:lstStyle>
+          <a:p xmlns:a="http://schemas.openxmlformats.org/drawingml/2006/main">
+            <a:pPr algn="l">
+              <a:defRPr sz="1425" b="1">
+                <a:solidFill>
+                  <a:srgbClr val="19332A"/>
+                </a:solidFill>
+                <a:latin typeface="Calibri"/>
+                <a:ea typeface="Calibri"/>
+                <a:cs typeface="Calibri"/>
+              </a:defRPr>
+            </a:pPr>
+            <a:r>
+              <a:rPr sz="1425" b="1">
+                <a:solidFill>
+                  <a:srgbClr val="19332A"/>
+                </a:solidFill>
+                <a:latin typeface="Calibri"/>
+                <a:ea typeface="Calibri"/>
+                <a:cs typeface="Calibri"/>
+              </a:rPr>
+              <a:t>Stairs and floor connections stay abstract.</a:t>
+            </a:r>
+          </a:p>
+        </p:txBody>
+      </p:sp>
+      <p:sp>
+        <p:nvSpPr>
+          <p:cNvPr id="11" name="">
+            <a:extLst xmlns:a="http://schemas.openxmlformats.org/drawingml/2006/main">
+              <a:ext uri="{FF2B5EF4-FFF2-40B4-BE49-F238E27FC236}">
+                <a16:creationId xmlns:a16="http://schemas.microsoft.com/office/drawing/2014/main" id="{F7D08BBC-E63F-47CE-9ABB-F7FA914AA43A}"/>
+              </a:ext>
+            </a:extLst>
+          </p:cNvPr>
+          <p:cNvSpPr>
+            <a:spLocks xmlns:a="http://schemas.openxmlformats.org/drawingml/2006/main" noGrp="1"/>
+          </p:cNvSpPr>
+          <p:nvPr/>
+        </p:nvSpPr>
+        <p:spPr>
+          <a:xfrm xmlns:a="http://schemas.openxmlformats.org/drawingml/2006/main">
+            <a:off x="638175" y="4991100"/>
+            <a:ext cx="4857750" cy="9525"/>
+          </a:xfrm>
+          <a:prstGeom xmlns:a="http://schemas.openxmlformats.org/drawingml/2006/main" prst="rect">
+            <a:avLst/>
+          </a:prstGeom>
+          <a:solidFill xmlns:a="http://schemas.openxmlformats.org/drawingml/2006/main">
+            <a:srgbClr val="C8D6CC"/>
+          </a:solidFill>
+          <a:ln xmlns:a="http://schemas.openxmlformats.org/drawingml/2006/main" w="0">
+            <a:noFill/>
+            <a:prstDash val="solid"/>
+          </a:ln>
+        </p:spPr>
+      </p:sp>
+      <p:sp>
+        <p:nvSpPr>
+          <p:cNvPr id="12" name="">
+            <a:extLst xmlns:a="http://schemas.openxmlformats.org/drawingml/2006/main">
+              <a:ext uri="{FF2B5EF4-FFF2-40B4-BE49-F238E27FC236}">
+                <a16:creationId xmlns:a16="http://schemas.microsoft.com/office/drawing/2014/main" id="{3F2FC19B-FBB3-4E67-AE7A-5005BD53F481}"/>
+              </a:ext>
+            </a:extLst>
+          </p:cNvPr>
+          <p:cNvSpPr>
+            <a:spLocks xmlns:a="http://schemas.openxmlformats.org/drawingml/2006/main" noGrp="1"/>
+          </p:cNvSpPr>
+          <p:nvPr/>
+        </p:nvSpPr>
+        <p:spPr>
+          <a:xfrm xmlns:a="http://schemas.openxmlformats.org/drawingml/2006/main">
+            <a:off x="638175" y="5219700"/>
+            <a:ext cx="1809750" cy="209550"/>
+          </a:xfrm>
+          <a:prstGeom xmlns:a="http://schemas.openxmlformats.org/drawingml/2006/main" prst="rect">
+            <a:avLst/>
+          </a:prstGeom>
+          <a:noFill xmlns:a="http://schemas.openxmlformats.org/drawingml/2006/main"/>
+          <a:ln xmlns:a="http://schemas.openxmlformats.org/drawingml/2006/main" w="0">
+            <a:noFill/>
+            <a:prstDash val="solid"/>
+          </a:ln>
+        </p:spPr>
+        <p:txBody>
+          <a:bodyPr xmlns:a="http://schemas.openxmlformats.org/drawingml/2006/main" wrap="square" lIns="0" tIns="0" rIns="0" bIns="0" anchor="t">
+            <a:normAutofit fontScale="100000"/>
+          </a:bodyPr>
+          <a:lstStyle xmlns:a="http://schemas.openxmlformats.org/drawingml/2006/main">
+            <a:defPPr algn="l">
+              <a:defRPr sz="975" b="1">
+                <a:solidFill>
+                  <a:srgbClr val="153B2E"/>
+                </a:solidFill>
+                <a:latin typeface="Calibri"/>
+                <a:ea typeface="Calibri"/>
+                <a:cs typeface="Calibri"/>
+              </a:defRPr>
+            </a:defPPr>
+          </a:lstStyle>
+          <a:p xmlns:a="http://schemas.openxmlformats.org/drawingml/2006/main">
+            <a:pPr algn="l">
+              <a:defRPr sz="975" b="1">
+                <a:solidFill>
+                  <a:srgbClr val="153B2E"/>
+                </a:solidFill>
+                <a:latin typeface="Calibri"/>
+                <a:ea typeface="Calibri"/>
+                <a:cs typeface="Calibri"/>
+              </a:defRPr>
+            </a:pPr>
+            <a:r>
+              <a:rPr sz="975" b="1">
+                <a:solidFill>
+                  <a:srgbClr val="153B2E"/>
+                </a:solidFill>
+                <a:latin typeface="Calibri"/>
+                <a:ea typeface="Calibri"/>
+                <a:cs typeface="Calibri"/>
+              </a:rPr>
+              <a:t>CONFIDENCE</a:t>
+            </a:r>
+          </a:p>
+        </p:txBody>
+      </p:sp>
+      <p:sp>
+        <p:nvSpPr>
+          <p:cNvPr id="13" name="">
+            <a:extLst xmlns:a="http://schemas.openxmlformats.org/drawingml/2006/main">
+              <a:ext uri="{FF2B5EF4-FFF2-40B4-BE49-F238E27FC236}">
+                <a16:creationId xmlns:a16="http://schemas.microsoft.com/office/drawing/2014/main" id="{8B1CD093-A0A7-408F-B124-7CA19674D735}"/>
+              </a:ext>
+            </a:extLst>
+          </p:cNvPr>
+          <p:cNvSpPr>
+            <a:spLocks xmlns:a="http://schemas.openxmlformats.org/drawingml/2006/main" noGrp="1"/>
+          </p:cNvSpPr>
+          <p:nvPr/>
+        </p:nvSpPr>
+        <p:spPr>
+          <a:xfrm xmlns:a="http://schemas.openxmlformats.org/drawingml/2006/main">
+            <a:off x="638175" y="5486400"/>
+            <a:ext cx="4953000" cy="476250"/>
+          </a:xfrm>
+          <a:prstGeom xmlns:a="http://schemas.openxmlformats.org/drawingml/2006/main" prst="rect">
+            <a:avLst/>
+          </a:prstGeom>
+          <a:noFill xmlns:a="http://schemas.openxmlformats.org/drawingml/2006/main"/>
+          <a:ln xmlns:a="http://schemas.openxmlformats.org/drawingml/2006/main" w="0">
+            <a:noFill/>
+            <a:prstDash val="solid"/>
+          </a:ln>
+        </p:spPr>
+        <p:txBody>
+          <a:bodyPr xmlns:a="http://schemas.openxmlformats.org/drawingml/2006/main" wrap="square" lIns="0" tIns="0" rIns="0" bIns="0" anchor="t">
+            <a:normAutofit fontScale="100000"/>
+          </a:bodyPr>
+          <a:lstStyle xmlns:a="http://schemas.openxmlformats.org/drawingml/2006/main">
+            <a:defPPr algn="l">
+              <a:defRPr sz="1425" b="1">
+                <a:solidFill>
+                  <a:srgbClr val="19332A"/>
+                </a:solidFill>
+                <a:latin typeface="Calibri"/>
+                <a:ea typeface="Calibri"/>
+                <a:cs typeface="Calibri"/>
+              </a:defRPr>
+            </a:defPPr>
+          </a:lstStyle>
+          <a:p xmlns:a="http://schemas.openxmlformats.org/drawingml/2006/main">
+            <a:pPr algn="l">
+              <a:defRPr sz="1425" b="1">
+                <a:solidFill>
+                  <a:srgbClr val="19332A"/>
+                </a:solidFill>
+                <a:latin typeface="Calibri"/>
+                <a:ea typeface="Calibri"/>
+                <a:cs typeface="Calibri"/>
+              </a:defRPr>
+            </a:pPr>
+            <a:r>
+              <a:rPr sz="1425" b="1">
+                <a:solidFill>
+                  <a:srgbClr val="19332A"/>
+                </a:solidFill>
+                <a:latin typeface="Calibri"/>
+                <a:ea typeface="Calibri"/>
+                <a:cs typeface="Calibri"/>
+              </a:rPr>
+              <a:t>Buyers and clients must mentally build the space.</a:t>
+            </a:r>
+          </a:p>
+        </p:txBody>
+      </p:sp>
       <p:pic>
         <p:nvPicPr>
-          <p:cNvPr id="6" name="">
-            <a:extLst xmlns:a="http://schemas.openxmlformats.org/drawingml/2006/main">
-              <a:ext uri="{FF2B5EF4-FFF2-40B4-BE49-F238E27FC236}">
-                <a16:creationId xmlns:a16="http://schemas.microsoft.com/office/drawing/2014/main" id="{647BD6EE-F6A8-4E61-A7F6-748206D24DEB}"/>
+          <p:cNvPr id="14" name="">
+            <a:extLst xmlns:a="http://schemas.openxmlformats.org/drawingml/2006/main">
+              <a:ext uri="{FF2B5EF4-FFF2-40B4-BE49-F238E27FC236}">
+                <a16:creationId xmlns:a16="http://schemas.microsoft.com/office/drawing/2014/main" id="{3F32ABD1-1EF7-4818-975B-9EA711487C6C}"/>
               </a:ext>
             </a:extLst>
           </p:cNvPr>
@@ -4273,30 +4535,30 @@
           <p:nvPr/>
         </p:nvPicPr>
         <p:blipFill>
-          <a:blip xmlns:r="http://schemas.openxmlformats.org/officeDocument/2006/relationships" xmlns:a="http://schemas.openxmlformats.org/drawingml/2006/main" r:embed="R10663fad43ce42e5"/>
-          <a:srcRect xmlns:a="http://schemas.openxmlformats.org/drawingml/2006/main" l="13830" t="0" r="13830" b="0"/>
+          <a:blip xmlns:r="http://schemas.openxmlformats.org/officeDocument/2006/relationships" xmlns:a="http://schemas.openxmlformats.org/drawingml/2006/main" r:embed="R437d660bf9ac42c3"/>
+          <a:srcRect xmlns:a="http://schemas.openxmlformats.org/drawingml/2006/main" l="6818" t="0" r="6818" b="0"/>
           <a:stretch xmlns:a="http://schemas.openxmlformats.org/drawingml/2006/main">
             <a:fillRect l="0" t="0" r="0" b="0"/>
           </a:stretch>
         </p:blipFill>
         <p:spPr>
           <a:xfrm xmlns:a="http://schemas.openxmlformats.org/drawingml/2006/main">
-            <a:off x="6705600" y="885825"/>
-            <a:ext cx="4857750" cy="4476750"/>
+            <a:off x="6191250" y="1238250"/>
+            <a:ext cx="5429250" cy="4191000"/>
           </a:xfrm>
           <a:prstGeom xmlns:a="http://schemas.openxmlformats.org/drawingml/2006/main" prst="roundRect">
             <a:avLst>
-              <a:gd name="adj" fmla="val 3830"/>
+              <a:gd name="adj" fmla="val 3182"/>
             </a:avLst>
           </a:prstGeom>
         </p:spPr>
       </p:pic>
       <p:sp>
         <p:nvSpPr>
-          <p:cNvPr id="7" name="">
-            <a:extLst xmlns:a="http://schemas.openxmlformats.org/drawingml/2006/main">
-              <a:ext uri="{FF2B5EF4-FFF2-40B4-BE49-F238E27FC236}">
-                <a16:creationId xmlns:a16="http://schemas.microsoft.com/office/drawing/2014/main" id="{8A792C4E-2FA5-4252-8BB7-AFE3983D4DA3}"/>
+          <p:cNvPr id="15" name="">
+            <a:extLst xmlns:a="http://schemas.openxmlformats.org/drawingml/2006/main">
+              <a:ext uri="{FF2B5EF4-FFF2-40B4-BE49-F238E27FC236}">
+                <a16:creationId xmlns:a16="http://schemas.microsoft.com/office/drawing/2014/main" id="{2A4056C8-61DA-4E4A-80A6-2C3E5508B60A}"/>
               </a:ext>
             </a:extLst>
           </p:cNvPr>
@@ -4307,39 +4569,8 @@
         </p:nvSpPr>
         <p:spPr>
           <a:xfrm xmlns:a="http://schemas.openxmlformats.org/drawingml/2006/main">
-            <a:off x="628650" y="3476625"/>
-            <a:ext cx="38100" cy="447675"/>
-          </a:xfrm>
-          <a:prstGeom xmlns:a="http://schemas.openxmlformats.org/drawingml/2006/main" prst="rect">
-            <a:avLst/>
-          </a:prstGeom>
-          <a:solidFill xmlns:a="http://schemas.openxmlformats.org/drawingml/2006/main">
-            <a:srgbClr val="E9795B"/>
-          </a:solidFill>
-          <a:ln xmlns:a="http://schemas.openxmlformats.org/drawingml/2006/main" w="0">
-            <a:noFill/>
-            <a:prstDash val="solid"/>
-          </a:ln>
-        </p:spPr>
-      </p:sp>
-      <p:sp>
-        <p:nvSpPr>
-          <p:cNvPr id="8" name="">
-            <a:extLst xmlns:a="http://schemas.openxmlformats.org/drawingml/2006/main">
-              <a:ext uri="{FF2B5EF4-FFF2-40B4-BE49-F238E27FC236}">
-                <a16:creationId xmlns:a16="http://schemas.microsoft.com/office/drawing/2014/main" id="{62F79AC4-526F-44AF-99C5-A2DF4605497F}"/>
-              </a:ext>
-            </a:extLst>
-          </p:cNvPr>
-          <p:cNvSpPr>
-            <a:spLocks xmlns:a="http://schemas.openxmlformats.org/drawingml/2006/main" noGrp="1"/>
-          </p:cNvSpPr>
-          <p:nvPr/>
-        </p:nvSpPr>
-        <p:spPr>
-          <a:xfrm xmlns:a="http://schemas.openxmlformats.org/drawingml/2006/main">
-            <a:off x="838200" y="3457575"/>
-            <a:ext cx="1619250" cy="209550"/>
+            <a:off x="6191250" y="5600700"/>
+            <a:ext cx="5429250" cy="209550"/>
           </a:xfrm>
           <a:prstGeom xmlns:a="http://schemas.openxmlformats.org/drawingml/2006/main" prst="rect">
             <a:avLst/>
@@ -4356,9 +4587,9 @@
           </a:bodyPr>
           <a:lstStyle xmlns:a="http://schemas.openxmlformats.org/drawingml/2006/main">
             <a:defPPr algn="l">
-              <a:defRPr sz="975" b="1">
-                <a:solidFill>
-                  <a:srgbClr val="E9795B"/>
+              <a:defRPr sz="1050" b="0">
+                <a:solidFill>
+                  <a:srgbClr val="60756A"/>
                 </a:solidFill>
                 <a:latin typeface="Calibri"/>
                 <a:ea typeface="Calibri"/>
@@ -4368,13 +4599,9 @@
           </a:lstStyle>
           <a:p xmlns:a="http://schemas.openxmlformats.org/drawingml/2006/main">
             <a:pPr algn="l">
-              <a:lnSpc>
-                <a:spcPct val="100000"/>
-              </a:lnSpc>
-              <a:buNone/>
-              <a:defRPr sz="975" b="1">
-                <a:solidFill>
-                  <a:srgbClr val="E9795B"/>
+              <a:defRPr sz="1050" b="0">
+                <a:solidFill>
+                  <a:srgbClr val="60756A"/>
                 </a:solidFill>
                 <a:latin typeface="Calibri"/>
                 <a:ea typeface="Calibri"/>
@@ -4382,515 +4609,15 @@
               </a:defRPr>
             </a:pPr>
             <a:r>
-              <a:rPr sz="975" b="1">
-                <a:solidFill>
-                  <a:srgbClr val="E9795B"/>
+              <a:rPr sz="1050" b="0">
+                <a:solidFill>
+                  <a:srgbClr val="60756A"/>
                 </a:solidFill>
                 <a:latin typeface="Calibri"/>
                 <a:ea typeface="Calibri"/>
                 <a:cs typeface="Calibri"/>
               </a:rPr>
-              <a:t>DEPTH</a:t>
-            </a:r>
-          </a:p>
-        </p:txBody>
-      </p:sp>
-      <p:sp>
-        <p:nvSpPr>
-          <p:cNvPr id="9" name="">
-            <a:extLst xmlns:a="http://schemas.openxmlformats.org/drawingml/2006/main">
-              <a:ext uri="{FF2B5EF4-FFF2-40B4-BE49-F238E27FC236}">
-                <a16:creationId xmlns:a16="http://schemas.microsoft.com/office/drawing/2014/main" id="{D740B44E-D596-4BA7-95A3-493084AAC332}"/>
-              </a:ext>
-            </a:extLst>
-          </p:cNvPr>
-          <p:cNvSpPr>
-            <a:spLocks xmlns:a="http://schemas.openxmlformats.org/drawingml/2006/main" noGrp="1"/>
-          </p:cNvSpPr>
-          <p:nvPr/>
-        </p:nvSpPr>
-        <p:spPr>
-          <a:xfrm xmlns:a="http://schemas.openxmlformats.org/drawingml/2006/main">
-            <a:off x="838200" y="3724275"/>
-            <a:ext cx="3476625" cy="276225"/>
-          </a:xfrm>
-          <a:prstGeom xmlns:a="http://schemas.openxmlformats.org/drawingml/2006/main" prst="rect">
-            <a:avLst/>
-          </a:prstGeom>
-          <a:noFill xmlns:a="http://schemas.openxmlformats.org/drawingml/2006/main"/>
-          <a:ln xmlns:a="http://schemas.openxmlformats.org/drawingml/2006/main" w="0">
-            <a:noFill/>
-            <a:prstDash val="solid"/>
-          </a:ln>
-        </p:spPr>
-        <p:txBody>
-          <a:bodyPr xmlns:a="http://schemas.openxmlformats.org/drawingml/2006/main" wrap="square" lIns="0" tIns="0" rIns="0" bIns="0" anchor="t">
-            <a:normAutofit fontScale="100000"/>
-          </a:bodyPr>
-          <a:lstStyle xmlns:a="http://schemas.openxmlformats.org/drawingml/2006/main">
-            <a:defPPr algn="l">
-              <a:defRPr sz="1500" b="1">
-                <a:solidFill>
-                  <a:srgbClr val="19332A"/>
-                </a:solidFill>
-                <a:latin typeface="Calibri"/>
-                <a:ea typeface="Calibri"/>
-                <a:cs typeface="Calibri"/>
-              </a:defRPr>
-            </a:defPPr>
-          </a:lstStyle>
-          <a:p xmlns:a="http://schemas.openxmlformats.org/drawingml/2006/main">
-            <a:pPr algn="l">
-              <a:lnSpc>
-                <a:spcPct val="100000"/>
-              </a:lnSpc>
-              <a:buNone/>
-              <a:defRPr sz="1500" b="1">
-                <a:solidFill>
-                  <a:srgbClr val="19332A"/>
-                </a:solidFill>
-                <a:latin typeface="Calibri"/>
-                <a:ea typeface="Calibri"/>
-                <a:cs typeface="Calibri"/>
-              </a:defRPr>
-            </a:pPr>
-            <a:r>
-              <a:rPr sz="1500" b="1">
-                <a:solidFill>
-                  <a:srgbClr val="19332A"/>
-                </a:solidFill>
-                <a:latin typeface="Calibri"/>
-                <a:ea typeface="Calibri"/>
-                <a:cs typeface="Calibri"/>
-              </a:rPr>
-              <a:t>How tall are the walls?</a:t>
-            </a:r>
-          </a:p>
-        </p:txBody>
-      </p:sp>
-      <p:sp>
-        <p:nvSpPr>
-          <p:cNvPr id="10" name="">
-            <a:extLst xmlns:a="http://schemas.openxmlformats.org/drawingml/2006/main">
-              <a:ext uri="{FF2B5EF4-FFF2-40B4-BE49-F238E27FC236}">
-                <a16:creationId xmlns:a16="http://schemas.microsoft.com/office/drawing/2014/main" id="{C03C05BB-0B09-49E3-9781-7473BF8DA02F}"/>
-              </a:ext>
-            </a:extLst>
-          </p:cNvPr>
-          <p:cNvSpPr>
-            <a:spLocks xmlns:a="http://schemas.openxmlformats.org/drawingml/2006/main" noGrp="1"/>
-          </p:cNvSpPr>
-          <p:nvPr/>
-        </p:nvSpPr>
-        <p:spPr>
-          <a:xfrm xmlns:a="http://schemas.openxmlformats.org/drawingml/2006/main">
-            <a:off x="628650" y="4162425"/>
-            <a:ext cx="38100" cy="447675"/>
-          </a:xfrm>
-          <a:prstGeom xmlns:a="http://schemas.openxmlformats.org/drawingml/2006/main" prst="rect">
-            <a:avLst/>
-          </a:prstGeom>
-          <a:solidFill xmlns:a="http://schemas.openxmlformats.org/drawingml/2006/main">
-            <a:srgbClr val="2C6B50"/>
-          </a:solidFill>
-          <a:ln xmlns:a="http://schemas.openxmlformats.org/drawingml/2006/main" w="0">
-            <a:noFill/>
-            <a:prstDash val="solid"/>
-          </a:ln>
-        </p:spPr>
-      </p:sp>
-      <p:sp>
-        <p:nvSpPr>
-          <p:cNvPr id="11" name="">
-            <a:extLst xmlns:a="http://schemas.openxmlformats.org/drawingml/2006/main">
-              <a:ext uri="{FF2B5EF4-FFF2-40B4-BE49-F238E27FC236}">
-                <a16:creationId xmlns:a16="http://schemas.microsoft.com/office/drawing/2014/main" id="{92DD0985-D439-448D-992F-5C74A6F378C0}"/>
-              </a:ext>
-            </a:extLst>
-          </p:cNvPr>
-          <p:cNvSpPr>
-            <a:spLocks xmlns:a="http://schemas.openxmlformats.org/drawingml/2006/main" noGrp="1"/>
-          </p:cNvSpPr>
-          <p:nvPr/>
-        </p:nvSpPr>
-        <p:spPr>
-          <a:xfrm xmlns:a="http://schemas.openxmlformats.org/drawingml/2006/main">
-            <a:off x="838200" y="4143375"/>
-            <a:ext cx="1619250" cy="209550"/>
-          </a:xfrm>
-          <a:prstGeom xmlns:a="http://schemas.openxmlformats.org/drawingml/2006/main" prst="rect">
-            <a:avLst/>
-          </a:prstGeom>
-          <a:noFill xmlns:a="http://schemas.openxmlformats.org/drawingml/2006/main"/>
-          <a:ln xmlns:a="http://schemas.openxmlformats.org/drawingml/2006/main" w="0">
-            <a:noFill/>
-            <a:prstDash val="solid"/>
-          </a:ln>
-        </p:spPr>
-        <p:txBody>
-          <a:bodyPr xmlns:a="http://schemas.openxmlformats.org/drawingml/2006/main" wrap="square" lIns="0" tIns="0" rIns="0" bIns="0" anchor="t">
-            <a:normAutofit fontScale="100000"/>
-          </a:bodyPr>
-          <a:lstStyle xmlns:a="http://schemas.openxmlformats.org/drawingml/2006/main">
-            <a:defPPr algn="l">
-              <a:defRPr sz="975" b="1">
-                <a:solidFill>
-                  <a:srgbClr val="2C6B50"/>
-                </a:solidFill>
-                <a:latin typeface="Calibri"/>
-                <a:ea typeface="Calibri"/>
-                <a:cs typeface="Calibri"/>
-              </a:defRPr>
-            </a:defPPr>
-          </a:lstStyle>
-          <a:p xmlns:a="http://schemas.openxmlformats.org/drawingml/2006/main">
-            <a:pPr algn="l">
-              <a:lnSpc>
-                <a:spcPct val="100000"/>
-              </a:lnSpc>
-              <a:buNone/>
-              <a:defRPr sz="975" b="1">
-                <a:solidFill>
-                  <a:srgbClr val="2C6B50"/>
-                </a:solidFill>
-                <a:latin typeface="Calibri"/>
-                <a:ea typeface="Calibri"/>
-                <a:cs typeface="Calibri"/>
-              </a:defRPr>
-            </a:pPr>
-            <a:r>
-              <a:rPr sz="975" b="1">
-                <a:solidFill>
-                  <a:srgbClr val="2C6B50"/>
-                </a:solidFill>
-                <a:latin typeface="Calibri"/>
-                <a:ea typeface="Calibri"/>
-                <a:cs typeface="Calibri"/>
-              </a:rPr>
-              <a:t>FLOW</a:t>
-            </a:r>
-          </a:p>
-        </p:txBody>
-      </p:sp>
-      <p:sp>
-        <p:nvSpPr>
-          <p:cNvPr id="12" name="">
-            <a:extLst xmlns:a="http://schemas.openxmlformats.org/drawingml/2006/main">
-              <a:ext uri="{FF2B5EF4-FFF2-40B4-BE49-F238E27FC236}">
-                <a16:creationId xmlns:a16="http://schemas.microsoft.com/office/drawing/2014/main" id="{3DEB1E5F-E54B-4E37-9F4E-DAEB87AF7353}"/>
-              </a:ext>
-            </a:extLst>
-          </p:cNvPr>
-          <p:cNvSpPr>
-            <a:spLocks xmlns:a="http://schemas.openxmlformats.org/drawingml/2006/main" noGrp="1"/>
-          </p:cNvSpPr>
-          <p:nvPr/>
-        </p:nvSpPr>
-        <p:spPr>
-          <a:xfrm xmlns:a="http://schemas.openxmlformats.org/drawingml/2006/main">
-            <a:off x="838200" y="4410075"/>
-            <a:ext cx="3476625" cy="276225"/>
-          </a:xfrm>
-          <a:prstGeom xmlns:a="http://schemas.openxmlformats.org/drawingml/2006/main" prst="rect">
-            <a:avLst/>
-          </a:prstGeom>
-          <a:noFill xmlns:a="http://schemas.openxmlformats.org/drawingml/2006/main"/>
-          <a:ln xmlns:a="http://schemas.openxmlformats.org/drawingml/2006/main" w="0">
-            <a:noFill/>
-            <a:prstDash val="solid"/>
-          </a:ln>
-        </p:spPr>
-        <p:txBody>
-          <a:bodyPr xmlns:a="http://schemas.openxmlformats.org/drawingml/2006/main" wrap="square" lIns="0" tIns="0" rIns="0" bIns="0" anchor="t">
-            <a:normAutofit fontScale="100000"/>
-          </a:bodyPr>
-          <a:lstStyle xmlns:a="http://schemas.openxmlformats.org/drawingml/2006/main">
-            <a:defPPr algn="l">
-              <a:defRPr sz="1500" b="1">
-                <a:solidFill>
-                  <a:srgbClr val="19332A"/>
-                </a:solidFill>
-                <a:latin typeface="Calibri"/>
-                <a:ea typeface="Calibri"/>
-                <a:cs typeface="Calibri"/>
-              </a:defRPr>
-            </a:defPPr>
-          </a:lstStyle>
-          <a:p xmlns:a="http://schemas.openxmlformats.org/drawingml/2006/main">
-            <a:pPr algn="l">
-              <a:lnSpc>
-                <a:spcPct val="100000"/>
-              </a:lnSpc>
-              <a:buNone/>
-              <a:defRPr sz="1500" b="1">
-                <a:solidFill>
-                  <a:srgbClr val="19332A"/>
-                </a:solidFill>
-                <a:latin typeface="Calibri"/>
-                <a:ea typeface="Calibri"/>
-                <a:cs typeface="Calibri"/>
-              </a:defRPr>
-            </a:pPr>
-            <a:r>
-              <a:rPr sz="1500" b="1">
-                <a:solidFill>
-                  <a:srgbClr val="19332A"/>
-                </a:solidFill>
-                <a:latin typeface="Calibri"/>
-                <a:ea typeface="Calibri"/>
-                <a:cs typeface="Calibri"/>
-              </a:rPr>
-              <a:t>Can I move between floors?</a:t>
-            </a:r>
-          </a:p>
-        </p:txBody>
-      </p:sp>
-      <p:sp>
-        <p:nvSpPr>
-          <p:cNvPr id="13" name="">
-            <a:extLst xmlns:a="http://schemas.openxmlformats.org/drawingml/2006/main">
-              <a:ext uri="{FF2B5EF4-FFF2-40B4-BE49-F238E27FC236}">
-                <a16:creationId xmlns:a16="http://schemas.microsoft.com/office/drawing/2014/main" id="{D8CCE99F-4456-4A11-9BBB-C745E48BB39F}"/>
-              </a:ext>
-            </a:extLst>
-          </p:cNvPr>
-          <p:cNvSpPr>
-            <a:spLocks xmlns:a="http://schemas.openxmlformats.org/drawingml/2006/main" noGrp="1"/>
-          </p:cNvSpPr>
-          <p:nvPr/>
-        </p:nvSpPr>
-        <p:spPr>
-          <a:xfrm xmlns:a="http://schemas.openxmlformats.org/drawingml/2006/main">
-            <a:off x="628650" y="4848225"/>
-            <a:ext cx="38100" cy="447675"/>
-          </a:xfrm>
-          <a:prstGeom xmlns:a="http://schemas.openxmlformats.org/drawingml/2006/main" prst="rect">
-            <a:avLst/>
-          </a:prstGeom>
-          <a:solidFill xmlns:a="http://schemas.openxmlformats.org/drawingml/2006/main">
-            <a:srgbClr val="153B2E"/>
-          </a:solidFill>
-          <a:ln xmlns:a="http://schemas.openxmlformats.org/drawingml/2006/main" w="0">
-            <a:noFill/>
-            <a:prstDash val="solid"/>
-          </a:ln>
-        </p:spPr>
-      </p:sp>
-      <p:sp>
-        <p:nvSpPr>
-          <p:cNvPr id="14" name="">
-            <a:extLst xmlns:a="http://schemas.openxmlformats.org/drawingml/2006/main">
-              <a:ext uri="{FF2B5EF4-FFF2-40B4-BE49-F238E27FC236}">
-                <a16:creationId xmlns:a16="http://schemas.microsoft.com/office/drawing/2014/main" id="{859ED56D-7498-45B1-8669-21C51444EB0A}"/>
-              </a:ext>
-            </a:extLst>
-          </p:cNvPr>
-          <p:cNvSpPr>
-            <a:spLocks xmlns:a="http://schemas.openxmlformats.org/drawingml/2006/main" noGrp="1"/>
-          </p:cNvSpPr>
-          <p:nvPr/>
-        </p:nvSpPr>
-        <p:spPr>
-          <a:xfrm xmlns:a="http://schemas.openxmlformats.org/drawingml/2006/main">
-            <a:off x="838200" y="4829175"/>
-            <a:ext cx="1619250" cy="209550"/>
-          </a:xfrm>
-          <a:prstGeom xmlns:a="http://schemas.openxmlformats.org/drawingml/2006/main" prst="rect">
-            <a:avLst/>
-          </a:prstGeom>
-          <a:noFill xmlns:a="http://schemas.openxmlformats.org/drawingml/2006/main"/>
-          <a:ln xmlns:a="http://schemas.openxmlformats.org/drawingml/2006/main" w="0">
-            <a:noFill/>
-            <a:prstDash val="solid"/>
-          </a:ln>
-        </p:spPr>
-        <p:txBody>
-          <a:bodyPr xmlns:a="http://schemas.openxmlformats.org/drawingml/2006/main" wrap="square" lIns="0" tIns="0" rIns="0" bIns="0" anchor="t">
-            <a:normAutofit fontScale="100000"/>
-          </a:bodyPr>
-          <a:lstStyle xmlns:a="http://schemas.openxmlformats.org/drawingml/2006/main">
-            <a:defPPr algn="l">
-              <a:defRPr sz="975" b="1">
-                <a:solidFill>
-                  <a:srgbClr val="153B2E"/>
-                </a:solidFill>
-                <a:latin typeface="Calibri"/>
-                <a:ea typeface="Calibri"/>
-                <a:cs typeface="Calibri"/>
-              </a:defRPr>
-            </a:defPPr>
-          </a:lstStyle>
-          <a:p xmlns:a="http://schemas.openxmlformats.org/drawingml/2006/main">
-            <a:pPr algn="l">
-              <a:lnSpc>
-                <a:spcPct val="100000"/>
-              </a:lnSpc>
-              <a:buNone/>
-              <a:defRPr sz="975" b="1">
-                <a:solidFill>
-                  <a:srgbClr val="153B2E"/>
-                </a:solidFill>
-                <a:latin typeface="Calibri"/>
-                <a:ea typeface="Calibri"/>
-                <a:cs typeface="Calibri"/>
-              </a:defRPr>
-            </a:pPr>
-            <a:r>
-              <a:rPr sz="975" b="1">
-                <a:solidFill>
-                  <a:srgbClr val="153B2E"/>
-                </a:solidFill>
-                <a:latin typeface="Calibri"/>
-                <a:ea typeface="Calibri"/>
-                <a:cs typeface="Calibri"/>
-              </a:rPr>
-              <a:t>SCALE</a:t>
-            </a:r>
-          </a:p>
-        </p:txBody>
-      </p:sp>
-      <p:sp>
-        <p:nvSpPr>
-          <p:cNvPr id="15" name="">
-            <a:extLst xmlns:a="http://schemas.openxmlformats.org/drawingml/2006/main">
-              <a:ext uri="{FF2B5EF4-FFF2-40B4-BE49-F238E27FC236}">
-                <a16:creationId xmlns:a16="http://schemas.microsoft.com/office/drawing/2014/main" id="{3FF5001E-5883-4E3E-B9B2-0B285B3B1C53}"/>
-              </a:ext>
-            </a:extLst>
-          </p:cNvPr>
-          <p:cNvSpPr>
-            <a:spLocks xmlns:a="http://schemas.openxmlformats.org/drawingml/2006/main" noGrp="1"/>
-          </p:cNvSpPr>
-          <p:nvPr/>
-        </p:nvSpPr>
-        <p:spPr>
-          <a:xfrm xmlns:a="http://schemas.openxmlformats.org/drawingml/2006/main">
-            <a:off x="838200" y="5095875"/>
-            <a:ext cx="3810000" cy="276225"/>
-          </a:xfrm>
-          <a:prstGeom xmlns:a="http://schemas.openxmlformats.org/drawingml/2006/main" prst="rect">
-            <a:avLst/>
-          </a:prstGeom>
-          <a:noFill xmlns:a="http://schemas.openxmlformats.org/drawingml/2006/main"/>
-          <a:ln xmlns:a="http://schemas.openxmlformats.org/drawingml/2006/main" w="0">
-            <a:noFill/>
-            <a:prstDash val="solid"/>
-          </a:ln>
-        </p:spPr>
-        <p:txBody>
-          <a:bodyPr xmlns:a="http://schemas.openxmlformats.org/drawingml/2006/main" wrap="square" lIns="0" tIns="0" rIns="0" bIns="0" anchor="t">
-            <a:normAutofit fontScale="100000"/>
-          </a:bodyPr>
-          <a:lstStyle xmlns:a="http://schemas.openxmlformats.org/drawingml/2006/main">
-            <a:defPPr algn="l">
-              <a:defRPr sz="1500" b="1">
-                <a:solidFill>
-                  <a:srgbClr val="19332A"/>
-                </a:solidFill>
-                <a:latin typeface="Calibri"/>
-                <a:ea typeface="Calibri"/>
-                <a:cs typeface="Calibri"/>
-              </a:defRPr>
-            </a:defPPr>
-          </a:lstStyle>
-          <a:p xmlns:a="http://schemas.openxmlformats.org/drawingml/2006/main">
-            <a:pPr algn="l">
-              <a:lnSpc>
-                <a:spcPct val="100000"/>
-              </a:lnSpc>
-              <a:buNone/>
-              <a:defRPr sz="1500" b="1">
-                <a:solidFill>
-                  <a:srgbClr val="19332A"/>
-                </a:solidFill>
-                <a:latin typeface="Calibri"/>
-                <a:ea typeface="Calibri"/>
-                <a:cs typeface="Calibri"/>
-              </a:defRPr>
-            </a:pPr>
-            <a:r>
-              <a:rPr sz="1500" b="1">
-                <a:solidFill>
-                  <a:srgbClr val="19332A"/>
-                </a:solidFill>
-                <a:latin typeface="Calibri"/>
-                <a:ea typeface="Calibri"/>
-                <a:cs typeface="Calibri"/>
-              </a:rPr>
-              <a:t>How will it feel to live here?</a:t>
-            </a:r>
-          </a:p>
-        </p:txBody>
-      </p:sp>
-      <p:sp>
-        <p:nvSpPr>
-          <p:cNvPr id="16" name="">
-            <a:extLst xmlns:a="http://schemas.openxmlformats.org/drawingml/2006/main">
-              <a:ext uri="{FF2B5EF4-FFF2-40B4-BE49-F238E27FC236}">
-                <a16:creationId xmlns:a16="http://schemas.microsoft.com/office/drawing/2014/main" id="{FA9CC571-BAC7-46F7-BCBA-37D1C1FCE72B}"/>
-              </a:ext>
-            </a:extLst>
-          </p:cNvPr>
-          <p:cNvSpPr>
-            <a:spLocks xmlns:a="http://schemas.openxmlformats.org/drawingml/2006/main" noGrp="1"/>
-          </p:cNvSpPr>
-          <p:nvPr/>
-        </p:nvSpPr>
-        <p:spPr>
-          <a:xfrm xmlns:a="http://schemas.openxmlformats.org/drawingml/2006/main">
-            <a:off x="6705600" y="5572125"/>
-            <a:ext cx="4762500" cy="190500"/>
-          </a:xfrm>
-          <a:prstGeom xmlns:a="http://schemas.openxmlformats.org/drawingml/2006/main" prst="rect">
-            <a:avLst/>
-          </a:prstGeom>
-          <a:noFill xmlns:a="http://schemas.openxmlformats.org/drawingml/2006/main"/>
-          <a:ln xmlns:a="http://schemas.openxmlformats.org/drawingml/2006/main" w="0">
-            <a:noFill/>
-            <a:prstDash val="solid"/>
-          </a:ln>
-        </p:spPr>
-        <p:txBody>
-          <a:bodyPr xmlns:a="http://schemas.openxmlformats.org/drawingml/2006/main" wrap="square" lIns="0" tIns="0" rIns="0" bIns="0" anchor="t">
-            <a:normAutofit fontScale="100000"/>
-          </a:bodyPr>
-          <a:lstStyle xmlns:a="http://schemas.openxmlformats.org/drawingml/2006/main">
-            <a:defPPr algn="l">
-              <a:defRPr sz="975" b="0">
-                <a:solidFill>
-                  <a:srgbClr val="60756A"/>
-                </a:solidFill>
-                <a:latin typeface="Calibri"/>
-                <a:ea typeface="Calibri"/>
-                <a:cs typeface="Calibri"/>
-              </a:defRPr>
-            </a:defPPr>
-          </a:lstStyle>
-          <a:p xmlns:a="http://schemas.openxmlformats.org/drawingml/2006/main">
-            <a:pPr algn="l">
-              <a:lnSpc>
-                <a:spcPct val="100000"/>
-              </a:lnSpc>
-              <a:buNone/>
-              <a:defRPr sz="975" b="0">
-                <a:solidFill>
-                  <a:srgbClr val="60756A"/>
-                </a:solidFill>
-                <a:latin typeface="Calibri"/>
-                <a:ea typeface="Calibri"/>
-                <a:cs typeface="Calibri"/>
-              </a:defRPr>
-            </a:pPr>
-            <a:r>
-              <a:rPr sz="975" b="0">
-                <a:solidFill>
-                  <a:srgbClr val="60756A"/>
-                </a:solidFill>
-                <a:latin typeface="Calibri"/>
-                <a:ea typeface="Calibri"/>
-                <a:cs typeface="Calibri"/>
-              </a:rPr>
-              <a:t>A three-level home plan · 10 m × 14 m footprint</a:t>
+              <a:t>A real three-floor plan · 10 m × 14 m footprint</a:t>
             </a:r>
           </a:p>
         </p:txBody>
@@ -4898,7 +4625,7 @@
     </p:spTree>
     <p:extLst>
       <p:ext uri="{BB962C8B-B14F-4D97-AF65-F5344CB8AC3E}">
-        <p14:creationId xmlns:p14="http://schemas.microsoft.com/office/powerpoint/2010/main" val="1775166170"/>
+        <p14:creationId xmlns:p14="http://schemas.microsoft.com/office/powerpoint/2010/main" val="1713375901"/>
       </p:ext>
     </p:extLst>
   </p:cSld>
@@ -4926,10 +4653,10 @@
       </p:grpSpPr>
       <p:sp>
         <p:nvSpPr>
-          <p:cNvPr id="19" name="">
-            <a:extLst xmlns:a="http://schemas.openxmlformats.org/drawingml/2006/main">
-              <a:ext uri="{FF2B5EF4-FFF2-40B4-BE49-F238E27FC236}">
-                <a16:creationId xmlns:a16="http://schemas.microsoft.com/office/drawing/2014/main" id="{11957BA7-BEF6-42A2-830D-F32F7F703703}"/>
+          <p:cNvPr id="24" name="">
+            <a:extLst xmlns:a="http://schemas.openxmlformats.org/drawingml/2006/main">
+              <a:ext uri="{FF2B5EF4-FFF2-40B4-BE49-F238E27FC236}">
+                <a16:creationId xmlns:a16="http://schemas.microsoft.com/office/drawing/2014/main" id="{D3BF2016-7DCD-449B-A5F7-CA5874247BB6}"/>
               </a:ext>
             </a:extLst>
           </p:cNvPr>
@@ -4960,7 +4687,7 @@
           <p:cNvPr id="2" name="">
             <a:extLst xmlns:a="http://schemas.openxmlformats.org/drawingml/2006/main">
               <a:ext uri="{FF2B5EF4-FFF2-40B4-BE49-F238E27FC236}">
-                <a16:creationId xmlns:a16="http://schemas.microsoft.com/office/drawing/2014/main" id="{7D148835-1712-47ED-9C2E-B20BD72AD63C}"/>
+                <a16:creationId xmlns:a16="http://schemas.microsoft.com/office/drawing/2014/main" id="{AFDC371F-76B2-4E7B-81BC-86AFC7490331}"/>
               </a:ext>
             </a:extLst>
           </p:cNvPr>
@@ -4971,8 +4698,8 @@
         </p:nvSpPr>
         <p:spPr>
           <a:xfrm xmlns:a="http://schemas.openxmlformats.org/drawingml/2006/main">
-            <a:off x="609600" y="361950"/>
-            <a:ext cx="2857500" cy="190500"/>
+            <a:off x="609600" y="342900"/>
+            <a:ext cx="4762500" cy="190500"/>
           </a:xfrm>
           <a:prstGeom xmlns:a="http://schemas.openxmlformats.org/drawingml/2006/main" prst="rect">
             <a:avLst/>
@@ -5001,10 +4728,6 @@
           </a:lstStyle>
           <a:p xmlns:a="http://schemas.openxmlformats.org/drawingml/2006/main">
             <a:pPr algn="l">
-              <a:lnSpc>
-                <a:spcPct val="100000"/>
-              </a:lnSpc>
-              <a:buNone/>
               <a:defRPr sz="975" b="1">
                 <a:solidFill>
                   <a:srgbClr val="2C6B50"/>
@@ -5023,7 +4746,7 @@
                 <a:ea typeface="Calibri"/>
                 <a:cs typeface="Calibri"/>
               </a:rPr>
-              <a:t>THE TRANSFORMATION</a:t>
+              <a:t>PROPOSED SOLUTION</a:t>
             </a:r>
           </a:p>
         </p:txBody>
@@ -5033,7 +4756,7 @@
           <p:cNvPr id="3" name="">
             <a:extLst xmlns:a="http://schemas.openxmlformats.org/drawingml/2006/main">
               <a:ext uri="{FF2B5EF4-FFF2-40B4-BE49-F238E27FC236}">
-                <a16:creationId xmlns:a16="http://schemas.microsoft.com/office/drawing/2014/main" id="{87DC53D4-E44E-4E90-AB1A-EB665B468459}"/>
+                <a16:creationId xmlns:a16="http://schemas.microsoft.com/office/drawing/2014/main" id="{46B9B828-8800-4449-8A27-BA73957CB265}"/>
               </a:ext>
             </a:extLst>
           </p:cNvPr>
@@ -5044,8 +4767,8 @@
         </p:nvSpPr>
         <p:spPr>
           <a:xfrm xmlns:a="http://schemas.openxmlformats.org/drawingml/2006/main">
-            <a:off x="11239500" y="6362700"/>
-            <a:ext cx="381000" cy="190500"/>
+            <a:off x="11163300" y="6362700"/>
+            <a:ext cx="457200" cy="171450"/>
           </a:xfrm>
           <a:prstGeom xmlns:a="http://schemas.openxmlformats.org/drawingml/2006/main" prst="rect">
             <a:avLst/>
@@ -5074,10 +4797,6 @@
           </a:lstStyle>
           <a:p xmlns:a="http://schemas.openxmlformats.org/drawingml/2006/main">
             <a:pPr algn="r">
-              <a:lnSpc>
-                <a:spcPct val="100000"/>
-              </a:lnSpc>
-              <a:buNone/>
               <a:defRPr sz="900" b="1">
                 <a:solidFill>
                   <a:srgbClr val="60756A"/>
@@ -5106,7 +4825,7 @@
           <p:cNvPr id="4" name="">
             <a:extLst xmlns:a="http://schemas.openxmlformats.org/drawingml/2006/main">
               <a:ext uri="{FF2B5EF4-FFF2-40B4-BE49-F238E27FC236}">
-                <a16:creationId xmlns:a16="http://schemas.microsoft.com/office/drawing/2014/main" id="{AADB0EED-6745-4700-86F9-295A33EFBB3E}"/>
+                <a16:creationId xmlns:a16="http://schemas.microsoft.com/office/drawing/2014/main" id="{52A41C71-039F-42FC-98E3-F3426C20FF26}"/>
               </a:ext>
             </a:extLst>
           </p:cNvPr>
@@ -5117,8 +4836,8 @@
         </p:nvSpPr>
         <p:spPr>
           <a:xfrm xmlns:a="http://schemas.openxmlformats.org/drawingml/2006/main">
-            <a:off x="609600" y="828675"/>
-            <a:ext cx="7239000" cy="1066800"/>
+            <a:off x="609600" y="838200"/>
+            <a:ext cx="9525000" cy="533400"/>
           </a:xfrm>
           <a:prstGeom xmlns:a="http://schemas.openxmlformats.org/drawingml/2006/main" prst="rect">
             <a:avLst/>
@@ -5147,10 +4866,6 @@
           </a:lstStyle>
           <a:p xmlns:a="http://schemas.openxmlformats.org/drawingml/2006/main">
             <a:pPr algn="l">
-              <a:lnSpc>
-                <a:spcPct val="98000"/>
-              </a:lnSpc>
-              <a:buNone/>
               <a:defRPr sz="3150" b="1">
                 <a:solidFill>
                   <a:srgbClr val="153B2E"/>
@@ -5169,36 +4884,9 @@
                 <a:ea typeface="Calibri"/>
                 <a:cs typeface="Calibri"/>
               </a:rPr>
-              <a:t>Make the plan something</a:t>
+              <a:t>Upload a plan. Explore a home.</a:t>
             </a:r>
           </a:p>
-          <a:p xmlns:a="http://schemas.openxmlformats.org/drawingml/2006/main">
-            <a:pPr algn="l">
-              <a:lnSpc>
-                <a:spcPct val="98000"/>
-              </a:lnSpc>
-              <a:buNone/>
-              <a:defRPr sz="3150" b="1">
-                <a:solidFill>
-                  <a:srgbClr val="153B2E"/>
-                </a:solidFill>
-                <a:latin typeface="Calibri"/>
-                <a:ea typeface="Calibri"/>
-                <a:cs typeface="Calibri"/>
-              </a:defRPr>
-            </a:pPr>
-            <a:r>
-              <a:rPr sz="3150" b="1">
-                <a:solidFill>
-                  <a:srgbClr val="153B2E"/>
-                </a:solidFill>
-                <a:latin typeface="Calibri"/>
-                <a:ea typeface="Calibri"/>
-                <a:cs typeface="Calibri"/>
-              </a:rPr>
-              <a:t>people can step into.</a:t>
-            </a:r>
-          </a:p>
         </p:txBody>
       </p:sp>
       <p:sp>
@@ -5206,7 +4894,7 @@
           <p:cNvPr id="5" name="">
             <a:extLst xmlns:a="http://schemas.openxmlformats.org/drawingml/2006/main">
               <a:ext uri="{FF2B5EF4-FFF2-40B4-BE49-F238E27FC236}">
-                <a16:creationId xmlns:a16="http://schemas.microsoft.com/office/drawing/2014/main" id="{27E132A2-BF9B-4DD6-B203-E77E2C19E8A1}"/>
+                <a16:creationId xmlns:a16="http://schemas.microsoft.com/office/drawing/2014/main" id="{8A6B536C-F83E-49F5-88EC-54A9D9DE071B}"/>
               </a:ext>
             </a:extLst>
           </p:cNvPr>
@@ -5217,8 +4905,8 @@
         </p:nvSpPr>
         <p:spPr>
           <a:xfrm xmlns:a="http://schemas.openxmlformats.org/drawingml/2006/main">
-            <a:off x="628650" y="2076450"/>
-            <a:ext cx="6858000" cy="304800"/>
+            <a:off x="628650" y="1504950"/>
+            <a:ext cx="8191500" cy="285750"/>
           </a:xfrm>
           <a:prstGeom xmlns:a="http://schemas.openxmlformats.org/drawingml/2006/main" prst="rect">
             <a:avLst/>
@@ -5247,10 +4935,6 @@
           </a:lstStyle>
           <a:p xmlns:a="http://schemas.openxmlformats.org/drawingml/2006/main">
             <a:pPr algn="l">
-              <a:lnSpc>
-                <a:spcPct val="100000"/>
-              </a:lnSpc>
-              <a:buNone/>
               <a:defRPr sz="1500" b="0">
                 <a:solidFill>
                   <a:srgbClr val="60756A"/>
@@ -5269,7 +4953,7 @@
                 <a:ea typeface="Calibri"/>
                 <a:cs typeface="Calibri"/>
               </a:rPr>
-              <a:t>One flow, from architectural drawing to interactive 3D.</a:t>
+              <a:t>A clear path from drawing to multi-storey walkthrough.</a:t>
             </a:r>
           </a:p>
         </p:txBody>
@@ -5279,7 +4963,7 @@
           <p:cNvPr id="6" name="">
             <a:extLst xmlns:a="http://schemas.openxmlformats.org/drawingml/2006/main">
               <a:ext uri="{FF2B5EF4-FFF2-40B4-BE49-F238E27FC236}">
-                <a16:creationId xmlns:a16="http://schemas.microsoft.com/office/drawing/2014/main" id="{911723AF-58D8-46F6-8697-981A22A3FC82}"/>
+                <a16:creationId xmlns:a16="http://schemas.microsoft.com/office/drawing/2014/main" id="{60C443E9-813A-43CD-90CB-A04C04530EC4}"/>
               </a:ext>
             </a:extLst>
           </p:cNvPr>
@@ -5289,20 +4973,20 @@
           <p:nvPr/>
         </p:nvPicPr>
         <p:blipFill>
-          <a:blip xmlns:r="http://schemas.openxmlformats.org/officeDocument/2006/relationships" xmlns:a="http://schemas.openxmlformats.org/drawingml/2006/main" r:embed="Reb4d5812975a4c95"/>
-          <a:srcRect xmlns:a="http://schemas.openxmlformats.org/drawingml/2006/main" l="0" t="19542" r="0" b="19542"/>
+          <a:blip xmlns:r="http://schemas.openxmlformats.org/officeDocument/2006/relationships" xmlns:a="http://schemas.openxmlformats.org/drawingml/2006/main" r:embed="R344d0a3a6fc84c08"/>
+          <a:srcRect xmlns:a="http://schemas.openxmlformats.org/drawingml/2006/main" l="0" t="20551" r="0" b="20551"/>
           <a:stretch xmlns:a="http://schemas.openxmlformats.org/drawingml/2006/main">
             <a:fillRect l="0" t="0" r="0" b="0"/>
           </a:stretch>
         </p:blipFill>
         <p:spPr>
           <a:xfrm xmlns:a="http://schemas.openxmlformats.org/drawingml/2006/main">
-            <a:off x="638175" y="2943225"/>
-            <a:ext cx="3619500" cy="2476500"/>
+            <a:off x="628650" y="2295525"/>
+            <a:ext cx="3714750" cy="2457450"/>
           </a:xfrm>
           <a:prstGeom xmlns:a="http://schemas.openxmlformats.org/drawingml/2006/main" prst="roundRect">
             <a:avLst>
-              <a:gd name="adj" fmla="val 4615"/>
+              <a:gd name="adj" fmla="val 5426"/>
             </a:avLst>
           </a:prstGeom>
         </p:spPr>
@@ -5312,7 +4996,7 @@
           <p:cNvPr id="7" name="">
             <a:extLst xmlns:a="http://schemas.openxmlformats.org/drawingml/2006/main">
               <a:ext uri="{FF2B5EF4-FFF2-40B4-BE49-F238E27FC236}">
-                <a16:creationId xmlns:a16="http://schemas.microsoft.com/office/drawing/2014/main" id="{CB4B5A40-A92B-48F1-A2C8-09DF004067B1}"/>
+                <a16:creationId xmlns:a16="http://schemas.microsoft.com/office/drawing/2014/main" id="{BB9BC335-825E-4C0B-9AFE-901E2A039C5C}"/>
               </a:ext>
             </a:extLst>
           </p:cNvPr>
@@ -5323,8 +5007,8 @@
         </p:nvSpPr>
         <p:spPr>
           <a:xfrm xmlns:a="http://schemas.openxmlformats.org/drawingml/2006/main">
-            <a:off x="4457700" y="3943350"/>
-            <a:ext cx="742950" cy="304800"/>
+            <a:off x="4543425" y="3314700"/>
+            <a:ext cx="685800" cy="285750"/>
           </a:xfrm>
           <a:prstGeom xmlns:a="http://schemas.openxmlformats.org/drawingml/2006/main" prst="rightArrow">
             <a:avLst/>
@@ -5338,89 +5022,24 @@
           </a:ln>
         </p:spPr>
       </p:sp>
-      <p:pic>
-        <p:nvPicPr>
+      <p:sp>
+        <p:nvSpPr>
           <p:cNvPr id="8" name="">
             <a:extLst xmlns:a="http://schemas.openxmlformats.org/drawingml/2006/main">
               <a:ext uri="{FF2B5EF4-FFF2-40B4-BE49-F238E27FC236}">
-                <a16:creationId xmlns:a16="http://schemas.microsoft.com/office/drawing/2014/main" id="{70B8E587-B582-4950-AC8D-303C666BEFB9}"/>
-              </a:ext>
-            </a:extLst>
-          </p:cNvPr>
-          <p:cNvPicPr>
-            <a:picLocks xmlns:a="http://schemas.openxmlformats.org/drawingml/2006/main" noChangeAspect="1"/>
-          </p:cNvPicPr>
+                <a16:creationId xmlns:a16="http://schemas.microsoft.com/office/drawing/2014/main" id="{5E58A242-A0A5-43EB-8502-109563F92CAF}"/>
+              </a:ext>
+            </a:extLst>
+          </p:cNvPr>
+          <p:cNvSpPr>
+            <a:spLocks xmlns:a="http://schemas.openxmlformats.org/drawingml/2006/main" noGrp="1"/>
+          </p:cNvSpPr>
           <p:nvPr/>
-        </p:nvPicPr>
-        <p:blipFill>
-          <a:blip xmlns:r="http://schemas.openxmlformats.org/officeDocument/2006/relationships" xmlns:a="http://schemas.openxmlformats.org/drawingml/2006/main" r:embed="R5745c8d8a7154044">
-            <a:extLst>
-              <a:ext uri="{96DAC541-7B7A-43D3-8B79-37D633B846F1}">
-                <asvg:svgBlip xmlns:asvg="http://schemas.microsoft.com/office/drawing/2016/SVG/main" r:embed="R3fc28d603c9e42f2"/>
-              </a:ext>
-            </a:extLst>
-          </a:blip>
-          <a:stretch xmlns:a="http://schemas.openxmlformats.org/drawingml/2006/main"/>
-        </p:blipFill>
-        <p:spPr>
-          <a:xfrm xmlns:a="http://schemas.openxmlformats.org/drawingml/2006/main">
-            <a:off x="5334000" y="2724150"/>
-            <a:ext cx="3571875" cy="2876550"/>
-          </a:xfrm>
-          <a:prstGeom xmlns:a="http://schemas.openxmlformats.org/drawingml/2006/main" prst="rect">
-            <a:avLst/>
-          </a:prstGeom>
-        </p:spPr>
-      </p:pic>
-      <p:sp>
-        <p:nvSpPr>
-          <p:cNvPr id="9" name="">
-            <a:extLst xmlns:a="http://schemas.openxmlformats.org/drawingml/2006/main">
-              <a:ext uri="{FF2B5EF4-FFF2-40B4-BE49-F238E27FC236}">
-                <a16:creationId xmlns:a16="http://schemas.microsoft.com/office/drawing/2014/main" id="{D1FFBF58-9065-49F6-9FFE-48612F442624}"/>
-              </a:ext>
-            </a:extLst>
-          </p:cNvPr>
-          <p:cNvSpPr>
-            <a:spLocks xmlns:a="http://schemas.openxmlformats.org/drawingml/2006/main" noGrp="1"/>
-          </p:cNvSpPr>
-          <p:nvPr/>
-        </p:nvSpPr>
-        <p:spPr>
-          <a:xfrm xmlns:a="http://schemas.openxmlformats.org/drawingml/2006/main">
-            <a:off x="9144000" y="3076575"/>
-            <a:ext cx="19050" cy="1981200"/>
-          </a:xfrm>
-          <a:prstGeom xmlns:a="http://schemas.openxmlformats.org/drawingml/2006/main" prst="rect">
-            <a:avLst/>
-          </a:prstGeom>
-          <a:solidFill xmlns:a="http://schemas.openxmlformats.org/drawingml/2006/main">
-            <a:srgbClr val="C8D6CC"/>
-          </a:solidFill>
-          <a:ln xmlns:a="http://schemas.openxmlformats.org/drawingml/2006/main" w="0">
-            <a:noFill/>
-            <a:prstDash val="solid"/>
-          </a:ln>
-        </p:spPr>
-      </p:sp>
-      <p:sp>
-        <p:nvSpPr>
-          <p:cNvPr id="10" name="">
-            <a:extLst xmlns:a="http://schemas.openxmlformats.org/drawingml/2006/main">
-              <a:ext uri="{FF2B5EF4-FFF2-40B4-BE49-F238E27FC236}">
-                <a16:creationId xmlns:a16="http://schemas.microsoft.com/office/drawing/2014/main" id="{69BA6DEC-5DE4-472B-98AA-7CB745F489BE}"/>
-              </a:ext>
-            </a:extLst>
-          </p:cNvPr>
-          <p:cNvSpPr>
-            <a:spLocks xmlns:a="http://schemas.openxmlformats.org/drawingml/2006/main" noGrp="1"/>
-          </p:cNvSpPr>
-          <p:nvPr/>
-        </p:nvSpPr>
-        <p:spPr>
-          <a:xfrm xmlns:a="http://schemas.openxmlformats.org/drawingml/2006/main">
-            <a:off x="9410700" y="3114675"/>
-            <a:ext cx="590550" cy="323850"/>
+        </p:nvSpPr>
+        <p:spPr>
+          <a:xfrm xmlns:a="http://schemas.openxmlformats.org/drawingml/2006/main">
+            <a:off x="5524500" y="2343150"/>
+            <a:ext cx="571500" cy="419100"/>
           </a:xfrm>
           <a:prstGeom xmlns:a="http://schemas.openxmlformats.org/drawingml/2006/main" prst="rect">
             <a:avLst/>
@@ -5437,7 +5056,7 @@
           </a:bodyPr>
           <a:lstStyle xmlns:a="http://schemas.openxmlformats.org/drawingml/2006/main">
             <a:defPPr algn="l">
-              <a:defRPr sz="1650" b="1">
+              <a:defRPr sz="2100" b="1">
                 <a:solidFill>
                   <a:srgbClr val="E9795B"/>
                 </a:solidFill>
@@ -5449,11 +5068,7 @@
           </a:lstStyle>
           <a:p xmlns:a="http://schemas.openxmlformats.org/drawingml/2006/main">
             <a:pPr algn="l">
-              <a:lnSpc>
-                <a:spcPct val="100000"/>
-              </a:lnSpc>
-              <a:buNone/>
-              <a:defRPr sz="1650" b="1">
+              <a:defRPr sz="2100" b="1">
                 <a:solidFill>
                   <a:srgbClr val="E9795B"/>
                 </a:solidFill>
@@ -5463,7 +5078,7 @@
               </a:defRPr>
             </a:pPr>
             <a:r>
-              <a:rPr sz="1650" b="1">
+              <a:rPr sz="2100" b="1">
                 <a:solidFill>
                   <a:srgbClr val="E9795B"/>
                 </a:solidFill>
@@ -5478,10 +5093,10 @@
       </p:sp>
       <p:sp>
         <p:nvSpPr>
-          <p:cNvPr id="11" name="">
-            <a:extLst xmlns:a="http://schemas.openxmlformats.org/drawingml/2006/main">
-              <a:ext uri="{FF2B5EF4-FFF2-40B4-BE49-F238E27FC236}">
-                <a16:creationId xmlns:a16="http://schemas.microsoft.com/office/drawing/2014/main" id="{B4DE73EC-D7EE-44C6-83E3-9FC31D89BCD1}"/>
+          <p:cNvPr id="9" name="">
+            <a:extLst xmlns:a="http://schemas.openxmlformats.org/drawingml/2006/main">
+              <a:ext uri="{FF2B5EF4-FFF2-40B4-BE49-F238E27FC236}">
+                <a16:creationId xmlns:a16="http://schemas.microsoft.com/office/drawing/2014/main" id="{40E8A20B-CDC9-4862-8235-95C226047CC0}"/>
               </a:ext>
             </a:extLst>
           </p:cNvPr>
@@ -5492,8 +5107,8 @@
         </p:nvSpPr>
         <p:spPr>
           <a:xfrm xmlns:a="http://schemas.openxmlformats.org/drawingml/2006/main">
-            <a:off x="10020300" y="3171825"/>
-            <a:ext cx="1657350" cy="190500"/>
+            <a:off x="6019800" y="2419350"/>
+            <a:ext cx="1428750" cy="190500"/>
           </a:xfrm>
           <a:prstGeom xmlns:a="http://schemas.openxmlformats.org/drawingml/2006/main" prst="rect">
             <a:avLst/>
@@ -5522,10 +5137,6 @@
           </a:lstStyle>
           <a:p xmlns:a="http://schemas.openxmlformats.org/drawingml/2006/main">
             <a:pPr algn="l">
-              <a:lnSpc>
-                <a:spcPct val="100000"/>
-              </a:lnSpc>
-              <a:buNone/>
               <a:defRPr sz="975" b="1">
                 <a:solidFill>
                   <a:srgbClr val="2C6B50"/>
@@ -5551,10 +5162,10 @@
       </p:sp>
       <p:sp>
         <p:nvSpPr>
-          <p:cNvPr id="12" name="">
-            <a:extLst xmlns:a="http://schemas.openxmlformats.org/drawingml/2006/main">
-              <a:ext uri="{FF2B5EF4-FFF2-40B4-BE49-F238E27FC236}">
-                <a16:creationId xmlns:a16="http://schemas.microsoft.com/office/drawing/2014/main" id="{0231682A-5487-46A3-BEF8-EA0EF82EDD67}"/>
+          <p:cNvPr id="10" name="">
+            <a:extLst xmlns:a="http://schemas.openxmlformats.org/drawingml/2006/main">
+              <a:ext uri="{FF2B5EF4-FFF2-40B4-BE49-F238E27FC236}">
+                <a16:creationId xmlns:a16="http://schemas.microsoft.com/office/drawing/2014/main" id="{66E2A0C9-AF53-4840-9750-DD0A7CD6444E}"/>
               </a:ext>
             </a:extLst>
           </p:cNvPr>
@@ -5565,8 +5176,8 @@
         </p:nvSpPr>
         <p:spPr>
           <a:xfrm xmlns:a="http://schemas.openxmlformats.org/drawingml/2006/main">
-            <a:off x="9410700" y="3552825"/>
-            <a:ext cx="2286000" cy="304800"/>
+            <a:off x="5524500" y="2800350"/>
+            <a:ext cx="2667000" cy="285750"/>
           </a:xfrm>
           <a:prstGeom xmlns:a="http://schemas.openxmlformats.org/drawingml/2006/main" prst="rect">
             <a:avLst/>
@@ -5583,7 +5194,7 @@
           </a:bodyPr>
           <a:lstStyle xmlns:a="http://schemas.openxmlformats.org/drawingml/2006/main">
             <a:defPPr algn="l">
-              <a:defRPr sz="1650" b="1">
+              <a:defRPr sz="1575" b="1">
                 <a:solidFill>
                   <a:srgbClr val="153B2E"/>
                 </a:solidFill>
@@ -5595,11 +5206,7 @@
           </a:lstStyle>
           <a:p xmlns:a="http://schemas.openxmlformats.org/drawingml/2006/main">
             <a:pPr algn="l">
-              <a:lnSpc>
-                <a:spcPct val="100000"/>
-              </a:lnSpc>
-              <a:buNone/>
-              <a:defRPr sz="1650" b="1">
+              <a:defRPr sz="1575" b="1">
                 <a:solidFill>
                   <a:srgbClr val="153B2E"/>
                 </a:solidFill>
@@ -5609,7 +5216,7 @@
               </a:defRPr>
             </a:pPr>
             <a:r>
-              <a:rPr sz="1650" b="1">
+              <a:rPr sz="1575" b="1">
                 <a:solidFill>
                   <a:srgbClr val="153B2E"/>
                 </a:solidFill>
@@ -5617,17 +5224,17 @@
                 <a:ea typeface="Calibri"/>
                 <a:cs typeface="Calibri"/>
               </a:rPr>
-              <a:t>Upload a plan</a:t>
+              <a:t>PDF, PNG or JPG</a:t>
             </a:r>
           </a:p>
         </p:txBody>
       </p:sp>
       <p:sp>
         <p:nvSpPr>
-          <p:cNvPr id="13" name="">
-            <a:extLst xmlns:a="http://schemas.openxmlformats.org/drawingml/2006/main">
-              <a:ext uri="{FF2B5EF4-FFF2-40B4-BE49-F238E27FC236}">
-                <a16:creationId xmlns:a16="http://schemas.microsoft.com/office/drawing/2014/main" id="{6359A339-92FD-4622-9A93-B9F4AB13CA2A}"/>
+          <p:cNvPr id="11" name="">
+            <a:extLst xmlns:a="http://schemas.openxmlformats.org/drawingml/2006/main">
+              <a:ext uri="{FF2B5EF4-FFF2-40B4-BE49-F238E27FC236}">
+                <a16:creationId xmlns:a16="http://schemas.microsoft.com/office/drawing/2014/main" id="{FECD596C-0D52-4C80-9CB9-9AB659806DD4}"/>
               </a:ext>
             </a:extLst>
           </p:cNvPr>
@@ -5638,8 +5245,8 @@
         </p:nvSpPr>
         <p:spPr>
           <a:xfrm xmlns:a="http://schemas.openxmlformats.org/drawingml/2006/main">
-            <a:off x="9410700" y="3914775"/>
-            <a:ext cx="2324100" cy="247650"/>
+            <a:off x="5524500" y="3162300"/>
+            <a:ext cx="2667000" cy="514350"/>
           </a:xfrm>
           <a:prstGeom xmlns:a="http://schemas.openxmlformats.org/drawingml/2006/main" prst="rect">
             <a:avLst/>
@@ -5668,10 +5275,6 @@
           </a:lstStyle>
           <a:p xmlns:a="http://schemas.openxmlformats.org/drawingml/2006/main">
             <a:pPr algn="l">
-              <a:lnSpc>
-                <a:spcPct val="100000"/>
-              </a:lnSpc>
-              <a:buNone/>
               <a:defRPr sz="1200" b="0">
                 <a:solidFill>
                   <a:srgbClr val="60756A"/>
@@ -5690,17 +5293,17 @@
                 <a:ea typeface="Calibri"/>
                 <a:cs typeface="Calibri"/>
               </a:rPr>
-              <a:t>PDF, PNG or JPG</a:t>
+              <a:t>PDF.js parses plan documents in the browser.</a:t>
             </a:r>
           </a:p>
         </p:txBody>
       </p:sp>
       <p:sp>
         <p:nvSpPr>
-          <p:cNvPr id="14" name="">
-            <a:extLst xmlns:a="http://schemas.openxmlformats.org/drawingml/2006/main">
-              <a:ext uri="{FF2B5EF4-FFF2-40B4-BE49-F238E27FC236}">
-                <a16:creationId xmlns:a16="http://schemas.microsoft.com/office/drawing/2014/main" id="{FB8316E5-E655-44F1-BBB5-7014A4A8FF5E}"/>
+          <p:cNvPr id="12" name="">
+            <a:extLst xmlns:a="http://schemas.openxmlformats.org/drawingml/2006/main">
+              <a:ext uri="{FF2B5EF4-FFF2-40B4-BE49-F238E27FC236}">
+                <a16:creationId xmlns:a16="http://schemas.microsoft.com/office/drawing/2014/main" id="{7D794E94-5439-414E-BC96-84003075BA55}"/>
               </a:ext>
             </a:extLst>
           </p:cNvPr>
@@ -5711,8 +5314,8 @@
         </p:nvSpPr>
         <p:spPr>
           <a:xfrm xmlns:a="http://schemas.openxmlformats.org/drawingml/2006/main">
-            <a:off x="9410700" y="4295775"/>
-            <a:ext cx="590550" cy="323850"/>
+            <a:off x="8305800" y="2343150"/>
+            <a:ext cx="571500" cy="419100"/>
           </a:xfrm>
           <a:prstGeom xmlns:a="http://schemas.openxmlformats.org/drawingml/2006/main" prst="rect">
             <a:avLst/>
@@ -5729,7 +5332,7 @@
           </a:bodyPr>
           <a:lstStyle xmlns:a="http://schemas.openxmlformats.org/drawingml/2006/main">
             <a:defPPr algn="l">
-              <a:defRPr sz="1650" b="1">
+              <a:defRPr sz="2100" b="1">
                 <a:solidFill>
                   <a:srgbClr val="E9795B"/>
                 </a:solidFill>
@@ -5741,11 +5344,7 @@
           </a:lstStyle>
           <a:p xmlns:a="http://schemas.openxmlformats.org/drawingml/2006/main">
             <a:pPr algn="l">
-              <a:lnSpc>
-                <a:spcPct val="100000"/>
-              </a:lnSpc>
-              <a:buNone/>
-              <a:defRPr sz="1650" b="1">
+              <a:defRPr sz="2100" b="1">
                 <a:solidFill>
                   <a:srgbClr val="E9795B"/>
                 </a:solidFill>
@@ -5755,7 +5354,7 @@
               </a:defRPr>
             </a:pPr>
             <a:r>
-              <a:rPr sz="1650" b="1">
+              <a:rPr sz="2100" b="1">
                 <a:solidFill>
                   <a:srgbClr val="E9795B"/>
                 </a:solidFill>
@@ -5770,10 +5369,10 @@
       </p:sp>
       <p:sp>
         <p:nvSpPr>
-          <p:cNvPr id="15" name="">
-            <a:extLst xmlns:a="http://schemas.openxmlformats.org/drawingml/2006/main">
-              <a:ext uri="{FF2B5EF4-FFF2-40B4-BE49-F238E27FC236}">
-                <a16:creationId xmlns:a16="http://schemas.microsoft.com/office/drawing/2014/main" id="{6F47B054-A2E3-412C-8684-4EAD77A3D999}"/>
+          <p:cNvPr id="13" name="">
+            <a:extLst xmlns:a="http://schemas.openxmlformats.org/drawingml/2006/main">
+              <a:ext uri="{FF2B5EF4-FFF2-40B4-BE49-F238E27FC236}">
+                <a16:creationId xmlns:a16="http://schemas.microsoft.com/office/drawing/2014/main" id="{96E10555-D196-4BD9-B034-E3574164EC09}"/>
               </a:ext>
             </a:extLst>
           </p:cNvPr>
@@ -5784,8 +5383,8 @@
         </p:nvSpPr>
         <p:spPr>
           <a:xfrm xmlns:a="http://schemas.openxmlformats.org/drawingml/2006/main">
-            <a:off x="10020300" y="4352925"/>
-            <a:ext cx="1657350" cy="190500"/>
+            <a:off x="8801100" y="2419350"/>
+            <a:ext cx="2095500" cy="190500"/>
           </a:xfrm>
           <a:prstGeom xmlns:a="http://schemas.openxmlformats.org/drawingml/2006/main" prst="rect">
             <a:avLst/>
@@ -5814,10 +5413,6 @@
           </a:lstStyle>
           <a:p xmlns:a="http://schemas.openxmlformats.org/drawingml/2006/main">
             <a:pPr algn="l">
-              <a:lnSpc>
-                <a:spcPct val="100000"/>
-              </a:lnSpc>
-              <a:buNone/>
               <a:defRPr sz="975" b="1">
                 <a:solidFill>
                   <a:srgbClr val="2C6B50"/>
@@ -5836,17 +5431,17 @@
                 <a:ea typeface="Calibri"/>
                 <a:cs typeface="Calibri"/>
               </a:rPr>
-              <a:t>EXPLORE</a:t>
+              <a:t>RECONSTRUCT</a:t>
             </a:r>
           </a:p>
         </p:txBody>
       </p:sp>
       <p:sp>
         <p:nvSpPr>
-          <p:cNvPr id="16" name="">
-            <a:extLst xmlns:a="http://schemas.openxmlformats.org/drawingml/2006/main">
-              <a:ext uri="{FF2B5EF4-FFF2-40B4-BE49-F238E27FC236}">
-                <a16:creationId xmlns:a16="http://schemas.microsoft.com/office/drawing/2014/main" id="{47533882-7F86-49AE-94AE-38D82E9C1AF0}"/>
+          <p:cNvPr id="14" name="">
+            <a:extLst xmlns:a="http://schemas.openxmlformats.org/drawingml/2006/main">
+              <a:ext uri="{FF2B5EF4-FFF2-40B4-BE49-F238E27FC236}">
+                <a16:creationId xmlns:a16="http://schemas.microsoft.com/office/drawing/2014/main" id="{5361C79F-5305-4B2C-A7F7-F4A42FD92EFD}"/>
               </a:ext>
             </a:extLst>
           </p:cNvPr>
@@ -5857,8 +5452,8 @@
         </p:nvSpPr>
         <p:spPr>
           <a:xfrm xmlns:a="http://schemas.openxmlformats.org/drawingml/2006/main">
-            <a:off x="9410700" y="4733925"/>
-            <a:ext cx="2286000" cy="304800"/>
+            <a:off x="8305800" y="2800350"/>
+            <a:ext cx="2857500" cy="285750"/>
           </a:xfrm>
           <a:prstGeom xmlns:a="http://schemas.openxmlformats.org/drawingml/2006/main" prst="rect">
             <a:avLst/>
@@ -5875,7 +5470,7 @@
           </a:bodyPr>
           <a:lstStyle xmlns:a="http://schemas.openxmlformats.org/drawingml/2006/main">
             <a:defPPr algn="l">
-              <a:defRPr sz="1650" b="1">
+              <a:defRPr sz="1575" b="1">
                 <a:solidFill>
                   <a:srgbClr val="153B2E"/>
                 </a:solidFill>
@@ -5887,11 +5482,7 @@
           </a:lstStyle>
           <a:p xmlns:a="http://schemas.openxmlformats.org/drawingml/2006/main">
             <a:pPr algn="l">
-              <a:lnSpc>
-                <a:spcPct val="100000"/>
-              </a:lnSpc>
-              <a:buNone/>
-              <a:defRPr sz="1650" b="1">
+              <a:defRPr sz="1575" b="1">
                 <a:solidFill>
                   <a:srgbClr val="153B2E"/>
                 </a:solidFill>
@@ -5901,7 +5492,7 @@
               </a:defRPr>
             </a:pPr>
             <a:r>
-              <a:rPr sz="1650" b="1">
+              <a:rPr sz="1575" b="1">
                 <a:solidFill>
                   <a:srgbClr val="153B2E"/>
                 </a:solidFill>
@@ -5909,17 +5500,17 @@
                 <a:ea typeface="Calibri"/>
                 <a:cs typeface="Calibri"/>
               </a:rPr>
-              <a:t>Move through it</a:t>
+              <a:t>Map the spaces</a:t>
             </a:r>
           </a:p>
         </p:txBody>
       </p:sp>
       <p:sp>
         <p:nvSpPr>
-          <p:cNvPr id="17" name="">
-            <a:extLst xmlns:a="http://schemas.openxmlformats.org/drawingml/2006/main">
-              <a:ext uri="{FF2B5EF4-FFF2-40B4-BE49-F238E27FC236}">
-                <a16:creationId xmlns:a16="http://schemas.microsoft.com/office/drawing/2014/main" id="{064F9BFE-8CEB-493B-8AD4-446A0D9DA59E}"/>
+          <p:cNvPr id="15" name="">
+            <a:extLst xmlns:a="http://schemas.openxmlformats.org/drawingml/2006/main">
+              <a:ext uri="{FF2B5EF4-FFF2-40B4-BE49-F238E27FC236}">
+                <a16:creationId xmlns:a16="http://schemas.microsoft.com/office/drawing/2014/main" id="{741B6CE0-A551-431B-B4E9-7A5EC3F28450}"/>
               </a:ext>
             </a:extLst>
           </p:cNvPr>
@@ -5930,8 +5521,8 @@
         </p:nvSpPr>
         <p:spPr>
           <a:xfrm xmlns:a="http://schemas.openxmlformats.org/drawingml/2006/main">
-            <a:off x="9410700" y="5095875"/>
-            <a:ext cx="2381250" cy="400050"/>
+            <a:off x="8305800" y="3162300"/>
+            <a:ext cx="2857500" cy="514350"/>
           </a:xfrm>
           <a:prstGeom xmlns:a="http://schemas.openxmlformats.org/drawingml/2006/main" prst="rect">
             <a:avLst/>
@@ -5948,7 +5539,7 @@
           </a:bodyPr>
           <a:lstStyle xmlns:a="http://schemas.openxmlformats.org/drawingml/2006/main">
             <a:defPPr algn="l">
-              <a:defRPr sz="1125" b="0">
+              <a:defRPr sz="1200" b="0">
                 <a:solidFill>
                   <a:srgbClr val="60756A"/>
                 </a:solidFill>
@@ -5960,11 +5551,7 @@
           </a:lstStyle>
           <a:p xmlns:a="http://schemas.openxmlformats.org/drawingml/2006/main">
             <a:pPr algn="l">
-              <a:lnSpc>
-                <a:spcPct val="100000"/>
-              </a:lnSpc>
-              <a:buNone/>
-              <a:defRPr sz="1125" b="0">
+              <a:defRPr sz="1200" b="0">
                 <a:solidFill>
                   <a:srgbClr val="60756A"/>
                 </a:solidFill>
@@ -5974,7 +5561,7 @@
               </a:defRPr>
             </a:pPr>
             <a:r>
-              <a:rPr sz="1125" b="0">
+              <a:rPr sz="1200" b="0">
                 <a:solidFill>
                   <a:srgbClr val="60756A"/>
                 </a:solidFill>
@@ -5982,17 +5569,17 @@
                 <a:ea typeface="Calibri"/>
                 <a:cs typeface="Calibri"/>
               </a:rPr>
-              <a:t>Orbit or walk between floors</a:t>
+              <a:t>Optional Gemini Vision helps interpret custom uploads.</a:t>
             </a:r>
           </a:p>
         </p:txBody>
       </p:sp>
       <p:sp>
         <p:nvSpPr>
-          <p:cNvPr id="18" name="">
-            <a:extLst xmlns:a="http://schemas.openxmlformats.org/drawingml/2006/main">
-              <a:ext uri="{FF2B5EF4-FFF2-40B4-BE49-F238E27FC236}">
-                <a16:creationId xmlns:a16="http://schemas.microsoft.com/office/drawing/2014/main" id="{288A092E-209E-4301-9FD9-A6CAE7099B61}"/>
+          <p:cNvPr id="16" name="">
+            <a:extLst xmlns:a="http://schemas.openxmlformats.org/drawingml/2006/main">
+              <a:ext uri="{FF2B5EF4-FFF2-40B4-BE49-F238E27FC236}">
+                <a16:creationId xmlns:a16="http://schemas.microsoft.com/office/drawing/2014/main" id="{034B3E37-B7DD-4951-973E-580AE7B8B179}"/>
               </a:ext>
             </a:extLst>
           </p:cNvPr>
@@ -6003,8 +5590,8 @@
         </p:nvSpPr>
         <p:spPr>
           <a:xfrm xmlns:a="http://schemas.openxmlformats.org/drawingml/2006/main">
-            <a:off x="628650" y="5886450"/>
-            <a:ext cx="8191500" cy="304800"/>
+            <a:off x="5524500" y="4171950"/>
+            <a:ext cx="571500" cy="419100"/>
           </a:xfrm>
           <a:prstGeom xmlns:a="http://schemas.openxmlformats.org/drawingml/2006/main" prst="rect">
             <a:avLst/>
@@ -6021,9 +5608,9 @@
           </a:bodyPr>
           <a:lstStyle xmlns:a="http://schemas.openxmlformats.org/drawingml/2006/main">
             <a:defPPr algn="l">
-              <a:defRPr sz="1500" b="1">
-                <a:solidFill>
-                  <a:srgbClr val="2C6B50"/>
+              <a:defRPr sz="2100" b="1">
+                <a:solidFill>
+                  <a:srgbClr val="E9795B"/>
                 </a:solidFill>
                 <a:latin typeface="Calibri"/>
                 <a:ea typeface="Calibri"/>
@@ -6033,13 +5620,9 @@
           </a:lstStyle>
           <a:p xmlns:a="http://schemas.openxmlformats.org/drawingml/2006/main">
             <a:pPr algn="l">
-              <a:lnSpc>
-                <a:spcPct val="100000"/>
-              </a:lnSpc>
-              <a:buNone/>
-              <a:defRPr sz="1500" b="1">
-                <a:solidFill>
-                  <a:srgbClr val="2C6B50"/>
+              <a:defRPr sz="2100" b="1">
+                <a:solidFill>
+                  <a:srgbClr val="E9795B"/>
                 </a:solidFill>
                 <a:latin typeface="Calibri"/>
                 <a:ea typeface="Calibri"/>
@@ -6047,15 +5630,498 @@
               </a:defRPr>
             </a:pPr>
             <a:r>
-              <a:rPr sz="1500" b="1">
+              <a:rPr sz="2100" b="1">
+                <a:solidFill>
+                  <a:srgbClr val="E9795B"/>
+                </a:solidFill>
+                <a:latin typeface="Calibri"/>
+                <a:ea typeface="Calibri"/>
+                <a:cs typeface="Calibri"/>
+              </a:rPr>
+              <a:t>03</a:t>
+            </a:r>
+          </a:p>
+        </p:txBody>
+      </p:sp>
+      <p:sp>
+        <p:nvSpPr>
+          <p:cNvPr id="17" name="">
+            <a:extLst xmlns:a="http://schemas.openxmlformats.org/drawingml/2006/main">
+              <a:ext uri="{FF2B5EF4-FFF2-40B4-BE49-F238E27FC236}">
+                <a16:creationId xmlns:a16="http://schemas.microsoft.com/office/drawing/2014/main" id="{AD9A7B18-546E-487D-950C-BDC72CC6124B}"/>
+              </a:ext>
+            </a:extLst>
+          </p:cNvPr>
+          <p:cNvSpPr>
+            <a:spLocks xmlns:a="http://schemas.openxmlformats.org/drawingml/2006/main" noGrp="1"/>
+          </p:cNvSpPr>
+          <p:nvPr/>
+        </p:nvSpPr>
+        <p:spPr>
+          <a:xfrm xmlns:a="http://schemas.openxmlformats.org/drawingml/2006/main">
+            <a:off x="6019800" y="4248150"/>
+            <a:ext cx="1428750" cy="190500"/>
+          </a:xfrm>
+          <a:prstGeom xmlns:a="http://schemas.openxmlformats.org/drawingml/2006/main" prst="rect">
+            <a:avLst/>
+          </a:prstGeom>
+          <a:noFill xmlns:a="http://schemas.openxmlformats.org/drawingml/2006/main"/>
+          <a:ln xmlns:a="http://schemas.openxmlformats.org/drawingml/2006/main" w="0">
+            <a:noFill/>
+            <a:prstDash val="solid"/>
+          </a:ln>
+        </p:spPr>
+        <p:txBody>
+          <a:bodyPr xmlns:a="http://schemas.openxmlformats.org/drawingml/2006/main" wrap="square" lIns="0" tIns="0" rIns="0" bIns="0" anchor="t">
+            <a:normAutofit fontScale="100000"/>
+          </a:bodyPr>
+          <a:lstStyle xmlns:a="http://schemas.openxmlformats.org/drawingml/2006/main">
+            <a:defPPr algn="l">
+              <a:defRPr sz="975" b="1">
                 <a:solidFill>
                   <a:srgbClr val="2C6B50"/>
                 </a:solidFill>
                 <a:latin typeface="Calibri"/>
                 <a:ea typeface="Calibri"/>
                 <a:cs typeface="Calibri"/>
+              </a:defRPr>
+            </a:defPPr>
+          </a:lstStyle>
+          <a:p xmlns:a="http://schemas.openxmlformats.org/drawingml/2006/main">
+            <a:pPr algn="l">
+              <a:defRPr sz="975" b="1">
+                <a:solidFill>
+                  <a:srgbClr val="2C6B50"/>
+                </a:solidFill>
+                <a:latin typeface="Calibri"/>
+                <a:ea typeface="Calibri"/>
+                <a:cs typeface="Calibri"/>
+              </a:defRPr>
+            </a:pPr>
+            <a:r>
+              <a:rPr sz="975" b="1">
+                <a:solidFill>
+                  <a:srgbClr val="2C6B50"/>
+                </a:solidFill>
+                <a:latin typeface="Calibri"/>
+                <a:ea typeface="Calibri"/>
+                <a:cs typeface="Calibri"/>
               </a:rPr>
-              <a:t>From a drawing to a place to understand.</a:t>
+              <a:t>BUILD</a:t>
+            </a:r>
+          </a:p>
+        </p:txBody>
+      </p:sp>
+      <p:sp>
+        <p:nvSpPr>
+          <p:cNvPr id="18" name="">
+            <a:extLst xmlns:a="http://schemas.openxmlformats.org/drawingml/2006/main">
+              <a:ext uri="{FF2B5EF4-FFF2-40B4-BE49-F238E27FC236}">
+                <a16:creationId xmlns:a16="http://schemas.microsoft.com/office/drawing/2014/main" id="{43E147F4-B8AD-4B83-BB55-5D51F0E9B077}"/>
+              </a:ext>
+            </a:extLst>
+          </p:cNvPr>
+          <p:cNvSpPr>
+            <a:spLocks xmlns:a="http://schemas.openxmlformats.org/drawingml/2006/main" noGrp="1"/>
+          </p:cNvSpPr>
+          <p:nvPr/>
+        </p:nvSpPr>
+        <p:spPr>
+          <a:xfrm xmlns:a="http://schemas.openxmlformats.org/drawingml/2006/main">
+            <a:off x="5524500" y="4629150"/>
+            <a:ext cx="2667000" cy="285750"/>
+          </a:xfrm>
+          <a:prstGeom xmlns:a="http://schemas.openxmlformats.org/drawingml/2006/main" prst="rect">
+            <a:avLst/>
+          </a:prstGeom>
+          <a:noFill xmlns:a="http://schemas.openxmlformats.org/drawingml/2006/main"/>
+          <a:ln xmlns:a="http://schemas.openxmlformats.org/drawingml/2006/main" w="0">
+            <a:noFill/>
+            <a:prstDash val="solid"/>
+          </a:ln>
+        </p:spPr>
+        <p:txBody>
+          <a:bodyPr xmlns:a="http://schemas.openxmlformats.org/drawingml/2006/main" wrap="square" lIns="0" tIns="0" rIns="0" bIns="0" anchor="t">
+            <a:normAutofit fontScale="100000"/>
+          </a:bodyPr>
+          <a:lstStyle xmlns:a="http://schemas.openxmlformats.org/drawingml/2006/main">
+            <a:defPPr algn="l">
+              <a:defRPr sz="1575" b="1">
+                <a:solidFill>
+                  <a:srgbClr val="153B2E"/>
+                </a:solidFill>
+                <a:latin typeface="Calibri"/>
+                <a:ea typeface="Calibri"/>
+                <a:cs typeface="Calibri"/>
+              </a:defRPr>
+            </a:defPPr>
+          </a:lstStyle>
+          <a:p xmlns:a="http://schemas.openxmlformats.org/drawingml/2006/main">
+            <a:pPr algn="l">
+              <a:defRPr sz="1575" b="1">
+                <a:solidFill>
+                  <a:srgbClr val="153B2E"/>
+                </a:solidFill>
+                <a:latin typeface="Calibri"/>
+                <a:ea typeface="Calibri"/>
+                <a:cs typeface="Calibri"/>
+              </a:defRPr>
+            </a:pPr>
+            <a:r>
+              <a:rPr sz="1575" b="1">
+                <a:solidFill>
+                  <a:srgbClr val="153B2E"/>
+                </a:solidFill>
+                <a:latin typeface="Calibri"/>
+                <a:ea typeface="Calibri"/>
+                <a:cs typeface="Calibri"/>
+              </a:rPr>
+              <a:t>Three.js assembles</a:t>
+            </a:r>
+          </a:p>
+        </p:txBody>
+      </p:sp>
+      <p:sp>
+        <p:nvSpPr>
+          <p:cNvPr id="19" name="">
+            <a:extLst xmlns:a="http://schemas.openxmlformats.org/drawingml/2006/main">
+              <a:ext uri="{FF2B5EF4-FFF2-40B4-BE49-F238E27FC236}">
+                <a16:creationId xmlns:a16="http://schemas.microsoft.com/office/drawing/2014/main" id="{69173EB9-E49E-4C5D-91A1-82DF4A040DBA}"/>
+              </a:ext>
+            </a:extLst>
+          </p:cNvPr>
+          <p:cNvSpPr>
+            <a:spLocks xmlns:a="http://schemas.openxmlformats.org/drawingml/2006/main" noGrp="1"/>
+          </p:cNvSpPr>
+          <p:nvPr/>
+        </p:nvSpPr>
+        <p:spPr>
+          <a:xfrm xmlns:a="http://schemas.openxmlformats.org/drawingml/2006/main">
+            <a:off x="5524500" y="4991100"/>
+            <a:ext cx="2667000" cy="552450"/>
+          </a:xfrm>
+          <a:prstGeom xmlns:a="http://schemas.openxmlformats.org/drawingml/2006/main" prst="rect">
+            <a:avLst/>
+          </a:prstGeom>
+          <a:noFill xmlns:a="http://schemas.openxmlformats.org/drawingml/2006/main"/>
+          <a:ln xmlns:a="http://schemas.openxmlformats.org/drawingml/2006/main" w="0">
+            <a:noFill/>
+            <a:prstDash val="solid"/>
+          </a:ln>
+        </p:spPr>
+        <p:txBody>
+          <a:bodyPr xmlns:a="http://schemas.openxmlformats.org/drawingml/2006/main" wrap="square" lIns="0" tIns="0" rIns="0" bIns="0" anchor="t">
+            <a:normAutofit fontScale="100000"/>
+          </a:bodyPr>
+          <a:lstStyle xmlns:a="http://schemas.openxmlformats.org/drawingml/2006/main">
+            <a:defPPr algn="l">
+              <a:defRPr sz="1200" b="0">
+                <a:solidFill>
+                  <a:srgbClr val="60756A"/>
+                </a:solidFill>
+                <a:latin typeface="Calibri"/>
+                <a:ea typeface="Calibri"/>
+                <a:cs typeface="Calibri"/>
+              </a:defRPr>
+            </a:defPPr>
+          </a:lstStyle>
+          <a:p xmlns:a="http://schemas.openxmlformats.org/drawingml/2006/main">
+            <a:pPr algn="l">
+              <a:defRPr sz="1200" b="0">
+                <a:solidFill>
+                  <a:srgbClr val="60756A"/>
+                </a:solidFill>
+                <a:latin typeface="Calibri"/>
+                <a:ea typeface="Calibri"/>
+                <a:cs typeface="Calibri"/>
+              </a:defRPr>
+            </a:pPr>
+            <a:r>
+              <a:rPr sz="1200" b="0">
+                <a:solidFill>
+                  <a:srgbClr val="60756A"/>
+                </a:solidFill>
+                <a:latin typeface="Calibri"/>
+                <a:ea typeface="Calibri"/>
+                <a:cs typeface="Calibri"/>
+              </a:rPr>
+              <a:t>Walls, floors, doors and stairs become an interactive model.</a:t>
+            </a:r>
+          </a:p>
+        </p:txBody>
+      </p:sp>
+      <p:sp>
+        <p:nvSpPr>
+          <p:cNvPr id="20" name="">
+            <a:extLst xmlns:a="http://schemas.openxmlformats.org/drawingml/2006/main">
+              <a:ext uri="{FF2B5EF4-FFF2-40B4-BE49-F238E27FC236}">
+                <a16:creationId xmlns:a16="http://schemas.microsoft.com/office/drawing/2014/main" id="{154D5FEA-BF7B-4C48-83A5-AD141AF815AC}"/>
+              </a:ext>
+            </a:extLst>
+          </p:cNvPr>
+          <p:cNvSpPr>
+            <a:spLocks xmlns:a="http://schemas.openxmlformats.org/drawingml/2006/main" noGrp="1"/>
+          </p:cNvSpPr>
+          <p:nvPr/>
+        </p:nvSpPr>
+        <p:spPr>
+          <a:xfrm xmlns:a="http://schemas.openxmlformats.org/drawingml/2006/main">
+            <a:off x="8305800" y="4171950"/>
+            <a:ext cx="571500" cy="419100"/>
+          </a:xfrm>
+          <a:prstGeom xmlns:a="http://schemas.openxmlformats.org/drawingml/2006/main" prst="rect">
+            <a:avLst/>
+          </a:prstGeom>
+          <a:noFill xmlns:a="http://schemas.openxmlformats.org/drawingml/2006/main"/>
+          <a:ln xmlns:a="http://schemas.openxmlformats.org/drawingml/2006/main" w="0">
+            <a:noFill/>
+            <a:prstDash val="solid"/>
+          </a:ln>
+        </p:spPr>
+        <p:txBody>
+          <a:bodyPr xmlns:a="http://schemas.openxmlformats.org/drawingml/2006/main" wrap="square" lIns="0" tIns="0" rIns="0" bIns="0" anchor="t">
+            <a:normAutofit fontScale="100000"/>
+          </a:bodyPr>
+          <a:lstStyle xmlns:a="http://schemas.openxmlformats.org/drawingml/2006/main">
+            <a:defPPr algn="l">
+              <a:defRPr sz="2100" b="1">
+                <a:solidFill>
+                  <a:srgbClr val="E9795B"/>
+                </a:solidFill>
+                <a:latin typeface="Calibri"/>
+                <a:ea typeface="Calibri"/>
+                <a:cs typeface="Calibri"/>
+              </a:defRPr>
+            </a:defPPr>
+          </a:lstStyle>
+          <a:p xmlns:a="http://schemas.openxmlformats.org/drawingml/2006/main">
+            <a:pPr algn="l">
+              <a:defRPr sz="2100" b="1">
+                <a:solidFill>
+                  <a:srgbClr val="E9795B"/>
+                </a:solidFill>
+                <a:latin typeface="Calibri"/>
+                <a:ea typeface="Calibri"/>
+                <a:cs typeface="Calibri"/>
+              </a:defRPr>
+            </a:pPr>
+            <a:r>
+              <a:rPr sz="2100" b="1">
+                <a:solidFill>
+                  <a:srgbClr val="E9795B"/>
+                </a:solidFill>
+                <a:latin typeface="Calibri"/>
+                <a:ea typeface="Calibri"/>
+                <a:cs typeface="Calibri"/>
+              </a:rPr>
+              <a:t>04</a:t>
+            </a:r>
+          </a:p>
+        </p:txBody>
+      </p:sp>
+      <p:sp>
+        <p:nvSpPr>
+          <p:cNvPr id="21" name="">
+            <a:extLst xmlns:a="http://schemas.openxmlformats.org/drawingml/2006/main">
+              <a:ext uri="{FF2B5EF4-FFF2-40B4-BE49-F238E27FC236}">
+                <a16:creationId xmlns:a16="http://schemas.microsoft.com/office/drawing/2014/main" id="{8E33A868-CCAC-4B23-A112-50D4956A7EEA}"/>
+              </a:ext>
+            </a:extLst>
+          </p:cNvPr>
+          <p:cNvSpPr>
+            <a:spLocks xmlns:a="http://schemas.openxmlformats.org/drawingml/2006/main" noGrp="1"/>
+          </p:cNvSpPr>
+          <p:nvPr/>
+        </p:nvSpPr>
+        <p:spPr>
+          <a:xfrm xmlns:a="http://schemas.openxmlformats.org/drawingml/2006/main">
+            <a:off x="8801100" y="4248150"/>
+            <a:ext cx="1714500" cy="190500"/>
+          </a:xfrm>
+          <a:prstGeom xmlns:a="http://schemas.openxmlformats.org/drawingml/2006/main" prst="rect">
+            <a:avLst/>
+          </a:prstGeom>
+          <a:noFill xmlns:a="http://schemas.openxmlformats.org/drawingml/2006/main"/>
+          <a:ln xmlns:a="http://schemas.openxmlformats.org/drawingml/2006/main" w="0">
+            <a:noFill/>
+            <a:prstDash val="solid"/>
+          </a:ln>
+        </p:spPr>
+        <p:txBody>
+          <a:bodyPr xmlns:a="http://schemas.openxmlformats.org/drawingml/2006/main" wrap="square" lIns="0" tIns="0" rIns="0" bIns="0" anchor="t">
+            <a:normAutofit fontScale="100000"/>
+          </a:bodyPr>
+          <a:lstStyle xmlns:a="http://schemas.openxmlformats.org/drawingml/2006/main">
+            <a:defPPr algn="l">
+              <a:defRPr sz="975" b="1">
+                <a:solidFill>
+                  <a:srgbClr val="2C6B50"/>
+                </a:solidFill>
+                <a:latin typeface="Calibri"/>
+                <a:ea typeface="Calibri"/>
+                <a:cs typeface="Calibri"/>
+              </a:defRPr>
+            </a:defPPr>
+          </a:lstStyle>
+          <a:p xmlns:a="http://schemas.openxmlformats.org/drawingml/2006/main">
+            <a:pPr algn="l">
+              <a:defRPr sz="975" b="1">
+                <a:solidFill>
+                  <a:srgbClr val="2C6B50"/>
+                </a:solidFill>
+                <a:latin typeface="Calibri"/>
+                <a:ea typeface="Calibri"/>
+                <a:cs typeface="Calibri"/>
+              </a:defRPr>
+            </a:pPr>
+            <a:r>
+              <a:rPr sz="975" b="1">
+                <a:solidFill>
+                  <a:srgbClr val="2C6B50"/>
+                </a:solidFill>
+                <a:latin typeface="Calibri"/>
+                <a:ea typeface="Calibri"/>
+                <a:cs typeface="Calibri"/>
+              </a:rPr>
+              <a:t>EXPLORE</a:t>
+            </a:r>
+          </a:p>
+        </p:txBody>
+      </p:sp>
+      <p:sp>
+        <p:nvSpPr>
+          <p:cNvPr id="22" name="">
+            <a:extLst xmlns:a="http://schemas.openxmlformats.org/drawingml/2006/main">
+              <a:ext uri="{FF2B5EF4-FFF2-40B4-BE49-F238E27FC236}">
+                <a16:creationId xmlns:a16="http://schemas.microsoft.com/office/drawing/2014/main" id="{7A731484-2458-44AB-9C3F-FFF0EB47034F}"/>
+              </a:ext>
+            </a:extLst>
+          </p:cNvPr>
+          <p:cNvSpPr>
+            <a:spLocks xmlns:a="http://schemas.openxmlformats.org/drawingml/2006/main" noGrp="1"/>
+          </p:cNvSpPr>
+          <p:nvPr/>
+        </p:nvSpPr>
+        <p:spPr>
+          <a:xfrm xmlns:a="http://schemas.openxmlformats.org/drawingml/2006/main">
+            <a:off x="8305800" y="4629150"/>
+            <a:ext cx="2857500" cy="285750"/>
+          </a:xfrm>
+          <a:prstGeom xmlns:a="http://schemas.openxmlformats.org/drawingml/2006/main" prst="rect">
+            <a:avLst/>
+          </a:prstGeom>
+          <a:noFill xmlns:a="http://schemas.openxmlformats.org/drawingml/2006/main"/>
+          <a:ln xmlns:a="http://schemas.openxmlformats.org/drawingml/2006/main" w="0">
+            <a:noFill/>
+            <a:prstDash val="solid"/>
+          </a:ln>
+        </p:spPr>
+        <p:txBody>
+          <a:bodyPr xmlns:a="http://schemas.openxmlformats.org/drawingml/2006/main" wrap="square" lIns="0" tIns="0" rIns="0" bIns="0" anchor="t">
+            <a:normAutofit fontScale="100000"/>
+          </a:bodyPr>
+          <a:lstStyle xmlns:a="http://schemas.openxmlformats.org/drawingml/2006/main">
+            <a:defPPr algn="l">
+              <a:defRPr sz="1575" b="1">
+                <a:solidFill>
+                  <a:srgbClr val="153B2E"/>
+                </a:solidFill>
+                <a:latin typeface="Calibri"/>
+                <a:ea typeface="Calibri"/>
+                <a:cs typeface="Calibri"/>
+              </a:defRPr>
+            </a:defPPr>
+          </a:lstStyle>
+          <a:p xmlns:a="http://schemas.openxmlformats.org/drawingml/2006/main">
+            <a:pPr algn="l">
+              <a:defRPr sz="1575" b="1">
+                <a:solidFill>
+                  <a:srgbClr val="153B2E"/>
+                </a:solidFill>
+                <a:latin typeface="Calibri"/>
+                <a:ea typeface="Calibri"/>
+                <a:cs typeface="Calibri"/>
+              </a:defRPr>
+            </a:pPr>
+            <a:r>
+              <a:rPr sz="1575" b="1">
+                <a:solidFill>
+                  <a:srgbClr val="153B2E"/>
+                </a:solidFill>
+                <a:latin typeface="Calibri"/>
+                <a:ea typeface="Calibri"/>
+                <a:cs typeface="Calibri"/>
+              </a:rPr>
+              <a:t>Walk or orbit</a:t>
+            </a:r>
+          </a:p>
+        </p:txBody>
+      </p:sp>
+      <p:sp>
+        <p:nvSpPr>
+          <p:cNvPr id="23" name="">
+            <a:extLst xmlns:a="http://schemas.openxmlformats.org/drawingml/2006/main">
+              <a:ext uri="{FF2B5EF4-FFF2-40B4-BE49-F238E27FC236}">
+                <a16:creationId xmlns:a16="http://schemas.microsoft.com/office/drawing/2014/main" id="{C0F8A22B-94FF-4C7D-AF21-6CDF08AE258E}"/>
+              </a:ext>
+            </a:extLst>
+          </p:cNvPr>
+          <p:cNvSpPr>
+            <a:spLocks xmlns:a="http://schemas.openxmlformats.org/drawingml/2006/main" noGrp="1"/>
+          </p:cNvSpPr>
+          <p:nvPr/>
+        </p:nvSpPr>
+        <p:spPr>
+          <a:xfrm xmlns:a="http://schemas.openxmlformats.org/drawingml/2006/main">
+            <a:off x="8305800" y="4991100"/>
+            <a:ext cx="2857500" cy="571500"/>
+          </a:xfrm>
+          <a:prstGeom xmlns:a="http://schemas.openxmlformats.org/drawingml/2006/main" prst="rect">
+            <a:avLst/>
+          </a:prstGeom>
+          <a:noFill xmlns:a="http://schemas.openxmlformats.org/drawingml/2006/main"/>
+          <a:ln xmlns:a="http://schemas.openxmlformats.org/drawingml/2006/main" w="0">
+            <a:noFill/>
+            <a:prstDash val="solid"/>
+          </a:ln>
+        </p:spPr>
+        <p:txBody>
+          <a:bodyPr xmlns:a="http://schemas.openxmlformats.org/drawingml/2006/main" wrap="square" lIns="0" tIns="0" rIns="0" bIns="0" anchor="t">
+            <a:normAutofit fontScale="100000"/>
+          </a:bodyPr>
+          <a:lstStyle xmlns:a="http://schemas.openxmlformats.org/drawingml/2006/main">
+            <a:defPPr algn="l">
+              <a:defRPr sz="1200" b="0">
+                <a:solidFill>
+                  <a:srgbClr val="60756A"/>
+                </a:solidFill>
+                <a:latin typeface="Calibri"/>
+                <a:ea typeface="Calibri"/>
+                <a:cs typeface="Calibri"/>
+              </a:defRPr>
+            </a:defPPr>
+          </a:lstStyle>
+          <a:p xmlns:a="http://schemas.openxmlformats.org/drawingml/2006/main">
+            <a:pPr algn="l">
+              <a:defRPr sz="1200" b="0">
+                <a:solidFill>
+                  <a:srgbClr val="60756A"/>
+                </a:solidFill>
+                <a:latin typeface="Calibri"/>
+                <a:ea typeface="Calibri"/>
+                <a:cs typeface="Calibri"/>
+              </a:defRPr>
+            </a:pPr>
+            <a:r>
+              <a:rPr sz="1200" b="0">
+                <a:solidFill>
+                  <a:srgbClr val="60756A"/>
+                </a:solidFill>
+                <a:latin typeface="Calibri"/>
+                <a:ea typeface="Calibri"/>
+                <a:cs typeface="Calibri"/>
+              </a:rPr>
+              <a:t>Move through rooms, climb connected floors and play the build animation.</a:t>
             </a:r>
           </a:p>
         </p:txBody>
@@ -6063,7 +6129,7 @@
     </p:spTree>
     <p:extLst>
       <p:ext uri="{BB962C8B-B14F-4D97-AF65-F5344CB8AC3E}">
-        <p14:creationId xmlns:p14="http://schemas.microsoft.com/office/powerpoint/2010/main" val="1513793807"/>
+        <p14:creationId xmlns:p14="http://schemas.microsoft.com/office/powerpoint/2010/main" val="589162056"/>
       </p:ext>
     </p:extLst>
   </p:cSld>
@@ -6091,10 +6157,10 @@
       </p:grpSpPr>
       <p:sp>
         <p:nvSpPr>
-          <p:cNvPr id="31" name="">
-            <a:extLst xmlns:a="http://schemas.openxmlformats.org/drawingml/2006/main">
-              <a:ext uri="{FF2B5EF4-FFF2-40B4-BE49-F238E27FC236}">
-                <a16:creationId xmlns:a16="http://schemas.microsoft.com/office/drawing/2014/main" id="{9DB742A5-E8D0-4547-8608-17D99A875FB5}"/>
+          <p:cNvPr id="21" name="">
+            <a:extLst xmlns:a="http://schemas.openxmlformats.org/drawingml/2006/main">
+              <a:ext uri="{FF2B5EF4-FFF2-40B4-BE49-F238E27FC236}">
+                <a16:creationId xmlns:a16="http://schemas.microsoft.com/office/drawing/2014/main" id="{C62E73BB-7EF2-4FF2-B173-DB260E16E223}"/>
               </a:ext>
             </a:extLst>
           </p:cNvPr>
@@ -6125,7 +6191,7 @@
           <p:cNvPr id="2" name="">
             <a:extLst xmlns:a="http://schemas.openxmlformats.org/drawingml/2006/main">
               <a:ext uri="{FF2B5EF4-FFF2-40B4-BE49-F238E27FC236}">
-                <a16:creationId xmlns:a16="http://schemas.microsoft.com/office/drawing/2014/main" id="{1A43FCC6-CEF9-48D9-BB14-C1288C4A76CA}"/>
+                <a16:creationId xmlns:a16="http://schemas.microsoft.com/office/drawing/2014/main" id="{AF0FA847-69B3-4526-A727-177677B8B720}"/>
               </a:ext>
             </a:extLst>
           </p:cNvPr>
@@ -6136,8 +6202,8 @@
         </p:nvSpPr>
         <p:spPr>
           <a:xfrm xmlns:a="http://schemas.openxmlformats.org/drawingml/2006/main">
-            <a:off x="609600" y="361950"/>
-            <a:ext cx="2857500" cy="190500"/>
+            <a:off x="609600" y="342900"/>
+            <a:ext cx="4762500" cy="190500"/>
           </a:xfrm>
           <a:prstGeom xmlns:a="http://schemas.openxmlformats.org/drawingml/2006/main" prst="rect">
             <a:avLst/>
@@ -6166,10 +6232,6 @@
           </a:lstStyle>
           <a:p xmlns:a="http://schemas.openxmlformats.org/drawingml/2006/main">
             <a:pPr algn="l">
-              <a:lnSpc>
-                <a:spcPct val="100000"/>
-              </a:lnSpc>
-              <a:buNone/>
               <a:defRPr sz="975" b="1">
                 <a:solidFill>
                   <a:srgbClr val="2C6B50"/>
@@ -6188,7 +6250,7 @@
                 <a:ea typeface="Calibri"/>
                 <a:cs typeface="Calibri"/>
               </a:rPr>
-              <a:t>HOW IT WORKS</a:t>
+              <a:t>SCALABILITY</a:t>
             </a:r>
           </a:p>
         </p:txBody>
@@ -6198,7 +6260,7 @@
           <p:cNvPr id="3" name="">
             <a:extLst xmlns:a="http://schemas.openxmlformats.org/drawingml/2006/main">
               <a:ext uri="{FF2B5EF4-FFF2-40B4-BE49-F238E27FC236}">
-                <a16:creationId xmlns:a16="http://schemas.microsoft.com/office/drawing/2014/main" id="{1658CD2D-DB41-4C74-8916-3DDFDD58DBC2}"/>
+                <a16:creationId xmlns:a16="http://schemas.microsoft.com/office/drawing/2014/main" id="{D7701CFE-E8E0-4173-A9EA-D8653D988970}"/>
               </a:ext>
             </a:extLst>
           </p:cNvPr>
@@ -6209,8 +6271,8 @@
         </p:nvSpPr>
         <p:spPr>
           <a:xfrm xmlns:a="http://schemas.openxmlformats.org/drawingml/2006/main">
-            <a:off x="11239500" y="6362700"/>
-            <a:ext cx="381000" cy="190500"/>
+            <a:off x="11163300" y="6362700"/>
+            <a:ext cx="457200" cy="171450"/>
           </a:xfrm>
           <a:prstGeom xmlns:a="http://schemas.openxmlformats.org/drawingml/2006/main" prst="rect">
             <a:avLst/>
@@ -6239,10 +6301,6 @@
           </a:lstStyle>
           <a:p xmlns:a="http://schemas.openxmlformats.org/drawingml/2006/main">
             <a:pPr algn="r">
-              <a:lnSpc>
-                <a:spcPct val="100000"/>
-              </a:lnSpc>
-              <a:buNone/>
               <a:defRPr sz="900" b="1">
                 <a:solidFill>
                   <a:srgbClr val="60756A"/>
@@ -6271,7 +6329,7 @@
           <p:cNvPr id="4" name="">
             <a:extLst xmlns:a="http://schemas.openxmlformats.org/drawingml/2006/main">
               <a:ext uri="{FF2B5EF4-FFF2-40B4-BE49-F238E27FC236}">
-                <a16:creationId xmlns:a16="http://schemas.microsoft.com/office/drawing/2014/main" id="{AAFBF65E-1832-4BAD-9F72-69FA31A4C8BD}"/>
+                <a16:creationId xmlns:a16="http://schemas.microsoft.com/office/drawing/2014/main" id="{5AB679CB-911E-4C04-9C6B-3C09B5F22BD5}"/>
               </a:ext>
             </a:extLst>
           </p:cNvPr>
@@ -6282,8 +6340,8 @@
         </p:nvSpPr>
         <p:spPr>
           <a:xfrm xmlns:a="http://schemas.openxmlformats.org/drawingml/2006/main">
-            <a:off x="609600" y="857250"/>
-            <a:ext cx="9048750" cy="552450"/>
+            <a:off x="609600" y="838200"/>
+            <a:ext cx="10001250" cy="552450"/>
           </a:xfrm>
           <a:prstGeom xmlns:a="http://schemas.openxmlformats.org/drawingml/2006/main" prst="rect">
             <a:avLst/>
@@ -6300,7 +6358,7 @@
           </a:bodyPr>
           <a:lstStyle xmlns:a="http://schemas.openxmlformats.org/drawingml/2006/main">
             <a:defPPr algn="l">
-              <a:defRPr sz="3150" b="1">
+              <a:defRPr sz="3000" b="1">
                 <a:solidFill>
                   <a:srgbClr val="153B2E"/>
                 </a:solidFill>
@@ -6312,11 +6370,7 @@
           </a:lstStyle>
           <a:p xmlns:a="http://schemas.openxmlformats.org/drawingml/2006/main">
             <a:pPr algn="l">
-              <a:lnSpc>
-                <a:spcPct val="100000"/>
-              </a:lnSpc>
-              <a:buNone/>
-              <a:defRPr sz="3150" b="1">
+              <a:defRPr sz="3000" b="1">
                 <a:solidFill>
                   <a:srgbClr val="153B2E"/>
                 </a:solidFill>
@@ -6326,7 +6380,7 @@
               </a:defRPr>
             </a:pPr>
             <a:r>
-              <a:rPr sz="3150" b="1">
+              <a:rPr sz="3000" b="1">
                 <a:solidFill>
                   <a:srgbClr val="153B2E"/>
                 </a:solidFill>
@@ -6334,7 +6388,7 @@
                 <a:ea typeface="Calibri"/>
                 <a:cs typeface="Calibri"/>
               </a:rPr>
-              <a:t>From pixels to a navigable model.</a:t>
+              <a:t>Start with one home. Build toward more.</a:t>
             </a:r>
           </a:p>
         </p:txBody>
@@ -6344,7 +6398,7 @@
           <p:cNvPr id="5" name="">
             <a:extLst xmlns:a="http://schemas.openxmlformats.org/drawingml/2006/main">
               <a:ext uri="{FF2B5EF4-FFF2-40B4-BE49-F238E27FC236}">
-                <a16:creationId xmlns:a16="http://schemas.microsoft.com/office/drawing/2014/main" id="{CD61D886-8F20-4E44-AD1B-2004B3171264}"/>
+                <a16:creationId xmlns:a16="http://schemas.microsoft.com/office/drawing/2014/main" id="{872D91E9-E4D9-492B-866B-168461701DA7}"/>
               </a:ext>
             </a:extLst>
           </p:cNvPr>
@@ -6355,8 +6409,8 @@
         </p:nvSpPr>
         <p:spPr>
           <a:xfrm xmlns:a="http://schemas.openxmlformats.org/drawingml/2006/main">
-            <a:off x="628650" y="1524000"/>
-            <a:ext cx="8191500" cy="285750"/>
+            <a:off x="628650" y="1495425"/>
+            <a:ext cx="8858250" cy="285750"/>
           </a:xfrm>
           <a:prstGeom xmlns:a="http://schemas.openxmlformats.org/drawingml/2006/main" prst="rect">
             <a:avLst/>
@@ -6373,7 +6427,7 @@
           </a:bodyPr>
           <a:lstStyle xmlns:a="http://schemas.openxmlformats.org/drawingml/2006/main">
             <a:defPPr algn="l">
-              <a:defRPr sz="1425" b="0">
+              <a:defRPr sz="1500" b="0">
                 <a:solidFill>
                   <a:srgbClr val="60756A"/>
                 </a:solidFill>
@@ -6385,11 +6439,7 @@
           </a:lstStyle>
           <a:p xmlns:a="http://schemas.openxmlformats.org/drawingml/2006/main">
             <a:pPr algn="l">
-              <a:lnSpc>
-                <a:spcPct val="100000"/>
-              </a:lnSpc>
-              <a:buNone/>
-              <a:defRPr sz="1425" b="0">
+              <a:defRPr sz="1500" b="0">
                 <a:solidFill>
                   <a:srgbClr val="60756A"/>
                 </a:solidFill>
@@ -6399,7 +6449,7 @@
               </a:defRPr>
             </a:pPr>
             <a:r>
-              <a:rPr sz="1425" b="0">
+              <a:rPr sz="1500" b="0">
                 <a:solidFill>
                   <a:srgbClr val="60756A"/>
                 </a:solidFill>
@@ -6407,7 +6457,7 @@
                 <a:ea typeface="Calibri"/>
                 <a:cs typeface="Calibri"/>
               </a:rPr>
-              <a:t>Four focused steps keep the journey understandable.</a:t>
+              <a:t>A working base today, with clear steps for broader use.</a:t>
             </a:r>
           </a:p>
         </p:txBody>
@@ -6417,7 +6467,7 @@
           <p:cNvPr id="6" name="">
             <a:extLst xmlns:a="http://schemas.openxmlformats.org/drawingml/2006/main">
               <a:ext uri="{FF2B5EF4-FFF2-40B4-BE49-F238E27FC236}">
-                <a16:creationId xmlns:a16="http://schemas.microsoft.com/office/drawing/2014/main" id="{29CA5613-B399-4EE2-A863-BA1D43C906C1}"/>
+                <a16:creationId xmlns:a16="http://schemas.microsoft.com/office/drawing/2014/main" id="{6932D62D-7A3C-48FD-8CF8-C52871E14A3F}"/>
               </a:ext>
             </a:extLst>
           </p:cNvPr>
@@ -6428,87 +6478,14 @@
         </p:nvSpPr>
         <p:spPr>
           <a:xfrm xmlns:a="http://schemas.openxmlformats.org/drawingml/2006/main">
-            <a:off x="647700" y="2476500"/>
-            <a:ext cx="685800" cy="514350"/>
-          </a:xfrm>
-          <a:prstGeom xmlns:a="http://schemas.openxmlformats.org/drawingml/2006/main" prst="rect">
-            <a:avLst/>
-          </a:prstGeom>
-          <a:noFill xmlns:a="http://schemas.openxmlformats.org/drawingml/2006/main"/>
-          <a:ln xmlns:a="http://schemas.openxmlformats.org/drawingml/2006/main" w="0">
-            <a:noFill/>
-            <a:prstDash val="solid"/>
-          </a:ln>
-        </p:spPr>
-        <p:txBody>
-          <a:bodyPr xmlns:a="http://schemas.openxmlformats.org/drawingml/2006/main" wrap="square" lIns="0" tIns="0" rIns="0" bIns="0" anchor="t">
-            <a:normAutofit fontScale="100000"/>
-          </a:bodyPr>
-          <a:lstStyle xmlns:a="http://schemas.openxmlformats.org/drawingml/2006/main">
-            <a:defPPr algn="l">
-              <a:defRPr sz="2775" b="1">
-                <a:solidFill>
-                  <a:srgbClr val="2C6B50"/>
-                </a:solidFill>
-                <a:latin typeface="Calibri"/>
-                <a:ea typeface="Calibri"/>
-                <a:cs typeface="Calibri"/>
-              </a:defRPr>
-            </a:defPPr>
-          </a:lstStyle>
-          <a:p xmlns:a="http://schemas.openxmlformats.org/drawingml/2006/main">
-            <a:pPr algn="l">
-              <a:lnSpc>
-                <a:spcPct val="100000"/>
-              </a:lnSpc>
-              <a:buNone/>
-              <a:defRPr sz="2775" b="1">
-                <a:solidFill>
-                  <a:srgbClr val="2C6B50"/>
-                </a:solidFill>
-                <a:latin typeface="Calibri"/>
-                <a:ea typeface="Calibri"/>
-                <a:cs typeface="Calibri"/>
-              </a:defRPr>
-            </a:pPr>
-            <a:r>
-              <a:rPr sz="2775" b="1">
-                <a:solidFill>
-                  <a:srgbClr val="2C6B50"/>
-                </a:solidFill>
-                <a:latin typeface="Calibri"/>
-                <a:ea typeface="Calibri"/>
-                <a:cs typeface="Calibri"/>
-              </a:rPr>
-              <a:t>01</a:t>
-            </a:r>
-          </a:p>
-        </p:txBody>
-      </p:sp>
-      <p:sp>
-        <p:nvSpPr>
-          <p:cNvPr id="7" name="">
-            <a:extLst xmlns:a="http://schemas.openxmlformats.org/drawingml/2006/main">
-              <a:ext uri="{FF2B5EF4-FFF2-40B4-BE49-F238E27FC236}">
-                <a16:creationId xmlns:a16="http://schemas.microsoft.com/office/drawing/2014/main" id="{C4138496-F8A1-4346-A3C3-7B829061DA45}"/>
-              </a:ext>
-            </a:extLst>
-          </p:cNvPr>
-          <p:cNvSpPr>
-            <a:spLocks xmlns:a="http://schemas.openxmlformats.org/drawingml/2006/main" noGrp="1"/>
-          </p:cNvSpPr>
-          <p:nvPr/>
-        </p:nvSpPr>
-        <p:spPr>
-          <a:xfrm xmlns:a="http://schemas.openxmlformats.org/drawingml/2006/main">
-            <a:off x="647700" y="3105150"/>
-            <a:ext cx="2000250" cy="28575"/>
+            <a:off x="628650" y="2362200"/>
+            <a:ext cx="10934700" cy="800100"/>
           </a:xfrm>
           <a:prstGeom xmlns:a="http://schemas.openxmlformats.org/drawingml/2006/main" prst="rect">
             <a:avLst/>
           </a:prstGeom>
           <a:solidFill xmlns:a="http://schemas.openxmlformats.org/drawingml/2006/main">
-            <a:srgbClr val="C8D6CC"/>
+            <a:srgbClr val="E9F0E9"/>
           </a:solidFill>
           <a:ln xmlns:a="http://schemas.openxmlformats.org/drawingml/2006/main" w="0">
             <a:noFill/>
@@ -6518,10 +6495,10 @@
       </p:sp>
       <p:sp>
         <p:nvSpPr>
-          <p:cNvPr id="8" name="">
-            <a:extLst xmlns:a="http://schemas.openxmlformats.org/drawingml/2006/main">
-              <a:ext uri="{FF2B5EF4-FFF2-40B4-BE49-F238E27FC236}">
-                <a16:creationId xmlns:a16="http://schemas.microsoft.com/office/drawing/2014/main" id="{946C63B6-36D9-454B-A518-34973D1F64A4}"/>
+          <p:cNvPr id="7" name="">
+            <a:extLst xmlns:a="http://schemas.openxmlformats.org/drawingml/2006/main">
+              <a:ext uri="{FF2B5EF4-FFF2-40B4-BE49-F238E27FC236}">
+                <a16:creationId xmlns:a16="http://schemas.microsoft.com/office/drawing/2014/main" id="{3C69C0C4-3BBB-45EF-BBCE-1F6737F11E8F}"/>
               </a:ext>
             </a:extLst>
           </p:cNvPr>
@@ -6532,154 +6509,8 @@
         </p:nvSpPr>
         <p:spPr>
           <a:xfrm xmlns:a="http://schemas.openxmlformats.org/drawingml/2006/main">
-            <a:off x="647700" y="3371850"/>
-            <a:ext cx="2095500" cy="371475"/>
-          </a:xfrm>
-          <a:prstGeom xmlns:a="http://schemas.openxmlformats.org/drawingml/2006/main" prst="rect">
-            <a:avLst/>
-          </a:prstGeom>
-          <a:noFill xmlns:a="http://schemas.openxmlformats.org/drawingml/2006/main"/>
-          <a:ln xmlns:a="http://schemas.openxmlformats.org/drawingml/2006/main" w="0">
-            <a:noFill/>
-            <a:prstDash val="solid"/>
-          </a:ln>
-        </p:spPr>
-        <p:txBody>
-          <a:bodyPr xmlns:a="http://schemas.openxmlformats.org/drawingml/2006/main" wrap="square" lIns="0" tIns="0" rIns="0" bIns="0" anchor="t">
-            <a:normAutofit fontScale="100000"/>
-          </a:bodyPr>
-          <a:lstStyle xmlns:a="http://schemas.openxmlformats.org/drawingml/2006/main">
-            <a:defPPr algn="l">
-              <a:defRPr sz="1950" b="1">
-                <a:solidFill>
-                  <a:srgbClr val="153B2E"/>
-                </a:solidFill>
-                <a:latin typeface="Calibri"/>
-                <a:ea typeface="Calibri"/>
-                <a:cs typeface="Calibri"/>
-              </a:defRPr>
-            </a:defPPr>
-          </a:lstStyle>
-          <a:p xmlns:a="http://schemas.openxmlformats.org/drawingml/2006/main">
-            <a:pPr algn="l">
-              <a:lnSpc>
-                <a:spcPct val="100000"/>
-              </a:lnSpc>
-              <a:buNone/>
-              <a:defRPr sz="1950" b="1">
-                <a:solidFill>
-                  <a:srgbClr val="153B2E"/>
-                </a:solidFill>
-                <a:latin typeface="Calibri"/>
-                <a:ea typeface="Calibri"/>
-                <a:cs typeface="Calibri"/>
-              </a:defRPr>
-            </a:pPr>
-            <a:r>
-              <a:rPr sz="1950" b="1">
-                <a:solidFill>
-                  <a:srgbClr val="153B2E"/>
-                </a:solidFill>
-                <a:latin typeface="Calibri"/>
-                <a:ea typeface="Calibri"/>
-                <a:cs typeface="Calibri"/>
-              </a:rPr>
-              <a:t>Read</a:t>
-            </a:r>
-          </a:p>
-        </p:txBody>
-      </p:sp>
-      <p:sp>
-        <p:nvSpPr>
-          <p:cNvPr id="9" name="">
-            <a:extLst xmlns:a="http://schemas.openxmlformats.org/drawingml/2006/main">
-              <a:ext uri="{FF2B5EF4-FFF2-40B4-BE49-F238E27FC236}">
-                <a16:creationId xmlns:a16="http://schemas.microsoft.com/office/drawing/2014/main" id="{89E962E1-8781-4C3B-AAAA-E96AC34CFCF0}"/>
-              </a:ext>
-            </a:extLst>
-          </p:cNvPr>
-          <p:cNvSpPr>
-            <a:spLocks xmlns:a="http://schemas.openxmlformats.org/drawingml/2006/main" noGrp="1"/>
-          </p:cNvSpPr>
-          <p:nvPr/>
-        </p:nvSpPr>
-        <p:spPr>
-          <a:xfrm xmlns:a="http://schemas.openxmlformats.org/drawingml/2006/main">
-            <a:off x="647700" y="3895725"/>
-            <a:ext cx="2143125" cy="952500"/>
-          </a:xfrm>
-          <a:prstGeom xmlns:a="http://schemas.openxmlformats.org/drawingml/2006/main" prst="rect">
-            <a:avLst/>
-          </a:prstGeom>
-          <a:noFill xmlns:a="http://schemas.openxmlformats.org/drawingml/2006/main"/>
-          <a:ln xmlns:a="http://schemas.openxmlformats.org/drawingml/2006/main" w="0">
-            <a:noFill/>
-            <a:prstDash val="solid"/>
-          </a:ln>
-        </p:spPr>
-        <p:txBody>
-          <a:bodyPr xmlns:a="http://schemas.openxmlformats.org/drawingml/2006/main" wrap="square" lIns="0" tIns="0" rIns="0" bIns="0" anchor="t">
-            <a:normAutofit fontScale="100000"/>
-          </a:bodyPr>
-          <a:lstStyle xmlns:a="http://schemas.openxmlformats.org/drawingml/2006/main">
-            <a:defPPr algn="l">
-              <a:defRPr sz="1350" b="0">
-                <a:solidFill>
-                  <a:srgbClr val="60756A"/>
-                </a:solidFill>
-                <a:latin typeface="Calibri"/>
-                <a:ea typeface="Calibri"/>
-                <a:cs typeface="Calibri"/>
-              </a:defRPr>
-            </a:defPPr>
-          </a:lstStyle>
-          <a:p xmlns:a="http://schemas.openxmlformats.org/drawingml/2006/main">
-            <a:pPr algn="l">
-              <a:lnSpc>
-                <a:spcPct val="108000"/>
-              </a:lnSpc>
-              <a:buNone/>
-              <a:defRPr sz="1350" b="0">
-                <a:solidFill>
-                  <a:srgbClr val="60756A"/>
-                </a:solidFill>
-                <a:latin typeface="Calibri"/>
-                <a:ea typeface="Calibri"/>
-                <a:cs typeface="Calibri"/>
-              </a:defRPr>
-            </a:pPr>
-            <a:r>
-              <a:rPr sz="1350" b="0">
-                <a:solidFill>
-                  <a:srgbClr val="60756A"/>
-                </a:solidFill>
-                <a:latin typeface="Calibri"/>
-                <a:ea typeface="Calibri"/>
-                <a:cs typeface="Calibri"/>
-              </a:rPr>
-              <a:t>PDF.js reads vector and raster plan files in the browser.</a:t>
-            </a:r>
-          </a:p>
-        </p:txBody>
-      </p:sp>
-      <p:sp>
-        <p:nvSpPr>
-          <p:cNvPr id="10" name="">
-            <a:extLst xmlns:a="http://schemas.openxmlformats.org/drawingml/2006/main">
-              <a:ext uri="{FF2B5EF4-FFF2-40B4-BE49-F238E27FC236}">
-                <a16:creationId xmlns:a16="http://schemas.microsoft.com/office/drawing/2014/main" id="{6010F2A7-0EC5-42B1-AB13-EFA875506EBE}"/>
-              </a:ext>
-            </a:extLst>
-          </p:cNvPr>
-          <p:cNvSpPr>
-            <a:spLocks xmlns:a="http://schemas.openxmlformats.org/drawingml/2006/main" noGrp="1"/>
-          </p:cNvSpPr>
-          <p:nvPr/>
-        </p:nvSpPr>
-        <p:spPr>
-          <a:xfrm xmlns:a="http://schemas.openxmlformats.org/drawingml/2006/main">
-            <a:off x="647700" y="5219700"/>
-            <a:ext cx="2190750" cy="361950"/>
+            <a:off x="857250" y="2524125"/>
+            <a:ext cx="1809750" cy="190500"/>
           </a:xfrm>
           <a:prstGeom xmlns:a="http://schemas.openxmlformats.org/drawingml/2006/main" prst="rect">
             <a:avLst/>
@@ -6708,10 +6539,6 @@
           </a:lstStyle>
           <a:p xmlns:a="http://schemas.openxmlformats.org/drawingml/2006/main">
             <a:pPr algn="l">
-              <a:lnSpc>
-                <a:spcPct val="100000"/>
-              </a:lnSpc>
-              <a:buNone/>
               <a:defRPr sz="975" b="1">
                 <a:solidFill>
                   <a:srgbClr val="2C6B50"/>
@@ -6730,17 +6557,17 @@
                 <a:ea typeface="Calibri"/>
                 <a:cs typeface="Calibri"/>
               </a:rPr>
-              <a:t>PDF.js · browser parsing</a:t>
+              <a:t>WORKING TODAY</a:t>
             </a:r>
           </a:p>
         </p:txBody>
       </p:sp>
       <p:sp>
         <p:nvSpPr>
-          <p:cNvPr id="11" name="">
-            <a:extLst xmlns:a="http://schemas.openxmlformats.org/drawingml/2006/main">
-              <a:ext uri="{FF2B5EF4-FFF2-40B4-BE49-F238E27FC236}">
-                <a16:creationId xmlns:a16="http://schemas.microsoft.com/office/drawing/2014/main" id="{B9618519-84C1-4526-879F-CB2ECC09191F}"/>
+          <p:cNvPr id="8" name="">
+            <a:extLst xmlns:a="http://schemas.openxmlformats.org/drawingml/2006/main">
+              <a:ext uri="{FF2B5EF4-FFF2-40B4-BE49-F238E27FC236}">
+                <a16:creationId xmlns:a16="http://schemas.microsoft.com/office/drawing/2014/main" id="{21C9B44F-888E-43DA-8720-DF37246DA851}"/>
               </a:ext>
             </a:extLst>
           </p:cNvPr>
@@ -6751,39 +6578,8 @@
         </p:nvSpPr>
         <p:spPr>
           <a:xfrm xmlns:a="http://schemas.openxmlformats.org/drawingml/2006/main">
-            <a:off x="2819400" y="3038475"/>
-            <a:ext cx="476250" cy="190500"/>
-          </a:xfrm>
-          <a:prstGeom xmlns:a="http://schemas.openxmlformats.org/drawingml/2006/main" prst="rightArrow">
-            <a:avLst/>
-          </a:prstGeom>
-          <a:solidFill xmlns:a="http://schemas.openxmlformats.org/drawingml/2006/main">
-            <a:srgbClr val="D9E8DC"/>
-          </a:solidFill>
-          <a:ln xmlns:a="http://schemas.openxmlformats.org/drawingml/2006/main" w="0">
-            <a:noFill/>
-            <a:prstDash val="solid"/>
-          </a:ln>
-        </p:spPr>
-      </p:sp>
-      <p:sp>
-        <p:nvSpPr>
-          <p:cNvPr id="12" name="">
-            <a:extLst xmlns:a="http://schemas.openxmlformats.org/drawingml/2006/main">
-              <a:ext uri="{FF2B5EF4-FFF2-40B4-BE49-F238E27FC236}">
-                <a16:creationId xmlns:a16="http://schemas.microsoft.com/office/drawing/2014/main" id="{47F42FFE-70F7-485B-90AC-E1CFA43033EF}"/>
-              </a:ext>
-            </a:extLst>
-          </p:cNvPr>
-          <p:cNvSpPr>
-            <a:spLocks xmlns:a="http://schemas.openxmlformats.org/drawingml/2006/main" noGrp="1"/>
-          </p:cNvSpPr>
-          <p:nvPr/>
-        </p:nvSpPr>
-        <p:spPr>
-          <a:xfrm xmlns:a="http://schemas.openxmlformats.org/drawingml/2006/main">
-            <a:off x="3476625" y="2476500"/>
-            <a:ext cx="685800" cy="514350"/>
+            <a:off x="2876550" y="2505075"/>
+            <a:ext cx="3095625" cy="266700"/>
           </a:xfrm>
           <a:prstGeom xmlns:a="http://schemas.openxmlformats.org/drawingml/2006/main" prst="rect">
             <a:avLst/>
@@ -6800,9 +6596,9 @@
           </a:bodyPr>
           <a:lstStyle xmlns:a="http://schemas.openxmlformats.org/drawingml/2006/main">
             <a:defPPr algn="l">
-              <a:defRPr sz="2775" b="1">
-                <a:solidFill>
-                  <a:srgbClr val="2C6B50"/>
+              <a:defRPr sz="1650" b="1">
+                <a:solidFill>
+                  <a:srgbClr val="153B2E"/>
                 </a:solidFill>
                 <a:latin typeface="Calibri"/>
                 <a:ea typeface="Calibri"/>
@@ -6812,13 +6608,9 @@
           </a:lstStyle>
           <a:p xmlns:a="http://schemas.openxmlformats.org/drawingml/2006/main">
             <a:pPr algn="l">
-              <a:lnSpc>
-                <a:spcPct val="100000"/>
-              </a:lnSpc>
-              <a:buNone/>
-              <a:defRPr sz="2775" b="1">
-                <a:solidFill>
-                  <a:srgbClr val="2C6B50"/>
+              <a:defRPr sz="1650" b="1">
+                <a:solidFill>
+                  <a:srgbClr val="153B2E"/>
                 </a:solidFill>
                 <a:latin typeface="Calibri"/>
                 <a:ea typeface="Calibri"/>
@@ -6826,25 +6618,25 @@
               </a:defRPr>
             </a:pPr>
             <a:r>
-              <a:rPr sz="2775" b="1">
-                <a:solidFill>
-                  <a:srgbClr val="2C6B50"/>
+              <a:rPr sz="1650" b="1">
+                <a:solidFill>
+                  <a:srgbClr val="153B2E"/>
                 </a:solidFill>
                 <a:latin typeface="Calibri"/>
                 <a:ea typeface="Calibri"/>
                 <a:cs typeface="Calibri"/>
               </a:rPr>
-              <a:t>02</a:t>
+              <a:t>Browser-based workflow</a:t>
             </a:r>
           </a:p>
         </p:txBody>
       </p:sp>
       <p:sp>
         <p:nvSpPr>
-          <p:cNvPr id="13" name="">
-            <a:extLst xmlns:a="http://schemas.openxmlformats.org/drawingml/2006/main">
-              <a:ext uri="{FF2B5EF4-FFF2-40B4-BE49-F238E27FC236}">
-                <a16:creationId xmlns:a16="http://schemas.microsoft.com/office/drawing/2014/main" id="{33ACBD89-1B11-42E3-86C4-3AB2D4F7A242}"/>
+          <p:cNvPr id="9" name="">
+            <a:extLst xmlns:a="http://schemas.openxmlformats.org/drawingml/2006/main">
+              <a:ext uri="{FF2B5EF4-FFF2-40B4-BE49-F238E27FC236}">
+                <a16:creationId xmlns:a16="http://schemas.microsoft.com/office/drawing/2014/main" id="{9887EFB8-5B74-4968-A7EE-0DF4AA78E4DF}"/>
               </a:ext>
             </a:extLst>
           </p:cNvPr>
@@ -6855,39 +6647,8 @@
         </p:nvSpPr>
         <p:spPr>
           <a:xfrm xmlns:a="http://schemas.openxmlformats.org/drawingml/2006/main">
-            <a:off x="3476625" y="3105150"/>
-            <a:ext cx="2000250" cy="28575"/>
-          </a:xfrm>
-          <a:prstGeom xmlns:a="http://schemas.openxmlformats.org/drawingml/2006/main" prst="rect">
-            <a:avLst/>
-          </a:prstGeom>
-          <a:solidFill xmlns:a="http://schemas.openxmlformats.org/drawingml/2006/main">
-            <a:srgbClr val="C8D6CC"/>
-          </a:solidFill>
-          <a:ln xmlns:a="http://schemas.openxmlformats.org/drawingml/2006/main" w="0">
-            <a:noFill/>
-            <a:prstDash val="solid"/>
-          </a:ln>
-        </p:spPr>
-      </p:sp>
-      <p:sp>
-        <p:nvSpPr>
-          <p:cNvPr id="14" name="">
-            <a:extLst xmlns:a="http://schemas.openxmlformats.org/drawingml/2006/main">
-              <a:ext uri="{FF2B5EF4-FFF2-40B4-BE49-F238E27FC236}">
-                <a16:creationId xmlns:a16="http://schemas.microsoft.com/office/drawing/2014/main" id="{D5710DC0-BE3A-4227-B5E7-C7BA5E2D8A42}"/>
-              </a:ext>
-            </a:extLst>
-          </p:cNvPr>
-          <p:cNvSpPr>
-            <a:spLocks xmlns:a="http://schemas.openxmlformats.org/drawingml/2006/main" noGrp="1"/>
-          </p:cNvSpPr>
-          <p:nvPr/>
-        </p:nvSpPr>
-        <p:spPr>
-          <a:xfrm xmlns:a="http://schemas.openxmlformats.org/drawingml/2006/main">
-            <a:off x="3476625" y="3371850"/>
-            <a:ext cx="2095500" cy="371475"/>
+            <a:off x="2876550" y="2819400"/>
+            <a:ext cx="8382000" cy="219075"/>
           </a:xfrm>
           <a:prstGeom xmlns:a="http://schemas.openxmlformats.org/drawingml/2006/main" prst="rect">
             <a:avLst/>
@@ -6904,9 +6665,9 @@
           </a:bodyPr>
           <a:lstStyle xmlns:a="http://schemas.openxmlformats.org/drawingml/2006/main">
             <a:defPPr algn="l">
-              <a:defRPr sz="1950" b="1">
-                <a:solidFill>
-                  <a:srgbClr val="153B2E"/>
+              <a:defRPr sz="1200" b="0">
+                <a:solidFill>
+                  <a:srgbClr val="60756A"/>
                 </a:solidFill>
                 <a:latin typeface="Calibri"/>
                 <a:ea typeface="Calibri"/>
@@ -6916,13 +6677,9 @@
           </a:lstStyle>
           <a:p xmlns:a="http://schemas.openxmlformats.org/drawingml/2006/main">
             <a:pPr algn="l">
-              <a:lnSpc>
-                <a:spcPct val="100000"/>
-              </a:lnSpc>
-              <a:buNone/>
-              <a:defRPr sz="1950" b="1">
-                <a:solidFill>
-                  <a:srgbClr val="153B2E"/>
+              <a:defRPr sz="1200" b="0">
+                <a:solidFill>
+                  <a:srgbClr val="60756A"/>
                 </a:solidFill>
                 <a:latin typeface="Calibri"/>
                 <a:ea typeface="Calibri"/>
@@ -6930,25 +6687,25 @@
               </a:defRPr>
             </a:pPr>
             <a:r>
-              <a:rPr sz="1950" b="1">
-                <a:solidFill>
-                  <a:srgbClr val="153B2E"/>
+              <a:rPr sz="1200" b="0">
+                <a:solidFill>
+                  <a:srgbClr val="60756A"/>
                 </a:solidFill>
                 <a:latin typeface="Calibri"/>
                 <a:ea typeface="Calibri"/>
                 <a:cs typeface="Calibri"/>
               </a:rPr>
-              <a:t>Interpret</a:t>
+              <a:t>PDF, PNG and JPG inputs · three-floor sample model · local rendering</a:t>
             </a:r>
           </a:p>
         </p:txBody>
       </p:sp>
       <p:sp>
         <p:nvSpPr>
-          <p:cNvPr id="15" name="">
-            <a:extLst xmlns:a="http://schemas.openxmlformats.org/drawingml/2006/main">
-              <a:ext uri="{FF2B5EF4-FFF2-40B4-BE49-F238E27FC236}">
-                <a16:creationId xmlns:a16="http://schemas.microsoft.com/office/drawing/2014/main" id="{B7519FA8-69C9-4874-94E1-85E7663B78EE}"/>
+          <p:cNvPr id="10" name="">
+            <a:extLst xmlns:a="http://schemas.openxmlformats.org/drawingml/2006/main">
+              <a:ext uri="{FF2B5EF4-FFF2-40B4-BE49-F238E27FC236}">
+                <a16:creationId xmlns:a16="http://schemas.microsoft.com/office/drawing/2014/main" id="{CB332375-599A-4EDF-B503-6B3AC3F1968C}"/>
               </a:ext>
             </a:extLst>
           </p:cNvPr>
@@ -6959,69 +6716,27 @@
         </p:nvSpPr>
         <p:spPr>
           <a:xfrm xmlns:a="http://schemas.openxmlformats.org/drawingml/2006/main">
-            <a:off x="3476625" y="3895725"/>
-            <a:ext cx="2143125" cy="952500"/>
-          </a:xfrm>
-          <a:prstGeom xmlns:a="http://schemas.openxmlformats.org/drawingml/2006/main" prst="rect">
-            <a:avLst/>
-          </a:prstGeom>
-          <a:noFill xmlns:a="http://schemas.openxmlformats.org/drawingml/2006/main"/>
+            <a:off x="628650" y="3333750"/>
+            <a:ext cx="10934700" cy="800100"/>
+          </a:xfrm>
+          <a:prstGeom xmlns:a="http://schemas.openxmlformats.org/drawingml/2006/main" prst="rect">
+            <a:avLst/>
+          </a:prstGeom>
+          <a:solidFill xmlns:a="http://schemas.openxmlformats.org/drawingml/2006/main">
+            <a:srgbClr val="D9E8DC"/>
+          </a:solidFill>
           <a:ln xmlns:a="http://schemas.openxmlformats.org/drawingml/2006/main" w="0">
             <a:noFill/>
             <a:prstDash val="solid"/>
           </a:ln>
         </p:spPr>
-        <p:txBody>
-          <a:bodyPr xmlns:a="http://schemas.openxmlformats.org/drawingml/2006/main" wrap="square" lIns="0" tIns="0" rIns="0" bIns="0" anchor="t">
-            <a:normAutofit fontScale="100000"/>
-          </a:bodyPr>
-          <a:lstStyle xmlns:a="http://schemas.openxmlformats.org/drawingml/2006/main">
-            <a:defPPr algn="l">
-              <a:defRPr sz="1350" b="0">
-                <a:solidFill>
-                  <a:srgbClr val="60756A"/>
-                </a:solidFill>
-                <a:latin typeface="Calibri"/>
-                <a:ea typeface="Calibri"/>
-                <a:cs typeface="Calibri"/>
-              </a:defRPr>
-            </a:defPPr>
-          </a:lstStyle>
-          <a:p xmlns:a="http://schemas.openxmlformats.org/drawingml/2006/main">
-            <a:pPr algn="l">
-              <a:lnSpc>
-                <a:spcPct val="108000"/>
-              </a:lnSpc>
-              <a:buNone/>
-              <a:defRPr sz="1350" b="0">
-                <a:solidFill>
-                  <a:srgbClr val="60756A"/>
-                </a:solidFill>
-                <a:latin typeface="Calibri"/>
-                <a:ea typeface="Calibri"/>
-                <a:cs typeface="Calibri"/>
-              </a:defRPr>
-            </a:pPr>
-            <a:r>
-              <a:rPr sz="1350" b="0">
-                <a:solidFill>
-                  <a:srgbClr val="60756A"/>
-                </a:solidFill>
-                <a:latin typeface="Calibri"/>
-                <a:ea typeface="Calibri"/>
-                <a:cs typeface="Calibri"/>
-              </a:rPr>
-              <a:t>Room labels, dimensions and openings become structured plan data.</a:t>
-            </a:r>
-          </a:p>
-        </p:txBody>
-      </p:sp>
-      <p:sp>
-        <p:nvSpPr>
-          <p:cNvPr id="16" name="">
-            <a:extLst xmlns:a="http://schemas.openxmlformats.org/drawingml/2006/main">
-              <a:ext uri="{FF2B5EF4-FFF2-40B4-BE49-F238E27FC236}">
-                <a16:creationId xmlns:a16="http://schemas.microsoft.com/office/drawing/2014/main" id="{A013A001-CC06-4914-B5C8-05ADCC7EEFC9}"/>
+      </p:sp>
+      <p:sp>
+        <p:nvSpPr>
+          <p:cNvPr id="11" name="">
+            <a:extLst xmlns:a="http://schemas.openxmlformats.org/drawingml/2006/main">
+              <a:ext uri="{FF2B5EF4-FFF2-40B4-BE49-F238E27FC236}">
+                <a16:creationId xmlns:a16="http://schemas.microsoft.com/office/drawing/2014/main" id="{936ED567-8046-4BF4-9621-C8FFD83143BC}"/>
               </a:ext>
             </a:extLst>
           </p:cNvPr>
@@ -7032,8 +6747,8 @@
         </p:nvSpPr>
         <p:spPr>
           <a:xfrm xmlns:a="http://schemas.openxmlformats.org/drawingml/2006/main">
-            <a:off x="3476625" y="5219700"/>
-            <a:ext cx="2190750" cy="361950"/>
+            <a:off x="857250" y="3495675"/>
+            <a:ext cx="1809750" cy="190500"/>
           </a:xfrm>
           <a:prstGeom xmlns:a="http://schemas.openxmlformats.org/drawingml/2006/main" prst="rect">
             <a:avLst/>
@@ -7052,7 +6767,7 @@
             <a:defPPr algn="l">
               <a:defRPr sz="975" b="1">
                 <a:solidFill>
-                  <a:srgbClr val="2C6B50"/>
+                  <a:srgbClr val="E9795B"/>
                 </a:solidFill>
                 <a:latin typeface="Calibri"/>
                 <a:ea typeface="Calibri"/>
@@ -7062,13 +6777,9 @@
           </a:lstStyle>
           <a:p xmlns:a="http://schemas.openxmlformats.org/drawingml/2006/main">
             <a:pPr algn="l">
-              <a:lnSpc>
-                <a:spcPct val="100000"/>
-              </a:lnSpc>
-              <a:buNone/>
               <a:defRPr sz="975" b="1">
                 <a:solidFill>
-                  <a:srgbClr val="2C6B50"/>
+                  <a:srgbClr val="E9795B"/>
                 </a:solidFill>
                 <a:latin typeface="Calibri"/>
                 <a:ea typeface="Calibri"/>
@@ -7078,23 +6789,23 @@
             <a:r>
               <a:rPr sz="975" b="1">
                 <a:solidFill>
-                  <a:srgbClr val="2C6B50"/>
+                  <a:srgbClr val="E9795B"/>
                 </a:solidFill>
                 <a:latin typeface="Calibri"/>
                 <a:ea typeface="Calibri"/>
                 <a:cs typeface="Calibri"/>
               </a:rPr>
-              <a:t>Gemini Vision · optional</a:t>
+              <a:t>PLANNED NEXT</a:t>
             </a:r>
           </a:p>
         </p:txBody>
       </p:sp>
       <p:sp>
         <p:nvSpPr>
-          <p:cNvPr id="17" name="">
-            <a:extLst xmlns:a="http://schemas.openxmlformats.org/drawingml/2006/main">
-              <a:ext uri="{FF2B5EF4-FFF2-40B4-BE49-F238E27FC236}">
-                <a16:creationId xmlns:a16="http://schemas.microsoft.com/office/drawing/2014/main" id="{A0630642-2012-4F3F-B269-85082A56678E}"/>
+          <p:cNvPr id="12" name="">
+            <a:extLst xmlns:a="http://schemas.openxmlformats.org/drawingml/2006/main">
+              <a:ext uri="{FF2B5EF4-FFF2-40B4-BE49-F238E27FC236}">
+                <a16:creationId xmlns:a16="http://schemas.microsoft.com/office/drawing/2014/main" id="{F7E47A9C-A282-4191-89D3-999D1ED1B06C}"/>
               </a:ext>
             </a:extLst>
           </p:cNvPr>
@@ -7105,39 +6816,8 @@
         </p:nvSpPr>
         <p:spPr>
           <a:xfrm xmlns:a="http://schemas.openxmlformats.org/drawingml/2006/main">
-            <a:off x="5648325" y="3038475"/>
-            <a:ext cx="476250" cy="190500"/>
-          </a:xfrm>
-          <a:prstGeom xmlns:a="http://schemas.openxmlformats.org/drawingml/2006/main" prst="rightArrow">
-            <a:avLst/>
-          </a:prstGeom>
-          <a:solidFill xmlns:a="http://schemas.openxmlformats.org/drawingml/2006/main">
-            <a:srgbClr val="D9E8DC"/>
-          </a:solidFill>
-          <a:ln xmlns:a="http://schemas.openxmlformats.org/drawingml/2006/main" w="0">
-            <a:noFill/>
-            <a:prstDash val="solid"/>
-          </a:ln>
-        </p:spPr>
-      </p:sp>
-      <p:sp>
-        <p:nvSpPr>
-          <p:cNvPr id="18" name="">
-            <a:extLst xmlns:a="http://schemas.openxmlformats.org/drawingml/2006/main">
-              <a:ext uri="{FF2B5EF4-FFF2-40B4-BE49-F238E27FC236}">
-                <a16:creationId xmlns:a16="http://schemas.microsoft.com/office/drawing/2014/main" id="{223784BD-B03F-4DFE-8C17-E10CCB018989}"/>
-              </a:ext>
-            </a:extLst>
-          </p:cNvPr>
-          <p:cNvSpPr>
-            <a:spLocks xmlns:a="http://schemas.openxmlformats.org/drawingml/2006/main" noGrp="1"/>
-          </p:cNvSpPr>
-          <p:nvPr/>
-        </p:nvSpPr>
-        <p:spPr>
-          <a:xfrm xmlns:a="http://schemas.openxmlformats.org/drawingml/2006/main">
-            <a:off x="6305550" y="2476500"/>
-            <a:ext cx="685800" cy="514350"/>
+            <a:off x="2876550" y="3476625"/>
+            <a:ext cx="3333750" cy="266700"/>
           </a:xfrm>
           <a:prstGeom xmlns:a="http://schemas.openxmlformats.org/drawingml/2006/main" prst="rect">
             <a:avLst/>
@@ -7154,9 +6834,9 @@
           </a:bodyPr>
           <a:lstStyle xmlns:a="http://schemas.openxmlformats.org/drawingml/2006/main">
             <a:defPPr algn="l">
-              <a:defRPr sz="2775" b="1">
-                <a:solidFill>
-                  <a:srgbClr val="E9795B"/>
+              <a:defRPr sz="1650" b="1">
+                <a:solidFill>
+                  <a:srgbClr val="153B2E"/>
                 </a:solidFill>
                 <a:latin typeface="Calibri"/>
                 <a:ea typeface="Calibri"/>
@@ -7166,13 +6846,9 @@
           </a:lstStyle>
           <a:p xmlns:a="http://schemas.openxmlformats.org/drawingml/2006/main">
             <a:pPr algn="l">
-              <a:lnSpc>
-                <a:spcPct val="100000"/>
-              </a:lnSpc>
-              <a:buNone/>
-              <a:defRPr sz="2775" b="1">
-                <a:solidFill>
-                  <a:srgbClr val="E9795B"/>
+              <a:defRPr sz="1650" b="1">
+                <a:solidFill>
+                  <a:srgbClr val="153B2E"/>
                 </a:solidFill>
                 <a:latin typeface="Calibri"/>
                 <a:ea typeface="Calibri"/>
@@ -7180,25 +6856,25 @@
               </a:defRPr>
             </a:pPr>
             <a:r>
-              <a:rPr sz="2775" b="1">
-                <a:solidFill>
-                  <a:srgbClr val="E9795B"/>
+              <a:rPr sz="1650" b="1">
+                <a:solidFill>
+                  <a:srgbClr val="153B2E"/>
                 </a:solidFill>
                 <a:latin typeface="Calibri"/>
                 <a:ea typeface="Calibri"/>
                 <a:cs typeface="Calibri"/>
               </a:rPr>
-              <a:t>03</a:t>
+              <a:t>Broaden interoperability</a:t>
             </a:r>
           </a:p>
         </p:txBody>
       </p:sp>
       <p:sp>
         <p:nvSpPr>
-          <p:cNvPr id="19" name="">
-            <a:extLst xmlns:a="http://schemas.openxmlformats.org/drawingml/2006/main">
-              <a:ext uri="{FF2B5EF4-FFF2-40B4-BE49-F238E27FC236}">
-                <a16:creationId xmlns:a16="http://schemas.microsoft.com/office/drawing/2014/main" id="{353077C1-9F69-4E1F-A945-81BD1F45C337}"/>
+          <p:cNvPr id="13" name="">
+            <a:extLst xmlns:a="http://schemas.openxmlformats.org/drawingml/2006/main">
+              <a:ext uri="{FF2B5EF4-FFF2-40B4-BE49-F238E27FC236}">
+                <a16:creationId xmlns:a16="http://schemas.microsoft.com/office/drawing/2014/main" id="{D8527BF4-1557-4208-BD8D-36A78478F5C2}"/>
               </a:ext>
             </a:extLst>
           </p:cNvPr>
@@ -7209,39 +6885,8 @@
         </p:nvSpPr>
         <p:spPr>
           <a:xfrm xmlns:a="http://schemas.openxmlformats.org/drawingml/2006/main">
-            <a:off x="6305550" y="3105150"/>
-            <a:ext cx="2000250" cy="28575"/>
-          </a:xfrm>
-          <a:prstGeom xmlns:a="http://schemas.openxmlformats.org/drawingml/2006/main" prst="rect">
-            <a:avLst/>
-          </a:prstGeom>
-          <a:solidFill xmlns:a="http://schemas.openxmlformats.org/drawingml/2006/main">
-            <a:srgbClr val="E9795B"/>
-          </a:solidFill>
-          <a:ln xmlns:a="http://schemas.openxmlformats.org/drawingml/2006/main" w="0">
-            <a:noFill/>
-            <a:prstDash val="solid"/>
-          </a:ln>
-        </p:spPr>
-      </p:sp>
-      <p:sp>
-        <p:nvSpPr>
-          <p:cNvPr id="20" name="">
-            <a:extLst xmlns:a="http://schemas.openxmlformats.org/drawingml/2006/main">
-              <a:ext uri="{FF2B5EF4-FFF2-40B4-BE49-F238E27FC236}">
-                <a16:creationId xmlns:a16="http://schemas.microsoft.com/office/drawing/2014/main" id="{DFDD2580-45AD-4868-897A-178BAC687E9E}"/>
-              </a:ext>
-            </a:extLst>
-          </p:cNvPr>
-          <p:cNvSpPr>
-            <a:spLocks xmlns:a="http://schemas.openxmlformats.org/drawingml/2006/main" noGrp="1"/>
-          </p:cNvSpPr>
-          <p:nvPr/>
-        </p:nvSpPr>
-        <p:spPr>
-          <a:xfrm xmlns:a="http://schemas.openxmlformats.org/drawingml/2006/main">
-            <a:off x="6305550" y="3371850"/>
-            <a:ext cx="2095500" cy="371475"/>
+            <a:off x="2876550" y="3790950"/>
+            <a:ext cx="8382000" cy="219075"/>
           </a:xfrm>
           <a:prstGeom xmlns:a="http://schemas.openxmlformats.org/drawingml/2006/main" prst="rect">
             <a:avLst/>
@@ -7258,9 +6903,9 @@
           </a:bodyPr>
           <a:lstStyle xmlns:a="http://schemas.openxmlformats.org/drawingml/2006/main">
             <a:defPPr algn="l">
-              <a:defRPr sz="1950" b="1">
-                <a:solidFill>
-                  <a:srgbClr val="153B2E"/>
+              <a:defRPr sz="1200" b="0">
+                <a:solidFill>
+                  <a:srgbClr val="60756A"/>
                 </a:solidFill>
                 <a:latin typeface="Calibri"/>
                 <a:ea typeface="Calibri"/>
@@ -7270,13 +6915,9 @@
           </a:lstStyle>
           <a:p xmlns:a="http://schemas.openxmlformats.org/drawingml/2006/main">
             <a:pPr algn="l">
-              <a:lnSpc>
-                <a:spcPct val="100000"/>
-              </a:lnSpc>
-              <a:buNone/>
-              <a:defRPr sz="1950" b="1">
-                <a:solidFill>
-                  <a:srgbClr val="153B2E"/>
+              <a:defRPr sz="1200" b="0">
+                <a:solidFill>
+                  <a:srgbClr val="60756A"/>
                 </a:solidFill>
                 <a:latin typeface="Calibri"/>
                 <a:ea typeface="Calibri"/>
@@ -7284,25 +6925,25 @@
               </a:defRPr>
             </a:pPr>
             <a:r>
-              <a:rPr sz="1950" b="1">
-                <a:solidFill>
-                  <a:srgbClr val="153B2E"/>
+              <a:rPr sz="1200" b="0">
+                <a:solidFill>
+                  <a:srgbClr val="60756A"/>
                 </a:solidFill>
                 <a:latin typeface="Calibri"/>
                 <a:ea typeface="Calibri"/>
                 <a:cs typeface="Calibri"/>
               </a:rPr>
-              <a:t>Build</a:t>
+              <a:t>DXF / IFC export is a roadmap item, not part of this prototype.</a:t>
             </a:r>
           </a:p>
         </p:txBody>
       </p:sp>
       <p:sp>
         <p:nvSpPr>
-          <p:cNvPr id="21" name="">
-            <a:extLst xmlns:a="http://schemas.openxmlformats.org/drawingml/2006/main">
-              <a:ext uri="{FF2B5EF4-FFF2-40B4-BE49-F238E27FC236}">
-                <a16:creationId xmlns:a16="http://schemas.microsoft.com/office/drawing/2014/main" id="{EDA1A46D-6CD9-46FB-83FF-7446F74952B3}"/>
+          <p:cNvPr id="14" name="">
+            <a:extLst xmlns:a="http://schemas.openxmlformats.org/drawingml/2006/main">
+              <a:ext uri="{FF2B5EF4-FFF2-40B4-BE49-F238E27FC236}">
+                <a16:creationId xmlns:a16="http://schemas.microsoft.com/office/drawing/2014/main" id="{24C68458-D6E3-4754-950F-F1D49D38A1F4}"/>
               </a:ext>
             </a:extLst>
           </p:cNvPr>
@@ -7313,69 +6954,27 @@
         </p:nvSpPr>
         <p:spPr>
           <a:xfrm xmlns:a="http://schemas.openxmlformats.org/drawingml/2006/main">
-            <a:off x="6305550" y="3895725"/>
-            <a:ext cx="2143125" cy="952500"/>
-          </a:xfrm>
-          <a:prstGeom xmlns:a="http://schemas.openxmlformats.org/drawingml/2006/main" prst="rect">
-            <a:avLst/>
-          </a:prstGeom>
-          <a:noFill xmlns:a="http://schemas.openxmlformats.org/drawingml/2006/main"/>
+            <a:off x="628650" y="4305300"/>
+            <a:ext cx="10934700" cy="800100"/>
+          </a:xfrm>
+          <a:prstGeom xmlns:a="http://schemas.openxmlformats.org/drawingml/2006/main" prst="rect">
+            <a:avLst/>
+          </a:prstGeom>
+          <a:solidFill xmlns:a="http://schemas.openxmlformats.org/drawingml/2006/main">
+            <a:srgbClr val="E6ECE6"/>
+          </a:solidFill>
           <a:ln xmlns:a="http://schemas.openxmlformats.org/drawingml/2006/main" w="0">
             <a:noFill/>
             <a:prstDash val="solid"/>
           </a:ln>
         </p:spPr>
-        <p:txBody>
-          <a:bodyPr xmlns:a="http://schemas.openxmlformats.org/drawingml/2006/main" wrap="square" lIns="0" tIns="0" rIns="0" bIns="0" anchor="t">
-            <a:normAutofit fontScale="100000"/>
-          </a:bodyPr>
-          <a:lstStyle xmlns:a="http://schemas.openxmlformats.org/drawingml/2006/main">
-            <a:defPPr algn="l">
-              <a:defRPr sz="1350" b="0">
-                <a:solidFill>
-                  <a:srgbClr val="60756A"/>
-                </a:solidFill>
-                <a:latin typeface="Calibri"/>
-                <a:ea typeface="Calibri"/>
-                <a:cs typeface="Calibri"/>
-              </a:defRPr>
-            </a:defPPr>
-          </a:lstStyle>
-          <a:p xmlns:a="http://schemas.openxmlformats.org/drawingml/2006/main">
-            <a:pPr algn="l">
-              <a:lnSpc>
-                <a:spcPct val="108000"/>
-              </a:lnSpc>
-              <a:buNone/>
-              <a:defRPr sz="1350" b="0">
-                <a:solidFill>
-                  <a:srgbClr val="60756A"/>
-                </a:solidFill>
-                <a:latin typeface="Calibri"/>
-                <a:ea typeface="Calibri"/>
-                <a:cs typeface="Calibri"/>
-              </a:defRPr>
-            </a:pPr>
-            <a:r>
-              <a:rPr sz="1350" b="0">
-                <a:solidFill>
-                  <a:srgbClr val="60756A"/>
-                </a:solidFill>
-                <a:latin typeface="Calibri"/>
-                <a:ea typeface="Calibri"/>
-                <a:cs typeface="Calibri"/>
-              </a:rPr>
-              <a:t>Three.js assembles walls, slabs, doors and connected levels.</a:t>
-            </a:r>
-          </a:p>
-        </p:txBody>
-      </p:sp>
-      <p:sp>
-        <p:nvSpPr>
-          <p:cNvPr id="22" name="">
-            <a:extLst xmlns:a="http://schemas.openxmlformats.org/drawingml/2006/main">
-              <a:ext uri="{FF2B5EF4-FFF2-40B4-BE49-F238E27FC236}">
-                <a16:creationId xmlns:a16="http://schemas.microsoft.com/office/drawing/2014/main" id="{3EDC7C80-9153-458E-BE55-9D55BE2A9046}"/>
+      </p:sp>
+      <p:sp>
+        <p:nvSpPr>
+          <p:cNvPr id="15" name="">
+            <a:extLst xmlns:a="http://schemas.openxmlformats.org/drawingml/2006/main">
+              <a:ext uri="{FF2B5EF4-FFF2-40B4-BE49-F238E27FC236}">
+                <a16:creationId xmlns:a16="http://schemas.microsoft.com/office/drawing/2014/main" id="{6588C555-0F62-49F0-A6F4-AF293FA0AE6C}"/>
               </a:ext>
             </a:extLst>
           </p:cNvPr>
@@ -7386,8 +6985,8 @@
         </p:nvSpPr>
         <p:spPr>
           <a:xfrm xmlns:a="http://schemas.openxmlformats.org/drawingml/2006/main">
-            <a:off x="6305550" y="5219700"/>
-            <a:ext cx="2190750" cy="361950"/>
+            <a:off x="857250" y="4467225"/>
+            <a:ext cx="1809750" cy="190500"/>
           </a:xfrm>
           <a:prstGeom xmlns:a="http://schemas.openxmlformats.org/drawingml/2006/main" prst="rect">
             <a:avLst/>
@@ -7416,10 +7015,6 @@
           </a:lstStyle>
           <a:p xmlns:a="http://schemas.openxmlformats.org/drawingml/2006/main">
             <a:pPr algn="l">
-              <a:lnSpc>
-                <a:spcPct val="100000"/>
-              </a:lnSpc>
-              <a:buNone/>
               <a:defRPr sz="975" b="1">
                 <a:solidFill>
                   <a:srgbClr val="2C6B50"/>
@@ -7438,17 +7033,17 @@
                 <a:ea typeface="Calibri"/>
                 <a:cs typeface="Calibri"/>
               </a:rPr>
-              <a:t>TypeScript · Three.js</a:t>
+              <a:t>FUTURE DIRECTION</a:t>
             </a:r>
           </a:p>
         </p:txBody>
       </p:sp>
       <p:sp>
         <p:nvSpPr>
-          <p:cNvPr id="23" name="">
-            <a:extLst xmlns:a="http://schemas.openxmlformats.org/drawingml/2006/main">
-              <a:ext uri="{FF2B5EF4-FFF2-40B4-BE49-F238E27FC236}">
-                <a16:creationId xmlns:a16="http://schemas.microsoft.com/office/drawing/2014/main" id="{92FB7207-7CB2-4478-8ACF-3BC932B7AAFE}"/>
+          <p:cNvPr id="16" name="">
+            <a:extLst xmlns:a="http://schemas.openxmlformats.org/drawingml/2006/main">
+              <a:ext uri="{FF2B5EF4-FFF2-40B4-BE49-F238E27FC236}">
+                <a16:creationId xmlns:a16="http://schemas.microsoft.com/office/drawing/2014/main" id="{4378B934-A0CF-4A6B-96F3-84FFE2DF1C16}"/>
               </a:ext>
             </a:extLst>
           </p:cNvPr>
@@ -7459,39 +7054,8 @@
         </p:nvSpPr>
         <p:spPr>
           <a:xfrm xmlns:a="http://schemas.openxmlformats.org/drawingml/2006/main">
-            <a:off x="8477250" y="3038475"/>
-            <a:ext cx="476250" cy="190500"/>
-          </a:xfrm>
-          <a:prstGeom xmlns:a="http://schemas.openxmlformats.org/drawingml/2006/main" prst="rightArrow">
-            <a:avLst/>
-          </a:prstGeom>
-          <a:solidFill xmlns:a="http://schemas.openxmlformats.org/drawingml/2006/main">
-            <a:srgbClr val="D9E8DC"/>
-          </a:solidFill>
-          <a:ln xmlns:a="http://schemas.openxmlformats.org/drawingml/2006/main" w="0">
-            <a:noFill/>
-            <a:prstDash val="solid"/>
-          </a:ln>
-        </p:spPr>
-      </p:sp>
-      <p:sp>
-        <p:nvSpPr>
-          <p:cNvPr id="24" name="">
-            <a:extLst xmlns:a="http://schemas.openxmlformats.org/drawingml/2006/main">
-              <a:ext uri="{FF2B5EF4-FFF2-40B4-BE49-F238E27FC236}">
-                <a16:creationId xmlns:a16="http://schemas.microsoft.com/office/drawing/2014/main" id="{8EAF6729-7EB7-4C1A-B8CB-2D7AE16464A8}"/>
-              </a:ext>
-            </a:extLst>
-          </p:cNvPr>
-          <p:cNvSpPr>
-            <a:spLocks xmlns:a="http://schemas.openxmlformats.org/drawingml/2006/main" noGrp="1"/>
-          </p:cNvSpPr>
-          <p:nvPr/>
-        </p:nvSpPr>
-        <p:spPr>
-          <a:xfrm xmlns:a="http://schemas.openxmlformats.org/drawingml/2006/main">
-            <a:off x="9134475" y="2476500"/>
-            <a:ext cx="685800" cy="514350"/>
+            <a:off x="2876550" y="4448175"/>
+            <a:ext cx="3333750" cy="266700"/>
           </a:xfrm>
           <a:prstGeom xmlns:a="http://schemas.openxmlformats.org/drawingml/2006/main" prst="rect">
             <a:avLst/>
@@ -7508,9 +7072,9 @@
           </a:bodyPr>
           <a:lstStyle xmlns:a="http://schemas.openxmlformats.org/drawingml/2006/main">
             <a:defPPr algn="l">
-              <a:defRPr sz="2775" b="1">
-                <a:solidFill>
-                  <a:srgbClr val="2C6B50"/>
+              <a:defRPr sz="1650" b="1">
+                <a:solidFill>
+                  <a:srgbClr val="153B2E"/>
                 </a:solidFill>
                 <a:latin typeface="Calibri"/>
                 <a:ea typeface="Calibri"/>
@@ -7520,13 +7084,9 @@
           </a:lstStyle>
           <a:p xmlns:a="http://schemas.openxmlformats.org/drawingml/2006/main">
             <a:pPr algn="l">
-              <a:lnSpc>
-                <a:spcPct val="100000"/>
-              </a:lnSpc>
-              <a:buNone/>
-              <a:defRPr sz="2775" b="1">
-                <a:solidFill>
-                  <a:srgbClr val="2C6B50"/>
+              <a:defRPr sz="1650" b="1">
+                <a:solidFill>
+                  <a:srgbClr val="153B2E"/>
                 </a:solidFill>
                 <a:latin typeface="Calibri"/>
                 <a:ea typeface="Calibri"/>
@@ -7534,25 +7094,25 @@
               </a:defRPr>
             </a:pPr>
             <a:r>
-              <a:rPr sz="2775" b="1">
-                <a:solidFill>
-                  <a:srgbClr val="2C6B50"/>
+              <a:rPr sz="1650" b="1">
+                <a:solidFill>
+                  <a:srgbClr val="153B2E"/>
                 </a:solidFill>
                 <a:latin typeface="Calibri"/>
                 <a:ea typeface="Calibri"/>
                 <a:cs typeface="Calibri"/>
               </a:rPr>
-              <a:t>04</a:t>
+              <a:t>Extend the experience</a:t>
             </a:r>
           </a:p>
         </p:txBody>
       </p:sp>
       <p:sp>
         <p:nvSpPr>
-          <p:cNvPr id="25" name="">
-            <a:extLst xmlns:a="http://schemas.openxmlformats.org/drawingml/2006/main">
-              <a:ext uri="{FF2B5EF4-FFF2-40B4-BE49-F238E27FC236}">
-                <a16:creationId xmlns:a16="http://schemas.microsoft.com/office/drawing/2014/main" id="{1277D042-B65E-4A22-AB4C-CA561AB8EA00}"/>
+          <p:cNvPr id="17" name="">
+            <a:extLst xmlns:a="http://schemas.openxmlformats.org/drawingml/2006/main">
+              <a:ext uri="{FF2B5EF4-FFF2-40B4-BE49-F238E27FC236}">
+                <a16:creationId xmlns:a16="http://schemas.microsoft.com/office/drawing/2014/main" id="{164A5C80-98DE-41F2-9AAC-2A0BCFE25DB3}"/>
               </a:ext>
             </a:extLst>
           </p:cNvPr>
@@ -7563,39 +7123,8 @@
         </p:nvSpPr>
         <p:spPr>
           <a:xfrm xmlns:a="http://schemas.openxmlformats.org/drawingml/2006/main">
-            <a:off x="9134475" y="3105150"/>
-            <a:ext cx="2000250" cy="28575"/>
-          </a:xfrm>
-          <a:prstGeom xmlns:a="http://schemas.openxmlformats.org/drawingml/2006/main" prst="rect">
-            <a:avLst/>
-          </a:prstGeom>
-          <a:solidFill xmlns:a="http://schemas.openxmlformats.org/drawingml/2006/main">
-            <a:srgbClr val="C8D6CC"/>
-          </a:solidFill>
-          <a:ln xmlns:a="http://schemas.openxmlformats.org/drawingml/2006/main" w="0">
-            <a:noFill/>
-            <a:prstDash val="solid"/>
-          </a:ln>
-        </p:spPr>
-      </p:sp>
-      <p:sp>
-        <p:nvSpPr>
-          <p:cNvPr id="26" name="">
-            <a:extLst xmlns:a="http://schemas.openxmlformats.org/drawingml/2006/main">
-              <a:ext uri="{FF2B5EF4-FFF2-40B4-BE49-F238E27FC236}">
-                <a16:creationId xmlns:a16="http://schemas.microsoft.com/office/drawing/2014/main" id="{12BA2E25-5614-4A0F-96A2-20082EFA5B53}"/>
-              </a:ext>
-            </a:extLst>
-          </p:cNvPr>
-          <p:cNvSpPr>
-            <a:spLocks xmlns:a="http://schemas.openxmlformats.org/drawingml/2006/main" noGrp="1"/>
-          </p:cNvSpPr>
-          <p:nvPr/>
-        </p:nvSpPr>
-        <p:spPr>
-          <a:xfrm xmlns:a="http://schemas.openxmlformats.org/drawingml/2006/main">
-            <a:off x="9134475" y="3371850"/>
-            <a:ext cx="2095500" cy="371475"/>
+            <a:off x="2876550" y="4762500"/>
+            <a:ext cx="8382000" cy="219075"/>
           </a:xfrm>
           <a:prstGeom xmlns:a="http://schemas.openxmlformats.org/drawingml/2006/main" prst="rect">
             <a:avLst/>
@@ -7612,9 +7141,9 @@
           </a:bodyPr>
           <a:lstStyle xmlns:a="http://schemas.openxmlformats.org/drawingml/2006/main">
             <a:defPPr algn="l">
-              <a:defRPr sz="1950" b="1">
-                <a:solidFill>
-                  <a:srgbClr val="153B2E"/>
+              <a:defRPr sz="1200" b="0">
+                <a:solidFill>
+                  <a:srgbClr val="60756A"/>
                 </a:solidFill>
                 <a:latin typeface="Calibri"/>
                 <a:ea typeface="Calibri"/>
@@ -7624,13 +7153,9 @@
           </a:lstStyle>
           <a:p xmlns:a="http://schemas.openxmlformats.org/drawingml/2006/main">
             <a:pPr algn="l">
-              <a:lnSpc>
-                <a:spcPct val="100000"/>
-              </a:lnSpc>
-              <a:buNone/>
-              <a:defRPr sz="1950" b="1">
-                <a:solidFill>
-                  <a:srgbClr val="153B2E"/>
+              <a:defRPr sz="1200" b="0">
+                <a:solidFill>
+                  <a:srgbClr val="60756A"/>
                 </a:solidFill>
                 <a:latin typeface="Calibri"/>
                 <a:ea typeface="Calibri"/>
@@ -7638,25 +7163,25 @@
               </a:defRPr>
             </a:pPr>
             <a:r>
-              <a:rPr sz="1950" b="1">
-                <a:solidFill>
-                  <a:srgbClr val="153B2E"/>
+              <a:rPr sz="1200" b="0">
+                <a:solidFill>
+                  <a:srgbClr val="60756A"/>
                 </a:solidFill>
                 <a:latin typeface="Calibri"/>
                 <a:ea typeface="Calibri"/>
                 <a:cs typeface="Calibri"/>
               </a:rPr>
-              <a:t>Explore</a:t>
+              <a:t>WebXR headset walkthroughs are a future direction.</a:t>
             </a:r>
           </a:p>
         </p:txBody>
       </p:sp>
       <p:sp>
         <p:nvSpPr>
-          <p:cNvPr id="27" name="">
-            <a:extLst xmlns:a="http://schemas.openxmlformats.org/drawingml/2006/main">
-              <a:ext uri="{FF2B5EF4-FFF2-40B4-BE49-F238E27FC236}">
-                <a16:creationId xmlns:a16="http://schemas.microsoft.com/office/drawing/2014/main" id="{E749C76B-A939-4DBE-81E4-2C9B50B3183B}"/>
+          <p:cNvPr id="18" name="">
+            <a:extLst xmlns:a="http://schemas.openxmlformats.org/drawingml/2006/main">
+              <a:ext uri="{FF2B5EF4-FFF2-40B4-BE49-F238E27FC236}">
+                <a16:creationId xmlns:a16="http://schemas.microsoft.com/office/drawing/2014/main" id="{85E4E096-60BB-44D8-B72B-BD092F627629}"/>
               </a:ext>
             </a:extLst>
           </p:cNvPr>
@@ -7667,69 +7192,27 @@
         </p:nvSpPr>
         <p:spPr>
           <a:xfrm xmlns:a="http://schemas.openxmlformats.org/drawingml/2006/main">
-            <a:off x="9134475" y="3895725"/>
-            <a:ext cx="2143125" cy="952500"/>
-          </a:xfrm>
-          <a:prstGeom xmlns:a="http://schemas.openxmlformats.org/drawingml/2006/main" prst="rect">
-            <a:avLst/>
-          </a:prstGeom>
-          <a:noFill xmlns:a="http://schemas.openxmlformats.org/drawingml/2006/main"/>
+            <a:off x="628650" y="5572125"/>
+            <a:ext cx="10934700" cy="9525"/>
+          </a:xfrm>
+          <a:prstGeom xmlns:a="http://schemas.openxmlformats.org/drawingml/2006/main" prst="rect">
+            <a:avLst/>
+          </a:prstGeom>
+          <a:solidFill xmlns:a="http://schemas.openxmlformats.org/drawingml/2006/main">
+            <a:srgbClr val="C8D6CC"/>
+          </a:solidFill>
           <a:ln xmlns:a="http://schemas.openxmlformats.org/drawingml/2006/main" w="0">
             <a:noFill/>
             <a:prstDash val="solid"/>
           </a:ln>
         </p:spPr>
-        <p:txBody>
-          <a:bodyPr xmlns:a="http://schemas.openxmlformats.org/drawingml/2006/main" wrap="square" lIns="0" tIns="0" rIns="0" bIns="0" anchor="t">
-            <a:normAutofit fontScale="100000"/>
-          </a:bodyPr>
-          <a:lstStyle xmlns:a="http://schemas.openxmlformats.org/drawingml/2006/main">
-            <a:defPPr algn="l">
-              <a:defRPr sz="1350" b="0">
-                <a:solidFill>
-                  <a:srgbClr val="60756A"/>
-                </a:solidFill>
-                <a:latin typeface="Calibri"/>
-                <a:ea typeface="Calibri"/>
-                <a:cs typeface="Calibri"/>
-              </a:defRPr>
-            </a:defPPr>
-          </a:lstStyle>
-          <a:p xmlns:a="http://schemas.openxmlformats.org/drawingml/2006/main">
-            <a:pPr algn="l">
-              <a:lnSpc>
-                <a:spcPct val="108000"/>
-              </a:lnSpc>
-              <a:buNone/>
-              <a:defRPr sz="1350" b="0">
-                <a:solidFill>
-                  <a:srgbClr val="60756A"/>
-                </a:solidFill>
-                <a:latin typeface="Calibri"/>
-                <a:ea typeface="Calibri"/>
-                <a:cs typeface="Calibri"/>
-              </a:defRPr>
-            </a:pPr>
-            <a:r>
-              <a:rPr sz="1350" b="0">
-                <a:solidFill>
-                  <a:srgbClr val="60756A"/>
-                </a:solidFill>
-                <a:latin typeface="Calibri"/>
-                <a:ea typeface="Calibri"/>
-                <a:cs typeface="Calibri"/>
-              </a:rPr>
-              <a:t>Orbit the model or walk through the rooms and stairs.</a:t>
-            </a:r>
-          </a:p>
-        </p:txBody>
-      </p:sp>
-      <p:sp>
-        <p:nvSpPr>
-          <p:cNvPr id="28" name="">
-            <a:extLst xmlns:a="http://schemas.openxmlformats.org/drawingml/2006/main">
-              <a:ext uri="{FF2B5EF4-FFF2-40B4-BE49-F238E27FC236}">
-                <a16:creationId xmlns:a16="http://schemas.microsoft.com/office/drawing/2014/main" id="{214538A9-7995-45D2-928D-FEC68A8997A5}"/>
+      </p:sp>
+      <p:sp>
+        <p:nvSpPr>
+          <p:cNvPr id="19" name="">
+            <a:extLst xmlns:a="http://schemas.openxmlformats.org/drawingml/2006/main">
+              <a:ext uri="{FF2B5EF4-FFF2-40B4-BE49-F238E27FC236}">
+                <a16:creationId xmlns:a16="http://schemas.microsoft.com/office/drawing/2014/main" id="{1FCDDEE7-9C12-43B8-8781-3F0A6EF493B4}"/>
               </a:ext>
             </a:extLst>
           </p:cNvPr>
@@ -7740,8 +7223,8 @@
         </p:nvSpPr>
         <p:spPr>
           <a:xfrm xmlns:a="http://schemas.openxmlformats.org/drawingml/2006/main">
-            <a:off x="9134475" y="5219700"/>
-            <a:ext cx="2190750" cy="361950"/>
+            <a:off x="628650" y="5791200"/>
+            <a:ext cx="1809750" cy="209550"/>
           </a:xfrm>
           <a:prstGeom xmlns:a="http://schemas.openxmlformats.org/drawingml/2006/main" prst="rect">
             <a:avLst/>
@@ -7760,7 +7243,7 @@
             <a:defPPr algn="l">
               <a:defRPr sz="975" b="1">
                 <a:solidFill>
-                  <a:srgbClr val="2C6B50"/>
+                  <a:srgbClr val="E9795B"/>
                 </a:solidFill>
                 <a:latin typeface="Calibri"/>
                 <a:ea typeface="Calibri"/>
@@ -7770,13 +7253,9 @@
           </a:lstStyle>
           <a:p xmlns:a="http://schemas.openxmlformats.org/drawingml/2006/main">
             <a:pPr algn="l">
-              <a:lnSpc>
-                <a:spcPct val="100000"/>
-              </a:lnSpc>
-              <a:buNone/>
               <a:defRPr sz="975" b="1">
                 <a:solidFill>
-                  <a:srgbClr val="2C6B50"/>
+                  <a:srgbClr val="E9795B"/>
                 </a:solidFill>
                 <a:latin typeface="Calibri"/>
                 <a:ea typeface="Calibri"/>
@@ -7786,23 +7265,23 @@
             <a:r>
               <a:rPr sz="975" b="1">
                 <a:solidFill>
-                  <a:srgbClr val="2C6B50"/>
+                  <a:srgbClr val="E9795B"/>
                 </a:solidFill>
                 <a:latin typeface="Calibri"/>
                 <a:ea typeface="Calibri"/>
                 <a:cs typeface="Calibri"/>
               </a:rPr>
-              <a:t>Orbit · first-person</a:t>
+              <a:t>Scaling constraint</a:t>
             </a:r>
           </a:p>
         </p:txBody>
       </p:sp>
       <p:sp>
         <p:nvSpPr>
-          <p:cNvPr id="29" name="">
-            <a:extLst xmlns:a="http://schemas.openxmlformats.org/drawingml/2006/main">
-              <a:ext uri="{FF2B5EF4-FFF2-40B4-BE49-F238E27FC236}">
-                <a16:creationId xmlns:a16="http://schemas.microsoft.com/office/drawing/2014/main" id="{1BB7C446-9643-4103-987A-FD6758A14EB0}"/>
+          <p:cNvPr id="20" name="">
+            <a:extLst xmlns:a="http://schemas.openxmlformats.org/drawingml/2006/main">
+              <a:ext uri="{FF2B5EF4-FFF2-40B4-BE49-F238E27FC236}">
+                <a16:creationId xmlns:a16="http://schemas.microsoft.com/office/drawing/2014/main" id="{299D9969-56D7-48AB-BBC4-4C989D52C837}"/>
               </a:ext>
             </a:extLst>
           </p:cNvPr>
@@ -7813,39 +7292,8 @@
         </p:nvSpPr>
         <p:spPr>
           <a:xfrm xmlns:a="http://schemas.openxmlformats.org/drawingml/2006/main">
-            <a:off x="647700" y="5915025"/>
-            <a:ext cx="10763250" cy="9525"/>
-          </a:xfrm>
-          <a:prstGeom xmlns:a="http://schemas.openxmlformats.org/drawingml/2006/main" prst="rect">
-            <a:avLst/>
-          </a:prstGeom>
-          <a:solidFill xmlns:a="http://schemas.openxmlformats.org/drawingml/2006/main">
-            <a:srgbClr val="C8D6CC"/>
-          </a:solidFill>
-          <a:ln xmlns:a="http://schemas.openxmlformats.org/drawingml/2006/main" w="0">
-            <a:noFill/>
-            <a:prstDash val="solid"/>
-          </a:ln>
-        </p:spPr>
-      </p:sp>
-      <p:sp>
-        <p:nvSpPr>
-          <p:cNvPr id="30" name="">
-            <a:extLst xmlns:a="http://schemas.openxmlformats.org/drawingml/2006/main">
-              <a:ext uri="{FF2B5EF4-FFF2-40B4-BE49-F238E27FC236}">
-                <a16:creationId xmlns:a16="http://schemas.microsoft.com/office/drawing/2014/main" id="{AF389756-161E-4D3A-867E-FF84F7C2B1F8}"/>
-              </a:ext>
-            </a:extLst>
-          </p:cNvPr>
-          <p:cNvSpPr>
-            <a:spLocks xmlns:a="http://schemas.openxmlformats.org/drawingml/2006/main" noGrp="1"/>
-          </p:cNvSpPr>
-          <p:nvPr/>
-        </p:nvSpPr>
-        <p:spPr>
-          <a:xfrm xmlns:a="http://schemas.openxmlformats.org/drawingml/2006/main">
-            <a:off x="647700" y="6105525"/>
-            <a:ext cx="10096500" cy="228600"/>
+            <a:off x="2476500" y="5753100"/>
+            <a:ext cx="8858250" cy="400050"/>
           </a:xfrm>
           <a:prstGeom xmlns:a="http://schemas.openxmlformats.org/drawingml/2006/main" prst="rect">
             <a:avLst/>
@@ -7862,9 +7310,9 @@
           </a:bodyPr>
           <a:lstStyle xmlns:a="http://schemas.openxmlformats.org/drawingml/2006/main">
             <a:defPPr algn="l">
-              <a:defRPr sz="1125" b="0">
-                <a:solidFill>
-                  <a:srgbClr val="60756A"/>
+              <a:defRPr sz="1275" b="1">
+                <a:solidFill>
+                  <a:srgbClr val="19332A"/>
                 </a:solidFill>
                 <a:latin typeface="Calibri"/>
                 <a:ea typeface="Calibri"/>
@@ -7874,13 +7322,9 @@
           </a:lstStyle>
           <a:p xmlns:a="http://schemas.openxmlformats.org/drawingml/2006/main">
             <a:pPr algn="l">
-              <a:lnSpc>
-                <a:spcPct val="100000"/>
-              </a:lnSpc>
-              <a:buNone/>
-              <a:defRPr sz="1125" b="0">
-                <a:solidFill>
-                  <a:srgbClr val="60756A"/>
+              <a:defRPr sz="1275" b="1">
+                <a:solidFill>
+                  <a:srgbClr val="19332A"/>
                 </a:solidFill>
                 <a:latin typeface="Calibri"/>
                 <a:ea typeface="Calibri"/>
@@ -7888,15 +7332,15 @@
               </a:defRPr>
             </a:pPr>
             <a:r>
-              <a:rPr sz="1125" b="0">
-                <a:solidFill>
-                  <a:srgbClr val="60756A"/>
+              <a:rPr sz="1275" b="1">
+                <a:solidFill>
+                  <a:srgbClr val="19332A"/>
                 </a:solidFill>
                 <a:latin typeface="Calibri"/>
                 <a:ea typeface="Calibri"/>
                 <a:cs typeface="Calibri"/>
               </a:rPr>
-              <a:t>The sample home runs locally; live analysis of new uploads needs a Gemini API key.</a:t>
+              <a:t>Custom-plan vision analysis needs a Gemini API key; complex drawings need more validation.</a:t>
             </a:r>
           </a:p>
         </p:txBody>
@@ -7904,7 +7348,7 @@
     </p:spTree>
     <p:extLst>
       <p:ext uri="{BB962C8B-B14F-4D97-AF65-F5344CB8AC3E}">
-        <p14:creationId xmlns:p14="http://schemas.microsoft.com/office/powerpoint/2010/main" val="1071994135"/>
+        <p14:creationId xmlns:p14="http://schemas.microsoft.com/office/powerpoint/2010/main" val="1390171183"/>
       </p:ext>
     </p:extLst>
   </p:cSld>
@@ -7912,2758 +7356,6 @@
 </file>
 
 <file path=ppt/slides/slide5.xml><?xml version="1.0" encoding="utf-8"?>
-<p:sld xmlns:p="http://schemas.openxmlformats.org/presentationml/2006/main">
-  <p:cSld>
-    <p:bg>
-      <p:bgPr>
-        <a:solidFill xmlns:a="http://schemas.openxmlformats.org/drawingml/2006/main">
-          <a:srgbClr val="F5F7F2"/>
-        </a:solidFill>
-      </p:bgPr>
-    </p:bg>
-    <p:spTree>
-      <p:nvGrpSpPr>
-        <p:cNvPr id="1" name=""/>
-        <p:cNvGrpSpPr/>
-        <p:nvPr/>
-      </p:nvGrpSpPr>
-      <p:grpSpPr>
-        <a:xfrm xmlns:a="http://schemas.openxmlformats.org/drawingml/2006/main"/>
-      </p:grpSpPr>
-      <p:sp>
-        <p:nvSpPr>
-          <p:cNvPr id="16" name="">
-            <a:extLst xmlns:a="http://schemas.openxmlformats.org/drawingml/2006/main">
-              <a:ext uri="{FF2B5EF4-FFF2-40B4-BE49-F238E27FC236}">
-                <a16:creationId xmlns:a16="http://schemas.microsoft.com/office/drawing/2014/main" id="{2ACBFBE3-6CD1-4BF2-9CE1-601BA08D196F}"/>
-              </a:ext>
-            </a:extLst>
-          </p:cNvPr>
-          <p:cNvSpPr>
-            <a:spLocks xmlns:a="http://schemas.openxmlformats.org/drawingml/2006/main" noGrp="1"/>
-          </p:cNvSpPr>
-          <p:nvPr/>
-        </p:nvSpPr>
-        <p:spPr>
-          <a:xfrm xmlns:a="http://schemas.openxmlformats.org/drawingml/2006/main">
-            <a:off x="0" y="0"/>
-            <a:ext cx="12192000" cy="76200"/>
-          </a:xfrm>
-          <a:prstGeom xmlns:a="http://schemas.openxmlformats.org/drawingml/2006/main" prst="rect">
-            <a:avLst/>
-          </a:prstGeom>
-          <a:solidFill xmlns:a="http://schemas.openxmlformats.org/drawingml/2006/main">
-            <a:srgbClr val="2C6B50"/>
-          </a:solidFill>
-          <a:ln xmlns:a="http://schemas.openxmlformats.org/drawingml/2006/main" w="0">
-            <a:noFill/>
-            <a:prstDash val="solid"/>
-          </a:ln>
-        </p:spPr>
-      </p:sp>
-      <p:sp>
-        <p:nvSpPr>
-          <p:cNvPr id="2" name="">
-            <a:extLst xmlns:a="http://schemas.openxmlformats.org/drawingml/2006/main">
-              <a:ext uri="{FF2B5EF4-FFF2-40B4-BE49-F238E27FC236}">
-                <a16:creationId xmlns:a16="http://schemas.microsoft.com/office/drawing/2014/main" id="{A01B41CC-8DAF-4A64-8746-29D89405A623}"/>
-              </a:ext>
-            </a:extLst>
-          </p:cNvPr>
-          <p:cNvSpPr>
-            <a:spLocks xmlns:a="http://schemas.openxmlformats.org/drawingml/2006/main" noGrp="1"/>
-          </p:cNvSpPr>
-          <p:nvPr/>
-        </p:nvSpPr>
-        <p:spPr>
-          <a:xfrm xmlns:a="http://schemas.openxmlformats.org/drawingml/2006/main">
-            <a:off x="609600" y="361950"/>
-            <a:ext cx="2857500" cy="190500"/>
-          </a:xfrm>
-          <a:prstGeom xmlns:a="http://schemas.openxmlformats.org/drawingml/2006/main" prst="rect">
-            <a:avLst/>
-          </a:prstGeom>
-          <a:noFill xmlns:a="http://schemas.openxmlformats.org/drawingml/2006/main"/>
-          <a:ln xmlns:a="http://schemas.openxmlformats.org/drawingml/2006/main" w="0">
-            <a:noFill/>
-            <a:prstDash val="solid"/>
-          </a:ln>
-        </p:spPr>
-        <p:txBody>
-          <a:bodyPr xmlns:a="http://schemas.openxmlformats.org/drawingml/2006/main" wrap="square" lIns="0" tIns="0" rIns="0" bIns="0" anchor="t">
-            <a:normAutofit fontScale="100000"/>
-          </a:bodyPr>
-          <a:lstStyle xmlns:a="http://schemas.openxmlformats.org/drawingml/2006/main">
-            <a:defPPr algn="l">
-              <a:defRPr sz="975" b="1">
-                <a:solidFill>
-                  <a:srgbClr val="2C6B50"/>
-                </a:solidFill>
-                <a:latin typeface="Calibri"/>
-                <a:ea typeface="Calibri"/>
-                <a:cs typeface="Calibri"/>
-              </a:defRPr>
-            </a:defPPr>
-          </a:lstStyle>
-          <a:p xmlns:a="http://schemas.openxmlformats.org/drawingml/2006/main">
-            <a:pPr algn="l">
-              <a:lnSpc>
-                <a:spcPct val="100000"/>
-              </a:lnSpc>
-              <a:buNone/>
-              <a:defRPr sz="975" b="1">
-                <a:solidFill>
-                  <a:srgbClr val="2C6B50"/>
-                </a:solidFill>
-                <a:latin typeface="Calibri"/>
-                <a:ea typeface="Calibri"/>
-                <a:cs typeface="Calibri"/>
-              </a:defRPr>
-            </a:pPr>
-            <a:r>
-              <a:rPr sz="975" b="1">
-                <a:solidFill>
-                  <a:srgbClr val="2C6B50"/>
-                </a:solidFill>
-                <a:latin typeface="Calibri"/>
-                <a:ea typeface="Calibri"/>
-                <a:cs typeface="Calibri"/>
-              </a:rPr>
-              <a:t>THE EXPERIENCE</a:t>
-            </a:r>
-          </a:p>
-        </p:txBody>
-      </p:sp>
-      <p:sp>
-        <p:nvSpPr>
-          <p:cNvPr id="3" name="">
-            <a:extLst xmlns:a="http://schemas.openxmlformats.org/drawingml/2006/main">
-              <a:ext uri="{FF2B5EF4-FFF2-40B4-BE49-F238E27FC236}">
-                <a16:creationId xmlns:a16="http://schemas.microsoft.com/office/drawing/2014/main" id="{366EB568-FF04-45CB-92C7-B9A36231C882}"/>
-              </a:ext>
-            </a:extLst>
-          </p:cNvPr>
-          <p:cNvSpPr>
-            <a:spLocks xmlns:a="http://schemas.openxmlformats.org/drawingml/2006/main" noGrp="1"/>
-          </p:cNvSpPr>
-          <p:nvPr/>
-        </p:nvSpPr>
-        <p:spPr>
-          <a:xfrm xmlns:a="http://schemas.openxmlformats.org/drawingml/2006/main">
-            <a:off x="11239500" y="6362700"/>
-            <a:ext cx="381000" cy="190500"/>
-          </a:xfrm>
-          <a:prstGeom xmlns:a="http://schemas.openxmlformats.org/drawingml/2006/main" prst="rect">
-            <a:avLst/>
-          </a:prstGeom>
-          <a:noFill xmlns:a="http://schemas.openxmlformats.org/drawingml/2006/main"/>
-          <a:ln xmlns:a="http://schemas.openxmlformats.org/drawingml/2006/main" w="0">
-            <a:noFill/>
-            <a:prstDash val="solid"/>
-          </a:ln>
-        </p:spPr>
-        <p:txBody>
-          <a:bodyPr xmlns:a="http://schemas.openxmlformats.org/drawingml/2006/main" wrap="square" lIns="0" tIns="0" rIns="0" bIns="0" anchor="t">
-            <a:normAutofit fontScale="100000"/>
-          </a:bodyPr>
-          <a:lstStyle xmlns:a="http://schemas.openxmlformats.org/drawingml/2006/main">
-            <a:defPPr algn="r">
-              <a:defRPr sz="900" b="1">
-                <a:solidFill>
-                  <a:srgbClr val="60756A"/>
-                </a:solidFill>
-                <a:latin typeface="Calibri"/>
-                <a:ea typeface="Calibri"/>
-                <a:cs typeface="Calibri"/>
-              </a:defRPr>
-            </a:defPPr>
-          </a:lstStyle>
-          <a:p xmlns:a="http://schemas.openxmlformats.org/drawingml/2006/main">
-            <a:pPr algn="r">
-              <a:lnSpc>
-                <a:spcPct val="100000"/>
-              </a:lnSpc>
-              <a:buNone/>
-              <a:defRPr sz="900" b="1">
-                <a:solidFill>
-                  <a:srgbClr val="60756A"/>
-                </a:solidFill>
-                <a:latin typeface="Calibri"/>
-                <a:ea typeface="Calibri"/>
-                <a:cs typeface="Calibri"/>
-              </a:defRPr>
-            </a:pPr>
-            <a:r>
-              <a:rPr sz="900" b="1">
-                <a:solidFill>
-                  <a:srgbClr val="60756A"/>
-                </a:solidFill>
-                <a:latin typeface="Calibri"/>
-                <a:ea typeface="Calibri"/>
-                <a:cs typeface="Calibri"/>
-              </a:rPr>
-              <a:t>05</a:t>
-            </a:r>
-          </a:p>
-        </p:txBody>
-      </p:sp>
-      <p:sp>
-        <p:nvSpPr>
-          <p:cNvPr id="4" name="">
-            <a:extLst xmlns:a="http://schemas.openxmlformats.org/drawingml/2006/main">
-              <a:ext uri="{FF2B5EF4-FFF2-40B4-BE49-F238E27FC236}">
-                <a16:creationId xmlns:a16="http://schemas.microsoft.com/office/drawing/2014/main" id="{0A72BE20-9D8D-499D-A11E-09D02825416D}"/>
-              </a:ext>
-            </a:extLst>
-          </p:cNvPr>
-          <p:cNvSpPr>
-            <a:spLocks xmlns:a="http://schemas.openxmlformats.org/drawingml/2006/main" noGrp="1"/>
-          </p:cNvSpPr>
-          <p:nvPr/>
-        </p:nvSpPr>
-        <p:spPr>
-          <a:xfrm xmlns:a="http://schemas.openxmlformats.org/drawingml/2006/main">
-            <a:off x="609600" y="857250"/>
-            <a:ext cx="8096250" cy="552450"/>
-          </a:xfrm>
-          <a:prstGeom xmlns:a="http://schemas.openxmlformats.org/drawingml/2006/main" prst="rect">
-            <a:avLst/>
-          </a:prstGeom>
-          <a:noFill xmlns:a="http://schemas.openxmlformats.org/drawingml/2006/main"/>
-          <a:ln xmlns:a="http://schemas.openxmlformats.org/drawingml/2006/main" w="0">
-            <a:noFill/>
-            <a:prstDash val="solid"/>
-          </a:ln>
-        </p:spPr>
-        <p:txBody>
-          <a:bodyPr xmlns:a="http://schemas.openxmlformats.org/drawingml/2006/main" wrap="square" lIns="0" tIns="0" rIns="0" bIns="0" anchor="t">
-            <a:normAutofit fontScale="100000"/>
-          </a:bodyPr>
-          <a:lstStyle xmlns:a="http://schemas.openxmlformats.org/drawingml/2006/main">
-            <a:defPPr algn="l">
-              <a:defRPr sz="3150" b="1">
-                <a:solidFill>
-                  <a:srgbClr val="153B2E"/>
-                </a:solidFill>
-                <a:latin typeface="Calibri"/>
-                <a:ea typeface="Calibri"/>
-                <a:cs typeface="Calibri"/>
-              </a:defRPr>
-            </a:defPPr>
-          </a:lstStyle>
-          <a:p xmlns:a="http://schemas.openxmlformats.org/drawingml/2006/main">
-            <a:pPr algn="l">
-              <a:lnSpc>
-                <a:spcPct val="100000"/>
-              </a:lnSpc>
-              <a:buNone/>
-              <a:defRPr sz="3150" b="1">
-                <a:solidFill>
-                  <a:srgbClr val="153B2E"/>
-                </a:solidFill>
-                <a:latin typeface="Calibri"/>
-                <a:ea typeface="Calibri"/>
-                <a:cs typeface="Calibri"/>
-              </a:defRPr>
-            </a:pPr>
-            <a:r>
-              <a:rPr sz="3150" b="1">
-                <a:solidFill>
-                  <a:srgbClr val="153B2E"/>
-                </a:solidFill>
-                <a:latin typeface="Calibri"/>
-                <a:ea typeface="Calibri"/>
-                <a:cs typeface="Calibri"/>
-              </a:rPr>
-              <a:t>Watch it rise. Then walk it.</a:t>
-            </a:r>
-          </a:p>
-        </p:txBody>
-      </p:sp>
-      <p:sp>
-        <p:nvSpPr>
-          <p:cNvPr id="5" name="">
-            <a:extLst xmlns:a="http://schemas.openxmlformats.org/drawingml/2006/main">
-              <a:ext uri="{FF2B5EF4-FFF2-40B4-BE49-F238E27FC236}">
-                <a16:creationId xmlns:a16="http://schemas.microsoft.com/office/drawing/2014/main" id="{36912FFF-BDC6-4BF1-A32C-E7714B24ACB3}"/>
-              </a:ext>
-            </a:extLst>
-          </p:cNvPr>
-          <p:cNvSpPr>
-            <a:spLocks xmlns:a="http://schemas.openxmlformats.org/drawingml/2006/main" noGrp="1"/>
-          </p:cNvSpPr>
-          <p:nvPr/>
-        </p:nvSpPr>
-        <p:spPr>
-          <a:xfrm xmlns:a="http://schemas.openxmlformats.org/drawingml/2006/main">
-            <a:off x="628650" y="1524000"/>
-            <a:ext cx="9525000" cy="304800"/>
-          </a:xfrm>
-          <a:prstGeom xmlns:a="http://schemas.openxmlformats.org/drawingml/2006/main" prst="rect">
-            <a:avLst/>
-          </a:prstGeom>
-          <a:noFill xmlns:a="http://schemas.openxmlformats.org/drawingml/2006/main"/>
-          <a:ln xmlns:a="http://schemas.openxmlformats.org/drawingml/2006/main" w="0">
-            <a:noFill/>
-            <a:prstDash val="solid"/>
-          </a:ln>
-        </p:spPr>
-        <p:txBody>
-          <a:bodyPr xmlns:a="http://schemas.openxmlformats.org/drawingml/2006/main" wrap="square" lIns="0" tIns="0" rIns="0" bIns="0" anchor="t">
-            <a:normAutofit fontScale="100000"/>
-          </a:bodyPr>
-          <a:lstStyle xmlns:a="http://schemas.openxmlformats.org/drawingml/2006/main">
-            <a:defPPr algn="l">
-              <a:defRPr sz="1425" b="0">
-                <a:solidFill>
-                  <a:srgbClr val="60756A"/>
-                </a:solidFill>
-                <a:latin typeface="Calibri"/>
-                <a:ea typeface="Calibri"/>
-                <a:cs typeface="Calibri"/>
-              </a:defRPr>
-            </a:defPPr>
-          </a:lstStyle>
-          <a:p xmlns:a="http://schemas.openxmlformats.org/drawingml/2006/main">
-            <a:pPr algn="l">
-              <a:lnSpc>
-                <a:spcPct val="100000"/>
-              </a:lnSpc>
-              <a:buNone/>
-              <a:defRPr sz="1425" b="0">
-                <a:solidFill>
-                  <a:srgbClr val="60756A"/>
-                </a:solidFill>
-                <a:latin typeface="Calibri"/>
-                <a:ea typeface="Calibri"/>
-                <a:cs typeface="Calibri"/>
-              </a:defRPr>
-            </a:pPr>
-            <a:r>
-              <a:rPr sz="1425" b="0">
-                <a:solidFill>
-                  <a:srgbClr val="60756A"/>
-                </a:solidFill>
-                <a:latin typeface="Calibri"/>
-                <a:ea typeface="Calibri"/>
-                <a:cs typeface="Calibri"/>
-              </a:rPr>
-              <a:t>The model is not a still render: it assembles level by level and stays interactive.</a:t>
-            </a:r>
-          </a:p>
-        </p:txBody>
-      </p:sp>
-      <p:sp>
-        <p:nvSpPr>
-          <p:cNvPr id="6" name="">
-            <a:extLst xmlns:a="http://schemas.openxmlformats.org/drawingml/2006/main">
-              <a:ext uri="{FF2B5EF4-FFF2-40B4-BE49-F238E27FC236}">
-                <a16:creationId xmlns:a16="http://schemas.microsoft.com/office/drawing/2014/main" id="{58E74581-D279-4480-B2A8-CCF4B2E89C5A}"/>
-              </a:ext>
-            </a:extLst>
-          </p:cNvPr>
-          <p:cNvSpPr>
-            <a:spLocks xmlns:a="http://schemas.openxmlformats.org/drawingml/2006/main" noGrp="1"/>
-          </p:cNvSpPr>
-          <p:nvPr/>
-        </p:nvSpPr>
-        <p:spPr>
-          <a:xfrm xmlns:a="http://schemas.openxmlformats.org/drawingml/2006/main">
-            <a:off x="628650" y="2219325"/>
-            <a:ext cx="5372100" cy="3238500"/>
-          </a:xfrm>
-          <a:prstGeom xmlns:a="http://schemas.openxmlformats.org/drawingml/2006/main" prst="roundRect">
-            <a:avLst>
-              <a:gd name="adj" fmla="val 2353"/>
-            </a:avLst>
-          </a:prstGeom>
-          <a:solidFill xmlns:a="http://schemas.openxmlformats.org/drawingml/2006/main">
-            <a:srgbClr val="153B2E"/>
-          </a:solidFill>
-          <a:ln xmlns:a="http://schemas.openxmlformats.org/drawingml/2006/main" w="0">
-            <a:noFill/>
-            <a:prstDash val="solid"/>
-          </a:ln>
-        </p:spPr>
-      </p:sp>
-      <p:pic>
-        <p:nvPicPr>
-          <p:cNvPr id="7" name="">
-            <a:extLst xmlns:a="http://schemas.openxmlformats.org/drawingml/2006/main">
-              <a:ext uri="{FF2B5EF4-FFF2-40B4-BE49-F238E27FC236}">
-                <a16:creationId xmlns:a16="http://schemas.microsoft.com/office/drawing/2014/main" id="{F643CB0E-7445-408C-8DEE-7579D2998343}"/>
-              </a:ext>
-            </a:extLst>
-          </p:cNvPr>
-          <p:cNvPicPr>
-            <a:picLocks xmlns:a="http://schemas.openxmlformats.org/drawingml/2006/main" noChangeAspect="1"/>
-          </p:cNvPicPr>
-          <p:nvPr/>
-        </p:nvPicPr>
-        <p:blipFill>
-          <a:blip xmlns:r="http://schemas.openxmlformats.org/officeDocument/2006/relationships" xmlns:a="http://schemas.openxmlformats.org/drawingml/2006/main" r:embed="R3e6eecc0a0984a0f">
-            <a:extLst>
-              <a:ext uri="{96DAC541-7B7A-43D3-8B79-37D633B846F1}">
-                <asvg:svgBlip xmlns:asvg="http://schemas.microsoft.com/office/drawing/2016/SVG/main" r:embed="R0f657b2bc684429b"/>
-              </a:ext>
-            </a:extLst>
-          </a:blip>
-          <a:stretch xmlns:a="http://schemas.openxmlformats.org/drawingml/2006/main"/>
-        </p:blipFill>
-        <p:spPr>
-          <a:xfrm xmlns:a="http://schemas.openxmlformats.org/drawingml/2006/main">
-            <a:off x="800100" y="2171700"/>
-            <a:ext cx="4953000" cy="3143250"/>
-          </a:xfrm>
-          <a:prstGeom xmlns:a="http://schemas.openxmlformats.org/drawingml/2006/main" prst="rect">
-            <a:avLst/>
-          </a:prstGeom>
-        </p:spPr>
-      </p:pic>
-      <p:sp>
-        <p:nvSpPr>
-          <p:cNvPr id="8" name="">
-            <a:extLst xmlns:a="http://schemas.openxmlformats.org/drawingml/2006/main">
-              <a:ext uri="{FF2B5EF4-FFF2-40B4-BE49-F238E27FC236}">
-                <a16:creationId xmlns:a16="http://schemas.microsoft.com/office/drawing/2014/main" id="{63DDBD0D-6122-44D5-9BC0-7038F3312BFE}"/>
-              </a:ext>
-            </a:extLst>
-          </p:cNvPr>
-          <p:cNvSpPr>
-            <a:spLocks xmlns:a="http://schemas.openxmlformats.org/drawingml/2006/main" noGrp="1"/>
-          </p:cNvSpPr>
-          <p:nvPr/>
-        </p:nvSpPr>
-        <p:spPr>
-          <a:xfrm xmlns:a="http://schemas.openxmlformats.org/drawingml/2006/main">
-            <a:off x="876300" y="5667375"/>
-            <a:ext cx="1619250" cy="200025"/>
-          </a:xfrm>
-          <a:prstGeom xmlns:a="http://schemas.openxmlformats.org/drawingml/2006/main" prst="rect">
-            <a:avLst/>
-          </a:prstGeom>
-          <a:noFill xmlns:a="http://schemas.openxmlformats.org/drawingml/2006/main"/>
-          <a:ln xmlns:a="http://schemas.openxmlformats.org/drawingml/2006/main" w="0">
-            <a:noFill/>
-            <a:prstDash val="solid"/>
-          </a:ln>
-        </p:spPr>
-        <p:txBody>
-          <a:bodyPr xmlns:a="http://schemas.openxmlformats.org/drawingml/2006/main" wrap="square" lIns="0" tIns="0" rIns="0" bIns="0" anchor="t">
-            <a:normAutofit fontScale="100000"/>
-          </a:bodyPr>
-          <a:lstStyle xmlns:a="http://schemas.openxmlformats.org/drawingml/2006/main">
-            <a:defPPr algn="l">
-              <a:defRPr sz="975" b="1">
-                <a:solidFill>
-                  <a:srgbClr val="E9795B"/>
-                </a:solidFill>
-                <a:latin typeface="Calibri"/>
-                <a:ea typeface="Calibri"/>
-                <a:cs typeface="Calibri"/>
-              </a:defRPr>
-            </a:defPPr>
-          </a:lstStyle>
-          <a:p xmlns:a="http://schemas.openxmlformats.org/drawingml/2006/main">
-            <a:pPr algn="l">
-              <a:lnSpc>
-                <a:spcPct val="100000"/>
-              </a:lnSpc>
-              <a:buNone/>
-              <a:defRPr sz="975" b="1">
-                <a:solidFill>
-                  <a:srgbClr val="E9795B"/>
-                </a:solidFill>
-                <a:latin typeface="Calibri"/>
-                <a:ea typeface="Calibri"/>
-                <a:cs typeface="Calibri"/>
-              </a:defRPr>
-            </a:pPr>
-            <a:r>
-              <a:rPr sz="975" b="1">
-                <a:solidFill>
-                  <a:srgbClr val="E9795B"/>
-                </a:solidFill>
-                <a:latin typeface="Calibri"/>
-                <a:ea typeface="Calibri"/>
-                <a:cs typeface="Calibri"/>
-              </a:rPr>
-              <a:t>01  BUILD</a:t>
-            </a:r>
-          </a:p>
-        </p:txBody>
-      </p:sp>
-      <p:sp>
-        <p:nvSpPr>
-          <p:cNvPr id="9" name="">
-            <a:extLst xmlns:a="http://schemas.openxmlformats.org/drawingml/2006/main">
-              <a:ext uri="{FF2B5EF4-FFF2-40B4-BE49-F238E27FC236}">
-                <a16:creationId xmlns:a16="http://schemas.microsoft.com/office/drawing/2014/main" id="{EBBC245D-3EA7-4691-BED6-AE90FCF31C80}"/>
-              </a:ext>
-            </a:extLst>
-          </p:cNvPr>
-          <p:cNvSpPr>
-            <a:spLocks xmlns:a="http://schemas.openxmlformats.org/drawingml/2006/main" noGrp="1"/>
-          </p:cNvSpPr>
-          <p:nvPr/>
-        </p:nvSpPr>
-        <p:spPr>
-          <a:xfrm xmlns:a="http://schemas.openxmlformats.org/drawingml/2006/main">
-            <a:off x="876300" y="5943600"/>
-            <a:ext cx="4610100" cy="276225"/>
-          </a:xfrm>
-          <a:prstGeom xmlns:a="http://schemas.openxmlformats.org/drawingml/2006/main" prst="rect">
-            <a:avLst/>
-          </a:prstGeom>
-          <a:noFill xmlns:a="http://schemas.openxmlformats.org/drawingml/2006/main"/>
-          <a:ln xmlns:a="http://schemas.openxmlformats.org/drawingml/2006/main" w="0">
-            <a:noFill/>
-            <a:prstDash val="solid"/>
-          </a:ln>
-        </p:spPr>
-        <p:txBody>
-          <a:bodyPr xmlns:a="http://schemas.openxmlformats.org/drawingml/2006/main" wrap="square" lIns="0" tIns="0" rIns="0" bIns="0" anchor="t">
-            <a:normAutofit fontScale="100000"/>
-          </a:bodyPr>
-          <a:lstStyle xmlns:a="http://schemas.openxmlformats.org/drawingml/2006/main">
-            <a:defPPr algn="l">
-              <a:defRPr sz="1500" b="1">
-                <a:solidFill>
-                  <a:srgbClr val="19332A"/>
-                </a:solidFill>
-                <a:latin typeface="Calibri"/>
-                <a:ea typeface="Calibri"/>
-                <a:cs typeface="Calibri"/>
-              </a:defRPr>
-            </a:defPPr>
-          </a:lstStyle>
-          <a:p xmlns:a="http://schemas.openxmlformats.org/drawingml/2006/main">
-            <a:pPr algn="l">
-              <a:lnSpc>
-                <a:spcPct val="100000"/>
-              </a:lnSpc>
-              <a:buNone/>
-              <a:defRPr sz="1500" b="1">
-                <a:solidFill>
-                  <a:srgbClr val="19332A"/>
-                </a:solidFill>
-                <a:latin typeface="Calibri"/>
-                <a:ea typeface="Calibri"/>
-                <a:cs typeface="Calibri"/>
-              </a:defRPr>
-            </a:pPr>
-            <a:r>
-              <a:rPr sz="1500" b="1">
-                <a:solidFill>
-                  <a:srgbClr val="19332A"/>
-                </a:solidFill>
-                <a:latin typeface="Calibri"/>
-                <a:ea typeface="Calibri"/>
-                <a:cs typeface="Calibri"/>
-              </a:rPr>
-              <a:t>Ground → first → second → terrace</a:t>
-            </a:r>
-          </a:p>
-        </p:txBody>
-      </p:sp>
-      <p:sp>
-        <p:nvSpPr>
-          <p:cNvPr id="10" name="">
-            <a:extLst xmlns:a="http://schemas.openxmlformats.org/drawingml/2006/main">
-              <a:ext uri="{FF2B5EF4-FFF2-40B4-BE49-F238E27FC236}">
-                <a16:creationId xmlns:a16="http://schemas.microsoft.com/office/drawing/2014/main" id="{CBB5B7E5-021F-48AF-AD58-40075940179D}"/>
-              </a:ext>
-            </a:extLst>
-          </p:cNvPr>
-          <p:cNvSpPr>
-            <a:spLocks xmlns:a="http://schemas.openxmlformats.org/drawingml/2006/main" noGrp="1"/>
-          </p:cNvSpPr>
-          <p:nvPr/>
-        </p:nvSpPr>
-        <p:spPr>
-          <a:xfrm xmlns:a="http://schemas.openxmlformats.org/drawingml/2006/main">
-            <a:off x="6686550" y="2524125"/>
-            <a:ext cx="1952625" cy="190500"/>
-          </a:xfrm>
-          <a:prstGeom xmlns:a="http://schemas.openxmlformats.org/drawingml/2006/main" prst="rect">
-            <a:avLst/>
-          </a:prstGeom>
-          <a:noFill xmlns:a="http://schemas.openxmlformats.org/drawingml/2006/main"/>
-          <a:ln xmlns:a="http://schemas.openxmlformats.org/drawingml/2006/main" w="0">
-            <a:noFill/>
-            <a:prstDash val="solid"/>
-          </a:ln>
-        </p:spPr>
-        <p:txBody>
-          <a:bodyPr xmlns:a="http://schemas.openxmlformats.org/drawingml/2006/main" wrap="square" lIns="0" tIns="0" rIns="0" bIns="0" anchor="t">
-            <a:normAutofit fontScale="100000"/>
-          </a:bodyPr>
-          <a:lstStyle xmlns:a="http://schemas.openxmlformats.org/drawingml/2006/main">
-            <a:defPPr algn="l">
-              <a:defRPr sz="975" b="1">
-                <a:solidFill>
-                  <a:srgbClr val="E9795B"/>
-                </a:solidFill>
-                <a:latin typeface="Calibri"/>
-                <a:ea typeface="Calibri"/>
-                <a:cs typeface="Calibri"/>
-              </a:defRPr>
-            </a:defPPr>
-          </a:lstStyle>
-          <a:p xmlns:a="http://schemas.openxmlformats.org/drawingml/2006/main">
-            <a:pPr algn="l">
-              <a:lnSpc>
-                <a:spcPct val="100000"/>
-              </a:lnSpc>
-              <a:buNone/>
-              <a:defRPr sz="975" b="1">
-                <a:solidFill>
-                  <a:srgbClr val="E9795B"/>
-                </a:solidFill>
-                <a:latin typeface="Calibri"/>
-                <a:ea typeface="Calibri"/>
-                <a:cs typeface="Calibri"/>
-              </a:defRPr>
-            </a:pPr>
-            <a:r>
-              <a:rPr sz="975" b="1">
-                <a:solidFill>
-                  <a:srgbClr val="E9795B"/>
-                </a:solidFill>
-                <a:latin typeface="Calibri"/>
-                <a:ea typeface="Calibri"/>
-                <a:cs typeface="Calibri"/>
-              </a:rPr>
-              <a:t>02  WALK</a:t>
-            </a:r>
-          </a:p>
-        </p:txBody>
-      </p:sp>
-      <p:sp>
-        <p:nvSpPr>
-          <p:cNvPr id="11" name="">
-            <a:extLst xmlns:a="http://schemas.openxmlformats.org/drawingml/2006/main">
-              <a:ext uri="{FF2B5EF4-FFF2-40B4-BE49-F238E27FC236}">
-                <a16:creationId xmlns:a16="http://schemas.microsoft.com/office/drawing/2014/main" id="{EDEFAE57-EBCA-47EE-8469-09AFF91798A2}"/>
-              </a:ext>
-            </a:extLst>
-          </p:cNvPr>
-          <p:cNvSpPr>
-            <a:spLocks xmlns:a="http://schemas.openxmlformats.org/drawingml/2006/main" noGrp="1"/>
-          </p:cNvSpPr>
-          <p:nvPr/>
-        </p:nvSpPr>
-        <p:spPr>
-          <a:xfrm xmlns:a="http://schemas.openxmlformats.org/drawingml/2006/main">
-            <a:off x="6686550" y="2895600"/>
-            <a:ext cx="4667250" cy="914400"/>
-          </a:xfrm>
-          <a:prstGeom xmlns:a="http://schemas.openxmlformats.org/drawingml/2006/main" prst="rect">
-            <a:avLst/>
-          </a:prstGeom>
-          <a:noFill xmlns:a="http://schemas.openxmlformats.org/drawingml/2006/main"/>
-          <a:ln xmlns:a="http://schemas.openxmlformats.org/drawingml/2006/main" w="0">
-            <a:noFill/>
-            <a:prstDash val="solid"/>
-          </a:ln>
-        </p:spPr>
-        <p:txBody>
-          <a:bodyPr xmlns:a="http://schemas.openxmlformats.org/drawingml/2006/main" wrap="square" lIns="0" tIns="0" rIns="0" bIns="0" anchor="t">
-            <a:normAutofit fontScale="100000"/>
-          </a:bodyPr>
-          <a:lstStyle xmlns:a="http://schemas.openxmlformats.org/drawingml/2006/main">
-            <a:defPPr algn="l">
-              <a:defRPr sz="2550" b="1">
-                <a:solidFill>
-                  <a:srgbClr val="153B2E"/>
-                </a:solidFill>
-                <a:latin typeface="Calibri"/>
-                <a:ea typeface="Calibri"/>
-                <a:cs typeface="Calibri"/>
-              </a:defRPr>
-            </a:defPPr>
-          </a:lstStyle>
-          <a:p xmlns:a="http://schemas.openxmlformats.org/drawingml/2006/main">
-            <a:pPr algn="l">
-              <a:lnSpc>
-                <a:spcPct val="98000"/>
-              </a:lnSpc>
-              <a:buNone/>
-              <a:defRPr sz="2550" b="1">
-                <a:solidFill>
-                  <a:srgbClr val="153B2E"/>
-                </a:solidFill>
-                <a:latin typeface="Calibri"/>
-                <a:ea typeface="Calibri"/>
-                <a:cs typeface="Calibri"/>
-              </a:defRPr>
-            </a:pPr>
-            <a:r>
-              <a:rPr sz="2550" b="1">
-                <a:solidFill>
-                  <a:srgbClr val="153B2E"/>
-                </a:solidFill>
-                <a:latin typeface="Calibri"/>
-                <a:ea typeface="Calibri"/>
-                <a:cs typeface="Calibri"/>
-              </a:rPr>
-              <a:t>Follow the stairs</a:t>
-            </a:r>
-          </a:p>
-          <a:p xmlns:a="http://schemas.openxmlformats.org/drawingml/2006/main">
-            <a:pPr algn="l">
-              <a:lnSpc>
-                <a:spcPct val="98000"/>
-              </a:lnSpc>
-              <a:buNone/>
-              <a:defRPr sz="2550" b="1">
-                <a:solidFill>
-                  <a:srgbClr val="153B2E"/>
-                </a:solidFill>
-                <a:latin typeface="Calibri"/>
-                <a:ea typeface="Calibri"/>
-                <a:cs typeface="Calibri"/>
-              </a:defRPr>
-            </a:pPr>
-            <a:r>
-              <a:rPr sz="2550" b="1">
-                <a:solidFill>
-                  <a:srgbClr val="153B2E"/>
-                </a:solidFill>
-                <a:latin typeface="Calibri"/>
-                <a:ea typeface="Calibri"/>
-                <a:cs typeface="Calibri"/>
-              </a:rPr>
-              <a:t>through all three levels.</a:t>
-            </a:r>
-          </a:p>
-        </p:txBody>
-      </p:sp>
-      <p:sp>
-        <p:nvSpPr>
-          <p:cNvPr id="12" name="">
-            <a:extLst xmlns:a="http://schemas.openxmlformats.org/drawingml/2006/main">
-              <a:ext uri="{FF2B5EF4-FFF2-40B4-BE49-F238E27FC236}">
-                <a16:creationId xmlns:a16="http://schemas.microsoft.com/office/drawing/2014/main" id="{8C1A5B3D-D956-45D4-8232-F97A6CBB3980}"/>
-              </a:ext>
-            </a:extLst>
-          </p:cNvPr>
-          <p:cNvSpPr>
-            <a:spLocks xmlns:a="http://schemas.openxmlformats.org/drawingml/2006/main" noGrp="1"/>
-          </p:cNvSpPr>
-          <p:nvPr/>
-        </p:nvSpPr>
-        <p:spPr>
-          <a:xfrm xmlns:a="http://schemas.openxmlformats.org/drawingml/2006/main">
-            <a:off x="6705600" y="4095750"/>
-            <a:ext cx="4476750" cy="847725"/>
-          </a:xfrm>
-          <a:prstGeom xmlns:a="http://schemas.openxmlformats.org/drawingml/2006/main" prst="rect">
-            <a:avLst/>
-          </a:prstGeom>
-          <a:noFill xmlns:a="http://schemas.openxmlformats.org/drawingml/2006/main"/>
-          <a:ln xmlns:a="http://schemas.openxmlformats.org/drawingml/2006/main" w="0">
-            <a:noFill/>
-            <a:prstDash val="solid"/>
-          </a:ln>
-        </p:spPr>
-        <p:txBody>
-          <a:bodyPr xmlns:a="http://schemas.openxmlformats.org/drawingml/2006/main" wrap="square" lIns="0" tIns="0" rIns="0" bIns="0" anchor="t">
-            <a:normAutofit fontScale="100000"/>
-          </a:bodyPr>
-          <a:lstStyle xmlns:a="http://schemas.openxmlformats.org/drawingml/2006/main">
-            <a:defPPr algn="l">
-              <a:defRPr sz="1425" b="0">
-                <a:solidFill>
-                  <a:srgbClr val="60756A"/>
-                </a:solidFill>
-                <a:latin typeface="Calibri"/>
-                <a:ea typeface="Calibri"/>
-                <a:cs typeface="Calibri"/>
-              </a:defRPr>
-            </a:defPPr>
-          </a:lstStyle>
-          <a:p xmlns:a="http://schemas.openxmlformats.org/drawingml/2006/main">
-            <a:pPr algn="l">
-              <a:lnSpc>
-                <a:spcPct val="110000"/>
-              </a:lnSpc>
-              <a:buNone/>
-              <a:defRPr sz="1425" b="0">
-                <a:solidFill>
-                  <a:srgbClr val="60756A"/>
-                </a:solidFill>
-                <a:latin typeface="Calibri"/>
-                <a:ea typeface="Calibri"/>
-                <a:cs typeface="Calibri"/>
-              </a:defRPr>
-            </a:pPr>
-            <a:r>
-              <a:rPr sz="1425" b="0">
-                <a:solidFill>
-                  <a:srgbClr val="60756A"/>
-                </a:solidFill>
-                <a:latin typeface="Calibri"/>
-                <a:ea typeface="Calibri"/>
-                <a:cs typeface="Calibri"/>
-              </a:rPr>
-              <a:t>First-person movement, orbit view and doors that open as you approach make the layout easier to read.</a:t>
-            </a:r>
-          </a:p>
-        </p:txBody>
-      </p:sp>
-      <p:sp>
-        <p:nvSpPr>
-          <p:cNvPr id="13" name="">
-            <a:extLst xmlns:a="http://schemas.openxmlformats.org/drawingml/2006/main">
-              <a:ext uri="{FF2B5EF4-FFF2-40B4-BE49-F238E27FC236}">
-                <a16:creationId xmlns:a16="http://schemas.microsoft.com/office/drawing/2014/main" id="{40D00A4C-E420-4396-A299-CAFA97EF4151}"/>
-              </a:ext>
-            </a:extLst>
-          </p:cNvPr>
-          <p:cNvSpPr>
-            <a:spLocks xmlns:a="http://schemas.openxmlformats.org/drawingml/2006/main" noGrp="1"/>
-          </p:cNvSpPr>
-          <p:nvPr/>
-        </p:nvSpPr>
-        <p:spPr>
-          <a:xfrm xmlns:a="http://schemas.openxmlformats.org/drawingml/2006/main">
-            <a:off x="6705600" y="5248275"/>
-            <a:ext cx="4667250" cy="0"/>
-          </a:xfrm>
-          <a:prstGeom xmlns:a="http://schemas.openxmlformats.org/drawingml/2006/main" prst="line">
-            <a:avLst/>
-          </a:prstGeom>
-          <a:noFill xmlns:a="http://schemas.openxmlformats.org/drawingml/2006/main"/>
-          <a:ln xmlns:a="http://schemas.openxmlformats.org/drawingml/2006/main" w="9525">
-            <a:solidFill>
-              <a:srgbClr val="C8D6CC"/>
-            </a:solidFill>
-            <a:prstDash val="solid"/>
-          </a:ln>
-        </p:spPr>
-      </p:sp>
-      <p:sp>
-        <p:nvSpPr>
-          <p:cNvPr id="14" name="">
-            <a:extLst xmlns:a="http://schemas.openxmlformats.org/drawingml/2006/main">
-              <a:ext uri="{FF2B5EF4-FFF2-40B4-BE49-F238E27FC236}">
-                <a16:creationId xmlns:a16="http://schemas.microsoft.com/office/drawing/2014/main" id="{B4DABEA9-268C-4DDA-82AD-B3B7505EE501}"/>
-              </a:ext>
-            </a:extLst>
-          </p:cNvPr>
-          <p:cNvSpPr>
-            <a:spLocks xmlns:a="http://schemas.openxmlformats.org/drawingml/2006/main" noGrp="1"/>
-          </p:cNvSpPr>
-          <p:nvPr/>
-        </p:nvSpPr>
-        <p:spPr>
-          <a:xfrm xmlns:a="http://schemas.openxmlformats.org/drawingml/2006/main">
-            <a:off x="6705600" y="5476875"/>
-            <a:ext cx="1524000" cy="180975"/>
-          </a:xfrm>
-          <a:prstGeom xmlns:a="http://schemas.openxmlformats.org/drawingml/2006/main" prst="rect">
-            <a:avLst/>
-          </a:prstGeom>
-          <a:noFill xmlns:a="http://schemas.openxmlformats.org/drawingml/2006/main"/>
-          <a:ln xmlns:a="http://schemas.openxmlformats.org/drawingml/2006/main" w="0">
-            <a:noFill/>
-            <a:prstDash val="solid"/>
-          </a:ln>
-        </p:spPr>
-        <p:txBody>
-          <a:bodyPr xmlns:a="http://schemas.openxmlformats.org/drawingml/2006/main" wrap="square" lIns="0" tIns="0" rIns="0" bIns="0" anchor="t">
-            <a:normAutofit fontScale="100000"/>
-          </a:bodyPr>
-          <a:lstStyle xmlns:a="http://schemas.openxmlformats.org/drawingml/2006/main">
-            <a:defPPr algn="l">
-              <a:defRPr sz="900" b="1">
-                <a:solidFill>
-                  <a:srgbClr val="2C6B50"/>
-                </a:solidFill>
-                <a:latin typeface="Calibri"/>
-                <a:ea typeface="Calibri"/>
-                <a:cs typeface="Calibri"/>
-              </a:defRPr>
-            </a:defPPr>
-          </a:lstStyle>
-          <a:p xmlns:a="http://schemas.openxmlformats.org/drawingml/2006/main">
-            <a:pPr algn="l">
-              <a:lnSpc>
-                <a:spcPct val="100000"/>
-              </a:lnSpc>
-              <a:buNone/>
-              <a:defRPr sz="900" b="1">
-                <a:solidFill>
-                  <a:srgbClr val="2C6B50"/>
-                </a:solidFill>
-                <a:latin typeface="Calibri"/>
-                <a:ea typeface="Calibri"/>
-                <a:cs typeface="Calibri"/>
-              </a:defRPr>
-            </a:pPr>
-            <a:r>
-              <a:rPr sz="900" b="1">
-                <a:solidFill>
-                  <a:srgbClr val="2C6B50"/>
-                </a:solidFill>
-                <a:latin typeface="Calibri"/>
-                <a:ea typeface="Calibri"/>
-                <a:cs typeface="Calibri"/>
-              </a:rPr>
-              <a:t>DEMO MODEL</a:t>
-            </a:r>
-          </a:p>
-        </p:txBody>
-      </p:sp>
-      <p:sp>
-        <p:nvSpPr>
-          <p:cNvPr id="15" name="">
-            <a:extLst xmlns:a="http://schemas.openxmlformats.org/drawingml/2006/main">
-              <a:ext uri="{FF2B5EF4-FFF2-40B4-BE49-F238E27FC236}">
-                <a16:creationId xmlns:a16="http://schemas.microsoft.com/office/drawing/2014/main" id="{8670FC9F-FB87-4362-8D5B-B70E4A808D60}"/>
-              </a:ext>
-            </a:extLst>
-          </p:cNvPr>
-          <p:cNvSpPr>
-            <a:spLocks xmlns:a="http://schemas.openxmlformats.org/drawingml/2006/main" noGrp="1"/>
-          </p:cNvSpPr>
-          <p:nvPr/>
-        </p:nvSpPr>
-        <p:spPr>
-          <a:xfrm xmlns:a="http://schemas.openxmlformats.org/drawingml/2006/main">
-            <a:off x="6705600" y="5753100"/>
-            <a:ext cx="4610100" cy="276225"/>
-          </a:xfrm>
-          <a:prstGeom xmlns:a="http://schemas.openxmlformats.org/drawingml/2006/main" prst="rect">
-            <a:avLst/>
-          </a:prstGeom>
-          <a:noFill xmlns:a="http://schemas.openxmlformats.org/drawingml/2006/main"/>
-          <a:ln xmlns:a="http://schemas.openxmlformats.org/drawingml/2006/main" w="0">
-            <a:noFill/>
-            <a:prstDash val="solid"/>
-          </a:ln>
-        </p:spPr>
-        <p:txBody>
-          <a:bodyPr xmlns:a="http://schemas.openxmlformats.org/drawingml/2006/main" wrap="square" lIns="0" tIns="0" rIns="0" bIns="0" anchor="t">
-            <a:normAutofit fontScale="100000"/>
-          </a:bodyPr>
-          <a:lstStyle xmlns:a="http://schemas.openxmlformats.org/drawingml/2006/main">
-            <a:defPPr algn="l">
-              <a:defRPr sz="1350" b="1">
-                <a:solidFill>
-                  <a:srgbClr val="19332A"/>
-                </a:solidFill>
-                <a:latin typeface="Calibri"/>
-                <a:ea typeface="Calibri"/>
-                <a:cs typeface="Calibri"/>
-              </a:defRPr>
-            </a:defPPr>
-          </a:lstStyle>
-          <a:p xmlns:a="http://schemas.openxmlformats.org/drawingml/2006/main">
-            <a:pPr algn="l">
-              <a:lnSpc>
-                <a:spcPct val="100000"/>
-              </a:lnSpc>
-              <a:buNone/>
-              <a:defRPr sz="1350" b="1">
-                <a:solidFill>
-                  <a:srgbClr val="19332A"/>
-                </a:solidFill>
-                <a:latin typeface="Calibri"/>
-                <a:ea typeface="Calibri"/>
-                <a:cs typeface="Calibri"/>
-              </a:defRPr>
-            </a:pPr>
-            <a:r>
-              <a:rPr sz="1350" b="1">
-                <a:solidFill>
-                  <a:srgbClr val="19332A"/>
-                </a:solidFill>
-                <a:latin typeface="Calibri"/>
-                <a:ea typeface="Calibri"/>
-                <a:cs typeface="Calibri"/>
-              </a:rPr>
-              <a:t>10 m × 14 m · 3 floors · 7-second build</a:t>
-            </a:r>
-          </a:p>
-        </p:txBody>
-      </p:sp>
-    </p:spTree>
-    <p:extLst>
-      <p:ext uri="{BB962C8B-B14F-4D97-AF65-F5344CB8AC3E}">
-        <p14:creationId xmlns:p14="http://schemas.microsoft.com/office/powerpoint/2010/main" val="402463716"/>
-      </p:ext>
-    </p:extLst>
-  </p:cSld>
-</p:sld>
-</file>
-
-<file path=ppt/slides/slide6.xml><?xml version="1.0" encoding="utf-8"?>
-<p:sld xmlns:p="http://schemas.openxmlformats.org/presentationml/2006/main">
-  <p:cSld>
-    <p:bg>
-      <p:bgPr>
-        <a:solidFill xmlns:a="http://schemas.openxmlformats.org/drawingml/2006/main">
-          <a:srgbClr val="F5F7F2"/>
-        </a:solidFill>
-      </p:bgPr>
-    </p:bg>
-    <p:spTree>
-      <p:nvGrpSpPr>
-        <p:cNvPr id="1" name=""/>
-        <p:cNvGrpSpPr/>
-        <p:nvPr/>
-      </p:nvGrpSpPr>
-      <p:grpSpPr>
-        <a:xfrm xmlns:a="http://schemas.openxmlformats.org/drawingml/2006/main"/>
-      </p:grpSpPr>
-      <p:sp>
-        <p:nvSpPr>
-          <p:cNvPr id="29" name="">
-            <a:extLst xmlns:a="http://schemas.openxmlformats.org/drawingml/2006/main">
-              <a:ext uri="{FF2B5EF4-FFF2-40B4-BE49-F238E27FC236}">
-                <a16:creationId xmlns:a16="http://schemas.microsoft.com/office/drawing/2014/main" id="{2E4C997A-F35B-44C0-90D4-7C42BCEF4F82}"/>
-              </a:ext>
-            </a:extLst>
-          </p:cNvPr>
-          <p:cNvSpPr>
-            <a:spLocks xmlns:a="http://schemas.openxmlformats.org/drawingml/2006/main" noGrp="1"/>
-          </p:cNvSpPr>
-          <p:nvPr/>
-        </p:nvSpPr>
-        <p:spPr>
-          <a:xfrm xmlns:a="http://schemas.openxmlformats.org/drawingml/2006/main">
-            <a:off x="0" y="0"/>
-            <a:ext cx="12192000" cy="76200"/>
-          </a:xfrm>
-          <a:prstGeom xmlns:a="http://schemas.openxmlformats.org/drawingml/2006/main" prst="rect">
-            <a:avLst/>
-          </a:prstGeom>
-          <a:solidFill xmlns:a="http://schemas.openxmlformats.org/drawingml/2006/main">
-            <a:srgbClr val="2C6B50"/>
-          </a:solidFill>
-          <a:ln xmlns:a="http://schemas.openxmlformats.org/drawingml/2006/main" w="0">
-            <a:noFill/>
-            <a:prstDash val="solid"/>
-          </a:ln>
-        </p:spPr>
-      </p:sp>
-      <p:sp>
-        <p:nvSpPr>
-          <p:cNvPr id="2" name="">
-            <a:extLst xmlns:a="http://schemas.openxmlformats.org/drawingml/2006/main">
-              <a:ext uri="{FF2B5EF4-FFF2-40B4-BE49-F238E27FC236}">
-                <a16:creationId xmlns:a16="http://schemas.microsoft.com/office/drawing/2014/main" id="{5CE7E6FA-DBDC-4DE2-B31F-A37F132AEE17}"/>
-              </a:ext>
-            </a:extLst>
-          </p:cNvPr>
-          <p:cNvSpPr>
-            <a:spLocks xmlns:a="http://schemas.openxmlformats.org/drawingml/2006/main" noGrp="1"/>
-          </p:cNvSpPr>
-          <p:nvPr/>
-        </p:nvSpPr>
-        <p:spPr>
-          <a:xfrm xmlns:a="http://schemas.openxmlformats.org/drawingml/2006/main">
-            <a:off x="609600" y="361950"/>
-            <a:ext cx="2857500" cy="190500"/>
-          </a:xfrm>
-          <a:prstGeom xmlns:a="http://schemas.openxmlformats.org/drawingml/2006/main" prst="rect">
-            <a:avLst/>
-          </a:prstGeom>
-          <a:noFill xmlns:a="http://schemas.openxmlformats.org/drawingml/2006/main"/>
-          <a:ln xmlns:a="http://schemas.openxmlformats.org/drawingml/2006/main" w="0">
-            <a:noFill/>
-            <a:prstDash val="solid"/>
-          </a:ln>
-        </p:spPr>
-        <p:txBody>
-          <a:bodyPr xmlns:a="http://schemas.openxmlformats.org/drawingml/2006/main" wrap="square" lIns="0" tIns="0" rIns="0" bIns="0" anchor="t">
-            <a:normAutofit fontScale="100000"/>
-          </a:bodyPr>
-          <a:lstStyle xmlns:a="http://schemas.openxmlformats.org/drawingml/2006/main">
-            <a:defPPr algn="l">
-              <a:defRPr sz="975" b="1">
-                <a:solidFill>
-                  <a:srgbClr val="2C6B50"/>
-                </a:solidFill>
-                <a:latin typeface="Calibri"/>
-                <a:ea typeface="Calibri"/>
-                <a:cs typeface="Calibri"/>
-              </a:defRPr>
-            </a:defPPr>
-          </a:lstStyle>
-          <a:p xmlns:a="http://schemas.openxmlformats.org/drawingml/2006/main">
-            <a:pPr algn="l">
-              <a:lnSpc>
-                <a:spcPct val="100000"/>
-              </a:lnSpc>
-              <a:buNone/>
-              <a:defRPr sz="975" b="1">
-                <a:solidFill>
-                  <a:srgbClr val="2C6B50"/>
-                </a:solidFill>
-                <a:latin typeface="Calibri"/>
-                <a:ea typeface="Calibri"/>
-                <a:cs typeface="Calibri"/>
-              </a:defRPr>
-            </a:pPr>
-            <a:r>
-              <a:rPr sz="975" b="1">
-                <a:solidFill>
-                  <a:srgbClr val="2C6B50"/>
-                </a:solidFill>
-                <a:latin typeface="Calibri"/>
-                <a:ea typeface="Calibri"/>
-                <a:cs typeface="Calibri"/>
-              </a:rPr>
-              <a:t>BUILT FOR THE BROWSER</a:t>
-            </a:r>
-          </a:p>
-        </p:txBody>
-      </p:sp>
-      <p:sp>
-        <p:nvSpPr>
-          <p:cNvPr id="3" name="">
-            <a:extLst xmlns:a="http://schemas.openxmlformats.org/drawingml/2006/main">
-              <a:ext uri="{FF2B5EF4-FFF2-40B4-BE49-F238E27FC236}">
-                <a16:creationId xmlns:a16="http://schemas.microsoft.com/office/drawing/2014/main" id="{7F3806DC-B39E-423E-BA39-F658BFB26120}"/>
-              </a:ext>
-            </a:extLst>
-          </p:cNvPr>
-          <p:cNvSpPr>
-            <a:spLocks xmlns:a="http://schemas.openxmlformats.org/drawingml/2006/main" noGrp="1"/>
-          </p:cNvSpPr>
-          <p:nvPr/>
-        </p:nvSpPr>
-        <p:spPr>
-          <a:xfrm xmlns:a="http://schemas.openxmlformats.org/drawingml/2006/main">
-            <a:off x="11239500" y="6362700"/>
-            <a:ext cx="381000" cy="190500"/>
-          </a:xfrm>
-          <a:prstGeom xmlns:a="http://schemas.openxmlformats.org/drawingml/2006/main" prst="rect">
-            <a:avLst/>
-          </a:prstGeom>
-          <a:noFill xmlns:a="http://schemas.openxmlformats.org/drawingml/2006/main"/>
-          <a:ln xmlns:a="http://schemas.openxmlformats.org/drawingml/2006/main" w="0">
-            <a:noFill/>
-            <a:prstDash val="solid"/>
-          </a:ln>
-        </p:spPr>
-        <p:txBody>
-          <a:bodyPr xmlns:a="http://schemas.openxmlformats.org/drawingml/2006/main" wrap="square" lIns="0" tIns="0" rIns="0" bIns="0" anchor="t">
-            <a:normAutofit fontScale="100000"/>
-          </a:bodyPr>
-          <a:lstStyle xmlns:a="http://schemas.openxmlformats.org/drawingml/2006/main">
-            <a:defPPr algn="r">
-              <a:defRPr sz="900" b="1">
-                <a:solidFill>
-                  <a:srgbClr val="60756A"/>
-                </a:solidFill>
-                <a:latin typeface="Calibri"/>
-                <a:ea typeface="Calibri"/>
-                <a:cs typeface="Calibri"/>
-              </a:defRPr>
-            </a:defPPr>
-          </a:lstStyle>
-          <a:p xmlns:a="http://schemas.openxmlformats.org/drawingml/2006/main">
-            <a:pPr algn="r">
-              <a:lnSpc>
-                <a:spcPct val="100000"/>
-              </a:lnSpc>
-              <a:buNone/>
-              <a:defRPr sz="900" b="1">
-                <a:solidFill>
-                  <a:srgbClr val="60756A"/>
-                </a:solidFill>
-                <a:latin typeface="Calibri"/>
-                <a:ea typeface="Calibri"/>
-                <a:cs typeface="Calibri"/>
-              </a:defRPr>
-            </a:pPr>
-            <a:r>
-              <a:rPr sz="900" b="1">
-                <a:solidFill>
-                  <a:srgbClr val="60756A"/>
-                </a:solidFill>
-                <a:latin typeface="Calibri"/>
-                <a:ea typeface="Calibri"/>
-                <a:cs typeface="Calibri"/>
-              </a:rPr>
-              <a:t>06</a:t>
-            </a:r>
-          </a:p>
-        </p:txBody>
-      </p:sp>
-      <p:sp>
-        <p:nvSpPr>
-          <p:cNvPr id="4" name="">
-            <a:extLst xmlns:a="http://schemas.openxmlformats.org/drawingml/2006/main">
-              <a:ext uri="{FF2B5EF4-FFF2-40B4-BE49-F238E27FC236}">
-                <a16:creationId xmlns:a16="http://schemas.microsoft.com/office/drawing/2014/main" id="{7AC3F6B5-20F8-4937-A9C8-8CB64B5D2B14}"/>
-              </a:ext>
-            </a:extLst>
-          </p:cNvPr>
-          <p:cNvSpPr>
-            <a:spLocks xmlns:a="http://schemas.openxmlformats.org/drawingml/2006/main" noGrp="1"/>
-          </p:cNvSpPr>
-          <p:nvPr/>
-        </p:nvSpPr>
-        <p:spPr>
-          <a:xfrm xmlns:a="http://schemas.openxmlformats.org/drawingml/2006/main">
-            <a:off x="609600" y="819150"/>
-            <a:ext cx="6191250" cy="1019175"/>
-          </a:xfrm>
-          <a:prstGeom xmlns:a="http://schemas.openxmlformats.org/drawingml/2006/main" prst="rect">
-            <a:avLst/>
-          </a:prstGeom>
-          <a:noFill xmlns:a="http://schemas.openxmlformats.org/drawingml/2006/main"/>
-          <a:ln xmlns:a="http://schemas.openxmlformats.org/drawingml/2006/main" w="0">
-            <a:noFill/>
-            <a:prstDash val="solid"/>
-          </a:ln>
-        </p:spPr>
-        <p:txBody>
-          <a:bodyPr xmlns:a="http://schemas.openxmlformats.org/drawingml/2006/main" wrap="square" lIns="0" tIns="0" rIns="0" bIns="0" anchor="t">
-            <a:normAutofit fontScale="100000"/>
-          </a:bodyPr>
-          <a:lstStyle xmlns:a="http://schemas.openxmlformats.org/drawingml/2006/main">
-            <a:defPPr algn="l">
-              <a:defRPr sz="3000" b="1">
-                <a:solidFill>
-                  <a:srgbClr val="153B2E"/>
-                </a:solidFill>
-                <a:latin typeface="Calibri"/>
-                <a:ea typeface="Calibri"/>
-                <a:cs typeface="Calibri"/>
-              </a:defRPr>
-            </a:defPPr>
-          </a:lstStyle>
-          <a:p xmlns:a="http://schemas.openxmlformats.org/drawingml/2006/main">
-            <a:pPr algn="l">
-              <a:lnSpc>
-                <a:spcPct val="98000"/>
-              </a:lnSpc>
-              <a:buNone/>
-              <a:defRPr sz="3000" b="1">
-                <a:solidFill>
-                  <a:srgbClr val="153B2E"/>
-                </a:solidFill>
-                <a:latin typeface="Calibri"/>
-                <a:ea typeface="Calibri"/>
-                <a:cs typeface="Calibri"/>
-              </a:defRPr>
-            </a:pPr>
-            <a:r>
-              <a:rPr sz="3000" b="1">
-                <a:solidFill>
-                  <a:srgbClr val="153B2E"/>
-                </a:solidFill>
-                <a:latin typeface="Calibri"/>
-                <a:ea typeface="Calibri"/>
-                <a:cs typeface="Calibri"/>
-              </a:rPr>
-              <a:t>A lightweight studio,</a:t>
-            </a:r>
-          </a:p>
-          <a:p xmlns:a="http://schemas.openxmlformats.org/drawingml/2006/main">
-            <a:pPr algn="l">
-              <a:lnSpc>
-                <a:spcPct val="98000"/>
-              </a:lnSpc>
-              <a:buNone/>
-              <a:defRPr sz="3000" b="1">
-                <a:solidFill>
-                  <a:srgbClr val="153B2E"/>
-                </a:solidFill>
-                <a:latin typeface="Calibri"/>
-                <a:ea typeface="Calibri"/>
-                <a:cs typeface="Calibri"/>
-              </a:defRPr>
-            </a:pPr>
-            <a:r>
-              <a:rPr sz="3000" b="1">
-                <a:solidFill>
-                  <a:srgbClr val="153B2E"/>
-                </a:solidFill>
-                <a:latin typeface="Calibri"/>
-                <a:ea typeface="Calibri"/>
-                <a:cs typeface="Calibri"/>
-              </a:rPr>
-              <a:t>with a real 3D engine.</a:t>
-            </a:r>
-          </a:p>
-        </p:txBody>
-      </p:sp>
-      <p:sp>
-        <p:nvSpPr>
-          <p:cNvPr id="5" name="">
-            <a:extLst xmlns:a="http://schemas.openxmlformats.org/drawingml/2006/main">
-              <a:ext uri="{FF2B5EF4-FFF2-40B4-BE49-F238E27FC236}">
-                <a16:creationId xmlns:a16="http://schemas.microsoft.com/office/drawing/2014/main" id="{EEB03303-45A2-4618-90BD-6ACF614095ED}"/>
-              </a:ext>
-            </a:extLst>
-          </p:cNvPr>
-          <p:cNvSpPr>
-            <a:spLocks xmlns:a="http://schemas.openxmlformats.org/drawingml/2006/main" noGrp="1"/>
-          </p:cNvSpPr>
-          <p:nvPr/>
-        </p:nvSpPr>
-        <p:spPr>
-          <a:xfrm xmlns:a="http://schemas.openxmlformats.org/drawingml/2006/main">
-            <a:off x="628650" y="2066925"/>
-            <a:ext cx="5715000" cy="476250"/>
-          </a:xfrm>
-          <a:prstGeom xmlns:a="http://schemas.openxmlformats.org/drawingml/2006/main" prst="rect">
-            <a:avLst/>
-          </a:prstGeom>
-          <a:noFill xmlns:a="http://schemas.openxmlformats.org/drawingml/2006/main"/>
-          <a:ln xmlns:a="http://schemas.openxmlformats.org/drawingml/2006/main" w="0">
-            <a:noFill/>
-            <a:prstDash val="solid"/>
-          </a:ln>
-        </p:spPr>
-        <p:txBody>
-          <a:bodyPr xmlns:a="http://schemas.openxmlformats.org/drawingml/2006/main" wrap="square" lIns="0" tIns="0" rIns="0" bIns="0" anchor="t">
-            <a:normAutofit fontScale="100000"/>
-          </a:bodyPr>
-          <a:lstStyle xmlns:a="http://schemas.openxmlformats.org/drawingml/2006/main">
-            <a:defPPr algn="l">
-              <a:defRPr sz="1425" b="0">
-                <a:solidFill>
-                  <a:srgbClr val="60756A"/>
-                </a:solidFill>
-                <a:latin typeface="Calibri"/>
-                <a:ea typeface="Calibri"/>
-                <a:cs typeface="Calibri"/>
-              </a:defRPr>
-            </a:defPPr>
-          </a:lstStyle>
-          <a:p xmlns:a="http://schemas.openxmlformats.org/drawingml/2006/main">
-            <a:pPr algn="l">
-              <a:lnSpc>
-                <a:spcPct val="100000"/>
-              </a:lnSpc>
-              <a:buNone/>
-              <a:defRPr sz="1425" b="0">
-                <a:solidFill>
-                  <a:srgbClr val="60756A"/>
-                </a:solidFill>
-                <a:latin typeface="Calibri"/>
-                <a:ea typeface="Calibri"/>
-                <a:cs typeface="Calibri"/>
-              </a:defRPr>
-            </a:pPr>
-            <a:r>
-              <a:rPr sz="1425" b="0">
-                <a:solidFill>
-                  <a:srgbClr val="60756A"/>
-                </a:solidFill>
-                <a:latin typeface="Calibri"/>
-                <a:ea typeface="Calibri"/>
-                <a:cs typeface="Calibri"/>
-              </a:rPr>
-              <a:t>No cloud render queue between the drawing and the walkthrough.</a:t>
-            </a:r>
-          </a:p>
-        </p:txBody>
-      </p:sp>
-      <p:sp>
-        <p:nvSpPr>
-          <p:cNvPr id="6" name="">
-            <a:extLst xmlns:a="http://schemas.openxmlformats.org/drawingml/2006/main">
-              <a:ext uri="{FF2B5EF4-FFF2-40B4-BE49-F238E27FC236}">
-                <a16:creationId xmlns:a16="http://schemas.microsoft.com/office/drawing/2014/main" id="{BB10B63E-94D5-4EDB-84C7-878229EA73D2}"/>
-              </a:ext>
-            </a:extLst>
-          </p:cNvPr>
-          <p:cNvSpPr>
-            <a:spLocks xmlns:a="http://schemas.openxmlformats.org/drawingml/2006/main" noGrp="1"/>
-          </p:cNvSpPr>
-          <p:nvPr/>
-        </p:nvSpPr>
-        <p:spPr>
-          <a:xfrm xmlns:a="http://schemas.openxmlformats.org/drawingml/2006/main">
-            <a:off x="6667500" y="952500"/>
-            <a:ext cx="4714875" cy="933450"/>
-          </a:xfrm>
-          <a:prstGeom xmlns:a="http://schemas.openxmlformats.org/drawingml/2006/main" prst="rect">
-            <a:avLst/>
-          </a:prstGeom>
-          <a:solidFill xmlns:a="http://schemas.openxmlformats.org/drawingml/2006/main">
-            <a:srgbClr val="E9F0E9"/>
-          </a:solidFill>
-          <a:ln xmlns:a="http://schemas.openxmlformats.org/drawingml/2006/main" w="0">
-            <a:noFill/>
-            <a:prstDash val="solid"/>
-          </a:ln>
-        </p:spPr>
-      </p:sp>
-      <p:sp>
-        <p:nvSpPr>
-          <p:cNvPr id="7" name="">
-            <a:extLst xmlns:a="http://schemas.openxmlformats.org/drawingml/2006/main">
-              <a:ext uri="{FF2B5EF4-FFF2-40B4-BE49-F238E27FC236}">
-                <a16:creationId xmlns:a16="http://schemas.microsoft.com/office/drawing/2014/main" id="{D2108990-927B-4F5B-8DEE-BA9B548A3731}"/>
-              </a:ext>
-            </a:extLst>
-          </p:cNvPr>
-          <p:cNvSpPr>
-            <a:spLocks xmlns:a="http://schemas.openxmlformats.org/drawingml/2006/main" noGrp="1"/>
-          </p:cNvSpPr>
-          <p:nvPr/>
-        </p:nvSpPr>
-        <p:spPr>
-          <a:xfrm xmlns:a="http://schemas.openxmlformats.org/drawingml/2006/main">
-            <a:off x="6915150" y="1133475"/>
-            <a:ext cx="4762500" cy="171450"/>
-          </a:xfrm>
-          <a:prstGeom xmlns:a="http://schemas.openxmlformats.org/drawingml/2006/main" prst="rect">
-            <a:avLst/>
-          </a:prstGeom>
-          <a:noFill xmlns:a="http://schemas.openxmlformats.org/drawingml/2006/main"/>
-          <a:ln xmlns:a="http://schemas.openxmlformats.org/drawingml/2006/main" w="0">
-            <a:noFill/>
-            <a:prstDash val="solid"/>
-          </a:ln>
-        </p:spPr>
-        <p:txBody>
-          <a:bodyPr xmlns:a="http://schemas.openxmlformats.org/drawingml/2006/main" wrap="square" lIns="0" tIns="0" rIns="0" bIns="0" anchor="t">
-            <a:normAutofit fontScale="100000"/>
-          </a:bodyPr>
-          <a:lstStyle xmlns:a="http://schemas.openxmlformats.org/drawingml/2006/main">
-            <a:defPPr algn="l">
-              <a:defRPr sz="900" b="1">
-                <a:solidFill>
-                  <a:srgbClr val="2C6B50"/>
-                </a:solidFill>
-                <a:latin typeface="Calibri"/>
-                <a:ea typeface="Calibri"/>
-                <a:cs typeface="Calibri"/>
-              </a:defRPr>
-            </a:defPPr>
-          </a:lstStyle>
-          <a:p xmlns:a="http://schemas.openxmlformats.org/drawingml/2006/main">
-            <a:pPr algn="l">
-              <a:lnSpc>
-                <a:spcPct val="100000"/>
-              </a:lnSpc>
-              <a:buNone/>
-              <a:defRPr sz="900" b="1">
-                <a:solidFill>
-                  <a:srgbClr val="2C6B50"/>
-                </a:solidFill>
-                <a:latin typeface="Calibri"/>
-                <a:ea typeface="Calibri"/>
-                <a:cs typeface="Calibri"/>
-              </a:defRPr>
-            </a:pPr>
-            <a:r>
-              <a:rPr sz="900" b="1">
-                <a:solidFill>
-                  <a:srgbClr val="2C6B50"/>
-                </a:solidFill>
-                <a:latin typeface="Calibri"/>
-                <a:ea typeface="Calibri"/>
-                <a:cs typeface="Calibri"/>
-              </a:rPr>
-              <a:t>INTERFACE</a:t>
-            </a:r>
-          </a:p>
-        </p:txBody>
-      </p:sp>
-      <p:sp>
-        <p:nvSpPr>
-          <p:cNvPr id="8" name="">
-            <a:extLst xmlns:a="http://schemas.openxmlformats.org/drawingml/2006/main">
-              <a:ext uri="{FF2B5EF4-FFF2-40B4-BE49-F238E27FC236}">
-                <a16:creationId xmlns:a16="http://schemas.microsoft.com/office/drawing/2014/main" id="{06AAFD87-777D-4B40-9734-8675DAFC1302}"/>
-              </a:ext>
-            </a:extLst>
-          </p:cNvPr>
-          <p:cNvSpPr>
-            <a:spLocks xmlns:a="http://schemas.openxmlformats.org/drawingml/2006/main" noGrp="1"/>
-          </p:cNvSpPr>
-          <p:nvPr/>
-        </p:nvSpPr>
-        <p:spPr>
-          <a:xfrm xmlns:a="http://schemas.openxmlformats.org/drawingml/2006/main">
-            <a:off x="6915150" y="1419225"/>
-            <a:ext cx="4219575" cy="285750"/>
-          </a:xfrm>
-          <a:prstGeom xmlns:a="http://schemas.openxmlformats.org/drawingml/2006/main" prst="rect">
-            <a:avLst/>
-          </a:prstGeom>
-          <a:noFill xmlns:a="http://schemas.openxmlformats.org/drawingml/2006/main"/>
-          <a:ln xmlns:a="http://schemas.openxmlformats.org/drawingml/2006/main" w="0">
-            <a:noFill/>
-            <a:prstDash val="solid"/>
-          </a:ln>
-        </p:spPr>
-        <p:txBody>
-          <a:bodyPr xmlns:a="http://schemas.openxmlformats.org/drawingml/2006/main" wrap="square" lIns="0" tIns="0" rIns="0" bIns="0" anchor="t">
-            <a:normAutofit fontScale="100000"/>
-          </a:bodyPr>
-          <a:lstStyle xmlns:a="http://schemas.openxmlformats.org/drawingml/2006/main">
-            <a:defPPr algn="l">
-              <a:defRPr sz="1650" b="1">
-                <a:solidFill>
-                  <a:srgbClr val="153B2E"/>
-                </a:solidFill>
-                <a:latin typeface="Calibri"/>
-                <a:ea typeface="Calibri"/>
-                <a:cs typeface="Calibri"/>
-              </a:defRPr>
-            </a:defPPr>
-          </a:lstStyle>
-          <a:p xmlns:a="http://schemas.openxmlformats.org/drawingml/2006/main">
-            <a:pPr algn="l">
-              <a:lnSpc>
-                <a:spcPct val="100000"/>
-              </a:lnSpc>
-              <a:buNone/>
-              <a:defRPr sz="1650" b="1">
-                <a:solidFill>
-                  <a:srgbClr val="153B2E"/>
-                </a:solidFill>
-                <a:latin typeface="Calibri"/>
-                <a:ea typeface="Calibri"/>
-                <a:cs typeface="Calibri"/>
-              </a:defRPr>
-            </a:pPr>
-            <a:r>
-              <a:rPr sz="1650" b="1">
-                <a:solidFill>
-                  <a:srgbClr val="153B2E"/>
-                </a:solidFill>
-                <a:latin typeface="Calibri"/>
-                <a:ea typeface="Calibri"/>
-                <a:cs typeface="Calibri"/>
-              </a:rPr>
-              <a:t>React 18 + TypeScript</a:t>
-            </a:r>
-          </a:p>
-        </p:txBody>
-      </p:sp>
-      <p:sp>
-        <p:nvSpPr>
-          <p:cNvPr id="9" name="">
-            <a:extLst xmlns:a="http://schemas.openxmlformats.org/drawingml/2006/main">
-              <a:ext uri="{FF2B5EF4-FFF2-40B4-BE49-F238E27FC236}">
-                <a16:creationId xmlns:a16="http://schemas.microsoft.com/office/drawing/2014/main" id="{BF3BCA94-5E7B-4788-8EF5-97C7CB8A2C51}"/>
-              </a:ext>
-            </a:extLst>
-          </p:cNvPr>
-          <p:cNvSpPr>
-            <a:spLocks xmlns:a="http://schemas.openxmlformats.org/drawingml/2006/main" noGrp="1"/>
-          </p:cNvSpPr>
-          <p:nvPr/>
-        </p:nvSpPr>
-        <p:spPr>
-          <a:xfrm xmlns:a="http://schemas.openxmlformats.org/drawingml/2006/main">
-            <a:off x="6915150" y="1685925"/>
-            <a:ext cx="4219575" cy="190500"/>
-          </a:xfrm>
-          <a:prstGeom xmlns:a="http://schemas.openxmlformats.org/drawingml/2006/main" prst="rect">
-            <a:avLst/>
-          </a:prstGeom>
-          <a:noFill xmlns:a="http://schemas.openxmlformats.org/drawingml/2006/main"/>
-          <a:ln xmlns:a="http://schemas.openxmlformats.org/drawingml/2006/main" w="0">
-            <a:noFill/>
-            <a:prstDash val="solid"/>
-          </a:ln>
-        </p:spPr>
-        <p:txBody>
-          <a:bodyPr xmlns:a="http://schemas.openxmlformats.org/drawingml/2006/main" wrap="square" lIns="0" tIns="0" rIns="0" bIns="0" anchor="t">
-            <a:normAutofit fontScale="100000"/>
-          </a:bodyPr>
-          <a:lstStyle xmlns:a="http://schemas.openxmlformats.org/drawingml/2006/main">
-            <a:defPPr algn="l">
-              <a:defRPr sz="1050" b="0">
-                <a:solidFill>
-                  <a:srgbClr val="60756A"/>
-                </a:solidFill>
-                <a:latin typeface="Calibri"/>
-                <a:ea typeface="Calibri"/>
-                <a:cs typeface="Calibri"/>
-              </a:defRPr>
-            </a:defPPr>
-          </a:lstStyle>
-          <a:p xmlns:a="http://schemas.openxmlformats.org/drawingml/2006/main">
-            <a:pPr algn="l">
-              <a:lnSpc>
-                <a:spcPct val="100000"/>
-              </a:lnSpc>
-              <a:buNone/>
-              <a:defRPr sz="1050" b="0">
-                <a:solidFill>
-                  <a:srgbClr val="60756A"/>
-                </a:solidFill>
-                <a:latin typeface="Calibri"/>
-                <a:ea typeface="Calibri"/>
-                <a:cs typeface="Calibri"/>
-              </a:defRPr>
-            </a:pPr>
-            <a:r>
-              <a:rPr sz="1050" b="0">
-                <a:solidFill>
-                  <a:srgbClr val="60756A"/>
-                </a:solidFill>
-                <a:latin typeface="Calibri"/>
-                <a:ea typeface="Calibri"/>
-                <a:cs typeface="Calibri"/>
-              </a:rPr>
-              <a:t>Upload · inspect · control</a:t>
-            </a:r>
-          </a:p>
-        </p:txBody>
-      </p:sp>
-      <p:sp>
-        <p:nvSpPr>
-          <p:cNvPr id="10" name="">
-            <a:extLst xmlns:a="http://schemas.openxmlformats.org/drawingml/2006/main">
-              <a:ext uri="{FF2B5EF4-FFF2-40B4-BE49-F238E27FC236}">
-                <a16:creationId xmlns:a16="http://schemas.microsoft.com/office/drawing/2014/main" id="{FF1A7D79-79C7-4B3A-8445-7F24CBEA78C5}"/>
-              </a:ext>
-            </a:extLst>
-          </p:cNvPr>
-          <p:cNvSpPr>
-            <a:spLocks xmlns:a="http://schemas.openxmlformats.org/drawingml/2006/main" noGrp="1"/>
-          </p:cNvSpPr>
-          <p:nvPr/>
-        </p:nvSpPr>
-        <p:spPr>
-          <a:xfrm xmlns:a="http://schemas.openxmlformats.org/drawingml/2006/main">
-            <a:off x="6667500" y="2047875"/>
-            <a:ext cx="4714875" cy="933450"/>
-          </a:xfrm>
-          <a:prstGeom xmlns:a="http://schemas.openxmlformats.org/drawingml/2006/main" prst="rect">
-            <a:avLst/>
-          </a:prstGeom>
-          <a:solidFill xmlns:a="http://schemas.openxmlformats.org/drawingml/2006/main">
-            <a:srgbClr val="D9E8DC"/>
-          </a:solidFill>
-          <a:ln xmlns:a="http://schemas.openxmlformats.org/drawingml/2006/main" w="0">
-            <a:noFill/>
-            <a:prstDash val="solid"/>
-          </a:ln>
-        </p:spPr>
-      </p:sp>
-      <p:sp>
-        <p:nvSpPr>
-          <p:cNvPr id="11" name="">
-            <a:extLst xmlns:a="http://schemas.openxmlformats.org/drawingml/2006/main">
-              <a:ext uri="{FF2B5EF4-FFF2-40B4-BE49-F238E27FC236}">
-                <a16:creationId xmlns:a16="http://schemas.microsoft.com/office/drawing/2014/main" id="{7E0BA6AC-8C5D-49C5-BAD6-A30E5D03451F}"/>
-              </a:ext>
-            </a:extLst>
-          </p:cNvPr>
-          <p:cNvSpPr>
-            <a:spLocks xmlns:a="http://schemas.openxmlformats.org/drawingml/2006/main" noGrp="1"/>
-          </p:cNvSpPr>
-          <p:nvPr/>
-        </p:nvSpPr>
-        <p:spPr>
-          <a:xfrm xmlns:a="http://schemas.openxmlformats.org/drawingml/2006/main">
-            <a:off x="6915150" y="2228850"/>
-            <a:ext cx="4762500" cy="171450"/>
-          </a:xfrm>
-          <a:prstGeom xmlns:a="http://schemas.openxmlformats.org/drawingml/2006/main" prst="rect">
-            <a:avLst/>
-          </a:prstGeom>
-          <a:noFill xmlns:a="http://schemas.openxmlformats.org/drawingml/2006/main"/>
-          <a:ln xmlns:a="http://schemas.openxmlformats.org/drawingml/2006/main" w="0">
-            <a:noFill/>
-            <a:prstDash val="solid"/>
-          </a:ln>
-        </p:spPr>
-        <p:txBody>
-          <a:bodyPr xmlns:a="http://schemas.openxmlformats.org/drawingml/2006/main" wrap="square" lIns="0" tIns="0" rIns="0" bIns="0" anchor="t">
-            <a:normAutofit fontScale="100000"/>
-          </a:bodyPr>
-          <a:lstStyle xmlns:a="http://schemas.openxmlformats.org/drawingml/2006/main">
-            <a:defPPr algn="l">
-              <a:defRPr sz="900" b="1">
-                <a:solidFill>
-                  <a:srgbClr val="2C6B50"/>
-                </a:solidFill>
-                <a:latin typeface="Calibri"/>
-                <a:ea typeface="Calibri"/>
-                <a:cs typeface="Calibri"/>
-              </a:defRPr>
-            </a:defPPr>
-          </a:lstStyle>
-          <a:p xmlns:a="http://schemas.openxmlformats.org/drawingml/2006/main">
-            <a:pPr algn="l">
-              <a:lnSpc>
-                <a:spcPct val="100000"/>
-              </a:lnSpc>
-              <a:buNone/>
-              <a:defRPr sz="900" b="1">
-                <a:solidFill>
-                  <a:srgbClr val="2C6B50"/>
-                </a:solidFill>
-                <a:latin typeface="Calibri"/>
-                <a:ea typeface="Calibri"/>
-                <a:cs typeface="Calibri"/>
-              </a:defRPr>
-            </a:pPr>
-            <a:r>
-              <a:rPr sz="900" b="1">
-                <a:solidFill>
-                  <a:srgbClr val="2C6B50"/>
-                </a:solidFill>
-                <a:latin typeface="Calibri"/>
-                <a:ea typeface="Calibri"/>
-                <a:cs typeface="Calibri"/>
-              </a:rPr>
-              <a:t>PLAN UNDERSTANDING</a:t>
-            </a:r>
-          </a:p>
-        </p:txBody>
-      </p:sp>
-      <p:sp>
-        <p:nvSpPr>
-          <p:cNvPr id="12" name="">
-            <a:extLst xmlns:a="http://schemas.openxmlformats.org/drawingml/2006/main">
-              <a:ext uri="{FF2B5EF4-FFF2-40B4-BE49-F238E27FC236}">
-                <a16:creationId xmlns:a16="http://schemas.microsoft.com/office/drawing/2014/main" id="{AEF3E41F-025D-4381-AE88-2F5C5D0D635B}"/>
-              </a:ext>
-            </a:extLst>
-          </p:cNvPr>
-          <p:cNvSpPr>
-            <a:spLocks xmlns:a="http://schemas.openxmlformats.org/drawingml/2006/main" noGrp="1"/>
-          </p:cNvSpPr>
-          <p:nvPr/>
-        </p:nvSpPr>
-        <p:spPr>
-          <a:xfrm xmlns:a="http://schemas.openxmlformats.org/drawingml/2006/main">
-            <a:off x="6915150" y="2514600"/>
-            <a:ext cx="4219575" cy="285750"/>
-          </a:xfrm>
-          <a:prstGeom xmlns:a="http://schemas.openxmlformats.org/drawingml/2006/main" prst="rect">
-            <a:avLst/>
-          </a:prstGeom>
-          <a:noFill xmlns:a="http://schemas.openxmlformats.org/drawingml/2006/main"/>
-          <a:ln xmlns:a="http://schemas.openxmlformats.org/drawingml/2006/main" w="0">
-            <a:noFill/>
-            <a:prstDash val="solid"/>
-          </a:ln>
-        </p:spPr>
-        <p:txBody>
-          <a:bodyPr xmlns:a="http://schemas.openxmlformats.org/drawingml/2006/main" wrap="square" lIns="0" tIns="0" rIns="0" bIns="0" anchor="t">
-            <a:normAutofit fontScale="100000"/>
-          </a:bodyPr>
-          <a:lstStyle xmlns:a="http://schemas.openxmlformats.org/drawingml/2006/main">
-            <a:defPPr algn="l">
-              <a:defRPr sz="1575" b="1">
-                <a:solidFill>
-                  <a:srgbClr val="153B2E"/>
-                </a:solidFill>
-                <a:latin typeface="Calibri"/>
-                <a:ea typeface="Calibri"/>
-                <a:cs typeface="Calibri"/>
-              </a:defRPr>
-            </a:defPPr>
-          </a:lstStyle>
-          <a:p xmlns:a="http://schemas.openxmlformats.org/drawingml/2006/main">
-            <a:pPr algn="l">
-              <a:lnSpc>
-                <a:spcPct val="100000"/>
-              </a:lnSpc>
-              <a:buNone/>
-              <a:defRPr sz="1575" b="1">
-                <a:solidFill>
-                  <a:srgbClr val="153B2E"/>
-                </a:solidFill>
-                <a:latin typeface="Calibri"/>
-                <a:ea typeface="Calibri"/>
-                <a:cs typeface="Calibri"/>
-              </a:defRPr>
-            </a:pPr>
-            <a:r>
-              <a:rPr sz="1575" b="1">
-                <a:solidFill>
-                  <a:srgbClr val="153B2E"/>
-                </a:solidFill>
-                <a:latin typeface="Calibri"/>
-                <a:ea typeface="Calibri"/>
-                <a:cs typeface="Calibri"/>
-              </a:rPr>
-              <a:t>PDF.js + optional Gemini Vision</a:t>
-            </a:r>
-          </a:p>
-        </p:txBody>
-      </p:sp>
-      <p:sp>
-        <p:nvSpPr>
-          <p:cNvPr id="13" name="">
-            <a:extLst xmlns:a="http://schemas.openxmlformats.org/drawingml/2006/main">
-              <a:ext uri="{FF2B5EF4-FFF2-40B4-BE49-F238E27FC236}">
-                <a16:creationId xmlns:a16="http://schemas.microsoft.com/office/drawing/2014/main" id="{3ED0E660-6CC2-4BE7-8EB0-B14DC1E0074E}"/>
-              </a:ext>
-            </a:extLst>
-          </p:cNvPr>
-          <p:cNvSpPr>
-            <a:spLocks xmlns:a="http://schemas.openxmlformats.org/drawingml/2006/main" noGrp="1"/>
-          </p:cNvSpPr>
-          <p:nvPr/>
-        </p:nvSpPr>
-        <p:spPr>
-          <a:xfrm xmlns:a="http://schemas.openxmlformats.org/drawingml/2006/main">
-            <a:off x="6915150" y="2771775"/>
-            <a:ext cx="4219575" cy="190500"/>
-          </a:xfrm>
-          <a:prstGeom xmlns:a="http://schemas.openxmlformats.org/drawingml/2006/main" prst="rect">
-            <a:avLst/>
-          </a:prstGeom>
-          <a:noFill xmlns:a="http://schemas.openxmlformats.org/drawingml/2006/main"/>
-          <a:ln xmlns:a="http://schemas.openxmlformats.org/drawingml/2006/main" w="0">
-            <a:noFill/>
-            <a:prstDash val="solid"/>
-          </a:ln>
-        </p:spPr>
-        <p:txBody>
-          <a:bodyPr xmlns:a="http://schemas.openxmlformats.org/drawingml/2006/main" wrap="square" lIns="0" tIns="0" rIns="0" bIns="0" anchor="t">
-            <a:normAutofit fontScale="100000"/>
-          </a:bodyPr>
-          <a:lstStyle xmlns:a="http://schemas.openxmlformats.org/drawingml/2006/main">
-            <a:defPPr algn="l">
-              <a:defRPr sz="1050" b="0">
-                <a:solidFill>
-                  <a:srgbClr val="60756A"/>
-                </a:solidFill>
-                <a:latin typeface="Calibri"/>
-                <a:ea typeface="Calibri"/>
-                <a:cs typeface="Calibri"/>
-              </a:defRPr>
-            </a:defPPr>
-          </a:lstStyle>
-          <a:p xmlns:a="http://schemas.openxmlformats.org/drawingml/2006/main">
-            <a:pPr algn="l">
-              <a:lnSpc>
-                <a:spcPct val="100000"/>
-              </a:lnSpc>
-              <a:buNone/>
-              <a:defRPr sz="1050" b="0">
-                <a:solidFill>
-                  <a:srgbClr val="60756A"/>
-                </a:solidFill>
-                <a:latin typeface="Calibri"/>
-                <a:ea typeface="Calibri"/>
-                <a:cs typeface="Calibri"/>
-              </a:defRPr>
-            </a:pPr>
-            <a:r>
-              <a:rPr sz="1050" b="0">
-                <a:solidFill>
-                  <a:srgbClr val="60756A"/>
-                </a:solidFill>
-                <a:latin typeface="Calibri"/>
-                <a:ea typeface="Calibri"/>
-                <a:cs typeface="Calibri"/>
-              </a:rPr>
-              <a:t>Read drawings · extract spatial cues</a:t>
-            </a:r>
-          </a:p>
-        </p:txBody>
-      </p:sp>
-      <p:sp>
-        <p:nvSpPr>
-          <p:cNvPr id="14" name="">
-            <a:extLst xmlns:a="http://schemas.openxmlformats.org/drawingml/2006/main">
-              <a:ext uri="{FF2B5EF4-FFF2-40B4-BE49-F238E27FC236}">
-                <a16:creationId xmlns:a16="http://schemas.microsoft.com/office/drawing/2014/main" id="{023D95C5-3611-4736-804B-F2C69B2ABB31}"/>
-              </a:ext>
-            </a:extLst>
-          </p:cNvPr>
-          <p:cNvSpPr>
-            <a:spLocks xmlns:a="http://schemas.openxmlformats.org/drawingml/2006/main" noGrp="1"/>
-          </p:cNvSpPr>
-          <p:nvPr/>
-        </p:nvSpPr>
-        <p:spPr>
-          <a:xfrm xmlns:a="http://schemas.openxmlformats.org/drawingml/2006/main">
-            <a:off x="6667500" y="3143250"/>
-            <a:ext cx="4714875" cy="933450"/>
-          </a:xfrm>
-          <a:prstGeom xmlns:a="http://schemas.openxmlformats.org/drawingml/2006/main" prst="rect">
-            <a:avLst/>
-          </a:prstGeom>
-          <a:solidFill xmlns:a="http://schemas.openxmlformats.org/drawingml/2006/main">
-            <a:srgbClr val="E5EADF"/>
-          </a:solidFill>
-          <a:ln xmlns:a="http://schemas.openxmlformats.org/drawingml/2006/main" w="0">
-            <a:noFill/>
-            <a:prstDash val="solid"/>
-          </a:ln>
-        </p:spPr>
-      </p:sp>
-      <p:sp>
-        <p:nvSpPr>
-          <p:cNvPr id="15" name="">
-            <a:extLst xmlns:a="http://schemas.openxmlformats.org/drawingml/2006/main">
-              <a:ext uri="{FF2B5EF4-FFF2-40B4-BE49-F238E27FC236}">
-                <a16:creationId xmlns:a16="http://schemas.microsoft.com/office/drawing/2014/main" id="{ED7398CE-C2BD-479B-81CB-478680128055}"/>
-              </a:ext>
-            </a:extLst>
-          </p:cNvPr>
-          <p:cNvSpPr>
-            <a:spLocks xmlns:a="http://schemas.openxmlformats.org/drawingml/2006/main" noGrp="1"/>
-          </p:cNvSpPr>
-          <p:nvPr/>
-        </p:nvSpPr>
-        <p:spPr>
-          <a:xfrm xmlns:a="http://schemas.openxmlformats.org/drawingml/2006/main">
-            <a:off x="6915150" y="3324225"/>
-            <a:ext cx="4762500" cy="171450"/>
-          </a:xfrm>
-          <a:prstGeom xmlns:a="http://schemas.openxmlformats.org/drawingml/2006/main" prst="rect">
-            <a:avLst/>
-          </a:prstGeom>
-          <a:noFill xmlns:a="http://schemas.openxmlformats.org/drawingml/2006/main"/>
-          <a:ln xmlns:a="http://schemas.openxmlformats.org/drawingml/2006/main" w="0">
-            <a:noFill/>
-            <a:prstDash val="solid"/>
-          </a:ln>
-        </p:spPr>
-        <p:txBody>
-          <a:bodyPr xmlns:a="http://schemas.openxmlformats.org/drawingml/2006/main" wrap="square" lIns="0" tIns="0" rIns="0" bIns="0" anchor="t">
-            <a:normAutofit fontScale="100000"/>
-          </a:bodyPr>
-          <a:lstStyle xmlns:a="http://schemas.openxmlformats.org/drawingml/2006/main">
-            <a:defPPr algn="l">
-              <a:defRPr sz="900" b="1">
-                <a:solidFill>
-                  <a:srgbClr val="2C6B50"/>
-                </a:solidFill>
-                <a:latin typeface="Calibri"/>
-                <a:ea typeface="Calibri"/>
-                <a:cs typeface="Calibri"/>
-              </a:defRPr>
-            </a:defPPr>
-          </a:lstStyle>
-          <a:p xmlns:a="http://schemas.openxmlformats.org/drawingml/2006/main">
-            <a:pPr algn="l">
-              <a:lnSpc>
-                <a:spcPct val="100000"/>
-              </a:lnSpc>
-              <a:buNone/>
-              <a:defRPr sz="900" b="1">
-                <a:solidFill>
-                  <a:srgbClr val="2C6B50"/>
-                </a:solidFill>
-                <a:latin typeface="Calibri"/>
-                <a:ea typeface="Calibri"/>
-                <a:cs typeface="Calibri"/>
-              </a:defRPr>
-            </a:pPr>
-            <a:r>
-              <a:rPr sz="900" b="1">
-                <a:solidFill>
-                  <a:srgbClr val="2C6B50"/>
-                </a:solidFill>
-                <a:latin typeface="Calibri"/>
-                <a:ea typeface="Calibri"/>
-                <a:cs typeface="Calibri"/>
-              </a:rPr>
-              <a:t>SPATIAL MODEL</a:t>
-            </a:r>
-          </a:p>
-        </p:txBody>
-      </p:sp>
-      <p:sp>
-        <p:nvSpPr>
-          <p:cNvPr id="16" name="">
-            <a:extLst xmlns:a="http://schemas.openxmlformats.org/drawingml/2006/main">
-              <a:ext uri="{FF2B5EF4-FFF2-40B4-BE49-F238E27FC236}">
-                <a16:creationId xmlns:a16="http://schemas.microsoft.com/office/drawing/2014/main" id="{74377F25-9E2F-48E5-A6E3-9AA3B7200058}"/>
-              </a:ext>
-            </a:extLst>
-          </p:cNvPr>
-          <p:cNvSpPr>
-            <a:spLocks xmlns:a="http://schemas.openxmlformats.org/drawingml/2006/main" noGrp="1"/>
-          </p:cNvSpPr>
-          <p:nvPr/>
-        </p:nvSpPr>
-        <p:spPr>
-          <a:xfrm xmlns:a="http://schemas.openxmlformats.org/drawingml/2006/main">
-            <a:off x="6915150" y="3609975"/>
-            <a:ext cx="4219575" cy="285750"/>
-          </a:xfrm>
-          <a:prstGeom xmlns:a="http://schemas.openxmlformats.org/drawingml/2006/main" prst="rect">
-            <a:avLst/>
-          </a:prstGeom>
-          <a:noFill xmlns:a="http://schemas.openxmlformats.org/drawingml/2006/main"/>
-          <a:ln xmlns:a="http://schemas.openxmlformats.org/drawingml/2006/main" w="0">
-            <a:noFill/>
-            <a:prstDash val="solid"/>
-          </a:ln>
-        </p:spPr>
-        <p:txBody>
-          <a:bodyPr xmlns:a="http://schemas.openxmlformats.org/drawingml/2006/main" wrap="square" lIns="0" tIns="0" rIns="0" bIns="0" anchor="t">
-            <a:normAutofit fontScale="100000"/>
-          </a:bodyPr>
-          <a:lstStyle xmlns:a="http://schemas.openxmlformats.org/drawingml/2006/main">
-            <a:defPPr algn="l">
-              <a:defRPr sz="1575" b="1">
-                <a:solidFill>
-                  <a:srgbClr val="153B2E"/>
-                </a:solidFill>
-                <a:latin typeface="Calibri"/>
-                <a:ea typeface="Calibri"/>
-                <a:cs typeface="Calibri"/>
-              </a:defRPr>
-            </a:defPPr>
-          </a:lstStyle>
-          <a:p xmlns:a="http://schemas.openxmlformats.org/drawingml/2006/main">
-            <a:pPr algn="l">
-              <a:lnSpc>
-                <a:spcPct val="100000"/>
-              </a:lnSpc>
-              <a:buNone/>
-              <a:defRPr sz="1575" b="1">
-                <a:solidFill>
-                  <a:srgbClr val="153B2E"/>
-                </a:solidFill>
-                <a:latin typeface="Calibri"/>
-                <a:ea typeface="Calibri"/>
-                <a:cs typeface="Calibri"/>
-              </a:defRPr>
-            </a:pPr>
-            <a:r>
-              <a:rPr sz="1575" b="1">
-                <a:solidFill>
-                  <a:srgbClr val="153B2E"/>
-                </a:solidFill>
-                <a:latin typeface="Calibri"/>
-                <a:ea typeface="Calibri"/>
-                <a:cs typeface="Calibri"/>
-              </a:rPr>
-              <a:t>TypeScript plan schema</a:t>
-            </a:r>
-          </a:p>
-        </p:txBody>
-      </p:sp>
-      <p:sp>
-        <p:nvSpPr>
-          <p:cNvPr id="17" name="">
-            <a:extLst xmlns:a="http://schemas.openxmlformats.org/drawingml/2006/main">
-              <a:ext uri="{FF2B5EF4-FFF2-40B4-BE49-F238E27FC236}">
-                <a16:creationId xmlns:a16="http://schemas.microsoft.com/office/drawing/2014/main" id="{2A95DCD9-8A33-4F6E-AAF2-9F371CE4F92B}"/>
-              </a:ext>
-            </a:extLst>
-          </p:cNvPr>
-          <p:cNvSpPr>
-            <a:spLocks xmlns:a="http://schemas.openxmlformats.org/drawingml/2006/main" noGrp="1"/>
-          </p:cNvSpPr>
-          <p:nvPr/>
-        </p:nvSpPr>
-        <p:spPr>
-          <a:xfrm xmlns:a="http://schemas.openxmlformats.org/drawingml/2006/main">
-            <a:off x="6915150" y="3867150"/>
-            <a:ext cx="4219575" cy="190500"/>
-          </a:xfrm>
-          <a:prstGeom xmlns:a="http://schemas.openxmlformats.org/drawingml/2006/main" prst="rect">
-            <a:avLst/>
-          </a:prstGeom>
-          <a:noFill xmlns:a="http://schemas.openxmlformats.org/drawingml/2006/main"/>
-          <a:ln xmlns:a="http://schemas.openxmlformats.org/drawingml/2006/main" w="0">
-            <a:noFill/>
-            <a:prstDash val="solid"/>
-          </a:ln>
-        </p:spPr>
-        <p:txBody>
-          <a:bodyPr xmlns:a="http://schemas.openxmlformats.org/drawingml/2006/main" wrap="square" lIns="0" tIns="0" rIns="0" bIns="0" anchor="t">
-            <a:normAutofit fontScale="100000"/>
-          </a:bodyPr>
-          <a:lstStyle xmlns:a="http://schemas.openxmlformats.org/drawingml/2006/main">
-            <a:defPPr algn="l">
-              <a:defRPr sz="1050" b="0">
-                <a:solidFill>
-                  <a:srgbClr val="60756A"/>
-                </a:solidFill>
-                <a:latin typeface="Calibri"/>
-                <a:ea typeface="Calibri"/>
-                <a:cs typeface="Calibri"/>
-              </a:defRPr>
-            </a:defPPr>
-          </a:lstStyle>
-          <a:p xmlns:a="http://schemas.openxmlformats.org/drawingml/2006/main">
-            <a:pPr algn="l">
-              <a:lnSpc>
-                <a:spcPct val="100000"/>
-              </a:lnSpc>
-              <a:buNone/>
-              <a:defRPr sz="1050" b="0">
-                <a:solidFill>
-                  <a:srgbClr val="60756A"/>
-                </a:solidFill>
-                <a:latin typeface="Calibri"/>
-                <a:ea typeface="Calibri"/>
-                <a:cs typeface="Calibri"/>
-              </a:defRPr>
-            </a:pPr>
-            <a:r>
-              <a:rPr sz="1050" b="0">
-                <a:solidFill>
-                  <a:srgbClr val="60756A"/>
-                </a:solidFill>
-                <a:latin typeface="Calibri"/>
-                <a:ea typeface="Calibri"/>
-                <a:cs typeface="Calibri"/>
-              </a:rPr>
-              <a:t>Room boundaries · levels · openings</a:t>
-            </a:r>
-          </a:p>
-        </p:txBody>
-      </p:sp>
-      <p:sp>
-        <p:nvSpPr>
-          <p:cNvPr id="18" name="">
-            <a:extLst xmlns:a="http://schemas.openxmlformats.org/drawingml/2006/main">
-              <a:ext uri="{FF2B5EF4-FFF2-40B4-BE49-F238E27FC236}">
-                <a16:creationId xmlns:a16="http://schemas.microsoft.com/office/drawing/2014/main" id="{C7FA511D-48C9-473B-A060-352D948361B2}"/>
-              </a:ext>
-            </a:extLst>
-          </p:cNvPr>
-          <p:cNvSpPr>
-            <a:spLocks xmlns:a="http://schemas.openxmlformats.org/drawingml/2006/main" noGrp="1"/>
-          </p:cNvSpPr>
-          <p:nvPr/>
-        </p:nvSpPr>
-        <p:spPr>
-          <a:xfrm xmlns:a="http://schemas.openxmlformats.org/drawingml/2006/main">
-            <a:off x="6667500" y="4238625"/>
-            <a:ext cx="4714875" cy="933450"/>
-          </a:xfrm>
-          <a:prstGeom xmlns:a="http://schemas.openxmlformats.org/drawingml/2006/main" prst="rect">
-            <a:avLst/>
-          </a:prstGeom>
-          <a:solidFill xmlns:a="http://schemas.openxmlformats.org/drawingml/2006/main">
-            <a:srgbClr val="153B2E"/>
-          </a:solidFill>
-          <a:ln xmlns:a="http://schemas.openxmlformats.org/drawingml/2006/main" w="0">
-            <a:noFill/>
-            <a:prstDash val="solid"/>
-          </a:ln>
-        </p:spPr>
-      </p:sp>
-      <p:sp>
-        <p:nvSpPr>
-          <p:cNvPr id="19" name="">
-            <a:extLst xmlns:a="http://schemas.openxmlformats.org/drawingml/2006/main">
-              <a:ext uri="{FF2B5EF4-FFF2-40B4-BE49-F238E27FC236}">
-                <a16:creationId xmlns:a16="http://schemas.microsoft.com/office/drawing/2014/main" id="{7B72F56F-6488-4FC6-820A-96E04DA93D81}"/>
-              </a:ext>
-            </a:extLst>
-          </p:cNvPr>
-          <p:cNvSpPr>
-            <a:spLocks xmlns:a="http://schemas.openxmlformats.org/drawingml/2006/main" noGrp="1"/>
-          </p:cNvSpPr>
-          <p:nvPr/>
-        </p:nvSpPr>
-        <p:spPr>
-          <a:xfrm xmlns:a="http://schemas.openxmlformats.org/drawingml/2006/main">
-            <a:off x="6915150" y="4419600"/>
-            <a:ext cx="4762500" cy="171450"/>
-          </a:xfrm>
-          <a:prstGeom xmlns:a="http://schemas.openxmlformats.org/drawingml/2006/main" prst="rect">
-            <a:avLst/>
-          </a:prstGeom>
-          <a:noFill xmlns:a="http://schemas.openxmlformats.org/drawingml/2006/main"/>
-          <a:ln xmlns:a="http://schemas.openxmlformats.org/drawingml/2006/main" w="0">
-            <a:noFill/>
-            <a:prstDash val="solid"/>
-          </a:ln>
-        </p:spPr>
-        <p:txBody>
-          <a:bodyPr xmlns:a="http://schemas.openxmlformats.org/drawingml/2006/main" wrap="square" lIns="0" tIns="0" rIns="0" bIns="0" anchor="t">
-            <a:normAutofit fontScale="100000"/>
-          </a:bodyPr>
-          <a:lstStyle xmlns:a="http://schemas.openxmlformats.org/drawingml/2006/main">
-            <a:defPPr algn="l">
-              <a:defRPr sz="900" b="1">
-                <a:solidFill>
-                  <a:srgbClr val="A8C9B0"/>
-                </a:solidFill>
-                <a:latin typeface="Calibri"/>
-                <a:ea typeface="Calibri"/>
-                <a:cs typeface="Calibri"/>
-              </a:defRPr>
-            </a:defPPr>
-          </a:lstStyle>
-          <a:p xmlns:a="http://schemas.openxmlformats.org/drawingml/2006/main">
-            <a:pPr algn="l">
-              <a:lnSpc>
-                <a:spcPct val="100000"/>
-              </a:lnSpc>
-              <a:buNone/>
-              <a:defRPr sz="900" b="1">
-                <a:solidFill>
-                  <a:srgbClr val="A8C9B0"/>
-                </a:solidFill>
-                <a:latin typeface="Calibri"/>
-                <a:ea typeface="Calibri"/>
-                <a:cs typeface="Calibri"/>
-              </a:defRPr>
-            </a:pPr>
-            <a:r>
-              <a:rPr sz="900" b="1">
-                <a:solidFill>
-                  <a:srgbClr val="A8C9B0"/>
-                </a:solidFill>
-                <a:latin typeface="Calibri"/>
-                <a:ea typeface="Calibri"/>
-                <a:cs typeface="Calibri"/>
-              </a:rPr>
-              <a:t>REAL-TIME EXPERIENCE</a:t>
-            </a:r>
-          </a:p>
-        </p:txBody>
-      </p:sp>
-      <p:sp>
-        <p:nvSpPr>
-          <p:cNvPr id="20" name="">
-            <a:extLst xmlns:a="http://schemas.openxmlformats.org/drawingml/2006/main">
-              <a:ext uri="{FF2B5EF4-FFF2-40B4-BE49-F238E27FC236}">
-                <a16:creationId xmlns:a16="http://schemas.microsoft.com/office/drawing/2014/main" id="{1B8C2572-153E-4F82-AB7A-E9183779559C}"/>
-              </a:ext>
-            </a:extLst>
-          </p:cNvPr>
-          <p:cNvSpPr>
-            <a:spLocks xmlns:a="http://schemas.openxmlformats.org/drawingml/2006/main" noGrp="1"/>
-          </p:cNvSpPr>
-          <p:nvPr/>
-        </p:nvSpPr>
-        <p:spPr>
-          <a:xfrm xmlns:a="http://schemas.openxmlformats.org/drawingml/2006/main">
-            <a:off x="6915150" y="4705350"/>
-            <a:ext cx="4219575" cy="285750"/>
-          </a:xfrm>
-          <a:prstGeom xmlns:a="http://schemas.openxmlformats.org/drawingml/2006/main" prst="rect">
-            <a:avLst/>
-          </a:prstGeom>
-          <a:noFill xmlns:a="http://schemas.openxmlformats.org/drawingml/2006/main"/>
-          <a:ln xmlns:a="http://schemas.openxmlformats.org/drawingml/2006/main" w="0">
-            <a:noFill/>
-            <a:prstDash val="solid"/>
-          </a:ln>
-        </p:spPr>
-        <p:txBody>
-          <a:bodyPr xmlns:a="http://schemas.openxmlformats.org/drawingml/2006/main" wrap="square" lIns="0" tIns="0" rIns="0" bIns="0" anchor="t">
-            <a:normAutofit fontScale="100000"/>
-          </a:bodyPr>
-          <a:lstStyle xmlns:a="http://schemas.openxmlformats.org/drawingml/2006/main">
-            <a:defPPr algn="l">
-              <a:defRPr sz="1650" b="1">
-                <a:solidFill>
-                  <a:srgbClr val="FFFFFF"/>
-                </a:solidFill>
-                <a:latin typeface="Calibri"/>
-                <a:ea typeface="Calibri"/>
-                <a:cs typeface="Calibri"/>
-              </a:defRPr>
-            </a:defPPr>
-          </a:lstStyle>
-          <a:p xmlns:a="http://schemas.openxmlformats.org/drawingml/2006/main">
-            <a:pPr algn="l">
-              <a:lnSpc>
-                <a:spcPct val="100000"/>
-              </a:lnSpc>
-              <a:buNone/>
-              <a:defRPr sz="1650" b="1">
-                <a:solidFill>
-                  <a:srgbClr val="FFFFFF"/>
-                </a:solidFill>
-                <a:latin typeface="Calibri"/>
-                <a:ea typeface="Calibri"/>
-                <a:cs typeface="Calibri"/>
-              </a:defRPr>
-            </a:pPr>
-            <a:r>
-              <a:rPr sz="1650" b="1">
-                <a:solidFill>
-                  <a:srgbClr val="FFFFFF"/>
-                </a:solidFill>
-                <a:latin typeface="Calibri"/>
-                <a:ea typeface="Calibri"/>
-                <a:cs typeface="Calibri"/>
-              </a:rPr>
-              <a:t>Three.js + WebGL</a:t>
-            </a:r>
-          </a:p>
-        </p:txBody>
-      </p:sp>
-      <p:sp>
-        <p:nvSpPr>
-          <p:cNvPr id="21" name="">
-            <a:extLst xmlns:a="http://schemas.openxmlformats.org/drawingml/2006/main">
-              <a:ext uri="{FF2B5EF4-FFF2-40B4-BE49-F238E27FC236}">
-                <a16:creationId xmlns:a16="http://schemas.microsoft.com/office/drawing/2014/main" id="{A2ABF2F3-0235-4554-91E9-86AE33FFAF6A}"/>
-              </a:ext>
-            </a:extLst>
-          </p:cNvPr>
-          <p:cNvSpPr>
-            <a:spLocks xmlns:a="http://schemas.openxmlformats.org/drawingml/2006/main" noGrp="1"/>
-          </p:cNvSpPr>
-          <p:nvPr/>
-        </p:nvSpPr>
-        <p:spPr>
-          <a:xfrm xmlns:a="http://schemas.openxmlformats.org/drawingml/2006/main">
-            <a:off x="6915150" y="4962525"/>
-            <a:ext cx="4219575" cy="190500"/>
-          </a:xfrm>
-          <a:prstGeom xmlns:a="http://schemas.openxmlformats.org/drawingml/2006/main" prst="rect">
-            <a:avLst/>
-          </a:prstGeom>
-          <a:noFill xmlns:a="http://schemas.openxmlformats.org/drawingml/2006/main"/>
-          <a:ln xmlns:a="http://schemas.openxmlformats.org/drawingml/2006/main" w="0">
-            <a:noFill/>
-            <a:prstDash val="solid"/>
-          </a:ln>
-        </p:spPr>
-        <p:txBody>
-          <a:bodyPr xmlns:a="http://schemas.openxmlformats.org/drawingml/2006/main" wrap="square" lIns="0" tIns="0" rIns="0" bIns="0" anchor="t">
-            <a:normAutofit fontScale="100000"/>
-          </a:bodyPr>
-          <a:lstStyle xmlns:a="http://schemas.openxmlformats.org/drawingml/2006/main">
-            <a:defPPr algn="l">
-              <a:defRPr sz="1050" b="0">
-                <a:solidFill>
-                  <a:srgbClr val="D5E5D8"/>
-                </a:solidFill>
-                <a:latin typeface="Calibri"/>
-                <a:ea typeface="Calibri"/>
-                <a:cs typeface="Calibri"/>
-              </a:defRPr>
-            </a:defPPr>
-          </a:lstStyle>
-          <a:p xmlns:a="http://schemas.openxmlformats.org/drawingml/2006/main">
-            <a:pPr algn="l">
-              <a:lnSpc>
-                <a:spcPct val="100000"/>
-              </a:lnSpc>
-              <a:buNone/>
-              <a:defRPr sz="1050" b="0">
-                <a:solidFill>
-                  <a:srgbClr val="D5E5D8"/>
-                </a:solidFill>
-                <a:latin typeface="Calibri"/>
-                <a:ea typeface="Calibri"/>
-                <a:cs typeface="Calibri"/>
-              </a:defRPr>
-            </a:pPr>
-            <a:r>
-              <a:rPr sz="1050" b="0">
-                <a:solidFill>
-                  <a:srgbClr val="D5E5D8"/>
-                </a:solidFill>
-                <a:latin typeface="Calibri"/>
-                <a:ea typeface="Calibri"/>
-                <a:cs typeface="Calibri"/>
-              </a:rPr>
-              <a:t>Procedural geometry · navigation</a:t>
-            </a:r>
-          </a:p>
-        </p:txBody>
-      </p:sp>
-      <p:sp>
-        <p:nvSpPr>
-          <p:cNvPr id="22" name="">
-            <a:extLst xmlns:a="http://schemas.openxmlformats.org/drawingml/2006/main">
-              <a:ext uri="{FF2B5EF4-FFF2-40B4-BE49-F238E27FC236}">
-                <a16:creationId xmlns:a16="http://schemas.microsoft.com/office/drawing/2014/main" id="{BCBBAFEA-CAF3-4ADD-9295-E1C126B4F400}"/>
-              </a:ext>
-            </a:extLst>
-          </p:cNvPr>
-          <p:cNvSpPr>
-            <a:spLocks xmlns:a="http://schemas.openxmlformats.org/drawingml/2006/main" noGrp="1"/>
-          </p:cNvSpPr>
-          <p:nvPr/>
-        </p:nvSpPr>
-        <p:spPr>
-          <a:xfrm xmlns:a="http://schemas.openxmlformats.org/drawingml/2006/main">
-            <a:off x="8820150" y="1885950"/>
-            <a:ext cx="323850" cy="161925"/>
-          </a:xfrm>
-          <a:prstGeom xmlns:a="http://schemas.openxmlformats.org/drawingml/2006/main" prst="downArrow">
-            <a:avLst/>
-          </a:prstGeom>
-          <a:solidFill xmlns:a="http://schemas.openxmlformats.org/drawingml/2006/main">
-            <a:srgbClr val="E9795B"/>
-          </a:solidFill>
-          <a:ln xmlns:a="http://schemas.openxmlformats.org/drawingml/2006/main" w="0">
-            <a:noFill/>
-            <a:prstDash val="solid"/>
-          </a:ln>
-        </p:spPr>
-      </p:sp>
-      <p:sp>
-        <p:nvSpPr>
-          <p:cNvPr id="23" name="">
-            <a:extLst xmlns:a="http://schemas.openxmlformats.org/drawingml/2006/main">
-              <a:ext uri="{FF2B5EF4-FFF2-40B4-BE49-F238E27FC236}">
-                <a16:creationId xmlns:a16="http://schemas.microsoft.com/office/drawing/2014/main" id="{C6E4DBFE-4499-4E38-A1CB-641F12FB6CD4}"/>
-              </a:ext>
-            </a:extLst>
-          </p:cNvPr>
-          <p:cNvSpPr>
-            <a:spLocks xmlns:a="http://schemas.openxmlformats.org/drawingml/2006/main" noGrp="1"/>
-          </p:cNvSpPr>
-          <p:nvPr/>
-        </p:nvSpPr>
-        <p:spPr>
-          <a:xfrm xmlns:a="http://schemas.openxmlformats.org/drawingml/2006/main">
-            <a:off x="8820150" y="2981325"/>
-            <a:ext cx="323850" cy="161925"/>
-          </a:xfrm>
-          <a:prstGeom xmlns:a="http://schemas.openxmlformats.org/drawingml/2006/main" prst="downArrow">
-            <a:avLst/>
-          </a:prstGeom>
-          <a:solidFill xmlns:a="http://schemas.openxmlformats.org/drawingml/2006/main">
-            <a:srgbClr val="E9795B"/>
-          </a:solidFill>
-          <a:ln xmlns:a="http://schemas.openxmlformats.org/drawingml/2006/main" w="0">
-            <a:noFill/>
-            <a:prstDash val="solid"/>
-          </a:ln>
-        </p:spPr>
-      </p:sp>
-      <p:sp>
-        <p:nvSpPr>
-          <p:cNvPr id="24" name="">
-            <a:extLst xmlns:a="http://schemas.openxmlformats.org/drawingml/2006/main">
-              <a:ext uri="{FF2B5EF4-FFF2-40B4-BE49-F238E27FC236}">
-                <a16:creationId xmlns:a16="http://schemas.microsoft.com/office/drawing/2014/main" id="{BC87EEDD-B6B6-4FDE-BEE1-187524A12E84}"/>
-              </a:ext>
-            </a:extLst>
-          </p:cNvPr>
-          <p:cNvSpPr>
-            <a:spLocks xmlns:a="http://schemas.openxmlformats.org/drawingml/2006/main" noGrp="1"/>
-          </p:cNvSpPr>
-          <p:nvPr/>
-        </p:nvSpPr>
-        <p:spPr>
-          <a:xfrm xmlns:a="http://schemas.openxmlformats.org/drawingml/2006/main">
-            <a:off x="8820150" y="4076700"/>
-            <a:ext cx="323850" cy="161925"/>
-          </a:xfrm>
-          <a:prstGeom xmlns:a="http://schemas.openxmlformats.org/drawingml/2006/main" prst="downArrow">
-            <a:avLst/>
-          </a:prstGeom>
-          <a:solidFill xmlns:a="http://schemas.openxmlformats.org/drawingml/2006/main">
-            <a:srgbClr val="E9795B"/>
-          </a:solidFill>
-          <a:ln xmlns:a="http://schemas.openxmlformats.org/drawingml/2006/main" w="0">
-            <a:noFill/>
-            <a:prstDash val="solid"/>
-          </a:ln>
-        </p:spPr>
-      </p:sp>
-      <p:sp>
-        <p:nvSpPr>
-          <p:cNvPr id="25" name="">
-            <a:extLst xmlns:a="http://schemas.openxmlformats.org/drawingml/2006/main">
-              <a:ext uri="{FF2B5EF4-FFF2-40B4-BE49-F238E27FC236}">
-                <a16:creationId xmlns:a16="http://schemas.microsoft.com/office/drawing/2014/main" id="{FBEC6F9E-B6DE-467B-9107-C53458192AC8}"/>
-              </a:ext>
-            </a:extLst>
-          </p:cNvPr>
-          <p:cNvSpPr>
-            <a:spLocks xmlns:a="http://schemas.openxmlformats.org/drawingml/2006/main" noGrp="1"/>
-          </p:cNvSpPr>
-          <p:nvPr/>
-        </p:nvSpPr>
-        <p:spPr>
-          <a:xfrm xmlns:a="http://schemas.openxmlformats.org/drawingml/2006/main">
-            <a:off x="628650" y="3257550"/>
-            <a:ext cx="1238250" cy="200025"/>
-          </a:xfrm>
-          <a:prstGeom xmlns:a="http://schemas.openxmlformats.org/drawingml/2006/main" prst="rect">
-            <a:avLst/>
-          </a:prstGeom>
-          <a:noFill xmlns:a="http://schemas.openxmlformats.org/drawingml/2006/main"/>
-          <a:ln xmlns:a="http://schemas.openxmlformats.org/drawingml/2006/main" w="0">
-            <a:noFill/>
-            <a:prstDash val="solid"/>
-          </a:ln>
-        </p:spPr>
-        <p:txBody>
-          <a:bodyPr xmlns:a="http://schemas.openxmlformats.org/drawingml/2006/main" wrap="square" lIns="0" tIns="0" rIns="0" bIns="0" anchor="t">
-            <a:normAutofit fontScale="100000"/>
-          </a:bodyPr>
-          <a:lstStyle xmlns:a="http://schemas.openxmlformats.org/drawingml/2006/main">
-            <a:defPPr algn="l">
-              <a:defRPr sz="975" b="1">
-                <a:solidFill>
-                  <a:srgbClr val="E9795B"/>
-                </a:solidFill>
-                <a:latin typeface="Calibri"/>
-                <a:ea typeface="Calibri"/>
-                <a:cs typeface="Calibri"/>
-              </a:defRPr>
-            </a:defPPr>
-          </a:lstStyle>
-          <a:p xmlns:a="http://schemas.openxmlformats.org/drawingml/2006/main">
-            <a:pPr algn="l">
-              <a:lnSpc>
-                <a:spcPct val="100000"/>
-              </a:lnSpc>
-              <a:buNone/>
-              <a:defRPr sz="975" b="1">
-                <a:solidFill>
-                  <a:srgbClr val="E9795B"/>
-                </a:solidFill>
-                <a:latin typeface="Calibri"/>
-                <a:ea typeface="Calibri"/>
-                <a:cs typeface="Calibri"/>
-              </a:defRPr>
-            </a:pPr>
-            <a:r>
-              <a:rPr sz="975" b="1">
-                <a:solidFill>
-                  <a:srgbClr val="E9795B"/>
-                </a:solidFill>
-                <a:latin typeface="Calibri"/>
-                <a:ea typeface="Calibri"/>
-                <a:cs typeface="Calibri"/>
-              </a:rPr>
-              <a:t>RENDER</a:t>
-            </a:r>
-          </a:p>
-        </p:txBody>
-      </p:sp>
-      <p:sp>
-        <p:nvSpPr>
-          <p:cNvPr id="26" name="">
-            <a:extLst xmlns:a="http://schemas.openxmlformats.org/drawingml/2006/main">
-              <a:ext uri="{FF2B5EF4-FFF2-40B4-BE49-F238E27FC236}">
-                <a16:creationId xmlns:a16="http://schemas.microsoft.com/office/drawing/2014/main" id="{8AC943D4-2836-42CF-83BA-F50599A2B72A}"/>
-              </a:ext>
-            </a:extLst>
-          </p:cNvPr>
-          <p:cNvSpPr>
-            <a:spLocks xmlns:a="http://schemas.openxmlformats.org/drawingml/2006/main" noGrp="1"/>
-          </p:cNvSpPr>
-          <p:nvPr/>
-        </p:nvSpPr>
-        <p:spPr>
-          <a:xfrm xmlns:a="http://schemas.openxmlformats.org/drawingml/2006/main">
-            <a:off x="628650" y="3552825"/>
-            <a:ext cx="4667250" cy="514350"/>
-          </a:xfrm>
-          <a:prstGeom xmlns:a="http://schemas.openxmlformats.org/drawingml/2006/main" prst="rect">
-            <a:avLst/>
-          </a:prstGeom>
-          <a:noFill xmlns:a="http://schemas.openxmlformats.org/drawingml/2006/main"/>
-          <a:ln xmlns:a="http://schemas.openxmlformats.org/drawingml/2006/main" w="0">
-            <a:noFill/>
-            <a:prstDash val="solid"/>
-          </a:ln>
-        </p:spPr>
-        <p:txBody>
-          <a:bodyPr xmlns:a="http://schemas.openxmlformats.org/drawingml/2006/main" wrap="square" lIns="0" tIns="0" rIns="0" bIns="0" anchor="t">
-            <a:normAutofit fontScale="100000"/>
-          </a:bodyPr>
-          <a:lstStyle xmlns:a="http://schemas.openxmlformats.org/drawingml/2006/main">
-            <a:defPPr algn="l">
-              <a:defRPr sz="2250" b="1">
-                <a:solidFill>
-                  <a:srgbClr val="153B2E"/>
-                </a:solidFill>
-                <a:latin typeface="Calibri"/>
-                <a:ea typeface="Calibri"/>
-                <a:cs typeface="Calibri"/>
-              </a:defRPr>
-            </a:defPPr>
-          </a:lstStyle>
-          <a:p xmlns:a="http://schemas.openxmlformats.org/drawingml/2006/main">
-            <a:pPr algn="l">
-              <a:lnSpc>
-                <a:spcPct val="100000"/>
-              </a:lnSpc>
-              <a:buNone/>
-              <a:defRPr sz="2250" b="1">
-                <a:solidFill>
-                  <a:srgbClr val="153B2E"/>
-                </a:solidFill>
-                <a:latin typeface="Calibri"/>
-                <a:ea typeface="Calibri"/>
-                <a:cs typeface="Calibri"/>
-              </a:defRPr>
-            </a:pPr>
-            <a:r>
-              <a:rPr sz="2250" b="1">
-                <a:solidFill>
-                  <a:srgbClr val="153B2E"/>
-                </a:solidFill>
-                <a:latin typeface="Calibri"/>
-                <a:ea typeface="Calibri"/>
-                <a:cs typeface="Calibri"/>
-              </a:rPr>
-              <a:t>WebGL 2</a:t>
-            </a:r>
-          </a:p>
-        </p:txBody>
-      </p:sp>
-      <p:sp>
-        <p:nvSpPr>
-          <p:cNvPr id="27" name="">
-            <a:extLst xmlns:a="http://schemas.openxmlformats.org/drawingml/2006/main">
-              <a:ext uri="{FF2B5EF4-FFF2-40B4-BE49-F238E27FC236}">
-                <a16:creationId xmlns:a16="http://schemas.microsoft.com/office/drawing/2014/main" id="{B511D1FC-B440-4667-A6DD-647BD745AAAF}"/>
-              </a:ext>
-            </a:extLst>
-          </p:cNvPr>
-          <p:cNvSpPr>
-            <a:spLocks xmlns:a="http://schemas.openxmlformats.org/drawingml/2006/main" noGrp="1"/>
-          </p:cNvSpPr>
-          <p:nvPr/>
-        </p:nvSpPr>
-        <p:spPr>
-          <a:xfrm xmlns:a="http://schemas.openxmlformats.org/drawingml/2006/main">
-            <a:off x="628650" y="4362450"/>
-            <a:ext cx="1238250" cy="200025"/>
-          </a:xfrm>
-          <a:prstGeom xmlns:a="http://schemas.openxmlformats.org/drawingml/2006/main" prst="rect">
-            <a:avLst/>
-          </a:prstGeom>
-          <a:noFill xmlns:a="http://schemas.openxmlformats.org/drawingml/2006/main"/>
-          <a:ln xmlns:a="http://schemas.openxmlformats.org/drawingml/2006/main" w="0">
-            <a:noFill/>
-            <a:prstDash val="solid"/>
-          </a:ln>
-        </p:spPr>
-        <p:txBody>
-          <a:bodyPr xmlns:a="http://schemas.openxmlformats.org/drawingml/2006/main" wrap="square" lIns="0" tIns="0" rIns="0" bIns="0" anchor="t">
-            <a:normAutofit fontScale="100000"/>
-          </a:bodyPr>
-          <a:lstStyle xmlns:a="http://schemas.openxmlformats.org/drawingml/2006/main">
-            <a:defPPr algn="l">
-              <a:defRPr sz="975" b="1">
-                <a:solidFill>
-                  <a:srgbClr val="2C6B50"/>
-                </a:solidFill>
-                <a:latin typeface="Calibri"/>
-                <a:ea typeface="Calibri"/>
-                <a:cs typeface="Calibri"/>
-              </a:defRPr>
-            </a:defPPr>
-          </a:lstStyle>
-          <a:p xmlns:a="http://schemas.openxmlformats.org/drawingml/2006/main">
-            <a:pPr algn="l">
-              <a:lnSpc>
-                <a:spcPct val="100000"/>
-              </a:lnSpc>
-              <a:buNone/>
-              <a:defRPr sz="975" b="1">
-                <a:solidFill>
-                  <a:srgbClr val="2C6B50"/>
-                </a:solidFill>
-                <a:latin typeface="Calibri"/>
-                <a:ea typeface="Calibri"/>
-                <a:cs typeface="Calibri"/>
-              </a:defRPr>
-            </a:pPr>
-            <a:r>
-              <a:rPr sz="975" b="1">
-                <a:solidFill>
-                  <a:srgbClr val="2C6B50"/>
-                </a:solidFill>
-                <a:latin typeface="Calibri"/>
-                <a:ea typeface="Calibri"/>
-                <a:cs typeface="Calibri"/>
-              </a:rPr>
-              <a:t>ASSEMBLE</a:t>
-            </a:r>
-          </a:p>
-        </p:txBody>
-      </p:sp>
-      <p:sp>
-        <p:nvSpPr>
-          <p:cNvPr id="28" name="">
-            <a:extLst xmlns:a="http://schemas.openxmlformats.org/drawingml/2006/main">
-              <a:ext uri="{FF2B5EF4-FFF2-40B4-BE49-F238E27FC236}">
-                <a16:creationId xmlns:a16="http://schemas.microsoft.com/office/drawing/2014/main" id="{C2DC2F90-B7DB-4828-90BD-044E6CC3E1C2}"/>
-              </a:ext>
-            </a:extLst>
-          </p:cNvPr>
-          <p:cNvSpPr>
-            <a:spLocks xmlns:a="http://schemas.openxmlformats.org/drawingml/2006/main" noGrp="1"/>
-          </p:cNvSpPr>
-          <p:nvPr/>
-        </p:nvSpPr>
-        <p:spPr>
-          <a:xfrm xmlns:a="http://schemas.openxmlformats.org/drawingml/2006/main">
-            <a:off x="628650" y="4657725"/>
-            <a:ext cx="5143500" cy="628650"/>
-          </a:xfrm>
-          <a:prstGeom xmlns:a="http://schemas.openxmlformats.org/drawingml/2006/main" prst="rect">
-            <a:avLst/>
-          </a:prstGeom>
-          <a:noFill xmlns:a="http://schemas.openxmlformats.org/drawingml/2006/main"/>
-          <a:ln xmlns:a="http://schemas.openxmlformats.org/drawingml/2006/main" w="0">
-            <a:noFill/>
-            <a:prstDash val="solid"/>
-          </a:ln>
-        </p:spPr>
-        <p:txBody>
-          <a:bodyPr xmlns:a="http://schemas.openxmlformats.org/drawingml/2006/main" wrap="square" lIns="0" tIns="0" rIns="0" bIns="0" anchor="t">
-            <a:normAutofit fontScale="100000"/>
-          </a:bodyPr>
-          <a:lstStyle xmlns:a="http://schemas.openxmlformats.org/drawingml/2006/main">
-            <a:defPPr algn="l">
-              <a:defRPr sz="1350" b="0">
-                <a:solidFill>
-                  <a:srgbClr val="60756A"/>
-                </a:solidFill>
-                <a:latin typeface="Calibri"/>
-                <a:ea typeface="Calibri"/>
-                <a:cs typeface="Calibri"/>
-              </a:defRPr>
-            </a:defPPr>
-          </a:lstStyle>
-          <a:p xmlns:a="http://schemas.openxmlformats.org/drawingml/2006/main">
-            <a:pPr algn="l">
-              <a:lnSpc>
-                <a:spcPct val="108000"/>
-              </a:lnSpc>
-              <a:buNone/>
-              <a:defRPr sz="1350" b="0">
-                <a:solidFill>
-                  <a:srgbClr val="60756A"/>
-                </a:solidFill>
-                <a:latin typeface="Calibri"/>
-                <a:ea typeface="Calibri"/>
-                <a:cs typeface="Calibri"/>
-              </a:defRPr>
-            </a:pPr>
-            <a:r>
-              <a:rPr sz="1350" b="0">
-                <a:solidFill>
-                  <a:srgbClr val="60756A"/>
-                </a:solidFill>
-                <a:latin typeface="Calibri"/>
-                <a:ea typeface="Calibri"/>
-                <a:cs typeface="Calibri"/>
-              </a:rPr>
-              <a:t>Walls, floors, openings and stairs are generated from the plan structure.</a:t>
-            </a:r>
-          </a:p>
-        </p:txBody>
-      </p:sp>
-    </p:spTree>
-    <p:extLst>
-      <p:ext uri="{BB962C8B-B14F-4D97-AF65-F5344CB8AC3E}">
-        <p14:creationId xmlns:p14="http://schemas.microsoft.com/office/powerpoint/2010/main" val="1139037911"/>
-      </p:ext>
-    </p:extLst>
-  </p:cSld>
-</p:sld>
-</file>
-
-<file path=ppt/slides/slide7.xml><?xml version="1.0" encoding="utf-8"?>
 <p:sld xmlns:p="http://schemas.openxmlformats.org/presentationml/2006/main">
   <p:cSld>
     <p:bg>
@@ -10684,10 +7376,10 @@
       </p:grpSpPr>
       <p:sp>
         <p:nvSpPr>
-          <p:cNvPr id="10" name="">
-            <a:extLst xmlns:a="http://schemas.openxmlformats.org/drawingml/2006/main">
-              <a:ext uri="{FF2B5EF4-FFF2-40B4-BE49-F238E27FC236}">
-                <a16:creationId xmlns:a16="http://schemas.microsoft.com/office/drawing/2014/main" id="{18C1F60D-53E1-4C76-9AD4-3DBE3A86008C}"/>
+          <p:cNvPr id="19" name="">
+            <a:extLst xmlns:a="http://schemas.openxmlformats.org/drawingml/2006/main">
+              <a:ext uri="{FF2B5EF4-FFF2-40B4-BE49-F238E27FC236}">
+                <a16:creationId xmlns:a16="http://schemas.microsoft.com/office/drawing/2014/main" id="{3F371BED-CB3E-4632-8709-976846AD482E}"/>
               </a:ext>
             </a:extLst>
           </p:cNvPr>
@@ -10699,7 +7391,7 @@
         <p:spPr>
           <a:xfrm xmlns:a="http://schemas.openxmlformats.org/drawingml/2006/main">
             <a:off x="0" y="0"/>
-            <a:ext cx="12192000" cy="85725"/>
+            <a:ext cx="12192000" cy="76200"/>
           </a:xfrm>
           <a:prstGeom xmlns:a="http://schemas.openxmlformats.org/drawingml/2006/main" prst="rect">
             <a:avLst/>
@@ -10718,7 +7410,7 @@
           <p:cNvPr id="2" name="">
             <a:extLst xmlns:a="http://schemas.openxmlformats.org/drawingml/2006/main">
               <a:ext uri="{FF2B5EF4-FFF2-40B4-BE49-F238E27FC236}">
-                <a16:creationId xmlns:a16="http://schemas.microsoft.com/office/drawing/2014/main" id="{A84F3DD9-9788-4F33-98FF-05B66CFF7E05}"/>
+                <a16:creationId xmlns:a16="http://schemas.microsoft.com/office/drawing/2014/main" id="{C1B0666B-CE05-4000-A5DF-23FD891A9561}"/>
               </a:ext>
             </a:extLst>
           </p:cNvPr>
@@ -10729,8 +7421,892 @@
         </p:nvSpPr>
         <p:spPr>
           <a:xfrm xmlns:a="http://schemas.openxmlformats.org/drawingml/2006/main">
-            <a:off x="628650" y="495300"/>
-            <a:ext cx="2952750" cy="219075"/>
+            <a:off x="609600" y="361950"/>
+            <a:ext cx="3810000" cy="209550"/>
+          </a:xfrm>
+          <a:prstGeom xmlns:a="http://schemas.openxmlformats.org/drawingml/2006/main" prst="rect">
+            <a:avLst/>
+          </a:prstGeom>
+          <a:noFill xmlns:a="http://schemas.openxmlformats.org/drawingml/2006/main"/>
+          <a:ln xmlns:a="http://schemas.openxmlformats.org/drawingml/2006/main" w="0">
+            <a:noFill/>
+            <a:prstDash val="solid"/>
+          </a:ln>
+        </p:spPr>
+        <p:txBody>
+          <a:bodyPr xmlns:a="http://schemas.openxmlformats.org/drawingml/2006/main" wrap="square" lIns="0" tIns="0" rIns="0" bIns="0" anchor="t">
+            <a:normAutofit fontScale="100000"/>
+          </a:bodyPr>
+          <a:lstStyle xmlns:a="http://schemas.openxmlformats.org/drawingml/2006/main">
+            <a:defPPr algn="l">
+              <a:defRPr sz="975" b="1">
+                <a:solidFill>
+                  <a:srgbClr val="A8C9B0"/>
+                </a:solidFill>
+                <a:latin typeface="Calibri"/>
+                <a:ea typeface="Calibri"/>
+                <a:cs typeface="Calibri"/>
+              </a:defRPr>
+            </a:defPPr>
+          </a:lstStyle>
+          <a:p xmlns:a="http://schemas.openxmlformats.org/drawingml/2006/main">
+            <a:pPr algn="l">
+              <a:defRPr sz="975" b="1">
+                <a:solidFill>
+                  <a:srgbClr val="A8C9B0"/>
+                </a:solidFill>
+                <a:latin typeface="Calibri"/>
+                <a:ea typeface="Calibri"/>
+                <a:cs typeface="Calibri"/>
+              </a:defRPr>
+            </a:pPr>
+            <a:r>
+              <a:rPr sz="975" b="1">
+                <a:solidFill>
+                  <a:srgbClr val="A8C9B0"/>
+                </a:solidFill>
+                <a:latin typeface="Calibri"/>
+                <a:ea typeface="Calibri"/>
+                <a:cs typeface="Calibri"/>
+              </a:rPr>
+              <a:t>SUSTAINABILITY</a:t>
+            </a:r>
+          </a:p>
+        </p:txBody>
+      </p:sp>
+      <p:sp>
+        <p:nvSpPr>
+          <p:cNvPr id="3" name="">
+            <a:extLst xmlns:a="http://schemas.openxmlformats.org/drawingml/2006/main">
+              <a:ext uri="{FF2B5EF4-FFF2-40B4-BE49-F238E27FC236}">
+                <a16:creationId xmlns:a16="http://schemas.microsoft.com/office/drawing/2014/main" id="{4C48DD25-F9C3-4579-BA20-179FC35F656A}"/>
+              </a:ext>
+            </a:extLst>
+          </p:cNvPr>
+          <p:cNvSpPr>
+            <a:spLocks xmlns:a="http://schemas.openxmlformats.org/drawingml/2006/main" noGrp="1"/>
+          </p:cNvSpPr>
+          <p:nvPr/>
+        </p:nvSpPr>
+        <p:spPr>
+          <a:xfrm xmlns:a="http://schemas.openxmlformats.org/drawingml/2006/main">
+            <a:off x="609600" y="876300"/>
+            <a:ext cx="6048375" cy="1066800"/>
+          </a:xfrm>
+          <a:prstGeom xmlns:a="http://schemas.openxmlformats.org/drawingml/2006/main" prst="rect">
+            <a:avLst/>
+          </a:prstGeom>
+          <a:noFill xmlns:a="http://schemas.openxmlformats.org/drawingml/2006/main"/>
+          <a:ln xmlns:a="http://schemas.openxmlformats.org/drawingml/2006/main" w="0">
+            <a:noFill/>
+            <a:prstDash val="solid"/>
+          </a:ln>
+        </p:spPr>
+        <p:txBody>
+          <a:bodyPr xmlns:a="http://schemas.openxmlformats.org/drawingml/2006/main" wrap="square" lIns="0" tIns="0" rIns="0" bIns="0" anchor="t">
+            <a:normAutofit fontScale="100000"/>
+          </a:bodyPr>
+          <a:lstStyle xmlns:a="http://schemas.openxmlformats.org/drawingml/2006/main">
+            <a:defPPr algn="l">
+              <a:defRPr sz="3150" b="1">
+                <a:solidFill>
+                  <a:srgbClr val="FFFFFF"/>
+                </a:solidFill>
+                <a:latin typeface="Calibri"/>
+                <a:ea typeface="Calibri"/>
+                <a:cs typeface="Calibri"/>
+              </a:defRPr>
+            </a:defPPr>
+          </a:lstStyle>
+          <a:p xmlns:a="http://schemas.openxmlformats.org/drawingml/2006/main">
+            <a:pPr algn="l">
+              <a:defRPr sz="3150" b="1">
+                <a:solidFill>
+                  <a:srgbClr val="FFFFFF"/>
+                </a:solidFill>
+                <a:latin typeface="Calibri"/>
+                <a:ea typeface="Calibri"/>
+                <a:cs typeface="Calibri"/>
+              </a:defRPr>
+            </a:pPr>
+            <a:r>
+              <a:rPr sz="3150" b="1">
+                <a:solidFill>
+                  <a:srgbClr val="FFFFFF"/>
+                </a:solidFill>
+                <a:latin typeface="Calibri"/>
+                <a:ea typeface="Calibri"/>
+                <a:cs typeface="Calibri"/>
+              </a:rPr>
+              <a:t>Better spatial decisions,</a:t>
+            </a:r>
+          </a:p>
+          <a:p xmlns:a="http://schemas.openxmlformats.org/drawingml/2006/main">
+            <a:pPr algn="l">
+              <a:defRPr sz="3150" b="1">
+                <a:solidFill>
+                  <a:srgbClr val="FFFFFF"/>
+                </a:solidFill>
+                <a:latin typeface="Calibri"/>
+                <a:ea typeface="Calibri"/>
+                <a:cs typeface="Calibri"/>
+              </a:defRPr>
+            </a:pPr>
+            <a:r>
+              <a:rPr sz="3150" b="1">
+                <a:solidFill>
+                  <a:srgbClr val="FFFFFF"/>
+                </a:solidFill>
+                <a:latin typeface="Calibri"/>
+                <a:ea typeface="Calibri"/>
+                <a:cs typeface="Calibri"/>
+              </a:rPr>
+              <a:t>earlier in the process.</a:t>
+            </a:r>
+          </a:p>
+        </p:txBody>
+      </p:sp>
+      <p:sp>
+        <p:nvSpPr>
+          <p:cNvPr id="4" name="">
+            <a:extLst xmlns:a="http://schemas.openxmlformats.org/drawingml/2006/main">
+              <a:ext uri="{FF2B5EF4-FFF2-40B4-BE49-F238E27FC236}">
+                <a16:creationId xmlns:a16="http://schemas.microsoft.com/office/drawing/2014/main" id="{BD3A9109-3883-4215-A73C-AD879C8A0025}"/>
+              </a:ext>
+            </a:extLst>
+          </p:cNvPr>
+          <p:cNvSpPr>
+            <a:spLocks xmlns:a="http://schemas.openxmlformats.org/drawingml/2006/main" noGrp="1"/>
+          </p:cNvSpPr>
+          <p:nvPr/>
+        </p:nvSpPr>
+        <p:spPr>
+          <a:xfrm xmlns:a="http://schemas.openxmlformats.org/drawingml/2006/main">
+            <a:off x="628650" y="2190750"/>
+            <a:ext cx="5667375" cy="514350"/>
+          </a:xfrm>
+          <a:prstGeom xmlns:a="http://schemas.openxmlformats.org/drawingml/2006/main" prst="rect">
+            <a:avLst/>
+          </a:prstGeom>
+          <a:noFill xmlns:a="http://schemas.openxmlformats.org/drawingml/2006/main"/>
+          <a:ln xmlns:a="http://schemas.openxmlformats.org/drawingml/2006/main" w="0">
+            <a:noFill/>
+            <a:prstDash val="solid"/>
+          </a:ln>
+        </p:spPr>
+        <p:txBody>
+          <a:bodyPr xmlns:a="http://schemas.openxmlformats.org/drawingml/2006/main" wrap="square" lIns="0" tIns="0" rIns="0" bIns="0" anchor="t">
+            <a:normAutofit fontScale="100000"/>
+          </a:bodyPr>
+          <a:lstStyle xmlns:a="http://schemas.openxmlformats.org/drawingml/2006/main">
+            <a:defPPr algn="l">
+              <a:defRPr sz="1500" b="0">
+                <a:solidFill>
+                  <a:srgbClr val="D5E5D8"/>
+                </a:solidFill>
+                <a:latin typeface="Calibri"/>
+                <a:ea typeface="Calibri"/>
+                <a:cs typeface="Calibri"/>
+              </a:defRPr>
+            </a:defPPr>
+          </a:lstStyle>
+          <a:p xmlns:a="http://schemas.openxmlformats.org/drawingml/2006/main">
+            <a:pPr algn="l">
+              <a:defRPr sz="1500" b="0">
+                <a:solidFill>
+                  <a:srgbClr val="D5E5D8"/>
+                </a:solidFill>
+                <a:latin typeface="Calibri"/>
+                <a:ea typeface="Calibri"/>
+                <a:cs typeface="Calibri"/>
+              </a:defRPr>
+            </a:pPr>
+            <a:r>
+              <a:rPr sz="1500" b="0">
+                <a:solidFill>
+                  <a:srgbClr val="D5E5D8"/>
+                </a:solidFill>
+                <a:latin typeface="Calibri"/>
+                <a:ea typeface="Calibri"/>
+                <a:cs typeface="Calibri"/>
+              </a:rPr>
+              <a:t>A 3D walkthrough can help people discuss layout before construction.</a:t>
+            </a:r>
+          </a:p>
+        </p:txBody>
+      </p:sp>
+      <p:sp>
+        <p:nvSpPr>
+          <p:cNvPr id="5" name="">
+            <a:extLst xmlns:a="http://schemas.openxmlformats.org/drawingml/2006/main">
+              <a:ext uri="{FF2B5EF4-FFF2-40B4-BE49-F238E27FC236}">
+                <a16:creationId xmlns:a16="http://schemas.microsoft.com/office/drawing/2014/main" id="{8E6B9592-58FF-41F6-8512-E9411CE4C888}"/>
+              </a:ext>
+            </a:extLst>
+          </p:cNvPr>
+          <p:cNvSpPr>
+            <a:spLocks xmlns:a="http://schemas.openxmlformats.org/drawingml/2006/main" noGrp="1"/>
+          </p:cNvSpPr>
+          <p:nvPr/>
+        </p:nvSpPr>
+        <p:spPr>
+          <a:xfrm xmlns:a="http://schemas.openxmlformats.org/drawingml/2006/main">
+            <a:off x="638175" y="3124200"/>
+            <a:ext cx="523875" cy="285750"/>
+          </a:xfrm>
+          <a:prstGeom xmlns:a="http://schemas.openxmlformats.org/drawingml/2006/main" prst="rect">
+            <a:avLst/>
+          </a:prstGeom>
+          <a:noFill xmlns:a="http://schemas.openxmlformats.org/drawingml/2006/main"/>
+          <a:ln xmlns:a="http://schemas.openxmlformats.org/drawingml/2006/main" w="0">
+            <a:noFill/>
+            <a:prstDash val="solid"/>
+          </a:ln>
+        </p:spPr>
+        <p:txBody>
+          <a:bodyPr xmlns:a="http://schemas.openxmlformats.org/drawingml/2006/main" wrap="square" lIns="0" tIns="0" rIns="0" bIns="0" anchor="t">
+            <a:normAutofit fontScale="100000"/>
+          </a:bodyPr>
+          <a:lstStyle xmlns:a="http://schemas.openxmlformats.org/drawingml/2006/main">
+            <a:defPPr algn="l">
+              <a:defRPr sz="1425" b="1">
+                <a:solidFill>
+                  <a:srgbClr val="E9795B"/>
+                </a:solidFill>
+                <a:latin typeface="Calibri"/>
+                <a:ea typeface="Calibri"/>
+                <a:cs typeface="Calibri"/>
+              </a:defRPr>
+            </a:defPPr>
+          </a:lstStyle>
+          <a:p xmlns:a="http://schemas.openxmlformats.org/drawingml/2006/main">
+            <a:pPr algn="l">
+              <a:defRPr sz="1425" b="1">
+                <a:solidFill>
+                  <a:srgbClr val="E9795B"/>
+                </a:solidFill>
+                <a:latin typeface="Calibri"/>
+                <a:ea typeface="Calibri"/>
+                <a:cs typeface="Calibri"/>
+              </a:defRPr>
+            </a:pPr>
+            <a:r>
+              <a:rPr sz="1425" b="1">
+                <a:solidFill>
+                  <a:srgbClr val="E9795B"/>
+                </a:solidFill>
+                <a:latin typeface="Calibri"/>
+                <a:ea typeface="Calibri"/>
+                <a:cs typeface="Calibri"/>
+              </a:rPr>
+              <a:t>01</a:t>
+            </a:r>
+          </a:p>
+        </p:txBody>
+      </p:sp>
+      <p:sp>
+        <p:nvSpPr>
+          <p:cNvPr id="6" name="">
+            <a:extLst xmlns:a="http://schemas.openxmlformats.org/drawingml/2006/main">
+              <a:ext uri="{FF2B5EF4-FFF2-40B4-BE49-F238E27FC236}">
+                <a16:creationId xmlns:a16="http://schemas.microsoft.com/office/drawing/2014/main" id="{8394471C-AFDE-40D1-AB27-E710656E1FA8}"/>
+              </a:ext>
+            </a:extLst>
+          </p:cNvPr>
+          <p:cNvSpPr>
+            <a:spLocks xmlns:a="http://schemas.openxmlformats.org/drawingml/2006/main" noGrp="1"/>
+          </p:cNvSpPr>
+          <p:nvPr/>
+        </p:nvSpPr>
+        <p:spPr>
+          <a:xfrm xmlns:a="http://schemas.openxmlformats.org/drawingml/2006/main">
+            <a:off x="1238250" y="3124200"/>
+            <a:ext cx="2714625" cy="209550"/>
+          </a:xfrm>
+          <a:prstGeom xmlns:a="http://schemas.openxmlformats.org/drawingml/2006/main" prst="rect">
+            <a:avLst/>
+          </a:prstGeom>
+          <a:noFill xmlns:a="http://schemas.openxmlformats.org/drawingml/2006/main"/>
+          <a:ln xmlns:a="http://schemas.openxmlformats.org/drawingml/2006/main" w="0">
+            <a:noFill/>
+            <a:prstDash val="solid"/>
+          </a:ln>
+        </p:spPr>
+        <p:txBody>
+          <a:bodyPr xmlns:a="http://schemas.openxmlformats.org/drawingml/2006/main" wrap="square" lIns="0" tIns="0" rIns="0" bIns="0" anchor="t">
+            <a:normAutofit fontScale="100000"/>
+          </a:bodyPr>
+          <a:lstStyle xmlns:a="http://schemas.openxmlformats.org/drawingml/2006/main">
+            <a:defPPr algn="l">
+              <a:defRPr sz="975" b="1">
+                <a:solidFill>
+                  <a:srgbClr val="A8C9B0"/>
+                </a:solidFill>
+                <a:latin typeface="Calibri"/>
+                <a:ea typeface="Calibri"/>
+                <a:cs typeface="Calibri"/>
+              </a:defRPr>
+            </a:defPPr>
+          </a:lstStyle>
+          <a:p xmlns:a="http://schemas.openxmlformats.org/drawingml/2006/main">
+            <a:pPr algn="l">
+              <a:defRPr sz="975" b="1">
+                <a:solidFill>
+                  <a:srgbClr val="A8C9B0"/>
+                </a:solidFill>
+                <a:latin typeface="Calibri"/>
+                <a:ea typeface="Calibri"/>
+                <a:cs typeface="Calibri"/>
+              </a:defRPr>
+            </a:pPr>
+            <a:r>
+              <a:rPr sz="975" b="1">
+                <a:solidFill>
+                  <a:srgbClr val="A8C9B0"/>
+                </a:solidFill>
+                <a:latin typeface="Calibri"/>
+                <a:ea typeface="Calibri"/>
+                <a:cs typeface="Calibri"/>
+              </a:rPr>
+              <a:t>REVIEW EARLY</a:t>
+            </a:r>
+          </a:p>
+        </p:txBody>
+      </p:sp>
+      <p:sp>
+        <p:nvSpPr>
+          <p:cNvPr id="7" name="">
+            <a:extLst xmlns:a="http://schemas.openxmlformats.org/drawingml/2006/main">
+              <a:ext uri="{FF2B5EF4-FFF2-40B4-BE49-F238E27FC236}">
+                <a16:creationId xmlns:a16="http://schemas.microsoft.com/office/drawing/2014/main" id="{7AE37743-9FF8-4054-B814-33E704FA1B61}"/>
+              </a:ext>
+            </a:extLst>
+          </p:cNvPr>
+          <p:cNvSpPr>
+            <a:spLocks xmlns:a="http://schemas.openxmlformats.org/drawingml/2006/main" noGrp="1"/>
+          </p:cNvSpPr>
+          <p:nvPr/>
+        </p:nvSpPr>
+        <p:spPr>
+          <a:xfrm xmlns:a="http://schemas.openxmlformats.org/drawingml/2006/main">
+            <a:off x="1238250" y="3381375"/>
+            <a:ext cx="4905375" cy="457200"/>
+          </a:xfrm>
+          <a:prstGeom xmlns:a="http://schemas.openxmlformats.org/drawingml/2006/main" prst="rect">
+            <a:avLst/>
+          </a:prstGeom>
+          <a:noFill xmlns:a="http://schemas.openxmlformats.org/drawingml/2006/main"/>
+          <a:ln xmlns:a="http://schemas.openxmlformats.org/drawingml/2006/main" w="0">
+            <a:noFill/>
+            <a:prstDash val="solid"/>
+          </a:ln>
+        </p:spPr>
+        <p:txBody>
+          <a:bodyPr xmlns:a="http://schemas.openxmlformats.org/drawingml/2006/main" wrap="square" lIns="0" tIns="0" rIns="0" bIns="0" anchor="t">
+            <a:normAutofit fontScale="100000"/>
+          </a:bodyPr>
+          <a:lstStyle xmlns:a="http://schemas.openxmlformats.org/drawingml/2006/main">
+            <a:defPPr algn="l">
+              <a:defRPr sz="1350" b="0">
+                <a:solidFill>
+                  <a:srgbClr val="FFFFFF"/>
+                </a:solidFill>
+                <a:latin typeface="Calibri"/>
+                <a:ea typeface="Calibri"/>
+                <a:cs typeface="Calibri"/>
+              </a:defRPr>
+            </a:defPPr>
+          </a:lstStyle>
+          <a:p xmlns:a="http://schemas.openxmlformats.org/drawingml/2006/main">
+            <a:pPr algn="l">
+              <a:defRPr sz="1350" b="0">
+                <a:solidFill>
+                  <a:srgbClr val="FFFFFF"/>
+                </a:solidFill>
+                <a:latin typeface="Calibri"/>
+                <a:ea typeface="Calibri"/>
+                <a:cs typeface="Calibri"/>
+              </a:defRPr>
+            </a:pPr>
+            <a:r>
+              <a:rPr sz="1350" b="0">
+                <a:solidFill>
+                  <a:srgbClr val="FFFFFF"/>
+                </a:solidFill>
+                <a:latin typeface="Calibri"/>
+                <a:ea typeface="Calibri"/>
+                <a:cs typeface="Calibri"/>
+              </a:rPr>
+              <a:t>See circulation and room relationships before a home is built.</a:t>
+            </a:r>
+          </a:p>
+        </p:txBody>
+      </p:sp>
+      <p:sp>
+        <p:nvSpPr>
+          <p:cNvPr id="8" name="">
+            <a:extLst xmlns:a="http://schemas.openxmlformats.org/drawingml/2006/main">
+              <a:ext uri="{FF2B5EF4-FFF2-40B4-BE49-F238E27FC236}">
+                <a16:creationId xmlns:a16="http://schemas.microsoft.com/office/drawing/2014/main" id="{59A2CC7E-C85C-4552-9149-B3FAB419C0A6}"/>
+              </a:ext>
+            </a:extLst>
+          </p:cNvPr>
+          <p:cNvSpPr>
+            <a:spLocks xmlns:a="http://schemas.openxmlformats.org/drawingml/2006/main" noGrp="1"/>
+          </p:cNvSpPr>
+          <p:nvPr/>
+        </p:nvSpPr>
+        <p:spPr>
+          <a:xfrm xmlns:a="http://schemas.openxmlformats.org/drawingml/2006/main">
+            <a:off x="638175" y="4038600"/>
+            <a:ext cx="523875" cy="285750"/>
+          </a:xfrm>
+          <a:prstGeom xmlns:a="http://schemas.openxmlformats.org/drawingml/2006/main" prst="rect">
+            <a:avLst/>
+          </a:prstGeom>
+          <a:noFill xmlns:a="http://schemas.openxmlformats.org/drawingml/2006/main"/>
+          <a:ln xmlns:a="http://schemas.openxmlformats.org/drawingml/2006/main" w="0">
+            <a:noFill/>
+            <a:prstDash val="solid"/>
+          </a:ln>
+        </p:spPr>
+        <p:txBody>
+          <a:bodyPr xmlns:a="http://schemas.openxmlformats.org/drawingml/2006/main" wrap="square" lIns="0" tIns="0" rIns="0" bIns="0" anchor="t">
+            <a:normAutofit fontScale="100000"/>
+          </a:bodyPr>
+          <a:lstStyle xmlns:a="http://schemas.openxmlformats.org/drawingml/2006/main">
+            <a:defPPr algn="l">
+              <a:defRPr sz="1425" b="1">
+                <a:solidFill>
+                  <a:srgbClr val="E9795B"/>
+                </a:solidFill>
+                <a:latin typeface="Calibri"/>
+                <a:ea typeface="Calibri"/>
+                <a:cs typeface="Calibri"/>
+              </a:defRPr>
+            </a:defPPr>
+          </a:lstStyle>
+          <a:p xmlns:a="http://schemas.openxmlformats.org/drawingml/2006/main">
+            <a:pPr algn="l">
+              <a:defRPr sz="1425" b="1">
+                <a:solidFill>
+                  <a:srgbClr val="E9795B"/>
+                </a:solidFill>
+                <a:latin typeface="Calibri"/>
+                <a:ea typeface="Calibri"/>
+                <a:cs typeface="Calibri"/>
+              </a:defRPr>
+            </a:pPr>
+            <a:r>
+              <a:rPr sz="1425" b="1">
+                <a:solidFill>
+                  <a:srgbClr val="E9795B"/>
+                </a:solidFill>
+                <a:latin typeface="Calibri"/>
+                <a:ea typeface="Calibri"/>
+                <a:cs typeface="Calibri"/>
+              </a:rPr>
+              <a:t>02</a:t>
+            </a:r>
+          </a:p>
+        </p:txBody>
+      </p:sp>
+      <p:sp>
+        <p:nvSpPr>
+          <p:cNvPr id="9" name="">
+            <a:extLst xmlns:a="http://schemas.openxmlformats.org/drawingml/2006/main">
+              <a:ext uri="{FF2B5EF4-FFF2-40B4-BE49-F238E27FC236}">
+                <a16:creationId xmlns:a16="http://schemas.microsoft.com/office/drawing/2014/main" id="{B9C861A8-D3DE-48EB-B43D-3EB7E88F223C}"/>
+              </a:ext>
+            </a:extLst>
+          </p:cNvPr>
+          <p:cNvSpPr>
+            <a:spLocks xmlns:a="http://schemas.openxmlformats.org/drawingml/2006/main" noGrp="1"/>
+          </p:cNvSpPr>
+          <p:nvPr/>
+        </p:nvSpPr>
+        <p:spPr>
+          <a:xfrm xmlns:a="http://schemas.openxmlformats.org/drawingml/2006/main">
+            <a:off x="1238250" y="4038600"/>
+            <a:ext cx="2714625" cy="209550"/>
+          </a:xfrm>
+          <a:prstGeom xmlns:a="http://schemas.openxmlformats.org/drawingml/2006/main" prst="rect">
+            <a:avLst/>
+          </a:prstGeom>
+          <a:noFill xmlns:a="http://schemas.openxmlformats.org/drawingml/2006/main"/>
+          <a:ln xmlns:a="http://schemas.openxmlformats.org/drawingml/2006/main" w="0">
+            <a:noFill/>
+            <a:prstDash val="solid"/>
+          </a:ln>
+        </p:spPr>
+        <p:txBody>
+          <a:bodyPr xmlns:a="http://schemas.openxmlformats.org/drawingml/2006/main" wrap="square" lIns="0" tIns="0" rIns="0" bIns="0" anchor="t">
+            <a:normAutofit fontScale="100000"/>
+          </a:bodyPr>
+          <a:lstStyle xmlns:a="http://schemas.openxmlformats.org/drawingml/2006/main">
+            <a:defPPr algn="l">
+              <a:defRPr sz="975" b="1">
+                <a:solidFill>
+                  <a:srgbClr val="A8C9B0"/>
+                </a:solidFill>
+                <a:latin typeface="Calibri"/>
+                <a:ea typeface="Calibri"/>
+                <a:cs typeface="Calibri"/>
+              </a:defRPr>
+            </a:defPPr>
+          </a:lstStyle>
+          <a:p xmlns:a="http://schemas.openxmlformats.org/drawingml/2006/main">
+            <a:pPr algn="l">
+              <a:defRPr sz="975" b="1">
+                <a:solidFill>
+                  <a:srgbClr val="A8C9B0"/>
+                </a:solidFill>
+                <a:latin typeface="Calibri"/>
+                <a:ea typeface="Calibri"/>
+                <a:cs typeface="Calibri"/>
+              </a:defRPr>
+            </a:pPr>
+            <a:r>
+              <a:rPr sz="975" b="1">
+                <a:solidFill>
+                  <a:srgbClr val="A8C9B0"/>
+                </a:solidFill>
+                <a:latin typeface="Calibri"/>
+                <a:ea typeface="Calibri"/>
+                <a:cs typeface="Calibri"/>
+              </a:rPr>
+              <a:t>WORK TOGETHER</a:t>
+            </a:r>
+          </a:p>
+        </p:txBody>
+      </p:sp>
+      <p:sp>
+        <p:nvSpPr>
+          <p:cNvPr id="10" name="">
+            <a:extLst xmlns:a="http://schemas.openxmlformats.org/drawingml/2006/main">
+              <a:ext uri="{FF2B5EF4-FFF2-40B4-BE49-F238E27FC236}">
+                <a16:creationId xmlns:a16="http://schemas.microsoft.com/office/drawing/2014/main" id="{49E38945-6D29-4FC3-BE38-B12E5C5157E8}"/>
+              </a:ext>
+            </a:extLst>
+          </p:cNvPr>
+          <p:cNvSpPr>
+            <a:spLocks xmlns:a="http://schemas.openxmlformats.org/drawingml/2006/main" noGrp="1"/>
+          </p:cNvSpPr>
+          <p:nvPr/>
+        </p:nvSpPr>
+        <p:spPr>
+          <a:xfrm xmlns:a="http://schemas.openxmlformats.org/drawingml/2006/main">
+            <a:off x="1238250" y="4295775"/>
+            <a:ext cx="4905375" cy="457200"/>
+          </a:xfrm>
+          <a:prstGeom xmlns:a="http://schemas.openxmlformats.org/drawingml/2006/main" prst="rect">
+            <a:avLst/>
+          </a:prstGeom>
+          <a:noFill xmlns:a="http://schemas.openxmlformats.org/drawingml/2006/main"/>
+          <a:ln xmlns:a="http://schemas.openxmlformats.org/drawingml/2006/main" w="0">
+            <a:noFill/>
+            <a:prstDash val="solid"/>
+          </a:ln>
+        </p:spPr>
+        <p:txBody>
+          <a:bodyPr xmlns:a="http://schemas.openxmlformats.org/drawingml/2006/main" wrap="square" lIns="0" tIns="0" rIns="0" bIns="0" anchor="t">
+            <a:normAutofit fontScale="100000"/>
+          </a:bodyPr>
+          <a:lstStyle xmlns:a="http://schemas.openxmlformats.org/drawingml/2006/main">
+            <a:defPPr algn="l">
+              <a:defRPr sz="1350" b="0">
+                <a:solidFill>
+                  <a:srgbClr val="FFFFFF"/>
+                </a:solidFill>
+                <a:latin typeface="Calibri"/>
+                <a:ea typeface="Calibri"/>
+                <a:cs typeface="Calibri"/>
+              </a:defRPr>
+            </a:defPPr>
+          </a:lstStyle>
+          <a:p xmlns:a="http://schemas.openxmlformats.org/drawingml/2006/main">
+            <a:pPr algn="l">
+              <a:defRPr sz="1350" b="0">
+                <a:solidFill>
+                  <a:srgbClr val="FFFFFF"/>
+                </a:solidFill>
+                <a:latin typeface="Calibri"/>
+                <a:ea typeface="Calibri"/>
+                <a:cs typeface="Calibri"/>
+              </a:defRPr>
+            </a:pPr>
+            <a:r>
+              <a:rPr sz="1350" b="0">
+                <a:solidFill>
+                  <a:srgbClr val="FFFFFF"/>
+                </a:solidFill>
+                <a:latin typeface="Calibri"/>
+                <a:ea typeface="Calibri"/>
+                <a:cs typeface="Calibri"/>
+              </a:rPr>
+              <a:t>Give clients and project teams a shared view of the proposed space.</a:t>
+            </a:r>
+          </a:p>
+        </p:txBody>
+      </p:sp>
+      <p:sp>
+        <p:nvSpPr>
+          <p:cNvPr id="11" name="">
+            <a:extLst xmlns:a="http://schemas.openxmlformats.org/drawingml/2006/main">
+              <a:ext uri="{FF2B5EF4-FFF2-40B4-BE49-F238E27FC236}">
+                <a16:creationId xmlns:a16="http://schemas.microsoft.com/office/drawing/2014/main" id="{986C0249-4557-4571-9966-0B25C472D235}"/>
+              </a:ext>
+            </a:extLst>
+          </p:cNvPr>
+          <p:cNvSpPr>
+            <a:spLocks xmlns:a="http://schemas.openxmlformats.org/drawingml/2006/main" noGrp="1"/>
+          </p:cNvSpPr>
+          <p:nvPr/>
+        </p:nvSpPr>
+        <p:spPr>
+          <a:xfrm xmlns:a="http://schemas.openxmlformats.org/drawingml/2006/main">
+            <a:off x="638175" y="4953000"/>
+            <a:ext cx="523875" cy="285750"/>
+          </a:xfrm>
+          <a:prstGeom xmlns:a="http://schemas.openxmlformats.org/drawingml/2006/main" prst="rect">
+            <a:avLst/>
+          </a:prstGeom>
+          <a:noFill xmlns:a="http://schemas.openxmlformats.org/drawingml/2006/main"/>
+          <a:ln xmlns:a="http://schemas.openxmlformats.org/drawingml/2006/main" w="0">
+            <a:noFill/>
+            <a:prstDash val="solid"/>
+          </a:ln>
+        </p:spPr>
+        <p:txBody>
+          <a:bodyPr xmlns:a="http://schemas.openxmlformats.org/drawingml/2006/main" wrap="square" lIns="0" tIns="0" rIns="0" bIns="0" anchor="t">
+            <a:normAutofit fontScale="100000"/>
+          </a:bodyPr>
+          <a:lstStyle xmlns:a="http://schemas.openxmlformats.org/drawingml/2006/main">
+            <a:defPPr algn="l">
+              <a:defRPr sz="1425" b="1">
+                <a:solidFill>
+                  <a:srgbClr val="E9795B"/>
+                </a:solidFill>
+                <a:latin typeface="Calibri"/>
+                <a:ea typeface="Calibri"/>
+                <a:cs typeface="Calibri"/>
+              </a:defRPr>
+            </a:defPPr>
+          </a:lstStyle>
+          <a:p xmlns:a="http://schemas.openxmlformats.org/drawingml/2006/main">
+            <a:pPr algn="l">
+              <a:defRPr sz="1425" b="1">
+                <a:solidFill>
+                  <a:srgbClr val="E9795B"/>
+                </a:solidFill>
+                <a:latin typeface="Calibri"/>
+                <a:ea typeface="Calibri"/>
+                <a:cs typeface="Calibri"/>
+              </a:defRPr>
+            </a:pPr>
+            <a:r>
+              <a:rPr sz="1425" b="1">
+                <a:solidFill>
+                  <a:srgbClr val="E9795B"/>
+                </a:solidFill>
+                <a:latin typeface="Calibri"/>
+                <a:ea typeface="Calibri"/>
+                <a:cs typeface="Calibri"/>
+              </a:rPr>
+              <a:t>03</a:t>
+            </a:r>
+          </a:p>
+        </p:txBody>
+      </p:sp>
+      <p:sp>
+        <p:nvSpPr>
+          <p:cNvPr id="12" name="">
+            <a:extLst xmlns:a="http://schemas.openxmlformats.org/drawingml/2006/main">
+              <a:ext uri="{FF2B5EF4-FFF2-40B4-BE49-F238E27FC236}">
+                <a16:creationId xmlns:a16="http://schemas.microsoft.com/office/drawing/2014/main" id="{FA08C4BA-3B31-43EB-8421-3D0B9444407B}"/>
+              </a:ext>
+            </a:extLst>
+          </p:cNvPr>
+          <p:cNvSpPr>
+            <a:spLocks xmlns:a="http://schemas.openxmlformats.org/drawingml/2006/main" noGrp="1"/>
+          </p:cNvSpPr>
+          <p:nvPr/>
+        </p:nvSpPr>
+        <p:spPr>
+          <a:xfrm xmlns:a="http://schemas.openxmlformats.org/drawingml/2006/main">
+            <a:off x="1238250" y="4953000"/>
+            <a:ext cx="2714625" cy="209550"/>
+          </a:xfrm>
+          <a:prstGeom xmlns:a="http://schemas.openxmlformats.org/drawingml/2006/main" prst="rect">
+            <a:avLst/>
+          </a:prstGeom>
+          <a:noFill xmlns:a="http://schemas.openxmlformats.org/drawingml/2006/main"/>
+          <a:ln xmlns:a="http://schemas.openxmlformats.org/drawingml/2006/main" w="0">
+            <a:noFill/>
+            <a:prstDash val="solid"/>
+          </a:ln>
+        </p:spPr>
+        <p:txBody>
+          <a:bodyPr xmlns:a="http://schemas.openxmlformats.org/drawingml/2006/main" wrap="square" lIns="0" tIns="0" rIns="0" bIns="0" anchor="t">
+            <a:normAutofit fontScale="100000"/>
+          </a:bodyPr>
+          <a:lstStyle xmlns:a="http://schemas.openxmlformats.org/drawingml/2006/main">
+            <a:defPPr algn="l">
+              <a:defRPr sz="975" b="1">
+                <a:solidFill>
+                  <a:srgbClr val="A8C9B0"/>
+                </a:solidFill>
+                <a:latin typeface="Calibri"/>
+                <a:ea typeface="Calibri"/>
+                <a:cs typeface="Calibri"/>
+              </a:defRPr>
+            </a:defPPr>
+          </a:lstStyle>
+          <a:p xmlns:a="http://schemas.openxmlformats.org/drawingml/2006/main">
+            <a:pPr algn="l">
+              <a:defRPr sz="975" b="1">
+                <a:solidFill>
+                  <a:srgbClr val="A8C9B0"/>
+                </a:solidFill>
+                <a:latin typeface="Calibri"/>
+                <a:ea typeface="Calibri"/>
+                <a:cs typeface="Calibri"/>
+              </a:defRPr>
+            </a:pPr>
+            <a:r>
+              <a:rPr sz="975" b="1">
+                <a:solidFill>
+                  <a:srgbClr val="A8C9B0"/>
+                </a:solidFill>
+                <a:latin typeface="Calibri"/>
+                <a:ea typeface="Calibri"/>
+                <a:cs typeface="Calibri"/>
+              </a:rPr>
+              <a:t>RUN LOCALLY</a:t>
+            </a:r>
+          </a:p>
+        </p:txBody>
+      </p:sp>
+      <p:sp>
+        <p:nvSpPr>
+          <p:cNvPr id="13" name="">
+            <a:extLst xmlns:a="http://schemas.openxmlformats.org/drawingml/2006/main">
+              <a:ext uri="{FF2B5EF4-FFF2-40B4-BE49-F238E27FC236}">
+                <a16:creationId xmlns:a16="http://schemas.microsoft.com/office/drawing/2014/main" id="{E4F231D8-74CC-4B14-BA08-6FD2AFA42471}"/>
+              </a:ext>
+            </a:extLst>
+          </p:cNvPr>
+          <p:cNvSpPr>
+            <a:spLocks xmlns:a="http://schemas.openxmlformats.org/drawingml/2006/main" noGrp="1"/>
+          </p:cNvSpPr>
+          <p:nvPr/>
+        </p:nvSpPr>
+        <p:spPr>
+          <a:xfrm xmlns:a="http://schemas.openxmlformats.org/drawingml/2006/main">
+            <a:off x="1238250" y="5210175"/>
+            <a:ext cx="4905375" cy="457200"/>
+          </a:xfrm>
+          <a:prstGeom xmlns:a="http://schemas.openxmlformats.org/drawingml/2006/main" prst="rect">
+            <a:avLst/>
+          </a:prstGeom>
+          <a:noFill xmlns:a="http://schemas.openxmlformats.org/drawingml/2006/main"/>
+          <a:ln xmlns:a="http://schemas.openxmlformats.org/drawingml/2006/main" w="0">
+            <a:noFill/>
+            <a:prstDash val="solid"/>
+          </a:ln>
+        </p:spPr>
+        <p:txBody>
+          <a:bodyPr xmlns:a="http://schemas.openxmlformats.org/drawingml/2006/main" wrap="square" lIns="0" tIns="0" rIns="0" bIns="0" anchor="t">
+            <a:normAutofit fontScale="100000"/>
+          </a:bodyPr>
+          <a:lstStyle xmlns:a="http://schemas.openxmlformats.org/drawingml/2006/main">
+            <a:defPPr algn="l">
+              <a:defRPr sz="1350" b="0">
+                <a:solidFill>
+                  <a:srgbClr val="FFFFFF"/>
+                </a:solidFill>
+                <a:latin typeface="Calibri"/>
+                <a:ea typeface="Calibri"/>
+                <a:cs typeface="Calibri"/>
+              </a:defRPr>
+            </a:defPPr>
+          </a:lstStyle>
+          <a:p xmlns:a="http://schemas.openxmlformats.org/drawingml/2006/main">
+            <a:pPr algn="l">
+              <a:defRPr sz="1350" b="0">
+                <a:solidFill>
+                  <a:srgbClr val="FFFFFF"/>
+                </a:solidFill>
+                <a:latin typeface="Calibri"/>
+                <a:ea typeface="Calibri"/>
+                <a:cs typeface="Calibri"/>
+              </a:defRPr>
+            </a:pPr>
+            <a:r>
+              <a:rPr sz="1350" b="0">
+                <a:solidFill>
+                  <a:srgbClr val="FFFFFF"/>
+                </a:solidFill>
+                <a:latin typeface="Calibri"/>
+                <a:ea typeface="Calibri"/>
+                <a:cs typeface="Calibri"/>
+              </a:rPr>
+              <a:t>Explore bundled models in the browser without a cloud-rendering queue.</a:t>
+            </a:r>
+          </a:p>
+        </p:txBody>
+      </p:sp>
+      <p:sp>
+        <p:nvSpPr>
+          <p:cNvPr id="14" name="">
+            <a:extLst xmlns:a="http://schemas.openxmlformats.org/drawingml/2006/main">
+              <a:ext uri="{FF2B5EF4-FFF2-40B4-BE49-F238E27FC236}">
+                <a16:creationId xmlns:a16="http://schemas.microsoft.com/office/drawing/2014/main" id="{011F8776-31B2-4FCD-888D-D7E57BEDA766}"/>
+              </a:ext>
+            </a:extLst>
+          </p:cNvPr>
+          <p:cNvSpPr>
+            <a:spLocks xmlns:a="http://schemas.openxmlformats.org/drawingml/2006/main" noGrp="1"/>
+          </p:cNvSpPr>
+          <p:nvPr/>
+        </p:nvSpPr>
+        <p:spPr>
+          <a:xfrm xmlns:a="http://schemas.openxmlformats.org/drawingml/2006/main">
+            <a:off x="6934200" y="1323975"/>
+            <a:ext cx="4514850" cy="3952875"/>
+          </a:xfrm>
+          <a:prstGeom xmlns:a="http://schemas.openxmlformats.org/drawingml/2006/main" prst="roundRect">
+            <a:avLst>
+              <a:gd name="adj" fmla="val 1928"/>
+            </a:avLst>
+          </a:prstGeom>
+          <a:solidFill xmlns:a="http://schemas.openxmlformats.org/drawingml/2006/main">
+            <a:srgbClr val="214C3D"/>
+          </a:solidFill>
+          <a:ln xmlns:a="http://schemas.openxmlformats.org/drawingml/2006/main" w="0">
+            <a:noFill/>
+            <a:prstDash val="solid"/>
+          </a:ln>
+        </p:spPr>
+      </p:sp>
+      <p:sp>
+        <p:nvSpPr>
+          <p:cNvPr id="15" name="">
+            <a:extLst xmlns:a="http://schemas.openxmlformats.org/drawingml/2006/main">
+              <a:ext uri="{FF2B5EF4-FFF2-40B4-BE49-F238E27FC236}">
+                <a16:creationId xmlns:a16="http://schemas.microsoft.com/office/drawing/2014/main" id="{D82F5C3D-C236-4C57-93DA-FA25C6EAE311}"/>
+              </a:ext>
+            </a:extLst>
+          </p:cNvPr>
+          <p:cNvSpPr>
+            <a:spLocks xmlns:a="http://schemas.openxmlformats.org/drawingml/2006/main" noGrp="1"/>
+          </p:cNvSpPr>
+          <p:nvPr/>
+        </p:nvSpPr>
+        <p:spPr>
+          <a:xfrm xmlns:a="http://schemas.openxmlformats.org/drawingml/2006/main">
+            <a:off x="7277100" y="1724025"/>
+            <a:ext cx="3619500" cy="523875"/>
           </a:xfrm>
           <a:prstGeom xmlns:a="http://schemas.openxmlformats.org/drawingml/2006/main" prst="rect">
             <a:avLst/>
@@ -10749,7 +8325,7 @@
             <a:defPPr algn="l">
               <a:defRPr sz="1050" b="1">
                 <a:solidFill>
-                  <a:srgbClr val="B9D1BF"/>
+                  <a:srgbClr val="A8C9B0"/>
                 </a:solidFill>
                 <a:latin typeface="Calibri"/>
                 <a:ea typeface="Calibri"/>
@@ -10759,13 +8335,9 @@
           </a:lstStyle>
           <a:p xmlns:a="http://schemas.openxmlformats.org/drawingml/2006/main">
             <a:pPr algn="l">
-              <a:lnSpc>
-                <a:spcPct val="100000"/>
-              </a:lnSpc>
-              <a:buNone/>
               <a:defRPr sz="1050" b="1">
                 <a:solidFill>
-                  <a:srgbClr val="B9D1BF"/>
+                  <a:srgbClr val="A8C9B0"/>
                 </a:solidFill>
                 <a:latin typeface="Calibri"/>
                 <a:ea typeface="Calibri"/>
@@ -10775,97 +8347,20 @@
             <a:r>
               <a:rPr sz="1050" b="1">
                 <a:solidFill>
-                  <a:srgbClr val="B9D1BF"/>
+                  <a:srgbClr val="A8C9B0"/>
                 </a:solidFill>
                 <a:latin typeface="Calibri"/>
                 <a:ea typeface="Calibri"/>
                 <a:cs typeface="Calibri"/>
               </a:rPr>
-              <a:t>TRISHNA 3D</a:t>
-            </a:r>
-          </a:p>
-        </p:txBody>
-      </p:sp>
-      <p:sp>
-        <p:nvSpPr>
-          <p:cNvPr id="3" name="">
-            <a:extLst xmlns:a="http://schemas.openxmlformats.org/drawingml/2006/main">
-              <a:ext uri="{FF2B5EF4-FFF2-40B4-BE49-F238E27FC236}">
-                <a16:creationId xmlns:a16="http://schemas.microsoft.com/office/drawing/2014/main" id="{B40ADD9D-E209-4825-A413-BCBBBD094333}"/>
-              </a:ext>
-            </a:extLst>
-          </p:cNvPr>
-          <p:cNvSpPr>
-            <a:spLocks xmlns:a="http://schemas.openxmlformats.org/drawingml/2006/main" noGrp="1"/>
-          </p:cNvSpPr>
-          <p:nvPr/>
-        </p:nvSpPr>
-        <p:spPr>
-          <a:xfrm xmlns:a="http://schemas.openxmlformats.org/drawingml/2006/main">
-            <a:off x="628650" y="1562100"/>
-            <a:ext cx="6572250" cy="1257300"/>
-          </a:xfrm>
-          <a:prstGeom xmlns:a="http://schemas.openxmlformats.org/drawingml/2006/main" prst="rect">
-            <a:avLst/>
-          </a:prstGeom>
-          <a:noFill xmlns:a="http://schemas.openxmlformats.org/drawingml/2006/main"/>
-          <a:ln xmlns:a="http://schemas.openxmlformats.org/drawingml/2006/main" w="0">
-            <a:noFill/>
-            <a:prstDash val="solid"/>
-          </a:ln>
-        </p:spPr>
-        <p:txBody>
-          <a:bodyPr xmlns:a="http://schemas.openxmlformats.org/drawingml/2006/main" wrap="square" lIns="0" tIns="0" rIns="0" bIns="0" anchor="t">
-            <a:normAutofit fontScale="100000"/>
-          </a:bodyPr>
-          <a:lstStyle xmlns:a="http://schemas.openxmlformats.org/drawingml/2006/main">
-            <a:defPPr algn="l">
-              <a:defRPr sz="3525" b="1">
-                <a:solidFill>
-                  <a:srgbClr val="FFFFFF"/>
-                </a:solidFill>
-                <a:latin typeface="Calibri"/>
-                <a:ea typeface="Calibri"/>
-                <a:cs typeface="Calibri"/>
-              </a:defRPr>
-            </a:defPPr>
-          </a:lstStyle>
-          <a:p xmlns:a="http://schemas.openxmlformats.org/drawingml/2006/main">
-            <a:pPr algn="l">
-              <a:lnSpc>
-                <a:spcPct val="98000"/>
-              </a:lnSpc>
-              <a:buNone/>
-              <a:defRPr sz="3525" b="1">
-                <a:solidFill>
-                  <a:srgbClr val="FFFFFF"/>
-                </a:solidFill>
-                <a:latin typeface="Calibri"/>
-                <a:ea typeface="Calibri"/>
-                <a:cs typeface="Calibri"/>
-              </a:defRPr>
-            </a:pPr>
-            <a:r>
-              <a:rPr sz="3525" b="1">
-                <a:solidFill>
-                  <a:srgbClr val="FFFFFF"/>
-                </a:solidFill>
-                <a:latin typeface="Calibri"/>
-                <a:ea typeface="Calibri"/>
-                <a:cs typeface="Calibri"/>
-              </a:rPr>
-              <a:t>Let people experience</a:t>
+              <a:t>SUSTAINABILITY</a:t>
             </a:r>
           </a:p>
           <a:p xmlns:a="http://schemas.openxmlformats.org/drawingml/2006/main">
             <a:pPr algn="l">
-              <a:lnSpc>
-                <a:spcPct val="98000"/>
-              </a:lnSpc>
-              <a:buNone/>
-              <a:defRPr sz="3525" b="1">
-                <a:solidFill>
-                  <a:srgbClr val="FFFFFF"/>
+              <a:defRPr sz="1050" b="1">
+                <a:solidFill>
+                  <a:srgbClr val="A8C9B0"/>
                 </a:solidFill>
                 <a:latin typeface="Calibri"/>
                 <a:ea typeface="Calibri"/>
@@ -10873,348 +8368,25 @@
               </a:defRPr>
             </a:pPr>
             <a:r>
-              <a:rPr sz="3525" b="1">
-                <a:solidFill>
-                  <a:srgbClr val="FFFFFF"/>
+              <a:rPr sz="1050" b="1">
+                <a:solidFill>
+                  <a:srgbClr val="A8C9B0"/>
                 </a:solidFill>
                 <a:latin typeface="Calibri"/>
                 <a:ea typeface="Calibri"/>
                 <a:cs typeface="Calibri"/>
               </a:rPr>
-              <a:t>the space before it exists.</a:t>
+              <a:t>OPPORTUNITY</a:t>
             </a:r>
           </a:p>
         </p:txBody>
       </p:sp>
-      <p:sp>
-        <p:nvSpPr>
-          <p:cNvPr id="4" name="">
-            <a:extLst xmlns:a="http://schemas.openxmlformats.org/drawingml/2006/main">
-              <a:ext uri="{FF2B5EF4-FFF2-40B4-BE49-F238E27FC236}">
-                <a16:creationId xmlns:a16="http://schemas.microsoft.com/office/drawing/2014/main" id="{DB60E05F-D07E-451D-AA29-7E05C82AEDE6}"/>
-              </a:ext>
-            </a:extLst>
-          </p:cNvPr>
-          <p:cNvSpPr>
-            <a:spLocks xmlns:a="http://schemas.openxmlformats.org/drawingml/2006/main" noGrp="1"/>
-          </p:cNvSpPr>
-          <p:nvPr/>
-        </p:nvSpPr>
-        <p:spPr>
-          <a:xfrm xmlns:a="http://schemas.openxmlformats.org/drawingml/2006/main">
-            <a:off x="647700" y="3133725"/>
-            <a:ext cx="5953125" cy="533400"/>
-          </a:xfrm>
-          <a:prstGeom xmlns:a="http://schemas.openxmlformats.org/drawingml/2006/main" prst="rect">
-            <a:avLst/>
-          </a:prstGeom>
-          <a:noFill xmlns:a="http://schemas.openxmlformats.org/drawingml/2006/main"/>
-          <a:ln xmlns:a="http://schemas.openxmlformats.org/drawingml/2006/main" w="0">
-            <a:noFill/>
-            <a:prstDash val="solid"/>
-          </a:ln>
-        </p:spPr>
-        <p:txBody>
-          <a:bodyPr xmlns:a="http://schemas.openxmlformats.org/drawingml/2006/main" wrap="square" lIns="0" tIns="0" rIns="0" bIns="0" anchor="t">
-            <a:normAutofit fontScale="100000"/>
-          </a:bodyPr>
-          <a:lstStyle xmlns:a="http://schemas.openxmlformats.org/drawingml/2006/main">
-            <a:defPPr algn="l">
-              <a:defRPr sz="1650" b="0">
-                <a:solidFill>
-                  <a:srgbClr val="D3E2D6"/>
-                </a:solidFill>
-                <a:latin typeface="Calibri"/>
-                <a:ea typeface="Calibri"/>
-                <a:cs typeface="Calibri"/>
-              </a:defRPr>
-            </a:defPPr>
-          </a:lstStyle>
-          <a:p xmlns:a="http://schemas.openxmlformats.org/drawingml/2006/main">
-            <a:pPr algn="l">
-              <a:lnSpc>
-                <a:spcPct val="100000"/>
-              </a:lnSpc>
-              <a:buNone/>
-              <a:defRPr sz="1650" b="0">
-                <a:solidFill>
-                  <a:srgbClr val="D3E2D6"/>
-                </a:solidFill>
-                <a:latin typeface="Calibri"/>
-                <a:ea typeface="Calibri"/>
-                <a:cs typeface="Calibri"/>
-              </a:defRPr>
-            </a:pPr>
-            <a:r>
-              <a:rPr sz="1650" b="0">
-                <a:solidFill>
-                  <a:srgbClr val="D3E2D6"/>
-                </a:solidFill>
-                <a:latin typeface="Calibri"/>
-                <a:ea typeface="Calibri"/>
-                <a:cs typeface="Calibri"/>
-              </a:rPr>
-              <a:t>A 2D home plan becomes a multi-storey place to explore.</a:t>
-            </a:r>
-          </a:p>
-        </p:txBody>
-      </p:sp>
-      <p:sp>
-        <p:nvSpPr>
-          <p:cNvPr id="5" name="">
-            <a:extLst xmlns:a="http://schemas.openxmlformats.org/drawingml/2006/main">
-              <a:ext uri="{FF2B5EF4-FFF2-40B4-BE49-F238E27FC236}">
-                <a16:creationId xmlns:a16="http://schemas.microsoft.com/office/drawing/2014/main" id="{EC30D26A-F336-4997-956E-50598277C228}"/>
-              </a:ext>
-            </a:extLst>
-          </p:cNvPr>
-          <p:cNvSpPr>
-            <a:spLocks xmlns:a="http://schemas.openxmlformats.org/drawingml/2006/main" noGrp="1"/>
-          </p:cNvSpPr>
-          <p:nvPr/>
-        </p:nvSpPr>
-        <p:spPr>
-          <a:xfrm xmlns:a="http://schemas.openxmlformats.org/drawingml/2006/main">
-            <a:off x="647700" y="4076700"/>
-            <a:ext cx="514350" cy="38100"/>
-          </a:xfrm>
-          <a:prstGeom xmlns:a="http://schemas.openxmlformats.org/drawingml/2006/main" prst="rect">
-            <a:avLst/>
-          </a:prstGeom>
-          <a:solidFill xmlns:a="http://schemas.openxmlformats.org/drawingml/2006/main">
-            <a:srgbClr val="E9795B"/>
-          </a:solidFill>
-          <a:ln xmlns:a="http://schemas.openxmlformats.org/drawingml/2006/main" w="0">
-            <a:noFill/>
-            <a:prstDash val="solid"/>
-          </a:ln>
-        </p:spPr>
-      </p:sp>
-      <p:sp>
-        <p:nvSpPr>
-          <p:cNvPr id="6" name="">
-            <a:extLst xmlns:a="http://schemas.openxmlformats.org/drawingml/2006/main">
-              <a:ext uri="{FF2B5EF4-FFF2-40B4-BE49-F238E27FC236}">
-                <a16:creationId xmlns:a16="http://schemas.microsoft.com/office/drawing/2014/main" id="{6A36FB51-E940-4E25-BE39-27D30178ECC3}"/>
-              </a:ext>
-            </a:extLst>
-          </p:cNvPr>
-          <p:cNvSpPr>
-            <a:spLocks xmlns:a="http://schemas.openxmlformats.org/drawingml/2006/main" noGrp="1"/>
-          </p:cNvSpPr>
-          <p:nvPr/>
-        </p:nvSpPr>
-        <p:spPr>
-          <a:xfrm xmlns:a="http://schemas.openxmlformats.org/drawingml/2006/main">
-            <a:off x="647700" y="4419600"/>
-            <a:ext cx="4000500" cy="371475"/>
-          </a:xfrm>
-          <a:prstGeom xmlns:a="http://schemas.openxmlformats.org/drawingml/2006/main" prst="rect">
-            <a:avLst/>
-          </a:prstGeom>
-          <a:noFill xmlns:a="http://schemas.openxmlformats.org/drawingml/2006/main"/>
-          <a:ln xmlns:a="http://schemas.openxmlformats.org/drawingml/2006/main" w="0">
-            <a:noFill/>
-            <a:prstDash val="solid"/>
-          </a:ln>
-        </p:spPr>
-        <p:txBody>
-          <a:bodyPr xmlns:a="http://schemas.openxmlformats.org/drawingml/2006/main" wrap="square" lIns="0" tIns="0" rIns="0" bIns="0" anchor="t">
-            <a:normAutofit fontScale="100000"/>
-          </a:bodyPr>
-          <a:lstStyle xmlns:a="http://schemas.openxmlformats.org/drawingml/2006/main">
-            <a:defPPr algn="l">
-              <a:defRPr sz="1950" b="1">
-                <a:solidFill>
-                  <a:srgbClr val="FFFFFF"/>
-                </a:solidFill>
-                <a:latin typeface="Calibri"/>
-                <a:ea typeface="Calibri"/>
-                <a:cs typeface="Calibri"/>
-              </a:defRPr>
-            </a:defPPr>
-          </a:lstStyle>
-          <a:p xmlns:a="http://schemas.openxmlformats.org/drawingml/2006/main">
-            <a:pPr algn="l">
-              <a:lnSpc>
-                <a:spcPct val="100000"/>
-              </a:lnSpc>
-              <a:buNone/>
-              <a:defRPr sz="1950" b="1">
-                <a:solidFill>
-                  <a:srgbClr val="FFFFFF"/>
-                </a:solidFill>
-                <a:latin typeface="Calibri"/>
-                <a:ea typeface="Calibri"/>
-                <a:cs typeface="Calibri"/>
-              </a:defRPr>
-            </a:pPr>
-            <a:r>
-              <a:rPr sz="1950" b="1">
-                <a:solidFill>
-                  <a:srgbClr val="FFFFFF"/>
-                </a:solidFill>
-                <a:latin typeface="Calibri"/>
-                <a:ea typeface="Calibri"/>
-                <a:cs typeface="Calibri"/>
-              </a:rPr>
-              <a:t>Open the live demo</a:t>
-            </a:r>
-          </a:p>
-        </p:txBody>
-      </p:sp>
-      <p:sp>
-        <p:nvSpPr>
-          <p:cNvPr id="7" name="">
-            <a:extLst xmlns:a="http://schemas.openxmlformats.org/drawingml/2006/main">
-              <a:ext uri="{FF2B5EF4-FFF2-40B4-BE49-F238E27FC236}">
-                <a16:creationId xmlns:a16="http://schemas.microsoft.com/office/drawing/2014/main" id="{9921350A-A17D-4D0D-A698-258B1A18BC47}"/>
-              </a:ext>
-            </a:extLst>
-          </p:cNvPr>
-          <p:cNvSpPr>
-            <a:spLocks xmlns:a="http://schemas.openxmlformats.org/drawingml/2006/main" noGrp="1"/>
-          </p:cNvSpPr>
-          <p:nvPr/>
-        </p:nvSpPr>
-        <p:spPr>
-          <a:xfrm xmlns:a="http://schemas.openxmlformats.org/drawingml/2006/main">
-            <a:off x="647700" y="4914900"/>
-            <a:ext cx="4667250" cy="247650"/>
-          </a:xfrm>
-          <a:prstGeom xmlns:a="http://schemas.openxmlformats.org/drawingml/2006/main" prst="rect">
-            <a:avLst/>
-          </a:prstGeom>
-          <a:noFill xmlns:a="http://schemas.openxmlformats.org/drawingml/2006/main"/>
-          <a:ln xmlns:a="http://schemas.openxmlformats.org/drawingml/2006/main" w="0">
-            <a:noFill/>
-            <a:prstDash val="solid"/>
-          </a:ln>
-        </p:spPr>
-        <p:txBody>
-          <a:bodyPr xmlns:a="http://schemas.openxmlformats.org/drawingml/2006/main" wrap="square" lIns="0" tIns="0" rIns="0" bIns="0" anchor="t">
-            <a:normAutofit fontScale="100000"/>
-          </a:bodyPr>
-          <a:lstStyle xmlns:a="http://schemas.openxmlformats.org/drawingml/2006/main">
-            <a:defPPr algn="l">
-              <a:defRPr sz="1275" b="0">
-                <a:solidFill>
-                  <a:srgbClr val="B9D1BF"/>
-                </a:solidFill>
-                <a:latin typeface="Calibri"/>
-                <a:ea typeface="Calibri"/>
-                <a:cs typeface="Calibri"/>
-              </a:defRPr>
-            </a:defPPr>
-          </a:lstStyle>
-          <a:p xmlns:a="http://schemas.openxmlformats.org/drawingml/2006/main">
-            <a:pPr algn="l">
-              <a:lnSpc>
-                <a:spcPct val="100000"/>
-              </a:lnSpc>
-              <a:buNone/>
-              <a:defRPr sz="1275" b="0">
-                <a:solidFill>
-                  <a:srgbClr val="B9D1BF"/>
-                </a:solidFill>
-                <a:latin typeface="Calibri"/>
-                <a:ea typeface="Calibri"/>
-                <a:cs typeface="Calibri"/>
-              </a:defRPr>
-            </a:pPr>
-            <a:r>
-              <a:rPr sz="1275" b="0">
-                <a:solidFill>
-                  <a:srgbClr val="B9D1BF"/>
-                </a:solidFill>
-                <a:latin typeface="Calibri"/>
-                <a:ea typeface="Calibri"/>
-                <a:cs typeface="Calibri"/>
-              </a:rPr>
-              <a:t>github.com/Deonjohny/Trishna-3D</a:t>
-            </a:r>
-          </a:p>
-        </p:txBody>
-      </p:sp>
-      <p:sp>
-        <p:nvSpPr>
-          <p:cNvPr id="8" name="">
-            <a:extLst xmlns:a="http://schemas.openxmlformats.org/drawingml/2006/main">
-              <a:ext uri="{FF2B5EF4-FFF2-40B4-BE49-F238E27FC236}">
-                <a16:creationId xmlns:a16="http://schemas.microsoft.com/office/drawing/2014/main" id="{4A580218-2EFC-435A-9557-67C950B6C813}"/>
-              </a:ext>
-            </a:extLst>
-          </p:cNvPr>
-          <p:cNvSpPr>
-            <a:spLocks xmlns:a="http://schemas.openxmlformats.org/drawingml/2006/main" noGrp="1"/>
-          </p:cNvSpPr>
-          <p:nvPr/>
-        </p:nvSpPr>
-        <p:spPr>
-          <a:xfrm xmlns:a="http://schemas.openxmlformats.org/drawingml/2006/main">
-            <a:off x="647700" y="6219825"/>
-            <a:ext cx="7905750" cy="209550"/>
-          </a:xfrm>
-          <a:prstGeom xmlns:a="http://schemas.openxmlformats.org/drawingml/2006/main" prst="rect">
-            <a:avLst/>
-          </a:prstGeom>
-          <a:noFill xmlns:a="http://schemas.openxmlformats.org/drawingml/2006/main"/>
-          <a:ln xmlns:a="http://schemas.openxmlformats.org/drawingml/2006/main" w="0">
-            <a:noFill/>
-            <a:prstDash val="solid"/>
-          </a:ln>
-        </p:spPr>
-        <p:txBody>
-          <a:bodyPr xmlns:a="http://schemas.openxmlformats.org/drawingml/2006/main" wrap="square" lIns="0" tIns="0" rIns="0" bIns="0" anchor="t">
-            <a:normAutofit fontScale="100000"/>
-          </a:bodyPr>
-          <a:lstStyle xmlns:a="http://schemas.openxmlformats.org/drawingml/2006/main">
-            <a:defPPr algn="l">
-              <a:defRPr sz="975" b="0">
-                <a:solidFill>
-                  <a:srgbClr val="B9D1BF"/>
-                </a:solidFill>
-                <a:latin typeface="Calibri"/>
-                <a:ea typeface="Calibri"/>
-                <a:cs typeface="Calibri"/>
-              </a:defRPr>
-            </a:defPPr>
-          </a:lstStyle>
-          <a:p xmlns:a="http://schemas.openxmlformats.org/drawingml/2006/main">
-            <a:pPr algn="l">
-              <a:lnSpc>
-                <a:spcPct val="100000"/>
-              </a:lnSpc>
-              <a:buNone/>
-              <a:defRPr sz="975" b="0">
-                <a:solidFill>
-                  <a:srgbClr val="B9D1BF"/>
-                </a:solidFill>
-                <a:latin typeface="Calibri"/>
-                <a:ea typeface="Calibri"/>
-                <a:cs typeface="Calibri"/>
-              </a:defRPr>
-            </a:pPr>
-            <a:r>
-              <a:rPr sz="975" b="0">
-                <a:solidFill>
-                  <a:srgbClr val="B9D1BF"/>
-                </a:solidFill>
-                <a:latin typeface="Calibri"/>
-                <a:ea typeface="Calibri"/>
-                <a:cs typeface="Calibri"/>
-              </a:rPr>
-              <a:t>Prototype built at DevDay Exchange Community Hackathon · Kochi · 11 Oct 2026</a:t>
-            </a:r>
-          </a:p>
-        </p:txBody>
-      </p:sp>
       <p:pic>
         <p:nvPicPr>
-          <p:cNvPr id="9" name="">
-            <a:extLst xmlns:a="http://schemas.openxmlformats.org/drawingml/2006/main">
-              <a:ext uri="{FF2B5EF4-FFF2-40B4-BE49-F238E27FC236}">
-                <a16:creationId xmlns:a16="http://schemas.microsoft.com/office/drawing/2014/main" id="{A1DBAA58-14E9-4C05-90B4-C2C6A808FB25}"/>
+          <p:cNvPr id="16" name="">
+            <a:extLst xmlns:a="http://schemas.openxmlformats.org/drawingml/2006/main">
+              <a:ext uri="{FF2B5EF4-FFF2-40B4-BE49-F238E27FC236}">
+                <a16:creationId xmlns:a16="http://schemas.microsoft.com/office/drawing/2014/main" id="{DC4E3341-FCF6-426C-B144-736E4B9878B2}"/>
               </a:ext>
             </a:extLst>
           </p:cNvPr>
@@ -11224,10 +8396,10 @@
           <p:nvPr/>
         </p:nvPicPr>
         <p:blipFill>
-          <a:blip xmlns:r="http://schemas.openxmlformats.org/officeDocument/2006/relationships" xmlns:a="http://schemas.openxmlformats.org/drawingml/2006/main" r:embed="R97f1ad0f3e004a81">
+          <a:blip xmlns:r="http://schemas.openxmlformats.org/officeDocument/2006/relationships" xmlns:a="http://schemas.openxmlformats.org/drawingml/2006/main" r:embed="R9808ba69e420424d">
             <a:extLst>
               <a:ext uri="{96DAC541-7B7A-43D3-8B79-37D633B846F1}">
-                <asvg:svgBlip xmlns:asvg="http://schemas.microsoft.com/office/drawing/2016/SVG/main" r:embed="Rec213001b3c74c96"/>
+                <asvg:svgBlip xmlns:asvg="http://schemas.microsoft.com/office/drawing/2016/SVG/main" r:embed="R89a81d859316420f"/>
               </a:ext>
             </a:extLst>
           </a:blip>
@@ -11235,18 +8407,156 @@
         </p:blipFill>
         <p:spPr>
           <a:xfrm xmlns:a="http://schemas.openxmlformats.org/drawingml/2006/main">
-            <a:off x="6629400" y="771525"/>
-            <a:ext cx="5048250" cy="5029200"/>
+            <a:off x="7239000" y="2228850"/>
+            <a:ext cx="3905250" cy="2905125"/>
           </a:xfrm>
           <a:prstGeom xmlns:a="http://schemas.openxmlformats.org/drawingml/2006/main" prst="rect">
             <a:avLst/>
           </a:prstGeom>
         </p:spPr>
       </p:pic>
+      <p:sp>
+        <p:nvSpPr>
+          <p:cNvPr id="17" name="">
+            <a:extLst xmlns:a="http://schemas.openxmlformats.org/drawingml/2006/main">
+              <a:ext uri="{FF2B5EF4-FFF2-40B4-BE49-F238E27FC236}">
+                <a16:creationId xmlns:a16="http://schemas.microsoft.com/office/drawing/2014/main" id="{F952EC71-B453-4010-B534-6C41DDB4BA0A}"/>
+              </a:ext>
+            </a:extLst>
+          </p:cNvPr>
+          <p:cNvSpPr>
+            <a:spLocks xmlns:a="http://schemas.openxmlformats.org/drawingml/2006/main" noGrp="1"/>
+          </p:cNvSpPr>
+          <p:nvPr/>
+        </p:nvSpPr>
+        <p:spPr>
+          <a:xfrm xmlns:a="http://schemas.openxmlformats.org/drawingml/2006/main">
+            <a:off x="628650" y="6067425"/>
+            <a:ext cx="6381750" cy="209550"/>
+          </a:xfrm>
+          <a:prstGeom xmlns:a="http://schemas.openxmlformats.org/drawingml/2006/main" prst="rect">
+            <a:avLst/>
+          </a:prstGeom>
+          <a:noFill xmlns:a="http://schemas.openxmlformats.org/drawingml/2006/main"/>
+          <a:ln xmlns:a="http://schemas.openxmlformats.org/drawingml/2006/main" w="0">
+            <a:noFill/>
+            <a:prstDash val="solid"/>
+          </a:ln>
+        </p:spPr>
+        <p:txBody>
+          <a:bodyPr xmlns:a="http://schemas.openxmlformats.org/drawingml/2006/main" wrap="square" lIns="0" tIns="0" rIns="0" bIns="0" anchor="t">
+            <a:normAutofit fontScale="100000"/>
+          </a:bodyPr>
+          <a:lstStyle xmlns:a="http://schemas.openxmlformats.org/drawingml/2006/main">
+            <a:defPPr algn="l">
+              <a:defRPr sz="1125" b="1">
+                <a:solidFill>
+                  <a:srgbClr val="FFFFFF"/>
+                </a:solidFill>
+                <a:latin typeface="Calibri"/>
+                <a:ea typeface="Calibri"/>
+                <a:cs typeface="Calibri"/>
+              </a:defRPr>
+            </a:defPPr>
+          </a:lstStyle>
+          <a:p xmlns:a="http://schemas.openxmlformats.org/drawingml/2006/main">
+            <a:pPr algn="l">
+              <a:defRPr sz="1125" b="1">
+                <a:solidFill>
+                  <a:srgbClr val="FFFFFF"/>
+                </a:solidFill>
+                <a:latin typeface="Calibri"/>
+                <a:ea typeface="Calibri"/>
+                <a:cs typeface="Calibri"/>
+              </a:defRPr>
+            </a:pPr>
+            <a:r>
+              <a:rPr sz="1125" b="1">
+                <a:solidFill>
+                  <a:srgbClr val="FFFFFF"/>
+                </a:solidFill>
+                <a:latin typeface="Calibri"/>
+                <a:ea typeface="Calibri"/>
+                <a:cs typeface="Calibri"/>
+              </a:rPr>
+              <a:t>Potential contribution, not a measured impact</a:t>
+            </a:r>
+          </a:p>
+        </p:txBody>
+      </p:sp>
+      <p:sp>
+        <p:nvSpPr>
+          <p:cNvPr id="18" name="">
+            <a:extLst xmlns:a="http://schemas.openxmlformats.org/drawingml/2006/main">
+              <a:ext uri="{FF2B5EF4-FFF2-40B4-BE49-F238E27FC236}">
+                <a16:creationId xmlns:a16="http://schemas.microsoft.com/office/drawing/2014/main" id="{42245FAE-FD8F-47FA-8591-1DCA272EA55D}"/>
+              </a:ext>
+            </a:extLst>
+          </p:cNvPr>
+          <p:cNvSpPr>
+            <a:spLocks xmlns:a="http://schemas.openxmlformats.org/drawingml/2006/main" noGrp="1"/>
+          </p:cNvSpPr>
+          <p:nvPr/>
+        </p:nvSpPr>
+        <p:spPr>
+          <a:xfrm xmlns:a="http://schemas.openxmlformats.org/drawingml/2006/main">
+            <a:off x="628650" y="6353175"/>
+            <a:ext cx="8763000" cy="200025"/>
+          </a:xfrm>
+          <a:prstGeom xmlns:a="http://schemas.openxmlformats.org/drawingml/2006/main" prst="rect">
+            <a:avLst/>
+          </a:prstGeom>
+          <a:noFill xmlns:a="http://schemas.openxmlformats.org/drawingml/2006/main"/>
+          <a:ln xmlns:a="http://schemas.openxmlformats.org/drawingml/2006/main" w="0">
+            <a:noFill/>
+            <a:prstDash val="solid"/>
+          </a:ln>
+        </p:spPr>
+        <p:txBody>
+          <a:bodyPr xmlns:a="http://schemas.openxmlformats.org/drawingml/2006/main" wrap="square" lIns="0" tIns="0" rIns="0" bIns="0" anchor="t">
+            <a:normAutofit fontScale="100000"/>
+          </a:bodyPr>
+          <a:lstStyle xmlns:a="http://schemas.openxmlformats.org/drawingml/2006/main">
+            <a:defPPr algn="l">
+              <a:defRPr sz="1050" b="0">
+                <a:solidFill>
+                  <a:srgbClr val="B9D1BF"/>
+                </a:solidFill>
+                <a:latin typeface="Calibri"/>
+                <a:ea typeface="Calibri"/>
+                <a:cs typeface="Calibri"/>
+              </a:defRPr>
+            </a:defPPr>
+          </a:lstStyle>
+          <a:p xmlns:a="http://schemas.openxmlformats.org/drawingml/2006/main">
+            <a:pPr algn="l">
+              <a:defRPr sz="1050" b="0">
+                <a:solidFill>
+                  <a:srgbClr val="B9D1BF"/>
+                </a:solidFill>
+                <a:latin typeface="Calibri"/>
+                <a:ea typeface="Calibri"/>
+                <a:cs typeface="Calibri"/>
+              </a:defRPr>
+            </a:pPr>
+            <a:r>
+              <a:rPr sz="1050" b="0">
+                <a:solidFill>
+                  <a:srgbClr val="B9D1BF"/>
+                </a:solidFill>
+                <a:latin typeface="Calibri"/>
+                <a:ea typeface="Calibri"/>
+                <a:cs typeface="Calibri"/>
+              </a:rPr>
+              <a:t>This prototype does not yet calculate material, energy or carbon savings.</a:t>
+            </a:r>
+          </a:p>
+        </p:txBody>
+      </p:sp>
     </p:spTree>
     <p:extLst>
       <p:ext uri="{BB962C8B-B14F-4D97-AF65-F5344CB8AC3E}">
-        <p14:creationId xmlns:p14="http://schemas.microsoft.com/office/powerpoint/2010/main" val="1197752102"/>
+        <p14:creationId xmlns:p14="http://schemas.microsoft.com/office/powerpoint/2010/main" val="96809447"/>
       </p:ext>
     </p:extLst>
   </p:cSld>

--- a/public/Trishna 3D Pitch Deck.pptx
+++ b/public/Trishna 3D Pitch Deck.pptx
@@ -2,17 +2,18 @@
 <file path=ppt/presentation.xml><?xml version="1.0" encoding="utf-8"?>
 <p:presentation xmlns:p="http://schemas.openxmlformats.org/presentationml/2006/main">
   <p:sldMasterIdLst>
-    <p:sldMasterId xmlns:r="http://schemas.openxmlformats.org/officeDocument/2006/relationships" id="2147483648" r:id="R166a2b10c7924b86"/>
+    <p:sldMasterId xmlns:r="http://schemas.openxmlformats.org/officeDocument/2006/relationships" id="2147483648" r:id="Ra3e428b645584f7f"/>
   </p:sldMasterIdLst>
   <p:notesMasterIdLst>
-    <p:notesMasterId xmlns:r="http://schemas.openxmlformats.org/officeDocument/2006/relationships" r:id="R3eced43bc8374478"/>
+    <p:notesMasterId xmlns:r="http://schemas.openxmlformats.org/officeDocument/2006/relationships" r:id="Rbbb966ede63f45b7"/>
   </p:notesMasterIdLst>
   <p:sldIdLst>
-    <p:sldId xmlns:r="http://schemas.openxmlformats.org/officeDocument/2006/relationships" id="256" r:id="R7e13d094800948a8"/>
-    <p:sldId xmlns:r="http://schemas.openxmlformats.org/officeDocument/2006/relationships" id="257" r:id="R38cf708bcedd406c"/>
-    <p:sldId xmlns:r="http://schemas.openxmlformats.org/officeDocument/2006/relationships" id="258" r:id="R88207dcf0f3f4ad3"/>
-    <p:sldId xmlns:r="http://schemas.openxmlformats.org/officeDocument/2006/relationships" id="259" r:id="Recf7db76bc774e25"/>
-    <p:sldId xmlns:r="http://schemas.openxmlformats.org/officeDocument/2006/relationships" id="260" r:id="R58825fd221e74f14"/>
+    <p:sldId xmlns:r="http://schemas.openxmlformats.org/officeDocument/2006/relationships" id="256" r:id="Ra59f2ccb8ee14671"/>
+    <p:sldId xmlns:r="http://schemas.openxmlformats.org/officeDocument/2006/relationships" id="257" r:id="R2756d70bc0844661"/>
+    <p:sldId xmlns:r="http://schemas.openxmlformats.org/officeDocument/2006/relationships" id="258" r:id="R4f3e3216e19e4dd4"/>
+    <p:sldId xmlns:r="http://schemas.openxmlformats.org/officeDocument/2006/relationships" id="259" r:id="R655442cc53264ca1"/>
+    <p:sldId xmlns:r="http://schemas.openxmlformats.org/officeDocument/2006/relationships" id="260" r:id="Rdc9c89ea4c394b85"/>
+    <p:sldId xmlns:r="http://schemas.openxmlformats.org/officeDocument/2006/relationships" id="261" r:id="R1bdab1eb23484893"/>
   </p:sldIdLst>
   <p:sldSz cx="12192000" cy="6858000"/>
   <p:notesSz cx="6858000" cy="9144000"/>
@@ -446,7 +447,7 @@
           <a:lstStyle xmlns:a="http://schemas.openxmlformats.org/drawingml/2006/main"/>
           <a:p xmlns:a="http://schemas.openxmlformats.org/drawingml/2006/main">
             <a:r>
-              <a:t>Introduce Trishna 3D in one sentence: it turns architectural drawings into 3D spaces people can explore. Set up the four parts of the pitch.</a:t>
+              <a:t>Introduce the product and its users. Trishna 3D turns architectural drawings into interactive 3D walkthroughs.</a:t>
             </a:r>
           </a:p>
           <a:p xmlns:a="http://schemas.openxmlformats.org/drawingml/2006/main">
@@ -526,7 +527,7 @@
           <a:lstStyle xmlns:a="http://schemas.openxmlformats.org/drawingml/2006/main"/>
           <a:p xmlns:a="http://schemas.openxmlformats.org/drawingml/2006/main">
             <a:r>
-              <a:t>Point to the sample drawing. It describes a 10 by 14 metre, three-floor home, but its depth and circulation must still be imagined from a flat view.</a:t>
+              <a:t>Use the three questions to make the problem concrete: a plan shows the arrangement, but the experience of depth, circulation and movement is harder to judge from lines alone.</a:t>
             </a:r>
           </a:p>
           <a:p xmlns:a="http://schemas.openxmlformats.org/drawingml/2006/main">
@@ -606,7 +607,7 @@
           <a:lstStyle xmlns:a="http://schemas.openxmlformats.org/drawingml/2006/main"/>
           <a:p xmlns:a="http://schemas.openxmlformats.org/drawingml/2006/main">
             <a:r>
-              <a:t>Describe the proposed solution as an end-to-end flow. PDF.js handles plan documents; Gemini is optional for live interpretation of uploads. Three.js renders the assembled model with orbit and first-person navigation.</a:t>
+              <a:t>The flow is upload, interpret, reconstruct and explore. PDF.js handles document parsing. Gemini Vision is optional for analyzing new uploads. The browser renders a procedural model, which viewers can orbit or navigate in first person.</a:t>
             </a:r>
           </a:p>
           <a:p xmlns:a="http://schemas.openxmlformats.org/drawingml/2006/main">
@@ -686,7 +687,7 @@
           <a:lstStyle xmlns:a="http://schemas.openxmlformats.org/drawingml/2006/main"/>
           <a:p xmlns:a="http://schemas.openxmlformats.org/drawingml/2006/main">
             <a:r>
-              <a:t>Separate what exists from what is planned. The current prototype runs in a browser and demonstrates a three-floor sample. DXF/IFC export and WebXR are future roadmap items. Custom-plan vision analysis depends on a Gemini key, and complex drawings need more validation.</a:t>
+              <a:t>Show the live model here. The sample home uses a 10 by 14 metre plan and three storeys. Its construction animation takes seven seconds. Viewers can orbit, switch to first-person and climb connected stairs. Custom-plan Gemini analysis requires an API key; the bundled samples do not.</a:t>
             </a:r>
           </a:p>
           <a:p xmlns:a="http://schemas.openxmlformats.org/drawingml/2006/main">
@@ -696,7 +697,7 @@
           </a:p>
           <a:p xmlns:a="http://schemas.openxmlformats.org/drawingml/2006/main">
             <a:r>
-              <a:t>Source: README.md; SUBMISSION.md; AI_USAGE.md</a:t>
+              <a:t>Source: README.md; src/components/BuildingViewer3D.tsx; src/data/sampleResidencePlan.ts; SUBMISSION.md</a:t>
             </a:r>
           </a:p>
         </p:txBody>
@@ -766,7 +767,7 @@
           <a:lstStyle xmlns:a="http://schemas.openxmlformats.org/drawingml/2006/main"/>
           <a:p xmlns:a="http://schemas.openxmlformats.org/drawingml/2006/main">
             <a:r>
-              <a:t>Frame sustainability honestly. Earlier spatial review may help teams identify layout changes before construction, but this prototype has not measured material, energy or carbon savings. Browser-based sample rendering avoids a dedicated cloud render queue; user devices still consume energy.</a:t>
+              <a:t>Be explicit that today’s input formats and sample are working prototype capabilities. DXF/IFC export and WebXR are roadmap items. To scale responsibly, test more drawing styles, improve extraction confidence and measure performance across devices.</a:t>
             </a:r>
           </a:p>
           <a:p xmlns:a="http://schemas.openxmlformats.org/drawingml/2006/main">
@@ -776,7 +777,87 @@
           </a:p>
           <a:p xmlns:a="http://schemas.openxmlformats.org/drawingml/2006/main">
             <a:r>
-              <a:t>Source: README.md; src/components/BuildingViewer3D.tsx; limitation disclosure authored for this pitch.</a:t>
+              <a:t>Source: README.md; SUBMISSION.md; previous pitch roadmap; limitation: hand-drawn parsing depends on Gemini quality and API availability</a:t>
+            </a:r>
+          </a:p>
+        </p:txBody>
+      </p:sp>
+      <p:sp>
+        <p:nvSpPr>
+          <p:cNvPr id="4" name="Slide Number Placeholder 3"/>
+          <p:cNvSpPr>
+            <a:spLocks xmlns:a="http://schemas.openxmlformats.org/drawingml/2006/main" noGrp="1"/>
+          </p:cNvSpPr>
+          <p:nvPr>
+            <p:ph type="sldNum" idx="5"/>
+          </p:nvPr>
+        </p:nvSpPr>
+        <p:spPr/>
+        <p:txBody>
+          <a:bodyPr xmlns:a="http://schemas.openxmlformats.org/drawingml/2006/main"/>
+          <a:lstStyle xmlns:a="http://schemas.openxmlformats.org/drawingml/2006/main"/>
+          <a:p xmlns:a="http://schemas.openxmlformats.org/drawingml/2006/main"/>
+        </p:txBody>
+      </p:sp>
+    </p:spTree>
+  </p:cSld>
+  <p:clrMapOvr>
+    <a:masterClrMapping xmlns:a="http://schemas.openxmlformats.org/drawingml/2006/main"/>
+  </p:clrMapOvr>
+</p:notes>
+</file>
+
+<file path=ppt/notesSlides/notesSlide6.xml><?xml version="1.0" encoding="utf-8"?>
+<p:notes xmlns:p="http://schemas.openxmlformats.org/presentationml/2006/main">
+  <p:cSld>
+    <p:spTree>
+      <p:nvGrpSpPr>
+        <p:cNvPr id="1" name=""/>
+        <p:cNvGrpSpPr/>
+        <p:nvPr/>
+      </p:nvGrpSpPr>
+      <p:grpSpPr>
+        <a:xfrm xmlns:a="http://schemas.openxmlformats.org/drawingml/2006/main"/>
+      </p:grpSpPr>
+      <p:sp>
+        <p:nvSpPr>
+          <p:cNvPr id="2" name="Slide Image Placeholder 1"/>
+          <p:cNvSpPr>
+            <a:spLocks xmlns:a="http://schemas.openxmlformats.org/drawingml/2006/main" noGrp="1"/>
+          </p:cNvSpPr>
+          <p:nvPr>
+            <p:ph type="sldImg" idx="0"/>
+          </p:nvPr>
+        </p:nvSpPr>
+        <p:spPr/>
+      </p:sp>
+      <p:sp>
+        <p:nvSpPr>
+          <p:cNvPr id="3" name="Notes Placeholder 2"/>
+          <p:cNvSpPr>
+            <a:spLocks xmlns:a="http://schemas.openxmlformats.org/drawingml/2006/main" noGrp="1"/>
+          </p:cNvSpPr>
+          <p:nvPr>
+            <p:ph type="body" idx="1"/>
+          </p:nvPr>
+        </p:nvSpPr>
+        <p:spPr/>
+        <p:txBody>
+          <a:bodyPr xmlns:a="http://schemas.openxmlformats.org/drawingml/2006/main"/>
+          <a:lstStyle xmlns:a="http://schemas.openxmlformats.org/drawingml/2006/main"/>
+          <a:p xmlns:a="http://schemas.openxmlformats.org/drawingml/2006/main">
+            <a:r>
+              <a:t>Describe sustainability as a plausible benefit, not a result already measured. A shared 3D view may help teams raise design questions earlier; no material, carbon or energy savings have been calculated. Local rendering avoids a cloud-render queue, but still uses device energy.</a:t>
+            </a:r>
+          </a:p>
+          <a:p xmlns:a="http://schemas.openxmlformats.org/drawingml/2006/main">
+            <a:r>
+              <a:t/>
+            </a:r>
+          </a:p>
+          <a:p xmlns:a="http://schemas.openxmlformats.org/drawingml/2006/main">
+            <a:r>
+              <a:t>Source: README.md; src/components/BuildingViewer3D.tsx; sustainability claims are explicitly qualified as potential</a:t>
             </a:r>
           </a:p>
         </p:txBody>
@@ -823,7 +904,7 @@
           <p:cNvPr id="3" name="Title">
             <a:extLst xmlns:a="http://schemas.openxmlformats.org/drawingml/2006/main">
               <a:ext uri="{FF2B5EF4-FFF2-40B4-BE49-F238E27FC236}">
-                <a16:creationId xmlns:a16="http://schemas.microsoft.com/office/drawing/2014/main" id="{6CBFC78B-E114-4D0F-8A76-6CBC001ECDF1}"/>
+                <a16:creationId xmlns:a16="http://schemas.microsoft.com/office/drawing/2014/main" id="{50120F2A-A057-49B2-B55A-B83001C07D1D}"/>
               </a:ext>
             </a:extLst>
           </p:cNvPr>
@@ -980,7 +1061,7 @@
           <p:cNvPr id="2" name="Subtitle">
             <a:extLst xmlns:a="http://schemas.openxmlformats.org/drawingml/2006/main">
               <a:ext uri="{FF2B5EF4-FFF2-40B4-BE49-F238E27FC236}">
-                <a16:creationId xmlns:a16="http://schemas.microsoft.com/office/drawing/2014/main" id="{F1773B8B-9127-42DA-81A3-8F892697297E}"/>
+                <a16:creationId xmlns:a16="http://schemas.microsoft.com/office/drawing/2014/main" id="{86D565B2-42B0-417E-8FFF-003125155A9A}"/>
               </a:ext>
             </a:extLst>
           </p:cNvPr>
@@ -1154,7 +1235,7 @@
           <p:cNvPr id="2" name="Section title">
             <a:extLst xmlns:a="http://schemas.openxmlformats.org/drawingml/2006/main">
               <a:ext uri="{FF2B5EF4-FFF2-40B4-BE49-F238E27FC236}">
-                <a16:creationId xmlns:a16="http://schemas.microsoft.com/office/drawing/2014/main" id="{86A99678-323C-4959-9FFD-B6C28345BCD0}"/>
+                <a16:creationId xmlns:a16="http://schemas.microsoft.com/office/drawing/2014/main" id="{F83E66D7-DAF7-450F-8B14-A37378B6D990}"/>
               </a:ext>
             </a:extLst>
           </p:cNvPr>
@@ -1328,7 +1409,7 @@
           <p:cNvPr id="3" name="Title">
             <a:extLst xmlns:a="http://schemas.openxmlformats.org/drawingml/2006/main">
               <a:ext uri="{FF2B5EF4-FFF2-40B4-BE49-F238E27FC236}">
-                <a16:creationId xmlns:a16="http://schemas.microsoft.com/office/drawing/2014/main" id="{DADD2401-A63E-4759-B4DA-EE8E24B88E84}"/>
+                <a16:creationId xmlns:a16="http://schemas.microsoft.com/office/drawing/2014/main" id="{24897DFA-6BB6-4E0A-83C1-779367414B74}"/>
               </a:ext>
             </a:extLst>
           </p:cNvPr>
@@ -1485,7 +1566,7 @@
           <p:cNvPr id="2" name="Body">
             <a:extLst xmlns:a="http://schemas.openxmlformats.org/drawingml/2006/main">
               <a:ext uri="{FF2B5EF4-FFF2-40B4-BE49-F238E27FC236}">
-                <a16:creationId xmlns:a16="http://schemas.microsoft.com/office/drawing/2014/main" id="{3A4A072B-51D8-43E2-A65D-63F7DD1388F7}"/>
+                <a16:creationId xmlns:a16="http://schemas.microsoft.com/office/drawing/2014/main" id="{8083924B-76EB-45AC-83FE-AEBAED20B1A7}"/>
               </a:ext>
             </a:extLst>
           </p:cNvPr>
@@ -1659,7 +1740,7 @@
           <p:cNvPr id="4" name="Title">
             <a:extLst xmlns:a="http://schemas.openxmlformats.org/drawingml/2006/main">
               <a:ext uri="{FF2B5EF4-FFF2-40B4-BE49-F238E27FC236}">
-                <a16:creationId xmlns:a16="http://schemas.microsoft.com/office/drawing/2014/main" id="{D03085BF-7E97-4EAF-8D17-1B25B74473E5}"/>
+                <a16:creationId xmlns:a16="http://schemas.microsoft.com/office/drawing/2014/main" id="{70F668E9-6DF8-4F55-8D89-7C373A27A412}"/>
               </a:ext>
             </a:extLst>
           </p:cNvPr>
@@ -1816,7 +1897,7 @@
           <p:cNvPr id="2" name="Left column">
             <a:extLst xmlns:a="http://schemas.openxmlformats.org/drawingml/2006/main">
               <a:ext uri="{FF2B5EF4-FFF2-40B4-BE49-F238E27FC236}">
-                <a16:creationId xmlns:a16="http://schemas.microsoft.com/office/drawing/2014/main" id="{8D97B266-588E-4B52-9A6A-4192A2985FB4}"/>
+                <a16:creationId xmlns:a16="http://schemas.microsoft.com/office/drawing/2014/main" id="{861096AD-DE92-45E5-807A-52C012E1446C}"/>
               </a:ext>
             </a:extLst>
           </p:cNvPr>
@@ -1973,7 +2054,7 @@
           <p:cNvPr id="3" name="Right column">
             <a:extLst xmlns:a="http://schemas.openxmlformats.org/drawingml/2006/main">
               <a:ext uri="{FF2B5EF4-FFF2-40B4-BE49-F238E27FC236}">
-                <a16:creationId xmlns:a16="http://schemas.microsoft.com/office/drawing/2014/main" id="{242FA125-627E-40BA-8FE7-9CB7986B3315}"/>
+                <a16:creationId xmlns:a16="http://schemas.microsoft.com/office/drawing/2014/main" id="{79A97637-E8FE-42C6-BF23-BDE8F417C41C}"/>
               </a:ext>
             </a:extLst>
           </p:cNvPr>
@@ -2147,7 +2228,7 @@
           <p:cNvPr id="3" name="Title">
             <a:extLst xmlns:a="http://schemas.openxmlformats.org/drawingml/2006/main">
               <a:ext uri="{FF2B5EF4-FFF2-40B4-BE49-F238E27FC236}">
-                <a16:creationId xmlns:a16="http://schemas.microsoft.com/office/drawing/2014/main" id="{BEB6E2A4-6724-4201-99DF-9EAA6D0A7E43}"/>
+                <a16:creationId xmlns:a16="http://schemas.microsoft.com/office/drawing/2014/main" id="{7721EBFC-5D7E-482F-A032-B18203E331D3}"/>
               </a:ext>
             </a:extLst>
           </p:cNvPr>
@@ -2304,7 +2385,7 @@
           <p:cNvPr id="2" name="Left column">
             <a:extLst xmlns:a="http://schemas.openxmlformats.org/drawingml/2006/main">
               <a:ext uri="{FF2B5EF4-FFF2-40B4-BE49-F238E27FC236}">
-                <a16:creationId xmlns:a16="http://schemas.microsoft.com/office/drawing/2014/main" id="{5F2DB10D-EEF2-42D6-8E66-668767A90680}"/>
+                <a16:creationId xmlns:a16="http://schemas.microsoft.com/office/drawing/2014/main" id="{3650575F-194F-4DE2-9496-7FF74D52AEA7}"/>
               </a:ext>
             </a:extLst>
           </p:cNvPr>
@@ -2499,12 +2580,12 @@
   </p:cSld>
   <p:clrMap bg1="lt1" tx1="dk1" bg2="lt2" tx2="dk2" accent1="accent1" accent2="accent2" accent3="accent3" accent4="accent4" accent5="accent5" accent6="accent6" hlink="hlink" folHlink="folHlink"/>
   <p:sldLayoutIdLst>
-    <p:sldLayoutId xmlns:r="http://schemas.openxmlformats.org/officeDocument/2006/relationships" id="2147483649" r:id="R5c3364644b7f45c4"/>
-    <p:sldLayoutId xmlns:r="http://schemas.openxmlformats.org/officeDocument/2006/relationships" id="2147483650" r:id="Rf912d4bd72d043ce"/>
-    <p:sldLayoutId xmlns:r="http://schemas.openxmlformats.org/officeDocument/2006/relationships" id="2147483651" r:id="R52e1ed90f41146f8"/>
-    <p:sldLayoutId xmlns:r="http://schemas.openxmlformats.org/officeDocument/2006/relationships" id="2147483652" r:id="Rf9db9e56e2244e3f"/>
-    <p:sldLayoutId xmlns:r="http://schemas.openxmlformats.org/officeDocument/2006/relationships" id="2147483653" r:id="R9861bab9da4744ca"/>
-    <p:sldLayoutId xmlns:r="http://schemas.openxmlformats.org/officeDocument/2006/relationships" id="2147483654" r:id="R74b2759fd8d249b2"/>
+    <p:sldLayoutId xmlns:r="http://schemas.openxmlformats.org/officeDocument/2006/relationships" id="2147483649" r:id="Rab878e4fa6254787"/>
+    <p:sldLayoutId xmlns:r="http://schemas.openxmlformats.org/officeDocument/2006/relationships" id="2147483650" r:id="R481c27c1cc5641b6"/>
+    <p:sldLayoutId xmlns:r="http://schemas.openxmlformats.org/officeDocument/2006/relationships" id="2147483651" r:id="Rfcb98f69151f4a62"/>
+    <p:sldLayoutId xmlns:r="http://schemas.openxmlformats.org/officeDocument/2006/relationships" id="2147483652" r:id="R4ba8ba0037b14e77"/>
+    <p:sldLayoutId xmlns:r="http://schemas.openxmlformats.org/officeDocument/2006/relationships" id="2147483653" r:id="R76d35e8f24b34a1f"/>
+    <p:sldLayoutId xmlns:r="http://schemas.openxmlformats.org/officeDocument/2006/relationships" id="2147483654" r:id="R58b4602a07c8440e"/>
   </p:sldLayoutIdLst>
   <p:txStyles>
     <p:titleStyle>
@@ -3055,7 +3136,7 @@
           <p:cNvPr id="12" name="">
             <a:extLst xmlns:a="http://schemas.openxmlformats.org/drawingml/2006/main">
               <a:ext uri="{FF2B5EF4-FFF2-40B4-BE49-F238E27FC236}">
-                <a16:creationId xmlns:a16="http://schemas.microsoft.com/office/drawing/2014/main" id="{14B24DE9-D5C5-449F-B947-3E840704AAF7}"/>
+                <a16:creationId xmlns:a16="http://schemas.microsoft.com/office/drawing/2014/main" id="{D7F29722-421A-4495-B874-78548648B02A}"/>
               </a:ext>
             </a:extLst>
           </p:cNvPr>
@@ -3086,7 +3167,7 @@
           <p:cNvPr id="2" name="">
             <a:extLst xmlns:a="http://schemas.openxmlformats.org/drawingml/2006/main">
               <a:ext uri="{FF2B5EF4-FFF2-40B4-BE49-F238E27FC236}">
-                <a16:creationId xmlns:a16="http://schemas.microsoft.com/office/drawing/2014/main" id="{39E147C5-EA55-4F07-8C59-64FE0507B7B0}"/>
+                <a16:creationId xmlns:a16="http://schemas.microsoft.com/office/drawing/2014/main" id="{E1767077-29A5-4FA9-AE54-E1850BC00591}"/>
               </a:ext>
             </a:extLst>
           </p:cNvPr>
@@ -3119,7 +3200,7 @@
           <p:cNvPr id="3" name="">
             <a:extLst xmlns:a="http://schemas.openxmlformats.org/drawingml/2006/main">
               <a:ext uri="{FF2B5EF4-FFF2-40B4-BE49-F238E27FC236}">
-                <a16:creationId xmlns:a16="http://schemas.microsoft.com/office/drawing/2014/main" id="{60D987A4-417A-4A2A-B56A-F56519C334EE}"/>
+                <a16:creationId xmlns:a16="http://schemas.microsoft.com/office/drawing/2014/main" id="{E954FFCD-703D-4A74-B10A-947E39C4E8F5}"/>
               </a:ext>
             </a:extLst>
           </p:cNvPr>
@@ -3188,7 +3269,7 @@
           <p:cNvPr id="4" name="">
             <a:extLst xmlns:a="http://schemas.openxmlformats.org/drawingml/2006/main">
               <a:ext uri="{FF2B5EF4-FFF2-40B4-BE49-F238E27FC236}">
-                <a16:creationId xmlns:a16="http://schemas.microsoft.com/office/drawing/2014/main" id="{69EDCC10-24C7-4998-B13F-DF3883BF0185}"/>
+                <a16:creationId xmlns:a16="http://schemas.microsoft.com/office/drawing/2014/main" id="{CA512F23-32BB-4799-82B7-BBF43CA79F55}"/>
               </a:ext>
             </a:extLst>
           </p:cNvPr>
@@ -3257,18 +3338,18 @@
           <p:cNvPr id="5" name="">
             <a:extLst xmlns:a="http://schemas.openxmlformats.org/drawingml/2006/main">
               <a:ext uri="{FF2B5EF4-FFF2-40B4-BE49-F238E27FC236}">
-                <a16:creationId xmlns:a16="http://schemas.microsoft.com/office/drawing/2014/main" id="{4B2F14F1-1D24-458B-89FB-8EA7D9537027}"/>
-              </a:ext>
-            </a:extLst>
-          </p:cNvPr>
-          <p:cNvSpPr>
-            <a:spLocks xmlns:a="http://schemas.openxmlformats.org/drawingml/2006/main" noGrp="1"/>
-          </p:cNvSpPr>
-          <p:nvPr/>
-        </p:nvSpPr>
-        <p:spPr>
-          <a:xfrm xmlns:a="http://schemas.openxmlformats.org/drawingml/2006/main">
-            <a:off x="609600" y="1581150"/>
+                <a16:creationId xmlns:a16="http://schemas.microsoft.com/office/drawing/2014/main" id="{5547AEEB-6044-4EC5-97BF-90203D4DC677}"/>
+              </a:ext>
+            </a:extLst>
+          </p:cNvPr>
+          <p:cNvSpPr>
+            <a:spLocks xmlns:a="http://schemas.openxmlformats.org/drawingml/2006/main" noGrp="1"/>
+          </p:cNvSpPr>
+          <p:nvPr/>
+        </p:nvSpPr>
+        <p:spPr>
+          <a:xfrm xmlns:a="http://schemas.openxmlformats.org/drawingml/2006/main">
+            <a:off x="609600" y="1562100"/>
             <a:ext cx="5715000" cy="1257300"/>
           </a:xfrm>
           <a:prstGeom xmlns:a="http://schemas.openxmlformats.org/drawingml/2006/main" prst="rect">
@@ -3349,18 +3430,18 @@
           <p:cNvPr id="6" name="">
             <a:extLst xmlns:a="http://schemas.openxmlformats.org/drawingml/2006/main">
               <a:ext uri="{FF2B5EF4-FFF2-40B4-BE49-F238E27FC236}">
-                <a16:creationId xmlns:a16="http://schemas.microsoft.com/office/drawing/2014/main" id="{22529ACB-53CF-42C1-9BA5-C237C631AF94}"/>
-              </a:ext>
-            </a:extLst>
-          </p:cNvPr>
-          <p:cNvSpPr>
-            <a:spLocks xmlns:a="http://schemas.openxmlformats.org/drawingml/2006/main" noGrp="1"/>
-          </p:cNvSpPr>
-          <p:nvPr/>
-        </p:nvSpPr>
-        <p:spPr>
-          <a:xfrm xmlns:a="http://schemas.openxmlformats.org/drawingml/2006/main">
-            <a:off x="638175" y="3143250"/>
+                <a16:creationId xmlns:a16="http://schemas.microsoft.com/office/drawing/2014/main" id="{069D2B4C-D64F-4BBF-AED0-3B83CFD46F8D}"/>
+              </a:ext>
+            </a:extLst>
+          </p:cNvPr>
+          <p:cNvSpPr>
+            <a:spLocks xmlns:a="http://schemas.openxmlformats.org/drawingml/2006/main" noGrp="1"/>
+          </p:cNvSpPr>
+          <p:nvPr/>
+        </p:nvSpPr>
+        <p:spPr>
+          <a:xfrm xmlns:a="http://schemas.openxmlformats.org/drawingml/2006/main">
+            <a:off x="638175" y="3105150"/>
             <a:ext cx="5429250" cy="571500"/>
           </a:xfrm>
           <a:prstGeom xmlns:a="http://schemas.openxmlformats.org/drawingml/2006/main" prst="rect">
@@ -3418,18 +3499,18 @@
           <p:cNvPr id="7" name="">
             <a:extLst xmlns:a="http://schemas.openxmlformats.org/drawingml/2006/main">
               <a:ext uri="{FF2B5EF4-FFF2-40B4-BE49-F238E27FC236}">
-                <a16:creationId xmlns:a16="http://schemas.microsoft.com/office/drawing/2014/main" id="{4CACCF60-C989-4290-AC30-739D8EAC377A}"/>
-              </a:ext>
-            </a:extLst>
-          </p:cNvPr>
-          <p:cNvSpPr>
-            <a:spLocks xmlns:a="http://schemas.openxmlformats.org/drawingml/2006/main" noGrp="1"/>
-          </p:cNvSpPr>
-          <p:nvPr/>
-        </p:nvSpPr>
-        <p:spPr>
-          <a:xfrm xmlns:a="http://schemas.openxmlformats.org/drawingml/2006/main">
-            <a:off x="638175" y="4095750"/>
+                <a16:creationId xmlns:a16="http://schemas.microsoft.com/office/drawing/2014/main" id="{B9730C6C-A98D-492A-A046-EC07C77129E4}"/>
+              </a:ext>
+            </a:extLst>
+          </p:cNvPr>
+          <p:cNvSpPr>
+            <a:spLocks xmlns:a="http://schemas.openxmlformats.org/drawingml/2006/main" noGrp="1"/>
+          </p:cNvSpPr>
+          <p:nvPr/>
+        </p:nvSpPr>
+        <p:spPr>
+          <a:xfrm xmlns:a="http://schemas.openxmlformats.org/drawingml/2006/main">
+            <a:off x="638175" y="4038600"/>
             <a:ext cx="533400" cy="38100"/>
           </a:xfrm>
           <a:prstGeom xmlns:a="http://schemas.openxmlformats.org/drawingml/2006/main" prst="rect">
@@ -3449,19 +3530,19 @@
           <p:cNvPr id="8" name="">
             <a:extLst xmlns:a="http://schemas.openxmlformats.org/drawingml/2006/main">
               <a:ext uri="{FF2B5EF4-FFF2-40B4-BE49-F238E27FC236}">
-                <a16:creationId xmlns:a16="http://schemas.microsoft.com/office/drawing/2014/main" id="{914FA70F-DA5E-4E2E-B91E-8DC64F45A5F5}"/>
-              </a:ext>
-            </a:extLst>
-          </p:cNvPr>
-          <p:cNvSpPr>
-            <a:spLocks xmlns:a="http://schemas.openxmlformats.org/drawingml/2006/main" noGrp="1"/>
-          </p:cNvSpPr>
-          <p:nvPr/>
-        </p:nvSpPr>
-        <p:spPr>
-          <a:xfrm xmlns:a="http://schemas.openxmlformats.org/drawingml/2006/main">
-            <a:off x="638175" y="4381500"/>
-            <a:ext cx="4953000" cy="323850"/>
+                <a16:creationId xmlns:a16="http://schemas.microsoft.com/office/drawing/2014/main" id="{9FBDC2F9-9662-43D5-B754-2E8AB07EA20E}"/>
+              </a:ext>
+            </a:extLst>
+          </p:cNvPr>
+          <p:cNvSpPr>
+            <a:spLocks xmlns:a="http://schemas.openxmlformats.org/drawingml/2006/main" noGrp="1"/>
+          </p:cNvSpPr>
+          <p:nvPr/>
+        </p:nvSpPr>
+        <p:spPr>
+          <a:xfrm xmlns:a="http://schemas.openxmlformats.org/drawingml/2006/main">
+            <a:off x="638175" y="4324350"/>
+            <a:ext cx="5048250" cy="323850"/>
           </a:xfrm>
           <a:prstGeom xmlns:a="http://schemas.openxmlformats.org/drawingml/2006/main" prst="rect">
             <a:avLst/>
@@ -3518,19 +3599,19 @@
           <p:cNvPr id="9" name="">
             <a:extLst xmlns:a="http://schemas.openxmlformats.org/drawingml/2006/main">
               <a:ext uri="{FF2B5EF4-FFF2-40B4-BE49-F238E27FC236}">
-                <a16:creationId xmlns:a16="http://schemas.microsoft.com/office/drawing/2014/main" id="{4E01530E-7CB6-4842-9E7E-1A6882C0F3AB}"/>
-              </a:ext>
-            </a:extLst>
-          </p:cNvPr>
-          <p:cNvSpPr>
-            <a:spLocks xmlns:a="http://schemas.openxmlformats.org/drawingml/2006/main" noGrp="1"/>
-          </p:cNvSpPr>
-          <p:nvPr/>
-        </p:nvSpPr>
-        <p:spPr>
-          <a:xfrm xmlns:a="http://schemas.openxmlformats.org/drawingml/2006/main">
-            <a:off x="638175" y="4857750"/>
-            <a:ext cx="5191125" cy="476250"/>
+                <a16:creationId xmlns:a16="http://schemas.microsoft.com/office/drawing/2014/main" id="{856FD374-3004-46E5-82A6-26FDF7277330}"/>
+              </a:ext>
+            </a:extLst>
+          </p:cNvPr>
+          <p:cNvSpPr>
+            <a:spLocks xmlns:a="http://schemas.openxmlformats.org/drawingml/2006/main" noGrp="1"/>
+          </p:cNvSpPr>
+          <p:nvPr/>
+        </p:nvSpPr>
+        <p:spPr>
+          <a:xfrm xmlns:a="http://schemas.openxmlformats.org/drawingml/2006/main">
+            <a:off x="638175" y="4800600"/>
+            <a:ext cx="4953000" cy="266700"/>
           </a:xfrm>
           <a:prstGeom xmlns:a="http://schemas.openxmlformats.org/drawingml/2006/main" prst="rect">
             <a:avLst/>
@@ -3547,7 +3628,7 @@
           </a:bodyPr>
           <a:lstStyle xmlns:a="http://schemas.openxmlformats.org/drawingml/2006/main">
             <a:defPPr algn="l">
-              <a:defRPr sz="1200" b="0">
+              <a:defRPr sz="1275" b="0">
                 <a:solidFill>
                   <a:srgbClr val="60756A"/>
                 </a:solidFill>
@@ -3559,7 +3640,7 @@
           </a:lstStyle>
           <a:p xmlns:a="http://schemas.openxmlformats.org/drawingml/2006/main">
             <a:pPr algn="l">
-              <a:defRPr sz="1200" b="0">
+              <a:defRPr sz="1275" b="0">
                 <a:solidFill>
                   <a:srgbClr val="60756A"/>
                 </a:solidFill>
@@ -3569,7 +3650,7 @@
               </a:defRPr>
             </a:pPr>
             <a:r>
-              <a:rPr sz="1200" b="0">
+              <a:rPr sz="1275" b="0">
                 <a:solidFill>
                   <a:srgbClr val="60756A"/>
                 </a:solidFill>
@@ -3577,7 +3658,7 @@
                 <a:ea typeface="Calibri"/>
                 <a:cs typeface="Calibri"/>
               </a:rPr>
-              <a:t>Problem  ·  Proposed solution  ·  Scalability  ·  Sustainability</a:t>
+              <a:t>For architects · project teams · future homeowners</a:t>
             </a:r>
           </a:p>
         </p:txBody>
@@ -3587,7 +3668,7 @@
           <p:cNvPr id="10" name="">
             <a:extLst xmlns:a="http://schemas.openxmlformats.org/drawingml/2006/main">
               <a:ext uri="{FF2B5EF4-FFF2-40B4-BE49-F238E27FC236}">
-                <a16:creationId xmlns:a16="http://schemas.microsoft.com/office/drawing/2014/main" id="{B48F1432-BCE1-4CA3-9D1D-63B52D8426D9}"/>
+                <a16:creationId xmlns:a16="http://schemas.microsoft.com/office/drawing/2014/main" id="{D5CA3905-5F58-46C7-B047-9F43F7423B83}"/>
               </a:ext>
             </a:extLst>
           </p:cNvPr>
@@ -3656,7 +3737,7 @@
           <p:cNvPr id="11" name="">
             <a:extLst xmlns:a="http://schemas.openxmlformats.org/drawingml/2006/main">
               <a:ext uri="{FF2B5EF4-FFF2-40B4-BE49-F238E27FC236}">
-                <a16:creationId xmlns:a16="http://schemas.microsoft.com/office/drawing/2014/main" id="{4295DC4C-7EB4-42A4-BF49-F055177601D1}"/>
+                <a16:creationId xmlns:a16="http://schemas.microsoft.com/office/drawing/2014/main" id="{51FB2536-45C7-4CA2-A60B-CF1B1BF726DC}"/>
               </a:ext>
             </a:extLst>
           </p:cNvPr>
@@ -3666,10 +3747,10 @@
           <p:nvPr/>
         </p:nvPicPr>
         <p:blipFill>
-          <a:blip xmlns:r="http://schemas.openxmlformats.org/officeDocument/2006/relationships" xmlns:a="http://schemas.openxmlformats.org/drawingml/2006/main" r:embed="R8e20779f64304067">
+          <a:blip xmlns:r="http://schemas.openxmlformats.org/officeDocument/2006/relationships" xmlns:a="http://schemas.openxmlformats.org/drawingml/2006/main" r:embed="Rbde97570eb4047fe">
             <a:extLst>
               <a:ext uri="{96DAC541-7B7A-43D3-8B79-37D633B846F1}">
-                <asvg:svgBlip xmlns:asvg="http://schemas.microsoft.com/office/drawing/2016/SVG/main" r:embed="R557c80d6cd134910"/>
+                <asvg:svgBlip xmlns:asvg="http://schemas.microsoft.com/office/drawing/2016/SVG/main" r:embed="Rbea83d3eabaf4239"/>
               </a:ext>
             </a:extLst>
           </a:blip>
@@ -3688,7 +3769,7 @@
     </p:spTree>
     <p:extLst>
       <p:ext uri="{BB962C8B-B14F-4D97-AF65-F5344CB8AC3E}">
-        <p14:creationId xmlns:p14="http://schemas.microsoft.com/office/powerpoint/2010/main" val="1635377211"/>
+        <p14:creationId xmlns:p14="http://schemas.microsoft.com/office/powerpoint/2010/main" val="773225778"/>
       </p:ext>
     </p:extLst>
   </p:cSld>
@@ -3716,10 +3797,10 @@
       </p:grpSpPr>
       <p:sp>
         <p:nvSpPr>
-          <p:cNvPr id="16" name="">
-            <a:extLst xmlns:a="http://schemas.openxmlformats.org/drawingml/2006/main">
-              <a:ext uri="{FF2B5EF4-FFF2-40B4-BE49-F238E27FC236}">
-                <a16:creationId xmlns:a16="http://schemas.microsoft.com/office/drawing/2014/main" id="{B7D9D381-88A6-45BA-A9AC-6E1F4025DCFE}"/>
+          <p:cNvPr id="17" name="">
+            <a:extLst xmlns:a="http://schemas.openxmlformats.org/drawingml/2006/main">
+              <a:ext uri="{FF2B5EF4-FFF2-40B4-BE49-F238E27FC236}">
+                <a16:creationId xmlns:a16="http://schemas.microsoft.com/office/drawing/2014/main" id="{D8781B8E-4061-457C-9402-566FEDC48318}"/>
               </a:ext>
             </a:extLst>
           </p:cNvPr>
@@ -3750,7 +3831,7 @@
           <p:cNvPr id="2" name="">
             <a:extLst xmlns:a="http://schemas.openxmlformats.org/drawingml/2006/main">
               <a:ext uri="{FF2B5EF4-FFF2-40B4-BE49-F238E27FC236}">
-                <a16:creationId xmlns:a16="http://schemas.microsoft.com/office/drawing/2014/main" id="{C3E82DB5-7B78-416C-92D2-84D829699A02}"/>
+                <a16:creationId xmlns:a16="http://schemas.microsoft.com/office/drawing/2014/main" id="{818F01D6-1671-4180-8E67-D450AB983CED}"/>
               </a:ext>
             </a:extLst>
           </p:cNvPr>
@@ -3819,7 +3900,7 @@
           <p:cNvPr id="3" name="">
             <a:extLst xmlns:a="http://schemas.openxmlformats.org/drawingml/2006/main">
               <a:ext uri="{FF2B5EF4-FFF2-40B4-BE49-F238E27FC236}">
-                <a16:creationId xmlns:a16="http://schemas.microsoft.com/office/drawing/2014/main" id="{21557D06-0076-4EFC-8E2F-DA9A1DA0B347}"/>
+                <a16:creationId xmlns:a16="http://schemas.microsoft.com/office/drawing/2014/main" id="{4B03AFC1-3A83-4C84-BBB4-EC30096BEADF}"/>
               </a:ext>
             </a:extLst>
           </p:cNvPr>
@@ -3888,7 +3969,7 @@
           <p:cNvPr id="4" name="">
             <a:extLst xmlns:a="http://schemas.openxmlformats.org/drawingml/2006/main">
               <a:ext uri="{FF2B5EF4-FFF2-40B4-BE49-F238E27FC236}">
-                <a16:creationId xmlns:a16="http://schemas.microsoft.com/office/drawing/2014/main" id="{60C0FD29-987D-459C-82F9-B006DADC3B64}"/>
+                <a16:creationId xmlns:a16="http://schemas.microsoft.com/office/drawing/2014/main" id="{913CAF04-A107-49BC-8CC2-A4C1263D4008}"/>
               </a:ext>
             </a:extLst>
           </p:cNvPr>
@@ -3980,7 +4061,7 @@
           <p:cNvPr id="5" name="">
             <a:extLst xmlns:a="http://schemas.openxmlformats.org/drawingml/2006/main">
               <a:ext uri="{FF2B5EF4-FFF2-40B4-BE49-F238E27FC236}">
-                <a16:creationId xmlns:a16="http://schemas.microsoft.com/office/drawing/2014/main" id="{61AE664F-0AB1-40B9-877B-04E7AA3891E0}"/>
+                <a16:creationId xmlns:a16="http://schemas.microsoft.com/office/drawing/2014/main" id="{5B8F292D-70B2-4A44-A59F-E98A15E8ED32}"/>
               </a:ext>
             </a:extLst>
           </p:cNvPr>
@@ -3992,7 +4073,7 @@
         <p:spPr>
           <a:xfrm xmlns:a="http://schemas.openxmlformats.org/drawingml/2006/main">
             <a:off x="638175" y="2209800"/>
-            <a:ext cx="5095875" cy="600075"/>
+            <a:ext cx="5095875" cy="609600"/>
           </a:xfrm>
           <a:prstGeom xmlns:a="http://schemas.openxmlformats.org/drawingml/2006/main" prst="rect">
             <a:avLst/>
@@ -4039,7 +4120,7 @@
                 <a:ea typeface="Calibri"/>
                 <a:cs typeface="Calibri"/>
               </a:rPr>
-              <a:t>The drawing records the layout. It does not show how the finished home feels to move through.</a:t>
+              <a:t>The drawing records measurements and layout, but people still have to picture the finished space.</a:t>
             </a:r>
           </a:p>
         </p:txBody>
@@ -4049,7 +4130,7 @@
           <p:cNvPr id="6" name="">
             <a:extLst xmlns:a="http://schemas.openxmlformats.org/drawingml/2006/main">
               <a:ext uri="{FF2B5EF4-FFF2-40B4-BE49-F238E27FC236}">
-                <a16:creationId xmlns:a16="http://schemas.microsoft.com/office/drawing/2014/main" id="{E8E6D9FB-590A-484D-9DD2-3CEF45B40DA4}"/>
+                <a16:creationId xmlns:a16="http://schemas.microsoft.com/office/drawing/2014/main" id="{9C1EF67B-DCAD-45BF-91F5-F34ECD24E74F}"/>
               </a:ext>
             </a:extLst>
           </p:cNvPr>
@@ -4061,7 +4142,7 @@
         <p:spPr>
           <a:xfrm xmlns:a="http://schemas.openxmlformats.org/drawingml/2006/main">
             <a:off x="638175" y="3352800"/>
-            <a:ext cx="1524000" cy="209550"/>
+            <a:ext cx="1809750" cy="190500"/>
           </a:xfrm>
           <a:prstGeom xmlns:a="http://schemas.openxmlformats.org/drawingml/2006/main" prst="rect">
             <a:avLst/>
@@ -4118,19 +4199,19 @@
           <p:cNvPr id="7" name="">
             <a:extLst xmlns:a="http://schemas.openxmlformats.org/drawingml/2006/main">
               <a:ext uri="{FF2B5EF4-FFF2-40B4-BE49-F238E27FC236}">
-                <a16:creationId xmlns:a16="http://schemas.microsoft.com/office/drawing/2014/main" id="{73DA214C-7496-4C6B-849A-A3E5913D3765}"/>
-              </a:ext>
-            </a:extLst>
-          </p:cNvPr>
-          <p:cNvSpPr>
-            <a:spLocks xmlns:a="http://schemas.openxmlformats.org/drawingml/2006/main" noGrp="1"/>
-          </p:cNvSpPr>
-          <p:nvPr/>
-        </p:nvSpPr>
-        <p:spPr>
-          <a:xfrm xmlns:a="http://schemas.openxmlformats.org/drawingml/2006/main">
-            <a:off x="638175" y="3619500"/>
-            <a:ext cx="4762500" cy="295275"/>
+                <a16:creationId xmlns:a16="http://schemas.microsoft.com/office/drawing/2014/main" id="{E4CE2663-9ECB-4ABA-863E-DB6015F3A645}"/>
+              </a:ext>
+            </a:extLst>
+          </p:cNvPr>
+          <p:cNvSpPr>
+            <a:spLocks xmlns:a="http://schemas.openxmlformats.org/drawingml/2006/main" noGrp="1"/>
+          </p:cNvSpPr>
+          <p:nvPr/>
+        </p:nvSpPr>
+        <p:spPr>
+          <a:xfrm xmlns:a="http://schemas.openxmlformats.org/drawingml/2006/main">
+            <a:off x="638175" y="3600450"/>
+            <a:ext cx="4857750" cy="285750"/>
           </a:xfrm>
           <a:prstGeom xmlns:a="http://schemas.openxmlformats.org/drawingml/2006/main" prst="rect">
             <a:avLst/>
@@ -4147,7 +4228,7 @@
           </a:bodyPr>
           <a:lstStyle xmlns:a="http://schemas.openxmlformats.org/drawingml/2006/main">
             <a:defPPr algn="l">
-              <a:defRPr sz="1500" b="1">
+              <a:defRPr sz="1425" b="1">
                 <a:solidFill>
                   <a:srgbClr val="19332A"/>
                 </a:solidFill>
@@ -4159,7 +4240,7 @@
           </a:lstStyle>
           <a:p xmlns:a="http://schemas.openxmlformats.org/drawingml/2006/main">
             <a:pPr algn="l">
-              <a:defRPr sz="1500" b="1">
+              <a:defRPr sz="1425" b="1">
                 <a:solidFill>
                   <a:srgbClr val="19332A"/>
                 </a:solidFill>
@@ -4169,7 +4250,7 @@
               </a:defRPr>
             </a:pPr>
             <a:r>
-              <a:rPr sz="1500" b="1">
+              <a:rPr sz="1425" b="1">
                 <a:solidFill>
                   <a:srgbClr val="19332A"/>
                 </a:solidFill>
@@ -4177,7 +4258,7 @@
                 <a:ea typeface="Calibri"/>
                 <a:cs typeface="Calibri"/>
               </a:rPr>
-              <a:t>Room size is hard to picture.</a:t>
+              <a:t>Will these rooms feel spacious?</a:t>
             </a:r>
           </a:p>
         </p:txBody>
@@ -4187,18 +4268,18 @@
           <p:cNvPr id="8" name="">
             <a:extLst xmlns:a="http://schemas.openxmlformats.org/drawingml/2006/main">
               <a:ext uri="{FF2B5EF4-FFF2-40B4-BE49-F238E27FC236}">
-                <a16:creationId xmlns:a16="http://schemas.microsoft.com/office/drawing/2014/main" id="{CB59B111-4C53-4BC9-93E0-C625EC7E483F}"/>
-              </a:ext>
-            </a:extLst>
-          </p:cNvPr>
-          <p:cNvSpPr>
-            <a:spLocks xmlns:a="http://schemas.openxmlformats.org/drawingml/2006/main" noGrp="1"/>
-          </p:cNvSpPr>
-          <p:nvPr/>
-        </p:nvSpPr>
-        <p:spPr>
-          <a:xfrm xmlns:a="http://schemas.openxmlformats.org/drawingml/2006/main">
-            <a:off x="638175" y="4048125"/>
+                <a16:creationId xmlns:a16="http://schemas.microsoft.com/office/drawing/2014/main" id="{F5C7CC2C-8968-47AB-8C73-D33C7B6D57E7}"/>
+              </a:ext>
+            </a:extLst>
+          </p:cNvPr>
+          <p:cNvSpPr>
+            <a:spLocks xmlns:a="http://schemas.openxmlformats.org/drawingml/2006/main" noGrp="1"/>
+          </p:cNvSpPr>
+          <p:nvPr/>
+        </p:nvSpPr>
+        <p:spPr>
+          <a:xfrm xmlns:a="http://schemas.openxmlformats.org/drawingml/2006/main">
+            <a:off x="638175" y="3952875"/>
             <a:ext cx="4857750" cy="9525"/>
           </a:xfrm>
           <a:prstGeom xmlns:a="http://schemas.openxmlformats.org/drawingml/2006/main" prst="rect">
@@ -4218,19 +4299,19 @@
           <p:cNvPr id="9" name="">
             <a:extLst xmlns:a="http://schemas.openxmlformats.org/drawingml/2006/main">
               <a:ext uri="{FF2B5EF4-FFF2-40B4-BE49-F238E27FC236}">
-                <a16:creationId xmlns:a16="http://schemas.microsoft.com/office/drawing/2014/main" id="{E7E1A44F-4C79-4F61-8E63-29C7DC7DE06E}"/>
-              </a:ext>
-            </a:extLst>
-          </p:cNvPr>
-          <p:cNvSpPr>
-            <a:spLocks xmlns:a="http://schemas.openxmlformats.org/drawingml/2006/main" noGrp="1"/>
-          </p:cNvSpPr>
-          <p:nvPr/>
-        </p:nvSpPr>
-        <p:spPr>
-          <a:xfrm xmlns:a="http://schemas.openxmlformats.org/drawingml/2006/main">
-            <a:off x="638175" y="4276725"/>
-            <a:ext cx="1809750" cy="209550"/>
+                <a16:creationId xmlns:a16="http://schemas.microsoft.com/office/drawing/2014/main" id="{1CD15B98-E986-4F2C-8D7A-02FEE634006B}"/>
+              </a:ext>
+            </a:extLst>
+          </p:cNvPr>
+          <p:cNvSpPr>
+            <a:spLocks xmlns:a="http://schemas.openxmlformats.org/drawingml/2006/main" noGrp="1"/>
+          </p:cNvSpPr>
+          <p:nvPr/>
+        </p:nvSpPr>
+        <p:spPr>
+          <a:xfrm xmlns:a="http://schemas.openxmlformats.org/drawingml/2006/main">
+            <a:off x="638175" y="4171950"/>
+            <a:ext cx="1809750" cy="190500"/>
           </a:xfrm>
           <a:prstGeom xmlns:a="http://schemas.openxmlformats.org/drawingml/2006/main" prst="rect">
             <a:avLst/>
@@ -4249,7 +4330,7 @@
             <a:defPPr algn="l">
               <a:defRPr sz="975" b="1">
                 <a:solidFill>
-                  <a:srgbClr val="2C6B50"/>
+                  <a:srgbClr val="E9795B"/>
                 </a:solidFill>
                 <a:latin typeface="Calibri"/>
                 <a:ea typeface="Calibri"/>
@@ -4261,7 +4342,7 @@
             <a:pPr algn="l">
               <a:defRPr sz="975" b="1">
                 <a:solidFill>
-                  <a:srgbClr val="2C6B50"/>
+                  <a:srgbClr val="E9795B"/>
                 </a:solidFill>
                 <a:latin typeface="Calibri"/>
                 <a:ea typeface="Calibri"/>
@@ -4271,7 +4352,7 @@
             <a:r>
               <a:rPr sz="975" b="1">
                 <a:solidFill>
-                  <a:srgbClr val="2C6B50"/>
+                  <a:srgbClr val="E9795B"/>
                 </a:solidFill>
                 <a:latin typeface="Calibri"/>
                 <a:ea typeface="Calibri"/>
@@ -4287,19 +4368,19 @@
           <p:cNvPr id="10" name="">
             <a:extLst xmlns:a="http://schemas.openxmlformats.org/drawingml/2006/main">
               <a:ext uri="{FF2B5EF4-FFF2-40B4-BE49-F238E27FC236}">
-                <a16:creationId xmlns:a16="http://schemas.microsoft.com/office/drawing/2014/main" id="{BA9D770F-BF6B-4433-B2E6-9AE5B77FE495}"/>
-              </a:ext>
-            </a:extLst>
-          </p:cNvPr>
-          <p:cNvSpPr>
-            <a:spLocks xmlns:a="http://schemas.openxmlformats.org/drawingml/2006/main" noGrp="1"/>
-          </p:cNvSpPr>
-          <p:nvPr/>
-        </p:nvSpPr>
-        <p:spPr>
-          <a:xfrm xmlns:a="http://schemas.openxmlformats.org/drawingml/2006/main">
-            <a:off x="638175" y="4543425"/>
-            <a:ext cx="4953000" cy="323850"/>
+                <a16:creationId xmlns:a16="http://schemas.microsoft.com/office/drawing/2014/main" id="{D1838212-FE29-42D6-9BE1-0AB455ED070D}"/>
+              </a:ext>
+            </a:extLst>
+          </p:cNvPr>
+          <p:cNvSpPr>
+            <a:spLocks xmlns:a="http://schemas.openxmlformats.org/drawingml/2006/main" noGrp="1"/>
+          </p:cNvSpPr>
+          <p:nvPr/>
+        </p:nvSpPr>
+        <p:spPr>
+          <a:xfrm xmlns:a="http://schemas.openxmlformats.org/drawingml/2006/main">
+            <a:off x="638175" y="4419600"/>
+            <a:ext cx="4857750" cy="285750"/>
           </a:xfrm>
           <a:prstGeom xmlns:a="http://schemas.openxmlformats.org/drawingml/2006/main" prst="rect">
             <a:avLst/>
@@ -4346,7 +4427,7 @@
                 <a:ea typeface="Calibri"/>
                 <a:cs typeface="Calibri"/>
               </a:rPr>
-              <a:t>Stairs and floor connections stay abstract.</a:t>
+              <a:t>How do the stairs connect each floor?</a:t>
             </a:r>
           </a:p>
         </p:txBody>
@@ -4356,18 +4437,18 @@
           <p:cNvPr id="11" name="">
             <a:extLst xmlns:a="http://schemas.openxmlformats.org/drawingml/2006/main">
               <a:ext uri="{FF2B5EF4-FFF2-40B4-BE49-F238E27FC236}">
-                <a16:creationId xmlns:a16="http://schemas.microsoft.com/office/drawing/2014/main" id="{F7D08BBC-E63F-47CE-9ABB-F7FA914AA43A}"/>
-              </a:ext>
-            </a:extLst>
-          </p:cNvPr>
-          <p:cNvSpPr>
-            <a:spLocks xmlns:a="http://schemas.openxmlformats.org/drawingml/2006/main" noGrp="1"/>
-          </p:cNvSpPr>
-          <p:nvPr/>
-        </p:nvSpPr>
-        <p:spPr>
-          <a:xfrm xmlns:a="http://schemas.openxmlformats.org/drawingml/2006/main">
-            <a:off x="638175" y="4991100"/>
+                <a16:creationId xmlns:a16="http://schemas.microsoft.com/office/drawing/2014/main" id="{CA10E5A0-26BA-43AF-82D6-6B80AE8B0F4C}"/>
+              </a:ext>
+            </a:extLst>
+          </p:cNvPr>
+          <p:cNvSpPr>
+            <a:spLocks xmlns:a="http://schemas.openxmlformats.org/drawingml/2006/main" noGrp="1"/>
+          </p:cNvSpPr>
+          <p:nvPr/>
+        </p:nvSpPr>
+        <p:spPr>
+          <a:xfrm xmlns:a="http://schemas.openxmlformats.org/drawingml/2006/main">
+            <a:off x="638175" y="4772025"/>
             <a:ext cx="4857750" cy="9525"/>
           </a:xfrm>
           <a:prstGeom xmlns:a="http://schemas.openxmlformats.org/drawingml/2006/main" prst="rect">
@@ -4387,19 +4468,19 @@
           <p:cNvPr id="12" name="">
             <a:extLst xmlns:a="http://schemas.openxmlformats.org/drawingml/2006/main">
               <a:ext uri="{FF2B5EF4-FFF2-40B4-BE49-F238E27FC236}">
-                <a16:creationId xmlns:a16="http://schemas.microsoft.com/office/drawing/2014/main" id="{3F2FC19B-FBB3-4E67-AE7A-5005BD53F481}"/>
-              </a:ext>
-            </a:extLst>
-          </p:cNvPr>
-          <p:cNvSpPr>
-            <a:spLocks xmlns:a="http://schemas.openxmlformats.org/drawingml/2006/main" noGrp="1"/>
-          </p:cNvSpPr>
-          <p:nvPr/>
-        </p:nvSpPr>
-        <p:spPr>
-          <a:xfrm xmlns:a="http://schemas.openxmlformats.org/drawingml/2006/main">
-            <a:off x="638175" y="5219700"/>
-            <a:ext cx="1809750" cy="209550"/>
+                <a16:creationId xmlns:a16="http://schemas.microsoft.com/office/drawing/2014/main" id="{6ABE0149-00FF-4DEE-8661-2BD953F529F0}"/>
+              </a:ext>
+            </a:extLst>
+          </p:cNvPr>
+          <p:cNvSpPr>
+            <a:spLocks xmlns:a="http://schemas.openxmlformats.org/drawingml/2006/main" noGrp="1"/>
+          </p:cNvSpPr>
+          <p:nvPr/>
+        </p:nvSpPr>
+        <p:spPr>
+          <a:xfrm xmlns:a="http://schemas.openxmlformats.org/drawingml/2006/main">
+            <a:off x="638175" y="4991100"/>
+            <a:ext cx="1809750" cy="190500"/>
           </a:xfrm>
           <a:prstGeom xmlns:a="http://schemas.openxmlformats.org/drawingml/2006/main" prst="rect">
             <a:avLst/>
@@ -4418,7 +4499,7 @@
             <a:defPPr algn="l">
               <a:defRPr sz="975" b="1">
                 <a:solidFill>
-                  <a:srgbClr val="153B2E"/>
+                  <a:srgbClr val="E9795B"/>
                 </a:solidFill>
                 <a:latin typeface="Calibri"/>
                 <a:ea typeface="Calibri"/>
@@ -4430,7 +4511,7 @@
             <a:pPr algn="l">
               <a:defRPr sz="975" b="1">
                 <a:solidFill>
-                  <a:srgbClr val="153B2E"/>
+                  <a:srgbClr val="E9795B"/>
                 </a:solidFill>
                 <a:latin typeface="Calibri"/>
                 <a:ea typeface="Calibri"/>
@@ -4440,7 +4521,7 @@
             <a:r>
               <a:rPr sz="975" b="1">
                 <a:solidFill>
-                  <a:srgbClr val="153B2E"/>
+                  <a:srgbClr val="E9795B"/>
                 </a:solidFill>
                 <a:latin typeface="Calibri"/>
                 <a:ea typeface="Calibri"/>
@@ -4456,19 +4537,19 @@
           <p:cNvPr id="13" name="">
             <a:extLst xmlns:a="http://schemas.openxmlformats.org/drawingml/2006/main">
               <a:ext uri="{FF2B5EF4-FFF2-40B4-BE49-F238E27FC236}">
-                <a16:creationId xmlns:a16="http://schemas.microsoft.com/office/drawing/2014/main" id="{8B1CD093-A0A7-408F-B124-7CA19674D735}"/>
-              </a:ext>
-            </a:extLst>
-          </p:cNvPr>
-          <p:cNvSpPr>
-            <a:spLocks xmlns:a="http://schemas.openxmlformats.org/drawingml/2006/main" noGrp="1"/>
-          </p:cNvSpPr>
-          <p:nvPr/>
-        </p:nvSpPr>
-        <p:spPr>
-          <a:xfrm xmlns:a="http://schemas.openxmlformats.org/drawingml/2006/main">
-            <a:off x="638175" y="5486400"/>
-            <a:ext cx="4953000" cy="476250"/>
+                <a16:creationId xmlns:a16="http://schemas.microsoft.com/office/drawing/2014/main" id="{B618EBF2-CA86-4344-8E6D-FE50E23E3B22}"/>
+              </a:ext>
+            </a:extLst>
+          </p:cNvPr>
+          <p:cNvSpPr>
+            <a:spLocks xmlns:a="http://schemas.openxmlformats.org/drawingml/2006/main" noGrp="1"/>
+          </p:cNvSpPr>
+          <p:nvPr/>
+        </p:nvSpPr>
+        <p:spPr>
+          <a:xfrm xmlns:a="http://schemas.openxmlformats.org/drawingml/2006/main">
+            <a:off x="638175" y="5238750"/>
+            <a:ext cx="4857750" cy="285750"/>
           </a:xfrm>
           <a:prstGeom xmlns:a="http://schemas.openxmlformats.org/drawingml/2006/main" prst="rect">
             <a:avLst/>
@@ -4515,17 +4596,48 @@
                 <a:ea typeface="Calibri"/>
                 <a:cs typeface="Calibri"/>
               </a:rPr>
-              <a:t>Buyers and clients must mentally build the space.</a:t>
-            </a:r>
-          </a:p>
-        </p:txBody>
+              <a:t>What will it feel like to move through the home?</a:t>
+            </a:r>
+          </a:p>
+        </p:txBody>
+      </p:sp>
+      <p:sp>
+        <p:nvSpPr>
+          <p:cNvPr id="14" name="">
+            <a:extLst xmlns:a="http://schemas.openxmlformats.org/drawingml/2006/main">
+              <a:ext uri="{FF2B5EF4-FFF2-40B4-BE49-F238E27FC236}">
+                <a16:creationId xmlns:a16="http://schemas.microsoft.com/office/drawing/2014/main" id="{5846AD4C-990E-4BC4-9971-9514B2E0E2D0}"/>
+              </a:ext>
+            </a:extLst>
+          </p:cNvPr>
+          <p:cNvSpPr>
+            <a:spLocks xmlns:a="http://schemas.openxmlformats.org/drawingml/2006/main" noGrp="1"/>
+          </p:cNvSpPr>
+          <p:nvPr/>
+        </p:nvSpPr>
+        <p:spPr>
+          <a:xfrm xmlns:a="http://schemas.openxmlformats.org/drawingml/2006/main">
+            <a:off x="638175" y="5591175"/>
+            <a:ext cx="4857750" cy="9525"/>
+          </a:xfrm>
+          <a:prstGeom xmlns:a="http://schemas.openxmlformats.org/drawingml/2006/main" prst="rect">
+            <a:avLst/>
+          </a:prstGeom>
+          <a:solidFill xmlns:a="http://schemas.openxmlformats.org/drawingml/2006/main">
+            <a:srgbClr val="C8D6CC"/>
+          </a:solidFill>
+          <a:ln xmlns:a="http://schemas.openxmlformats.org/drawingml/2006/main" w="0">
+            <a:noFill/>
+            <a:prstDash val="solid"/>
+          </a:ln>
+        </p:spPr>
       </p:sp>
       <p:pic>
         <p:nvPicPr>
-          <p:cNvPr id="14" name="">
-            <a:extLst xmlns:a="http://schemas.openxmlformats.org/drawingml/2006/main">
-              <a:ext uri="{FF2B5EF4-FFF2-40B4-BE49-F238E27FC236}">
-                <a16:creationId xmlns:a16="http://schemas.microsoft.com/office/drawing/2014/main" id="{3F32ABD1-1EF7-4818-975B-9EA711487C6C}"/>
+          <p:cNvPr id="15" name="">
+            <a:extLst xmlns:a="http://schemas.openxmlformats.org/drawingml/2006/main">
+              <a:ext uri="{FF2B5EF4-FFF2-40B4-BE49-F238E27FC236}">
+                <a16:creationId xmlns:a16="http://schemas.microsoft.com/office/drawing/2014/main" id="{AD1C041E-E415-4924-BA67-E2CA3ED365E4}"/>
               </a:ext>
             </a:extLst>
           </p:cNvPr>
@@ -4535,7 +4647,7 @@
           <p:nvPr/>
         </p:nvPicPr>
         <p:blipFill>
-          <a:blip xmlns:r="http://schemas.openxmlformats.org/officeDocument/2006/relationships" xmlns:a="http://schemas.openxmlformats.org/drawingml/2006/main" r:embed="R437d660bf9ac42c3"/>
+          <a:blip xmlns:r="http://schemas.openxmlformats.org/officeDocument/2006/relationships" xmlns:a="http://schemas.openxmlformats.org/drawingml/2006/main" r:embed="R2e4a74cde86949e4"/>
           <a:srcRect xmlns:a="http://schemas.openxmlformats.org/drawingml/2006/main" l="6818" t="0" r="6818" b="0"/>
           <a:stretch xmlns:a="http://schemas.openxmlformats.org/drawingml/2006/main">
             <a:fillRect l="0" t="0" r="0" b="0"/>
@@ -4555,10 +4667,10 @@
       </p:pic>
       <p:sp>
         <p:nvSpPr>
-          <p:cNvPr id="15" name="">
-            <a:extLst xmlns:a="http://schemas.openxmlformats.org/drawingml/2006/main">
-              <a:ext uri="{FF2B5EF4-FFF2-40B4-BE49-F238E27FC236}">
-                <a16:creationId xmlns:a16="http://schemas.microsoft.com/office/drawing/2014/main" id="{2A4056C8-61DA-4E4A-80A6-2C3E5508B60A}"/>
+          <p:cNvPr id="16" name="">
+            <a:extLst xmlns:a="http://schemas.openxmlformats.org/drawingml/2006/main">
+              <a:ext uri="{FF2B5EF4-FFF2-40B4-BE49-F238E27FC236}">
+                <a16:creationId xmlns:a16="http://schemas.microsoft.com/office/drawing/2014/main" id="{6058C347-3C57-4534-973F-B7D2BBFF802F}"/>
               </a:ext>
             </a:extLst>
           </p:cNvPr>
@@ -4617,7 +4729,7 @@
                 <a:ea typeface="Calibri"/>
                 <a:cs typeface="Calibri"/>
               </a:rPr>
-              <a:t>A real three-floor plan · 10 m × 14 m footprint</a:t>
+              <a:t>Sample plan · three levels · 10 m × 14 m</a:t>
             </a:r>
           </a:p>
         </p:txBody>
@@ -4625,7 +4737,7 @@
     </p:spTree>
     <p:extLst>
       <p:ext uri="{BB962C8B-B14F-4D97-AF65-F5344CB8AC3E}">
-        <p14:creationId xmlns:p14="http://schemas.microsoft.com/office/powerpoint/2010/main" val="1713375901"/>
+        <p14:creationId xmlns:p14="http://schemas.microsoft.com/office/powerpoint/2010/main" val="329754586"/>
       </p:ext>
     </p:extLst>
   </p:cSld>
@@ -4653,10 +4765,10 @@
       </p:grpSpPr>
       <p:sp>
         <p:nvSpPr>
-          <p:cNvPr id="24" name="">
-            <a:extLst xmlns:a="http://schemas.openxmlformats.org/drawingml/2006/main">
-              <a:ext uri="{FF2B5EF4-FFF2-40B4-BE49-F238E27FC236}">
-                <a16:creationId xmlns:a16="http://schemas.microsoft.com/office/drawing/2014/main" id="{D3BF2016-7DCD-449B-A5F7-CA5874247BB6}"/>
+          <p:cNvPr id="20" name="">
+            <a:extLst xmlns:a="http://schemas.openxmlformats.org/drawingml/2006/main">
+              <a:ext uri="{FF2B5EF4-FFF2-40B4-BE49-F238E27FC236}">
+                <a16:creationId xmlns:a16="http://schemas.microsoft.com/office/drawing/2014/main" id="{61C210D7-0BF3-4EB5-A637-B69437E61532}"/>
               </a:ext>
             </a:extLst>
           </p:cNvPr>
@@ -4687,7 +4799,7 @@
           <p:cNvPr id="2" name="">
             <a:extLst xmlns:a="http://schemas.openxmlformats.org/drawingml/2006/main">
               <a:ext uri="{FF2B5EF4-FFF2-40B4-BE49-F238E27FC236}">
-                <a16:creationId xmlns:a16="http://schemas.microsoft.com/office/drawing/2014/main" id="{AFDC371F-76B2-4E7B-81BC-86AFC7490331}"/>
+                <a16:creationId xmlns:a16="http://schemas.microsoft.com/office/drawing/2014/main" id="{824A84B2-9557-4115-8EE7-BA45C828695C}"/>
               </a:ext>
             </a:extLst>
           </p:cNvPr>
@@ -4756,7 +4868,7 @@
           <p:cNvPr id="3" name="">
             <a:extLst xmlns:a="http://schemas.openxmlformats.org/drawingml/2006/main">
               <a:ext uri="{FF2B5EF4-FFF2-40B4-BE49-F238E27FC236}">
-                <a16:creationId xmlns:a16="http://schemas.microsoft.com/office/drawing/2014/main" id="{46B9B828-8800-4449-8A27-BA73957CB265}"/>
+                <a16:creationId xmlns:a16="http://schemas.microsoft.com/office/drawing/2014/main" id="{378E05BC-A195-4924-88C3-B1C30AC622BA}"/>
               </a:ext>
             </a:extLst>
           </p:cNvPr>
@@ -4825,7 +4937,7 @@
           <p:cNvPr id="4" name="">
             <a:extLst xmlns:a="http://schemas.openxmlformats.org/drawingml/2006/main">
               <a:ext uri="{FF2B5EF4-FFF2-40B4-BE49-F238E27FC236}">
-                <a16:creationId xmlns:a16="http://schemas.microsoft.com/office/drawing/2014/main" id="{52A41C71-039F-42FC-98E3-F3426C20FF26}"/>
+                <a16:creationId xmlns:a16="http://schemas.microsoft.com/office/drawing/2014/main" id="{D786A2B4-69DB-4299-B4DF-7F84DD1D7176}"/>
               </a:ext>
             </a:extLst>
           </p:cNvPr>
@@ -4894,7 +5006,7 @@
           <p:cNvPr id="5" name="">
             <a:extLst xmlns:a="http://schemas.openxmlformats.org/drawingml/2006/main">
               <a:ext uri="{FF2B5EF4-FFF2-40B4-BE49-F238E27FC236}">
-                <a16:creationId xmlns:a16="http://schemas.microsoft.com/office/drawing/2014/main" id="{8A6B536C-F83E-49F5-88EC-54A9D9DE071B}"/>
+                <a16:creationId xmlns:a16="http://schemas.microsoft.com/office/drawing/2014/main" id="{BBF99963-13D5-4EF3-AA4D-CE6F7114B0A3}"/>
               </a:ext>
             </a:extLst>
           </p:cNvPr>
@@ -4953,7 +5065,7 @@
                 <a:ea typeface="Calibri"/>
                 <a:cs typeface="Calibri"/>
               </a:rPr>
-              <a:t>A clear path from drawing to multi-storey walkthrough.</a:t>
+              <a:t>Trishna 3D turns a drawing into a navigable model.</a:t>
             </a:r>
           </a:p>
         </p:txBody>
@@ -4963,7 +5075,7 @@
           <p:cNvPr id="6" name="">
             <a:extLst xmlns:a="http://schemas.openxmlformats.org/drawingml/2006/main">
               <a:ext uri="{FF2B5EF4-FFF2-40B4-BE49-F238E27FC236}">
-                <a16:creationId xmlns:a16="http://schemas.microsoft.com/office/drawing/2014/main" id="{60C443E9-813A-43CD-90CB-A04C04530EC4}"/>
+                <a16:creationId xmlns:a16="http://schemas.microsoft.com/office/drawing/2014/main" id="{D0533D6D-0A37-4203-8758-FF3830EA2A08}"/>
               </a:ext>
             </a:extLst>
           </p:cNvPr>
@@ -4973,7 +5085,7 @@
           <p:nvPr/>
         </p:nvPicPr>
         <p:blipFill>
-          <a:blip xmlns:r="http://schemas.openxmlformats.org/officeDocument/2006/relationships" xmlns:a="http://schemas.openxmlformats.org/drawingml/2006/main" r:embed="R344d0a3a6fc84c08"/>
+          <a:blip xmlns:r="http://schemas.openxmlformats.org/officeDocument/2006/relationships" xmlns:a="http://schemas.openxmlformats.org/drawingml/2006/main" r:embed="Rcb6cf0eb8c6b4c31"/>
           <a:srcRect xmlns:a="http://schemas.openxmlformats.org/drawingml/2006/main" l="0" t="20551" r="0" b="20551"/>
           <a:stretch xmlns:a="http://schemas.openxmlformats.org/drawingml/2006/main">
             <a:fillRect l="0" t="0" r="0" b="0"/>
@@ -4996,7 +5108,7 @@
           <p:cNvPr id="7" name="">
             <a:extLst xmlns:a="http://schemas.openxmlformats.org/drawingml/2006/main">
               <a:ext uri="{FF2B5EF4-FFF2-40B4-BE49-F238E27FC236}">
-                <a16:creationId xmlns:a16="http://schemas.microsoft.com/office/drawing/2014/main" id="{BB9BC335-825E-4C0B-9AFE-901E2A039C5C}"/>
+                <a16:creationId xmlns:a16="http://schemas.microsoft.com/office/drawing/2014/main" id="{53E4CE49-6E11-46E7-82D0-B91FCCBD5706}"/>
               </a:ext>
             </a:extLst>
           </p:cNvPr>
@@ -5027,7 +5139,7 @@
           <p:cNvPr id="8" name="">
             <a:extLst xmlns:a="http://schemas.openxmlformats.org/drawingml/2006/main">
               <a:ext uri="{FF2B5EF4-FFF2-40B4-BE49-F238E27FC236}">
-                <a16:creationId xmlns:a16="http://schemas.microsoft.com/office/drawing/2014/main" id="{5E58A242-A0A5-43EB-8502-109563F92CAF}"/>
+                <a16:creationId xmlns:a16="http://schemas.microsoft.com/office/drawing/2014/main" id="{3D9F5439-0423-400B-8CE8-154A48DDFEBA}"/>
               </a:ext>
             </a:extLst>
           </p:cNvPr>
@@ -5039,7 +5151,7 @@
         <p:spPr>
           <a:xfrm xmlns:a="http://schemas.openxmlformats.org/drawingml/2006/main">
             <a:off x="5524500" y="2343150"/>
-            <a:ext cx="571500" cy="419100"/>
+            <a:ext cx="495300" cy="361950"/>
           </a:xfrm>
           <a:prstGeom xmlns:a="http://schemas.openxmlformats.org/drawingml/2006/main" prst="rect">
             <a:avLst/>
@@ -5056,7 +5168,7 @@
           </a:bodyPr>
           <a:lstStyle xmlns:a="http://schemas.openxmlformats.org/drawingml/2006/main">
             <a:defPPr algn="l">
-              <a:defRPr sz="2100" b="1">
+              <a:defRPr sz="2025" b="1">
                 <a:solidFill>
                   <a:srgbClr val="E9795B"/>
                 </a:solidFill>
@@ -5068,7 +5180,7 @@
           </a:lstStyle>
           <a:p xmlns:a="http://schemas.openxmlformats.org/drawingml/2006/main">
             <a:pPr algn="l">
-              <a:defRPr sz="2100" b="1">
+              <a:defRPr sz="2025" b="1">
                 <a:solidFill>
                   <a:srgbClr val="E9795B"/>
                 </a:solidFill>
@@ -5078,7 +5190,7 @@
               </a:defRPr>
             </a:pPr>
             <a:r>
-              <a:rPr sz="2100" b="1">
+              <a:rPr sz="2025" b="1">
                 <a:solidFill>
                   <a:srgbClr val="E9795B"/>
                 </a:solidFill>
@@ -5096,7 +5208,7 @@
           <p:cNvPr id="9" name="">
             <a:extLst xmlns:a="http://schemas.openxmlformats.org/drawingml/2006/main">
               <a:ext uri="{FF2B5EF4-FFF2-40B4-BE49-F238E27FC236}">
-                <a16:creationId xmlns:a16="http://schemas.microsoft.com/office/drawing/2014/main" id="{40E8A20B-CDC9-4862-8235-95C226047CC0}"/>
+                <a16:creationId xmlns:a16="http://schemas.microsoft.com/office/drawing/2014/main" id="{AFA81A1F-BC7A-478E-98B8-2F80DAE82458}"/>
               </a:ext>
             </a:extLst>
           </p:cNvPr>
@@ -5108,7 +5220,7 @@
         <p:spPr>
           <a:xfrm xmlns:a="http://schemas.openxmlformats.org/drawingml/2006/main">
             <a:off x="6019800" y="2419350"/>
-            <a:ext cx="1428750" cy="190500"/>
+            <a:ext cx="2095500" cy="171450"/>
           </a:xfrm>
           <a:prstGeom xmlns:a="http://schemas.openxmlformats.org/drawingml/2006/main" prst="rect">
             <a:avLst/>
@@ -5165,19 +5277,19 @@
           <p:cNvPr id="10" name="">
             <a:extLst xmlns:a="http://schemas.openxmlformats.org/drawingml/2006/main">
               <a:ext uri="{FF2B5EF4-FFF2-40B4-BE49-F238E27FC236}">
-                <a16:creationId xmlns:a16="http://schemas.microsoft.com/office/drawing/2014/main" id="{66E2A0C9-AF53-4840-9750-DD0A7CD6444E}"/>
-              </a:ext>
-            </a:extLst>
-          </p:cNvPr>
-          <p:cNvSpPr>
-            <a:spLocks xmlns:a="http://schemas.openxmlformats.org/drawingml/2006/main" noGrp="1"/>
-          </p:cNvSpPr>
-          <p:nvPr/>
-        </p:nvSpPr>
-        <p:spPr>
-          <a:xfrm xmlns:a="http://schemas.openxmlformats.org/drawingml/2006/main">
-            <a:off x="5524500" y="2800350"/>
-            <a:ext cx="2667000" cy="285750"/>
+                <a16:creationId xmlns:a16="http://schemas.microsoft.com/office/drawing/2014/main" id="{B3AA4BC2-1799-47B5-A206-AB1CE7B053B7}"/>
+              </a:ext>
+            </a:extLst>
+          </p:cNvPr>
+          <p:cNvSpPr>
+            <a:spLocks xmlns:a="http://schemas.openxmlformats.org/drawingml/2006/main" noGrp="1"/>
+          </p:cNvSpPr>
+          <p:nvPr/>
+        </p:nvSpPr>
+        <p:spPr>
+          <a:xfrm xmlns:a="http://schemas.openxmlformats.org/drawingml/2006/main">
+            <a:off x="5524500" y="2790825"/>
+            <a:ext cx="2619375" cy="590550"/>
           </a:xfrm>
           <a:prstGeom xmlns:a="http://schemas.openxmlformats.org/drawingml/2006/main" prst="rect">
             <a:avLst/>
@@ -5194,9 +5306,9 @@
           </a:bodyPr>
           <a:lstStyle xmlns:a="http://schemas.openxmlformats.org/drawingml/2006/main">
             <a:defPPr algn="l">
-              <a:defRPr sz="1575" b="1">
-                <a:solidFill>
-                  <a:srgbClr val="153B2E"/>
+              <a:defRPr sz="1275" b="0">
+                <a:solidFill>
+                  <a:srgbClr val="19332A"/>
                 </a:solidFill>
                 <a:latin typeface="Calibri"/>
                 <a:ea typeface="Calibri"/>
@@ -5206,9 +5318,9 @@
           </a:lstStyle>
           <a:p xmlns:a="http://schemas.openxmlformats.org/drawingml/2006/main">
             <a:pPr algn="l">
-              <a:defRPr sz="1575" b="1">
-                <a:solidFill>
-                  <a:srgbClr val="153B2E"/>
+              <a:defRPr sz="1275" b="0">
+                <a:solidFill>
+                  <a:srgbClr val="19332A"/>
                 </a:solidFill>
                 <a:latin typeface="Calibri"/>
                 <a:ea typeface="Calibri"/>
@@ -5216,15 +5328,15 @@
               </a:defRPr>
             </a:pPr>
             <a:r>
-              <a:rPr sz="1575" b="1">
-                <a:solidFill>
-                  <a:srgbClr val="153B2E"/>
+              <a:rPr sz="1275" b="0">
+                <a:solidFill>
+                  <a:srgbClr val="19332A"/>
                 </a:solidFill>
                 <a:latin typeface="Calibri"/>
                 <a:ea typeface="Calibri"/>
                 <a:cs typeface="Calibri"/>
               </a:rPr>
-              <a:t>PDF, PNG or JPG</a:t>
+              <a:t>PDF.js parses vector and raster plans in the browser.</a:t>
             </a:r>
           </a:p>
         </p:txBody>
@@ -5234,19 +5346,19 @@
           <p:cNvPr id="11" name="">
             <a:extLst xmlns:a="http://schemas.openxmlformats.org/drawingml/2006/main">
               <a:ext uri="{FF2B5EF4-FFF2-40B4-BE49-F238E27FC236}">
-                <a16:creationId xmlns:a16="http://schemas.microsoft.com/office/drawing/2014/main" id="{FECD596C-0D52-4C80-9CB9-9AB659806DD4}"/>
-              </a:ext>
-            </a:extLst>
-          </p:cNvPr>
-          <p:cNvSpPr>
-            <a:spLocks xmlns:a="http://schemas.openxmlformats.org/drawingml/2006/main" noGrp="1"/>
-          </p:cNvSpPr>
-          <p:nvPr/>
-        </p:nvSpPr>
-        <p:spPr>
-          <a:xfrm xmlns:a="http://schemas.openxmlformats.org/drawingml/2006/main">
-            <a:off x="5524500" y="3162300"/>
-            <a:ext cx="2667000" cy="514350"/>
+                <a16:creationId xmlns:a16="http://schemas.microsoft.com/office/drawing/2014/main" id="{4233CDC7-D178-47BA-AD03-A4B223FC394D}"/>
+              </a:ext>
+            </a:extLst>
+          </p:cNvPr>
+          <p:cNvSpPr>
+            <a:spLocks xmlns:a="http://schemas.openxmlformats.org/drawingml/2006/main" noGrp="1"/>
+          </p:cNvSpPr>
+          <p:nvPr/>
+        </p:nvSpPr>
+        <p:spPr>
+          <a:xfrm xmlns:a="http://schemas.openxmlformats.org/drawingml/2006/main">
+            <a:off x="8305800" y="2343150"/>
+            <a:ext cx="495300" cy="361950"/>
           </a:xfrm>
           <a:prstGeom xmlns:a="http://schemas.openxmlformats.org/drawingml/2006/main" prst="rect">
             <a:avLst/>
@@ -5263,9 +5375,9 @@
           </a:bodyPr>
           <a:lstStyle xmlns:a="http://schemas.openxmlformats.org/drawingml/2006/main">
             <a:defPPr algn="l">
-              <a:defRPr sz="1200" b="0">
-                <a:solidFill>
-                  <a:srgbClr val="60756A"/>
+              <a:defRPr sz="2025" b="1">
+                <a:solidFill>
+                  <a:srgbClr val="E9795B"/>
                 </a:solidFill>
                 <a:latin typeface="Calibri"/>
                 <a:ea typeface="Calibri"/>
@@ -5275,9 +5387,9 @@
           </a:lstStyle>
           <a:p xmlns:a="http://schemas.openxmlformats.org/drawingml/2006/main">
             <a:pPr algn="l">
-              <a:defRPr sz="1200" b="0">
-                <a:solidFill>
-                  <a:srgbClr val="60756A"/>
+              <a:defRPr sz="2025" b="1">
+                <a:solidFill>
+                  <a:srgbClr val="E9795B"/>
                 </a:solidFill>
                 <a:latin typeface="Calibri"/>
                 <a:ea typeface="Calibri"/>
@@ -5285,76 +5397,7 @@
               </a:defRPr>
             </a:pPr>
             <a:r>
-              <a:rPr sz="1200" b="0">
-                <a:solidFill>
-                  <a:srgbClr val="60756A"/>
-                </a:solidFill>
-                <a:latin typeface="Calibri"/>
-                <a:ea typeface="Calibri"/>
-                <a:cs typeface="Calibri"/>
-              </a:rPr>
-              <a:t>PDF.js parses plan documents in the browser.</a:t>
-            </a:r>
-          </a:p>
-        </p:txBody>
-      </p:sp>
-      <p:sp>
-        <p:nvSpPr>
-          <p:cNvPr id="12" name="">
-            <a:extLst xmlns:a="http://schemas.openxmlformats.org/drawingml/2006/main">
-              <a:ext uri="{FF2B5EF4-FFF2-40B4-BE49-F238E27FC236}">
-                <a16:creationId xmlns:a16="http://schemas.microsoft.com/office/drawing/2014/main" id="{7D794E94-5439-414E-BC96-84003075BA55}"/>
-              </a:ext>
-            </a:extLst>
-          </p:cNvPr>
-          <p:cNvSpPr>
-            <a:spLocks xmlns:a="http://schemas.openxmlformats.org/drawingml/2006/main" noGrp="1"/>
-          </p:cNvSpPr>
-          <p:nvPr/>
-        </p:nvSpPr>
-        <p:spPr>
-          <a:xfrm xmlns:a="http://schemas.openxmlformats.org/drawingml/2006/main">
-            <a:off x="8305800" y="2343150"/>
-            <a:ext cx="571500" cy="419100"/>
-          </a:xfrm>
-          <a:prstGeom xmlns:a="http://schemas.openxmlformats.org/drawingml/2006/main" prst="rect">
-            <a:avLst/>
-          </a:prstGeom>
-          <a:noFill xmlns:a="http://schemas.openxmlformats.org/drawingml/2006/main"/>
-          <a:ln xmlns:a="http://schemas.openxmlformats.org/drawingml/2006/main" w="0">
-            <a:noFill/>
-            <a:prstDash val="solid"/>
-          </a:ln>
-        </p:spPr>
-        <p:txBody>
-          <a:bodyPr xmlns:a="http://schemas.openxmlformats.org/drawingml/2006/main" wrap="square" lIns="0" tIns="0" rIns="0" bIns="0" anchor="t">
-            <a:normAutofit fontScale="100000"/>
-          </a:bodyPr>
-          <a:lstStyle xmlns:a="http://schemas.openxmlformats.org/drawingml/2006/main">
-            <a:defPPr algn="l">
-              <a:defRPr sz="2100" b="1">
-                <a:solidFill>
-                  <a:srgbClr val="E9795B"/>
-                </a:solidFill>
-                <a:latin typeface="Calibri"/>
-                <a:ea typeface="Calibri"/>
-                <a:cs typeface="Calibri"/>
-              </a:defRPr>
-            </a:defPPr>
-          </a:lstStyle>
-          <a:p xmlns:a="http://schemas.openxmlformats.org/drawingml/2006/main">
-            <a:pPr algn="l">
-              <a:defRPr sz="2100" b="1">
-                <a:solidFill>
-                  <a:srgbClr val="E9795B"/>
-                </a:solidFill>
-                <a:latin typeface="Calibri"/>
-                <a:ea typeface="Calibri"/>
-                <a:cs typeface="Calibri"/>
-              </a:defRPr>
-            </a:pPr>
-            <a:r>
-              <a:rPr sz="2100" b="1">
+              <a:rPr sz="2025" b="1">
                 <a:solidFill>
                   <a:srgbClr val="E9795B"/>
                 </a:solidFill>
@@ -5369,10 +5412,10 @@
       </p:sp>
       <p:sp>
         <p:nvSpPr>
-          <p:cNvPr id="13" name="">
-            <a:extLst xmlns:a="http://schemas.openxmlformats.org/drawingml/2006/main">
-              <a:ext uri="{FF2B5EF4-FFF2-40B4-BE49-F238E27FC236}">
-                <a16:creationId xmlns:a16="http://schemas.microsoft.com/office/drawing/2014/main" id="{96E10555-D196-4BD9-B034-E3574164EC09}"/>
+          <p:cNvPr id="12" name="">
+            <a:extLst xmlns:a="http://schemas.openxmlformats.org/drawingml/2006/main">
+              <a:ext uri="{FF2B5EF4-FFF2-40B4-BE49-F238E27FC236}">
+                <a16:creationId xmlns:a16="http://schemas.microsoft.com/office/drawing/2014/main" id="{BE99E160-3CB8-4874-AA3B-AB143C1E73D1}"/>
               </a:ext>
             </a:extLst>
           </p:cNvPr>
@@ -5384,7 +5427,7 @@
         <p:spPr>
           <a:xfrm xmlns:a="http://schemas.openxmlformats.org/drawingml/2006/main">
             <a:off x="8801100" y="2419350"/>
-            <a:ext cx="2095500" cy="190500"/>
+            <a:ext cx="2095500" cy="171450"/>
           </a:xfrm>
           <a:prstGeom xmlns:a="http://schemas.openxmlformats.org/drawingml/2006/main" prst="rect">
             <a:avLst/>
@@ -5431,29 +5474,29 @@
                 <a:ea typeface="Calibri"/>
                 <a:cs typeface="Calibri"/>
               </a:rPr>
-              <a:t>RECONSTRUCT</a:t>
-            </a:r>
-          </a:p>
-        </p:txBody>
-      </p:sp>
-      <p:sp>
-        <p:nvSpPr>
-          <p:cNvPr id="14" name="">
-            <a:extLst xmlns:a="http://schemas.openxmlformats.org/drawingml/2006/main">
-              <a:ext uri="{FF2B5EF4-FFF2-40B4-BE49-F238E27FC236}">
-                <a16:creationId xmlns:a16="http://schemas.microsoft.com/office/drawing/2014/main" id="{5361C79F-5305-4B2C-A7F7-F4A42FD92EFD}"/>
-              </a:ext>
-            </a:extLst>
-          </p:cNvPr>
-          <p:cNvSpPr>
-            <a:spLocks xmlns:a="http://schemas.openxmlformats.org/drawingml/2006/main" noGrp="1"/>
-          </p:cNvSpPr>
-          <p:nvPr/>
-        </p:nvSpPr>
-        <p:spPr>
-          <a:xfrm xmlns:a="http://schemas.openxmlformats.org/drawingml/2006/main">
-            <a:off x="8305800" y="2800350"/>
-            <a:ext cx="2857500" cy="285750"/>
+              <a:t>INTERPRET</a:t>
+            </a:r>
+          </a:p>
+        </p:txBody>
+      </p:sp>
+      <p:sp>
+        <p:nvSpPr>
+          <p:cNvPr id="13" name="">
+            <a:extLst xmlns:a="http://schemas.openxmlformats.org/drawingml/2006/main">
+              <a:ext uri="{FF2B5EF4-FFF2-40B4-BE49-F238E27FC236}">
+                <a16:creationId xmlns:a16="http://schemas.microsoft.com/office/drawing/2014/main" id="{98924EF8-E82D-4522-8C15-791D0962CB81}"/>
+              </a:ext>
+            </a:extLst>
+          </p:cNvPr>
+          <p:cNvSpPr>
+            <a:spLocks xmlns:a="http://schemas.openxmlformats.org/drawingml/2006/main" noGrp="1"/>
+          </p:cNvSpPr>
+          <p:nvPr/>
+        </p:nvSpPr>
+        <p:spPr>
+          <a:xfrm xmlns:a="http://schemas.openxmlformats.org/drawingml/2006/main">
+            <a:off x="8305800" y="2790825"/>
+            <a:ext cx="2619375" cy="590550"/>
           </a:xfrm>
           <a:prstGeom xmlns:a="http://schemas.openxmlformats.org/drawingml/2006/main" prst="rect">
             <a:avLst/>
@@ -5470,9 +5513,9 @@
           </a:bodyPr>
           <a:lstStyle xmlns:a="http://schemas.openxmlformats.org/drawingml/2006/main">
             <a:defPPr algn="l">
-              <a:defRPr sz="1575" b="1">
-                <a:solidFill>
-                  <a:srgbClr val="153B2E"/>
+              <a:defRPr sz="1275" b="0">
+                <a:solidFill>
+                  <a:srgbClr val="19332A"/>
                 </a:solidFill>
                 <a:latin typeface="Calibri"/>
                 <a:ea typeface="Calibri"/>
@@ -5482,9 +5525,9 @@
           </a:lstStyle>
           <a:p xmlns:a="http://schemas.openxmlformats.org/drawingml/2006/main">
             <a:pPr algn="l">
-              <a:defRPr sz="1575" b="1">
-                <a:solidFill>
-                  <a:srgbClr val="153B2E"/>
+              <a:defRPr sz="1275" b="0">
+                <a:solidFill>
+                  <a:srgbClr val="19332A"/>
                 </a:solidFill>
                 <a:latin typeface="Calibri"/>
                 <a:ea typeface="Calibri"/>
@@ -5492,37 +5535,37 @@
               </a:defRPr>
             </a:pPr>
             <a:r>
-              <a:rPr sz="1575" b="1">
-                <a:solidFill>
-                  <a:srgbClr val="153B2E"/>
+              <a:rPr sz="1275" b="0">
+                <a:solidFill>
+                  <a:srgbClr val="19332A"/>
                 </a:solidFill>
                 <a:latin typeface="Calibri"/>
                 <a:ea typeface="Calibri"/>
                 <a:cs typeface="Calibri"/>
               </a:rPr>
-              <a:t>Map the spaces</a:t>
-            </a:r>
-          </a:p>
-        </p:txBody>
-      </p:sp>
-      <p:sp>
-        <p:nvSpPr>
-          <p:cNvPr id="15" name="">
-            <a:extLst xmlns:a="http://schemas.openxmlformats.org/drawingml/2006/main">
-              <a:ext uri="{FF2B5EF4-FFF2-40B4-BE49-F238E27FC236}">
-                <a16:creationId xmlns:a16="http://schemas.microsoft.com/office/drawing/2014/main" id="{741B6CE0-A551-431B-B4E9-7A5EC3F28450}"/>
-              </a:ext>
-            </a:extLst>
-          </p:cNvPr>
-          <p:cNvSpPr>
-            <a:spLocks xmlns:a="http://schemas.openxmlformats.org/drawingml/2006/main" noGrp="1"/>
-          </p:cNvSpPr>
-          <p:nvPr/>
-        </p:nvSpPr>
-        <p:spPr>
-          <a:xfrm xmlns:a="http://schemas.openxmlformats.org/drawingml/2006/main">
-            <a:off x="8305800" y="3162300"/>
-            <a:ext cx="2857500" cy="514350"/>
+              <a:t>Optional Gemini Vision helps analyze new uploads.</a:t>
+            </a:r>
+          </a:p>
+        </p:txBody>
+      </p:sp>
+      <p:sp>
+        <p:nvSpPr>
+          <p:cNvPr id="14" name="">
+            <a:extLst xmlns:a="http://schemas.openxmlformats.org/drawingml/2006/main">
+              <a:ext uri="{FF2B5EF4-FFF2-40B4-BE49-F238E27FC236}">
+                <a16:creationId xmlns:a16="http://schemas.microsoft.com/office/drawing/2014/main" id="{3A84714E-201B-4F7F-81FF-5E5B3172AA68}"/>
+              </a:ext>
+            </a:extLst>
+          </p:cNvPr>
+          <p:cNvSpPr>
+            <a:spLocks xmlns:a="http://schemas.openxmlformats.org/drawingml/2006/main" noGrp="1"/>
+          </p:cNvSpPr>
+          <p:nvPr/>
+        </p:nvSpPr>
+        <p:spPr>
+          <a:xfrm xmlns:a="http://schemas.openxmlformats.org/drawingml/2006/main">
+            <a:off x="5524500" y="4171950"/>
+            <a:ext cx="495300" cy="361950"/>
           </a:xfrm>
           <a:prstGeom xmlns:a="http://schemas.openxmlformats.org/drawingml/2006/main" prst="rect">
             <a:avLst/>
@@ -5539,9 +5582,9 @@
           </a:bodyPr>
           <a:lstStyle xmlns:a="http://schemas.openxmlformats.org/drawingml/2006/main">
             <a:defPPr algn="l">
-              <a:defRPr sz="1200" b="0">
-                <a:solidFill>
-                  <a:srgbClr val="60756A"/>
+              <a:defRPr sz="2025" b="1">
+                <a:solidFill>
+                  <a:srgbClr val="E9795B"/>
                 </a:solidFill>
                 <a:latin typeface="Calibri"/>
                 <a:ea typeface="Calibri"/>
@@ -5551,9 +5594,9 @@
           </a:lstStyle>
           <a:p xmlns:a="http://schemas.openxmlformats.org/drawingml/2006/main">
             <a:pPr algn="l">
-              <a:defRPr sz="1200" b="0">
-                <a:solidFill>
-                  <a:srgbClr val="60756A"/>
+              <a:defRPr sz="2025" b="1">
+                <a:solidFill>
+                  <a:srgbClr val="E9795B"/>
                 </a:solidFill>
                 <a:latin typeface="Calibri"/>
                 <a:ea typeface="Calibri"/>
@@ -5561,76 +5604,7 @@
               </a:defRPr>
             </a:pPr>
             <a:r>
-              <a:rPr sz="1200" b="0">
-                <a:solidFill>
-                  <a:srgbClr val="60756A"/>
-                </a:solidFill>
-                <a:latin typeface="Calibri"/>
-                <a:ea typeface="Calibri"/>
-                <a:cs typeface="Calibri"/>
-              </a:rPr>
-              <a:t>Optional Gemini Vision helps interpret custom uploads.</a:t>
-            </a:r>
-          </a:p>
-        </p:txBody>
-      </p:sp>
-      <p:sp>
-        <p:nvSpPr>
-          <p:cNvPr id="16" name="">
-            <a:extLst xmlns:a="http://schemas.openxmlformats.org/drawingml/2006/main">
-              <a:ext uri="{FF2B5EF4-FFF2-40B4-BE49-F238E27FC236}">
-                <a16:creationId xmlns:a16="http://schemas.microsoft.com/office/drawing/2014/main" id="{034B3E37-B7DD-4951-973E-580AE7B8B179}"/>
-              </a:ext>
-            </a:extLst>
-          </p:cNvPr>
-          <p:cNvSpPr>
-            <a:spLocks xmlns:a="http://schemas.openxmlformats.org/drawingml/2006/main" noGrp="1"/>
-          </p:cNvSpPr>
-          <p:nvPr/>
-        </p:nvSpPr>
-        <p:spPr>
-          <a:xfrm xmlns:a="http://schemas.openxmlformats.org/drawingml/2006/main">
-            <a:off x="5524500" y="4171950"/>
-            <a:ext cx="571500" cy="419100"/>
-          </a:xfrm>
-          <a:prstGeom xmlns:a="http://schemas.openxmlformats.org/drawingml/2006/main" prst="rect">
-            <a:avLst/>
-          </a:prstGeom>
-          <a:noFill xmlns:a="http://schemas.openxmlformats.org/drawingml/2006/main"/>
-          <a:ln xmlns:a="http://schemas.openxmlformats.org/drawingml/2006/main" w="0">
-            <a:noFill/>
-            <a:prstDash val="solid"/>
-          </a:ln>
-        </p:spPr>
-        <p:txBody>
-          <a:bodyPr xmlns:a="http://schemas.openxmlformats.org/drawingml/2006/main" wrap="square" lIns="0" tIns="0" rIns="0" bIns="0" anchor="t">
-            <a:normAutofit fontScale="100000"/>
-          </a:bodyPr>
-          <a:lstStyle xmlns:a="http://schemas.openxmlformats.org/drawingml/2006/main">
-            <a:defPPr algn="l">
-              <a:defRPr sz="2100" b="1">
-                <a:solidFill>
-                  <a:srgbClr val="E9795B"/>
-                </a:solidFill>
-                <a:latin typeface="Calibri"/>
-                <a:ea typeface="Calibri"/>
-                <a:cs typeface="Calibri"/>
-              </a:defRPr>
-            </a:defPPr>
-          </a:lstStyle>
-          <a:p xmlns:a="http://schemas.openxmlformats.org/drawingml/2006/main">
-            <a:pPr algn="l">
-              <a:defRPr sz="2100" b="1">
-                <a:solidFill>
-                  <a:srgbClr val="E9795B"/>
-                </a:solidFill>
-                <a:latin typeface="Calibri"/>
-                <a:ea typeface="Calibri"/>
-                <a:cs typeface="Calibri"/>
-              </a:defRPr>
-            </a:pPr>
-            <a:r>
-              <a:rPr sz="2100" b="1">
+              <a:rPr sz="2025" b="1">
                 <a:solidFill>
                   <a:srgbClr val="E9795B"/>
                 </a:solidFill>
@@ -5645,10 +5619,10 @@
       </p:sp>
       <p:sp>
         <p:nvSpPr>
-          <p:cNvPr id="17" name="">
-            <a:extLst xmlns:a="http://schemas.openxmlformats.org/drawingml/2006/main">
-              <a:ext uri="{FF2B5EF4-FFF2-40B4-BE49-F238E27FC236}">
-                <a16:creationId xmlns:a16="http://schemas.microsoft.com/office/drawing/2014/main" id="{AD9A7B18-546E-487D-950C-BDC72CC6124B}"/>
+          <p:cNvPr id="15" name="">
+            <a:extLst xmlns:a="http://schemas.openxmlformats.org/drawingml/2006/main">
+              <a:ext uri="{FF2B5EF4-FFF2-40B4-BE49-F238E27FC236}">
+                <a16:creationId xmlns:a16="http://schemas.microsoft.com/office/drawing/2014/main" id="{925BEB68-64BB-4D9F-A7BC-48B7C21821C2}"/>
               </a:ext>
             </a:extLst>
           </p:cNvPr>
@@ -5660,7 +5634,7 @@
         <p:spPr>
           <a:xfrm xmlns:a="http://schemas.openxmlformats.org/drawingml/2006/main">
             <a:off x="6019800" y="4248150"/>
-            <a:ext cx="1428750" cy="190500"/>
+            <a:ext cx="2095500" cy="171450"/>
           </a:xfrm>
           <a:prstGeom xmlns:a="http://schemas.openxmlformats.org/drawingml/2006/main" prst="rect">
             <a:avLst/>
@@ -5707,29 +5681,29 @@
                 <a:ea typeface="Calibri"/>
                 <a:cs typeface="Calibri"/>
               </a:rPr>
-              <a:t>BUILD</a:t>
-            </a:r>
-          </a:p>
-        </p:txBody>
-      </p:sp>
-      <p:sp>
-        <p:nvSpPr>
-          <p:cNvPr id="18" name="">
-            <a:extLst xmlns:a="http://schemas.openxmlformats.org/drawingml/2006/main">
-              <a:ext uri="{FF2B5EF4-FFF2-40B4-BE49-F238E27FC236}">
-                <a16:creationId xmlns:a16="http://schemas.microsoft.com/office/drawing/2014/main" id="{43E147F4-B8AD-4B83-BB55-5D51F0E9B077}"/>
-              </a:ext>
-            </a:extLst>
-          </p:cNvPr>
-          <p:cNvSpPr>
-            <a:spLocks xmlns:a="http://schemas.openxmlformats.org/drawingml/2006/main" noGrp="1"/>
-          </p:cNvSpPr>
-          <p:nvPr/>
-        </p:nvSpPr>
-        <p:spPr>
-          <a:xfrm xmlns:a="http://schemas.openxmlformats.org/drawingml/2006/main">
-            <a:off x="5524500" y="4629150"/>
-            <a:ext cx="2667000" cy="285750"/>
+              <a:t>RECONSTRUCT</a:t>
+            </a:r>
+          </a:p>
+        </p:txBody>
+      </p:sp>
+      <p:sp>
+        <p:nvSpPr>
+          <p:cNvPr id="16" name="">
+            <a:extLst xmlns:a="http://schemas.openxmlformats.org/drawingml/2006/main">
+              <a:ext uri="{FF2B5EF4-FFF2-40B4-BE49-F238E27FC236}">
+                <a16:creationId xmlns:a16="http://schemas.microsoft.com/office/drawing/2014/main" id="{16AB1EEB-C516-4517-B758-9456892C84F4}"/>
+              </a:ext>
+            </a:extLst>
+          </p:cNvPr>
+          <p:cNvSpPr>
+            <a:spLocks xmlns:a="http://schemas.openxmlformats.org/drawingml/2006/main" noGrp="1"/>
+          </p:cNvSpPr>
+          <p:nvPr/>
+        </p:nvSpPr>
+        <p:spPr>
+          <a:xfrm xmlns:a="http://schemas.openxmlformats.org/drawingml/2006/main">
+            <a:off x="5524500" y="4619625"/>
+            <a:ext cx="2619375" cy="590550"/>
           </a:xfrm>
           <a:prstGeom xmlns:a="http://schemas.openxmlformats.org/drawingml/2006/main" prst="rect">
             <a:avLst/>
@@ -5746,9 +5720,9 @@
           </a:bodyPr>
           <a:lstStyle xmlns:a="http://schemas.openxmlformats.org/drawingml/2006/main">
             <a:defPPr algn="l">
-              <a:defRPr sz="1575" b="1">
-                <a:solidFill>
-                  <a:srgbClr val="153B2E"/>
+              <a:defRPr sz="1275" b="0">
+                <a:solidFill>
+                  <a:srgbClr val="19332A"/>
                 </a:solidFill>
                 <a:latin typeface="Calibri"/>
                 <a:ea typeface="Calibri"/>
@@ -5758,9 +5732,9 @@
           </a:lstStyle>
           <a:p xmlns:a="http://schemas.openxmlformats.org/drawingml/2006/main">
             <a:pPr algn="l">
-              <a:defRPr sz="1575" b="1">
-                <a:solidFill>
-                  <a:srgbClr val="153B2E"/>
+              <a:defRPr sz="1275" b="0">
+                <a:solidFill>
+                  <a:srgbClr val="19332A"/>
                 </a:solidFill>
                 <a:latin typeface="Calibri"/>
                 <a:ea typeface="Calibri"/>
@@ -5768,37 +5742,37 @@
               </a:defRPr>
             </a:pPr>
             <a:r>
-              <a:rPr sz="1575" b="1">
-                <a:solidFill>
-                  <a:srgbClr val="153B2E"/>
+              <a:rPr sz="1275" b="0">
+                <a:solidFill>
+                  <a:srgbClr val="19332A"/>
                 </a:solidFill>
                 <a:latin typeface="Calibri"/>
                 <a:ea typeface="Calibri"/>
                 <a:cs typeface="Calibri"/>
               </a:rPr>
-              <a:t>Three.js assembles</a:t>
-            </a:r>
-          </a:p>
-        </p:txBody>
-      </p:sp>
-      <p:sp>
-        <p:nvSpPr>
-          <p:cNvPr id="19" name="">
-            <a:extLst xmlns:a="http://schemas.openxmlformats.org/drawingml/2006/main">
-              <a:ext uri="{FF2B5EF4-FFF2-40B4-BE49-F238E27FC236}">
-                <a16:creationId xmlns:a16="http://schemas.microsoft.com/office/drawing/2014/main" id="{69173EB9-E49E-4C5D-91A1-82DF4A040DBA}"/>
-              </a:ext>
-            </a:extLst>
-          </p:cNvPr>
-          <p:cNvSpPr>
-            <a:spLocks xmlns:a="http://schemas.openxmlformats.org/drawingml/2006/main" noGrp="1"/>
-          </p:cNvSpPr>
-          <p:nvPr/>
-        </p:nvSpPr>
-        <p:spPr>
-          <a:xfrm xmlns:a="http://schemas.openxmlformats.org/drawingml/2006/main">
-            <a:off x="5524500" y="4991100"/>
-            <a:ext cx="2667000" cy="552450"/>
+              <a:t>A structured plan drives walls, floors, doors and stairs.</a:t>
+            </a:r>
+          </a:p>
+        </p:txBody>
+      </p:sp>
+      <p:sp>
+        <p:nvSpPr>
+          <p:cNvPr id="17" name="">
+            <a:extLst xmlns:a="http://schemas.openxmlformats.org/drawingml/2006/main">
+              <a:ext uri="{FF2B5EF4-FFF2-40B4-BE49-F238E27FC236}">
+                <a16:creationId xmlns:a16="http://schemas.microsoft.com/office/drawing/2014/main" id="{542C2369-F676-44D2-B0DC-504C866156A8}"/>
+              </a:ext>
+            </a:extLst>
+          </p:cNvPr>
+          <p:cNvSpPr>
+            <a:spLocks xmlns:a="http://schemas.openxmlformats.org/drawingml/2006/main" noGrp="1"/>
+          </p:cNvSpPr>
+          <p:nvPr/>
+        </p:nvSpPr>
+        <p:spPr>
+          <a:xfrm xmlns:a="http://schemas.openxmlformats.org/drawingml/2006/main">
+            <a:off x="8305800" y="4171950"/>
+            <a:ext cx="495300" cy="361950"/>
           </a:xfrm>
           <a:prstGeom xmlns:a="http://schemas.openxmlformats.org/drawingml/2006/main" prst="rect">
             <a:avLst/>
@@ -5815,9 +5789,9 @@
           </a:bodyPr>
           <a:lstStyle xmlns:a="http://schemas.openxmlformats.org/drawingml/2006/main">
             <a:defPPr algn="l">
-              <a:defRPr sz="1200" b="0">
-                <a:solidFill>
-                  <a:srgbClr val="60756A"/>
+              <a:defRPr sz="2025" b="1">
+                <a:solidFill>
+                  <a:srgbClr val="E9795B"/>
                 </a:solidFill>
                 <a:latin typeface="Calibri"/>
                 <a:ea typeface="Calibri"/>
@@ -5827,9 +5801,9 @@
           </a:lstStyle>
           <a:p xmlns:a="http://schemas.openxmlformats.org/drawingml/2006/main">
             <a:pPr algn="l">
-              <a:defRPr sz="1200" b="0">
-                <a:solidFill>
-                  <a:srgbClr val="60756A"/>
+              <a:defRPr sz="2025" b="1">
+                <a:solidFill>
+                  <a:srgbClr val="E9795B"/>
                 </a:solidFill>
                 <a:latin typeface="Calibri"/>
                 <a:ea typeface="Calibri"/>
@@ -5837,76 +5811,7 @@
               </a:defRPr>
             </a:pPr>
             <a:r>
-              <a:rPr sz="1200" b="0">
-                <a:solidFill>
-                  <a:srgbClr val="60756A"/>
-                </a:solidFill>
-                <a:latin typeface="Calibri"/>
-                <a:ea typeface="Calibri"/>
-                <a:cs typeface="Calibri"/>
-              </a:rPr>
-              <a:t>Walls, floors, doors and stairs become an interactive model.</a:t>
-            </a:r>
-          </a:p>
-        </p:txBody>
-      </p:sp>
-      <p:sp>
-        <p:nvSpPr>
-          <p:cNvPr id="20" name="">
-            <a:extLst xmlns:a="http://schemas.openxmlformats.org/drawingml/2006/main">
-              <a:ext uri="{FF2B5EF4-FFF2-40B4-BE49-F238E27FC236}">
-                <a16:creationId xmlns:a16="http://schemas.microsoft.com/office/drawing/2014/main" id="{154D5FEA-BF7B-4C48-83A5-AD141AF815AC}"/>
-              </a:ext>
-            </a:extLst>
-          </p:cNvPr>
-          <p:cNvSpPr>
-            <a:spLocks xmlns:a="http://schemas.openxmlformats.org/drawingml/2006/main" noGrp="1"/>
-          </p:cNvSpPr>
-          <p:nvPr/>
-        </p:nvSpPr>
-        <p:spPr>
-          <a:xfrm xmlns:a="http://schemas.openxmlformats.org/drawingml/2006/main">
-            <a:off x="8305800" y="4171950"/>
-            <a:ext cx="571500" cy="419100"/>
-          </a:xfrm>
-          <a:prstGeom xmlns:a="http://schemas.openxmlformats.org/drawingml/2006/main" prst="rect">
-            <a:avLst/>
-          </a:prstGeom>
-          <a:noFill xmlns:a="http://schemas.openxmlformats.org/drawingml/2006/main"/>
-          <a:ln xmlns:a="http://schemas.openxmlformats.org/drawingml/2006/main" w="0">
-            <a:noFill/>
-            <a:prstDash val="solid"/>
-          </a:ln>
-        </p:spPr>
-        <p:txBody>
-          <a:bodyPr xmlns:a="http://schemas.openxmlformats.org/drawingml/2006/main" wrap="square" lIns="0" tIns="0" rIns="0" bIns="0" anchor="t">
-            <a:normAutofit fontScale="100000"/>
-          </a:bodyPr>
-          <a:lstStyle xmlns:a="http://schemas.openxmlformats.org/drawingml/2006/main">
-            <a:defPPr algn="l">
-              <a:defRPr sz="2100" b="1">
-                <a:solidFill>
-                  <a:srgbClr val="E9795B"/>
-                </a:solidFill>
-                <a:latin typeface="Calibri"/>
-                <a:ea typeface="Calibri"/>
-                <a:cs typeface="Calibri"/>
-              </a:defRPr>
-            </a:defPPr>
-          </a:lstStyle>
-          <a:p xmlns:a="http://schemas.openxmlformats.org/drawingml/2006/main">
-            <a:pPr algn="l">
-              <a:defRPr sz="2100" b="1">
-                <a:solidFill>
-                  <a:srgbClr val="E9795B"/>
-                </a:solidFill>
-                <a:latin typeface="Calibri"/>
-                <a:ea typeface="Calibri"/>
-                <a:cs typeface="Calibri"/>
-              </a:defRPr>
-            </a:pPr>
-            <a:r>
-              <a:rPr sz="2100" b="1">
+              <a:rPr sz="2025" b="1">
                 <a:solidFill>
                   <a:srgbClr val="E9795B"/>
                 </a:solidFill>
@@ -5921,10 +5826,10 @@
       </p:sp>
       <p:sp>
         <p:nvSpPr>
-          <p:cNvPr id="21" name="">
-            <a:extLst xmlns:a="http://schemas.openxmlformats.org/drawingml/2006/main">
-              <a:ext uri="{FF2B5EF4-FFF2-40B4-BE49-F238E27FC236}">
-                <a16:creationId xmlns:a16="http://schemas.microsoft.com/office/drawing/2014/main" id="{8E33A868-CCAC-4B23-A112-50D4956A7EEA}"/>
+          <p:cNvPr id="18" name="">
+            <a:extLst xmlns:a="http://schemas.openxmlformats.org/drawingml/2006/main">
+              <a:ext uri="{FF2B5EF4-FFF2-40B4-BE49-F238E27FC236}">
+                <a16:creationId xmlns:a16="http://schemas.microsoft.com/office/drawing/2014/main" id="{4FDF514A-375C-462E-9964-63A344EFAB88}"/>
               </a:ext>
             </a:extLst>
           </p:cNvPr>
@@ -5936,7 +5841,7 @@
         <p:spPr>
           <a:xfrm xmlns:a="http://schemas.openxmlformats.org/drawingml/2006/main">
             <a:off x="8801100" y="4248150"/>
-            <a:ext cx="1714500" cy="190500"/>
+            <a:ext cx="2095500" cy="171450"/>
           </a:xfrm>
           <a:prstGeom xmlns:a="http://schemas.openxmlformats.org/drawingml/2006/main" prst="rect">
             <a:avLst/>
@@ -5990,22 +5895,22 @@
       </p:sp>
       <p:sp>
         <p:nvSpPr>
-          <p:cNvPr id="22" name="">
-            <a:extLst xmlns:a="http://schemas.openxmlformats.org/drawingml/2006/main">
-              <a:ext uri="{FF2B5EF4-FFF2-40B4-BE49-F238E27FC236}">
-                <a16:creationId xmlns:a16="http://schemas.microsoft.com/office/drawing/2014/main" id="{7A731484-2458-44AB-9C3F-FFF0EB47034F}"/>
-              </a:ext>
-            </a:extLst>
-          </p:cNvPr>
-          <p:cNvSpPr>
-            <a:spLocks xmlns:a="http://schemas.openxmlformats.org/drawingml/2006/main" noGrp="1"/>
-          </p:cNvSpPr>
-          <p:nvPr/>
-        </p:nvSpPr>
-        <p:spPr>
-          <a:xfrm xmlns:a="http://schemas.openxmlformats.org/drawingml/2006/main">
-            <a:off x="8305800" y="4629150"/>
-            <a:ext cx="2857500" cy="285750"/>
+          <p:cNvPr id="19" name="">
+            <a:extLst xmlns:a="http://schemas.openxmlformats.org/drawingml/2006/main">
+              <a:ext uri="{FF2B5EF4-FFF2-40B4-BE49-F238E27FC236}">
+                <a16:creationId xmlns:a16="http://schemas.microsoft.com/office/drawing/2014/main" id="{01A6DE41-316B-49CE-B70D-63183C65CD8D}"/>
+              </a:ext>
+            </a:extLst>
+          </p:cNvPr>
+          <p:cNvSpPr>
+            <a:spLocks xmlns:a="http://schemas.openxmlformats.org/drawingml/2006/main" noGrp="1"/>
+          </p:cNvSpPr>
+          <p:nvPr/>
+        </p:nvSpPr>
+        <p:spPr>
+          <a:xfrm xmlns:a="http://schemas.openxmlformats.org/drawingml/2006/main">
+            <a:off x="8305800" y="4619625"/>
+            <a:ext cx="2619375" cy="590550"/>
           </a:xfrm>
           <a:prstGeom xmlns:a="http://schemas.openxmlformats.org/drawingml/2006/main" prst="rect">
             <a:avLst/>
@@ -6022,9 +5927,9 @@
           </a:bodyPr>
           <a:lstStyle xmlns:a="http://schemas.openxmlformats.org/drawingml/2006/main">
             <a:defPPr algn="l">
-              <a:defRPr sz="1575" b="1">
-                <a:solidFill>
-                  <a:srgbClr val="153B2E"/>
+              <a:defRPr sz="1275" b="0">
+                <a:solidFill>
+                  <a:srgbClr val="19332A"/>
                 </a:solidFill>
                 <a:latin typeface="Calibri"/>
                 <a:ea typeface="Calibri"/>
@@ -6034,9 +5939,9 @@
           </a:lstStyle>
           <a:p xmlns:a="http://schemas.openxmlformats.org/drawingml/2006/main">
             <a:pPr algn="l">
-              <a:defRPr sz="1575" b="1">
-                <a:solidFill>
-                  <a:srgbClr val="153B2E"/>
+              <a:defRPr sz="1275" b="0">
+                <a:solidFill>
+                  <a:srgbClr val="19332A"/>
                 </a:solidFill>
                 <a:latin typeface="Calibri"/>
                 <a:ea typeface="Calibri"/>
@@ -6044,84 +5949,15 @@
               </a:defRPr>
             </a:pPr>
             <a:r>
-              <a:rPr sz="1575" b="1">
-                <a:solidFill>
-                  <a:srgbClr val="153B2E"/>
+              <a:rPr sz="1275" b="0">
+                <a:solidFill>
+                  <a:srgbClr val="19332A"/>
                 </a:solidFill>
                 <a:latin typeface="Calibri"/>
                 <a:ea typeface="Calibri"/>
                 <a:cs typeface="Calibri"/>
               </a:rPr>
-              <a:t>Walk or orbit</a:t>
-            </a:r>
-          </a:p>
-        </p:txBody>
-      </p:sp>
-      <p:sp>
-        <p:nvSpPr>
-          <p:cNvPr id="23" name="">
-            <a:extLst xmlns:a="http://schemas.openxmlformats.org/drawingml/2006/main">
-              <a:ext uri="{FF2B5EF4-FFF2-40B4-BE49-F238E27FC236}">
-                <a16:creationId xmlns:a16="http://schemas.microsoft.com/office/drawing/2014/main" id="{C0F8A22B-94FF-4C7D-AF21-6CDF08AE258E}"/>
-              </a:ext>
-            </a:extLst>
-          </p:cNvPr>
-          <p:cNvSpPr>
-            <a:spLocks xmlns:a="http://schemas.openxmlformats.org/drawingml/2006/main" noGrp="1"/>
-          </p:cNvSpPr>
-          <p:nvPr/>
-        </p:nvSpPr>
-        <p:spPr>
-          <a:xfrm xmlns:a="http://schemas.openxmlformats.org/drawingml/2006/main">
-            <a:off x="8305800" y="4991100"/>
-            <a:ext cx="2857500" cy="571500"/>
-          </a:xfrm>
-          <a:prstGeom xmlns:a="http://schemas.openxmlformats.org/drawingml/2006/main" prst="rect">
-            <a:avLst/>
-          </a:prstGeom>
-          <a:noFill xmlns:a="http://schemas.openxmlformats.org/drawingml/2006/main"/>
-          <a:ln xmlns:a="http://schemas.openxmlformats.org/drawingml/2006/main" w="0">
-            <a:noFill/>
-            <a:prstDash val="solid"/>
-          </a:ln>
-        </p:spPr>
-        <p:txBody>
-          <a:bodyPr xmlns:a="http://schemas.openxmlformats.org/drawingml/2006/main" wrap="square" lIns="0" tIns="0" rIns="0" bIns="0" anchor="t">
-            <a:normAutofit fontScale="100000"/>
-          </a:bodyPr>
-          <a:lstStyle xmlns:a="http://schemas.openxmlformats.org/drawingml/2006/main">
-            <a:defPPr algn="l">
-              <a:defRPr sz="1200" b="0">
-                <a:solidFill>
-                  <a:srgbClr val="60756A"/>
-                </a:solidFill>
-                <a:latin typeface="Calibri"/>
-                <a:ea typeface="Calibri"/>
-                <a:cs typeface="Calibri"/>
-              </a:defRPr>
-            </a:defPPr>
-          </a:lstStyle>
-          <a:p xmlns:a="http://schemas.openxmlformats.org/drawingml/2006/main">
-            <a:pPr algn="l">
-              <a:defRPr sz="1200" b="0">
-                <a:solidFill>
-                  <a:srgbClr val="60756A"/>
-                </a:solidFill>
-                <a:latin typeface="Calibri"/>
-                <a:ea typeface="Calibri"/>
-                <a:cs typeface="Calibri"/>
-              </a:defRPr>
-            </a:pPr>
-            <a:r>
-              <a:rPr sz="1200" b="0">
-                <a:solidFill>
-                  <a:srgbClr val="60756A"/>
-                </a:solidFill>
-                <a:latin typeface="Calibri"/>
-                <a:ea typeface="Calibri"/>
-                <a:cs typeface="Calibri"/>
-              </a:rPr>
-              <a:t>Move through rooms, climb connected floors and play the build animation.</a:t>
+              <a:t>Orbit the model or walk through connected levels.</a:t>
             </a:r>
           </a:p>
         </p:txBody>
@@ -6129,7 +5965,7 @@
     </p:spTree>
     <p:extLst>
       <p:ext uri="{BB962C8B-B14F-4D97-AF65-F5344CB8AC3E}">
-        <p14:creationId xmlns:p14="http://schemas.microsoft.com/office/powerpoint/2010/main" val="589162056"/>
+        <p14:creationId xmlns:p14="http://schemas.microsoft.com/office/powerpoint/2010/main" val="300451928"/>
       </p:ext>
     </p:extLst>
   </p:cSld>
@@ -6157,10 +5993,10 @@
       </p:grpSpPr>
       <p:sp>
         <p:nvSpPr>
-          <p:cNvPr id="21" name="">
-            <a:extLst xmlns:a="http://schemas.openxmlformats.org/drawingml/2006/main">
-              <a:ext uri="{FF2B5EF4-FFF2-40B4-BE49-F238E27FC236}">
-                <a16:creationId xmlns:a16="http://schemas.microsoft.com/office/drawing/2014/main" id="{C62E73BB-7EF2-4FF2-B173-DB260E16E223}"/>
+          <p:cNvPr id="23" name="">
+            <a:extLst xmlns:a="http://schemas.openxmlformats.org/drawingml/2006/main">
+              <a:ext uri="{FF2B5EF4-FFF2-40B4-BE49-F238E27FC236}">
+                <a16:creationId xmlns:a16="http://schemas.microsoft.com/office/drawing/2014/main" id="{ED463AF7-DB5A-492C-8617-3BC98F6715BA}"/>
               </a:ext>
             </a:extLst>
           </p:cNvPr>
@@ -6191,7 +6027,7 @@
           <p:cNvPr id="2" name="">
             <a:extLst xmlns:a="http://schemas.openxmlformats.org/drawingml/2006/main">
               <a:ext uri="{FF2B5EF4-FFF2-40B4-BE49-F238E27FC236}">
-                <a16:creationId xmlns:a16="http://schemas.microsoft.com/office/drawing/2014/main" id="{AF0FA847-69B3-4526-A727-177677B8B720}"/>
+                <a16:creationId xmlns:a16="http://schemas.microsoft.com/office/drawing/2014/main" id="{51035E3E-9ECA-4EA2-8802-B59671DBBDB8}"/>
               </a:ext>
             </a:extLst>
           </p:cNvPr>
@@ -6250,7 +6086,7 @@
                 <a:ea typeface="Calibri"/>
                 <a:cs typeface="Calibri"/>
               </a:rPr>
-              <a:t>SCALABILITY</a:t>
+              <a:t>WHAT WORKS TODAY</a:t>
             </a:r>
           </a:p>
         </p:txBody>
@@ -6260,7 +6096,7 @@
           <p:cNvPr id="3" name="">
             <a:extLst xmlns:a="http://schemas.openxmlformats.org/drawingml/2006/main">
               <a:ext uri="{FF2B5EF4-FFF2-40B4-BE49-F238E27FC236}">
-                <a16:creationId xmlns:a16="http://schemas.microsoft.com/office/drawing/2014/main" id="{D7701CFE-E8E0-4173-A9EA-D8653D988970}"/>
+                <a16:creationId xmlns:a16="http://schemas.microsoft.com/office/drawing/2014/main" id="{02F847B5-CC64-4D02-A4B5-CE1765CE0DC2}"/>
               </a:ext>
             </a:extLst>
           </p:cNvPr>
@@ -6329,7 +6165,7 @@
           <p:cNvPr id="4" name="">
             <a:extLst xmlns:a="http://schemas.openxmlformats.org/drawingml/2006/main">
               <a:ext uri="{FF2B5EF4-FFF2-40B4-BE49-F238E27FC236}">
-                <a16:creationId xmlns:a16="http://schemas.microsoft.com/office/drawing/2014/main" id="{5AB679CB-911E-4C04-9C6B-3C09B5F22BD5}"/>
+                <a16:creationId xmlns:a16="http://schemas.microsoft.com/office/drawing/2014/main" id="{206297D4-927B-4971-BFAD-80D8FBC5076E}"/>
               </a:ext>
             </a:extLst>
           </p:cNvPr>
@@ -6341,7 +6177,7 @@
         <p:spPr>
           <a:xfrm xmlns:a="http://schemas.openxmlformats.org/drawingml/2006/main">
             <a:off x="609600" y="838200"/>
-            <a:ext cx="10001250" cy="552450"/>
+            <a:ext cx="10477500" cy="552450"/>
           </a:xfrm>
           <a:prstGeom xmlns:a="http://schemas.openxmlformats.org/drawingml/2006/main" prst="rect">
             <a:avLst/>
@@ -6388,7 +6224,7 @@
                 <a:ea typeface="Calibri"/>
                 <a:cs typeface="Calibri"/>
               </a:rPr>
-              <a:t>Start with one home. Build toward more.</a:t>
+              <a:t>A working prototype—not just a mock-up.</a:t>
             </a:r>
           </a:p>
         </p:txBody>
@@ -6398,7 +6234,7 @@
           <p:cNvPr id="5" name="">
             <a:extLst xmlns:a="http://schemas.openxmlformats.org/drawingml/2006/main">
               <a:ext uri="{FF2B5EF4-FFF2-40B4-BE49-F238E27FC236}">
-                <a16:creationId xmlns:a16="http://schemas.microsoft.com/office/drawing/2014/main" id="{872D91E9-E4D9-492B-866B-168461701DA7}"/>
+                <a16:creationId xmlns:a16="http://schemas.microsoft.com/office/drawing/2014/main" id="{811AC518-7ADB-42DC-8853-C4DD71BD9E90}"/>
               </a:ext>
             </a:extLst>
           </p:cNvPr>
@@ -6410,7 +6246,7 @@
         <p:spPr>
           <a:xfrm xmlns:a="http://schemas.openxmlformats.org/drawingml/2006/main">
             <a:off x="628650" y="1495425"/>
-            <a:ext cx="8858250" cy="285750"/>
+            <a:ext cx="9239250" cy="285750"/>
           </a:xfrm>
           <a:prstGeom xmlns:a="http://schemas.openxmlformats.org/drawingml/2006/main" prst="rect">
             <a:avLst/>
@@ -6457,7 +6293,7 @@
                 <a:ea typeface="Calibri"/>
                 <a:cs typeface="Calibri"/>
               </a:rPr>
-              <a:t>A working base today, with clear steps for broader use.</a:t>
+              <a:t>The demo combines plan input, procedural assembly and live navigation.</a:t>
             </a:r>
           </a:p>
         </p:txBody>
@@ -6467,50 +6303,88 @@
           <p:cNvPr id="6" name="">
             <a:extLst xmlns:a="http://schemas.openxmlformats.org/drawingml/2006/main">
               <a:ext uri="{FF2B5EF4-FFF2-40B4-BE49-F238E27FC236}">
-                <a16:creationId xmlns:a16="http://schemas.microsoft.com/office/drawing/2014/main" id="{6932D62D-7A3C-48FD-8CF8-C52871E14A3F}"/>
-              </a:ext>
-            </a:extLst>
-          </p:cNvPr>
-          <p:cNvSpPr>
-            <a:spLocks xmlns:a="http://schemas.openxmlformats.org/drawingml/2006/main" noGrp="1"/>
-          </p:cNvSpPr>
-          <p:nvPr/>
-        </p:nvSpPr>
-        <p:spPr>
-          <a:xfrm xmlns:a="http://schemas.openxmlformats.org/drawingml/2006/main">
-            <a:off x="628650" y="2362200"/>
-            <a:ext cx="10934700" cy="800100"/>
-          </a:xfrm>
-          <a:prstGeom xmlns:a="http://schemas.openxmlformats.org/drawingml/2006/main" prst="rect">
-            <a:avLst/>
-          </a:prstGeom>
-          <a:solidFill xmlns:a="http://schemas.openxmlformats.org/drawingml/2006/main">
-            <a:srgbClr val="E9F0E9"/>
-          </a:solidFill>
-          <a:ln xmlns:a="http://schemas.openxmlformats.org/drawingml/2006/main" w="0">
-            <a:noFill/>
-            <a:prstDash val="solid"/>
-          </a:ln>
-        </p:spPr>
+                <a16:creationId xmlns:a16="http://schemas.microsoft.com/office/drawing/2014/main" id="{CBA7BBD0-05CA-4958-AF50-B947E8C83BCD}"/>
+              </a:ext>
+            </a:extLst>
+          </p:cNvPr>
+          <p:cNvSpPr>
+            <a:spLocks xmlns:a="http://schemas.openxmlformats.org/drawingml/2006/main" noGrp="1"/>
+          </p:cNvSpPr>
+          <p:nvPr/>
+        </p:nvSpPr>
+        <p:spPr>
+          <a:xfrm xmlns:a="http://schemas.openxmlformats.org/drawingml/2006/main">
+            <a:off x="628650" y="2514600"/>
+            <a:ext cx="476250" cy="400050"/>
+          </a:xfrm>
+          <a:prstGeom xmlns:a="http://schemas.openxmlformats.org/drawingml/2006/main" prst="rect">
+            <a:avLst/>
+          </a:prstGeom>
+          <a:noFill xmlns:a="http://schemas.openxmlformats.org/drawingml/2006/main"/>
+          <a:ln xmlns:a="http://schemas.openxmlformats.org/drawingml/2006/main" w="0">
+            <a:noFill/>
+            <a:prstDash val="solid"/>
+          </a:ln>
+        </p:spPr>
+        <p:txBody>
+          <a:bodyPr xmlns:a="http://schemas.openxmlformats.org/drawingml/2006/main" wrap="square" lIns="0" tIns="0" rIns="0" bIns="0" anchor="t">
+            <a:normAutofit fontScale="100000"/>
+          </a:bodyPr>
+          <a:lstStyle xmlns:a="http://schemas.openxmlformats.org/drawingml/2006/main">
+            <a:defPPr algn="l">
+              <a:defRPr sz="2025" b="1">
+                <a:solidFill>
+                  <a:srgbClr val="E9795B"/>
+                </a:solidFill>
+                <a:latin typeface="Calibri"/>
+                <a:ea typeface="Calibri"/>
+                <a:cs typeface="Calibri"/>
+              </a:defRPr>
+            </a:defPPr>
+          </a:lstStyle>
+          <a:p xmlns:a="http://schemas.openxmlformats.org/drawingml/2006/main">
+            <a:pPr algn="l">
+              <a:defRPr sz="2025" b="1">
+                <a:solidFill>
+                  <a:srgbClr val="E9795B"/>
+                </a:solidFill>
+                <a:latin typeface="Calibri"/>
+                <a:ea typeface="Calibri"/>
+                <a:cs typeface="Calibri"/>
+              </a:defRPr>
+            </a:pPr>
+            <a:r>
+              <a:rPr sz="2025" b="1">
+                <a:solidFill>
+                  <a:srgbClr val="E9795B"/>
+                </a:solidFill>
+                <a:latin typeface="Calibri"/>
+                <a:ea typeface="Calibri"/>
+                <a:cs typeface="Calibri"/>
+              </a:rPr>
+              <a:t>01</a:t>
+            </a:r>
+          </a:p>
+        </p:txBody>
       </p:sp>
       <p:sp>
         <p:nvSpPr>
           <p:cNvPr id="7" name="">
             <a:extLst xmlns:a="http://schemas.openxmlformats.org/drawingml/2006/main">
               <a:ext uri="{FF2B5EF4-FFF2-40B4-BE49-F238E27FC236}">
-                <a16:creationId xmlns:a16="http://schemas.microsoft.com/office/drawing/2014/main" id="{3C69C0C4-3BBB-45EF-BBCE-1F6737F11E8F}"/>
-              </a:ext>
-            </a:extLst>
-          </p:cNvPr>
-          <p:cNvSpPr>
-            <a:spLocks xmlns:a="http://schemas.openxmlformats.org/drawingml/2006/main" noGrp="1"/>
-          </p:cNvSpPr>
-          <p:nvPr/>
-        </p:nvSpPr>
-        <p:spPr>
-          <a:xfrm xmlns:a="http://schemas.openxmlformats.org/drawingml/2006/main">
-            <a:off x="857250" y="2524125"/>
-            <a:ext cx="1809750" cy="190500"/>
+                <a16:creationId xmlns:a16="http://schemas.microsoft.com/office/drawing/2014/main" id="{10C52D9A-0737-44C5-9190-ED492B543AEC}"/>
+              </a:ext>
+            </a:extLst>
+          </p:cNvPr>
+          <p:cNvSpPr>
+            <a:spLocks xmlns:a="http://schemas.openxmlformats.org/drawingml/2006/main" noGrp="1"/>
+          </p:cNvSpPr>
+          <p:nvPr/>
+        </p:nvSpPr>
+        <p:spPr>
+          <a:xfrm xmlns:a="http://schemas.openxmlformats.org/drawingml/2006/main">
+            <a:off x="628650" y="3019425"/>
+            <a:ext cx="3048000" cy="190500"/>
           </a:xfrm>
           <a:prstGeom xmlns:a="http://schemas.openxmlformats.org/drawingml/2006/main" prst="rect">
             <a:avLst/>
@@ -6557,7 +6431,7 @@
                 <a:ea typeface="Calibri"/>
                 <a:cs typeface="Calibri"/>
               </a:rPr>
-              <a:t>WORKING TODAY</a:t>
+              <a:t>INPUTS</a:t>
             </a:r>
           </a:p>
         </p:txBody>
@@ -6567,19 +6441,19 @@
           <p:cNvPr id="8" name="">
             <a:extLst xmlns:a="http://schemas.openxmlformats.org/drawingml/2006/main">
               <a:ext uri="{FF2B5EF4-FFF2-40B4-BE49-F238E27FC236}">
-                <a16:creationId xmlns:a16="http://schemas.microsoft.com/office/drawing/2014/main" id="{21C9B44F-888E-43DA-8720-DF37246DA851}"/>
-              </a:ext>
-            </a:extLst>
-          </p:cNvPr>
-          <p:cNvSpPr>
-            <a:spLocks xmlns:a="http://schemas.openxmlformats.org/drawingml/2006/main" noGrp="1"/>
-          </p:cNvSpPr>
-          <p:nvPr/>
-        </p:nvSpPr>
-        <p:spPr>
-          <a:xfrm xmlns:a="http://schemas.openxmlformats.org/drawingml/2006/main">
-            <a:off x="2876550" y="2505075"/>
-            <a:ext cx="3095625" cy="266700"/>
+                <a16:creationId xmlns:a16="http://schemas.microsoft.com/office/drawing/2014/main" id="{0F7D477D-CF38-4C76-8374-2AA9903558A3}"/>
+              </a:ext>
+            </a:extLst>
+          </p:cNvPr>
+          <p:cNvSpPr>
+            <a:spLocks xmlns:a="http://schemas.openxmlformats.org/drawingml/2006/main" noGrp="1"/>
+          </p:cNvSpPr>
+          <p:nvPr/>
+        </p:nvSpPr>
+        <p:spPr>
+          <a:xfrm xmlns:a="http://schemas.openxmlformats.org/drawingml/2006/main">
+            <a:off x="628650" y="3371850"/>
+            <a:ext cx="3238500" cy="361950"/>
           </a:xfrm>
           <a:prstGeom xmlns:a="http://schemas.openxmlformats.org/drawingml/2006/main" prst="rect">
             <a:avLst/>
@@ -6596,7 +6470,7 @@
           </a:bodyPr>
           <a:lstStyle xmlns:a="http://schemas.openxmlformats.org/drawingml/2006/main">
             <a:defPPr algn="l">
-              <a:defRPr sz="1650" b="1">
+              <a:defRPr sz="1875" b="1">
                 <a:solidFill>
                   <a:srgbClr val="153B2E"/>
                 </a:solidFill>
@@ -6608,7 +6482,7 @@
           </a:lstStyle>
           <a:p xmlns:a="http://schemas.openxmlformats.org/drawingml/2006/main">
             <a:pPr algn="l">
-              <a:defRPr sz="1650" b="1">
+              <a:defRPr sz="1875" b="1">
                 <a:solidFill>
                   <a:srgbClr val="153B2E"/>
                 </a:solidFill>
@@ -6618,7 +6492,7 @@
               </a:defRPr>
             </a:pPr>
             <a:r>
-              <a:rPr sz="1650" b="1">
+              <a:rPr sz="1875" b="1">
                 <a:solidFill>
                   <a:srgbClr val="153B2E"/>
                 </a:solidFill>
@@ -6626,7 +6500,7 @@
                 <a:ea typeface="Calibri"/>
                 <a:cs typeface="Calibri"/>
               </a:rPr>
-              <a:t>Browser-based workflow</a:t>
+              <a:t>PDF · PNG · JPG</a:t>
             </a:r>
           </a:p>
         </p:txBody>
@@ -6636,19 +6510,19 @@
           <p:cNvPr id="9" name="">
             <a:extLst xmlns:a="http://schemas.openxmlformats.org/drawingml/2006/main">
               <a:ext uri="{FF2B5EF4-FFF2-40B4-BE49-F238E27FC236}">
-                <a16:creationId xmlns:a16="http://schemas.microsoft.com/office/drawing/2014/main" id="{9887EFB8-5B74-4968-A7EE-0DF4AA78E4DF}"/>
-              </a:ext>
-            </a:extLst>
-          </p:cNvPr>
-          <p:cNvSpPr>
-            <a:spLocks xmlns:a="http://schemas.openxmlformats.org/drawingml/2006/main" noGrp="1"/>
-          </p:cNvSpPr>
-          <p:nvPr/>
-        </p:nvSpPr>
-        <p:spPr>
-          <a:xfrm xmlns:a="http://schemas.openxmlformats.org/drawingml/2006/main">
-            <a:off x="2876550" y="2819400"/>
-            <a:ext cx="8382000" cy="219075"/>
+                <a16:creationId xmlns:a16="http://schemas.microsoft.com/office/drawing/2014/main" id="{9D35315C-DE1B-43C6-A58B-ED15D6CD6803}"/>
+              </a:ext>
+            </a:extLst>
+          </p:cNvPr>
+          <p:cNvSpPr>
+            <a:spLocks xmlns:a="http://schemas.openxmlformats.org/drawingml/2006/main" noGrp="1"/>
+          </p:cNvSpPr>
+          <p:nvPr/>
+        </p:nvSpPr>
+        <p:spPr>
+          <a:xfrm xmlns:a="http://schemas.openxmlformats.org/drawingml/2006/main">
+            <a:off x="628650" y="3905250"/>
+            <a:ext cx="3143250" cy="1047750"/>
           </a:xfrm>
           <a:prstGeom xmlns:a="http://schemas.openxmlformats.org/drawingml/2006/main" prst="rect">
             <a:avLst/>
@@ -6665,7 +6539,7 @@
           </a:bodyPr>
           <a:lstStyle xmlns:a="http://schemas.openxmlformats.org/drawingml/2006/main">
             <a:defPPr algn="l">
-              <a:defRPr sz="1200" b="0">
+              <a:defRPr sz="1350" b="0">
                 <a:solidFill>
                   <a:srgbClr val="60756A"/>
                 </a:solidFill>
@@ -6677,7 +6551,7 @@
           </a:lstStyle>
           <a:p xmlns:a="http://schemas.openxmlformats.org/drawingml/2006/main">
             <a:pPr algn="l">
-              <a:defRPr sz="1200" b="0">
+              <a:defRPr sz="1350" b="0">
                 <a:solidFill>
                   <a:srgbClr val="60756A"/>
                 </a:solidFill>
@@ -6687,7 +6561,7 @@
               </a:defRPr>
             </a:pPr>
             <a:r>
-              <a:rPr sz="1200" b="0">
+              <a:rPr sz="1350" b="0">
                 <a:solidFill>
                   <a:srgbClr val="60756A"/>
                 </a:solidFill>
@@ -6695,7 +6569,7 @@
                 <a:ea typeface="Calibri"/>
                 <a:cs typeface="Calibri"/>
               </a:rPr>
-              <a:t>PDF, PNG and JPG inputs · three-floor sample model · local rendering</a:t>
+              <a:t>Read vector or raster PDFs and image plans. Built-in sample plans run without an API key.</a:t>
             </a:r>
           </a:p>
         </p:txBody>
@@ -6705,25 +6579,25 @@
           <p:cNvPr id="10" name="">
             <a:extLst xmlns:a="http://schemas.openxmlformats.org/drawingml/2006/main">
               <a:ext uri="{FF2B5EF4-FFF2-40B4-BE49-F238E27FC236}">
-                <a16:creationId xmlns:a16="http://schemas.microsoft.com/office/drawing/2014/main" id="{CB332375-599A-4EDF-B503-6B3AC3F1968C}"/>
-              </a:ext>
-            </a:extLst>
-          </p:cNvPr>
-          <p:cNvSpPr>
-            <a:spLocks xmlns:a="http://schemas.openxmlformats.org/drawingml/2006/main" noGrp="1"/>
-          </p:cNvSpPr>
-          <p:nvPr/>
-        </p:nvSpPr>
-        <p:spPr>
-          <a:xfrm xmlns:a="http://schemas.openxmlformats.org/drawingml/2006/main">
-            <a:off x="628650" y="3333750"/>
-            <a:ext cx="10934700" cy="800100"/>
+                <a16:creationId xmlns:a16="http://schemas.microsoft.com/office/drawing/2014/main" id="{ED06267B-1D27-4B3E-BBBC-E337360B3BDA}"/>
+              </a:ext>
+            </a:extLst>
+          </p:cNvPr>
+          <p:cNvSpPr>
+            <a:spLocks xmlns:a="http://schemas.openxmlformats.org/drawingml/2006/main" noGrp="1"/>
+          </p:cNvSpPr>
+          <p:nvPr/>
+        </p:nvSpPr>
+        <p:spPr>
+          <a:xfrm xmlns:a="http://schemas.openxmlformats.org/drawingml/2006/main">
+            <a:off x="4019550" y="2476500"/>
+            <a:ext cx="9525" cy="9525"/>
           </a:xfrm>
           <a:prstGeom xmlns:a="http://schemas.openxmlformats.org/drawingml/2006/main" prst="rect">
             <a:avLst/>
           </a:prstGeom>
           <a:solidFill xmlns:a="http://schemas.openxmlformats.org/drawingml/2006/main">
-            <a:srgbClr val="D9E8DC"/>
+            <a:srgbClr val="C8D6CC"/>
           </a:solidFill>
           <a:ln xmlns:a="http://schemas.openxmlformats.org/drawingml/2006/main" w="0">
             <a:noFill/>
@@ -6736,19 +6610,88 @@
           <p:cNvPr id="11" name="">
             <a:extLst xmlns:a="http://schemas.openxmlformats.org/drawingml/2006/main">
               <a:ext uri="{FF2B5EF4-FFF2-40B4-BE49-F238E27FC236}">
-                <a16:creationId xmlns:a16="http://schemas.microsoft.com/office/drawing/2014/main" id="{936ED567-8046-4BF4-9621-C8FFD83143BC}"/>
-              </a:ext>
-            </a:extLst>
-          </p:cNvPr>
-          <p:cNvSpPr>
-            <a:spLocks xmlns:a="http://schemas.openxmlformats.org/drawingml/2006/main" noGrp="1"/>
-          </p:cNvSpPr>
-          <p:nvPr/>
-        </p:nvSpPr>
-        <p:spPr>
-          <a:xfrm xmlns:a="http://schemas.openxmlformats.org/drawingml/2006/main">
-            <a:off x="857250" y="3495675"/>
-            <a:ext cx="1809750" cy="190500"/>
+                <a16:creationId xmlns:a16="http://schemas.microsoft.com/office/drawing/2014/main" id="{4169C0DC-E866-4DCA-B0E9-487DBC1C7FC6}"/>
+              </a:ext>
+            </a:extLst>
+          </p:cNvPr>
+          <p:cNvSpPr>
+            <a:spLocks xmlns:a="http://schemas.openxmlformats.org/drawingml/2006/main" noGrp="1"/>
+          </p:cNvSpPr>
+          <p:nvPr/>
+        </p:nvSpPr>
+        <p:spPr>
+          <a:xfrm xmlns:a="http://schemas.openxmlformats.org/drawingml/2006/main">
+            <a:off x="4343400" y="2514600"/>
+            <a:ext cx="476250" cy="400050"/>
+          </a:xfrm>
+          <a:prstGeom xmlns:a="http://schemas.openxmlformats.org/drawingml/2006/main" prst="rect">
+            <a:avLst/>
+          </a:prstGeom>
+          <a:noFill xmlns:a="http://schemas.openxmlformats.org/drawingml/2006/main"/>
+          <a:ln xmlns:a="http://schemas.openxmlformats.org/drawingml/2006/main" w="0">
+            <a:noFill/>
+            <a:prstDash val="solid"/>
+          </a:ln>
+        </p:spPr>
+        <p:txBody>
+          <a:bodyPr xmlns:a="http://schemas.openxmlformats.org/drawingml/2006/main" wrap="square" lIns="0" tIns="0" rIns="0" bIns="0" anchor="t">
+            <a:normAutofit fontScale="100000"/>
+          </a:bodyPr>
+          <a:lstStyle xmlns:a="http://schemas.openxmlformats.org/drawingml/2006/main">
+            <a:defPPr algn="l">
+              <a:defRPr sz="2025" b="1">
+                <a:solidFill>
+                  <a:srgbClr val="E9795B"/>
+                </a:solidFill>
+                <a:latin typeface="Calibri"/>
+                <a:ea typeface="Calibri"/>
+                <a:cs typeface="Calibri"/>
+              </a:defRPr>
+            </a:defPPr>
+          </a:lstStyle>
+          <a:p xmlns:a="http://schemas.openxmlformats.org/drawingml/2006/main">
+            <a:pPr algn="l">
+              <a:defRPr sz="2025" b="1">
+                <a:solidFill>
+                  <a:srgbClr val="E9795B"/>
+                </a:solidFill>
+                <a:latin typeface="Calibri"/>
+                <a:ea typeface="Calibri"/>
+                <a:cs typeface="Calibri"/>
+              </a:defRPr>
+            </a:pPr>
+            <a:r>
+              <a:rPr sz="2025" b="1">
+                <a:solidFill>
+                  <a:srgbClr val="E9795B"/>
+                </a:solidFill>
+                <a:latin typeface="Calibri"/>
+                <a:ea typeface="Calibri"/>
+                <a:cs typeface="Calibri"/>
+              </a:rPr>
+              <a:t>02</a:t>
+            </a:r>
+          </a:p>
+        </p:txBody>
+      </p:sp>
+      <p:sp>
+        <p:nvSpPr>
+          <p:cNvPr id="12" name="">
+            <a:extLst xmlns:a="http://schemas.openxmlformats.org/drawingml/2006/main">
+              <a:ext uri="{FF2B5EF4-FFF2-40B4-BE49-F238E27FC236}">
+                <a16:creationId xmlns:a16="http://schemas.microsoft.com/office/drawing/2014/main" id="{D5205396-9BF1-4936-9D7C-AD69000C3F45}"/>
+              </a:ext>
+            </a:extLst>
+          </p:cNvPr>
+          <p:cNvSpPr>
+            <a:spLocks xmlns:a="http://schemas.openxmlformats.org/drawingml/2006/main" noGrp="1"/>
+          </p:cNvSpPr>
+          <p:nvPr/>
+        </p:nvSpPr>
+        <p:spPr>
+          <a:xfrm xmlns:a="http://schemas.openxmlformats.org/drawingml/2006/main">
+            <a:off x="4343400" y="3019425"/>
+            <a:ext cx="3048000" cy="190500"/>
           </a:xfrm>
           <a:prstGeom xmlns:a="http://schemas.openxmlformats.org/drawingml/2006/main" prst="rect">
             <a:avLst/>
@@ -6767,7 +6710,7 @@
             <a:defPPr algn="l">
               <a:defRPr sz="975" b="1">
                 <a:solidFill>
-                  <a:srgbClr val="E9795B"/>
+                  <a:srgbClr val="2C6B50"/>
                 </a:solidFill>
                 <a:latin typeface="Calibri"/>
                 <a:ea typeface="Calibri"/>
@@ -6779,7 +6722,7 @@
             <a:pPr algn="l">
               <a:defRPr sz="975" b="1">
                 <a:solidFill>
-                  <a:srgbClr val="E9795B"/>
+                  <a:srgbClr val="2C6B50"/>
                 </a:solidFill>
                 <a:latin typeface="Calibri"/>
                 <a:ea typeface="Calibri"/>
@@ -6789,35 +6732,35 @@
             <a:r>
               <a:rPr sz="975" b="1">
                 <a:solidFill>
-                  <a:srgbClr val="E9795B"/>
+                  <a:srgbClr val="2C6B50"/>
                 </a:solidFill>
                 <a:latin typeface="Calibri"/>
                 <a:ea typeface="Calibri"/>
                 <a:cs typeface="Calibri"/>
               </a:rPr>
-              <a:t>PLANNED NEXT</a:t>
-            </a:r>
-          </a:p>
-        </p:txBody>
-      </p:sp>
-      <p:sp>
-        <p:nvSpPr>
-          <p:cNvPr id="12" name="">
-            <a:extLst xmlns:a="http://schemas.openxmlformats.org/drawingml/2006/main">
-              <a:ext uri="{FF2B5EF4-FFF2-40B4-BE49-F238E27FC236}">
-                <a16:creationId xmlns:a16="http://schemas.microsoft.com/office/drawing/2014/main" id="{F7E47A9C-A282-4191-89D3-999D1ED1B06C}"/>
-              </a:ext>
-            </a:extLst>
-          </p:cNvPr>
-          <p:cNvSpPr>
-            <a:spLocks xmlns:a="http://schemas.openxmlformats.org/drawingml/2006/main" noGrp="1"/>
-          </p:cNvSpPr>
-          <p:nvPr/>
-        </p:nvSpPr>
-        <p:spPr>
-          <a:xfrm xmlns:a="http://schemas.openxmlformats.org/drawingml/2006/main">
-            <a:off x="2876550" y="3476625"/>
-            <a:ext cx="3333750" cy="266700"/>
+              <a:t>BUILD</a:t>
+            </a:r>
+          </a:p>
+        </p:txBody>
+      </p:sp>
+      <p:sp>
+        <p:nvSpPr>
+          <p:cNvPr id="13" name="">
+            <a:extLst xmlns:a="http://schemas.openxmlformats.org/drawingml/2006/main">
+              <a:ext uri="{FF2B5EF4-FFF2-40B4-BE49-F238E27FC236}">
+                <a16:creationId xmlns:a16="http://schemas.microsoft.com/office/drawing/2014/main" id="{80A710FB-40EF-468B-9F18-555C0B5CCCE7}"/>
+              </a:ext>
+            </a:extLst>
+          </p:cNvPr>
+          <p:cNvSpPr>
+            <a:spLocks xmlns:a="http://schemas.openxmlformats.org/drawingml/2006/main" noGrp="1"/>
+          </p:cNvSpPr>
+          <p:nvPr/>
+        </p:nvSpPr>
+        <p:spPr>
+          <a:xfrm xmlns:a="http://schemas.openxmlformats.org/drawingml/2006/main">
+            <a:off x="4343400" y="3371850"/>
+            <a:ext cx="3238500" cy="361950"/>
           </a:xfrm>
           <a:prstGeom xmlns:a="http://schemas.openxmlformats.org/drawingml/2006/main" prst="rect">
             <a:avLst/>
@@ -6834,7 +6777,7 @@
           </a:bodyPr>
           <a:lstStyle xmlns:a="http://schemas.openxmlformats.org/drawingml/2006/main">
             <a:defPPr algn="l">
-              <a:defRPr sz="1650" b="1">
+              <a:defRPr sz="1875" b="1">
                 <a:solidFill>
                   <a:srgbClr val="153B2E"/>
                 </a:solidFill>
@@ -6846,7 +6789,7 @@
           </a:lstStyle>
           <a:p xmlns:a="http://schemas.openxmlformats.org/drawingml/2006/main">
             <a:pPr algn="l">
-              <a:defRPr sz="1650" b="1">
+              <a:defRPr sz="1875" b="1">
                 <a:solidFill>
                   <a:srgbClr val="153B2E"/>
                 </a:solidFill>
@@ -6856,7 +6799,7 @@
               </a:defRPr>
             </a:pPr>
             <a:r>
-              <a:rPr sz="1650" b="1">
+              <a:rPr sz="1875" b="1">
                 <a:solidFill>
                   <a:srgbClr val="153B2E"/>
                 </a:solidFill>
@@ -6864,29 +6807,29 @@
                 <a:ea typeface="Calibri"/>
                 <a:cs typeface="Calibri"/>
               </a:rPr>
-              <a:t>Broaden interoperability</a:t>
-            </a:r>
-          </a:p>
-        </p:txBody>
-      </p:sp>
-      <p:sp>
-        <p:nvSpPr>
-          <p:cNvPr id="13" name="">
-            <a:extLst xmlns:a="http://schemas.openxmlformats.org/drawingml/2006/main">
-              <a:ext uri="{FF2B5EF4-FFF2-40B4-BE49-F238E27FC236}">
-                <a16:creationId xmlns:a16="http://schemas.microsoft.com/office/drawing/2014/main" id="{D8527BF4-1557-4208-BD8D-36A78478F5C2}"/>
-              </a:ext>
-            </a:extLst>
-          </p:cNvPr>
-          <p:cNvSpPr>
-            <a:spLocks xmlns:a="http://schemas.openxmlformats.org/drawingml/2006/main" noGrp="1"/>
-          </p:cNvSpPr>
-          <p:nvPr/>
-        </p:nvSpPr>
-        <p:spPr>
-          <a:xfrm xmlns:a="http://schemas.openxmlformats.org/drawingml/2006/main">
-            <a:off x="2876550" y="3790950"/>
-            <a:ext cx="8382000" cy="219075"/>
+              <a:t>7 seconds</a:t>
+            </a:r>
+          </a:p>
+        </p:txBody>
+      </p:sp>
+      <p:sp>
+        <p:nvSpPr>
+          <p:cNvPr id="14" name="">
+            <a:extLst xmlns:a="http://schemas.openxmlformats.org/drawingml/2006/main">
+              <a:ext uri="{FF2B5EF4-FFF2-40B4-BE49-F238E27FC236}">
+                <a16:creationId xmlns:a16="http://schemas.microsoft.com/office/drawing/2014/main" id="{4481D54E-5B9B-4776-9339-C1087C4C1FED}"/>
+              </a:ext>
+            </a:extLst>
+          </p:cNvPr>
+          <p:cNvSpPr>
+            <a:spLocks xmlns:a="http://schemas.openxmlformats.org/drawingml/2006/main" noGrp="1"/>
+          </p:cNvSpPr>
+          <p:nvPr/>
+        </p:nvSpPr>
+        <p:spPr>
+          <a:xfrm xmlns:a="http://schemas.openxmlformats.org/drawingml/2006/main">
+            <a:off x="4343400" y="3905250"/>
+            <a:ext cx="3143250" cy="1047750"/>
           </a:xfrm>
           <a:prstGeom xmlns:a="http://schemas.openxmlformats.org/drawingml/2006/main" prst="rect">
             <a:avLst/>
@@ -6903,7 +6846,7 @@
           </a:bodyPr>
           <a:lstStyle xmlns:a="http://schemas.openxmlformats.org/drawingml/2006/main">
             <a:defPPr algn="l">
-              <a:defRPr sz="1200" b="0">
+              <a:defRPr sz="1350" b="0">
                 <a:solidFill>
                   <a:srgbClr val="60756A"/>
                 </a:solidFill>
@@ -6915,7 +6858,7 @@
           </a:lstStyle>
           <a:p xmlns:a="http://schemas.openxmlformats.org/drawingml/2006/main">
             <a:pPr algn="l">
-              <a:defRPr sz="1200" b="0">
+              <a:defRPr sz="1350" b="0">
                 <a:solidFill>
                   <a:srgbClr val="60756A"/>
                 </a:solidFill>
@@ -6925,7 +6868,7 @@
               </a:defRPr>
             </a:pPr>
             <a:r>
-              <a:rPr sz="1200" b="0">
+              <a:rPr sz="1350" b="0">
                 <a:solidFill>
                   <a:srgbClr val="60756A"/>
                 </a:solidFill>
@@ -6933,35 +6876,35 @@
                 <a:ea typeface="Calibri"/>
                 <a:cs typeface="Calibri"/>
               </a:rPr>
-              <a:t>DXF / IFC export is a roadmap item, not part of this prototype.</a:t>
-            </a:r>
-          </a:p>
-        </p:txBody>
-      </p:sp>
-      <p:sp>
-        <p:nvSpPr>
-          <p:cNvPr id="14" name="">
-            <a:extLst xmlns:a="http://schemas.openxmlformats.org/drawingml/2006/main">
-              <a:ext uri="{FF2B5EF4-FFF2-40B4-BE49-F238E27FC236}">
-                <a16:creationId xmlns:a16="http://schemas.microsoft.com/office/drawing/2014/main" id="{24C68458-D6E3-4754-950F-F1D49D38A1F4}"/>
-              </a:ext>
-            </a:extLst>
-          </p:cNvPr>
-          <p:cNvSpPr>
-            <a:spLocks xmlns:a="http://schemas.openxmlformats.org/drawingml/2006/main" noGrp="1"/>
-          </p:cNvSpPr>
-          <p:nvPr/>
-        </p:nvSpPr>
-        <p:spPr>
-          <a:xfrm xmlns:a="http://schemas.openxmlformats.org/drawingml/2006/main">
-            <a:off x="628650" y="4305300"/>
-            <a:ext cx="10934700" cy="800100"/>
+              <a:t>Watch the model assemble from ground level up, with walls, floor slabs and a stair core.</a:t>
+            </a:r>
+          </a:p>
+        </p:txBody>
+      </p:sp>
+      <p:sp>
+        <p:nvSpPr>
+          <p:cNvPr id="15" name="">
+            <a:extLst xmlns:a="http://schemas.openxmlformats.org/drawingml/2006/main">
+              <a:ext uri="{FF2B5EF4-FFF2-40B4-BE49-F238E27FC236}">
+                <a16:creationId xmlns:a16="http://schemas.microsoft.com/office/drawing/2014/main" id="{5AE924E6-6402-46C6-B33C-5D8C74BAD24F}"/>
+              </a:ext>
+            </a:extLst>
+          </p:cNvPr>
+          <p:cNvSpPr>
+            <a:spLocks xmlns:a="http://schemas.openxmlformats.org/drawingml/2006/main" noGrp="1"/>
+          </p:cNvSpPr>
+          <p:nvPr/>
+        </p:nvSpPr>
+        <p:spPr>
+          <a:xfrm xmlns:a="http://schemas.openxmlformats.org/drawingml/2006/main">
+            <a:off x="7734300" y="2476500"/>
+            <a:ext cx="9525" cy="9525"/>
           </a:xfrm>
           <a:prstGeom xmlns:a="http://schemas.openxmlformats.org/drawingml/2006/main" prst="rect">
             <a:avLst/>
           </a:prstGeom>
           <a:solidFill xmlns:a="http://schemas.openxmlformats.org/drawingml/2006/main">
-            <a:srgbClr val="E6ECE6"/>
+            <a:srgbClr val="C8D6CC"/>
           </a:solidFill>
           <a:ln xmlns:a="http://schemas.openxmlformats.org/drawingml/2006/main" w="0">
             <a:noFill/>
@@ -6971,22 +6914,91 @@
       </p:sp>
       <p:sp>
         <p:nvSpPr>
-          <p:cNvPr id="15" name="">
-            <a:extLst xmlns:a="http://schemas.openxmlformats.org/drawingml/2006/main">
-              <a:ext uri="{FF2B5EF4-FFF2-40B4-BE49-F238E27FC236}">
-                <a16:creationId xmlns:a16="http://schemas.microsoft.com/office/drawing/2014/main" id="{6588C555-0F62-49F0-A6F4-AF293FA0AE6C}"/>
-              </a:ext>
-            </a:extLst>
-          </p:cNvPr>
-          <p:cNvSpPr>
-            <a:spLocks xmlns:a="http://schemas.openxmlformats.org/drawingml/2006/main" noGrp="1"/>
-          </p:cNvSpPr>
-          <p:nvPr/>
-        </p:nvSpPr>
-        <p:spPr>
-          <a:xfrm xmlns:a="http://schemas.openxmlformats.org/drawingml/2006/main">
-            <a:off x="857250" y="4467225"/>
-            <a:ext cx="1809750" cy="190500"/>
+          <p:cNvPr id="16" name="">
+            <a:extLst xmlns:a="http://schemas.openxmlformats.org/drawingml/2006/main">
+              <a:ext uri="{FF2B5EF4-FFF2-40B4-BE49-F238E27FC236}">
+                <a16:creationId xmlns:a16="http://schemas.microsoft.com/office/drawing/2014/main" id="{D987C467-E22F-4FF4-A026-C7CB69FCADDE}"/>
+              </a:ext>
+            </a:extLst>
+          </p:cNvPr>
+          <p:cNvSpPr>
+            <a:spLocks xmlns:a="http://schemas.openxmlformats.org/drawingml/2006/main" noGrp="1"/>
+          </p:cNvSpPr>
+          <p:nvPr/>
+        </p:nvSpPr>
+        <p:spPr>
+          <a:xfrm xmlns:a="http://schemas.openxmlformats.org/drawingml/2006/main">
+            <a:off x="8058150" y="2514600"/>
+            <a:ext cx="476250" cy="400050"/>
+          </a:xfrm>
+          <a:prstGeom xmlns:a="http://schemas.openxmlformats.org/drawingml/2006/main" prst="rect">
+            <a:avLst/>
+          </a:prstGeom>
+          <a:noFill xmlns:a="http://schemas.openxmlformats.org/drawingml/2006/main"/>
+          <a:ln xmlns:a="http://schemas.openxmlformats.org/drawingml/2006/main" w="0">
+            <a:noFill/>
+            <a:prstDash val="solid"/>
+          </a:ln>
+        </p:spPr>
+        <p:txBody>
+          <a:bodyPr xmlns:a="http://schemas.openxmlformats.org/drawingml/2006/main" wrap="square" lIns="0" tIns="0" rIns="0" bIns="0" anchor="t">
+            <a:normAutofit fontScale="100000"/>
+          </a:bodyPr>
+          <a:lstStyle xmlns:a="http://schemas.openxmlformats.org/drawingml/2006/main">
+            <a:defPPr algn="l">
+              <a:defRPr sz="2025" b="1">
+                <a:solidFill>
+                  <a:srgbClr val="E9795B"/>
+                </a:solidFill>
+                <a:latin typeface="Calibri"/>
+                <a:ea typeface="Calibri"/>
+                <a:cs typeface="Calibri"/>
+              </a:defRPr>
+            </a:defPPr>
+          </a:lstStyle>
+          <a:p xmlns:a="http://schemas.openxmlformats.org/drawingml/2006/main">
+            <a:pPr algn="l">
+              <a:defRPr sz="2025" b="1">
+                <a:solidFill>
+                  <a:srgbClr val="E9795B"/>
+                </a:solidFill>
+                <a:latin typeface="Calibri"/>
+                <a:ea typeface="Calibri"/>
+                <a:cs typeface="Calibri"/>
+              </a:defRPr>
+            </a:pPr>
+            <a:r>
+              <a:rPr sz="2025" b="1">
+                <a:solidFill>
+                  <a:srgbClr val="E9795B"/>
+                </a:solidFill>
+                <a:latin typeface="Calibri"/>
+                <a:ea typeface="Calibri"/>
+                <a:cs typeface="Calibri"/>
+              </a:rPr>
+              <a:t>03</a:t>
+            </a:r>
+          </a:p>
+        </p:txBody>
+      </p:sp>
+      <p:sp>
+        <p:nvSpPr>
+          <p:cNvPr id="17" name="">
+            <a:extLst xmlns:a="http://schemas.openxmlformats.org/drawingml/2006/main">
+              <a:ext uri="{FF2B5EF4-FFF2-40B4-BE49-F238E27FC236}">
+                <a16:creationId xmlns:a16="http://schemas.microsoft.com/office/drawing/2014/main" id="{812CF06B-DF50-4293-B29E-B792616330E6}"/>
+              </a:ext>
+            </a:extLst>
+          </p:cNvPr>
+          <p:cNvSpPr>
+            <a:spLocks xmlns:a="http://schemas.openxmlformats.org/drawingml/2006/main" noGrp="1"/>
+          </p:cNvSpPr>
+          <p:nvPr/>
+        </p:nvSpPr>
+        <p:spPr>
+          <a:xfrm xmlns:a="http://schemas.openxmlformats.org/drawingml/2006/main">
+            <a:off x="8058150" y="3019425"/>
+            <a:ext cx="3048000" cy="190500"/>
           </a:xfrm>
           <a:prstGeom xmlns:a="http://schemas.openxmlformats.org/drawingml/2006/main" prst="rect">
             <a:avLst/>
@@ -7033,29 +7045,29 @@
                 <a:ea typeface="Calibri"/>
                 <a:cs typeface="Calibri"/>
               </a:rPr>
-              <a:t>FUTURE DIRECTION</a:t>
-            </a:r>
-          </a:p>
-        </p:txBody>
-      </p:sp>
-      <p:sp>
-        <p:nvSpPr>
-          <p:cNvPr id="16" name="">
-            <a:extLst xmlns:a="http://schemas.openxmlformats.org/drawingml/2006/main">
-              <a:ext uri="{FF2B5EF4-FFF2-40B4-BE49-F238E27FC236}">
-                <a16:creationId xmlns:a16="http://schemas.microsoft.com/office/drawing/2014/main" id="{4378B934-A0CF-4A6B-96F3-84FFE2DF1C16}"/>
-              </a:ext>
-            </a:extLst>
-          </p:cNvPr>
-          <p:cNvSpPr>
-            <a:spLocks xmlns:a="http://schemas.openxmlformats.org/drawingml/2006/main" noGrp="1"/>
-          </p:cNvSpPr>
-          <p:nvPr/>
-        </p:nvSpPr>
-        <p:spPr>
-          <a:xfrm xmlns:a="http://schemas.openxmlformats.org/drawingml/2006/main">
-            <a:off x="2876550" y="4448175"/>
-            <a:ext cx="3333750" cy="266700"/>
+              <a:t>WALKTHROUGH</a:t>
+            </a:r>
+          </a:p>
+        </p:txBody>
+      </p:sp>
+      <p:sp>
+        <p:nvSpPr>
+          <p:cNvPr id="18" name="">
+            <a:extLst xmlns:a="http://schemas.openxmlformats.org/drawingml/2006/main">
+              <a:ext uri="{FF2B5EF4-FFF2-40B4-BE49-F238E27FC236}">
+                <a16:creationId xmlns:a16="http://schemas.microsoft.com/office/drawing/2014/main" id="{1299B021-4699-4C6D-875A-8FBA5C49B5EF}"/>
+              </a:ext>
+            </a:extLst>
+          </p:cNvPr>
+          <p:cNvSpPr>
+            <a:spLocks xmlns:a="http://schemas.openxmlformats.org/drawingml/2006/main" noGrp="1"/>
+          </p:cNvSpPr>
+          <p:nvPr/>
+        </p:nvSpPr>
+        <p:spPr>
+          <a:xfrm xmlns:a="http://schemas.openxmlformats.org/drawingml/2006/main">
+            <a:off x="8058150" y="3371850"/>
+            <a:ext cx="3238500" cy="361950"/>
           </a:xfrm>
           <a:prstGeom xmlns:a="http://schemas.openxmlformats.org/drawingml/2006/main" prst="rect">
             <a:avLst/>
@@ -7072,7 +7084,7 @@
           </a:bodyPr>
           <a:lstStyle xmlns:a="http://schemas.openxmlformats.org/drawingml/2006/main">
             <a:defPPr algn="l">
-              <a:defRPr sz="1650" b="1">
+              <a:defRPr sz="1875" b="1">
                 <a:solidFill>
                   <a:srgbClr val="153B2E"/>
                 </a:solidFill>
@@ -7084,7 +7096,7 @@
           </a:lstStyle>
           <a:p xmlns:a="http://schemas.openxmlformats.org/drawingml/2006/main">
             <a:pPr algn="l">
-              <a:defRPr sz="1650" b="1">
+              <a:defRPr sz="1875" b="1">
                 <a:solidFill>
                   <a:srgbClr val="153B2E"/>
                 </a:solidFill>
@@ -7094,7 +7106,7 @@
               </a:defRPr>
             </a:pPr>
             <a:r>
-              <a:rPr sz="1650" b="1">
+              <a:rPr sz="1875" b="1">
                 <a:solidFill>
                   <a:srgbClr val="153B2E"/>
                 </a:solidFill>
@@ -7102,29 +7114,29 @@
                 <a:ea typeface="Calibri"/>
                 <a:cs typeface="Calibri"/>
               </a:rPr>
-              <a:t>Extend the experience</a:t>
-            </a:r>
-          </a:p>
-        </p:txBody>
-      </p:sp>
-      <p:sp>
-        <p:nvSpPr>
-          <p:cNvPr id="17" name="">
-            <a:extLst xmlns:a="http://schemas.openxmlformats.org/drawingml/2006/main">
-              <a:ext uri="{FF2B5EF4-FFF2-40B4-BE49-F238E27FC236}">
-                <a16:creationId xmlns:a16="http://schemas.microsoft.com/office/drawing/2014/main" id="{164A5C80-98DE-41F2-9AAC-2A0BCFE25DB3}"/>
-              </a:ext>
-            </a:extLst>
-          </p:cNvPr>
-          <p:cNvSpPr>
-            <a:spLocks xmlns:a="http://schemas.openxmlformats.org/drawingml/2006/main" noGrp="1"/>
-          </p:cNvSpPr>
-          <p:nvPr/>
-        </p:nvSpPr>
-        <p:spPr>
-          <a:xfrm xmlns:a="http://schemas.openxmlformats.org/drawingml/2006/main">
-            <a:off x="2876550" y="4762500"/>
-            <a:ext cx="8382000" cy="219075"/>
+              <a:t>3 floors</a:t>
+            </a:r>
+          </a:p>
+        </p:txBody>
+      </p:sp>
+      <p:sp>
+        <p:nvSpPr>
+          <p:cNvPr id="19" name="">
+            <a:extLst xmlns:a="http://schemas.openxmlformats.org/drawingml/2006/main">
+              <a:ext uri="{FF2B5EF4-FFF2-40B4-BE49-F238E27FC236}">
+                <a16:creationId xmlns:a16="http://schemas.microsoft.com/office/drawing/2014/main" id="{DE35D102-A240-42F8-9543-1FA75110DEB6}"/>
+              </a:ext>
+            </a:extLst>
+          </p:cNvPr>
+          <p:cNvSpPr>
+            <a:spLocks xmlns:a="http://schemas.openxmlformats.org/drawingml/2006/main" noGrp="1"/>
+          </p:cNvSpPr>
+          <p:nvPr/>
+        </p:nvSpPr>
+        <p:spPr>
+          <a:xfrm xmlns:a="http://schemas.openxmlformats.org/drawingml/2006/main">
+            <a:off x="8058150" y="3905250"/>
+            <a:ext cx="3143250" cy="1047750"/>
           </a:xfrm>
           <a:prstGeom xmlns:a="http://schemas.openxmlformats.org/drawingml/2006/main" prst="rect">
             <a:avLst/>
@@ -7141,7 +7153,7 @@
           </a:bodyPr>
           <a:lstStyle xmlns:a="http://schemas.openxmlformats.org/drawingml/2006/main">
             <a:defPPr algn="l">
-              <a:defRPr sz="1200" b="0">
+              <a:defRPr sz="1350" b="0">
                 <a:solidFill>
                   <a:srgbClr val="60756A"/>
                 </a:solidFill>
@@ -7153,7 +7165,7 @@
           </a:lstStyle>
           <a:p xmlns:a="http://schemas.openxmlformats.org/drawingml/2006/main">
             <a:pPr algn="l">
-              <a:defRPr sz="1200" b="0">
+              <a:defRPr sz="1350" b="0">
                 <a:solidFill>
                   <a:srgbClr val="60756A"/>
                 </a:solidFill>
@@ -7163,7 +7175,7 @@
               </a:defRPr>
             </a:pPr>
             <a:r>
-              <a:rPr sz="1200" b="0">
+              <a:rPr sz="1350" b="0">
                 <a:solidFill>
                   <a:srgbClr val="60756A"/>
                 </a:solidFill>
@@ -7171,28 +7183,28 @@
                 <a:ea typeface="Calibri"/>
                 <a:cs typeface="Calibri"/>
               </a:rPr>
-              <a:t>WebXR headset walkthroughs are a future direction.</a:t>
-            </a:r>
-          </a:p>
-        </p:txBody>
-      </p:sp>
-      <p:sp>
-        <p:nvSpPr>
-          <p:cNvPr id="18" name="">
-            <a:extLst xmlns:a="http://schemas.openxmlformats.org/drawingml/2006/main">
-              <a:ext uri="{FF2B5EF4-FFF2-40B4-BE49-F238E27FC236}">
-                <a16:creationId xmlns:a16="http://schemas.microsoft.com/office/drawing/2014/main" id="{85E4E096-60BB-44D8-B72B-BD092F627629}"/>
-              </a:ext>
-            </a:extLst>
-          </p:cNvPr>
-          <p:cNvSpPr>
-            <a:spLocks xmlns:a="http://schemas.openxmlformats.org/drawingml/2006/main" noGrp="1"/>
-          </p:cNvSpPr>
-          <p:nvPr/>
-        </p:nvSpPr>
-        <p:spPr>
-          <a:xfrm xmlns:a="http://schemas.openxmlformats.org/drawingml/2006/main">
-            <a:off x="628650" y="5572125"/>
+              <a:t>Switch between orbit and first-person views; climb between floors and approach doors to open them.</a:t>
+            </a:r>
+          </a:p>
+        </p:txBody>
+      </p:sp>
+      <p:sp>
+        <p:nvSpPr>
+          <p:cNvPr id="20" name="">
+            <a:extLst xmlns:a="http://schemas.openxmlformats.org/drawingml/2006/main">
+              <a:ext uri="{FF2B5EF4-FFF2-40B4-BE49-F238E27FC236}">
+                <a16:creationId xmlns:a16="http://schemas.microsoft.com/office/drawing/2014/main" id="{C40EC3D7-E2CD-4E79-99EA-14F19367B61C}"/>
+              </a:ext>
+            </a:extLst>
+          </p:cNvPr>
+          <p:cNvSpPr>
+            <a:spLocks xmlns:a="http://schemas.openxmlformats.org/drawingml/2006/main" noGrp="1"/>
+          </p:cNvSpPr>
+          <p:nvPr/>
+        </p:nvSpPr>
+        <p:spPr>
+          <a:xfrm xmlns:a="http://schemas.openxmlformats.org/drawingml/2006/main">
+            <a:off x="628650" y="5381625"/>
             <a:ext cx="10934700" cy="9525"/>
           </a:xfrm>
           <a:prstGeom xmlns:a="http://schemas.openxmlformats.org/drawingml/2006/main" prst="rect">
@@ -7209,22 +7221,22 @@
       </p:sp>
       <p:sp>
         <p:nvSpPr>
-          <p:cNvPr id="19" name="">
-            <a:extLst xmlns:a="http://schemas.openxmlformats.org/drawingml/2006/main">
-              <a:ext uri="{FF2B5EF4-FFF2-40B4-BE49-F238E27FC236}">
-                <a16:creationId xmlns:a16="http://schemas.microsoft.com/office/drawing/2014/main" id="{1FCDDEE7-9C12-43B8-8781-3F0A6EF493B4}"/>
-              </a:ext>
-            </a:extLst>
-          </p:cNvPr>
-          <p:cNvSpPr>
-            <a:spLocks xmlns:a="http://schemas.openxmlformats.org/drawingml/2006/main" noGrp="1"/>
-          </p:cNvSpPr>
-          <p:nvPr/>
-        </p:nvSpPr>
-        <p:spPr>
-          <a:xfrm xmlns:a="http://schemas.openxmlformats.org/drawingml/2006/main">
-            <a:off x="628650" y="5791200"/>
-            <a:ext cx="1809750" cy="209550"/>
+          <p:cNvPr id="21" name="">
+            <a:extLst xmlns:a="http://schemas.openxmlformats.org/drawingml/2006/main">
+              <a:ext uri="{FF2B5EF4-FFF2-40B4-BE49-F238E27FC236}">
+                <a16:creationId xmlns:a16="http://schemas.microsoft.com/office/drawing/2014/main" id="{AE4A9968-BB24-498A-AE49-A760558E4C28}"/>
+              </a:ext>
+            </a:extLst>
+          </p:cNvPr>
+          <p:cNvSpPr>
+            <a:spLocks xmlns:a="http://schemas.openxmlformats.org/drawingml/2006/main" noGrp="1"/>
+          </p:cNvSpPr>
+          <p:nvPr/>
+        </p:nvSpPr>
+        <p:spPr>
+          <a:xfrm xmlns:a="http://schemas.openxmlformats.org/drawingml/2006/main">
+            <a:off x="628650" y="5638800"/>
+            <a:ext cx="1428750" cy="190500"/>
           </a:xfrm>
           <a:prstGeom xmlns:a="http://schemas.openxmlformats.org/drawingml/2006/main" prst="rect">
             <a:avLst/>
@@ -7271,29 +7283,29 @@
                 <a:ea typeface="Calibri"/>
                 <a:cs typeface="Calibri"/>
               </a:rPr>
-              <a:t>Scaling constraint</a:t>
-            </a:r>
-          </a:p>
-        </p:txBody>
-      </p:sp>
-      <p:sp>
-        <p:nvSpPr>
-          <p:cNvPr id="20" name="">
-            <a:extLst xmlns:a="http://schemas.openxmlformats.org/drawingml/2006/main">
-              <a:ext uri="{FF2B5EF4-FFF2-40B4-BE49-F238E27FC236}">
-                <a16:creationId xmlns:a16="http://schemas.microsoft.com/office/drawing/2014/main" id="{299D9969-56D7-48AB-BBC4-4C989D52C837}"/>
-              </a:ext>
-            </a:extLst>
-          </p:cNvPr>
-          <p:cNvSpPr>
-            <a:spLocks xmlns:a="http://schemas.openxmlformats.org/drawingml/2006/main" noGrp="1"/>
-          </p:cNvSpPr>
-          <p:nvPr/>
-        </p:nvSpPr>
-        <p:spPr>
-          <a:xfrm xmlns:a="http://schemas.openxmlformats.org/drawingml/2006/main">
-            <a:off x="2476500" y="5753100"/>
-            <a:ext cx="8858250" cy="400050"/>
+              <a:t>LIVE SAMPLE</a:t>
+            </a:r>
+          </a:p>
+        </p:txBody>
+      </p:sp>
+      <p:sp>
+        <p:nvSpPr>
+          <p:cNvPr id="22" name="">
+            <a:extLst xmlns:a="http://schemas.openxmlformats.org/drawingml/2006/main">
+              <a:ext uri="{FF2B5EF4-FFF2-40B4-BE49-F238E27FC236}">
+                <a16:creationId xmlns:a16="http://schemas.microsoft.com/office/drawing/2014/main" id="{89A29B7E-3AB4-4848-A140-0EC320A2B2F2}"/>
+              </a:ext>
+            </a:extLst>
+          </p:cNvPr>
+          <p:cNvSpPr>
+            <a:spLocks xmlns:a="http://schemas.openxmlformats.org/drawingml/2006/main" noGrp="1"/>
+          </p:cNvSpPr>
+          <p:nvPr/>
+        </p:nvSpPr>
+        <p:spPr>
+          <a:xfrm xmlns:a="http://schemas.openxmlformats.org/drawingml/2006/main">
+            <a:off x="2238375" y="5581650"/>
+            <a:ext cx="8953500" cy="476250"/>
           </a:xfrm>
           <a:prstGeom xmlns:a="http://schemas.openxmlformats.org/drawingml/2006/main" prst="rect">
             <a:avLst/>
@@ -7310,7 +7322,7 @@
           </a:bodyPr>
           <a:lstStyle xmlns:a="http://schemas.openxmlformats.org/drawingml/2006/main">
             <a:defPPr algn="l">
-              <a:defRPr sz="1275" b="1">
+              <a:defRPr sz="1425" b="1">
                 <a:solidFill>
                   <a:srgbClr val="19332A"/>
                 </a:solidFill>
@@ -7322,7 +7334,7 @@
           </a:lstStyle>
           <a:p xmlns:a="http://schemas.openxmlformats.org/drawingml/2006/main">
             <a:pPr algn="l">
-              <a:defRPr sz="1275" b="1">
+              <a:defRPr sz="1425" b="1">
                 <a:solidFill>
                   <a:srgbClr val="19332A"/>
                 </a:solidFill>
@@ -7332,7 +7344,7 @@
               </a:defRPr>
             </a:pPr>
             <a:r>
-              <a:rPr sz="1275" b="1">
+              <a:rPr sz="1425" b="1">
                 <a:solidFill>
                   <a:srgbClr val="19332A"/>
                 </a:solidFill>
@@ -7340,7 +7352,7 @@
                 <a:ea typeface="Calibri"/>
                 <a:cs typeface="Calibri"/>
               </a:rPr>
-              <a:t>Custom-plan vision analysis needs a Gemini API key; complex drawings need more validation.</a:t>
+              <a:t>10 m × 14 m residence plan · progressive build · walkable stair connections</a:t>
             </a:r>
           </a:p>
         </p:txBody>
@@ -7348,7 +7360,7 @@
     </p:spTree>
     <p:extLst>
       <p:ext uri="{BB962C8B-B14F-4D97-AF65-F5344CB8AC3E}">
-        <p14:creationId xmlns:p14="http://schemas.microsoft.com/office/powerpoint/2010/main" val="1390171183"/>
+        <p14:creationId xmlns:p14="http://schemas.microsoft.com/office/powerpoint/2010/main" val="1398561697"/>
       </p:ext>
     </p:extLst>
   </p:cSld>
@@ -7356,6 +7368,1225 @@
 </file>
 
 <file path=ppt/slides/slide5.xml><?xml version="1.0" encoding="utf-8"?>
+<p:sld xmlns:p="http://schemas.openxmlformats.org/presentationml/2006/main">
+  <p:cSld>
+    <p:bg>
+      <p:bgPr>
+        <a:solidFill xmlns:a="http://schemas.openxmlformats.org/drawingml/2006/main">
+          <a:srgbClr val="F5F7F2"/>
+        </a:solidFill>
+      </p:bgPr>
+    </p:bg>
+    <p:spTree>
+      <p:nvGrpSpPr>
+        <p:cNvPr id="1" name=""/>
+        <p:cNvGrpSpPr/>
+        <p:nvPr/>
+      </p:nvGrpSpPr>
+      <p:grpSpPr>
+        <a:xfrm xmlns:a="http://schemas.openxmlformats.org/drawingml/2006/main"/>
+      </p:grpSpPr>
+      <p:sp>
+        <p:nvSpPr>
+          <p:cNvPr id="21" name="">
+            <a:extLst xmlns:a="http://schemas.openxmlformats.org/drawingml/2006/main">
+              <a:ext uri="{FF2B5EF4-FFF2-40B4-BE49-F238E27FC236}">
+                <a16:creationId xmlns:a16="http://schemas.microsoft.com/office/drawing/2014/main" id="{71DDE711-7086-4B47-9110-1A5F9CFF0B92}"/>
+              </a:ext>
+            </a:extLst>
+          </p:cNvPr>
+          <p:cNvSpPr>
+            <a:spLocks xmlns:a="http://schemas.openxmlformats.org/drawingml/2006/main" noGrp="1"/>
+          </p:cNvSpPr>
+          <p:nvPr/>
+        </p:nvSpPr>
+        <p:spPr>
+          <a:xfrm xmlns:a="http://schemas.openxmlformats.org/drawingml/2006/main">
+            <a:off x="0" y="0"/>
+            <a:ext cx="12192000" cy="76200"/>
+          </a:xfrm>
+          <a:prstGeom xmlns:a="http://schemas.openxmlformats.org/drawingml/2006/main" prst="rect">
+            <a:avLst/>
+          </a:prstGeom>
+          <a:solidFill xmlns:a="http://schemas.openxmlformats.org/drawingml/2006/main">
+            <a:srgbClr val="2C6B50"/>
+          </a:solidFill>
+          <a:ln xmlns:a="http://schemas.openxmlformats.org/drawingml/2006/main" w="0">
+            <a:noFill/>
+            <a:prstDash val="solid"/>
+          </a:ln>
+        </p:spPr>
+      </p:sp>
+      <p:sp>
+        <p:nvSpPr>
+          <p:cNvPr id="2" name="">
+            <a:extLst xmlns:a="http://schemas.openxmlformats.org/drawingml/2006/main">
+              <a:ext uri="{FF2B5EF4-FFF2-40B4-BE49-F238E27FC236}">
+                <a16:creationId xmlns:a16="http://schemas.microsoft.com/office/drawing/2014/main" id="{32F34EB0-EAB4-48F0-A76D-5A45FB86504B}"/>
+              </a:ext>
+            </a:extLst>
+          </p:cNvPr>
+          <p:cNvSpPr>
+            <a:spLocks xmlns:a="http://schemas.openxmlformats.org/drawingml/2006/main" noGrp="1"/>
+          </p:cNvSpPr>
+          <p:nvPr/>
+        </p:nvSpPr>
+        <p:spPr>
+          <a:xfrm xmlns:a="http://schemas.openxmlformats.org/drawingml/2006/main">
+            <a:off x="609600" y="342900"/>
+            <a:ext cx="4762500" cy="190500"/>
+          </a:xfrm>
+          <a:prstGeom xmlns:a="http://schemas.openxmlformats.org/drawingml/2006/main" prst="rect">
+            <a:avLst/>
+          </a:prstGeom>
+          <a:noFill xmlns:a="http://schemas.openxmlformats.org/drawingml/2006/main"/>
+          <a:ln xmlns:a="http://schemas.openxmlformats.org/drawingml/2006/main" w="0">
+            <a:noFill/>
+            <a:prstDash val="solid"/>
+          </a:ln>
+        </p:spPr>
+        <p:txBody>
+          <a:bodyPr xmlns:a="http://schemas.openxmlformats.org/drawingml/2006/main" wrap="square" lIns="0" tIns="0" rIns="0" bIns="0" anchor="t">
+            <a:normAutofit fontScale="100000"/>
+          </a:bodyPr>
+          <a:lstStyle xmlns:a="http://schemas.openxmlformats.org/drawingml/2006/main">
+            <a:defPPr algn="l">
+              <a:defRPr sz="975" b="1">
+                <a:solidFill>
+                  <a:srgbClr val="2C6B50"/>
+                </a:solidFill>
+                <a:latin typeface="Calibri"/>
+                <a:ea typeface="Calibri"/>
+                <a:cs typeface="Calibri"/>
+              </a:defRPr>
+            </a:defPPr>
+          </a:lstStyle>
+          <a:p xmlns:a="http://schemas.openxmlformats.org/drawingml/2006/main">
+            <a:pPr algn="l">
+              <a:defRPr sz="975" b="1">
+                <a:solidFill>
+                  <a:srgbClr val="2C6B50"/>
+                </a:solidFill>
+                <a:latin typeface="Calibri"/>
+                <a:ea typeface="Calibri"/>
+                <a:cs typeface="Calibri"/>
+              </a:defRPr>
+            </a:pPr>
+            <a:r>
+              <a:rPr sz="975" b="1">
+                <a:solidFill>
+                  <a:srgbClr val="2C6B50"/>
+                </a:solidFill>
+                <a:latin typeface="Calibri"/>
+                <a:ea typeface="Calibri"/>
+                <a:cs typeface="Calibri"/>
+              </a:rPr>
+              <a:t>SCALABILITY</a:t>
+            </a:r>
+          </a:p>
+        </p:txBody>
+      </p:sp>
+      <p:sp>
+        <p:nvSpPr>
+          <p:cNvPr id="3" name="">
+            <a:extLst xmlns:a="http://schemas.openxmlformats.org/drawingml/2006/main">
+              <a:ext uri="{FF2B5EF4-FFF2-40B4-BE49-F238E27FC236}">
+                <a16:creationId xmlns:a16="http://schemas.microsoft.com/office/drawing/2014/main" id="{1591ED9D-2EC2-4C4C-A3D3-715317150A08}"/>
+              </a:ext>
+            </a:extLst>
+          </p:cNvPr>
+          <p:cNvSpPr>
+            <a:spLocks xmlns:a="http://schemas.openxmlformats.org/drawingml/2006/main" noGrp="1"/>
+          </p:cNvSpPr>
+          <p:nvPr/>
+        </p:nvSpPr>
+        <p:spPr>
+          <a:xfrm xmlns:a="http://schemas.openxmlformats.org/drawingml/2006/main">
+            <a:off x="11163300" y="6362700"/>
+            <a:ext cx="457200" cy="171450"/>
+          </a:xfrm>
+          <a:prstGeom xmlns:a="http://schemas.openxmlformats.org/drawingml/2006/main" prst="rect">
+            <a:avLst/>
+          </a:prstGeom>
+          <a:noFill xmlns:a="http://schemas.openxmlformats.org/drawingml/2006/main"/>
+          <a:ln xmlns:a="http://schemas.openxmlformats.org/drawingml/2006/main" w="0">
+            <a:noFill/>
+            <a:prstDash val="solid"/>
+          </a:ln>
+        </p:spPr>
+        <p:txBody>
+          <a:bodyPr xmlns:a="http://schemas.openxmlformats.org/drawingml/2006/main" wrap="square" lIns="0" tIns="0" rIns="0" bIns="0" anchor="t">
+            <a:normAutofit fontScale="100000"/>
+          </a:bodyPr>
+          <a:lstStyle xmlns:a="http://schemas.openxmlformats.org/drawingml/2006/main">
+            <a:defPPr algn="r">
+              <a:defRPr sz="900" b="1">
+                <a:solidFill>
+                  <a:srgbClr val="60756A"/>
+                </a:solidFill>
+                <a:latin typeface="Calibri"/>
+                <a:ea typeface="Calibri"/>
+                <a:cs typeface="Calibri"/>
+              </a:defRPr>
+            </a:defPPr>
+          </a:lstStyle>
+          <a:p xmlns:a="http://schemas.openxmlformats.org/drawingml/2006/main">
+            <a:pPr algn="r">
+              <a:defRPr sz="900" b="1">
+                <a:solidFill>
+                  <a:srgbClr val="60756A"/>
+                </a:solidFill>
+                <a:latin typeface="Calibri"/>
+                <a:ea typeface="Calibri"/>
+                <a:cs typeface="Calibri"/>
+              </a:defRPr>
+            </a:pPr>
+            <a:r>
+              <a:rPr sz="900" b="1">
+                <a:solidFill>
+                  <a:srgbClr val="60756A"/>
+                </a:solidFill>
+                <a:latin typeface="Calibri"/>
+                <a:ea typeface="Calibri"/>
+                <a:cs typeface="Calibri"/>
+              </a:rPr>
+              <a:t>05</a:t>
+            </a:r>
+          </a:p>
+        </p:txBody>
+      </p:sp>
+      <p:sp>
+        <p:nvSpPr>
+          <p:cNvPr id="4" name="">
+            <a:extLst xmlns:a="http://schemas.openxmlformats.org/drawingml/2006/main">
+              <a:ext uri="{FF2B5EF4-FFF2-40B4-BE49-F238E27FC236}">
+                <a16:creationId xmlns:a16="http://schemas.microsoft.com/office/drawing/2014/main" id="{FEB6142F-87B4-4D39-9E2C-5B506B6BC3A0}"/>
+              </a:ext>
+            </a:extLst>
+          </p:cNvPr>
+          <p:cNvSpPr>
+            <a:spLocks xmlns:a="http://schemas.openxmlformats.org/drawingml/2006/main" noGrp="1"/>
+          </p:cNvSpPr>
+          <p:nvPr/>
+        </p:nvSpPr>
+        <p:spPr>
+          <a:xfrm xmlns:a="http://schemas.openxmlformats.org/drawingml/2006/main">
+            <a:off x="609600" y="838200"/>
+            <a:ext cx="10001250" cy="552450"/>
+          </a:xfrm>
+          <a:prstGeom xmlns:a="http://schemas.openxmlformats.org/drawingml/2006/main" prst="rect">
+            <a:avLst/>
+          </a:prstGeom>
+          <a:noFill xmlns:a="http://schemas.openxmlformats.org/drawingml/2006/main"/>
+          <a:ln xmlns:a="http://schemas.openxmlformats.org/drawingml/2006/main" w="0">
+            <a:noFill/>
+            <a:prstDash val="solid"/>
+          </a:ln>
+        </p:spPr>
+        <p:txBody>
+          <a:bodyPr xmlns:a="http://schemas.openxmlformats.org/drawingml/2006/main" wrap="square" lIns="0" tIns="0" rIns="0" bIns="0" anchor="t">
+            <a:normAutofit fontScale="100000"/>
+          </a:bodyPr>
+          <a:lstStyle xmlns:a="http://schemas.openxmlformats.org/drawingml/2006/main">
+            <a:defPPr algn="l">
+              <a:defRPr sz="3000" b="1">
+                <a:solidFill>
+                  <a:srgbClr val="153B2E"/>
+                </a:solidFill>
+                <a:latin typeface="Calibri"/>
+                <a:ea typeface="Calibri"/>
+                <a:cs typeface="Calibri"/>
+              </a:defRPr>
+            </a:defPPr>
+          </a:lstStyle>
+          <a:p xmlns:a="http://schemas.openxmlformats.org/drawingml/2006/main">
+            <a:pPr algn="l">
+              <a:defRPr sz="3000" b="1">
+                <a:solidFill>
+                  <a:srgbClr val="153B2E"/>
+                </a:solidFill>
+                <a:latin typeface="Calibri"/>
+                <a:ea typeface="Calibri"/>
+                <a:cs typeface="Calibri"/>
+              </a:defRPr>
+            </a:pPr>
+            <a:r>
+              <a:rPr sz="3000" b="1">
+                <a:solidFill>
+                  <a:srgbClr val="153B2E"/>
+                </a:solidFill>
+                <a:latin typeface="Calibri"/>
+                <a:ea typeface="Calibri"/>
+                <a:cs typeface="Calibri"/>
+              </a:rPr>
+              <a:t>Start with one home. Build toward more.</a:t>
+            </a:r>
+          </a:p>
+        </p:txBody>
+      </p:sp>
+      <p:sp>
+        <p:nvSpPr>
+          <p:cNvPr id="5" name="">
+            <a:extLst xmlns:a="http://schemas.openxmlformats.org/drawingml/2006/main">
+              <a:ext uri="{FF2B5EF4-FFF2-40B4-BE49-F238E27FC236}">
+                <a16:creationId xmlns:a16="http://schemas.microsoft.com/office/drawing/2014/main" id="{4694E2A4-FD70-4391-9C20-31F4A81E050A}"/>
+              </a:ext>
+            </a:extLst>
+          </p:cNvPr>
+          <p:cNvSpPr>
+            <a:spLocks xmlns:a="http://schemas.openxmlformats.org/drawingml/2006/main" noGrp="1"/>
+          </p:cNvSpPr>
+          <p:nvPr/>
+        </p:nvSpPr>
+        <p:spPr>
+          <a:xfrm xmlns:a="http://schemas.openxmlformats.org/drawingml/2006/main">
+            <a:off x="628650" y="1495425"/>
+            <a:ext cx="8858250" cy="285750"/>
+          </a:xfrm>
+          <a:prstGeom xmlns:a="http://schemas.openxmlformats.org/drawingml/2006/main" prst="rect">
+            <a:avLst/>
+          </a:prstGeom>
+          <a:noFill xmlns:a="http://schemas.openxmlformats.org/drawingml/2006/main"/>
+          <a:ln xmlns:a="http://schemas.openxmlformats.org/drawingml/2006/main" w="0">
+            <a:noFill/>
+            <a:prstDash val="solid"/>
+          </a:ln>
+        </p:spPr>
+        <p:txBody>
+          <a:bodyPr xmlns:a="http://schemas.openxmlformats.org/drawingml/2006/main" wrap="square" lIns="0" tIns="0" rIns="0" bIns="0" anchor="t">
+            <a:normAutofit fontScale="100000"/>
+          </a:bodyPr>
+          <a:lstStyle xmlns:a="http://schemas.openxmlformats.org/drawingml/2006/main">
+            <a:defPPr algn="l">
+              <a:defRPr sz="1500" b="0">
+                <a:solidFill>
+                  <a:srgbClr val="60756A"/>
+                </a:solidFill>
+                <a:latin typeface="Calibri"/>
+                <a:ea typeface="Calibri"/>
+                <a:cs typeface="Calibri"/>
+              </a:defRPr>
+            </a:defPPr>
+          </a:lstStyle>
+          <a:p xmlns:a="http://schemas.openxmlformats.org/drawingml/2006/main">
+            <a:pPr algn="l">
+              <a:defRPr sz="1500" b="0">
+                <a:solidFill>
+                  <a:srgbClr val="60756A"/>
+                </a:solidFill>
+                <a:latin typeface="Calibri"/>
+                <a:ea typeface="Calibri"/>
+                <a:cs typeface="Calibri"/>
+              </a:defRPr>
+            </a:pPr>
+            <a:r>
+              <a:rPr sz="1500" b="0">
+                <a:solidFill>
+                  <a:srgbClr val="60756A"/>
+                </a:solidFill>
+                <a:latin typeface="Calibri"/>
+                <a:ea typeface="Calibri"/>
+                <a:cs typeface="Calibri"/>
+              </a:rPr>
+              <a:t>Scale the capabilities in steps—and make the limits visible.</a:t>
+            </a:r>
+          </a:p>
+        </p:txBody>
+      </p:sp>
+      <p:sp>
+        <p:nvSpPr>
+          <p:cNvPr id="6" name="">
+            <a:extLst xmlns:a="http://schemas.openxmlformats.org/drawingml/2006/main">
+              <a:ext uri="{FF2B5EF4-FFF2-40B4-BE49-F238E27FC236}">
+                <a16:creationId xmlns:a16="http://schemas.microsoft.com/office/drawing/2014/main" id="{8EF062D4-39C5-4E86-957B-3DA28DCB96A6}"/>
+              </a:ext>
+            </a:extLst>
+          </p:cNvPr>
+          <p:cNvSpPr>
+            <a:spLocks xmlns:a="http://schemas.openxmlformats.org/drawingml/2006/main" noGrp="1"/>
+          </p:cNvSpPr>
+          <p:nvPr/>
+        </p:nvSpPr>
+        <p:spPr>
+          <a:xfrm xmlns:a="http://schemas.openxmlformats.org/drawingml/2006/main">
+            <a:off x="628650" y="2266950"/>
+            <a:ext cx="10934700" cy="866775"/>
+          </a:xfrm>
+          <a:prstGeom xmlns:a="http://schemas.openxmlformats.org/drawingml/2006/main" prst="rect">
+            <a:avLst/>
+          </a:prstGeom>
+          <a:solidFill xmlns:a="http://schemas.openxmlformats.org/drawingml/2006/main">
+            <a:srgbClr val="E9F0E9"/>
+          </a:solidFill>
+          <a:ln xmlns:a="http://schemas.openxmlformats.org/drawingml/2006/main" w="0">
+            <a:noFill/>
+            <a:prstDash val="solid"/>
+          </a:ln>
+        </p:spPr>
+      </p:sp>
+      <p:sp>
+        <p:nvSpPr>
+          <p:cNvPr id="7" name="">
+            <a:extLst xmlns:a="http://schemas.openxmlformats.org/drawingml/2006/main">
+              <a:ext uri="{FF2B5EF4-FFF2-40B4-BE49-F238E27FC236}">
+                <a16:creationId xmlns:a16="http://schemas.microsoft.com/office/drawing/2014/main" id="{B6424764-4A26-4329-90F9-96FE42208433}"/>
+              </a:ext>
+            </a:extLst>
+          </p:cNvPr>
+          <p:cNvSpPr>
+            <a:spLocks xmlns:a="http://schemas.openxmlformats.org/drawingml/2006/main" noGrp="1"/>
+          </p:cNvSpPr>
+          <p:nvPr/>
+        </p:nvSpPr>
+        <p:spPr>
+          <a:xfrm xmlns:a="http://schemas.openxmlformats.org/drawingml/2006/main">
+            <a:off x="857250" y="2457450"/>
+            <a:ext cx="1714500" cy="180975"/>
+          </a:xfrm>
+          <a:prstGeom xmlns:a="http://schemas.openxmlformats.org/drawingml/2006/main" prst="rect">
+            <a:avLst/>
+          </a:prstGeom>
+          <a:noFill xmlns:a="http://schemas.openxmlformats.org/drawingml/2006/main"/>
+          <a:ln xmlns:a="http://schemas.openxmlformats.org/drawingml/2006/main" w="0">
+            <a:noFill/>
+            <a:prstDash val="solid"/>
+          </a:ln>
+        </p:spPr>
+        <p:txBody>
+          <a:bodyPr xmlns:a="http://schemas.openxmlformats.org/drawingml/2006/main" wrap="square" lIns="0" tIns="0" rIns="0" bIns="0" anchor="t">
+            <a:normAutofit fontScale="100000"/>
+          </a:bodyPr>
+          <a:lstStyle xmlns:a="http://schemas.openxmlformats.org/drawingml/2006/main">
+            <a:defPPr algn="l">
+              <a:defRPr sz="975" b="1">
+                <a:solidFill>
+                  <a:srgbClr val="2C6B50"/>
+                </a:solidFill>
+                <a:latin typeface="Calibri"/>
+                <a:ea typeface="Calibri"/>
+                <a:cs typeface="Calibri"/>
+              </a:defRPr>
+            </a:defPPr>
+          </a:lstStyle>
+          <a:p xmlns:a="http://schemas.openxmlformats.org/drawingml/2006/main">
+            <a:pPr algn="l">
+              <a:defRPr sz="975" b="1">
+                <a:solidFill>
+                  <a:srgbClr val="2C6B50"/>
+                </a:solidFill>
+                <a:latin typeface="Calibri"/>
+                <a:ea typeface="Calibri"/>
+                <a:cs typeface="Calibri"/>
+              </a:defRPr>
+            </a:pPr>
+            <a:r>
+              <a:rPr sz="975" b="1">
+                <a:solidFill>
+                  <a:srgbClr val="2C6B50"/>
+                </a:solidFill>
+                <a:latin typeface="Calibri"/>
+                <a:ea typeface="Calibri"/>
+                <a:cs typeface="Calibri"/>
+              </a:rPr>
+              <a:t>TODAY</a:t>
+            </a:r>
+          </a:p>
+        </p:txBody>
+      </p:sp>
+      <p:sp>
+        <p:nvSpPr>
+          <p:cNvPr id="8" name="">
+            <a:extLst xmlns:a="http://schemas.openxmlformats.org/drawingml/2006/main">
+              <a:ext uri="{FF2B5EF4-FFF2-40B4-BE49-F238E27FC236}">
+                <a16:creationId xmlns:a16="http://schemas.microsoft.com/office/drawing/2014/main" id="{56290AAE-7A80-4D18-839A-81661ED98AB5}"/>
+              </a:ext>
+            </a:extLst>
+          </p:cNvPr>
+          <p:cNvSpPr>
+            <a:spLocks xmlns:a="http://schemas.openxmlformats.org/drawingml/2006/main" noGrp="1"/>
+          </p:cNvSpPr>
+          <p:nvPr/>
+        </p:nvSpPr>
+        <p:spPr>
+          <a:xfrm xmlns:a="http://schemas.openxmlformats.org/drawingml/2006/main">
+            <a:off x="2876550" y="2409825"/>
+            <a:ext cx="3143250" cy="266700"/>
+          </a:xfrm>
+          <a:prstGeom xmlns:a="http://schemas.openxmlformats.org/drawingml/2006/main" prst="rect">
+            <a:avLst/>
+          </a:prstGeom>
+          <a:noFill xmlns:a="http://schemas.openxmlformats.org/drawingml/2006/main"/>
+          <a:ln xmlns:a="http://schemas.openxmlformats.org/drawingml/2006/main" w="0">
+            <a:noFill/>
+            <a:prstDash val="solid"/>
+          </a:ln>
+        </p:spPr>
+        <p:txBody>
+          <a:bodyPr xmlns:a="http://schemas.openxmlformats.org/drawingml/2006/main" wrap="square" lIns="0" tIns="0" rIns="0" bIns="0" anchor="t">
+            <a:normAutofit fontScale="100000"/>
+          </a:bodyPr>
+          <a:lstStyle xmlns:a="http://schemas.openxmlformats.org/drawingml/2006/main">
+            <a:defPPr algn="l">
+              <a:defRPr sz="1575" b="1">
+                <a:solidFill>
+                  <a:srgbClr val="153B2E"/>
+                </a:solidFill>
+                <a:latin typeface="Calibri"/>
+                <a:ea typeface="Calibri"/>
+                <a:cs typeface="Calibri"/>
+              </a:defRPr>
+            </a:defPPr>
+          </a:lstStyle>
+          <a:p xmlns:a="http://schemas.openxmlformats.org/drawingml/2006/main">
+            <a:pPr algn="l">
+              <a:defRPr sz="1575" b="1">
+                <a:solidFill>
+                  <a:srgbClr val="153B2E"/>
+                </a:solidFill>
+                <a:latin typeface="Calibri"/>
+                <a:ea typeface="Calibri"/>
+                <a:cs typeface="Calibri"/>
+              </a:defRPr>
+            </a:pPr>
+            <a:r>
+              <a:rPr sz="1575" b="1">
+                <a:solidFill>
+                  <a:srgbClr val="153B2E"/>
+                </a:solidFill>
+                <a:latin typeface="Calibri"/>
+                <a:ea typeface="Calibri"/>
+                <a:cs typeface="Calibri"/>
+              </a:rPr>
+              <a:t>Browser workflow</a:t>
+            </a:r>
+          </a:p>
+        </p:txBody>
+      </p:sp>
+      <p:sp>
+        <p:nvSpPr>
+          <p:cNvPr id="9" name="">
+            <a:extLst xmlns:a="http://schemas.openxmlformats.org/drawingml/2006/main">
+              <a:ext uri="{FF2B5EF4-FFF2-40B4-BE49-F238E27FC236}">
+                <a16:creationId xmlns:a16="http://schemas.microsoft.com/office/drawing/2014/main" id="{857E65B9-37EE-40EF-9536-F4BDEE3B094F}"/>
+              </a:ext>
+            </a:extLst>
+          </p:cNvPr>
+          <p:cNvSpPr>
+            <a:spLocks xmlns:a="http://schemas.openxmlformats.org/drawingml/2006/main" noGrp="1"/>
+          </p:cNvSpPr>
+          <p:nvPr/>
+        </p:nvSpPr>
+        <p:spPr>
+          <a:xfrm xmlns:a="http://schemas.openxmlformats.org/drawingml/2006/main">
+            <a:off x="2876550" y="2743200"/>
+            <a:ext cx="8334375" cy="257175"/>
+          </a:xfrm>
+          <a:prstGeom xmlns:a="http://schemas.openxmlformats.org/drawingml/2006/main" prst="rect">
+            <a:avLst/>
+          </a:prstGeom>
+          <a:noFill xmlns:a="http://schemas.openxmlformats.org/drawingml/2006/main"/>
+          <a:ln xmlns:a="http://schemas.openxmlformats.org/drawingml/2006/main" w="0">
+            <a:noFill/>
+            <a:prstDash val="solid"/>
+          </a:ln>
+        </p:spPr>
+        <p:txBody>
+          <a:bodyPr xmlns:a="http://schemas.openxmlformats.org/drawingml/2006/main" wrap="square" lIns="0" tIns="0" rIns="0" bIns="0" anchor="t">
+            <a:normAutofit fontScale="100000"/>
+          </a:bodyPr>
+          <a:lstStyle xmlns:a="http://schemas.openxmlformats.org/drawingml/2006/main">
+            <a:defPPr algn="l">
+              <a:defRPr sz="1200" b="0">
+                <a:solidFill>
+                  <a:srgbClr val="60756A"/>
+                </a:solidFill>
+                <a:latin typeface="Calibri"/>
+                <a:ea typeface="Calibri"/>
+                <a:cs typeface="Calibri"/>
+              </a:defRPr>
+            </a:defPPr>
+          </a:lstStyle>
+          <a:p xmlns:a="http://schemas.openxmlformats.org/drawingml/2006/main">
+            <a:pPr algn="l">
+              <a:defRPr sz="1200" b="0">
+                <a:solidFill>
+                  <a:srgbClr val="60756A"/>
+                </a:solidFill>
+                <a:latin typeface="Calibri"/>
+                <a:ea typeface="Calibri"/>
+                <a:cs typeface="Calibri"/>
+              </a:defRPr>
+            </a:pPr>
+            <a:r>
+              <a:rPr sz="1200" b="0">
+                <a:solidFill>
+                  <a:srgbClr val="60756A"/>
+                </a:solidFill>
+                <a:latin typeface="Calibri"/>
+                <a:ea typeface="Calibri"/>
+                <a:cs typeface="Calibri"/>
+              </a:rPr>
+              <a:t>PDF, PNG and JPG inputs; local rendering; a built-in three-floor sample.</a:t>
+            </a:r>
+          </a:p>
+        </p:txBody>
+      </p:sp>
+      <p:sp>
+        <p:nvSpPr>
+          <p:cNvPr id="10" name="">
+            <a:extLst xmlns:a="http://schemas.openxmlformats.org/drawingml/2006/main">
+              <a:ext uri="{FF2B5EF4-FFF2-40B4-BE49-F238E27FC236}">
+                <a16:creationId xmlns:a16="http://schemas.microsoft.com/office/drawing/2014/main" id="{4A31ABB0-26ED-486F-A524-6FEE6CF6EF86}"/>
+              </a:ext>
+            </a:extLst>
+          </p:cNvPr>
+          <p:cNvSpPr>
+            <a:spLocks xmlns:a="http://schemas.openxmlformats.org/drawingml/2006/main" noGrp="1"/>
+          </p:cNvSpPr>
+          <p:nvPr/>
+        </p:nvSpPr>
+        <p:spPr>
+          <a:xfrm xmlns:a="http://schemas.openxmlformats.org/drawingml/2006/main">
+            <a:off x="628650" y="3286125"/>
+            <a:ext cx="10934700" cy="866775"/>
+          </a:xfrm>
+          <a:prstGeom xmlns:a="http://schemas.openxmlformats.org/drawingml/2006/main" prst="rect">
+            <a:avLst/>
+          </a:prstGeom>
+          <a:solidFill xmlns:a="http://schemas.openxmlformats.org/drawingml/2006/main">
+            <a:srgbClr val="D9E8DC"/>
+          </a:solidFill>
+          <a:ln xmlns:a="http://schemas.openxmlformats.org/drawingml/2006/main" w="0">
+            <a:noFill/>
+            <a:prstDash val="solid"/>
+          </a:ln>
+        </p:spPr>
+      </p:sp>
+      <p:sp>
+        <p:nvSpPr>
+          <p:cNvPr id="11" name="">
+            <a:extLst xmlns:a="http://schemas.openxmlformats.org/drawingml/2006/main">
+              <a:ext uri="{FF2B5EF4-FFF2-40B4-BE49-F238E27FC236}">
+                <a16:creationId xmlns:a16="http://schemas.microsoft.com/office/drawing/2014/main" id="{23B0F755-3ECF-4BCE-92FE-926540539E90}"/>
+              </a:ext>
+            </a:extLst>
+          </p:cNvPr>
+          <p:cNvSpPr>
+            <a:spLocks xmlns:a="http://schemas.openxmlformats.org/drawingml/2006/main" noGrp="1"/>
+          </p:cNvSpPr>
+          <p:nvPr/>
+        </p:nvSpPr>
+        <p:spPr>
+          <a:xfrm xmlns:a="http://schemas.openxmlformats.org/drawingml/2006/main">
+            <a:off x="857250" y="3476625"/>
+            <a:ext cx="1714500" cy="180975"/>
+          </a:xfrm>
+          <a:prstGeom xmlns:a="http://schemas.openxmlformats.org/drawingml/2006/main" prst="rect">
+            <a:avLst/>
+          </a:prstGeom>
+          <a:noFill xmlns:a="http://schemas.openxmlformats.org/drawingml/2006/main"/>
+          <a:ln xmlns:a="http://schemas.openxmlformats.org/drawingml/2006/main" w="0">
+            <a:noFill/>
+            <a:prstDash val="solid"/>
+          </a:ln>
+        </p:spPr>
+        <p:txBody>
+          <a:bodyPr xmlns:a="http://schemas.openxmlformats.org/drawingml/2006/main" wrap="square" lIns="0" tIns="0" rIns="0" bIns="0" anchor="t">
+            <a:normAutofit fontScale="100000"/>
+          </a:bodyPr>
+          <a:lstStyle xmlns:a="http://schemas.openxmlformats.org/drawingml/2006/main">
+            <a:defPPr algn="l">
+              <a:defRPr sz="975" b="1">
+                <a:solidFill>
+                  <a:srgbClr val="E9795B"/>
+                </a:solidFill>
+                <a:latin typeface="Calibri"/>
+                <a:ea typeface="Calibri"/>
+                <a:cs typeface="Calibri"/>
+              </a:defRPr>
+            </a:defPPr>
+          </a:lstStyle>
+          <a:p xmlns:a="http://schemas.openxmlformats.org/drawingml/2006/main">
+            <a:pPr algn="l">
+              <a:defRPr sz="975" b="1">
+                <a:solidFill>
+                  <a:srgbClr val="E9795B"/>
+                </a:solidFill>
+                <a:latin typeface="Calibri"/>
+                <a:ea typeface="Calibri"/>
+                <a:cs typeface="Calibri"/>
+              </a:defRPr>
+            </a:pPr>
+            <a:r>
+              <a:rPr sz="975" b="1">
+                <a:solidFill>
+                  <a:srgbClr val="E9795B"/>
+                </a:solidFill>
+                <a:latin typeface="Calibri"/>
+                <a:ea typeface="Calibri"/>
+                <a:cs typeface="Calibri"/>
+              </a:rPr>
+              <a:t>NEXT</a:t>
+            </a:r>
+          </a:p>
+        </p:txBody>
+      </p:sp>
+      <p:sp>
+        <p:nvSpPr>
+          <p:cNvPr id="12" name="">
+            <a:extLst xmlns:a="http://schemas.openxmlformats.org/drawingml/2006/main">
+              <a:ext uri="{FF2B5EF4-FFF2-40B4-BE49-F238E27FC236}">
+                <a16:creationId xmlns:a16="http://schemas.microsoft.com/office/drawing/2014/main" id="{B87D82C8-1051-4379-9446-0BB99A9B3A09}"/>
+              </a:ext>
+            </a:extLst>
+          </p:cNvPr>
+          <p:cNvSpPr>
+            <a:spLocks xmlns:a="http://schemas.openxmlformats.org/drawingml/2006/main" noGrp="1"/>
+          </p:cNvSpPr>
+          <p:nvPr/>
+        </p:nvSpPr>
+        <p:spPr>
+          <a:xfrm xmlns:a="http://schemas.openxmlformats.org/drawingml/2006/main">
+            <a:off x="2876550" y="3429000"/>
+            <a:ext cx="3143250" cy="266700"/>
+          </a:xfrm>
+          <a:prstGeom xmlns:a="http://schemas.openxmlformats.org/drawingml/2006/main" prst="rect">
+            <a:avLst/>
+          </a:prstGeom>
+          <a:noFill xmlns:a="http://schemas.openxmlformats.org/drawingml/2006/main"/>
+          <a:ln xmlns:a="http://schemas.openxmlformats.org/drawingml/2006/main" w="0">
+            <a:noFill/>
+            <a:prstDash val="solid"/>
+          </a:ln>
+        </p:spPr>
+        <p:txBody>
+          <a:bodyPr xmlns:a="http://schemas.openxmlformats.org/drawingml/2006/main" wrap="square" lIns="0" tIns="0" rIns="0" bIns="0" anchor="t">
+            <a:normAutofit fontScale="100000"/>
+          </a:bodyPr>
+          <a:lstStyle xmlns:a="http://schemas.openxmlformats.org/drawingml/2006/main">
+            <a:defPPr algn="l">
+              <a:defRPr sz="1575" b="1">
+                <a:solidFill>
+                  <a:srgbClr val="153B2E"/>
+                </a:solidFill>
+                <a:latin typeface="Calibri"/>
+                <a:ea typeface="Calibri"/>
+                <a:cs typeface="Calibri"/>
+              </a:defRPr>
+            </a:defPPr>
+          </a:lstStyle>
+          <a:p xmlns:a="http://schemas.openxmlformats.org/drawingml/2006/main">
+            <a:pPr algn="l">
+              <a:defRPr sz="1575" b="1">
+                <a:solidFill>
+                  <a:srgbClr val="153B2E"/>
+                </a:solidFill>
+                <a:latin typeface="Calibri"/>
+                <a:ea typeface="Calibri"/>
+                <a:cs typeface="Calibri"/>
+              </a:defRPr>
+            </a:pPr>
+            <a:r>
+              <a:rPr sz="1575" b="1">
+                <a:solidFill>
+                  <a:srgbClr val="153B2E"/>
+                </a:solidFill>
+                <a:latin typeface="Calibri"/>
+                <a:ea typeface="Calibri"/>
+                <a:cs typeface="Calibri"/>
+              </a:rPr>
+              <a:t>Broader interoperability</a:t>
+            </a:r>
+          </a:p>
+        </p:txBody>
+      </p:sp>
+      <p:sp>
+        <p:nvSpPr>
+          <p:cNvPr id="13" name="">
+            <a:extLst xmlns:a="http://schemas.openxmlformats.org/drawingml/2006/main">
+              <a:ext uri="{FF2B5EF4-FFF2-40B4-BE49-F238E27FC236}">
+                <a16:creationId xmlns:a16="http://schemas.microsoft.com/office/drawing/2014/main" id="{F1941E8F-B0AA-4263-A91D-3E76A55A7110}"/>
+              </a:ext>
+            </a:extLst>
+          </p:cNvPr>
+          <p:cNvSpPr>
+            <a:spLocks xmlns:a="http://schemas.openxmlformats.org/drawingml/2006/main" noGrp="1"/>
+          </p:cNvSpPr>
+          <p:nvPr/>
+        </p:nvSpPr>
+        <p:spPr>
+          <a:xfrm xmlns:a="http://schemas.openxmlformats.org/drawingml/2006/main">
+            <a:off x="2876550" y="3762375"/>
+            <a:ext cx="8334375" cy="257175"/>
+          </a:xfrm>
+          <a:prstGeom xmlns:a="http://schemas.openxmlformats.org/drawingml/2006/main" prst="rect">
+            <a:avLst/>
+          </a:prstGeom>
+          <a:noFill xmlns:a="http://schemas.openxmlformats.org/drawingml/2006/main"/>
+          <a:ln xmlns:a="http://schemas.openxmlformats.org/drawingml/2006/main" w="0">
+            <a:noFill/>
+            <a:prstDash val="solid"/>
+          </a:ln>
+        </p:spPr>
+        <p:txBody>
+          <a:bodyPr xmlns:a="http://schemas.openxmlformats.org/drawingml/2006/main" wrap="square" lIns="0" tIns="0" rIns="0" bIns="0" anchor="t">
+            <a:normAutofit fontScale="100000"/>
+          </a:bodyPr>
+          <a:lstStyle xmlns:a="http://schemas.openxmlformats.org/drawingml/2006/main">
+            <a:defPPr algn="l">
+              <a:defRPr sz="1200" b="0">
+                <a:solidFill>
+                  <a:srgbClr val="60756A"/>
+                </a:solidFill>
+                <a:latin typeface="Calibri"/>
+                <a:ea typeface="Calibri"/>
+                <a:cs typeface="Calibri"/>
+              </a:defRPr>
+            </a:defPPr>
+          </a:lstStyle>
+          <a:p xmlns:a="http://schemas.openxmlformats.org/drawingml/2006/main">
+            <a:pPr algn="l">
+              <a:defRPr sz="1200" b="0">
+                <a:solidFill>
+                  <a:srgbClr val="60756A"/>
+                </a:solidFill>
+                <a:latin typeface="Calibri"/>
+                <a:ea typeface="Calibri"/>
+                <a:cs typeface="Calibri"/>
+              </a:defRPr>
+            </a:pPr>
+            <a:r>
+              <a:rPr sz="1200" b="0">
+                <a:solidFill>
+                  <a:srgbClr val="60756A"/>
+                </a:solidFill>
+                <a:latin typeface="Calibri"/>
+                <a:ea typeface="Calibri"/>
+                <a:cs typeface="Calibri"/>
+              </a:rPr>
+              <a:t>DXF / IFC export is a roadmap item, not part of the prototype.</a:t>
+            </a:r>
+          </a:p>
+        </p:txBody>
+      </p:sp>
+      <p:sp>
+        <p:nvSpPr>
+          <p:cNvPr id="14" name="">
+            <a:extLst xmlns:a="http://schemas.openxmlformats.org/drawingml/2006/main">
+              <a:ext uri="{FF2B5EF4-FFF2-40B4-BE49-F238E27FC236}">
+                <a16:creationId xmlns:a16="http://schemas.microsoft.com/office/drawing/2014/main" id="{F2E2250B-B0B9-4644-A87E-D0ACA9D26405}"/>
+              </a:ext>
+            </a:extLst>
+          </p:cNvPr>
+          <p:cNvSpPr>
+            <a:spLocks xmlns:a="http://schemas.openxmlformats.org/drawingml/2006/main" noGrp="1"/>
+          </p:cNvSpPr>
+          <p:nvPr/>
+        </p:nvSpPr>
+        <p:spPr>
+          <a:xfrm xmlns:a="http://schemas.openxmlformats.org/drawingml/2006/main">
+            <a:off x="628650" y="4305300"/>
+            <a:ext cx="10934700" cy="866775"/>
+          </a:xfrm>
+          <a:prstGeom xmlns:a="http://schemas.openxmlformats.org/drawingml/2006/main" prst="rect">
+            <a:avLst/>
+          </a:prstGeom>
+          <a:solidFill xmlns:a="http://schemas.openxmlformats.org/drawingml/2006/main">
+            <a:srgbClr val="E9F0E9"/>
+          </a:solidFill>
+          <a:ln xmlns:a="http://schemas.openxmlformats.org/drawingml/2006/main" w="0">
+            <a:noFill/>
+            <a:prstDash val="solid"/>
+          </a:ln>
+        </p:spPr>
+      </p:sp>
+      <p:sp>
+        <p:nvSpPr>
+          <p:cNvPr id="15" name="">
+            <a:extLst xmlns:a="http://schemas.openxmlformats.org/drawingml/2006/main">
+              <a:ext uri="{FF2B5EF4-FFF2-40B4-BE49-F238E27FC236}">
+                <a16:creationId xmlns:a16="http://schemas.microsoft.com/office/drawing/2014/main" id="{4A660729-54DE-4E65-AEDF-D3D18080BB86}"/>
+              </a:ext>
+            </a:extLst>
+          </p:cNvPr>
+          <p:cNvSpPr>
+            <a:spLocks xmlns:a="http://schemas.openxmlformats.org/drawingml/2006/main" noGrp="1"/>
+          </p:cNvSpPr>
+          <p:nvPr/>
+        </p:nvSpPr>
+        <p:spPr>
+          <a:xfrm xmlns:a="http://schemas.openxmlformats.org/drawingml/2006/main">
+            <a:off x="857250" y="4495800"/>
+            <a:ext cx="1714500" cy="180975"/>
+          </a:xfrm>
+          <a:prstGeom xmlns:a="http://schemas.openxmlformats.org/drawingml/2006/main" prst="rect">
+            <a:avLst/>
+          </a:prstGeom>
+          <a:noFill xmlns:a="http://schemas.openxmlformats.org/drawingml/2006/main"/>
+          <a:ln xmlns:a="http://schemas.openxmlformats.org/drawingml/2006/main" w="0">
+            <a:noFill/>
+            <a:prstDash val="solid"/>
+          </a:ln>
+        </p:spPr>
+        <p:txBody>
+          <a:bodyPr xmlns:a="http://schemas.openxmlformats.org/drawingml/2006/main" wrap="square" lIns="0" tIns="0" rIns="0" bIns="0" anchor="t">
+            <a:normAutofit fontScale="100000"/>
+          </a:bodyPr>
+          <a:lstStyle xmlns:a="http://schemas.openxmlformats.org/drawingml/2006/main">
+            <a:defPPr algn="l">
+              <a:defRPr sz="975" b="1">
+                <a:solidFill>
+                  <a:srgbClr val="2C6B50"/>
+                </a:solidFill>
+                <a:latin typeface="Calibri"/>
+                <a:ea typeface="Calibri"/>
+                <a:cs typeface="Calibri"/>
+              </a:defRPr>
+            </a:defPPr>
+          </a:lstStyle>
+          <a:p xmlns:a="http://schemas.openxmlformats.org/drawingml/2006/main">
+            <a:pPr algn="l">
+              <a:defRPr sz="975" b="1">
+                <a:solidFill>
+                  <a:srgbClr val="2C6B50"/>
+                </a:solidFill>
+                <a:latin typeface="Calibri"/>
+                <a:ea typeface="Calibri"/>
+                <a:cs typeface="Calibri"/>
+              </a:defRPr>
+            </a:pPr>
+            <a:r>
+              <a:rPr sz="975" b="1">
+                <a:solidFill>
+                  <a:srgbClr val="2C6B50"/>
+                </a:solidFill>
+                <a:latin typeface="Calibri"/>
+                <a:ea typeface="Calibri"/>
+                <a:cs typeface="Calibri"/>
+              </a:rPr>
+              <a:t>LATER</a:t>
+            </a:r>
+          </a:p>
+        </p:txBody>
+      </p:sp>
+      <p:sp>
+        <p:nvSpPr>
+          <p:cNvPr id="16" name="">
+            <a:extLst xmlns:a="http://schemas.openxmlformats.org/drawingml/2006/main">
+              <a:ext uri="{FF2B5EF4-FFF2-40B4-BE49-F238E27FC236}">
+                <a16:creationId xmlns:a16="http://schemas.microsoft.com/office/drawing/2014/main" id="{71879E6A-15F0-4FF5-AD1E-1D18A3D54517}"/>
+              </a:ext>
+            </a:extLst>
+          </p:cNvPr>
+          <p:cNvSpPr>
+            <a:spLocks xmlns:a="http://schemas.openxmlformats.org/drawingml/2006/main" noGrp="1"/>
+          </p:cNvSpPr>
+          <p:nvPr/>
+        </p:nvSpPr>
+        <p:spPr>
+          <a:xfrm xmlns:a="http://schemas.openxmlformats.org/drawingml/2006/main">
+            <a:off x="2876550" y="4448175"/>
+            <a:ext cx="3143250" cy="266700"/>
+          </a:xfrm>
+          <a:prstGeom xmlns:a="http://schemas.openxmlformats.org/drawingml/2006/main" prst="rect">
+            <a:avLst/>
+          </a:prstGeom>
+          <a:noFill xmlns:a="http://schemas.openxmlformats.org/drawingml/2006/main"/>
+          <a:ln xmlns:a="http://schemas.openxmlformats.org/drawingml/2006/main" w="0">
+            <a:noFill/>
+            <a:prstDash val="solid"/>
+          </a:ln>
+        </p:spPr>
+        <p:txBody>
+          <a:bodyPr xmlns:a="http://schemas.openxmlformats.org/drawingml/2006/main" wrap="square" lIns="0" tIns="0" rIns="0" bIns="0" anchor="t">
+            <a:normAutofit fontScale="100000"/>
+          </a:bodyPr>
+          <a:lstStyle xmlns:a="http://schemas.openxmlformats.org/drawingml/2006/main">
+            <a:defPPr algn="l">
+              <a:defRPr sz="1575" b="1">
+                <a:solidFill>
+                  <a:srgbClr val="153B2E"/>
+                </a:solidFill>
+                <a:latin typeface="Calibri"/>
+                <a:ea typeface="Calibri"/>
+                <a:cs typeface="Calibri"/>
+              </a:defRPr>
+            </a:defPPr>
+          </a:lstStyle>
+          <a:p xmlns:a="http://schemas.openxmlformats.org/drawingml/2006/main">
+            <a:pPr algn="l">
+              <a:defRPr sz="1575" b="1">
+                <a:solidFill>
+                  <a:srgbClr val="153B2E"/>
+                </a:solidFill>
+                <a:latin typeface="Calibri"/>
+                <a:ea typeface="Calibri"/>
+                <a:cs typeface="Calibri"/>
+              </a:defRPr>
+            </a:pPr>
+            <a:r>
+              <a:rPr sz="1575" b="1">
+                <a:solidFill>
+                  <a:srgbClr val="153B2E"/>
+                </a:solidFill>
+                <a:latin typeface="Calibri"/>
+                <a:ea typeface="Calibri"/>
+                <a:cs typeface="Calibri"/>
+              </a:rPr>
+              <a:t>More immersive review</a:t>
+            </a:r>
+          </a:p>
+        </p:txBody>
+      </p:sp>
+      <p:sp>
+        <p:nvSpPr>
+          <p:cNvPr id="17" name="">
+            <a:extLst xmlns:a="http://schemas.openxmlformats.org/drawingml/2006/main">
+              <a:ext uri="{FF2B5EF4-FFF2-40B4-BE49-F238E27FC236}">
+                <a16:creationId xmlns:a16="http://schemas.microsoft.com/office/drawing/2014/main" id="{82E6D769-CC66-4271-A824-90864F05CCF3}"/>
+              </a:ext>
+            </a:extLst>
+          </p:cNvPr>
+          <p:cNvSpPr>
+            <a:spLocks xmlns:a="http://schemas.openxmlformats.org/drawingml/2006/main" noGrp="1"/>
+          </p:cNvSpPr>
+          <p:nvPr/>
+        </p:nvSpPr>
+        <p:spPr>
+          <a:xfrm xmlns:a="http://schemas.openxmlformats.org/drawingml/2006/main">
+            <a:off x="2876550" y="4781550"/>
+            <a:ext cx="8334375" cy="257175"/>
+          </a:xfrm>
+          <a:prstGeom xmlns:a="http://schemas.openxmlformats.org/drawingml/2006/main" prst="rect">
+            <a:avLst/>
+          </a:prstGeom>
+          <a:noFill xmlns:a="http://schemas.openxmlformats.org/drawingml/2006/main"/>
+          <a:ln xmlns:a="http://schemas.openxmlformats.org/drawingml/2006/main" w="0">
+            <a:noFill/>
+            <a:prstDash val="solid"/>
+          </a:ln>
+        </p:spPr>
+        <p:txBody>
+          <a:bodyPr xmlns:a="http://schemas.openxmlformats.org/drawingml/2006/main" wrap="square" lIns="0" tIns="0" rIns="0" bIns="0" anchor="t">
+            <a:normAutofit fontScale="100000"/>
+          </a:bodyPr>
+          <a:lstStyle xmlns:a="http://schemas.openxmlformats.org/drawingml/2006/main">
+            <a:defPPr algn="l">
+              <a:defRPr sz="1200" b="0">
+                <a:solidFill>
+                  <a:srgbClr val="60756A"/>
+                </a:solidFill>
+                <a:latin typeface="Calibri"/>
+                <a:ea typeface="Calibri"/>
+                <a:cs typeface="Calibri"/>
+              </a:defRPr>
+            </a:defPPr>
+          </a:lstStyle>
+          <a:p xmlns:a="http://schemas.openxmlformats.org/drawingml/2006/main">
+            <a:pPr algn="l">
+              <a:defRPr sz="1200" b="0">
+                <a:solidFill>
+                  <a:srgbClr val="60756A"/>
+                </a:solidFill>
+                <a:latin typeface="Calibri"/>
+                <a:ea typeface="Calibri"/>
+                <a:cs typeface="Calibri"/>
+              </a:defRPr>
+            </a:pPr>
+            <a:r>
+              <a:rPr sz="1200" b="0">
+                <a:solidFill>
+                  <a:srgbClr val="60756A"/>
+                </a:solidFill>
+                <a:latin typeface="Calibri"/>
+                <a:ea typeface="Calibri"/>
+                <a:cs typeface="Calibri"/>
+              </a:rPr>
+              <a:t>WebXR headset walkthroughs are a future direction.</a:t>
+            </a:r>
+          </a:p>
+        </p:txBody>
+      </p:sp>
+      <p:sp>
+        <p:nvSpPr>
+          <p:cNvPr id="18" name="">
+            <a:extLst xmlns:a="http://schemas.openxmlformats.org/drawingml/2006/main">
+              <a:ext uri="{FF2B5EF4-FFF2-40B4-BE49-F238E27FC236}">
+                <a16:creationId xmlns:a16="http://schemas.microsoft.com/office/drawing/2014/main" id="{994651F2-023A-4614-A365-D2EB304D4B04}"/>
+              </a:ext>
+            </a:extLst>
+          </p:cNvPr>
+          <p:cNvSpPr>
+            <a:spLocks xmlns:a="http://schemas.openxmlformats.org/drawingml/2006/main" noGrp="1"/>
+          </p:cNvSpPr>
+          <p:nvPr/>
+        </p:nvSpPr>
+        <p:spPr>
+          <a:xfrm xmlns:a="http://schemas.openxmlformats.org/drawingml/2006/main">
+            <a:off x="628650" y="5467350"/>
+            <a:ext cx="10934700" cy="9525"/>
+          </a:xfrm>
+          <a:prstGeom xmlns:a="http://schemas.openxmlformats.org/drawingml/2006/main" prst="rect">
+            <a:avLst/>
+          </a:prstGeom>
+          <a:solidFill xmlns:a="http://schemas.openxmlformats.org/drawingml/2006/main">
+            <a:srgbClr val="C8D6CC"/>
+          </a:solidFill>
+          <a:ln xmlns:a="http://schemas.openxmlformats.org/drawingml/2006/main" w="0">
+            <a:noFill/>
+            <a:prstDash val="solid"/>
+          </a:ln>
+        </p:spPr>
+      </p:sp>
+      <p:sp>
+        <p:nvSpPr>
+          <p:cNvPr id="19" name="">
+            <a:extLst xmlns:a="http://schemas.openxmlformats.org/drawingml/2006/main">
+              <a:ext uri="{FF2B5EF4-FFF2-40B4-BE49-F238E27FC236}">
+                <a16:creationId xmlns:a16="http://schemas.microsoft.com/office/drawing/2014/main" id="{F9454D44-6F06-45B0-9E8E-B34E7EF59927}"/>
+              </a:ext>
+            </a:extLst>
+          </p:cNvPr>
+          <p:cNvSpPr>
+            <a:spLocks xmlns:a="http://schemas.openxmlformats.org/drawingml/2006/main" noGrp="1"/>
+          </p:cNvSpPr>
+          <p:nvPr/>
+        </p:nvSpPr>
+        <p:spPr>
+          <a:xfrm xmlns:a="http://schemas.openxmlformats.org/drawingml/2006/main">
+            <a:off x="628650" y="5686425"/>
+            <a:ext cx="1905000" cy="190500"/>
+          </a:xfrm>
+          <a:prstGeom xmlns:a="http://schemas.openxmlformats.org/drawingml/2006/main" prst="rect">
+            <a:avLst/>
+          </a:prstGeom>
+          <a:noFill xmlns:a="http://schemas.openxmlformats.org/drawingml/2006/main"/>
+          <a:ln xmlns:a="http://schemas.openxmlformats.org/drawingml/2006/main" w="0">
+            <a:noFill/>
+            <a:prstDash val="solid"/>
+          </a:ln>
+        </p:spPr>
+        <p:txBody>
+          <a:bodyPr xmlns:a="http://schemas.openxmlformats.org/drawingml/2006/main" wrap="square" lIns="0" tIns="0" rIns="0" bIns="0" anchor="t">
+            <a:normAutofit fontScale="100000"/>
+          </a:bodyPr>
+          <a:lstStyle xmlns:a="http://schemas.openxmlformats.org/drawingml/2006/main">
+            <a:defPPr algn="l">
+              <a:defRPr sz="975" b="1">
+                <a:solidFill>
+                  <a:srgbClr val="E9795B"/>
+                </a:solidFill>
+                <a:latin typeface="Calibri"/>
+                <a:ea typeface="Calibri"/>
+                <a:cs typeface="Calibri"/>
+              </a:defRPr>
+            </a:defPPr>
+          </a:lstStyle>
+          <a:p xmlns:a="http://schemas.openxmlformats.org/drawingml/2006/main">
+            <a:pPr algn="l">
+              <a:defRPr sz="975" b="1">
+                <a:solidFill>
+                  <a:srgbClr val="E9795B"/>
+                </a:solidFill>
+                <a:latin typeface="Calibri"/>
+                <a:ea typeface="Calibri"/>
+                <a:cs typeface="Calibri"/>
+              </a:defRPr>
+            </a:pPr>
+            <a:r>
+              <a:rPr sz="975" b="1">
+                <a:solidFill>
+                  <a:srgbClr val="E9795B"/>
+                </a:solidFill>
+                <a:latin typeface="Calibri"/>
+                <a:ea typeface="Calibri"/>
+                <a:cs typeface="Calibri"/>
+              </a:rPr>
+              <a:t>What must scale too</a:t>
+            </a:r>
+          </a:p>
+        </p:txBody>
+      </p:sp>
+      <p:sp>
+        <p:nvSpPr>
+          <p:cNvPr id="20" name="">
+            <a:extLst xmlns:a="http://schemas.openxmlformats.org/drawingml/2006/main">
+              <a:ext uri="{FF2B5EF4-FFF2-40B4-BE49-F238E27FC236}">
+                <a16:creationId xmlns:a16="http://schemas.microsoft.com/office/drawing/2014/main" id="{63819C44-0659-4F13-9B51-2EAA77AC9CD0}"/>
+              </a:ext>
+            </a:extLst>
+          </p:cNvPr>
+          <p:cNvSpPr>
+            <a:spLocks xmlns:a="http://schemas.openxmlformats.org/drawingml/2006/main" noGrp="1"/>
+          </p:cNvSpPr>
+          <p:nvPr/>
+        </p:nvSpPr>
+        <p:spPr>
+          <a:xfrm xmlns:a="http://schemas.openxmlformats.org/drawingml/2006/main">
+            <a:off x="2533650" y="5629275"/>
+            <a:ext cx="8810625" cy="409575"/>
+          </a:xfrm>
+          <a:prstGeom xmlns:a="http://schemas.openxmlformats.org/drawingml/2006/main" prst="rect">
+            <a:avLst/>
+          </a:prstGeom>
+          <a:noFill xmlns:a="http://schemas.openxmlformats.org/drawingml/2006/main"/>
+          <a:ln xmlns:a="http://schemas.openxmlformats.org/drawingml/2006/main" w="0">
+            <a:noFill/>
+            <a:prstDash val="solid"/>
+          </a:ln>
+        </p:spPr>
+        <p:txBody>
+          <a:bodyPr xmlns:a="http://schemas.openxmlformats.org/drawingml/2006/main" wrap="square" lIns="0" tIns="0" rIns="0" bIns="0" anchor="t">
+            <a:normAutofit fontScale="100000"/>
+          </a:bodyPr>
+          <a:lstStyle xmlns:a="http://schemas.openxmlformats.org/drawingml/2006/main">
+            <a:defPPr algn="l">
+              <a:defRPr sz="1275" b="1">
+                <a:solidFill>
+                  <a:srgbClr val="19332A"/>
+                </a:solidFill>
+                <a:latin typeface="Calibri"/>
+                <a:ea typeface="Calibri"/>
+                <a:cs typeface="Calibri"/>
+              </a:defRPr>
+            </a:defPPr>
+          </a:lstStyle>
+          <a:p xmlns:a="http://schemas.openxmlformats.org/drawingml/2006/main">
+            <a:pPr algn="l">
+              <a:defRPr sz="1275" b="1">
+                <a:solidFill>
+                  <a:srgbClr val="19332A"/>
+                </a:solidFill>
+                <a:latin typeface="Calibri"/>
+                <a:ea typeface="Calibri"/>
+                <a:cs typeface="Calibri"/>
+              </a:defRPr>
+            </a:pPr>
+            <a:r>
+              <a:rPr sz="1275" b="1">
+                <a:solidFill>
+                  <a:srgbClr val="19332A"/>
+                </a:solidFill>
+                <a:latin typeface="Calibri"/>
+                <a:ea typeface="Calibri"/>
+                <a:cs typeface="Calibri"/>
+              </a:rPr>
+              <a:t>Test varied drawings, improve extraction confidence and validate performance on more devices.</a:t>
+            </a:r>
+          </a:p>
+        </p:txBody>
+      </p:sp>
+    </p:spTree>
+    <p:extLst>
+      <p:ext uri="{BB962C8B-B14F-4D97-AF65-F5344CB8AC3E}">
+        <p14:creationId xmlns:p14="http://schemas.microsoft.com/office/powerpoint/2010/main" val="306564513"/>
+      </p:ext>
+    </p:extLst>
+  </p:cSld>
+</p:sld>
+</file>
+
+<file path=ppt/slides/slide6.xml><?xml version="1.0" encoding="utf-8"?>
 <p:sld xmlns:p="http://schemas.openxmlformats.org/presentationml/2006/main">
   <p:cSld>
     <p:bg>
@@ -7376,10 +8607,10 @@
       </p:grpSpPr>
       <p:sp>
         <p:nvSpPr>
-          <p:cNvPr id="19" name="">
-            <a:extLst xmlns:a="http://schemas.openxmlformats.org/drawingml/2006/main">
-              <a:ext uri="{FF2B5EF4-FFF2-40B4-BE49-F238E27FC236}">
-                <a16:creationId xmlns:a16="http://schemas.microsoft.com/office/drawing/2014/main" id="{3F371BED-CB3E-4632-8709-976846AD482E}"/>
+          <p:cNvPr id="27" name="">
+            <a:extLst xmlns:a="http://schemas.openxmlformats.org/drawingml/2006/main">
+              <a:ext uri="{FF2B5EF4-FFF2-40B4-BE49-F238E27FC236}">
+                <a16:creationId xmlns:a16="http://schemas.microsoft.com/office/drawing/2014/main" id="{D9BCFDBC-E19C-4E3F-9364-3122DFFD4321}"/>
               </a:ext>
             </a:extLst>
           </p:cNvPr>
@@ -7410,7 +8641,7 @@
           <p:cNvPr id="2" name="">
             <a:extLst xmlns:a="http://schemas.openxmlformats.org/drawingml/2006/main">
               <a:ext uri="{FF2B5EF4-FFF2-40B4-BE49-F238E27FC236}">
-                <a16:creationId xmlns:a16="http://schemas.microsoft.com/office/drawing/2014/main" id="{C1B0666B-CE05-4000-A5DF-23FD891A9561}"/>
+                <a16:creationId xmlns:a16="http://schemas.microsoft.com/office/drawing/2014/main" id="{EFB0C71E-142A-4E5F-9CCE-43F56888D90B}"/>
               </a:ext>
             </a:extLst>
           </p:cNvPr>
@@ -7479,7 +8710,7 @@
           <p:cNvPr id="3" name="">
             <a:extLst xmlns:a="http://schemas.openxmlformats.org/drawingml/2006/main">
               <a:ext uri="{FF2B5EF4-FFF2-40B4-BE49-F238E27FC236}">
-                <a16:creationId xmlns:a16="http://schemas.microsoft.com/office/drawing/2014/main" id="{4C48DD25-F9C3-4579-BA20-179FC35F656A}"/>
+                <a16:creationId xmlns:a16="http://schemas.microsoft.com/office/drawing/2014/main" id="{1039575A-F877-475B-957F-A14BBCC9E8E6}"/>
               </a:ext>
             </a:extLst>
           </p:cNvPr>
@@ -7571,19 +8802,19 @@
           <p:cNvPr id="4" name="">
             <a:extLst xmlns:a="http://schemas.openxmlformats.org/drawingml/2006/main">
               <a:ext uri="{FF2B5EF4-FFF2-40B4-BE49-F238E27FC236}">
-                <a16:creationId xmlns:a16="http://schemas.microsoft.com/office/drawing/2014/main" id="{BD3A9109-3883-4215-A73C-AD879C8A0025}"/>
-              </a:ext>
-            </a:extLst>
-          </p:cNvPr>
-          <p:cNvSpPr>
-            <a:spLocks xmlns:a="http://schemas.openxmlformats.org/drawingml/2006/main" noGrp="1"/>
-          </p:cNvSpPr>
-          <p:nvPr/>
-        </p:nvSpPr>
-        <p:spPr>
-          <a:xfrm xmlns:a="http://schemas.openxmlformats.org/drawingml/2006/main">
-            <a:off x="628650" y="2190750"/>
-            <a:ext cx="5667375" cy="514350"/>
+                <a16:creationId xmlns:a16="http://schemas.microsoft.com/office/drawing/2014/main" id="{F09B00BE-E755-4106-B927-281B0C0374AD}"/>
+              </a:ext>
+            </a:extLst>
+          </p:cNvPr>
+          <p:cNvSpPr>
+            <a:spLocks xmlns:a="http://schemas.openxmlformats.org/drawingml/2006/main" noGrp="1"/>
+          </p:cNvSpPr>
+          <p:nvPr/>
+        </p:nvSpPr>
+        <p:spPr>
+          <a:xfrm xmlns:a="http://schemas.openxmlformats.org/drawingml/2006/main">
+            <a:off x="628650" y="2171700"/>
+            <a:ext cx="5810250" cy="533400"/>
           </a:xfrm>
           <a:prstGeom xmlns:a="http://schemas.openxmlformats.org/drawingml/2006/main" prst="rect">
             <a:avLst/>
@@ -7630,7 +8861,7 @@
                 <a:ea typeface="Calibri"/>
                 <a:cs typeface="Calibri"/>
               </a:rPr>
-              <a:t>A 3D walkthrough can help people discuss layout before construction.</a:t>
+              <a:t>A walkthrough can support clearer design conversations before construction.</a:t>
             </a:r>
           </a:p>
         </p:txBody>
@@ -7640,19 +8871,19 @@
           <p:cNvPr id="5" name="">
             <a:extLst xmlns:a="http://schemas.openxmlformats.org/drawingml/2006/main">
               <a:ext uri="{FF2B5EF4-FFF2-40B4-BE49-F238E27FC236}">
-                <a16:creationId xmlns:a16="http://schemas.microsoft.com/office/drawing/2014/main" id="{8E6B9592-58FF-41F6-8512-E9411CE4C888}"/>
-              </a:ext>
-            </a:extLst>
-          </p:cNvPr>
-          <p:cNvSpPr>
-            <a:spLocks xmlns:a="http://schemas.openxmlformats.org/drawingml/2006/main" noGrp="1"/>
-          </p:cNvSpPr>
-          <p:nvPr/>
-        </p:nvSpPr>
-        <p:spPr>
-          <a:xfrm xmlns:a="http://schemas.openxmlformats.org/drawingml/2006/main">
-            <a:off x="638175" y="3124200"/>
-            <a:ext cx="523875" cy="285750"/>
+                <a16:creationId xmlns:a16="http://schemas.microsoft.com/office/drawing/2014/main" id="{5C53F6A5-7D3E-4A38-81CD-AAA1977464B6}"/>
+              </a:ext>
+            </a:extLst>
+          </p:cNvPr>
+          <p:cNvSpPr>
+            <a:spLocks xmlns:a="http://schemas.openxmlformats.org/drawingml/2006/main" noGrp="1"/>
+          </p:cNvSpPr>
+          <p:nvPr/>
+        </p:nvSpPr>
+        <p:spPr>
+          <a:xfrm xmlns:a="http://schemas.openxmlformats.org/drawingml/2006/main">
+            <a:off x="638175" y="3086100"/>
+            <a:ext cx="523875" cy="276225"/>
           </a:xfrm>
           <a:prstGeom xmlns:a="http://schemas.openxmlformats.org/drawingml/2006/main" prst="rect">
             <a:avLst/>
@@ -7669,7 +8900,7 @@
           </a:bodyPr>
           <a:lstStyle xmlns:a="http://schemas.openxmlformats.org/drawingml/2006/main">
             <a:defPPr algn="l">
-              <a:defRPr sz="1425" b="1">
+              <a:defRPr sz="1350" b="1">
                 <a:solidFill>
                   <a:srgbClr val="E9795B"/>
                 </a:solidFill>
@@ -7681,7 +8912,7 @@
           </a:lstStyle>
           <a:p xmlns:a="http://schemas.openxmlformats.org/drawingml/2006/main">
             <a:pPr algn="l">
-              <a:defRPr sz="1425" b="1">
+              <a:defRPr sz="1350" b="1">
                 <a:solidFill>
                   <a:srgbClr val="E9795B"/>
                 </a:solidFill>
@@ -7691,7 +8922,7 @@
               </a:defRPr>
             </a:pPr>
             <a:r>
-              <a:rPr sz="1425" b="1">
+              <a:rPr sz="1350" b="1">
                 <a:solidFill>
                   <a:srgbClr val="E9795B"/>
                 </a:solidFill>
@@ -7709,19 +8940,19 @@
           <p:cNvPr id="6" name="">
             <a:extLst xmlns:a="http://schemas.openxmlformats.org/drawingml/2006/main">
               <a:ext uri="{FF2B5EF4-FFF2-40B4-BE49-F238E27FC236}">
-                <a16:creationId xmlns:a16="http://schemas.microsoft.com/office/drawing/2014/main" id="{8394471C-AFDE-40D1-AB27-E710656E1FA8}"/>
-              </a:ext>
-            </a:extLst>
-          </p:cNvPr>
-          <p:cNvSpPr>
-            <a:spLocks xmlns:a="http://schemas.openxmlformats.org/drawingml/2006/main" noGrp="1"/>
-          </p:cNvSpPr>
-          <p:nvPr/>
-        </p:nvSpPr>
-        <p:spPr>
-          <a:xfrm xmlns:a="http://schemas.openxmlformats.org/drawingml/2006/main">
-            <a:off x="1238250" y="3124200"/>
-            <a:ext cx="2714625" cy="209550"/>
+                <a16:creationId xmlns:a16="http://schemas.microsoft.com/office/drawing/2014/main" id="{396EDBD7-E04A-4BFD-A981-44487D537849}"/>
+              </a:ext>
+            </a:extLst>
+          </p:cNvPr>
+          <p:cNvSpPr>
+            <a:spLocks xmlns:a="http://schemas.openxmlformats.org/drawingml/2006/main" noGrp="1"/>
+          </p:cNvSpPr>
+          <p:nvPr/>
+        </p:nvSpPr>
+        <p:spPr>
+          <a:xfrm xmlns:a="http://schemas.openxmlformats.org/drawingml/2006/main">
+            <a:off x="1238250" y="3086100"/>
+            <a:ext cx="3190875" cy="180975"/>
           </a:xfrm>
           <a:prstGeom xmlns:a="http://schemas.openxmlformats.org/drawingml/2006/main" prst="rect">
             <a:avLst/>
@@ -7768,7 +8999,7 @@
                 <a:ea typeface="Calibri"/>
                 <a:cs typeface="Calibri"/>
               </a:rPr>
-              <a:t>REVIEW EARLY</a:t>
+              <a:t>DESIGN REVIEW</a:t>
             </a:r>
           </a:p>
         </p:txBody>
@@ -7778,19 +9009,19 @@
           <p:cNvPr id="7" name="">
             <a:extLst xmlns:a="http://schemas.openxmlformats.org/drawingml/2006/main">
               <a:ext uri="{FF2B5EF4-FFF2-40B4-BE49-F238E27FC236}">
-                <a16:creationId xmlns:a16="http://schemas.microsoft.com/office/drawing/2014/main" id="{7AE37743-9FF8-4054-B814-33E704FA1B61}"/>
-              </a:ext>
-            </a:extLst>
-          </p:cNvPr>
-          <p:cNvSpPr>
-            <a:spLocks xmlns:a="http://schemas.openxmlformats.org/drawingml/2006/main" noGrp="1"/>
-          </p:cNvSpPr>
-          <p:nvPr/>
-        </p:nvSpPr>
-        <p:spPr>
-          <a:xfrm xmlns:a="http://schemas.openxmlformats.org/drawingml/2006/main">
-            <a:off x="1238250" y="3381375"/>
-            <a:ext cx="4905375" cy="457200"/>
+                <a16:creationId xmlns:a16="http://schemas.microsoft.com/office/drawing/2014/main" id="{CFB71819-512F-43AC-A773-D8B589D70103}"/>
+              </a:ext>
+            </a:extLst>
+          </p:cNvPr>
+          <p:cNvSpPr>
+            <a:spLocks xmlns:a="http://schemas.openxmlformats.org/drawingml/2006/main" noGrp="1"/>
+          </p:cNvSpPr>
+          <p:nvPr/>
+        </p:nvSpPr>
+        <p:spPr>
+          <a:xfrm xmlns:a="http://schemas.openxmlformats.org/drawingml/2006/main">
+            <a:off x="1238250" y="3333750"/>
+            <a:ext cx="4905375" cy="476250"/>
           </a:xfrm>
           <a:prstGeom xmlns:a="http://schemas.openxmlformats.org/drawingml/2006/main" prst="rect">
             <a:avLst/>
@@ -7837,7 +9068,7 @@
                 <a:ea typeface="Calibri"/>
                 <a:cs typeface="Calibri"/>
               </a:rPr>
-              <a:t>See circulation and room relationships before a home is built.</a:t>
+              <a:t>Spot circulation or room-layout questions while options are still open.</a:t>
             </a:r>
           </a:p>
         </p:txBody>
@@ -7847,19 +9078,19 @@
           <p:cNvPr id="8" name="">
             <a:extLst xmlns:a="http://schemas.openxmlformats.org/drawingml/2006/main">
               <a:ext uri="{FF2B5EF4-FFF2-40B4-BE49-F238E27FC236}">
-                <a16:creationId xmlns:a16="http://schemas.microsoft.com/office/drawing/2014/main" id="{59A2CC7E-C85C-4552-9149-B3FAB419C0A6}"/>
-              </a:ext>
-            </a:extLst>
-          </p:cNvPr>
-          <p:cNvSpPr>
-            <a:spLocks xmlns:a="http://schemas.openxmlformats.org/drawingml/2006/main" noGrp="1"/>
-          </p:cNvSpPr>
-          <p:nvPr/>
-        </p:nvSpPr>
-        <p:spPr>
-          <a:xfrm xmlns:a="http://schemas.openxmlformats.org/drawingml/2006/main">
-            <a:off x="638175" y="4038600"/>
-            <a:ext cx="523875" cy="285750"/>
+                <a16:creationId xmlns:a16="http://schemas.microsoft.com/office/drawing/2014/main" id="{D8EC5093-CB2E-4036-A4C4-532C93C4404B}"/>
+              </a:ext>
+            </a:extLst>
+          </p:cNvPr>
+          <p:cNvSpPr>
+            <a:spLocks xmlns:a="http://schemas.openxmlformats.org/drawingml/2006/main" noGrp="1"/>
+          </p:cNvSpPr>
+          <p:nvPr/>
+        </p:nvSpPr>
+        <p:spPr>
+          <a:xfrm xmlns:a="http://schemas.openxmlformats.org/drawingml/2006/main">
+            <a:off x="638175" y="3943350"/>
+            <a:ext cx="523875" cy="276225"/>
           </a:xfrm>
           <a:prstGeom xmlns:a="http://schemas.openxmlformats.org/drawingml/2006/main" prst="rect">
             <a:avLst/>
@@ -7876,7 +9107,7 @@
           </a:bodyPr>
           <a:lstStyle xmlns:a="http://schemas.openxmlformats.org/drawingml/2006/main">
             <a:defPPr algn="l">
-              <a:defRPr sz="1425" b="1">
+              <a:defRPr sz="1350" b="1">
                 <a:solidFill>
                   <a:srgbClr val="E9795B"/>
                 </a:solidFill>
@@ -7888,7 +9119,7 @@
           </a:lstStyle>
           <a:p xmlns:a="http://schemas.openxmlformats.org/drawingml/2006/main">
             <a:pPr algn="l">
-              <a:defRPr sz="1425" b="1">
+              <a:defRPr sz="1350" b="1">
                 <a:solidFill>
                   <a:srgbClr val="E9795B"/>
                 </a:solidFill>
@@ -7898,7 +9129,7 @@
               </a:defRPr>
             </a:pPr>
             <a:r>
-              <a:rPr sz="1425" b="1">
+              <a:rPr sz="1350" b="1">
                 <a:solidFill>
                   <a:srgbClr val="E9795B"/>
                 </a:solidFill>
@@ -7916,19 +9147,19 @@
           <p:cNvPr id="9" name="">
             <a:extLst xmlns:a="http://schemas.openxmlformats.org/drawingml/2006/main">
               <a:ext uri="{FF2B5EF4-FFF2-40B4-BE49-F238E27FC236}">
-                <a16:creationId xmlns:a16="http://schemas.microsoft.com/office/drawing/2014/main" id="{B9C861A8-D3DE-48EB-B43D-3EB7E88F223C}"/>
-              </a:ext>
-            </a:extLst>
-          </p:cNvPr>
-          <p:cNvSpPr>
-            <a:spLocks xmlns:a="http://schemas.openxmlformats.org/drawingml/2006/main" noGrp="1"/>
-          </p:cNvSpPr>
-          <p:nvPr/>
-        </p:nvSpPr>
-        <p:spPr>
-          <a:xfrm xmlns:a="http://schemas.openxmlformats.org/drawingml/2006/main">
-            <a:off x="1238250" y="4038600"/>
-            <a:ext cx="2714625" cy="209550"/>
+                <a16:creationId xmlns:a16="http://schemas.microsoft.com/office/drawing/2014/main" id="{B8A03E66-419B-452B-A676-3CE45B5F223F}"/>
+              </a:ext>
+            </a:extLst>
+          </p:cNvPr>
+          <p:cNvSpPr>
+            <a:spLocks xmlns:a="http://schemas.openxmlformats.org/drawingml/2006/main" noGrp="1"/>
+          </p:cNvSpPr>
+          <p:nvPr/>
+        </p:nvSpPr>
+        <p:spPr>
+          <a:xfrm xmlns:a="http://schemas.openxmlformats.org/drawingml/2006/main">
+            <a:off x="1238250" y="3943350"/>
+            <a:ext cx="3190875" cy="180975"/>
           </a:xfrm>
           <a:prstGeom xmlns:a="http://schemas.openxmlformats.org/drawingml/2006/main" prst="rect">
             <a:avLst/>
@@ -7975,7 +9206,7 @@
                 <a:ea typeface="Calibri"/>
                 <a:cs typeface="Calibri"/>
               </a:rPr>
-              <a:t>WORK TOGETHER</a:t>
+              <a:t>SHARED UNDERSTANDING</a:t>
             </a:r>
           </a:p>
         </p:txBody>
@@ -7985,19 +9216,19 @@
           <p:cNvPr id="10" name="">
             <a:extLst xmlns:a="http://schemas.openxmlformats.org/drawingml/2006/main">
               <a:ext uri="{FF2B5EF4-FFF2-40B4-BE49-F238E27FC236}">
-                <a16:creationId xmlns:a16="http://schemas.microsoft.com/office/drawing/2014/main" id="{49E38945-6D29-4FC3-BE38-B12E5C5157E8}"/>
-              </a:ext>
-            </a:extLst>
-          </p:cNvPr>
-          <p:cNvSpPr>
-            <a:spLocks xmlns:a="http://schemas.openxmlformats.org/drawingml/2006/main" noGrp="1"/>
-          </p:cNvSpPr>
-          <p:nvPr/>
-        </p:nvSpPr>
-        <p:spPr>
-          <a:xfrm xmlns:a="http://schemas.openxmlformats.org/drawingml/2006/main">
-            <a:off x="1238250" y="4295775"/>
-            <a:ext cx="4905375" cy="457200"/>
+                <a16:creationId xmlns:a16="http://schemas.microsoft.com/office/drawing/2014/main" id="{B71C2032-1B52-4357-90CC-AB432EC92D48}"/>
+              </a:ext>
+            </a:extLst>
+          </p:cNvPr>
+          <p:cNvSpPr>
+            <a:spLocks xmlns:a="http://schemas.openxmlformats.org/drawingml/2006/main" noGrp="1"/>
+          </p:cNvSpPr>
+          <p:nvPr/>
+        </p:nvSpPr>
+        <p:spPr>
+          <a:xfrm xmlns:a="http://schemas.openxmlformats.org/drawingml/2006/main">
+            <a:off x="1238250" y="4191000"/>
+            <a:ext cx="4905375" cy="476250"/>
           </a:xfrm>
           <a:prstGeom xmlns:a="http://schemas.openxmlformats.org/drawingml/2006/main" prst="rect">
             <a:avLst/>
@@ -8044,7 +9275,7 @@
                 <a:ea typeface="Calibri"/>
                 <a:cs typeface="Calibri"/>
               </a:rPr>
-              <a:t>Give clients and project teams a shared view of the proposed space.</a:t>
+              <a:t>Give clients and project teams a common view to discuss.</a:t>
             </a:r>
           </a:p>
         </p:txBody>
@@ -8054,19 +9285,19 @@
           <p:cNvPr id="11" name="">
             <a:extLst xmlns:a="http://schemas.openxmlformats.org/drawingml/2006/main">
               <a:ext uri="{FF2B5EF4-FFF2-40B4-BE49-F238E27FC236}">
-                <a16:creationId xmlns:a16="http://schemas.microsoft.com/office/drawing/2014/main" id="{986C0249-4557-4571-9966-0B25C472D235}"/>
-              </a:ext>
-            </a:extLst>
-          </p:cNvPr>
-          <p:cNvSpPr>
-            <a:spLocks xmlns:a="http://schemas.openxmlformats.org/drawingml/2006/main" noGrp="1"/>
-          </p:cNvSpPr>
-          <p:nvPr/>
-        </p:nvSpPr>
-        <p:spPr>
-          <a:xfrm xmlns:a="http://schemas.openxmlformats.org/drawingml/2006/main">
-            <a:off x="638175" y="4953000"/>
-            <a:ext cx="523875" cy="285750"/>
+                <a16:creationId xmlns:a16="http://schemas.microsoft.com/office/drawing/2014/main" id="{0A79BE5E-A37A-4D3D-BC21-7E529AF02E6E}"/>
+              </a:ext>
+            </a:extLst>
+          </p:cNvPr>
+          <p:cNvSpPr>
+            <a:spLocks xmlns:a="http://schemas.openxmlformats.org/drawingml/2006/main" noGrp="1"/>
+          </p:cNvSpPr>
+          <p:nvPr/>
+        </p:nvSpPr>
+        <p:spPr>
+          <a:xfrm xmlns:a="http://schemas.openxmlformats.org/drawingml/2006/main">
+            <a:off x="638175" y="4800600"/>
+            <a:ext cx="523875" cy="276225"/>
           </a:xfrm>
           <a:prstGeom xmlns:a="http://schemas.openxmlformats.org/drawingml/2006/main" prst="rect">
             <a:avLst/>
@@ -8083,7 +9314,7 @@
           </a:bodyPr>
           <a:lstStyle xmlns:a="http://schemas.openxmlformats.org/drawingml/2006/main">
             <a:defPPr algn="l">
-              <a:defRPr sz="1425" b="1">
+              <a:defRPr sz="1350" b="1">
                 <a:solidFill>
                   <a:srgbClr val="E9795B"/>
                 </a:solidFill>
@@ -8095,7 +9326,7 @@
           </a:lstStyle>
           <a:p xmlns:a="http://schemas.openxmlformats.org/drawingml/2006/main">
             <a:pPr algn="l">
-              <a:defRPr sz="1425" b="1">
+              <a:defRPr sz="1350" b="1">
                 <a:solidFill>
                   <a:srgbClr val="E9795B"/>
                 </a:solidFill>
@@ -8105,7 +9336,7 @@
               </a:defRPr>
             </a:pPr>
             <a:r>
-              <a:rPr sz="1425" b="1">
+              <a:rPr sz="1350" b="1">
                 <a:solidFill>
                   <a:srgbClr val="E9795B"/>
                 </a:solidFill>
@@ -8123,19 +9354,19 @@
           <p:cNvPr id="12" name="">
             <a:extLst xmlns:a="http://schemas.openxmlformats.org/drawingml/2006/main">
               <a:ext uri="{FF2B5EF4-FFF2-40B4-BE49-F238E27FC236}">
-                <a16:creationId xmlns:a16="http://schemas.microsoft.com/office/drawing/2014/main" id="{FA08C4BA-3B31-43EB-8421-3D0B9444407B}"/>
-              </a:ext>
-            </a:extLst>
-          </p:cNvPr>
-          <p:cNvSpPr>
-            <a:spLocks xmlns:a="http://schemas.openxmlformats.org/drawingml/2006/main" noGrp="1"/>
-          </p:cNvSpPr>
-          <p:nvPr/>
-        </p:nvSpPr>
-        <p:spPr>
-          <a:xfrm xmlns:a="http://schemas.openxmlformats.org/drawingml/2006/main">
-            <a:off x="1238250" y="4953000"/>
-            <a:ext cx="2714625" cy="209550"/>
+                <a16:creationId xmlns:a16="http://schemas.microsoft.com/office/drawing/2014/main" id="{D5DC59D7-6F0B-4A5C-84C2-CDDF8EEB43A2}"/>
+              </a:ext>
+            </a:extLst>
+          </p:cNvPr>
+          <p:cNvSpPr>
+            <a:spLocks xmlns:a="http://schemas.openxmlformats.org/drawingml/2006/main" noGrp="1"/>
+          </p:cNvSpPr>
+          <p:nvPr/>
+        </p:nvSpPr>
+        <p:spPr>
+          <a:xfrm xmlns:a="http://schemas.openxmlformats.org/drawingml/2006/main">
+            <a:off x="1238250" y="4800600"/>
+            <a:ext cx="3190875" cy="180975"/>
           </a:xfrm>
           <a:prstGeom xmlns:a="http://schemas.openxmlformats.org/drawingml/2006/main" prst="rect">
             <a:avLst/>
@@ -8182,7 +9413,7 @@
                 <a:ea typeface="Calibri"/>
                 <a:cs typeface="Calibri"/>
               </a:rPr>
-              <a:t>RUN LOCALLY</a:t>
+              <a:t>DIGITAL DELIVERY</a:t>
             </a:r>
           </a:p>
         </p:txBody>
@@ -8192,19 +9423,19 @@
           <p:cNvPr id="13" name="">
             <a:extLst xmlns:a="http://schemas.openxmlformats.org/drawingml/2006/main">
               <a:ext uri="{FF2B5EF4-FFF2-40B4-BE49-F238E27FC236}">
-                <a16:creationId xmlns:a16="http://schemas.microsoft.com/office/drawing/2014/main" id="{E4F231D8-74CC-4B14-BA08-6FD2AFA42471}"/>
-              </a:ext>
-            </a:extLst>
-          </p:cNvPr>
-          <p:cNvSpPr>
-            <a:spLocks xmlns:a="http://schemas.openxmlformats.org/drawingml/2006/main" noGrp="1"/>
-          </p:cNvSpPr>
-          <p:nvPr/>
-        </p:nvSpPr>
-        <p:spPr>
-          <a:xfrm xmlns:a="http://schemas.openxmlformats.org/drawingml/2006/main">
-            <a:off x="1238250" y="5210175"/>
-            <a:ext cx="4905375" cy="457200"/>
+                <a16:creationId xmlns:a16="http://schemas.microsoft.com/office/drawing/2014/main" id="{C05739FB-C664-4874-AAC7-EDA961DDAD2B}"/>
+              </a:ext>
+            </a:extLst>
+          </p:cNvPr>
+          <p:cNvSpPr>
+            <a:spLocks xmlns:a="http://schemas.openxmlformats.org/drawingml/2006/main" noGrp="1"/>
+          </p:cNvSpPr>
+          <p:nvPr/>
+        </p:nvSpPr>
+        <p:spPr>
+          <a:xfrm xmlns:a="http://schemas.openxmlformats.org/drawingml/2006/main">
+            <a:off x="1238250" y="5048250"/>
+            <a:ext cx="4905375" cy="476250"/>
           </a:xfrm>
           <a:prstGeom xmlns:a="http://schemas.openxmlformats.org/drawingml/2006/main" prst="rect">
             <a:avLst/>
@@ -8251,7 +9482,7 @@
                 <a:ea typeface="Calibri"/>
                 <a:cs typeface="Calibri"/>
               </a:rPr>
-              <a:t>Explore bundled models in the browser without a cloud-rendering queue.</a:t>
+              <a:t>Built-in samples run in the browser without a cloud-rendering queue.</a:t>
             </a:r>
           </a:p>
         </p:txBody>
@@ -8261,23 +9492,23 @@
           <p:cNvPr id="14" name="">
             <a:extLst xmlns:a="http://schemas.openxmlformats.org/drawingml/2006/main">
               <a:ext uri="{FF2B5EF4-FFF2-40B4-BE49-F238E27FC236}">
-                <a16:creationId xmlns:a16="http://schemas.microsoft.com/office/drawing/2014/main" id="{011F8776-31B2-4FCD-888D-D7E57BEDA766}"/>
-              </a:ext>
-            </a:extLst>
-          </p:cNvPr>
-          <p:cNvSpPr>
-            <a:spLocks xmlns:a="http://schemas.openxmlformats.org/drawingml/2006/main" noGrp="1"/>
-          </p:cNvSpPr>
-          <p:nvPr/>
-        </p:nvSpPr>
-        <p:spPr>
-          <a:xfrm xmlns:a="http://schemas.openxmlformats.org/drawingml/2006/main">
-            <a:off x="6934200" y="1323975"/>
-            <a:ext cx="4514850" cy="3952875"/>
+                <a16:creationId xmlns:a16="http://schemas.microsoft.com/office/drawing/2014/main" id="{C2395394-39C9-4031-AF9E-C6C14E1FEAED}"/>
+              </a:ext>
+            </a:extLst>
+          </p:cNvPr>
+          <p:cNvSpPr>
+            <a:spLocks xmlns:a="http://schemas.openxmlformats.org/drawingml/2006/main" noGrp="1"/>
+          </p:cNvSpPr>
+          <p:nvPr/>
+        </p:nvSpPr>
+        <p:spPr>
+          <a:xfrm xmlns:a="http://schemas.openxmlformats.org/drawingml/2006/main">
+            <a:off x="6934200" y="1352550"/>
+            <a:ext cx="4514850" cy="3857625"/>
           </a:xfrm>
           <a:prstGeom xmlns:a="http://schemas.openxmlformats.org/drawingml/2006/main" prst="roundRect">
             <a:avLst>
-              <a:gd name="adj" fmla="val 1928"/>
+              <a:gd name="adj" fmla="val 1975"/>
             </a:avLst>
           </a:prstGeom>
           <a:solidFill xmlns:a="http://schemas.openxmlformats.org/drawingml/2006/main">
@@ -8294,18 +9525,18 @@
           <p:cNvPr id="15" name="">
             <a:extLst xmlns:a="http://schemas.openxmlformats.org/drawingml/2006/main">
               <a:ext uri="{FF2B5EF4-FFF2-40B4-BE49-F238E27FC236}">
-                <a16:creationId xmlns:a16="http://schemas.microsoft.com/office/drawing/2014/main" id="{D82F5C3D-C236-4C57-93DA-FA25C6EAE311}"/>
-              </a:ext>
-            </a:extLst>
-          </p:cNvPr>
-          <p:cNvSpPr>
-            <a:spLocks xmlns:a="http://schemas.openxmlformats.org/drawingml/2006/main" noGrp="1"/>
-          </p:cNvSpPr>
-          <p:nvPr/>
-        </p:nvSpPr>
-        <p:spPr>
-          <a:xfrm xmlns:a="http://schemas.openxmlformats.org/drawingml/2006/main">
-            <a:off x="7277100" y="1724025"/>
+                <a16:creationId xmlns:a16="http://schemas.microsoft.com/office/drawing/2014/main" id="{D0DF5B41-468D-4EAA-8CDD-DCBA6E3B661A}"/>
+              </a:ext>
+            </a:extLst>
+          </p:cNvPr>
+          <p:cNvSpPr>
+            <a:spLocks xmlns:a="http://schemas.openxmlformats.org/drawingml/2006/main" noGrp="1"/>
+          </p:cNvSpPr>
+          <p:nvPr/>
+        </p:nvSpPr>
+        <p:spPr>
+          <a:xfrm xmlns:a="http://schemas.openxmlformats.org/drawingml/2006/main">
+            <a:off x="7277100" y="1752600"/>
             <a:ext cx="3619500" cy="523875"/>
           </a:xfrm>
           <a:prstGeom xmlns:a="http://schemas.openxmlformats.org/drawingml/2006/main" prst="rect">
@@ -8353,7 +9584,7 @@
                 <a:ea typeface="Calibri"/>
                 <a:cs typeface="Calibri"/>
               </a:rPr>
-              <a:t>SUSTAINABILITY</a:t>
+              <a:t>A PRACTICAL</a:t>
             </a:r>
           </a:p>
           <a:p xmlns:a="http://schemas.openxmlformats.org/drawingml/2006/main">
@@ -8381,58 +9612,676 @@
           </a:p>
         </p:txBody>
       </p:sp>
-      <p:pic>
-        <p:nvPicPr>
+      <p:sp>
+        <p:nvSpPr>
           <p:cNvPr id="16" name="">
             <a:extLst xmlns:a="http://schemas.openxmlformats.org/drawingml/2006/main">
               <a:ext uri="{FF2B5EF4-FFF2-40B4-BE49-F238E27FC236}">
-                <a16:creationId xmlns:a16="http://schemas.microsoft.com/office/drawing/2014/main" id="{DC4E3341-FCF6-426C-B144-736E4B9878B2}"/>
-              </a:ext>
-            </a:extLst>
-          </p:cNvPr>
-          <p:cNvPicPr>
-            <a:picLocks xmlns:a="http://schemas.openxmlformats.org/drawingml/2006/main" noChangeAspect="1"/>
-          </p:cNvPicPr>
-          <p:nvPr/>
-        </p:nvPicPr>
-        <p:blipFill>
-          <a:blip xmlns:r="http://schemas.openxmlformats.org/officeDocument/2006/relationships" xmlns:a="http://schemas.openxmlformats.org/drawingml/2006/main" r:embed="R9808ba69e420424d">
-            <a:extLst>
-              <a:ext uri="{96DAC541-7B7A-43D3-8B79-37D633B846F1}">
-                <asvg:svgBlip xmlns:asvg="http://schemas.microsoft.com/office/drawing/2016/SVG/main" r:embed="R89a81d859316420f"/>
-              </a:ext>
-            </a:extLst>
-          </a:blip>
-          <a:stretch xmlns:a="http://schemas.openxmlformats.org/drawingml/2006/main"/>
-        </p:blipFill>
-        <p:spPr>
-          <a:xfrm xmlns:a="http://schemas.openxmlformats.org/drawingml/2006/main">
-            <a:off x="7239000" y="2228850"/>
-            <a:ext cx="3905250" cy="2905125"/>
-          </a:xfrm>
-          <a:prstGeom xmlns:a="http://schemas.openxmlformats.org/drawingml/2006/main" prst="rect">
-            <a:avLst/>
-          </a:prstGeom>
-        </p:spPr>
-      </p:pic>
+                <a16:creationId xmlns:a16="http://schemas.microsoft.com/office/drawing/2014/main" id="{9249EC11-4A0C-4711-A214-AF63B0DEE534}"/>
+              </a:ext>
+            </a:extLst>
+          </p:cNvPr>
+          <p:cNvSpPr>
+            <a:spLocks xmlns:a="http://schemas.openxmlformats.org/drawingml/2006/main" noGrp="1"/>
+          </p:cNvSpPr>
+          <p:nvPr/>
+        </p:nvSpPr>
+        <p:spPr>
+          <a:xfrm xmlns:a="http://schemas.openxmlformats.org/drawingml/2006/main">
+            <a:off x="7277100" y="2562225"/>
+            <a:ext cx="3714750" cy="9525"/>
+          </a:xfrm>
+          <a:prstGeom xmlns:a="http://schemas.openxmlformats.org/drawingml/2006/main" prst="rect">
+            <a:avLst/>
+          </a:prstGeom>
+          <a:solidFill xmlns:a="http://schemas.openxmlformats.org/drawingml/2006/main">
+            <a:srgbClr val="436A59"/>
+          </a:solidFill>
+          <a:ln xmlns:a="http://schemas.openxmlformats.org/drawingml/2006/main" w="0">
+            <a:noFill/>
+            <a:prstDash val="solid"/>
+          </a:ln>
+        </p:spPr>
+      </p:sp>
       <p:sp>
         <p:nvSpPr>
           <p:cNvPr id="17" name="">
             <a:extLst xmlns:a="http://schemas.openxmlformats.org/drawingml/2006/main">
               <a:ext uri="{FF2B5EF4-FFF2-40B4-BE49-F238E27FC236}">
-                <a16:creationId xmlns:a16="http://schemas.microsoft.com/office/drawing/2014/main" id="{F952EC71-B453-4010-B534-6C41DDB4BA0A}"/>
-              </a:ext>
-            </a:extLst>
-          </p:cNvPr>
-          <p:cNvSpPr>
-            <a:spLocks xmlns:a="http://schemas.openxmlformats.org/drawingml/2006/main" noGrp="1"/>
-          </p:cNvSpPr>
-          <p:nvPr/>
-        </p:nvSpPr>
-        <p:spPr>
-          <a:xfrm xmlns:a="http://schemas.openxmlformats.org/drawingml/2006/main">
-            <a:off x="628650" y="6067425"/>
-            <a:ext cx="6381750" cy="209550"/>
+                <a16:creationId xmlns:a16="http://schemas.microsoft.com/office/drawing/2014/main" id="{C5B4CFA3-F095-43C2-BA24-62246CB0AC96}"/>
+              </a:ext>
+            </a:extLst>
+          </p:cNvPr>
+          <p:cNvSpPr>
+            <a:spLocks xmlns:a="http://schemas.openxmlformats.org/drawingml/2006/main" noGrp="1"/>
+          </p:cNvSpPr>
+          <p:nvPr/>
+        </p:nvSpPr>
+        <p:spPr>
+          <a:xfrm xmlns:a="http://schemas.openxmlformats.org/drawingml/2006/main">
+            <a:off x="7277100" y="2714625"/>
+            <a:ext cx="400050" cy="228600"/>
+          </a:xfrm>
+          <a:prstGeom xmlns:a="http://schemas.openxmlformats.org/drawingml/2006/main" prst="rect">
+            <a:avLst/>
+          </a:prstGeom>
+          <a:noFill xmlns:a="http://schemas.openxmlformats.org/drawingml/2006/main"/>
+          <a:ln xmlns:a="http://schemas.openxmlformats.org/drawingml/2006/main" w="0">
+            <a:noFill/>
+            <a:prstDash val="solid"/>
+          </a:ln>
+        </p:spPr>
+        <p:txBody>
+          <a:bodyPr xmlns:a="http://schemas.openxmlformats.org/drawingml/2006/main" wrap="square" lIns="0" tIns="0" rIns="0" bIns="0" anchor="t">
+            <a:normAutofit fontScale="100000"/>
+          </a:bodyPr>
+          <a:lstStyle xmlns:a="http://schemas.openxmlformats.org/drawingml/2006/main">
+            <a:defPPr algn="l">
+              <a:defRPr sz="1275" b="1">
+                <a:solidFill>
+                  <a:srgbClr val="E9795B"/>
+                </a:solidFill>
+                <a:latin typeface="Calibri"/>
+                <a:ea typeface="Calibri"/>
+                <a:cs typeface="Calibri"/>
+              </a:defRPr>
+            </a:defPPr>
+          </a:lstStyle>
+          <a:p xmlns:a="http://schemas.openxmlformats.org/drawingml/2006/main">
+            <a:pPr algn="l">
+              <a:defRPr sz="1275" b="1">
+                <a:solidFill>
+                  <a:srgbClr val="E9795B"/>
+                </a:solidFill>
+                <a:latin typeface="Calibri"/>
+                <a:ea typeface="Calibri"/>
+                <a:cs typeface="Calibri"/>
+              </a:defRPr>
+            </a:pPr>
+            <a:r>
+              <a:rPr sz="1275" b="1">
+                <a:solidFill>
+                  <a:srgbClr val="E9795B"/>
+                </a:solidFill>
+                <a:latin typeface="Calibri"/>
+                <a:ea typeface="Calibri"/>
+                <a:cs typeface="Calibri"/>
+              </a:rPr>
+              <a:t>01</a:t>
+            </a:r>
+          </a:p>
+        </p:txBody>
+      </p:sp>
+      <p:sp>
+        <p:nvSpPr>
+          <p:cNvPr id="18" name="">
+            <a:extLst xmlns:a="http://schemas.openxmlformats.org/drawingml/2006/main">
+              <a:ext uri="{FF2B5EF4-FFF2-40B4-BE49-F238E27FC236}">
+                <a16:creationId xmlns:a16="http://schemas.microsoft.com/office/drawing/2014/main" id="{D73B7C22-27D4-450B-A5D7-831D02EDB9C8}"/>
+              </a:ext>
+            </a:extLst>
+          </p:cNvPr>
+          <p:cNvSpPr>
+            <a:spLocks xmlns:a="http://schemas.openxmlformats.org/drawingml/2006/main" noGrp="1"/>
+          </p:cNvSpPr>
+          <p:nvPr/>
+        </p:nvSpPr>
+        <p:spPr>
+          <a:xfrm xmlns:a="http://schemas.openxmlformats.org/drawingml/2006/main">
+            <a:off x="7791450" y="2714625"/>
+            <a:ext cx="2952750" cy="190500"/>
+          </a:xfrm>
+          <a:prstGeom xmlns:a="http://schemas.openxmlformats.org/drawingml/2006/main" prst="rect">
+            <a:avLst/>
+          </a:prstGeom>
+          <a:noFill xmlns:a="http://schemas.openxmlformats.org/drawingml/2006/main"/>
+          <a:ln xmlns:a="http://schemas.openxmlformats.org/drawingml/2006/main" w="0">
+            <a:noFill/>
+            <a:prstDash val="solid"/>
+          </a:ln>
+        </p:spPr>
+        <p:txBody>
+          <a:bodyPr xmlns:a="http://schemas.openxmlformats.org/drawingml/2006/main" wrap="square" lIns="0" tIns="0" rIns="0" bIns="0" anchor="t">
+            <a:normAutofit fontScale="100000"/>
+          </a:bodyPr>
+          <a:lstStyle xmlns:a="http://schemas.openxmlformats.org/drawingml/2006/main">
+            <a:defPPr algn="l">
+              <a:defRPr sz="975" b="1">
+                <a:solidFill>
+                  <a:srgbClr val="A8C9B0"/>
+                </a:solidFill>
+                <a:latin typeface="Calibri"/>
+                <a:ea typeface="Calibri"/>
+                <a:cs typeface="Calibri"/>
+              </a:defRPr>
+            </a:defPPr>
+          </a:lstStyle>
+          <a:p xmlns:a="http://schemas.openxmlformats.org/drawingml/2006/main">
+            <a:pPr algn="l">
+              <a:defRPr sz="975" b="1">
+                <a:solidFill>
+                  <a:srgbClr val="A8C9B0"/>
+                </a:solidFill>
+                <a:latin typeface="Calibri"/>
+                <a:ea typeface="Calibri"/>
+                <a:cs typeface="Calibri"/>
+              </a:defRPr>
+            </a:pPr>
+            <a:r>
+              <a:rPr sz="975" b="1">
+                <a:solidFill>
+                  <a:srgbClr val="A8C9B0"/>
+                </a:solidFill>
+                <a:latin typeface="Calibri"/>
+                <a:ea typeface="Calibri"/>
+                <a:cs typeface="Calibri"/>
+              </a:rPr>
+              <a:t>VISUALIZE</a:t>
+            </a:r>
+          </a:p>
+        </p:txBody>
+      </p:sp>
+      <p:sp>
+        <p:nvSpPr>
+          <p:cNvPr id="19" name="">
+            <a:extLst xmlns:a="http://schemas.openxmlformats.org/drawingml/2006/main">
+              <a:ext uri="{FF2B5EF4-FFF2-40B4-BE49-F238E27FC236}">
+                <a16:creationId xmlns:a16="http://schemas.microsoft.com/office/drawing/2014/main" id="{43567AEC-1E16-4364-A4C8-6063B6B5A9D0}"/>
+              </a:ext>
+            </a:extLst>
+          </p:cNvPr>
+          <p:cNvSpPr>
+            <a:spLocks xmlns:a="http://schemas.openxmlformats.org/drawingml/2006/main" noGrp="1"/>
+          </p:cNvSpPr>
+          <p:nvPr/>
+        </p:nvSpPr>
+        <p:spPr>
+          <a:xfrm xmlns:a="http://schemas.openxmlformats.org/drawingml/2006/main">
+            <a:off x="7791450" y="2943225"/>
+            <a:ext cx="3143250" cy="304800"/>
+          </a:xfrm>
+          <a:prstGeom xmlns:a="http://schemas.openxmlformats.org/drawingml/2006/main" prst="rect">
+            <a:avLst/>
+          </a:prstGeom>
+          <a:noFill xmlns:a="http://schemas.openxmlformats.org/drawingml/2006/main"/>
+          <a:ln xmlns:a="http://schemas.openxmlformats.org/drawingml/2006/main" w="0">
+            <a:noFill/>
+            <a:prstDash val="solid"/>
+          </a:ln>
+        </p:spPr>
+        <p:txBody>
+          <a:bodyPr xmlns:a="http://schemas.openxmlformats.org/drawingml/2006/main" wrap="square" lIns="0" tIns="0" rIns="0" bIns="0" anchor="t">
+            <a:normAutofit fontScale="100000"/>
+          </a:bodyPr>
+          <a:lstStyle xmlns:a="http://schemas.openxmlformats.org/drawingml/2006/main">
+            <a:defPPr algn="l">
+              <a:defRPr sz="1275" b="0">
+                <a:solidFill>
+                  <a:srgbClr val="FFFFFF"/>
+                </a:solidFill>
+                <a:latin typeface="Calibri"/>
+                <a:ea typeface="Calibri"/>
+                <a:cs typeface="Calibri"/>
+              </a:defRPr>
+            </a:defPPr>
+          </a:lstStyle>
+          <a:p xmlns:a="http://schemas.openxmlformats.org/drawingml/2006/main">
+            <a:pPr algn="l">
+              <a:defRPr sz="1275" b="0">
+                <a:solidFill>
+                  <a:srgbClr val="FFFFFF"/>
+                </a:solidFill>
+                <a:latin typeface="Calibri"/>
+                <a:ea typeface="Calibri"/>
+                <a:cs typeface="Calibri"/>
+              </a:defRPr>
+            </a:pPr>
+            <a:r>
+              <a:rPr sz="1275" b="0">
+                <a:solidFill>
+                  <a:srgbClr val="FFFFFF"/>
+                </a:solidFill>
+                <a:latin typeface="Calibri"/>
+                <a:ea typeface="Calibri"/>
+                <a:cs typeface="Calibri"/>
+              </a:rPr>
+              <a:t>Walk through the proposed layout.</a:t>
+            </a:r>
+          </a:p>
+        </p:txBody>
+      </p:sp>
+      <p:sp>
+        <p:nvSpPr>
+          <p:cNvPr id="20" name="">
+            <a:extLst xmlns:a="http://schemas.openxmlformats.org/drawingml/2006/main">
+              <a:ext uri="{FF2B5EF4-FFF2-40B4-BE49-F238E27FC236}">
+                <a16:creationId xmlns:a16="http://schemas.microsoft.com/office/drawing/2014/main" id="{7884712A-831B-4776-B9D1-A47392DC94C0}"/>
+              </a:ext>
+            </a:extLst>
+          </p:cNvPr>
+          <p:cNvSpPr>
+            <a:spLocks xmlns:a="http://schemas.openxmlformats.org/drawingml/2006/main" noGrp="1"/>
+          </p:cNvSpPr>
+          <p:nvPr/>
+        </p:nvSpPr>
+        <p:spPr>
+          <a:xfrm xmlns:a="http://schemas.openxmlformats.org/drawingml/2006/main">
+            <a:off x="7277100" y="3476625"/>
+            <a:ext cx="400050" cy="228600"/>
+          </a:xfrm>
+          <a:prstGeom xmlns:a="http://schemas.openxmlformats.org/drawingml/2006/main" prst="rect">
+            <a:avLst/>
+          </a:prstGeom>
+          <a:noFill xmlns:a="http://schemas.openxmlformats.org/drawingml/2006/main"/>
+          <a:ln xmlns:a="http://schemas.openxmlformats.org/drawingml/2006/main" w="0">
+            <a:noFill/>
+            <a:prstDash val="solid"/>
+          </a:ln>
+        </p:spPr>
+        <p:txBody>
+          <a:bodyPr xmlns:a="http://schemas.openxmlformats.org/drawingml/2006/main" wrap="square" lIns="0" tIns="0" rIns="0" bIns="0" anchor="t">
+            <a:normAutofit fontScale="100000"/>
+          </a:bodyPr>
+          <a:lstStyle xmlns:a="http://schemas.openxmlformats.org/drawingml/2006/main">
+            <a:defPPr algn="l">
+              <a:defRPr sz="1275" b="1">
+                <a:solidFill>
+                  <a:srgbClr val="E9795B"/>
+                </a:solidFill>
+                <a:latin typeface="Calibri"/>
+                <a:ea typeface="Calibri"/>
+                <a:cs typeface="Calibri"/>
+              </a:defRPr>
+            </a:defPPr>
+          </a:lstStyle>
+          <a:p xmlns:a="http://schemas.openxmlformats.org/drawingml/2006/main">
+            <a:pPr algn="l">
+              <a:defRPr sz="1275" b="1">
+                <a:solidFill>
+                  <a:srgbClr val="E9795B"/>
+                </a:solidFill>
+                <a:latin typeface="Calibri"/>
+                <a:ea typeface="Calibri"/>
+                <a:cs typeface="Calibri"/>
+              </a:defRPr>
+            </a:pPr>
+            <a:r>
+              <a:rPr sz="1275" b="1">
+                <a:solidFill>
+                  <a:srgbClr val="E9795B"/>
+                </a:solidFill>
+                <a:latin typeface="Calibri"/>
+                <a:ea typeface="Calibri"/>
+                <a:cs typeface="Calibri"/>
+              </a:rPr>
+              <a:t>02</a:t>
+            </a:r>
+          </a:p>
+        </p:txBody>
+      </p:sp>
+      <p:sp>
+        <p:nvSpPr>
+          <p:cNvPr id="21" name="">
+            <a:extLst xmlns:a="http://schemas.openxmlformats.org/drawingml/2006/main">
+              <a:ext uri="{FF2B5EF4-FFF2-40B4-BE49-F238E27FC236}">
+                <a16:creationId xmlns:a16="http://schemas.microsoft.com/office/drawing/2014/main" id="{6A95CA0E-60F8-4550-AC02-A02520CD92ED}"/>
+              </a:ext>
+            </a:extLst>
+          </p:cNvPr>
+          <p:cNvSpPr>
+            <a:spLocks xmlns:a="http://schemas.openxmlformats.org/drawingml/2006/main" noGrp="1"/>
+          </p:cNvSpPr>
+          <p:nvPr/>
+        </p:nvSpPr>
+        <p:spPr>
+          <a:xfrm xmlns:a="http://schemas.openxmlformats.org/drawingml/2006/main">
+            <a:off x="7791450" y="3476625"/>
+            <a:ext cx="2952750" cy="190500"/>
+          </a:xfrm>
+          <a:prstGeom xmlns:a="http://schemas.openxmlformats.org/drawingml/2006/main" prst="rect">
+            <a:avLst/>
+          </a:prstGeom>
+          <a:noFill xmlns:a="http://schemas.openxmlformats.org/drawingml/2006/main"/>
+          <a:ln xmlns:a="http://schemas.openxmlformats.org/drawingml/2006/main" w="0">
+            <a:noFill/>
+            <a:prstDash val="solid"/>
+          </a:ln>
+        </p:spPr>
+        <p:txBody>
+          <a:bodyPr xmlns:a="http://schemas.openxmlformats.org/drawingml/2006/main" wrap="square" lIns="0" tIns="0" rIns="0" bIns="0" anchor="t">
+            <a:normAutofit fontScale="100000"/>
+          </a:bodyPr>
+          <a:lstStyle xmlns:a="http://schemas.openxmlformats.org/drawingml/2006/main">
+            <a:defPPr algn="l">
+              <a:defRPr sz="975" b="1">
+                <a:solidFill>
+                  <a:srgbClr val="A8C9B0"/>
+                </a:solidFill>
+                <a:latin typeface="Calibri"/>
+                <a:ea typeface="Calibri"/>
+                <a:cs typeface="Calibri"/>
+              </a:defRPr>
+            </a:defPPr>
+          </a:lstStyle>
+          <a:p xmlns:a="http://schemas.openxmlformats.org/drawingml/2006/main">
+            <a:pPr algn="l">
+              <a:defRPr sz="975" b="1">
+                <a:solidFill>
+                  <a:srgbClr val="A8C9B0"/>
+                </a:solidFill>
+                <a:latin typeface="Calibri"/>
+                <a:ea typeface="Calibri"/>
+                <a:cs typeface="Calibri"/>
+              </a:defRPr>
+            </a:pPr>
+            <a:r>
+              <a:rPr sz="975" b="1">
+                <a:solidFill>
+                  <a:srgbClr val="A8C9B0"/>
+                </a:solidFill>
+                <a:latin typeface="Calibri"/>
+                <a:ea typeface="Calibri"/>
+                <a:cs typeface="Calibri"/>
+              </a:rPr>
+              <a:t>DISCUSS</a:t>
+            </a:r>
+          </a:p>
+        </p:txBody>
+      </p:sp>
+      <p:sp>
+        <p:nvSpPr>
+          <p:cNvPr id="22" name="">
+            <a:extLst xmlns:a="http://schemas.openxmlformats.org/drawingml/2006/main">
+              <a:ext uri="{FF2B5EF4-FFF2-40B4-BE49-F238E27FC236}">
+                <a16:creationId xmlns:a16="http://schemas.microsoft.com/office/drawing/2014/main" id="{99513380-CDCA-4203-9ECE-4DF6AF6CF560}"/>
+              </a:ext>
+            </a:extLst>
+          </p:cNvPr>
+          <p:cNvSpPr>
+            <a:spLocks xmlns:a="http://schemas.openxmlformats.org/drawingml/2006/main" noGrp="1"/>
+          </p:cNvSpPr>
+          <p:nvPr/>
+        </p:nvSpPr>
+        <p:spPr>
+          <a:xfrm xmlns:a="http://schemas.openxmlformats.org/drawingml/2006/main">
+            <a:off x="7791450" y="3705225"/>
+            <a:ext cx="3143250" cy="304800"/>
+          </a:xfrm>
+          <a:prstGeom xmlns:a="http://schemas.openxmlformats.org/drawingml/2006/main" prst="rect">
+            <a:avLst/>
+          </a:prstGeom>
+          <a:noFill xmlns:a="http://schemas.openxmlformats.org/drawingml/2006/main"/>
+          <a:ln xmlns:a="http://schemas.openxmlformats.org/drawingml/2006/main" w="0">
+            <a:noFill/>
+            <a:prstDash val="solid"/>
+          </a:ln>
+        </p:spPr>
+        <p:txBody>
+          <a:bodyPr xmlns:a="http://schemas.openxmlformats.org/drawingml/2006/main" wrap="square" lIns="0" tIns="0" rIns="0" bIns="0" anchor="t">
+            <a:normAutofit fontScale="100000"/>
+          </a:bodyPr>
+          <a:lstStyle xmlns:a="http://schemas.openxmlformats.org/drawingml/2006/main">
+            <a:defPPr algn="l">
+              <a:defRPr sz="1275" b="0">
+                <a:solidFill>
+                  <a:srgbClr val="FFFFFF"/>
+                </a:solidFill>
+                <a:latin typeface="Calibri"/>
+                <a:ea typeface="Calibri"/>
+                <a:cs typeface="Calibri"/>
+              </a:defRPr>
+            </a:defPPr>
+          </a:lstStyle>
+          <a:p xmlns:a="http://schemas.openxmlformats.org/drawingml/2006/main">
+            <a:pPr algn="l">
+              <a:defRPr sz="1275" b="0">
+                <a:solidFill>
+                  <a:srgbClr val="FFFFFF"/>
+                </a:solidFill>
+                <a:latin typeface="Calibri"/>
+                <a:ea typeface="Calibri"/>
+                <a:cs typeface="Calibri"/>
+              </a:defRPr>
+            </a:pPr>
+            <a:r>
+              <a:rPr sz="1275" b="0">
+                <a:solidFill>
+                  <a:srgbClr val="FFFFFF"/>
+                </a:solidFill>
+                <a:latin typeface="Calibri"/>
+                <a:ea typeface="Calibri"/>
+                <a:cs typeface="Calibri"/>
+              </a:rPr>
+              <a:t>Share questions in one 3D view.</a:t>
+            </a:r>
+          </a:p>
+        </p:txBody>
+      </p:sp>
+      <p:sp>
+        <p:nvSpPr>
+          <p:cNvPr id="23" name="">
+            <a:extLst xmlns:a="http://schemas.openxmlformats.org/drawingml/2006/main">
+              <a:ext uri="{FF2B5EF4-FFF2-40B4-BE49-F238E27FC236}">
+                <a16:creationId xmlns:a16="http://schemas.microsoft.com/office/drawing/2014/main" id="{9D3BA6E1-98E7-49F4-B367-C9CA934175C5}"/>
+              </a:ext>
+            </a:extLst>
+          </p:cNvPr>
+          <p:cNvSpPr>
+            <a:spLocks xmlns:a="http://schemas.openxmlformats.org/drawingml/2006/main" noGrp="1"/>
+          </p:cNvSpPr>
+          <p:nvPr/>
+        </p:nvSpPr>
+        <p:spPr>
+          <a:xfrm xmlns:a="http://schemas.openxmlformats.org/drawingml/2006/main">
+            <a:off x="7277100" y="4238625"/>
+            <a:ext cx="400050" cy="228600"/>
+          </a:xfrm>
+          <a:prstGeom xmlns:a="http://schemas.openxmlformats.org/drawingml/2006/main" prst="rect">
+            <a:avLst/>
+          </a:prstGeom>
+          <a:noFill xmlns:a="http://schemas.openxmlformats.org/drawingml/2006/main"/>
+          <a:ln xmlns:a="http://schemas.openxmlformats.org/drawingml/2006/main" w="0">
+            <a:noFill/>
+            <a:prstDash val="solid"/>
+          </a:ln>
+        </p:spPr>
+        <p:txBody>
+          <a:bodyPr xmlns:a="http://schemas.openxmlformats.org/drawingml/2006/main" wrap="square" lIns="0" tIns="0" rIns="0" bIns="0" anchor="t">
+            <a:normAutofit fontScale="100000"/>
+          </a:bodyPr>
+          <a:lstStyle xmlns:a="http://schemas.openxmlformats.org/drawingml/2006/main">
+            <a:defPPr algn="l">
+              <a:defRPr sz="1275" b="1">
+                <a:solidFill>
+                  <a:srgbClr val="E9795B"/>
+                </a:solidFill>
+                <a:latin typeface="Calibri"/>
+                <a:ea typeface="Calibri"/>
+                <a:cs typeface="Calibri"/>
+              </a:defRPr>
+            </a:defPPr>
+          </a:lstStyle>
+          <a:p xmlns:a="http://schemas.openxmlformats.org/drawingml/2006/main">
+            <a:pPr algn="l">
+              <a:defRPr sz="1275" b="1">
+                <a:solidFill>
+                  <a:srgbClr val="E9795B"/>
+                </a:solidFill>
+                <a:latin typeface="Calibri"/>
+                <a:ea typeface="Calibri"/>
+                <a:cs typeface="Calibri"/>
+              </a:defRPr>
+            </a:pPr>
+            <a:r>
+              <a:rPr sz="1275" b="1">
+                <a:solidFill>
+                  <a:srgbClr val="E9795B"/>
+                </a:solidFill>
+                <a:latin typeface="Calibri"/>
+                <a:ea typeface="Calibri"/>
+                <a:cs typeface="Calibri"/>
+              </a:rPr>
+              <a:t>03</a:t>
+            </a:r>
+          </a:p>
+        </p:txBody>
+      </p:sp>
+      <p:sp>
+        <p:nvSpPr>
+          <p:cNvPr id="24" name="">
+            <a:extLst xmlns:a="http://schemas.openxmlformats.org/drawingml/2006/main">
+              <a:ext uri="{FF2B5EF4-FFF2-40B4-BE49-F238E27FC236}">
+                <a16:creationId xmlns:a16="http://schemas.microsoft.com/office/drawing/2014/main" id="{154C536D-E862-42EB-84E2-D58E460172A3}"/>
+              </a:ext>
+            </a:extLst>
+          </p:cNvPr>
+          <p:cNvSpPr>
+            <a:spLocks xmlns:a="http://schemas.openxmlformats.org/drawingml/2006/main" noGrp="1"/>
+          </p:cNvSpPr>
+          <p:nvPr/>
+        </p:nvSpPr>
+        <p:spPr>
+          <a:xfrm xmlns:a="http://schemas.openxmlformats.org/drawingml/2006/main">
+            <a:off x="7791450" y="4238625"/>
+            <a:ext cx="2952750" cy="190500"/>
+          </a:xfrm>
+          <a:prstGeom xmlns:a="http://schemas.openxmlformats.org/drawingml/2006/main" prst="rect">
+            <a:avLst/>
+          </a:prstGeom>
+          <a:noFill xmlns:a="http://schemas.openxmlformats.org/drawingml/2006/main"/>
+          <a:ln xmlns:a="http://schemas.openxmlformats.org/drawingml/2006/main" w="0">
+            <a:noFill/>
+            <a:prstDash val="solid"/>
+          </a:ln>
+        </p:spPr>
+        <p:txBody>
+          <a:bodyPr xmlns:a="http://schemas.openxmlformats.org/drawingml/2006/main" wrap="square" lIns="0" tIns="0" rIns="0" bIns="0" anchor="t">
+            <a:normAutofit fontScale="100000"/>
+          </a:bodyPr>
+          <a:lstStyle xmlns:a="http://schemas.openxmlformats.org/drawingml/2006/main">
+            <a:defPPr algn="l">
+              <a:defRPr sz="975" b="1">
+                <a:solidFill>
+                  <a:srgbClr val="A8C9B0"/>
+                </a:solidFill>
+                <a:latin typeface="Calibri"/>
+                <a:ea typeface="Calibri"/>
+                <a:cs typeface="Calibri"/>
+              </a:defRPr>
+            </a:defPPr>
+          </a:lstStyle>
+          <a:p xmlns:a="http://schemas.openxmlformats.org/drawingml/2006/main">
+            <a:pPr algn="l">
+              <a:defRPr sz="975" b="1">
+                <a:solidFill>
+                  <a:srgbClr val="A8C9B0"/>
+                </a:solidFill>
+                <a:latin typeface="Calibri"/>
+                <a:ea typeface="Calibri"/>
+                <a:cs typeface="Calibri"/>
+              </a:defRPr>
+            </a:pPr>
+            <a:r>
+              <a:rPr sz="975" b="1">
+                <a:solidFill>
+                  <a:srgbClr val="A8C9B0"/>
+                </a:solidFill>
+                <a:latin typeface="Calibri"/>
+                <a:ea typeface="Calibri"/>
+                <a:cs typeface="Calibri"/>
+              </a:rPr>
+              <a:t>REVIEW EARLY</a:t>
+            </a:r>
+          </a:p>
+        </p:txBody>
+      </p:sp>
+      <p:sp>
+        <p:nvSpPr>
+          <p:cNvPr id="25" name="">
+            <a:extLst xmlns:a="http://schemas.openxmlformats.org/drawingml/2006/main">
+              <a:ext uri="{FF2B5EF4-FFF2-40B4-BE49-F238E27FC236}">
+                <a16:creationId xmlns:a16="http://schemas.microsoft.com/office/drawing/2014/main" id="{8D165BFF-2650-4F73-A51F-74DC0336A43C}"/>
+              </a:ext>
+            </a:extLst>
+          </p:cNvPr>
+          <p:cNvSpPr>
+            <a:spLocks xmlns:a="http://schemas.openxmlformats.org/drawingml/2006/main" noGrp="1"/>
+          </p:cNvSpPr>
+          <p:nvPr/>
+        </p:nvSpPr>
+        <p:spPr>
+          <a:xfrm xmlns:a="http://schemas.openxmlformats.org/drawingml/2006/main">
+            <a:off x="7791450" y="4467225"/>
+            <a:ext cx="3143250" cy="381000"/>
+          </a:xfrm>
+          <a:prstGeom xmlns:a="http://schemas.openxmlformats.org/drawingml/2006/main" prst="rect">
+            <a:avLst/>
+          </a:prstGeom>
+          <a:noFill xmlns:a="http://schemas.openxmlformats.org/drawingml/2006/main"/>
+          <a:ln xmlns:a="http://schemas.openxmlformats.org/drawingml/2006/main" w="0">
+            <a:noFill/>
+            <a:prstDash val="solid"/>
+          </a:ln>
+        </p:spPr>
+        <p:txBody>
+          <a:bodyPr xmlns:a="http://schemas.openxmlformats.org/drawingml/2006/main" wrap="square" lIns="0" tIns="0" rIns="0" bIns="0" anchor="t">
+            <a:normAutofit fontScale="100000"/>
+          </a:bodyPr>
+          <a:lstStyle xmlns:a="http://schemas.openxmlformats.org/drawingml/2006/main">
+            <a:defPPr algn="l">
+              <a:defRPr sz="1275" b="0">
+                <a:solidFill>
+                  <a:srgbClr val="FFFFFF"/>
+                </a:solidFill>
+                <a:latin typeface="Calibri"/>
+                <a:ea typeface="Calibri"/>
+                <a:cs typeface="Calibri"/>
+              </a:defRPr>
+            </a:defPPr>
+          </a:lstStyle>
+          <a:p xmlns:a="http://schemas.openxmlformats.org/drawingml/2006/main">
+            <a:pPr algn="l">
+              <a:defRPr sz="1275" b="0">
+                <a:solidFill>
+                  <a:srgbClr val="FFFFFF"/>
+                </a:solidFill>
+                <a:latin typeface="Calibri"/>
+                <a:ea typeface="Calibri"/>
+                <a:cs typeface="Calibri"/>
+              </a:defRPr>
+            </a:pPr>
+            <a:r>
+              <a:rPr sz="1275" b="0">
+                <a:solidFill>
+                  <a:srgbClr val="FFFFFF"/>
+                </a:solidFill>
+                <a:latin typeface="Calibri"/>
+                <a:ea typeface="Calibri"/>
+                <a:cs typeface="Calibri"/>
+              </a:rPr>
+              <a:t>Consider changes before construction.</a:t>
+            </a:r>
+          </a:p>
+        </p:txBody>
+      </p:sp>
+      <p:sp>
+        <p:nvSpPr>
+          <p:cNvPr id="26" name="">
+            <a:extLst xmlns:a="http://schemas.openxmlformats.org/drawingml/2006/main">
+              <a:ext uri="{FF2B5EF4-FFF2-40B4-BE49-F238E27FC236}">
+                <a16:creationId xmlns:a16="http://schemas.microsoft.com/office/drawing/2014/main" id="{87142031-50F2-42D1-9A9D-542D4158DDD9}"/>
+              </a:ext>
+            </a:extLst>
+          </p:cNvPr>
+          <p:cNvSpPr>
+            <a:spLocks xmlns:a="http://schemas.openxmlformats.org/drawingml/2006/main" noGrp="1"/>
+          </p:cNvSpPr>
+          <p:nvPr/>
+        </p:nvSpPr>
+        <p:spPr>
+          <a:xfrm xmlns:a="http://schemas.openxmlformats.org/drawingml/2006/main">
+            <a:off x="628650" y="6010275"/>
+            <a:ext cx="8572500" cy="200025"/>
           </a:xfrm>
           <a:prstGeom xmlns:a="http://schemas.openxmlformats.org/drawingml/2006/main" prst="rect">
             <a:avLst/>
@@ -8479,76 +10328,7 @@
                 <a:ea typeface="Calibri"/>
                 <a:cs typeface="Calibri"/>
               </a:rPr>
-              <a:t>Potential contribution, not a measured impact</a:t>
-            </a:r>
-          </a:p>
-        </p:txBody>
-      </p:sp>
-      <p:sp>
-        <p:nvSpPr>
-          <p:cNvPr id="18" name="">
-            <a:extLst xmlns:a="http://schemas.openxmlformats.org/drawingml/2006/main">
-              <a:ext uri="{FF2B5EF4-FFF2-40B4-BE49-F238E27FC236}">
-                <a16:creationId xmlns:a16="http://schemas.microsoft.com/office/drawing/2014/main" id="{42245FAE-FD8F-47FA-8591-1DCA272EA55D}"/>
-              </a:ext>
-            </a:extLst>
-          </p:cNvPr>
-          <p:cNvSpPr>
-            <a:spLocks xmlns:a="http://schemas.openxmlformats.org/drawingml/2006/main" noGrp="1"/>
-          </p:cNvSpPr>
-          <p:nvPr/>
-        </p:nvSpPr>
-        <p:spPr>
-          <a:xfrm xmlns:a="http://schemas.openxmlformats.org/drawingml/2006/main">
-            <a:off x="628650" y="6353175"/>
-            <a:ext cx="8763000" cy="200025"/>
-          </a:xfrm>
-          <a:prstGeom xmlns:a="http://schemas.openxmlformats.org/drawingml/2006/main" prst="rect">
-            <a:avLst/>
-          </a:prstGeom>
-          <a:noFill xmlns:a="http://schemas.openxmlformats.org/drawingml/2006/main"/>
-          <a:ln xmlns:a="http://schemas.openxmlformats.org/drawingml/2006/main" w="0">
-            <a:noFill/>
-            <a:prstDash val="solid"/>
-          </a:ln>
-        </p:spPr>
-        <p:txBody>
-          <a:bodyPr xmlns:a="http://schemas.openxmlformats.org/drawingml/2006/main" wrap="square" lIns="0" tIns="0" rIns="0" bIns="0" anchor="t">
-            <a:normAutofit fontScale="100000"/>
-          </a:bodyPr>
-          <a:lstStyle xmlns:a="http://schemas.openxmlformats.org/drawingml/2006/main">
-            <a:defPPr algn="l">
-              <a:defRPr sz="1050" b="0">
-                <a:solidFill>
-                  <a:srgbClr val="B9D1BF"/>
-                </a:solidFill>
-                <a:latin typeface="Calibri"/>
-                <a:ea typeface="Calibri"/>
-                <a:cs typeface="Calibri"/>
-              </a:defRPr>
-            </a:defPPr>
-          </a:lstStyle>
-          <a:p xmlns:a="http://schemas.openxmlformats.org/drawingml/2006/main">
-            <a:pPr algn="l">
-              <a:defRPr sz="1050" b="0">
-                <a:solidFill>
-                  <a:srgbClr val="B9D1BF"/>
-                </a:solidFill>
-                <a:latin typeface="Calibri"/>
-                <a:ea typeface="Calibri"/>
-                <a:cs typeface="Calibri"/>
-              </a:defRPr>
-            </a:pPr>
-            <a:r>
-              <a:rPr sz="1050" b="0">
-                <a:solidFill>
-                  <a:srgbClr val="B9D1BF"/>
-                </a:solidFill>
-                <a:latin typeface="Calibri"/>
-                <a:ea typeface="Calibri"/>
-                <a:cs typeface="Calibri"/>
-              </a:rPr>
-              <a:t>This prototype does not yet calculate material, energy or carbon savings.</a:t>
+              <a:t>Prototype does not calculate material use, carbon, or device energy.</a:t>
             </a:r>
           </a:p>
         </p:txBody>
@@ -8556,7 +10336,7 @@
     </p:spTree>
     <p:extLst>
       <p:ext uri="{BB962C8B-B14F-4D97-AF65-F5344CB8AC3E}">
-        <p14:creationId xmlns:p14="http://schemas.microsoft.com/office/powerpoint/2010/main" val="96809447"/>
+        <p14:creationId xmlns:p14="http://schemas.microsoft.com/office/powerpoint/2010/main" val="610019274"/>
       </p:ext>
     </p:extLst>
   </p:cSld>

--- a/public/Trishna 3D Pitch Deck.pptx
+++ b/public/Trishna 3D Pitch Deck.pptx
@@ -2,18 +2,18 @@
 <file path=ppt/presentation.xml><?xml version="1.0" encoding="utf-8"?>
 <p:presentation xmlns:p="http://schemas.openxmlformats.org/presentationml/2006/main">
   <p:sldMasterIdLst>
-    <p:sldMasterId xmlns:r="http://schemas.openxmlformats.org/officeDocument/2006/relationships" id="2147483648" r:id="Ra3e428b645584f7f"/>
+    <p:sldMasterId xmlns:r="http://schemas.openxmlformats.org/officeDocument/2006/relationships" id="2147483648" r:id="Rb6ba70b2be8a4b21"/>
   </p:sldMasterIdLst>
   <p:notesMasterIdLst>
-    <p:notesMasterId xmlns:r="http://schemas.openxmlformats.org/officeDocument/2006/relationships" r:id="Rbbb966ede63f45b7"/>
+    <p:notesMasterId xmlns:r="http://schemas.openxmlformats.org/officeDocument/2006/relationships" r:id="R6ba75c454d1847e6"/>
   </p:notesMasterIdLst>
   <p:sldIdLst>
-    <p:sldId xmlns:r="http://schemas.openxmlformats.org/officeDocument/2006/relationships" id="256" r:id="Ra59f2ccb8ee14671"/>
-    <p:sldId xmlns:r="http://schemas.openxmlformats.org/officeDocument/2006/relationships" id="257" r:id="R2756d70bc0844661"/>
-    <p:sldId xmlns:r="http://schemas.openxmlformats.org/officeDocument/2006/relationships" id="258" r:id="R4f3e3216e19e4dd4"/>
-    <p:sldId xmlns:r="http://schemas.openxmlformats.org/officeDocument/2006/relationships" id="259" r:id="R655442cc53264ca1"/>
-    <p:sldId xmlns:r="http://schemas.openxmlformats.org/officeDocument/2006/relationships" id="260" r:id="Rdc9c89ea4c394b85"/>
-    <p:sldId xmlns:r="http://schemas.openxmlformats.org/officeDocument/2006/relationships" id="261" r:id="R1bdab1eb23484893"/>
+    <p:sldId xmlns:r="http://schemas.openxmlformats.org/officeDocument/2006/relationships" id="256" r:id="R5e4dfd7faa714420"/>
+    <p:sldId xmlns:r="http://schemas.openxmlformats.org/officeDocument/2006/relationships" id="257" r:id="Rdbd846018f814ccb"/>
+    <p:sldId xmlns:r="http://schemas.openxmlformats.org/officeDocument/2006/relationships" id="258" r:id="R65a4020ec8354c6c"/>
+    <p:sldId xmlns:r="http://schemas.openxmlformats.org/officeDocument/2006/relationships" id="259" r:id="Rbe63862c57124816"/>
+    <p:sldId xmlns:r="http://schemas.openxmlformats.org/officeDocument/2006/relationships" id="260" r:id="R84877361000f40dd"/>
+    <p:sldId xmlns:r="http://schemas.openxmlformats.org/officeDocument/2006/relationships" id="261" r:id="R0fc88edcf162467d"/>
   </p:sldIdLst>
   <p:sldSz cx="12192000" cy="6858000"/>
   <p:notesSz cx="6858000" cy="9144000"/>
@@ -955,6 +955,7 @@
                 <a:spcPts val="0"/>
               </a:spcAft>
               <a:buNone/>
+              <a:defRPr/>
             </a:lvl1pPr>
             <a:lvl2pPr marL="0" indent="0">
               <a:lnSpc>
@@ -967,6 +968,7 @@
                 <a:spcPts val="0"/>
               </a:spcAft>
               <a:buNone/>
+              <a:defRPr/>
             </a:lvl2pPr>
             <a:lvl3pPr marL="0" indent="0">
               <a:lnSpc>
@@ -979,6 +981,7 @@
                 <a:spcPts val="0"/>
               </a:spcAft>
               <a:buNone/>
+              <a:defRPr/>
             </a:lvl3pPr>
             <a:lvl4pPr marL="0" indent="0">
               <a:lnSpc>
@@ -991,6 +994,7 @@
                 <a:spcPts val="0"/>
               </a:spcAft>
               <a:buNone/>
+              <a:defRPr/>
             </a:lvl4pPr>
             <a:lvl5pPr marL="0" indent="0">
               <a:lnSpc>
@@ -1003,6 +1007,7 @@
                 <a:spcPts val="0"/>
               </a:spcAft>
               <a:buNone/>
+              <a:defRPr/>
             </a:lvl5pPr>
             <a:lvl6pPr marL="0" indent="0">
               <a:lnSpc>
@@ -1015,6 +1020,7 @@
                 <a:spcPts val="0"/>
               </a:spcAft>
               <a:buNone/>
+              <a:defRPr/>
             </a:lvl6pPr>
             <a:lvl7pPr marL="0" indent="0">
               <a:lnSpc>
@@ -1027,6 +1033,7 @@
                 <a:spcPts val="0"/>
               </a:spcAft>
               <a:buNone/>
+              <a:defRPr/>
             </a:lvl7pPr>
             <a:lvl8pPr marL="0" indent="0">
               <a:lnSpc>
@@ -1039,6 +1046,7 @@
                 <a:spcPts val="0"/>
               </a:spcAft>
               <a:buNone/>
+              <a:defRPr/>
             </a:lvl8pPr>
             <a:lvl9pPr marL="0" indent="0">
               <a:lnSpc>
@@ -1051,6 +1059,7 @@
                 <a:spcPts val="0"/>
               </a:spcAft>
               <a:buNone/>
+              <a:defRPr/>
             </a:lvl9pPr>
           </a:lstStyle>
           <a:p xmlns:a="http://schemas.openxmlformats.org/drawingml/2006/main"/>
@@ -1112,6 +1121,7 @@
                 <a:spcPts val="0"/>
               </a:spcAft>
               <a:buNone/>
+              <a:defRPr/>
             </a:lvl1pPr>
             <a:lvl2pPr marL="0" indent="0">
               <a:lnSpc>
@@ -1124,6 +1134,7 @@
                 <a:spcPts val="0"/>
               </a:spcAft>
               <a:buNone/>
+              <a:defRPr/>
             </a:lvl2pPr>
             <a:lvl3pPr marL="0" indent="0">
               <a:lnSpc>
@@ -1136,6 +1147,7 @@
                 <a:spcPts val="0"/>
               </a:spcAft>
               <a:buNone/>
+              <a:defRPr/>
             </a:lvl3pPr>
             <a:lvl4pPr marL="0" indent="0">
               <a:lnSpc>
@@ -1148,6 +1160,7 @@
                 <a:spcPts val="0"/>
               </a:spcAft>
               <a:buNone/>
+              <a:defRPr/>
             </a:lvl4pPr>
             <a:lvl5pPr marL="0" indent="0">
               <a:lnSpc>
@@ -1160,6 +1173,7 @@
                 <a:spcPts val="0"/>
               </a:spcAft>
               <a:buNone/>
+              <a:defRPr/>
             </a:lvl5pPr>
             <a:lvl6pPr marL="0" indent="0">
               <a:lnSpc>
@@ -1172,6 +1186,7 @@
                 <a:spcPts val="0"/>
               </a:spcAft>
               <a:buNone/>
+              <a:defRPr/>
             </a:lvl6pPr>
             <a:lvl7pPr marL="0" indent="0">
               <a:lnSpc>
@@ -1184,6 +1199,7 @@
                 <a:spcPts val="0"/>
               </a:spcAft>
               <a:buNone/>
+              <a:defRPr/>
             </a:lvl7pPr>
             <a:lvl8pPr marL="0" indent="0">
               <a:lnSpc>
@@ -1196,6 +1212,7 @@
                 <a:spcPts val="0"/>
               </a:spcAft>
               <a:buNone/>
+              <a:defRPr/>
             </a:lvl8pPr>
             <a:lvl9pPr marL="0" indent="0">
               <a:lnSpc>
@@ -1208,6 +1225,7 @@
                 <a:spcPts val="0"/>
               </a:spcAft>
               <a:buNone/>
+              <a:defRPr/>
             </a:lvl9pPr>
           </a:lstStyle>
           <a:p xmlns:a="http://schemas.openxmlformats.org/drawingml/2006/main"/>
@@ -1286,6 +1304,7 @@
                 <a:spcPts val="0"/>
               </a:spcAft>
               <a:buNone/>
+              <a:defRPr/>
             </a:lvl1pPr>
             <a:lvl2pPr marL="0" indent="0">
               <a:lnSpc>
@@ -1298,6 +1317,7 @@
                 <a:spcPts val="0"/>
               </a:spcAft>
               <a:buNone/>
+              <a:defRPr/>
             </a:lvl2pPr>
             <a:lvl3pPr marL="0" indent="0">
               <a:lnSpc>
@@ -1310,6 +1330,7 @@
                 <a:spcPts val="0"/>
               </a:spcAft>
               <a:buNone/>
+              <a:defRPr/>
             </a:lvl3pPr>
             <a:lvl4pPr marL="0" indent="0">
               <a:lnSpc>
@@ -1322,6 +1343,7 @@
                 <a:spcPts val="0"/>
               </a:spcAft>
               <a:buNone/>
+              <a:defRPr/>
             </a:lvl4pPr>
             <a:lvl5pPr marL="0" indent="0">
               <a:lnSpc>
@@ -1334,6 +1356,7 @@
                 <a:spcPts val="0"/>
               </a:spcAft>
               <a:buNone/>
+              <a:defRPr/>
             </a:lvl5pPr>
             <a:lvl6pPr marL="0" indent="0">
               <a:lnSpc>
@@ -1346,6 +1369,7 @@
                 <a:spcPts val="0"/>
               </a:spcAft>
               <a:buNone/>
+              <a:defRPr/>
             </a:lvl6pPr>
             <a:lvl7pPr marL="0" indent="0">
               <a:lnSpc>
@@ -1358,6 +1382,7 @@
                 <a:spcPts val="0"/>
               </a:spcAft>
               <a:buNone/>
+              <a:defRPr/>
             </a:lvl7pPr>
             <a:lvl8pPr marL="0" indent="0">
               <a:lnSpc>
@@ -1370,6 +1395,7 @@
                 <a:spcPts val="0"/>
               </a:spcAft>
               <a:buNone/>
+              <a:defRPr/>
             </a:lvl8pPr>
             <a:lvl9pPr marL="0" indent="0">
               <a:lnSpc>
@@ -1382,6 +1408,7 @@
                 <a:spcPts val="0"/>
               </a:spcAft>
               <a:buNone/>
+              <a:defRPr/>
             </a:lvl9pPr>
           </a:lstStyle>
           <a:p xmlns:a="http://schemas.openxmlformats.org/drawingml/2006/main"/>
@@ -1460,6 +1487,7 @@
                 <a:spcPts val="0"/>
               </a:spcAft>
               <a:buNone/>
+              <a:defRPr/>
             </a:lvl1pPr>
             <a:lvl2pPr marL="0" indent="0">
               <a:lnSpc>
@@ -1472,6 +1500,7 @@
                 <a:spcPts val="0"/>
               </a:spcAft>
               <a:buNone/>
+              <a:defRPr/>
             </a:lvl2pPr>
             <a:lvl3pPr marL="0" indent="0">
               <a:lnSpc>
@@ -1484,6 +1513,7 @@
                 <a:spcPts val="0"/>
               </a:spcAft>
               <a:buNone/>
+              <a:defRPr/>
             </a:lvl3pPr>
             <a:lvl4pPr marL="0" indent="0">
               <a:lnSpc>
@@ -1496,6 +1526,7 @@
                 <a:spcPts val="0"/>
               </a:spcAft>
               <a:buNone/>
+              <a:defRPr/>
             </a:lvl4pPr>
             <a:lvl5pPr marL="0" indent="0">
               <a:lnSpc>
@@ -1508,6 +1539,7 @@
                 <a:spcPts val="0"/>
               </a:spcAft>
               <a:buNone/>
+              <a:defRPr/>
             </a:lvl5pPr>
             <a:lvl6pPr marL="0" indent="0">
               <a:lnSpc>
@@ -1520,6 +1552,7 @@
                 <a:spcPts val="0"/>
               </a:spcAft>
               <a:buNone/>
+              <a:defRPr/>
             </a:lvl6pPr>
             <a:lvl7pPr marL="0" indent="0">
               <a:lnSpc>
@@ -1532,6 +1565,7 @@
                 <a:spcPts val="0"/>
               </a:spcAft>
               <a:buNone/>
+              <a:defRPr/>
             </a:lvl7pPr>
             <a:lvl8pPr marL="0" indent="0">
               <a:lnSpc>
@@ -1544,6 +1578,7 @@
                 <a:spcPts val="0"/>
               </a:spcAft>
               <a:buNone/>
+              <a:defRPr/>
             </a:lvl8pPr>
             <a:lvl9pPr marL="0" indent="0">
               <a:lnSpc>
@@ -1556,6 +1591,7 @@
                 <a:spcPts val="0"/>
               </a:spcAft>
               <a:buNone/>
+              <a:defRPr/>
             </a:lvl9pPr>
           </a:lstStyle>
           <a:p xmlns:a="http://schemas.openxmlformats.org/drawingml/2006/main"/>
@@ -1617,6 +1653,7 @@
                 <a:spcPts val="1200"/>
               </a:spcAft>
               <a:buChar char="•"/>
+              <a:defRPr/>
             </a:lvl1pPr>
             <a:lvl2pPr marL="533400" indent="-228600">
               <a:lnSpc>
@@ -1629,6 +1666,7 @@
                 <a:spcPts val="1200"/>
               </a:spcAft>
               <a:buChar char="•"/>
+              <a:defRPr/>
             </a:lvl2pPr>
             <a:lvl3pPr marL="838200" indent="-228600">
               <a:lnSpc>
@@ -1641,6 +1679,7 @@
                 <a:spcPts val="1200"/>
               </a:spcAft>
               <a:buChar char="•"/>
+              <a:defRPr/>
             </a:lvl3pPr>
             <a:lvl4pPr marL="1143000" indent="-228600">
               <a:lnSpc>
@@ -1653,6 +1692,7 @@
                 <a:spcPts val="1200"/>
               </a:spcAft>
               <a:buChar char="•"/>
+              <a:defRPr/>
             </a:lvl4pPr>
             <a:lvl5pPr marL="1447800" indent="-228600">
               <a:lnSpc>
@@ -1665,6 +1705,7 @@
                 <a:spcPts val="1200"/>
               </a:spcAft>
               <a:buChar char="•"/>
+              <a:defRPr/>
             </a:lvl5pPr>
             <a:lvl6pPr marL="1752600" indent="-228600">
               <a:lnSpc>
@@ -1677,6 +1718,7 @@
                 <a:spcPts val="1200"/>
               </a:spcAft>
               <a:buChar char="•"/>
+              <a:defRPr/>
             </a:lvl6pPr>
             <a:lvl7pPr marL="2057400" indent="-228600">
               <a:lnSpc>
@@ -1689,6 +1731,7 @@
                 <a:spcPts val="1200"/>
               </a:spcAft>
               <a:buChar char="•"/>
+              <a:defRPr/>
             </a:lvl7pPr>
             <a:lvl8pPr marL="2362200" indent="-228600">
               <a:lnSpc>
@@ -1701,6 +1744,7 @@
                 <a:spcPts val="1200"/>
               </a:spcAft>
               <a:buChar char="•"/>
+              <a:defRPr/>
             </a:lvl8pPr>
             <a:lvl9pPr marL="2667000" indent="-228600">
               <a:lnSpc>
@@ -1713,6 +1757,7 @@
                 <a:spcPts val="1200"/>
               </a:spcAft>
               <a:buChar char="•"/>
+              <a:defRPr/>
             </a:lvl9pPr>
           </a:lstStyle>
           <a:p xmlns:a="http://schemas.openxmlformats.org/drawingml/2006/main"/>
@@ -1791,6 +1836,7 @@
                 <a:spcPts val="0"/>
               </a:spcAft>
               <a:buNone/>
+              <a:defRPr/>
             </a:lvl1pPr>
             <a:lvl2pPr marL="0" indent="0">
               <a:lnSpc>
@@ -1803,6 +1849,7 @@
                 <a:spcPts val="0"/>
               </a:spcAft>
               <a:buNone/>
+              <a:defRPr/>
             </a:lvl2pPr>
             <a:lvl3pPr marL="0" indent="0">
               <a:lnSpc>
@@ -1815,6 +1862,7 @@
                 <a:spcPts val="0"/>
               </a:spcAft>
               <a:buNone/>
+              <a:defRPr/>
             </a:lvl3pPr>
             <a:lvl4pPr marL="0" indent="0">
               <a:lnSpc>
@@ -1827,6 +1875,7 @@
                 <a:spcPts val="0"/>
               </a:spcAft>
               <a:buNone/>
+              <a:defRPr/>
             </a:lvl4pPr>
             <a:lvl5pPr marL="0" indent="0">
               <a:lnSpc>
@@ -1839,6 +1888,7 @@
                 <a:spcPts val="0"/>
               </a:spcAft>
               <a:buNone/>
+              <a:defRPr/>
             </a:lvl5pPr>
             <a:lvl6pPr marL="0" indent="0">
               <a:lnSpc>
@@ -1851,6 +1901,7 @@
                 <a:spcPts val="0"/>
               </a:spcAft>
               <a:buNone/>
+              <a:defRPr/>
             </a:lvl6pPr>
             <a:lvl7pPr marL="0" indent="0">
               <a:lnSpc>
@@ -1863,6 +1914,7 @@
                 <a:spcPts val="0"/>
               </a:spcAft>
               <a:buNone/>
+              <a:defRPr/>
             </a:lvl7pPr>
             <a:lvl8pPr marL="0" indent="0">
               <a:lnSpc>
@@ -1875,6 +1927,7 @@
                 <a:spcPts val="0"/>
               </a:spcAft>
               <a:buNone/>
+              <a:defRPr/>
             </a:lvl8pPr>
             <a:lvl9pPr marL="0" indent="0">
               <a:lnSpc>
@@ -1887,6 +1940,7 @@
                 <a:spcPts val="0"/>
               </a:spcAft>
               <a:buNone/>
+              <a:defRPr/>
             </a:lvl9pPr>
           </a:lstStyle>
           <a:p xmlns:a="http://schemas.openxmlformats.org/drawingml/2006/main"/>
@@ -1948,6 +2002,7 @@
                 <a:spcPts val="1200"/>
               </a:spcAft>
               <a:buChar char="•"/>
+              <a:defRPr/>
             </a:lvl1pPr>
             <a:lvl2pPr marL="533400" indent="-228600">
               <a:lnSpc>
@@ -1960,6 +2015,7 @@
                 <a:spcPts val="1200"/>
               </a:spcAft>
               <a:buChar char="•"/>
+              <a:defRPr/>
             </a:lvl2pPr>
             <a:lvl3pPr marL="838200" indent="-228600">
               <a:lnSpc>
@@ -1972,6 +2028,7 @@
                 <a:spcPts val="1200"/>
               </a:spcAft>
               <a:buChar char="•"/>
+              <a:defRPr/>
             </a:lvl3pPr>
             <a:lvl4pPr marL="1143000" indent="-228600">
               <a:lnSpc>
@@ -1984,6 +2041,7 @@
                 <a:spcPts val="1200"/>
               </a:spcAft>
               <a:buChar char="•"/>
+              <a:defRPr/>
             </a:lvl4pPr>
             <a:lvl5pPr marL="1447800" indent="-228600">
               <a:lnSpc>
@@ -1996,6 +2054,7 @@
                 <a:spcPts val="1200"/>
               </a:spcAft>
               <a:buChar char="•"/>
+              <a:defRPr/>
             </a:lvl5pPr>
             <a:lvl6pPr marL="1752600" indent="-228600">
               <a:lnSpc>
@@ -2008,6 +2067,7 @@
                 <a:spcPts val="1200"/>
               </a:spcAft>
               <a:buChar char="•"/>
+              <a:defRPr/>
             </a:lvl6pPr>
             <a:lvl7pPr marL="2057400" indent="-228600">
               <a:lnSpc>
@@ -2020,6 +2080,7 @@
                 <a:spcPts val="1200"/>
               </a:spcAft>
               <a:buChar char="•"/>
+              <a:defRPr/>
             </a:lvl7pPr>
             <a:lvl8pPr marL="2362200" indent="-228600">
               <a:lnSpc>
@@ -2032,6 +2093,7 @@
                 <a:spcPts val="1200"/>
               </a:spcAft>
               <a:buChar char="•"/>
+              <a:defRPr/>
             </a:lvl8pPr>
             <a:lvl9pPr marL="2667000" indent="-228600">
               <a:lnSpc>
@@ -2044,6 +2106,7 @@
                 <a:spcPts val="1200"/>
               </a:spcAft>
               <a:buChar char="•"/>
+              <a:defRPr/>
             </a:lvl9pPr>
           </a:lstStyle>
           <a:p xmlns:a="http://schemas.openxmlformats.org/drawingml/2006/main"/>
@@ -2105,6 +2168,7 @@
                 <a:spcPts val="1200"/>
               </a:spcAft>
               <a:buChar char="•"/>
+              <a:defRPr/>
             </a:lvl1pPr>
             <a:lvl2pPr marL="533400" indent="-228600">
               <a:lnSpc>
@@ -2117,6 +2181,7 @@
                 <a:spcPts val="1200"/>
               </a:spcAft>
               <a:buChar char="•"/>
+              <a:defRPr/>
             </a:lvl2pPr>
             <a:lvl3pPr marL="838200" indent="-228600">
               <a:lnSpc>
@@ -2129,6 +2194,7 @@
                 <a:spcPts val="1200"/>
               </a:spcAft>
               <a:buChar char="•"/>
+              <a:defRPr/>
             </a:lvl3pPr>
             <a:lvl4pPr marL="1143000" indent="-228600">
               <a:lnSpc>
@@ -2141,6 +2207,7 @@
                 <a:spcPts val="1200"/>
               </a:spcAft>
               <a:buChar char="•"/>
+              <a:defRPr/>
             </a:lvl4pPr>
             <a:lvl5pPr marL="1447800" indent="-228600">
               <a:lnSpc>
@@ -2153,6 +2220,7 @@
                 <a:spcPts val="1200"/>
               </a:spcAft>
               <a:buChar char="•"/>
+              <a:defRPr/>
             </a:lvl5pPr>
             <a:lvl6pPr marL="1752600" indent="-228600">
               <a:lnSpc>
@@ -2165,6 +2233,7 @@
                 <a:spcPts val="1200"/>
               </a:spcAft>
               <a:buChar char="•"/>
+              <a:defRPr/>
             </a:lvl6pPr>
             <a:lvl7pPr marL="2057400" indent="-228600">
               <a:lnSpc>
@@ -2177,6 +2246,7 @@
                 <a:spcPts val="1200"/>
               </a:spcAft>
               <a:buChar char="•"/>
+              <a:defRPr/>
             </a:lvl7pPr>
             <a:lvl8pPr marL="2362200" indent="-228600">
               <a:lnSpc>
@@ -2189,6 +2259,7 @@
                 <a:spcPts val="1200"/>
               </a:spcAft>
               <a:buChar char="•"/>
+              <a:defRPr/>
             </a:lvl8pPr>
             <a:lvl9pPr marL="2667000" indent="-228600">
               <a:lnSpc>
@@ -2201,6 +2272,7 @@
                 <a:spcPts val="1200"/>
               </a:spcAft>
               <a:buChar char="•"/>
+              <a:defRPr/>
             </a:lvl9pPr>
           </a:lstStyle>
           <a:p xmlns:a="http://schemas.openxmlformats.org/drawingml/2006/main"/>
@@ -2279,6 +2351,7 @@
                 <a:spcPts val="0"/>
               </a:spcAft>
               <a:buNone/>
+              <a:defRPr/>
             </a:lvl1pPr>
             <a:lvl2pPr marL="0" indent="0">
               <a:lnSpc>
@@ -2291,6 +2364,7 @@
                 <a:spcPts val="0"/>
               </a:spcAft>
               <a:buNone/>
+              <a:defRPr/>
             </a:lvl2pPr>
             <a:lvl3pPr marL="0" indent="0">
               <a:lnSpc>
@@ -2303,6 +2377,7 @@
                 <a:spcPts val="0"/>
               </a:spcAft>
               <a:buNone/>
+              <a:defRPr/>
             </a:lvl3pPr>
             <a:lvl4pPr marL="0" indent="0">
               <a:lnSpc>
@@ -2315,6 +2390,7 @@
                 <a:spcPts val="0"/>
               </a:spcAft>
               <a:buNone/>
+              <a:defRPr/>
             </a:lvl4pPr>
             <a:lvl5pPr marL="0" indent="0">
               <a:lnSpc>
@@ -2327,6 +2403,7 @@
                 <a:spcPts val="0"/>
               </a:spcAft>
               <a:buNone/>
+              <a:defRPr/>
             </a:lvl5pPr>
             <a:lvl6pPr marL="0" indent="0">
               <a:lnSpc>
@@ -2339,6 +2416,7 @@
                 <a:spcPts val="0"/>
               </a:spcAft>
               <a:buNone/>
+              <a:defRPr/>
             </a:lvl6pPr>
             <a:lvl7pPr marL="0" indent="0">
               <a:lnSpc>
@@ -2351,6 +2429,7 @@
                 <a:spcPts val="0"/>
               </a:spcAft>
               <a:buNone/>
+              <a:defRPr/>
             </a:lvl7pPr>
             <a:lvl8pPr marL="0" indent="0">
               <a:lnSpc>
@@ -2363,6 +2442,7 @@
                 <a:spcPts val="0"/>
               </a:spcAft>
               <a:buNone/>
+              <a:defRPr/>
             </a:lvl8pPr>
             <a:lvl9pPr marL="0" indent="0">
               <a:lnSpc>
@@ -2375,6 +2455,7 @@
                 <a:spcPts val="0"/>
               </a:spcAft>
               <a:buNone/>
+              <a:defRPr/>
             </a:lvl9pPr>
           </a:lstStyle>
           <a:p xmlns:a="http://schemas.openxmlformats.org/drawingml/2006/main"/>
@@ -2436,6 +2517,7 @@
                 <a:spcPts val="1200"/>
               </a:spcAft>
               <a:buChar char="•"/>
+              <a:defRPr/>
             </a:lvl1pPr>
             <a:lvl2pPr marL="533400" indent="-228600">
               <a:lnSpc>
@@ -2448,6 +2530,7 @@
                 <a:spcPts val="1200"/>
               </a:spcAft>
               <a:buChar char="•"/>
+              <a:defRPr/>
             </a:lvl2pPr>
             <a:lvl3pPr marL="838200" indent="-228600">
               <a:lnSpc>
@@ -2460,6 +2543,7 @@
                 <a:spcPts val="1200"/>
               </a:spcAft>
               <a:buChar char="•"/>
+              <a:defRPr/>
             </a:lvl3pPr>
             <a:lvl4pPr marL="1143000" indent="-228600">
               <a:lnSpc>
@@ -2472,6 +2556,7 @@
                 <a:spcPts val="1200"/>
               </a:spcAft>
               <a:buChar char="•"/>
+              <a:defRPr/>
             </a:lvl4pPr>
             <a:lvl5pPr marL="1447800" indent="-228600">
               <a:lnSpc>
@@ -2484,6 +2569,7 @@
                 <a:spcPts val="1200"/>
               </a:spcAft>
               <a:buChar char="•"/>
+              <a:defRPr/>
             </a:lvl5pPr>
             <a:lvl6pPr marL="1752600" indent="-228600">
               <a:lnSpc>
@@ -2496,6 +2582,7 @@
                 <a:spcPts val="1200"/>
               </a:spcAft>
               <a:buChar char="•"/>
+              <a:defRPr/>
             </a:lvl6pPr>
             <a:lvl7pPr marL="2057400" indent="-228600">
               <a:lnSpc>
@@ -2508,6 +2595,7 @@
                 <a:spcPts val="1200"/>
               </a:spcAft>
               <a:buChar char="•"/>
+              <a:defRPr/>
             </a:lvl7pPr>
             <a:lvl8pPr marL="2362200" indent="-228600">
               <a:lnSpc>
@@ -2520,6 +2608,7 @@
                 <a:spcPts val="1200"/>
               </a:spcAft>
               <a:buChar char="•"/>
+              <a:defRPr/>
             </a:lvl8pPr>
             <a:lvl9pPr marL="2667000" indent="-228600">
               <a:lnSpc>
@@ -2532,6 +2621,7 @@
                 <a:spcPts val="1200"/>
               </a:spcAft>
               <a:buChar char="•"/>
+              <a:defRPr/>
             </a:lvl9pPr>
           </a:lstStyle>
           <a:p xmlns:a="http://schemas.openxmlformats.org/drawingml/2006/main"/>
@@ -2580,12 +2670,12 @@
   </p:cSld>
   <p:clrMap bg1="lt1" tx1="dk1" bg2="lt2" tx2="dk2" accent1="accent1" accent2="accent2" accent3="accent3" accent4="accent4" accent5="accent5" accent6="accent6" hlink="hlink" folHlink="folHlink"/>
   <p:sldLayoutIdLst>
-    <p:sldLayoutId xmlns:r="http://schemas.openxmlformats.org/officeDocument/2006/relationships" id="2147483649" r:id="Rab878e4fa6254787"/>
-    <p:sldLayoutId xmlns:r="http://schemas.openxmlformats.org/officeDocument/2006/relationships" id="2147483650" r:id="R481c27c1cc5641b6"/>
-    <p:sldLayoutId xmlns:r="http://schemas.openxmlformats.org/officeDocument/2006/relationships" id="2147483651" r:id="Rfcb98f69151f4a62"/>
-    <p:sldLayoutId xmlns:r="http://schemas.openxmlformats.org/officeDocument/2006/relationships" id="2147483652" r:id="R4ba8ba0037b14e77"/>
-    <p:sldLayoutId xmlns:r="http://schemas.openxmlformats.org/officeDocument/2006/relationships" id="2147483653" r:id="R76d35e8f24b34a1f"/>
-    <p:sldLayoutId xmlns:r="http://schemas.openxmlformats.org/officeDocument/2006/relationships" id="2147483654" r:id="R58b4602a07c8440e"/>
+    <p:sldLayoutId xmlns:r="http://schemas.openxmlformats.org/officeDocument/2006/relationships" id="2147483649" r:id="R329251f0abe34c9f"/>
+    <p:sldLayoutId xmlns:r="http://schemas.openxmlformats.org/officeDocument/2006/relationships" id="2147483650" r:id="Rcf45c3aece4a4403"/>
+    <p:sldLayoutId xmlns:r="http://schemas.openxmlformats.org/officeDocument/2006/relationships" id="2147483651" r:id="R6d4192bbd09e434d"/>
+    <p:sldLayoutId xmlns:r="http://schemas.openxmlformats.org/officeDocument/2006/relationships" id="2147483652" r:id="R682f4559417c486d"/>
+    <p:sldLayoutId xmlns:r="http://schemas.openxmlformats.org/officeDocument/2006/relationships" id="2147483653" r:id="R4ee4bbbb325742e0"/>
+    <p:sldLayoutId xmlns:r="http://schemas.openxmlformats.org/officeDocument/2006/relationships" id="2147483654" r:id="R645fb1fe169e4af6"/>
   </p:sldLayoutIdLst>
   <p:txStyles>
     <p:titleStyle>
@@ -3241,6 +3331,7 @@
           </a:lstStyle>
           <a:p xmlns:a="http://schemas.openxmlformats.org/drawingml/2006/main">
             <a:pPr algn="ctr">
+              <a:buNone/>
               <a:defRPr sz="1950" b="1">
                 <a:solidFill>
                   <a:srgbClr val="FFFFFF"/>
@@ -3310,6 +3401,7 @@
           </a:lstStyle>
           <a:p xmlns:a="http://schemas.openxmlformats.org/drawingml/2006/main">
             <a:pPr algn="l">
+              <a:buNone/>
               <a:defRPr sz="1200" b="1">
                 <a:solidFill>
                   <a:srgbClr val="2C6B50"/>
@@ -3379,6 +3471,7 @@
           </a:lstStyle>
           <a:p xmlns:a="http://schemas.openxmlformats.org/drawingml/2006/main">
             <a:pPr algn="l">
+              <a:buNone/>
               <a:defRPr sz="3900" b="1">
                 <a:solidFill>
                   <a:srgbClr val="153B2E"/>
@@ -3402,6 +3495,7 @@
           </a:p>
           <a:p xmlns:a="http://schemas.openxmlformats.org/drawingml/2006/main">
             <a:pPr algn="l">
+              <a:buNone/>
               <a:defRPr sz="3900" b="1">
                 <a:solidFill>
                   <a:srgbClr val="153B2E"/>
@@ -3471,6 +3565,7 @@
           </a:lstStyle>
           <a:p xmlns:a="http://schemas.openxmlformats.org/drawingml/2006/main">
             <a:pPr algn="l">
+              <a:buNone/>
               <a:defRPr sz="1650" b="0">
                 <a:solidFill>
                   <a:srgbClr val="60756A"/>
@@ -3571,6 +3666,7 @@
           </a:lstStyle>
           <a:p xmlns:a="http://schemas.openxmlformats.org/drawingml/2006/main">
             <a:pPr algn="l">
+              <a:buNone/>
               <a:defRPr sz="1500" b="1">
                 <a:solidFill>
                   <a:srgbClr val="19332A"/>
@@ -3640,6 +3736,7 @@
           </a:lstStyle>
           <a:p xmlns:a="http://schemas.openxmlformats.org/drawingml/2006/main">
             <a:pPr algn="l">
+              <a:buNone/>
               <a:defRPr sz="1275" b="0">
                 <a:solidFill>
                   <a:srgbClr val="60756A"/>
@@ -3709,6 +3806,7 @@
           </a:lstStyle>
           <a:p xmlns:a="http://schemas.openxmlformats.org/drawingml/2006/main">
             <a:pPr algn="l">
+              <a:buNone/>
               <a:defRPr sz="975" b="0">
                 <a:solidFill>
                   <a:srgbClr val="60756A"/>
@@ -3737,7 +3835,7 @@
           <p:cNvPr id="11" name="">
             <a:extLst xmlns:a="http://schemas.openxmlformats.org/drawingml/2006/main">
               <a:ext uri="{FF2B5EF4-FFF2-40B4-BE49-F238E27FC236}">
-                <a16:creationId xmlns:a16="http://schemas.microsoft.com/office/drawing/2014/main" id="{51FB2536-45C7-4CA2-A60B-CF1B1BF726DC}"/>
+                <a16:creationId xmlns:a16="http://schemas.microsoft.com/office/drawing/2014/main" id="{9A3A747B-DD0B-463E-8C9D-2D2BDA4D3461}"/>
               </a:ext>
             </a:extLst>
           </p:cNvPr>
@@ -3747,10 +3845,10 @@
           <p:nvPr/>
         </p:nvPicPr>
         <p:blipFill>
-          <a:blip xmlns:r="http://schemas.openxmlformats.org/officeDocument/2006/relationships" xmlns:a="http://schemas.openxmlformats.org/drawingml/2006/main" r:embed="Rbde97570eb4047fe">
+          <a:blip xmlns:r="http://schemas.openxmlformats.org/officeDocument/2006/relationships" xmlns:a="http://schemas.openxmlformats.org/drawingml/2006/main" r:embed="Ra2380c324aeb45cc">
             <a:extLst>
               <a:ext uri="{96DAC541-7B7A-43D3-8B79-37D633B846F1}">
-                <asvg:svgBlip xmlns:asvg="http://schemas.microsoft.com/office/drawing/2016/SVG/main" r:embed="Rbea83d3eabaf4239"/>
+                <asvg:svgBlip xmlns:asvg="http://schemas.microsoft.com/office/drawing/2016/SVG/main" r:embed="R8d68f0115a744b3e"/>
               </a:ext>
             </a:extLst>
           </a:blip>
@@ -3872,6 +3970,7 @@
           </a:lstStyle>
           <a:p xmlns:a="http://schemas.openxmlformats.org/drawingml/2006/main">
             <a:pPr algn="l">
+              <a:buNone/>
               <a:defRPr sz="975" b="1">
                 <a:solidFill>
                   <a:srgbClr val="2C6B50"/>
@@ -3941,6 +4040,7 @@
           </a:lstStyle>
           <a:p xmlns:a="http://schemas.openxmlformats.org/drawingml/2006/main">
             <a:pPr algn="r">
+              <a:buNone/>
               <a:defRPr sz="900" b="1">
                 <a:solidFill>
                   <a:srgbClr val="60756A"/>
@@ -4010,6 +4110,7 @@
           </a:lstStyle>
           <a:p xmlns:a="http://schemas.openxmlformats.org/drawingml/2006/main">
             <a:pPr algn="l">
+              <a:buNone/>
               <a:defRPr sz="3150" b="1">
                 <a:solidFill>
                   <a:srgbClr val="153B2E"/>
@@ -4033,6 +4134,7 @@
           </a:p>
           <a:p xmlns:a="http://schemas.openxmlformats.org/drawingml/2006/main">
             <a:pPr algn="l">
+              <a:buNone/>
               <a:defRPr sz="3150" b="1">
                 <a:solidFill>
                   <a:srgbClr val="153B2E"/>
@@ -4102,6 +4204,7 @@
           </a:lstStyle>
           <a:p xmlns:a="http://schemas.openxmlformats.org/drawingml/2006/main">
             <a:pPr algn="l">
+              <a:buNone/>
               <a:defRPr sz="1500" b="0">
                 <a:solidFill>
                   <a:srgbClr val="60756A"/>
@@ -4171,6 +4274,7 @@
           </a:lstStyle>
           <a:p xmlns:a="http://schemas.openxmlformats.org/drawingml/2006/main">
             <a:pPr algn="l">
+              <a:buNone/>
               <a:defRPr sz="975" b="1">
                 <a:solidFill>
                   <a:srgbClr val="E9795B"/>
@@ -4240,6 +4344,7 @@
           </a:lstStyle>
           <a:p xmlns:a="http://schemas.openxmlformats.org/drawingml/2006/main">
             <a:pPr algn="l">
+              <a:buNone/>
               <a:defRPr sz="1425" b="1">
                 <a:solidFill>
                   <a:srgbClr val="19332A"/>
@@ -4340,6 +4445,7 @@
           </a:lstStyle>
           <a:p xmlns:a="http://schemas.openxmlformats.org/drawingml/2006/main">
             <a:pPr algn="l">
+              <a:buNone/>
               <a:defRPr sz="975" b="1">
                 <a:solidFill>
                   <a:srgbClr val="E9795B"/>
@@ -4409,6 +4515,7 @@
           </a:lstStyle>
           <a:p xmlns:a="http://schemas.openxmlformats.org/drawingml/2006/main">
             <a:pPr algn="l">
+              <a:buNone/>
               <a:defRPr sz="1425" b="1">
                 <a:solidFill>
                   <a:srgbClr val="19332A"/>
@@ -4509,6 +4616,7 @@
           </a:lstStyle>
           <a:p xmlns:a="http://schemas.openxmlformats.org/drawingml/2006/main">
             <a:pPr algn="l">
+              <a:buNone/>
               <a:defRPr sz="975" b="1">
                 <a:solidFill>
                   <a:srgbClr val="E9795B"/>
@@ -4578,6 +4686,7 @@
           </a:lstStyle>
           <a:p xmlns:a="http://schemas.openxmlformats.org/drawingml/2006/main">
             <a:pPr algn="l">
+              <a:buNone/>
               <a:defRPr sz="1425" b="1">
                 <a:solidFill>
                   <a:srgbClr val="19332A"/>
@@ -4637,7 +4746,7 @@
           <p:cNvPr id="15" name="">
             <a:extLst xmlns:a="http://schemas.openxmlformats.org/drawingml/2006/main">
               <a:ext uri="{FF2B5EF4-FFF2-40B4-BE49-F238E27FC236}">
-                <a16:creationId xmlns:a16="http://schemas.microsoft.com/office/drawing/2014/main" id="{AD1C041E-E415-4924-BA67-E2CA3ED365E4}"/>
+                <a16:creationId xmlns:a16="http://schemas.microsoft.com/office/drawing/2014/main" id="{BFF99DD9-54D6-496A-9A23-291A5971B55A}"/>
               </a:ext>
             </a:extLst>
           </p:cNvPr>
@@ -4647,7 +4756,7 @@
           <p:nvPr/>
         </p:nvPicPr>
         <p:blipFill>
-          <a:blip xmlns:r="http://schemas.openxmlformats.org/officeDocument/2006/relationships" xmlns:a="http://schemas.openxmlformats.org/drawingml/2006/main" r:embed="R2e4a74cde86949e4"/>
+          <a:blip xmlns:r="http://schemas.openxmlformats.org/officeDocument/2006/relationships" xmlns:a="http://schemas.openxmlformats.org/drawingml/2006/main" r:embed="R9a787bdd5a574ed4"/>
           <a:srcRect xmlns:a="http://schemas.openxmlformats.org/drawingml/2006/main" l="6818" t="0" r="6818" b="0"/>
           <a:stretch xmlns:a="http://schemas.openxmlformats.org/drawingml/2006/main">
             <a:fillRect l="0" t="0" r="0" b="0"/>
@@ -4711,6 +4820,7 @@
           </a:lstStyle>
           <a:p xmlns:a="http://schemas.openxmlformats.org/drawingml/2006/main">
             <a:pPr algn="l">
+              <a:buNone/>
               <a:defRPr sz="1050" b="0">
                 <a:solidFill>
                   <a:srgbClr val="60756A"/>
@@ -4840,6 +4950,7 @@
           </a:lstStyle>
           <a:p xmlns:a="http://schemas.openxmlformats.org/drawingml/2006/main">
             <a:pPr algn="l">
+              <a:buNone/>
               <a:defRPr sz="975" b="1">
                 <a:solidFill>
                   <a:srgbClr val="2C6B50"/>
@@ -4909,6 +5020,7 @@
           </a:lstStyle>
           <a:p xmlns:a="http://schemas.openxmlformats.org/drawingml/2006/main">
             <a:pPr algn="r">
+              <a:buNone/>
               <a:defRPr sz="900" b="1">
                 <a:solidFill>
                   <a:srgbClr val="60756A"/>
@@ -4978,6 +5090,7 @@
           </a:lstStyle>
           <a:p xmlns:a="http://schemas.openxmlformats.org/drawingml/2006/main">
             <a:pPr algn="l">
+              <a:buNone/>
               <a:defRPr sz="3150" b="1">
                 <a:solidFill>
                   <a:srgbClr val="153B2E"/>
@@ -5047,6 +5160,7 @@
           </a:lstStyle>
           <a:p xmlns:a="http://schemas.openxmlformats.org/drawingml/2006/main">
             <a:pPr algn="l">
+              <a:buNone/>
               <a:defRPr sz="1500" b="0">
                 <a:solidFill>
                   <a:srgbClr val="60756A"/>
@@ -5075,7 +5189,7 @@
           <p:cNvPr id="6" name="">
             <a:extLst xmlns:a="http://schemas.openxmlformats.org/drawingml/2006/main">
               <a:ext uri="{FF2B5EF4-FFF2-40B4-BE49-F238E27FC236}">
-                <a16:creationId xmlns:a16="http://schemas.microsoft.com/office/drawing/2014/main" id="{D0533D6D-0A37-4203-8758-FF3830EA2A08}"/>
+                <a16:creationId xmlns:a16="http://schemas.microsoft.com/office/drawing/2014/main" id="{F5D45EA9-72BB-47C3-BB91-B2CCE36FA26A}"/>
               </a:ext>
             </a:extLst>
           </p:cNvPr>
@@ -5085,7 +5199,7 @@
           <p:nvPr/>
         </p:nvPicPr>
         <p:blipFill>
-          <a:blip xmlns:r="http://schemas.openxmlformats.org/officeDocument/2006/relationships" xmlns:a="http://schemas.openxmlformats.org/drawingml/2006/main" r:embed="Rcb6cf0eb8c6b4c31"/>
+          <a:blip xmlns:r="http://schemas.openxmlformats.org/officeDocument/2006/relationships" xmlns:a="http://schemas.openxmlformats.org/drawingml/2006/main" r:embed="R6d69afa18879473d"/>
           <a:srcRect xmlns:a="http://schemas.openxmlformats.org/drawingml/2006/main" l="0" t="20551" r="0" b="20551"/>
           <a:stretch xmlns:a="http://schemas.openxmlformats.org/drawingml/2006/main">
             <a:fillRect l="0" t="0" r="0" b="0"/>
@@ -5180,6 +5294,7 @@
           </a:lstStyle>
           <a:p xmlns:a="http://schemas.openxmlformats.org/drawingml/2006/main">
             <a:pPr algn="l">
+              <a:buNone/>
               <a:defRPr sz="2025" b="1">
                 <a:solidFill>
                   <a:srgbClr val="E9795B"/>
@@ -5249,6 +5364,7 @@
           </a:lstStyle>
           <a:p xmlns:a="http://schemas.openxmlformats.org/drawingml/2006/main">
             <a:pPr algn="l">
+              <a:buNone/>
               <a:defRPr sz="975" b="1">
                 <a:solidFill>
                   <a:srgbClr val="2C6B50"/>
@@ -5318,6 +5434,7 @@
           </a:lstStyle>
           <a:p xmlns:a="http://schemas.openxmlformats.org/drawingml/2006/main">
             <a:pPr algn="l">
+              <a:buNone/>
               <a:defRPr sz="1275" b="0">
                 <a:solidFill>
                   <a:srgbClr val="19332A"/>
@@ -5387,6 +5504,7 @@
           </a:lstStyle>
           <a:p xmlns:a="http://schemas.openxmlformats.org/drawingml/2006/main">
             <a:pPr algn="l">
+              <a:buNone/>
               <a:defRPr sz="2025" b="1">
                 <a:solidFill>
                   <a:srgbClr val="E9795B"/>
@@ -5456,6 +5574,7 @@
           </a:lstStyle>
           <a:p xmlns:a="http://schemas.openxmlformats.org/drawingml/2006/main">
             <a:pPr algn="l">
+              <a:buNone/>
               <a:defRPr sz="975" b="1">
                 <a:solidFill>
                   <a:srgbClr val="2C6B50"/>
@@ -5525,6 +5644,7 @@
           </a:lstStyle>
           <a:p xmlns:a="http://schemas.openxmlformats.org/drawingml/2006/main">
             <a:pPr algn="l">
+              <a:buNone/>
               <a:defRPr sz="1275" b="0">
                 <a:solidFill>
                   <a:srgbClr val="19332A"/>
@@ -5594,6 +5714,7 @@
           </a:lstStyle>
           <a:p xmlns:a="http://schemas.openxmlformats.org/drawingml/2006/main">
             <a:pPr algn="l">
+              <a:buNone/>
               <a:defRPr sz="2025" b="1">
                 <a:solidFill>
                   <a:srgbClr val="E9795B"/>
@@ -5663,6 +5784,7 @@
           </a:lstStyle>
           <a:p xmlns:a="http://schemas.openxmlformats.org/drawingml/2006/main">
             <a:pPr algn="l">
+              <a:buNone/>
               <a:defRPr sz="975" b="1">
                 <a:solidFill>
                   <a:srgbClr val="2C6B50"/>
@@ -5732,6 +5854,7 @@
           </a:lstStyle>
           <a:p xmlns:a="http://schemas.openxmlformats.org/drawingml/2006/main">
             <a:pPr algn="l">
+              <a:buNone/>
               <a:defRPr sz="1275" b="0">
                 <a:solidFill>
                   <a:srgbClr val="19332A"/>
@@ -5801,6 +5924,7 @@
           </a:lstStyle>
           <a:p xmlns:a="http://schemas.openxmlformats.org/drawingml/2006/main">
             <a:pPr algn="l">
+              <a:buNone/>
               <a:defRPr sz="2025" b="1">
                 <a:solidFill>
                   <a:srgbClr val="E9795B"/>
@@ -5870,6 +5994,7 @@
           </a:lstStyle>
           <a:p xmlns:a="http://schemas.openxmlformats.org/drawingml/2006/main">
             <a:pPr algn="l">
+              <a:buNone/>
               <a:defRPr sz="975" b="1">
                 <a:solidFill>
                   <a:srgbClr val="2C6B50"/>
@@ -5939,6 +6064,7 @@
           </a:lstStyle>
           <a:p xmlns:a="http://schemas.openxmlformats.org/drawingml/2006/main">
             <a:pPr algn="l">
+              <a:buNone/>
               <a:defRPr sz="1275" b="0">
                 <a:solidFill>
                   <a:srgbClr val="19332A"/>
@@ -6068,6 +6194,7 @@
           </a:lstStyle>
           <a:p xmlns:a="http://schemas.openxmlformats.org/drawingml/2006/main">
             <a:pPr algn="l">
+              <a:buNone/>
               <a:defRPr sz="975" b="1">
                 <a:solidFill>
                   <a:srgbClr val="2C6B50"/>
@@ -6137,6 +6264,7 @@
           </a:lstStyle>
           <a:p xmlns:a="http://schemas.openxmlformats.org/drawingml/2006/main">
             <a:pPr algn="r">
+              <a:buNone/>
               <a:defRPr sz="900" b="1">
                 <a:solidFill>
                   <a:srgbClr val="60756A"/>
@@ -6206,6 +6334,7 @@
           </a:lstStyle>
           <a:p xmlns:a="http://schemas.openxmlformats.org/drawingml/2006/main">
             <a:pPr algn="l">
+              <a:buNone/>
               <a:defRPr sz="3000" b="1">
                 <a:solidFill>
                   <a:srgbClr val="153B2E"/>
@@ -6275,6 +6404,7 @@
           </a:lstStyle>
           <a:p xmlns:a="http://schemas.openxmlformats.org/drawingml/2006/main">
             <a:pPr algn="l">
+              <a:buNone/>
               <a:defRPr sz="1500" b="0">
                 <a:solidFill>
                   <a:srgbClr val="60756A"/>
@@ -6344,6 +6474,7 @@
           </a:lstStyle>
           <a:p xmlns:a="http://schemas.openxmlformats.org/drawingml/2006/main">
             <a:pPr algn="l">
+              <a:buNone/>
               <a:defRPr sz="2025" b="1">
                 <a:solidFill>
                   <a:srgbClr val="E9795B"/>
@@ -6413,6 +6544,7 @@
           </a:lstStyle>
           <a:p xmlns:a="http://schemas.openxmlformats.org/drawingml/2006/main">
             <a:pPr algn="l">
+              <a:buNone/>
               <a:defRPr sz="975" b="1">
                 <a:solidFill>
                   <a:srgbClr val="2C6B50"/>
@@ -6482,6 +6614,7 @@
           </a:lstStyle>
           <a:p xmlns:a="http://schemas.openxmlformats.org/drawingml/2006/main">
             <a:pPr algn="l">
+              <a:buNone/>
               <a:defRPr sz="1875" b="1">
                 <a:solidFill>
                   <a:srgbClr val="153B2E"/>
@@ -6551,6 +6684,7 @@
           </a:lstStyle>
           <a:p xmlns:a="http://schemas.openxmlformats.org/drawingml/2006/main">
             <a:pPr algn="l">
+              <a:buNone/>
               <a:defRPr sz="1350" b="0">
                 <a:solidFill>
                   <a:srgbClr val="60756A"/>
@@ -6651,6 +6785,7 @@
           </a:lstStyle>
           <a:p xmlns:a="http://schemas.openxmlformats.org/drawingml/2006/main">
             <a:pPr algn="l">
+              <a:buNone/>
               <a:defRPr sz="2025" b="1">
                 <a:solidFill>
                   <a:srgbClr val="E9795B"/>
@@ -6720,6 +6855,7 @@
           </a:lstStyle>
           <a:p xmlns:a="http://schemas.openxmlformats.org/drawingml/2006/main">
             <a:pPr algn="l">
+              <a:buNone/>
               <a:defRPr sz="975" b="1">
                 <a:solidFill>
                   <a:srgbClr val="2C6B50"/>
@@ -6789,6 +6925,7 @@
           </a:lstStyle>
           <a:p xmlns:a="http://schemas.openxmlformats.org/drawingml/2006/main">
             <a:pPr algn="l">
+              <a:buNone/>
               <a:defRPr sz="1875" b="1">
                 <a:solidFill>
                   <a:srgbClr val="153B2E"/>
@@ -6858,6 +6995,7 @@
           </a:lstStyle>
           <a:p xmlns:a="http://schemas.openxmlformats.org/drawingml/2006/main">
             <a:pPr algn="l">
+              <a:buNone/>
               <a:defRPr sz="1350" b="0">
                 <a:solidFill>
                   <a:srgbClr val="60756A"/>
@@ -6958,6 +7096,7 @@
           </a:lstStyle>
           <a:p xmlns:a="http://schemas.openxmlformats.org/drawingml/2006/main">
             <a:pPr algn="l">
+              <a:buNone/>
               <a:defRPr sz="2025" b="1">
                 <a:solidFill>
                   <a:srgbClr val="E9795B"/>
@@ -7027,6 +7166,7 @@
           </a:lstStyle>
           <a:p xmlns:a="http://schemas.openxmlformats.org/drawingml/2006/main">
             <a:pPr algn="l">
+              <a:buNone/>
               <a:defRPr sz="975" b="1">
                 <a:solidFill>
                   <a:srgbClr val="2C6B50"/>
@@ -7096,6 +7236,7 @@
           </a:lstStyle>
           <a:p xmlns:a="http://schemas.openxmlformats.org/drawingml/2006/main">
             <a:pPr algn="l">
+              <a:buNone/>
               <a:defRPr sz="1875" b="1">
                 <a:solidFill>
                   <a:srgbClr val="153B2E"/>
@@ -7165,6 +7306,7 @@
           </a:lstStyle>
           <a:p xmlns:a="http://schemas.openxmlformats.org/drawingml/2006/main">
             <a:pPr algn="l">
+              <a:buNone/>
               <a:defRPr sz="1350" b="0">
                 <a:solidFill>
                   <a:srgbClr val="60756A"/>
@@ -7265,6 +7407,7 @@
           </a:lstStyle>
           <a:p xmlns:a="http://schemas.openxmlformats.org/drawingml/2006/main">
             <a:pPr algn="l">
+              <a:buNone/>
               <a:defRPr sz="975" b="1">
                 <a:solidFill>
                   <a:srgbClr val="E9795B"/>
@@ -7334,6 +7477,7 @@
           </a:lstStyle>
           <a:p xmlns:a="http://schemas.openxmlformats.org/drawingml/2006/main">
             <a:pPr algn="l">
+              <a:buNone/>
               <a:defRPr sz="1425" b="1">
                 <a:solidFill>
                   <a:srgbClr val="19332A"/>
@@ -7463,6 +7607,7 @@
           </a:lstStyle>
           <a:p xmlns:a="http://schemas.openxmlformats.org/drawingml/2006/main">
             <a:pPr algn="l">
+              <a:buNone/>
               <a:defRPr sz="975" b="1">
                 <a:solidFill>
                   <a:srgbClr val="2C6B50"/>
@@ -7532,6 +7677,7 @@
           </a:lstStyle>
           <a:p xmlns:a="http://schemas.openxmlformats.org/drawingml/2006/main">
             <a:pPr algn="r">
+              <a:buNone/>
               <a:defRPr sz="900" b="1">
                 <a:solidFill>
                   <a:srgbClr val="60756A"/>
@@ -7601,6 +7747,7 @@
           </a:lstStyle>
           <a:p xmlns:a="http://schemas.openxmlformats.org/drawingml/2006/main">
             <a:pPr algn="l">
+              <a:buNone/>
               <a:defRPr sz="3000" b="1">
                 <a:solidFill>
                   <a:srgbClr val="153B2E"/>
@@ -7670,6 +7817,7 @@
           </a:lstStyle>
           <a:p xmlns:a="http://schemas.openxmlformats.org/drawingml/2006/main">
             <a:pPr algn="l">
+              <a:buNone/>
               <a:defRPr sz="1500" b="0">
                 <a:solidFill>
                   <a:srgbClr val="60756A"/>
@@ -7770,6 +7918,7 @@
           </a:lstStyle>
           <a:p xmlns:a="http://schemas.openxmlformats.org/drawingml/2006/main">
             <a:pPr algn="l">
+              <a:buNone/>
               <a:defRPr sz="975" b="1">
                 <a:solidFill>
                   <a:srgbClr val="2C6B50"/>
@@ -7839,6 +7988,7 @@
           </a:lstStyle>
           <a:p xmlns:a="http://schemas.openxmlformats.org/drawingml/2006/main">
             <a:pPr algn="l">
+              <a:buNone/>
               <a:defRPr sz="1575" b="1">
                 <a:solidFill>
                   <a:srgbClr val="153B2E"/>
@@ -7908,6 +8058,7 @@
           </a:lstStyle>
           <a:p xmlns:a="http://schemas.openxmlformats.org/drawingml/2006/main">
             <a:pPr algn="l">
+              <a:buNone/>
               <a:defRPr sz="1200" b="0">
                 <a:solidFill>
                   <a:srgbClr val="60756A"/>
@@ -8008,6 +8159,7 @@
           </a:lstStyle>
           <a:p xmlns:a="http://schemas.openxmlformats.org/drawingml/2006/main">
             <a:pPr algn="l">
+              <a:buNone/>
               <a:defRPr sz="975" b="1">
                 <a:solidFill>
                   <a:srgbClr val="E9795B"/>
@@ -8077,6 +8229,7 @@
           </a:lstStyle>
           <a:p xmlns:a="http://schemas.openxmlformats.org/drawingml/2006/main">
             <a:pPr algn="l">
+              <a:buNone/>
               <a:defRPr sz="1575" b="1">
                 <a:solidFill>
                   <a:srgbClr val="153B2E"/>
@@ -8146,6 +8299,7 @@
           </a:lstStyle>
           <a:p xmlns:a="http://schemas.openxmlformats.org/drawingml/2006/main">
             <a:pPr algn="l">
+              <a:buNone/>
               <a:defRPr sz="1200" b="0">
                 <a:solidFill>
                   <a:srgbClr val="60756A"/>
@@ -8246,6 +8400,7 @@
           </a:lstStyle>
           <a:p xmlns:a="http://schemas.openxmlformats.org/drawingml/2006/main">
             <a:pPr algn="l">
+              <a:buNone/>
               <a:defRPr sz="975" b="1">
                 <a:solidFill>
                   <a:srgbClr val="2C6B50"/>
@@ -8315,6 +8470,7 @@
           </a:lstStyle>
           <a:p xmlns:a="http://schemas.openxmlformats.org/drawingml/2006/main">
             <a:pPr algn="l">
+              <a:buNone/>
               <a:defRPr sz="1575" b="1">
                 <a:solidFill>
                   <a:srgbClr val="153B2E"/>
@@ -8384,6 +8540,7 @@
           </a:lstStyle>
           <a:p xmlns:a="http://schemas.openxmlformats.org/drawingml/2006/main">
             <a:pPr algn="l">
+              <a:buNone/>
               <a:defRPr sz="1200" b="0">
                 <a:solidFill>
                   <a:srgbClr val="60756A"/>
@@ -8484,6 +8641,7 @@
           </a:lstStyle>
           <a:p xmlns:a="http://schemas.openxmlformats.org/drawingml/2006/main">
             <a:pPr algn="l">
+              <a:buNone/>
               <a:defRPr sz="975" b="1">
                 <a:solidFill>
                   <a:srgbClr val="E9795B"/>
@@ -8553,6 +8711,7 @@
           </a:lstStyle>
           <a:p xmlns:a="http://schemas.openxmlformats.org/drawingml/2006/main">
             <a:pPr algn="l">
+              <a:buNone/>
               <a:defRPr sz="1275" b="1">
                 <a:solidFill>
                   <a:srgbClr val="19332A"/>
@@ -8592,7 +8751,7 @@
     <p:bg>
       <p:bgPr>
         <a:solidFill xmlns:a="http://schemas.openxmlformats.org/drawingml/2006/main">
-          <a:srgbClr val="153B2E"/>
+          <a:srgbClr val="F5F7F2"/>
         </a:solidFill>
       </p:bgPr>
     </p:bg>
@@ -8628,7 +8787,7 @@
             <a:avLst/>
           </a:prstGeom>
           <a:solidFill xmlns:a="http://schemas.openxmlformats.org/drawingml/2006/main">
-            <a:srgbClr val="E9795B"/>
+            <a:srgbClr val="2C6B50"/>
           </a:solidFill>
           <a:ln xmlns:a="http://schemas.openxmlformats.org/drawingml/2006/main" w="0">
             <a:noFill/>
@@ -8672,7 +8831,7 @@
             <a:defPPr algn="l">
               <a:defRPr sz="975" b="1">
                 <a:solidFill>
-                  <a:srgbClr val="A8C9B0"/>
+                  <a:srgbClr val="2C6B50"/>
                 </a:solidFill>
                 <a:latin typeface="Calibri"/>
                 <a:ea typeface="Calibri"/>
@@ -8682,6 +8841,7 @@
           </a:lstStyle>
           <a:p xmlns:a="http://schemas.openxmlformats.org/drawingml/2006/main">
             <a:pPr algn="l">
+              <a:buNone/>
               <a:defRPr sz="975" b="1">
                 <a:solidFill>
                   <a:srgbClr val="A8C9B0"/>
@@ -8694,7 +8854,7 @@
             <a:r>
               <a:rPr sz="975" b="1">
                 <a:solidFill>
-                  <a:srgbClr val="A8C9B0"/>
+                  <a:srgbClr val="2C6B50"/>
                 </a:solidFill>
                 <a:latin typeface="Calibri"/>
                 <a:ea typeface="Calibri"/>
@@ -8741,7 +8901,7 @@
             <a:defPPr algn="l">
               <a:defRPr sz="3150" b="1">
                 <a:solidFill>
-                  <a:srgbClr val="FFFFFF"/>
+                  <a:srgbClr val="153B2E"/>
                 </a:solidFill>
                 <a:latin typeface="Calibri"/>
                 <a:ea typeface="Calibri"/>
@@ -8751,6 +8911,7 @@
           </a:lstStyle>
           <a:p xmlns:a="http://schemas.openxmlformats.org/drawingml/2006/main">
             <a:pPr algn="l">
+              <a:buNone/>
               <a:defRPr sz="3150" b="1">
                 <a:solidFill>
                   <a:srgbClr val="FFFFFF"/>
@@ -8763,7 +8924,7 @@
             <a:r>
               <a:rPr sz="3150" b="1">
                 <a:solidFill>
-                  <a:srgbClr val="FFFFFF"/>
+                  <a:srgbClr val="153B2E"/>
                 </a:solidFill>
                 <a:latin typeface="Calibri"/>
                 <a:ea typeface="Calibri"/>
@@ -8774,6 +8935,7 @@
           </a:p>
           <a:p xmlns:a="http://schemas.openxmlformats.org/drawingml/2006/main">
             <a:pPr algn="l">
+              <a:buNone/>
               <a:defRPr sz="3150" b="1">
                 <a:solidFill>
                   <a:srgbClr val="FFFFFF"/>
@@ -8786,7 +8948,7 @@
             <a:r>
               <a:rPr sz="3150" b="1">
                 <a:solidFill>
-                  <a:srgbClr val="FFFFFF"/>
+                  <a:srgbClr val="153B2E"/>
                 </a:solidFill>
                 <a:latin typeface="Calibri"/>
                 <a:ea typeface="Calibri"/>
@@ -8833,7 +8995,7 @@
             <a:defPPr algn="l">
               <a:defRPr sz="1500" b="0">
                 <a:solidFill>
-                  <a:srgbClr val="D5E5D8"/>
+                  <a:srgbClr val="60756A"/>
                 </a:solidFill>
                 <a:latin typeface="Calibri"/>
                 <a:ea typeface="Calibri"/>
@@ -8843,6 +9005,7 @@
           </a:lstStyle>
           <a:p xmlns:a="http://schemas.openxmlformats.org/drawingml/2006/main">
             <a:pPr algn="l">
+              <a:buNone/>
               <a:defRPr sz="1500" b="0">
                 <a:solidFill>
                   <a:srgbClr val="D5E5D8"/>
@@ -8855,7 +9018,7 @@
             <a:r>
               <a:rPr sz="1500" b="0">
                 <a:solidFill>
-                  <a:srgbClr val="D5E5D8"/>
+                  <a:srgbClr val="60756A"/>
                 </a:solidFill>
                 <a:latin typeface="Calibri"/>
                 <a:ea typeface="Calibri"/>
@@ -8912,6 +9075,7 @@
           </a:lstStyle>
           <a:p xmlns:a="http://schemas.openxmlformats.org/drawingml/2006/main">
             <a:pPr algn="l">
+              <a:buNone/>
               <a:defRPr sz="1350" b="1">
                 <a:solidFill>
                   <a:srgbClr val="E9795B"/>
@@ -8971,7 +9135,7 @@
             <a:defPPr algn="l">
               <a:defRPr sz="975" b="1">
                 <a:solidFill>
-                  <a:srgbClr val="A8C9B0"/>
+                  <a:srgbClr val="2C6B50"/>
                 </a:solidFill>
                 <a:latin typeface="Calibri"/>
                 <a:ea typeface="Calibri"/>
@@ -8981,6 +9145,7 @@
           </a:lstStyle>
           <a:p xmlns:a="http://schemas.openxmlformats.org/drawingml/2006/main">
             <a:pPr algn="l">
+              <a:buNone/>
               <a:defRPr sz="975" b="1">
                 <a:solidFill>
                   <a:srgbClr val="A8C9B0"/>
@@ -8993,7 +9158,7 @@
             <a:r>
               <a:rPr sz="975" b="1">
                 <a:solidFill>
-                  <a:srgbClr val="A8C9B0"/>
+                  <a:srgbClr val="2C6B50"/>
                 </a:solidFill>
                 <a:latin typeface="Calibri"/>
                 <a:ea typeface="Calibri"/>
@@ -9040,7 +9205,7 @@
             <a:defPPr algn="l">
               <a:defRPr sz="1350" b="0">
                 <a:solidFill>
-                  <a:srgbClr val="FFFFFF"/>
+                  <a:srgbClr val="19332A"/>
                 </a:solidFill>
                 <a:latin typeface="Calibri"/>
                 <a:ea typeface="Calibri"/>
@@ -9050,6 +9215,7 @@
           </a:lstStyle>
           <a:p xmlns:a="http://schemas.openxmlformats.org/drawingml/2006/main">
             <a:pPr algn="l">
+              <a:buNone/>
               <a:defRPr sz="1350" b="0">
                 <a:solidFill>
                   <a:srgbClr val="FFFFFF"/>
@@ -9062,7 +9228,7 @@
             <a:r>
               <a:rPr sz="1350" b="0">
                 <a:solidFill>
-                  <a:srgbClr val="FFFFFF"/>
+                  <a:srgbClr val="19332A"/>
                 </a:solidFill>
                 <a:latin typeface="Calibri"/>
                 <a:ea typeface="Calibri"/>
@@ -9119,6 +9285,7 @@
           </a:lstStyle>
           <a:p xmlns:a="http://schemas.openxmlformats.org/drawingml/2006/main">
             <a:pPr algn="l">
+              <a:buNone/>
               <a:defRPr sz="1350" b="1">
                 <a:solidFill>
                   <a:srgbClr val="E9795B"/>
@@ -9178,7 +9345,7 @@
             <a:defPPr algn="l">
               <a:defRPr sz="975" b="1">
                 <a:solidFill>
-                  <a:srgbClr val="A8C9B0"/>
+                  <a:srgbClr val="2C6B50"/>
                 </a:solidFill>
                 <a:latin typeface="Calibri"/>
                 <a:ea typeface="Calibri"/>
@@ -9188,6 +9355,7 @@
           </a:lstStyle>
           <a:p xmlns:a="http://schemas.openxmlformats.org/drawingml/2006/main">
             <a:pPr algn="l">
+              <a:buNone/>
               <a:defRPr sz="975" b="1">
                 <a:solidFill>
                   <a:srgbClr val="A8C9B0"/>
@@ -9200,7 +9368,7 @@
             <a:r>
               <a:rPr sz="975" b="1">
                 <a:solidFill>
-                  <a:srgbClr val="A8C9B0"/>
+                  <a:srgbClr val="2C6B50"/>
                 </a:solidFill>
                 <a:latin typeface="Calibri"/>
                 <a:ea typeface="Calibri"/>
@@ -9247,7 +9415,7 @@
             <a:defPPr algn="l">
               <a:defRPr sz="1350" b="0">
                 <a:solidFill>
-                  <a:srgbClr val="FFFFFF"/>
+                  <a:srgbClr val="19332A"/>
                 </a:solidFill>
                 <a:latin typeface="Calibri"/>
                 <a:ea typeface="Calibri"/>
@@ -9257,6 +9425,7 @@
           </a:lstStyle>
           <a:p xmlns:a="http://schemas.openxmlformats.org/drawingml/2006/main">
             <a:pPr algn="l">
+              <a:buNone/>
               <a:defRPr sz="1350" b="0">
                 <a:solidFill>
                   <a:srgbClr val="FFFFFF"/>
@@ -9269,7 +9438,7 @@
             <a:r>
               <a:rPr sz="1350" b="0">
                 <a:solidFill>
-                  <a:srgbClr val="FFFFFF"/>
+                  <a:srgbClr val="19332A"/>
                 </a:solidFill>
                 <a:latin typeface="Calibri"/>
                 <a:ea typeface="Calibri"/>
@@ -9326,6 +9495,7 @@
           </a:lstStyle>
           <a:p xmlns:a="http://schemas.openxmlformats.org/drawingml/2006/main">
             <a:pPr algn="l">
+              <a:buNone/>
               <a:defRPr sz="1350" b="1">
                 <a:solidFill>
                   <a:srgbClr val="E9795B"/>
@@ -9385,7 +9555,7 @@
             <a:defPPr algn="l">
               <a:defRPr sz="975" b="1">
                 <a:solidFill>
-                  <a:srgbClr val="A8C9B0"/>
+                  <a:srgbClr val="2C6B50"/>
                 </a:solidFill>
                 <a:latin typeface="Calibri"/>
                 <a:ea typeface="Calibri"/>
@@ -9395,6 +9565,7 @@
           </a:lstStyle>
           <a:p xmlns:a="http://schemas.openxmlformats.org/drawingml/2006/main">
             <a:pPr algn="l">
+              <a:buNone/>
               <a:defRPr sz="975" b="1">
                 <a:solidFill>
                   <a:srgbClr val="A8C9B0"/>
@@ -9407,7 +9578,7 @@
             <a:r>
               <a:rPr sz="975" b="1">
                 <a:solidFill>
-                  <a:srgbClr val="A8C9B0"/>
+                  <a:srgbClr val="2C6B50"/>
                 </a:solidFill>
                 <a:latin typeface="Calibri"/>
                 <a:ea typeface="Calibri"/>
@@ -9454,7 +9625,7 @@
             <a:defPPr algn="l">
               <a:defRPr sz="1350" b="0">
                 <a:solidFill>
-                  <a:srgbClr val="FFFFFF"/>
+                  <a:srgbClr val="19332A"/>
                 </a:solidFill>
                 <a:latin typeface="Calibri"/>
                 <a:ea typeface="Calibri"/>
@@ -9464,6 +9635,7 @@
           </a:lstStyle>
           <a:p xmlns:a="http://schemas.openxmlformats.org/drawingml/2006/main">
             <a:pPr algn="l">
+              <a:buNone/>
               <a:defRPr sz="1350" b="0">
                 <a:solidFill>
                   <a:srgbClr val="FFFFFF"/>
@@ -9476,7 +9648,7 @@
             <a:r>
               <a:rPr sz="1350" b="0">
                 <a:solidFill>
-                  <a:srgbClr val="FFFFFF"/>
+                  <a:srgbClr val="19332A"/>
                 </a:solidFill>
                 <a:latin typeface="Calibri"/>
                 <a:ea typeface="Calibri"/>
@@ -9512,7 +9684,7 @@
             </a:avLst>
           </a:prstGeom>
           <a:solidFill xmlns:a="http://schemas.openxmlformats.org/drawingml/2006/main">
-            <a:srgbClr val="214C3D"/>
+            <a:srgbClr val="E9F0E9"/>
           </a:solidFill>
           <a:ln xmlns:a="http://schemas.openxmlformats.org/drawingml/2006/main" w="0">
             <a:noFill/>
@@ -9537,7 +9709,7 @@
         <p:spPr>
           <a:xfrm xmlns:a="http://schemas.openxmlformats.org/drawingml/2006/main">
             <a:off x="7277100" y="1752600"/>
-            <a:ext cx="3619500" cy="523875"/>
+            <a:ext cx="3619500" cy="266700"/>
           </a:xfrm>
           <a:prstGeom xmlns:a="http://schemas.openxmlformats.org/drawingml/2006/main" prst="rect">
             <a:avLst/>
@@ -9556,7 +9728,7 @@
             <a:defPPr algn="l">
               <a:defRPr sz="1050" b="1">
                 <a:solidFill>
-                  <a:srgbClr val="A8C9B0"/>
+                  <a:srgbClr val="2C6B50"/>
                 </a:solidFill>
                 <a:latin typeface="Calibri"/>
                 <a:ea typeface="Calibri"/>
@@ -9566,6 +9738,7 @@
           </a:lstStyle>
           <a:p xmlns:a="http://schemas.openxmlformats.org/drawingml/2006/main">
             <a:pPr algn="l">
+              <a:buNone/>
               <a:defRPr sz="1050" b="1">
                 <a:solidFill>
                   <a:srgbClr val="A8C9B0"/>
@@ -9578,36 +9751,13 @@
             <a:r>
               <a:rPr sz="1050" b="1">
                 <a:solidFill>
-                  <a:srgbClr val="A8C9B0"/>
+                  <a:srgbClr val="2C6B50"/>
                 </a:solidFill>
                 <a:latin typeface="Calibri"/>
                 <a:ea typeface="Calibri"/>
                 <a:cs typeface="Calibri"/>
               </a:rPr>
-              <a:t>A PRACTICAL</a:t>
-            </a:r>
-          </a:p>
-          <a:p xmlns:a="http://schemas.openxmlformats.org/drawingml/2006/main">
-            <a:pPr algn="l">
-              <a:defRPr sz="1050" b="1">
-                <a:solidFill>
-                  <a:srgbClr val="A8C9B0"/>
-                </a:solidFill>
-                <a:latin typeface="Calibri"/>
-                <a:ea typeface="Calibri"/>
-                <a:cs typeface="Calibri"/>
-              </a:defRPr>
-            </a:pPr>
-            <a:r>
-              <a:rPr sz="1050" b="1">
-                <a:solidFill>
-                  <a:srgbClr val="A8C9B0"/>
-                </a:solidFill>
-                <a:latin typeface="Calibri"/>
-                <a:ea typeface="Calibri"/>
-                <a:cs typeface="Calibri"/>
-              </a:rPr>
-              <a:t>OPPORTUNITY</a:t>
+              <a:t>POSSIBLE PATHWAY</a:t>
             </a:r>
           </a:p>
         </p:txBody>
@@ -9635,7 +9785,7 @@
             <a:avLst/>
           </a:prstGeom>
           <a:solidFill xmlns:a="http://schemas.openxmlformats.org/drawingml/2006/main">
-            <a:srgbClr val="436A59"/>
+            <a:srgbClr val="C8D6CC"/>
           </a:solidFill>
           <a:ln xmlns:a="http://schemas.openxmlformats.org/drawingml/2006/main" w="0">
             <a:noFill/>
@@ -9689,6 +9839,7 @@
           </a:lstStyle>
           <a:p xmlns:a="http://schemas.openxmlformats.org/drawingml/2006/main">
             <a:pPr algn="l">
+              <a:buNone/>
               <a:defRPr sz="1275" b="1">
                 <a:solidFill>
                   <a:srgbClr val="E9795B"/>
@@ -9748,7 +9899,7 @@
             <a:defPPr algn="l">
               <a:defRPr sz="975" b="1">
                 <a:solidFill>
-                  <a:srgbClr val="A8C9B0"/>
+                  <a:srgbClr val="2C6B50"/>
                 </a:solidFill>
                 <a:latin typeface="Calibri"/>
                 <a:ea typeface="Calibri"/>
@@ -9758,6 +9909,7 @@
           </a:lstStyle>
           <a:p xmlns:a="http://schemas.openxmlformats.org/drawingml/2006/main">
             <a:pPr algn="l">
+              <a:buNone/>
               <a:defRPr sz="975" b="1">
                 <a:solidFill>
                   <a:srgbClr val="A8C9B0"/>
@@ -9770,7 +9922,7 @@
             <a:r>
               <a:rPr sz="975" b="1">
                 <a:solidFill>
-                  <a:srgbClr val="A8C9B0"/>
+                  <a:srgbClr val="2C6B50"/>
                 </a:solidFill>
                 <a:latin typeface="Calibri"/>
                 <a:ea typeface="Calibri"/>
@@ -9817,7 +9969,7 @@
             <a:defPPr algn="l">
               <a:defRPr sz="1275" b="0">
                 <a:solidFill>
-                  <a:srgbClr val="FFFFFF"/>
+                  <a:srgbClr val="19332A"/>
                 </a:solidFill>
                 <a:latin typeface="Calibri"/>
                 <a:ea typeface="Calibri"/>
@@ -9827,6 +9979,7 @@
           </a:lstStyle>
           <a:p xmlns:a="http://schemas.openxmlformats.org/drawingml/2006/main">
             <a:pPr algn="l">
+              <a:buNone/>
               <a:defRPr sz="1275" b="0">
                 <a:solidFill>
                   <a:srgbClr val="FFFFFF"/>
@@ -9839,7 +9992,7 @@
             <a:r>
               <a:rPr sz="1275" b="0">
                 <a:solidFill>
-                  <a:srgbClr val="FFFFFF"/>
+                  <a:srgbClr val="19332A"/>
                 </a:solidFill>
                 <a:latin typeface="Calibri"/>
                 <a:ea typeface="Calibri"/>
@@ -9896,6 +10049,7 @@
           </a:lstStyle>
           <a:p xmlns:a="http://schemas.openxmlformats.org/drawingml/2006/main">
             <a:pPr algn="l">
+              <a:buNone/>
               <a:defRPr sz="1275" b="1">
                 <a:solidFill>
                   <a:srgbClr val="E9795B"/>
@@ -9955,7 +10109,7 @@
             <a:defPPr algn="l">
               <a:defRPr sz="975" b="1">
                 <a:solidFill>
-                  <a:srgbClr val="A8C9B0"/>
+                  <a:srgbClr val="2C6B50"/>
                 </a:solidFill>
                 <a:latin typeface="Calibri"/>
                 <a:ea typeface="Calibri"/>
@@ -9965,6 +10119,7 @@
           </a:lstStyle>
           <a:p xmlns:a="http://schemas.openxmlformats.org/drawingml/2006/main">
             <a:pPr algn="l">
+              <a:buNone/>
               <a:defRPr sz="975" b="1">
                 <a:solidFill>
                   <a:srgbClr val="A8C9B0"/>
@@ -9977,7 +10132,7 @@
             <a:r>
               <a:rPr sz="975" b="1">
                 <a:solidFill>
-                  <a:srgbClr val="A8C9B0"/>
+                  <a:srgbClr val="2C6B50"/>
                 </a:solidFill>
                 <a:latin typeface="Calibri"/>
                 <a:ea typeface="Calibri"/>
@@ -10024,7 +10179,7 @@
             <a:defPPr algn="l">
               <a:defRPr sz="1275" b="0">
                 <a:solidFill>
-                  <a:srgbClr val="FFFFFF"/>
+                  <a:srgbClr val="19332A"/>
                 </a:solidFill>
                 <a:latin typeface="Calibri"/>
                 <a:ea typeface="Calibri"/>
@@ -10034,6 +10189,7 @@
           </a:lstStyle>
           <a:p xmlns:a="http://schemas.openxmlformats.org/drawingml/2006/main">
             <a:pPr algn="l">
+              <a:buNone/>
               <a:defRPr sz="1275" b="0">
                 <a:solidFill>
                   <a:srgbClr val="FFFFFF"/>
@@ -10046,7 +10202,7 @@
             <a:r>
               <a:rPr sz="1275" b="0">
                 <a:solidFill>
-                  <a:srgbClr val="FFFFFF"/>
+                  <a:srgbClr val="19332A"/>
                 </a:solidFill>
                 <a:latin typeface="Calibri"/>
                 <a:ea typeface="Calibri"/>
@@ -10103,6 +10259,7 @@
           </a:lstStyle>
           <a:p xmlns:a="http://schemas.openxmlformats.org/drawingml/2006/main">
             <a:pPr algn="l">
+              <a:buNone/>
               <a:defRPr sz="1275" b="1">
                 <a:solidFill>
                   <a:srgbClr val="E9795B"/>
@@ -10162,7 +10319,7 @@
             <a:defPPr algn="l">
               <a:defRPr sz="975" b="1">
                 <a:solidFill>
-                  <a:srgbClr val="A8C9B0"/>
+                  <a:srgbClr val="2C6B50"/>
                 </a:solidFill>
                 <a:latin typeface="Calibri"/>
                 <a:ea typeface="Calibri"/>
@@ -10172,6 +10329,7 @@
           </a:lstStyle>
           <a:p xmlns:a="http://schemas.openxmlformats.org/drawingml/2006/main">
             <a:pPr algn="l">
+              <a:buNone/>
               <a:defRPr sz="975" b="1">
                 <a:solidFill>
                   <a:srgbClr val="A8C9B0"/>
@@ -10184,7 +10342,7 @@
             <a:r>
               <a:rPr sz="975" b="1">
                 <a:solidFill>
-                  <a:srgbClr val="A8C9B0"/>
+                  <a:srgbClr val="2C6B50"/>
                 </a:solidFill>
                 <a:latin typeface="Calibri"/>
                 <a:ea typeface="Calibri"/>
@@ -10231,7 +10389,7 @@
             <a:defPPr algn="l">
               <a:defRPr sz="1275" b="0">
                 <a:solidFill>
-                  <a:srgbClr val="FFFFFF"/>
+                  <a:srgbClr val="19332A"/>
                 </a:solidFill>
                 <a:latin typeface="Calibri"/>
                 <a:ea typeface="Calibri"/>
@@ -10241,6 +10399,7 @@
           </a:lstStyle>
           <a:p xmlns:a="http://schemas.openxmlformats.org/drawingml/2006/main">
             <a:pPr algn="l">
+              <a:buNone/>
               <a:defRPr sz="1275" b="0">
                 <a:solidFill>
                   <a:srgbClr val="FFFFFF"/>
@@ -10253,7 +10412,7 @@
             <a:r>
               <a:rPr sz="1275" b="0">
                 <a:solidFill>
-                  <a:srgbClr val="FFFFFF"/>
+                  <a:srgbClr val="19332A"/>
                 </a:solidFill>
                 <a:latin typeface="Calibri"/>
                 <a:ea typeface="Calibri"/>
@@ -10300,7 +10459,7 @@
             <a:defPPr algn="l">
               <a:defRPr sz="1125" b="1">
                 <a:solidFill>
-                  <a:srgbClr val="FFFFFF"/>
+                  <a:srgbClr val="60756A"/>
                 </a:solidFill>
                 <a:latin typeface="Calibri"/>
                 <a:ea typeface="Calibri"/>
@@ -10310,6 +10469,7 @@
           </a:lstStyle>
           <a:p xmlns:a="http://schemas.openxmlformats.org/drawingml/2006/main">
             <a:pPr algn="l">
+              <a:buNone/>
               <a:defRPr sz="1125" b="1">
                 <a:solidFill>
                   <a:srgbClr val="FFFFFF"/>
@@ -10322,13 +10482,82 @@
             <a:r>
               <a:rPr sz="1125" b="1">
                 <a:solidFill>
-                  <a:srgbClr val="FFFFFF"/>
+                  <a:srgbClr val="60756A"/>
                 </a:solidFill>
                 <a:latin typeface="Calibri"/>
                 <a:ea typeface="Calibri"/>
                 <a:cs typeface="Calibri"/>
               </a:rPr>
               <a:t>Prototype does not calculate material use, carbon, or device energy.</a:t>
+            </a:r>
+          </a:p>
+        </p:txBody>
+      </p:sp>
+      <p:sp>
+        <p:nvSpPr>
+          <p:cNvPr id="28" name="page-number">
+            <a:extLst xmlns:a="http://schemas.openxmlformats.org/drawingml/2006/main">
+              <a:ext uri="{FF2B5EF4-FFF2-40B4-BE49-F238E27FC236}">
+                <a16:creationId xmlns:a16="http://schemas.microsoft.com/office/drawing/2014/main" id="{AC22A0A5-57BD-450A-A4D4-ED01B1DE554F}"/>
+              </a:ext>
+            </a:extLst>
+          </p:cNvPr>
+          <p:cNvSpPr>
+            <a:spLocks xmlns:a="http://schemas.openxmlformats.org/drawingml/2006/main" noGrp="1"/>
+          </p:cNvSpPr>
+          <p:nvPr/>
+        </p:nvSpPr>
+        <p:spPr>
+          <a:xfrm xmlns:a="http://schemas.openxmlformats.org/drawingml/2006/main">
+            <a:off x="11163300" y="6362700"/>
+            <a:ext cx="457200" cy="171450"/>
+          </a:xfrm>
+          <a:prstGeom xmlns:a="http://schemas.openxmlformats.org/drawingml/2006/main" prst="rect">
+            <a:avLst/>
+          </a:prstGeom>
+          <a:noFill xmlns:a="http://schemas.openxmlformats.org/drawingml/2006/main"/>
+          <a:ln xmlns:a="http://schemas.openxmlformats.org/drawingml/2006/main" w="0">
+            <a:noFill/>
+            <a:prstDash val="solid"/>
+          </a:ln>
+        </p:spPr>
+        <p:txBody>
+          <a:bodyPr xmlns:a="http://schemas.openxmlformats.org/drawingml/2006/main" wrap="square" lIns="0" tIns="0" rIns="0" bIns="0" anchor="t">
+            <a:normAutofit fontScale="100000"/>
+          </a:bodyPr>
+          <a:lstStyle xmlns:a="http://schemas.openxmlformats.org/drawingml/2006/main">
+            <a:defPPr algn="r">
+              <a:defRPr sz="900" b="1">
+                <a:solidFill>
+                  <a:srgbClr val="60756A"/>
+                </a:solidFill>
+                <a:latin typeface="Calibri"/>
+                <a:ea typeface="Calibri"/>
+                <a:cs typeface="Calibri"/>
+              </a:defRPr>
+            </a:defPPr>
+          </a:lstStyle>
+          <a:p xmlns:a="http://schemas.openxmlformats.org/drawingml/2006/main">
+            <a:pPr algn="r">
+              <a:defRPr sz="900" b="1">
+                <a:solidFill>
+                  <a:srgbClr val="60756A"/>
+                </a:solidFill>
+                <a:latin typeface="Calibri"/>
+                <a:ea typeface="Calibri"/>
+                <a:cs typeface="Calibri"/>
+              </a:defRPr>
+            </a:pPr>
+            <a:r>
+              <a:rPr sz="900" b="1">
+                <a:solidFill>
+                  <a:srgbClr val="60756A"/>
+                </a:solidFill>
+                <a:latin typeface="Calibri"/>
+                <a:ea typeface="Calibri"/>
+                <a:cs typeface="Calibri"/>
+              </a:rPr>
+              <a:t>06</a:t>
             </a:r>
           </a:p>
         </p:txBody>
